--- a/LaTeX M.Sc. LRT/Aerodynamik/images/AER-Images.pptx
+++ b/LaTeX M.Sc. LRT/Aerodynamik/images/AER-Images.pptx
@@ -5,16 +5,18 @@
     <p:sldMasterId id="2147483660" r:id="rId1"/>
   </p:sldMasterIdLst>
   <p:notesMasterIdLst>
-    <p:notesMasterId r:id="rId9"/>
+    <p:notesMasterId r:id="rId11"/>
   </p:notesMasterIdLst>
   <p:sldIdLst>
     <p:sldId id="261" r:id="rId2"/>
     <p:sldId id="262" r:id="rId3"/>
-    <p:sldId id="256" r:id="rId4"/>
-    <p:sldId id="257" r:id="rId5"/>
-    <p:sldId id="258" r:id="rId6"/>
-    <p:sldId id="259" r:id="rId7"/>
-    <p:sldId id="260" r:id="rId8"/>
+    <p:sldId id="264" r:id="rId4"/>
+    <p:sldId id="263" r:id="rId5"/>
+    <p:sldId id="256" r:id="rId6"/>
+    <p:sldId id="257" r:id="rId7"/>
+    <p:sldId id="258" r:id="rId8"/>
+    <p:sldId id="259" r:id="rId9"/>
+    <p:sldId id="260" r:id="rId10"/>
   </p:sldIdLst>
   <p:sldSz cx="3600450" cy="3600450"/>
   <p:notesSz cx="6858000" cy="9144000"/>
@@ -203,7 +205,7 @@
           <a:p>
             <a:fld id="{0C596C2D-C72C-406E-B79E-9BAC142DD20E}" type="datetimeFigureOut">
               <a:rPr lang="de-DE" smtClean="0"/>
-              <a:t>12.06.2026</a:t>
+              <a:t>21.08.2026</a:t>
             </a:fld>
             <a:endParaRPr lang="de-DE" dirty="0"/>
           </a:p>
@@ -601,7 +603,7 @@
           <a:p>
             <a:fld id="{6EAE28AA-0912-4DA0-8B30-7F3CA3FE6671}" type="datetimeFigureOut">
               <a:rPr lang="de-DE" smtClean="0"/>
-              <a:t>12.06.2026</a:t>
+              <a:t>21.08.2026</a:t>
             </a:fld>
             <a:endParaRPr lang="de-DE" dirty="0"/>
           </a:p>
@@ -771,7 +773,7 @@
           <a:p>
             <a:fld id="{6EAE28AA-0912-4DA0-8B30-7F3CA3FE6671}" type="datetimeFigureOut">
               <a:rPr lang="de-DE" smtClean="0"/>
-              <a:t>12.06.2026</a:t>
+              <a:t>21.08.2026</a:t>
             </a:fld>
             <a:endParaRPr lang="de-DE" dirty="0"/>
           </a:p>
@@ -951,7 +953,7 @@
           <a:p>
             <a:fld id="{6EAE28AA-0912-4DA0-8B30-7F3CA3FE6671}" type="datetimeFigureOut">
               <a:rPr lang="de-DE" smtClean="0"/>
-              <a:t>12.06.2026</a:t>
+              <a:t>21.08.2026</a:t>
             </a:fld>
             <a:endParaRPr lang="de-DE" dirty="0"/>
           </a:p>
@@ -1121,7 +1123,7 @@
           <a:p>
             <a:fld id="{6EAE28AA-0912-4DA0-8B30-7F3CA3FE6671}" type="datetimeFigureOut">
               <a:rPr lang="de-DE" smtClean="0"/>
-              <a:t>12.06.2026</a:t>
+              <a:t>21.08.2026</a:t>
             </a:fld>
             <a:endParaRPr lang="de-DE" dirty="0"/>
           </a:p>
@@ -1367,7 +1369,7 @@
           <a:p>
             <a:fld id="{6EAE28AA-0912-4DA0-8B30-7F3CA3FE6671}" type="datetimeFigureOut">
               <a:rPr lang="de-DE" smtClean="0"/>
-              <a:t>12.06.2026</a:t>
+              <a:t>21.08.2026</a:t>
             </a:fld>
             <a:endParaRPr lang="de-DE" dirty="0"/>
           </a:p>
@@ -1599,7 +1601,7 @@
           <a:p>
             <a:fld id="{6EAE28AA-0912-4DA0-8B30-7F3CA3FE6671}" type="datetimeFigureOut">
               <a:rPr lang="de-DE" smtClean="0"/>
-              <a:t>12.06.2026</a:t>
+              <a:t>21.08.2026</a:t>
             </a:fld>
             <a:endParaRPr lang="de-DE" dirty="0"/>
           </a:p>
@@ -1966,7 +1968,7 @@
           <a:p>
             <a:fld id="{6EAE28AA-0912-4DA0-8B30-7F3CA3FE6671}" type="datetimeFigureOut">
               <a:rPr lang="de-DE" smtClean="0"/>
-              <a:t>12.06.2026</a:t>
+              <a:t>21.08.2026</a:t>
             </a:fld>
             <a:endParaRPr lang="de-DE" dirty="0"/>
           </a:p>
@@ -2084,7 +2086,7 @@
           <a:p>
             <a:fld id="{6EAE28AA-0912-4DA0-8B30-7F3CA3FE6671}" type="datetimeFigureOut">
               <a:rPr lang="de-DE" smtClean="0"/>
-              <a:t>12.06.2026</a:t>
+              <a:t>21.08.2026</a:t>
             </a:fld>
             <a:endParaRPr lang="de-DE" dirty="0"/>
           </a:p>
@@ -2179,7 +2181,7 @@
           <a:p>
             <a:fld id="{6EAE28AA-0912-4DA0-8B30-7F3CA3FE6671}" type="datetimeFigureOut">
               <a:rPr lang="de-DE" smtClean="0"/>
-              <a:t>12.06.2026</a:t>
+              <a:t>21.08.2026</a:t>
             </a:fld>
             <a:endParaRPr lang="de-DE" dirty="0"/>
           </a:p>
@@ -2456,7 +2458,7 @@
           <a:p>
             <a:fld id="{6EAE28AA-0912-4DA0-8B30-7F3CA3FE6671}" type="datetimeFigureOut">
               <a:rPr lang="de-DE" smtClean="0"/>
-              <a:t>12.06.2026</a:t>
+              <a:t>21.08.2026</a:t>
             </a:fld>
             <a:endParaRPr lang="de-DE" dirty="0"/>
           </a:p>
@@ -2713,7 +2715,7 @@
           <a:p>
             <a:fld id="{6EAE28AA-0912-4DA0-8B30-7F3CA3FE6671}" type="datetimeFigureOut">
               <a:rPr lang="de-DE" smtClean="0"/>
-              <a:t>12.06.2026</a:t>
+              <a:t>21.08.2026</a:t>
             </a:fld>
             <a:endParaRPr lang="de-DE" dirty="0"/>
           </a:p>
@@ -2926,7 +2928,7 @@
           <a:p>
             <a:fld id="{6EAE28AA-0912-4DA0-8B30-7F3CA3FE6671}" type="datetimeFigureOut">
               <a:rPr lang="de-DE" smtClean="0"/>
-              <a:t>12.06.2026</a:t>
+              <a:t>21.08.2026</a:t>
             </a:fld>
             <a:endParaRPr lang="de-DE" dirty="0"/>
           </a:p>
@@ -5111,6 +5113,2788 @@
           <a:chExt cx="0" cy="0"/>
         </a:xfrm>
       </p:grpSpPr>
+      <p:sp>
+        <p:nvSpPr>
+          <p:cNvPr id="112" name="Bogen 111">
+            <a:extLst>
+              <a:ext uri="{FF2B5EF4-FFF2-40B4-BE49-F238E27FC236}">
+                <a16:creationId xmlns:a16="http://schemas.microsoft.com/office/drawing/2014/main" id="{04F5DCF1-C6BC-42B7-903D-4F37214858B7}"/>
+              </a:ext>
+            </a:extLst>
+          </p:cNvPr>
+          <p:cNvSpPr/>
+          <p:nvPr/>
+        </p:nvSpPr>
+        <p:spPr>
+          <a:xfrm>
+            <a:off x="-1244893" y="-20248"/>
+            <a:ext cx="3973754" cy="3973754"/>
+          </a:xfrm>
+          <a:prstGeom prst="arc">
+            <a:avLst>
+              <a:gd name="adj1" fmla="val 2897"/>
+              <a:gd name="adj2" fmla="val 808961"/>
+            </a:avLst>
+          </a:prstGeom>
+          <a:ln w="12700" cap="rnd">
+            <a:solidFill>
+              <a:schemeClr val="accent2">
+                <a:lumMod val="75000"/>
+              </a:schemeClr>
+            </a:solidFill>
+            <a:round/>
+            <a:headEnd type="none" w="sm" len="sm"/>
+            <a:tailEnd type="triangle" w="med" len="med"/>
+          </a:ln>
+        </p:spPr>
+        <p:style>
+          <a:lnRef idx="2">
+            <a:schemeClr val="accent1"/>
+          </a:lnRef>
+          <a:fillRef idx="0">
+            <a:schemeClr val="accent1"/>
+          </a:fillRef>
+          <a:effectRef idx="1">
+            <a:schemeClr val="accent1"/>
+          </a:effectRef>
+          <a:fontRef idx="minor">
+            <a:schemeClr val="tx1"/>
+          </a:fontRef>
+        </p:style>
+        <p:txBody>
+          <a:bodyPr rtlCol="0" anchor="ctr"/>
+          <a:lstStyle/>
+          <a:p>
+            <a:pPr algn="ctr"/>
+            <a:endParaRPr lang="de-DE"/>
+          </a:p>
+        </p:txBody>
+      </p:sp>
+      <p:sp>
+        <p:nvSpPr>
+          <p:cNvPr id="107" name="Bogen 106">
+            <a:extLst>
+              <a:ext uri="{FF2B5EF4-FFF2-40B4-BE49-F238E27FC236}">
+                <a16:creationId xmlns:a16="http://schemas.microsoft.com/office/drawing/2014/main" id="{3BCE6A63-2FA3-1C09-1191-931D1C9A3616}"/>
+              </a:ext>
+            </a:extLst>
+          </p:cNvPr>
+          <p:cNvSpPr/>
+          <p:nvPr/>
+        </p:nvSpPr>
+        <p:spPr>
+          <a:xfrm>
+            <a:off x="1976645" y="930831"/>
+            <a:ext cx="2072278" cy="2072278"/>
+          </a:xfrm>
+          <a:prstGeom prst="arc">
+            <a:avLst>
+              <a:gd name="adj1" fmla="val 10799897"/>
+              <a:gd name="adj2" fmla="val 11773488"/>
+            </a:avLst>
+          </a:prstGeom>
+          <a:ln w="12700" cap="rnd">
+            <a:solidFill>
+              <a:schemeClr val="tx2">
+                <a:lumMod val="75000"/>
+                <a:lumOff val="25000"/>
+              </a:schemeClr>
+            </a:solidFill>
+            <a:round/>
+            <a:headEnd type="none" w="sm" len="sm"/>
+            <a:tailEnd type="triangle" w="med" len="med"/>
+          </a:ln>
+        </p:spPr>
+        <p:style>
+          <a:lnRef idx="2">
+            <a:schemeClr val="accent1"/>
+          </a:lnRef>
+          <a:fillRef idx="0">
+            <a:schemeClr val="accent1"/>
+          </a:fillRef>
+          <a:effectRef idx="1">
+            <a:schemeClr val="accent1"/>
+          </a:effectRef>
+          <a:fontRef idx="minor">
+            <a:schemeClr val="tx1"/>
+          </a:fontRef>
+        </p:style>
+        <p:txBody>
+          <a:bodyPr rtlCol="0" anchor="ctr"/>
+          <a:lstStyle/>
+          <a:p>
+            <a:pPr algn="ctr"/>
+            <a:endParaRPr lang="de-DE"/>
+          </a:p>
+        </p:txBody>
+      </p:sp>
+      <p:cxnSp>
+        <p:nvCxnSpPr>
+          <p:cNvPr id="27" name="Gerader Verbinder 26">
+            <a:extLst>
+              <a:ext uri="{FF2B5EF4-FFF2-40B4-BE49-F238E27FC236}">
+                <a16:creationId xmlns:a16="http://schemas.microsoft.com/office/drawing/2014/main" id="{453BC48D-6BD2-D25B-237D-0C3EAE2A0000}"/>
+              </a:ext>
+            </a:extLst>
+          </p:cNvPr>
+          <p:cNvCxnSpPr>
+            <a:cxnSpLocks/>
+          </p:cNvCxnSpPr>
+          <p:nvPr/>
+        </p:nvCxnSpPr>
+        <p:spPr>
+          <a:xfrm>
+            <a:off x="767228" y="1493701"/>
+            <a:ext cx="1094910" cy="0"/>
+          </a:xfrm>
+          <a:prstGeom prst="line">
+            <a:avLst/>
+          </a:prstGeom>
+          <a:ln w="9525" cap="rnd">
+            <a:solidFill>
+              <a:schemeClr val="accent6">
+                <a:lumMod val="75000"/>
+              </a:schemeClr>
+            </a:solidFill>
+            <a:prstDash val="sysDash"/>
+            <a:round/>
+          </a:ln>
+        </p:spPr>
+        <p:style>
+          <a:lnRef idx="2">
+            <a:schemeClr val="accent1"/>
+          </a:lnRef>
+          <a:fillRef idx="0">
+            <a:schemeClr val="accent1"/>
+          </a:fillRef>
+          <a:effectRef idx="1">
+            <a:schemeClr val="accent1"/>
+          </a:effectRef>
+          <a:fontRef idx="minor">
+            <a:schemeClr val="tx1"/>
+          </a:fontRef>
+        </p:style>
+      </p:cxnSp>
+      <p:grpSp>
+        <p:nvGrpSpPr>
+          <p:cNvPr id="14" name="Gruppieren 13">
+            <a:extLst>
+              <a:ext uri="{FF2B5EF4-FFF2-40B4-BE49-F238E27FC236}">
+                <a16:creationId xmlns:a16="http://schemas.microsoft.com/office/drawing/2014/main" id="{89B54080-D4D6-AA94-A2FB-CFCAD04DE0A0}"/>
+              </a:ext>
+            </a:extLst>
+          </p:cNvPr>
+          <p:cNvGrpSpPr/>
+          <p:nvPr/>
+        </p:nvGrpSpPr>
+        <p:grpSpPr>
+          <a:xfrm>
+            <a:off x="3217688" y="1726119"/>
+            <a:ext cx="297655" cy="495659"/>
+            <a:chOff x="2818943" y="1913621"/>
+            <a:chExt cx="297655" cy="495659"/>
+          </a:xfrm>
+        </p:grpSpPr>
+        <p:cxnSp>
+          <p:nvCxnSpPr>
+            <p:cNvPr id="7" name="Gerader Verbinder 6">
+              <a:extLst>
+                <a:ext uri="{FF2B5EF4-FFF2-40B4-BE49-F238E27FC236}">
+                  <a16:creationId xmlns:a16="http://schemas.microsoft.com/office/drawing/2014/main" id="{937F024C-E0CE-29AD-4A69-50C7D45F4728}"/>
+                </a:ext>
+              </a:extLst>
+            </p:cNvPr>
+            <p:cNvCxnSpPr>
+              <a:cxnSpLocks/>
+            </p:cNvCxnSpPr>
+            <p:nvPr/>
+          </p:nvCxnSpPr>
+          <p:spPr>
+            <a:xfrm>
+              <a:off x="2917031" y="2152650"/>
+              <a:ext cx="132274" cy="0"/>
+            </a:xfrm>
+            <a:prstGeom prst="line">
+              <a:avLst/>
+            </a:prstGeom>
+            <a:ln w="9525" cap="rnd">
+              <a:round/>
+            </a:ln>
+          </p:spPr>
+          <p:style>
+            <a:lnRef idx="2">
+              <a:schemeClr val="dk1"/>
+            </a:lnRef>
+            <a:fillRef idx="0">
+              <a:schemeClr val="dk1"/>
+            </a:fillRef>
+            <a:effectRef idx="1">
+              <a:schemeClr val="dk1"/>
+            </a:effectRef>
+            <a:fontRef idx="minor">
+              <a:schemeClr val="tx1"/>
+            </a:fontRef>
+          </p:style>
+        </p:cxnSp>
+        <p:sp>
+          <p:nvSpPr>
+            <p:cNvPr id="9" name="Textfeld 8">
+              <a:extLst>
+                <a:ext uri="{FF2B5EF4-FFF2-40B4-BE49-F238E27FC236}">
+                  <a16:creationId xmlns:a16="http://schemas.microsoft.com/office/drawing/2014/main" id="{BAF698DC-FA0C-426C-9404-BD71C453BA1F}"/>
+                </a:ext>
+              </a:extLst>
+            </p:cNvPr>
+            <p:cNvSpPr txBox="1"/>
+            <p:nvPr/>
+          </p:nvSpPr>
+          <p:spPr>
+            <a:xfrm>
+              <a:off x="2821323" y="1913621"/>
+              <a:ext cx="295275" cy="307777"/>
+            </a:xfrm>
+            <a:prstGeom prst="rect">
+              <a:avLst/>
+            </a:prstGeom>
+            <a:noFill/>
+          </p:spPr>
+          <p:txBody>
+            <a:bodyPr wrap="square" rtlCol="0">
+              <a:spAutoFit/>
+            </a:bodyPr>
+            <a:lstStyle/>
+            <a:p>
+              <a:pPr algn="ctr"/>
+              <a:r>
+                <a:rPr lang="de-DE" sz="1400" i="1" dirty="0">
+                  <a:latin typeface="CMU Serif" panose="02000603000000000000" pitchFamily="2" charset="0"/>
+                  <a:ea typeface="CMU Serif" panose="02000603000000000000" pitchFamily="2" charset="0"/>
+                  <a:cs typeface="CMU Serif" panose="02000603000000000000" pitchFamily="2" charset="0"/>
+                </a:rPr>
+                <a:t>x</a:t>
+              </a:r>
+            </a:p>
+          </p:txBody>
+        </p:sp>
+        <p:sp>
+          <p:nvSpPr>
+            <p:cNvPr id="11" name="Textfeld 10">
+              <a:extLst>
+                <a:ext uri="{FF2B5EF4-FFF2-40B4-BE49-F238E27FC236}">
+                  <a16:creationId xmlns:a16="http://schemas.microsoft.com/office/drawing/2014/main" id="{D8AAA2D7-F45A-DB20-FFFD-04070662CF77}"/>
+                </a:ext>
+              </a:extLst>
+            </p:cNvPr>
+            <p:cNvSpPr txBox="1"/>
+            <p:nvPr/>
+          </p:nvSpPr>
+          <p:spPr>
+            <a:xfrm>
+              <a:off x="2818943" y="2101503"/>
+              <a:ext cx="295275" cy="307777"/>
+            </a:xfrm>
+            <a:prstGeom prst="rect">
+              <a:avLst/>
+            </a:prstGeom>
+            <a:noFill/>
+          </p:spPr>
+          <p:txBody>
+            <a:bodyPr wrap="square" rtlCol="0">
+              <a:spAutoFit/>
+            </a:bodyPr>
+            <a:lstStyle/>
+            <a:p>
+              <a:pPr algn="ctr"/>
+              <a:r>
+                <a:rPr lang="de-DE" sz="1400" i="1" dirty="0">
+                  <a:latin typeface="CMU Serif" panose="02000603000000000000" pitchFamily="2" charset="0"/>
+                  <a:ea typeface="CMU Serif" panose="02000603000000000000" pitchFamily="2" charset="0"/>
+                  <a:cs typeface="CMU Serif" panose="02000603000000000000" pitchFamily="2" charset="0"/>
+                </a:rPr>
+                <a:t>t</a:t>
+              </a:r>
+            </a:p>
+          </p:txBody>
+        </p:sp>
+        <p:cxnSp>
+          <p:nvCxnSpPr>
+            <p:cNvPr id="12" name="Gerader Verbinder 11">
+              <a:extLst>
+                <a:ext uri="{FF2B5EF4-FFF2-40B4-BE49-F238E27FC236}">
+                  <a16:creationId xmlns:a16="http://schemas.microsoft.com/office/drawing/2014/main" id="{331DD641-0D8D-BECA-7277-6338168DD72B}"/>
+                </a:ext>
+              </a:extLst>
+            </p:cNvPr>
+            <p:cNvCxnSpPr>
+              <a:cxnSpLocks/>
+            </p:cNvCxnSpPr>
+            <p:nvPr/>
+          </p:nvCxnSpPr>
+          <p:spPr>
+            <a:xfrm>
+              <a:off x="2961354" y="2006371"/>
+              <a:ext cx="45088" cy="0"/>
+            </a:xfrm>
+            <a:prstGeom prst="line">
+              <a:avLst/>
+            </a:prstGeom>
+            <a:ln w="6350" cap="sq">
+              <a:round/>
+            </a:ln>
+          </p:spPr>
+          <p:style>
+            <a:lnRef idx="2">
+              <a:schemeClr val="dk1"/>
+            </a:lnRef>
+            <a:fillRef idx="0">
+              <a:schemeClr val="dk1"/>
+            </a:fillRef>
+            <a:effectRef idx="1">
+              <a:schemeClr val="dk1"/>
+            </a:effectRef>
+            <a:fontRef idx="minor">
+              <a:schemeClr val="tx1"/>
+            </a:fontRef>
+          </p:style>
+        </p:cxnSp>
+      </p:grpSp>
+      <p:grpSp>
+        <p:nvGrpSpPr>
+          <p:cNvPr id="15" name="Gruppieren 14">
+            <a:extLst>
+              <a:ext uri="{FF2B5EF4-FFF2-40B4-BE49-F238E27FC236}">
+                <a16:creationId xmlns:a16="http://schemas.microsoft.com/office/drawing/2014/main" id="{645D39D7-F402-76FE-0B00-05165234E951}"/>
+              </a:ext>
+            </a:extLst>
+          </p:cNvPr>
+          <p:cNvGrpSpPr/>
+          <p:nvPr/>
+        </p:nvGrpSpPr>
+        <p:grpSpPr>
+          <a:xfrm>
+            <a:off x="749367" y="670774"/>
+            <a:ext cx="370706" cy="509527"/>
+            <a:chOff x="2794809" y="1896424"/>
+            <a:chExt cx="370706" cy="509527"/>
+          </a:xfrm>
+        </p:grpSpPr>
+        <p:cxnSp>
+          <p:nvCxnSpPr>
+            <p:cNvPr id="16" name="Gerader Verbinder 15">
+              <a:extLst>
+                <a:ext uri="{FF2B5EF4-FFF2-40B4-BE49-F238E27FC236}">
+                  <a16:creationId xmlns:a16="http://schemas.microsoft.com/office/drawing/2014/main" id="{B0408617-AFEC-0F84-FCFF-6B687B21CA0C}"/>
+                </a:ext>
+              </a:extLst>
+            </p:cNvPr>
+            <p:cNvCxnSpPr>
+              <a:cxnSpLocks/>
+            </p:cNvCxnSpPr>
+            <p:nvPr/>
+          </p:nvCxnSpPr>
+          <p:spPr>
+            <a:xfrm>
+              <a:off x="2917031" y="2152650"/>
+              <a:ext cx="134145" cy="0"/>
+            </a:xfrm>
+            <a:prstGeom prst="line">
+              <a:avLst/>
+            </a:prstGeom>
+            <a:ln w="9525" cap="rnd">
+              <a:round/>
+            </a:ln>
+          </p:spPr>
+          <p:style>
+            <a:lnRef idx="2">
+              <a:schemeClr val="dk1"/>
+            </a:lnRef>
+            <a:fillRef idx="0">
+              <a:schemeClr val="dk1"/>
+            </a:fillRef>
+            <a:effectRef idx="1">
+              <a:schemeClr val="dk1"/>
+            </a:effectRef>
+            <a:fontRef idx="minor">
+              <a:schemeClr val="tx1"/>
+            </a:fontRef>
+          </p:style>
+        </p:cxnSp>
+        <p:sp>
+          <p:nvSpPr>
+            <p:cNvPr id="17" name="Textfeld 16">
+              <a:extLst>
+                <a:ext uri="{FF2B5EF4-FFF2-40B4-BE49-F238E27FC236}">
+                  <a16:creationId xmlns:a16="http://schemas.microsoft.com/office/drawing/2014/main" id="{9BAFC275-6F8C-7B94-8ECE-02D43025F532}"/>
+                </a:ext>
+              </a:extLst>
+            </p:cNvPr>
+            <p:cNvSpPr txBox="1"/>
+            <p:nvPr/>
+          </p:nvSpPr>
+          <p:spPr>
+            <a:xfrm>
+              <a:off x="2794809" y="1896424"/>
+              <a:ext cx="370706" cy="307777"/>
+            </a:xfrm>
+            <a:prstGeom prst="rect">
+              <a:avLst/>
+            </a:prstGeom>
+            <a:noFill/>
+          </p:spPr>
+          <p:txBody>
+            <a:bodyPr wrap="square" rtlCol="0">
+              <a:spAutoFit/>
+            </a:bodyPr>
+            <a:lstStyle/>
+            <a:p>
+              <a:pPr algn="ctr"/>
+              <a:r>
+                <a:rPr lang="de-DE" sz="1400" i="1" dirty="0" err="1">
+                  <a:latin typeface="CMU Serif" panose="02000603000000000000" pitchFamily="2" charset="0"/>
+                  <a:ea typeface="CMU Serif" panose="02000603000000000000" pitchFamily="2" charset="0"/>
+                  <a:cs typeface="CMU Serif" panose="02000603000000000000" pitchFamily="2" charset="0"/>
+                </a:rPr>
+                <a:t>z</a:t>
+              </a:r>
+              <a:r>
+                <a:rPr lang="de-DE" sz="1400" i="1" baseline="-25000" dirty="0" err="1">
+                  <a:latin typeface="CMU Serif" panose="02000603000000000000" pitchFamily="2" charset="0"/>
+                  <a:ea typeface="CMU Serif" panose="02000603000000000000" pitchFamily="2" charset="0"/>
+                  <a:cs typeface="CMU Serif" panose="02000603000000000000" pitchFamily="2" charset="0"/>
+                </a:rPr>
+                <a:t>i</a:t>
+              </a:r>
+              <a:endParaRPr lang="de-DE" sz="1400" i="1" baseline="-25000" dirty="0">
+                <a:latin typeface="CMU Serif" panose="02000603000000000000" pitchFamily="2" charset="0"/>
+                <a:ea typeface="CMU Serif" panose="02000603000000000000" pitchFamily="2" charset="0"/>
+                <a:cs typeface="CMU Serif" panose="02000603000000000000" pitchFamily="2" charset="0"/>
+              </a:endParaRPr>
+            </a:p>
+          </p:txBody>
+        </p:sp>
+        <p:sp>
+          <p:nvSpPr>
+            <p:cNvPr id="18" name="Textfeld 17">
+              <a:extLst>
+                <a:ext uri="{FF2B5EF4-FFF2-40B4-BE49-F238E27FC236}">
+                  <a16:creationId xmlns:a16="http://schemas.microsoft.com/office/drawing/2014/main" id="{B4F68DF5-FCED-DD46-C21F-0FBE6EB6AD40}"/>
+                </a:ext>
+              </a:extLst>
+            </p:cNvPr>
+            <p:cNvSpPr txBox="1"/>
+            <p:nvPr/>
+          </p:nvSpPr>
+          <p:spPr>
+            <a:xfrm>
+              <a:off x="2815033" y="2098174"/>
+              <a:ext cx="295275" cy="307777"/>
+            </a:xfrm>
+            <a:prstGeom prst="rect">
+              <a:avLst/>
+            </a:prstGeom>
+            <a:noFill/>
+          </p:spPr>
+          <p:txBody>
+            <a:bodyPr wrap="square" rtlCol="0">
+              <a:spAutoFit/>
+            </a:bodyPr>
+            <a:lstStyle/>
+            <a:p>
+              <a:pPr algn="ctr"/>
+              <a:r>
+                <a:rPr lang="de-DE" sz="1400" i="1" dirty="0">
+                  <a:latin typeface="CMU Serif" panose="02000603000000000000" pitchFamily="2" charset="0"/>
+                  <a:ea typeface="CMU Serif" panose="02000603000000000000" pitchFamily="2" charset="0"/>
+                  <a:cs typeface="CMU Serif" panose="02000603000000000000" pitchFamily="2" charset="0"/>
+                </a:rPr>
+                <a:t>t</a:t>
+              </a:r>
+            </a:p>
+          </p:txBody>
+        </p:sp>
+        <p:cxnSp>
+          <p:nvCxnSpPr>
+            <p:cNvPr id="19" name="Gerader Verbinder 18">
+              <a:extLst>
+                <a:ext uri="{FF2B5EF4-FFF2-40B4-BE49-F238E27FC236}">
+                  <a16:creationId xmlns:a16="http://schemas.microsoft.com/office/drawing/2014/main" id="{AD13F007-62EA-3298-F1BD-A0D6B01C3E94}"/>
+                </a:ext>
+              </a:extLst>
+            </p:cNvPr>
+            <p:cNvCxnSpPr>
+              <a:cxnSpLocks/>
+            </p:cNvCxnSpPr>
+            <p:nvPr/>
+          </p:nvCxnSpPr>
+          <p:spPr>
+            <a:xfrm>
+              <a:off x="2961982" y="1992880"/>
+              <a:ext cx="38341" cy="0"/>
+            </a:xfrm>
+            <a:prstGeom prst="line">
+              <a:avLst/>
+            </a:prstGeom>
+            <a:ln w="6350" cap="sq">
+              <a:round/>
+            </a:ln>
+          </p:spPr>
+          <p:style>
+            <a:lnRef idx="2">
+              <a:schemeClr val="dk1"/>
+            </a:lnRef>
+            <a:fillRef idx="0">
+              <a:schemeClr val="dk1"/>
+            </a:fillRef>
+            <a:effectRef idx="1">
+              <a:schemeClr val="dk1"/>
+            </a:effectRef>
+            <a:fontRef idx="minor">
+              <a:schemeClr val="tx1"/>
+            </a:fontRef>
+          </p:style>
+        </p:cxnSp>
+      </p:grpSp>
+      <p:cxnSp>
+        <p:nvCxnSpPr>
+          <p:cNvPr id="32" name="Gerader Verbinder 31">
+            <a:extLst>
+              <a:ext uri="{FF2B5EF4-FFF2-40B4-BE49-F238E27FC236}">
+                <a16:creationId xmlns:a16="http://schemas.microsoft.com/office/drawing/2014/main" id="{CAD4F6CE-908C-CADC-4B1C-F148A3018359}"/>
+              </a:ext>
+            </a:extLst>
+          </p:cNvPr>
+          <p:cNvCxnSpPr>
+            <a:cxnSpLocks/>
+          </p:cNvCxnSpPr>
+          <p:nvPr/>
+        </p:nvCxnSpPr>
+        <p:spPr>
+          <a:xfrm>
+            <a:off x="767228" y="2510493"/>
+            <a:ext cx="2247435" cy="0"/>
+          </a:xfrm>
+          <a:prstGeom prst="line">
+            <a:avLst/>
+          </a:prstGeom>
+          <a:ln w="9525" cap="rnd">
+            <a:solidFill>
+              <a:schemeClr val="accent2">
+                <a:lumMod val="75000"/>
+              </a:schemeClr>
+            </a:solidFill>
+            <a:prstDash val="sysDash"/>
+            <a:round/>
+          </a:ln>
+        </p:spPr>
+        <p:style>
+          <a:lnRef idx="2">
+            <a:schemeClr val="accent1"/>
+          </a:lnRef>
+          <a:fillRef idx="0">
+            <a:schemeClr val="accent1"/>
+          </a:fillRef>
+          <a:effectRef idx="1">
+            <a:schemeClr val="accent1"/>
+          </a:effectRef>
+          <a:fontRef idx="minor">
+            <a:schemeClr val="tx1"/>
+          </a:fontRef>
+        </p:style>
+      </p:cxnSp>
+      <p:cxnSp>
+        <p:nvCxnSpPr>
+          <p:cNvPr id="34" name="Gerader Verbinder 33">
+            <a:extLst>
+              <a:ext uri="{FF2B5EF4-FFF2-40B4-BE49-F238E27FC236}">
+                <a16:creationId xmlns:a16="http://schemas.microsoft.com/office/drawing/2014/main" id="{8A79E886-09FA-D72B-7905-596213EBBF7B}"/>
+              </a:ext>
+            </a:extLst>
+          </p:cNvPr>
+          <p:cNvCxnSpPr>
+            <a:cxnSpLocks/>
+          </p:cNvCxnSpPr>
+          <p:nvPr/>
+        </p:nvCxnSpPr>
+        <p:spPr>
+          <a:xfrm>
+            <a:off x="738648" y="1965148"/>
+            <a:ext cx="2276013" cy="544689"/>
+          </a:xfrm>
+          <a:prstGeom prst="line">
+            <a:avLst/>
+          </a:prstGeom>
+          <a:ln w="9525" cap="rnd">
+            <a:solidFill>
+              <a:schemeClr val="accent2">
+                <a:lumMod val="75000"/>
+              </a:schemeClr>
+            </a:solidFill>
+            <a:prstDash val="sysDash"/>
+            <a:round/>
+          </a:ln>
+        </p:spPr>
+        <p:style>
+          <a:lnRef idx="2">
+            <a:schemeClr val="accent1"/>
+          </a:lnRef>
+          <a:fillRef idx="0">
+            <a:schemeClr val="accent1"/>
+          </a:fillRef>
+          <a:effectRef idx="1">
+            <a:schemeClr val="accent1"/>
+          </a:effectRef>
+          <a:fontRef idx="minor">
+            <a:schemeClr val="tx1"/>
+          </a:fontRef>
+        </p:style>
+      </p:cxnSp>
+      <p:cxnSp>
+        <p:nvCxnSpPr>
+          <p:cNvPr id="3" name="Gerade Verbindung mit Pfeil 2">
+            <a:extLst>
+              <a:ext uri="{FF2B5EF4-FFF2-40B4-BE49-F238E27FC236}">
+                <a16:creationId xmlns:a16="http://schemas.microsoft.com/office/drawing/2014/main" id="{20077038-76F6-0F2E-C7A6-C76EABDDD354}"/>
+              </a:ext>
+            </a:extLst>
+          </p:cNvPr>
+          <p:cNvCxnSpPr>
+            <a:cxnSpLocks/>
+          </p:cNvCxnSpPr>
+          <p:nvPr/>
+        </p:nvCxnSpPr>
+        <p:spPr>
+          <a:xfrm flipV="1">
+            <a:off x="738648" y="888205"/>
+            <a:ext cx="0" cy="1824039"/>
+          </a:xfrm>
+          <a:prstGeom prst="straightConnector1">
+            <a:avLst/>
+          </a:prstGeom>
+          <a:ln cap="rnd">
+            <a:round/>
+            <a:tailEnd type="triangle"/>
+          </a:ln>
+        </p:spPr>
+        <p:style>
+          <a:lnRef idx="2">
+            <a:schemeClr val="dk1"/>
+          </a:lnRef>
+          <a:fillRef idx="0">
+            <a:schemeClr val="dk1"/>
+          </a:fillRef>
+          <a:effectRef idx="1">
+            <a:schemeClr val="dk1"/>
+          </a:effectRef>
+          <a:fontRef idx="minor">
+            <a:schemeClr val="tx1"/>
+          </a:fontRef>
+        </p:style>
+      </p:cxnSp>
+      <p:cxnSp>
+        <p:nvCxnSpPr>
+          <p:cNvPr id="4" name="Gerade Verbindung mit Pfeil 3">
+            <a:extLst>
+              <a:ext uri="{FF2B5EF4-FFF2-40B4-BE49-F238E27FC236}">
+                <a16:creationId xmlns:a16="http://schemas.microsoft.com/office/drawing/2014/main" id="{D00EDF71-6A13-262B-5688-4580747AC6A5}"/>
+              </a:ext>
+            </a:extLst>
+          </p:cNvPr>
+          <p:cNvCxnSpPr>
+            <a:cxnSpLocks/>
+          </p:cNvCxnSpPr>
+          <p:nvPr/>
+        </p:nvCxnSpPr>
+        <p:spPr>
+          <a:xfrm>
+            <a:off x="738648" y="1966682"/>
+            <a:ext cx="2506536" cy="0"/>
+          </a:xfrm>
+          <a:prstGeom prst="straightConnector1">
+            <a:avLst/>
+          </a:prstGeom>
+          <a:ln cap="rnd">
+            <a:round/>
+            <a:tailEnd type="triangle"/>
+          </a:ln>
+        </p:spPr>
+        <p:style>
+          <a:lnRef idx="2">
+            <a:schemeClr val="dk1"/>
+          </a:lnRef>
+          <a:fillRef idx="0">
+            <a:schemeClr val="dk1"/>
+          </a:fillRef>
+          <a:effectRef idx="1">
+            <a:schemeClr val="dk1"/>
+          </a:effectRef>
+          <a:fontRef idx="minor">
+            <a:schemeClr val="tx1"/>
+          </a:fontRef>
+        </p:style>
+      </p:cxnSp>
+      <p:cxnSp>
+        <p:nvCxnSpPr>
+          <p:cNvPr id="35" name="Gerader Verbinder 34">
+            <a:extLst>
+              <a:ext uri="{FF2B5EF4-FFF2-40B4-BE49-F238E27FC236}">
+                <a16:creationId xmlns:a16="http://schemas.microsoft.com/office/drawing/2014/main" id="{5D821EC9-6D0A-96BA-B6EA-F80A1D9F2C33}"/>
+              </a:ext>
+            </a:extLst>
+          </p:cNvPr>
+          <p:cNvCxnSpPr>
+            <a:cxnSpLocks/>
+          </p:cNvCxnSpPr>
+          <p:nvPr/>
+        </p:nvCxnSpPr>
+        <p:spPr>
+          <a:xfrm flipV="1">
+            <a:off x="3012281" y="1909779"/>
+            <a:ext cx="0" cy="109521"/>
+          </a:xfrm>
+          <a:prstGeom prst="line">
+            <a:avLst/>
+          </a:prstGeom>
+          <a:ln w="12700" cap="rnd">
+            <a:solidFill>
+              <a:schemeClr val="tx1"/>
+            </a:solidFill>
+            <a:prstDash val="solid"/>
+            <a:round/>
+          </a:ln>
+        </p:spPr>
+        <p:style>
+          <a:lnRef idx="2">
+            <a:schemeClr val="accent1"/>
+          </a:lnRef>
+          <a:fillRef idx="0">
+            <a:schemeClr val="accent1"/>
+          </a:fillRef>
+          <a:effectRef idx="1">
+            <a:schemeClr val="accent1"/>
+          </a:effectRef>
+          <a:fontRef idx="minor">
+            <a:schemeClr val="tx1"/>
+          </a:fontRef>
+        </p:style>
+      </p:cxnSp>
+      <p:sp>
+        <p:nvSpPr>
+          <p:cNvPr id="41" name="Freihandform: Form 40">
+            <a:extLst>
+              <a:ext uri="{FF2B5EF4-FFF2-40B4-BE49-F238E27FC236}">
+                <a16:creationId xmlns:a16="http://schemas.microsoft.com/office/drawing/2014/main" id="{E8E14171-6560-FF27-1C62-146DED2131B9}"/>
+              </a:ext>
+            </a:extLst>
+          </p:cNvPr>
+          <p:cNvSpPr/>
+          <p:nvPr/>
+        </p:nvSpPr>
+        <p:spPr>
+          <a:xfrm>
+            <a:off x="741029" y="1850185"/>
+            <a:ext cx="2271251" cy="784599"/>
+          </a:xfrm>
+          <a:custGeom>
+            <a:avLst/>
+            <a:gdLst>
+              <a:gd name="csX0" fmla="*/ 0 w 2278857"/>
+              <a:gd name="csY0" fmla="*/ 145011 h 836190"/>
+              <a:gd name="csX1" fmla="*/ 504825 w 2278857"/>
+              <a:gd name="csY1" fmla="*/ 11661 h 836190"/>
+              <a:gd name="csX2" fmla="*/ 1116807 w 2278857"/>
+              <a:gd name="csY2" fmla="*/ 409330 h 836190"/>
+              <a:gd name="csX3" fmla="*/ 1671638 w 2278857"/>
+              <a:gd name="csY3" fmla="*/ 823668 h 836190"/>
+              <a:gd name="csX4" fmla="*/ 2278857 w 2278857"/>
+              <a:gd name="csY4" fmla="*/ 687936 h 836190"/>
+              <a:gd name="csX0" fmla="*/ 0 w 2278857"/>
+              <a:gd name="csY0" fmla="*/ 145011 h 836190"/>
+              <a:gd name="csX1" fmla="*/ 504825 w 2278857"/>
+              <a:gd name="csY1" fmla="*/ 11661 h 836190"/>
+              <a:gd name="csX2" fmla="*/ 1116807 w 2278857"/>
+              <a:gd name="csY2" fmla="*/ 409330 h 836190"/>
+              <a:gd name="csX3" fmla="*/ 1671638 w 2278857"/>
+              <a:gd name="csY3" fmla="*/ 823668 h 836190"/>
+              <a:gd name="csX4" fmla="*/ 2278857 w 2278857"/>
+              <a:gd name="csY4" fmla="*/ 687936 h 836190"/>
+              <a:gd name="csX0" fmla="*/ 0 w 2278857"/>
+              <a:gd name="csY0" fmla="*/ 117505 h 808684"/>
+              <a:gd name="csX1" fmla="*/ 609600 w 2278857"/>
+              <a:gd name="csY1" fmla="*/ 15112 h 808684"/>
+              <a:gd name="csX2" fmla="*/ 1116807 w 2278857"/>
+              <a:gd name="csY2" fmla="*/ 381824 h 808684"/>
+              <a:gd name="csX3" fmla="*/ 1671638 w 2278857"/>
+              <a:gd name="csY3" fmla="*/ 796162 h 808684"/>
+              <a:gd name="csX4" fmla="*/ 2278857 w 2278857"/>
+              <a:gd name="csY4" fmla="*/ 660430 h 808684"/>
+              <a:gd name="csX0" fmla="*/ 0 w 2278857"/>
+              <a:gd name="csY0" fmla="*/ 117505 h 771236"/>
+              <a:gd name="csX1" fmla="*/ 609600 w 2278857"/>
+              <a:gd name="csY1" fmla="*/ 15112 h 771236"/>
+              <a:gd name="csX2" fmla="*/ 1116807 w 2278857"/>
+              <a:gd name="csY2" fmla="*/ 381824 h 771236"/>
+              <a:gd name="csX3" fmla="*/ 1588294 w 2278857"/>
+              <a:gd name="csY3" fmla="*/ 753299 h 771236"/>
+              <a:gd name="csX4" fmla="*/ 2278857 w 2278857"/>
+              <a:gd name="csY4" fmla="*/ 660430 h 771236"/>
+              <a:gd name="csX0" fmla="*/ 0 w 2278857"/>
+              <a:gd name="csY0" fmla="*/ 117505 h 779235"/>
+              <a:gd name="csX1" fmla="*/ 609600 w 2278857"/>
+              <a:gd name="csY1" fmla="*/ 15112 h 779235"/>
+              <a:gd name="csX2" fmla="*/ 1116807 w 2278857"/>
+              <a:gd name="csY2" fmla="*/ 381824 h 779235"/>
+              <a:gd name="csX3" fmla="*/ 1624013 w 2278857"/>
+              <a:gd name="csY3" fmla="*/ 762824 h 779235"/>
+              <a:gd name="csX4" fmla="*/ 2278857 w 2278857"/>
+              <a:gd name="csY4" fmla="*/ 660430 h 779235"/>
+              <a:gd name="csX0" fmla="*/ 0 w 2278857"/>
+              <a:gd name="csY0" fmla="*/ 117505 h 785376"/>
+              <a:gd name="csX1" fmla="*/ 609600 w 2278857"/>
+              <a:gd name="csY1" fmla="*/ 15112 h 785376"/>
+              <a:gd name="csX2" fmla="*/ 1116807 w 2278857"/>
+              <a:gd name="csY2" fmla="*/ 381824 h 785376"/>
+              <a:gd name="csX3" fmla="*/ 1628775 w 2278857"/>
+              <a:gd name="csY3" fmla="*/ 769968 h 785376"/>
+              <a:gd name="csX4" fmla="*/ 2278857 w 2278857"/>
+              <a:gd name="csY4" fmla="*/ 660430 h 785376"/>
+              <a:gd name="csX0" fmla="*/ 0 w 2278857"/>
+              <a:gd name="csY0" fmla="*/ 117505 h 785376"/>
+              <a:gd name="csX1" fmla="*/ 609600 w 2278857"/>
+              <a:gd name="csY1" fmla="*/ 15112 h 785376"/>
+              <a:gd name="csX2" fmla="*/ 1116807 w 2278857"/>
+              <a:gd name="csY2" fmla="*/ 381824 h 785376"/>
+              <a:gd name="csX3" fmla="*/ 1628775 w 2278857"/>
+              <a:gd name="csY3" fmla="*/ 769968 h 785376"/>
+              <a:gd name="csX4" fmla="*/ 2278857 w 2278857"/>
+              <a:gd name="csY4" fmla="*/ 660430 h 785376"/>
+              <a:gd name="csX0" fmla="*/ 0 w 2278857"/>
+              <a:gd name="csY0" fmla="*/ 117505 h 785376"/>
+              <a:gd name="csX1" fmla="*/ 609600 w 2278857"/>
+              <a:gd name="csY1" fmla="*/ 15112 h 785376"/>
+              <a:gd name="csX2" fmla="*/ 1116807 w 2278857"/>
+              <a:gd name="csY2" fmla="*/ 381824 h 785376"/>
+              <a:gd name="csX3" fmla="*/ 1628775 w 2278857"/>
+              <a:gd name="csY3" fmla="*/ 769968 h 785376"/>
+              <a:gd name="csX4" fmla="*/ 2278857 w 2278857"/>
+              <a:gd name="csY4" fmla="*/ 660430 h 785376"/>
+              <a:gd name="csX0" fmla="*/ 0 w 2278857"/>
+              <a:gd name="csY0" fmla="*/ 117505 h 785376"/>
+              <a:gd name="csX1" fmla="*/ 609600 w 2278857"/>
+              <a:gd name="csY1" fmla="*/ 15112 h 785376"/>
+              <a:gd name="csX2" fmla="*/ 1116807 w 2278857"/>
+              <a:gd name="csY2" fmla="*/ 381824 h 785376"/>
+              <a:gd name="csX3" fmla="*/ 1628775 w 2278857"/>
+              <a:gd name="csY3" fmla="*/ 769968 h 785376"/>
+              <a:gd name="csX4" fmla="*/ 2278857 w 2278857"/>
+              <a:gd name="csY4" fmla="*/ 660430 h 785376"/>
+              <a:gd name="csX0" fmla="*/ 0 w 2278857"/>
+              <a:gd name="csY0" fmla="*/ 117505 h 785376"/>
+              <a:gd name="csX1" fmla="*/ 609600 w 2278857"/>
+              <a:gd name="csY1" fmla="*/ 15112 h 785376"/>
+              <a:gd name="csX2" fmla="*/ 1116807 w 2278857"/>
+              <a:gd name="csY2" fmla="*/ 381824 h 785376"/>
+              <a:gd name="csX3" fmla="*/ 1628775 w 2278857"/>
+              <a:gd name="csY3" fmla="*/ 769968 h 785376"/>
+              <a:gd name="csX4" fmla="*/ 2278857 w 2278857"/>
+              <a:gd name="csY4" fmla="*/ 660430 h 785376"/>
+              <a:gd name="csX0" fmla="*/ 0 w 2278857"/>
+              <a:gd name="csY0" fmla="*/ 116728 h 784599"/>
+              <a:gd name="csX1" fmla="*/ 609600 w 2278857"/>
+              <a:gd name="csY1" fmla="*/ 14335 h 784599"/>
+              <a:gd name="csX2" fmla="*/ 1116807 w 2278857"/>
+              <a:gd name="csY2" fmla="*/ 381047 h 784599"/>
+              <a:gd name="csX3" fmla="*/ 1628775 w 2278857"/>
+              <a:gd name="csY3" fmla="*/ 769191 h 784599"/>
+              <a:gd name="csX4" fmla="*/ 2278857 w 2278857"/>
+              <a:gd name="csY4" fmla="*/ 659653 h 784599"/>
+            </a:gdLst>
+            <a:ahLst/>
+            <a:cxnLst>
+              <a:cxn ang="0">
+                <a:pos x="csX0" y="csY0"/>
+              </a:cxn>
+              <a:cxn ang="0">
+                <a:pos x="csX1" y="csY1"/>
+              </a:cxn>
+              <a:cxn ang="0">
+                <a:pos x="csX2" y="csY2"/>
+              </a:cxn>
+              <a:cxn ang="0">
+                <a:pos x="csX3" y="csY3"/>
+              </a:cxn>
+              <a:cxn ang="0">
+                <a:pos x="csX4" y="csY4"/>
+              </a:cxn>
+            </a:cxnLst>
+            <a:rect l="l" t="t" r="r" b="b"/>
+            <a:pathLst>
+              <a:path w="2278857" h="784599">
+                <a:moveTo>
+                  <a:pt x="0" y="116728"/>
+                </a:moveTo>
+                <a:cubicBezTo>
+                  <a:pt x="178459" y="34376"/>
+                  <a:pt x="423466" y="-29718"/>
+                  <a:pt x="609600" y="14335"/>
+                </a:cubicBezTo>
+                <a:cubicBezTo>
+                  <a:pt x="795735" y="58388"/>
+                  <a:pt x="949325" y="202850"/>
+                  <a:pt x="1116807" y="381047"/>
+                </a:cubicBezTo>
+                <a:cubicBezTo>
+                  <a:pt x="1284289" y="559244"/>
+                  <a:pt x="1435100" y="722757"/>
+                  <a:pt x="1628775" y="769191"/>
+                </a:cubicBezTo>
+                <a:cubicBezTo>
+                  <a:pt x="1822450" y="815625"/>
+                  <a:pt x="2072085" y="750736"/>
+                  <a:pt x="2278857" y="659653"/>
+                </a:cubicBezTo>
+              </a:path>
+            </a:pathLst>
+          </a:custGeom>
+          <a:noFill/>
+          <a:ln cap="rnd">
+            <a:solidFill>
+              <a:schemeClr val="accent2">
+                <a:lumMod val="75000"/>
+              </a:schemeClr>
+            </a:solidFill>
+            <a:round/>
+          </a:ln>
+        </p:spPr>
+        <p:style>
+          <a:lnRef idx="2">
+            <a:schemeClr val="accent1">
+              <a:shade val="15000"/>
+            </a:schemeClr>
+          </a:lnRef>
+          <a:fillRef idx="1">
+            <a:schemeClr val="accent1"/>
+          </a:fillRef>
+          <a:effectRef idx="0">
+            <a:schemeClr val="accent1"/>
+          </a:effectRef>
+          <a:fontRef idx="minor">
+            <a:schemeClr val="lt1"/>
+          </a:fontRef>
+        </p:style>
+        <p:txBody>
+          <a:bodyPr rtlCol="0" anchor="ctr"/>
+          <a:lstStyle/>
+          <a:p>
+            <a:pPr algn="ctr"/>
+            <a:endParaRPr lang="de-DE" sz="1400"/>
+          </a:p>
+        </p:txBody>
+      </p:sp>
+      <p:sp>
+        <p:nvSpPr>
+          <p:cNvPr id="30" name="Freihandform: Form 29">
+            <a:extLst>
+              <a:ext uri="{FF2B5EF4-FFF2-40B4-BE49-F238E27FC236}">
+                <a16:creationId xmlns:a16="http://schemas.microsoft.com/office/drawing/2014/main" id="{37B3E4A2-869B-375B-123E-030E3259FB0C}"/>
+              </a:ext>
+            </a:extLst>
+          </p:cNvPr>
+          <p:cNvSpPr/>
+          <p:nvPr/>
+        </p:nvSpPr>
+        <p:spPr>
+          <a:xfrm>
+            <a:off x="741029" y="1495115"/>
+            <a:ext cx="2271252" cy="471950"/>
+          </a:xfrm>
+          <a:custGeom>
+            <a:avLst/>
+            <a:gdLst>
+              <a:gd name="csX0" fmla="*/ 0 w 2271252"/>
+              <a:gd name="csY0" fmla="*/ 471949 h 471949"/>
+              <a:gd name="csX1" fmla="*/ 1165123 w 2271252"/>
+              <a:gd name="csY1" fmla="*/ 1 h 471949"/>
+              <a:gd name="csX2" fmla="*/ 2271252 w 2271252"/>
+              <a:gd name="csY2" fmla="*/ 467033 h 471949"/>
+              <a:gd name="csX0" fmla="*/ 0 w 2271252"/>
+              <a:gd name="csY0" fmla="*/ 471950 h 471950"/>
+              <a:gd name="csX1" fmla="*/ 1165123 w 2271252"/>
+              <a:gd name="csY1" fmla="*/ 2 h 471950"/>
+              <a:gd name="csX2" fmla="*/ 2271252 w 2271252"/>
+              <a:gd name="csY2" fmla="*/ 467034 h 471950"/>
+              <a:gd name="csX0" fmla="*/ 0 w 2271252"/>
+              <a:gd name="csY0" fmla="*/ 471950 h 471950"/>
+              <a:gd name="csX1" fmla="*/ 1165123 w 2271252"/>
+              <a:gd name="csY1" fmla="*/ 2 h 471950"/>
+              <a:gd name="csX2" fmla="*/ 2271252 w 2271252"/>
+              <a:gd name="csY2" fmla="*/ 467034 h 471950"/>
+              <a:gd name="csX0" fmla="*/ 0 w 2271252"/>
+              <a:gd name="csY0" fmla="*/ 471950 h 471950"/>
+              <a:gd name="csX1" fmla="*/ 1138929 w 2271252"/>
+              <a:gd name="csY1" fmla="*/ 2 h 471950"/>
+              <a:gd name="csX2" fmla="*/ 2271252 w 2271252"/>
+              <a:gd name="csY2" fmla="*/ 467034 h 471950"/>
+              <a:gd name="csX0" fmla="*/ 0 w 2271252"/>
+              <a:gd name="csY0" fmla="*/ 471950 h 471950"/>
+              <a:gd name="csX1" fmla="*/ 1127023 w 2271252"/>
+              <a:gd name="csY1" fmla="*/ 2 h 471950"/>
+              <a:gd name="csX2" fmla="*/ 2271252 w 2271252"/>
+              <a:gd name="csY2" fmla="*/ 467034 h 471950"/>
+              <a:gd name="csX0" fmla="*/ 0 w 2271252"/>
+              <a:gd name="csY0" fmla="*/ 471950 h 471950"/>
+              <a:gd name="csX1" fmla="*/ 1127023 w 2271252"/>
+              <a:gd name="csY1" fmla="*/ 2 h 471950"/>
+              <a:gd name="csX2" fmla="*/ 2271252 w 2271252"/>
+              <a:gd name="csY2" fmla="*/ 467034 h 471950"/>
+            </a:gdLst>
+            <a:ahLst/>
+            <a:cxnLst>
+              <a:cxn ang="0">
+                <a:pos x="csX0" y="csY0"/>
+              </a:cxn>
+              <a:cxn ang="0">
+                <a:pos x="csX1" y="csY1"/>
+              </a:cxn>
+              <a:cxn ang="0">
+                <a:pos x="csX2" y="csY2"/>
+              </a:cxn>
+            </a:cxnLst>
+            <a:rect l="l" t="t" r="r" b="b"/>
+            <a:pathLst>
+              <a:path w="2271252" h="471950">
+                <a:moveTo>
+                  <a:pt x="0" y="471950"/>
+                </a:moveTo>
+                <a:cubicBezTo>
+                  <a:pt x="255177" y="236385"/>
+                  <a:pt x="598463" y="821"/>
+                  <a:pt x="1127023" y="2"/>
+                </a:cubicBezTo>
+                <a:cubicBezTo>
+                  <a:pt x="1655583" y="-817"/>
+                  <a:pt x="2020017" y="244451"/>
+                  <a:pt x="2271252" y="467034"/>
+                </a:cubicBezTo>
+              </a:path>
+            </a:pathLst>
+          </a:custGeom>
+          <a:noFill/>
+          <a:ln cap="rnd">
+            <a:solidFill>
+              <a:schemeClr val="accent6">
+                <a:lumMod val="75000"/>
+              </a:schemeClr>
+            </a:solidFill>
+            <a:round/>
+          </a:ln>
+        </p:spPr>
+        <p:style>
+          <a:lnRef idx="2">
+            <a:schemeClr val="accent1">
+              <a:shade val="15000"/>
+            </a:schemeClr>
+          </a:lnRef>
+          <a:fillRef idx="1">
+            <a:schemeClr val="accent1"/>
+          </a:fillRef>
+          <a:effectRef idx="0">
+            <a:schemeClr val="accent1"/>
+          </a:effectRef>
+          <a:fontRef idx="minor">
+            <a:schemeClr val="lt1"/>
+          </a:fontRef>
+        </p:style>
+        <p:txBody>
+          <a:bodyPr rtlCol="0" anchor="ctr"/>
+          <a:lstStyle/>
+          <a:p>
+            <a:pPr algn="ctr"/>
+            <a:endParaRPr lang="de-DE" sz="1400" dirty="0"/>
+          </a:p>
+        </p:txBody>
+      </p:sp>
+      <p:cxnSp>
+        <p:nvCxnSpPr>
+          <p:cNvPr id="26" name="Gerader Verbinder 25">
+            <a:extLst>
+              <a:ext uri="{FF2B5EF4-FFF2-40B4-BE49-F238E27FC236}">
+                <a16:creationId xmlns:a16="http://schemas.microsoft.com/office/drawing/2014/main" id="{EE292886-2442-A765-7EEC-271C7E80AC9A}"/>
+              </a:ext>
+            </a:extLst>
+          </p:cNvPr>
+          <p:cNvCxnSpPr>
+            <a:cxnSpLocks/>
+          </p:cNvCxnSpPr>
+          <p:nvPr/>
+        </p:nvCxnSpPr>
+        <p:spPr>
+          <a:xfrm>
+            <a:off x="741029" y="1307306"/>
+            <a:ext cx="2273787" cy="657842"/>
+          </a:xfrm>
+          <a:prstGeom prst="line">
+            <a:avLst/>
+          </a:prstGeom>
+          <a:ln cap="rnd">
+            <a:solidFill>
+              <a:schemeClr val="tx2">
+                <a:lumMod val="75000"/>
+                <a:lumOff val="25000"/>
+              </a:schemeClr>
+            </a:solidFill>
+            <a:round/>
+          </a:ln>
+        </p:spPr>
+        <p:style>
+          <a:lnRef idx="2">
+            <a:schemeClr val="accent1"/>
+          </a:lnRef>
+          <a:fillRef idx="0">
+            <a:schemeClr val="accent1"/>
+          </a:fillRef>
+          <a:effectRef idx="1">
+            <a:schemeClr val="accent1"/>
+          </a:effectRef>
+          <a:fontRef idx="minor">
+            <a:schemeClr val="tx1"/>
+          </a:fontRef>
+        </p:style>
+      </p:cxnSp>
+      <p:sp>
+        <p:nvSpPr>
+          <p:cNvPr id="47" name="Textfeld 46">
+            <a:extLst>
+              <a:ext uri="{FF2B5EF4-FFF2-40B4-BE49-F238E27FC236}">
+                <a16:creationId xmlns:a16="http://schemas.microsoft.com/office/drawing/2014/main" id="{6EA20DC9-08D9-7982-4B05-219673E02F94}"/>
+              </a:ext>
+            </a:extLst>
+          </p:cNvPr>
+          <p:cNvSpPr txBox="1"/>
+          <p:nvPr/>
+        </p:nvSpPr>
+        <p:spPr>
+          <a:xfrm>
+            <a:off x="2866827" y="2005322"/>
+            <a:ext cx="295275" cy="307777"/>
+          </a:xfrm>
+          <a:prstGeom prst="rect">
+            <a:avLst/>
+          </a:prstGeom>
+          <a:noFill/>
+        </p:spPr>
+        <p:txBody>
+          <a:bodyPr wrap="square" rtlCol="0">
+            <a:spAutoFit/>
+          </a:bodyPr>
+          <a:lstStyle/>
+          <a:p>
+            <a:pPr algn="ctr"/>
+            <a:r>
+              <a:rPr lang="de-DE" sz="1400" dirty="0">
+                <a:latin typeface="CMU Serif" panose="02000603000000000000" pitchFamily="2" charset="0"/>
+                <a:ea typeface="CMU Serif" panose="02000603000000000000" pitchFamily="2" charset="0"/>
+                <a:cs typeface="CMU Serif" panose="02000603000000000000" pitchFamily="2" charset="0"/>
+              </a:rPr>
+              <a:t>1</a:t>
+            </a:r>
+          </a:p>
+        </p:txBody>
+      </p:sp>
+      <p:sp>
+        <p:nvSpPr>
+          <p:cNvPr id="56" name="Textfeld 55">
+            <a:extLst>
+              <a:ext uri="{FF2B5EF4-FFF2-40B4-BE49-F238E27FC236}">
+                <a16:creationId xmlns:a16="http://schemas.microsoft.com/office/drawing/2014/main" id="{B97206D2-138F-0735-FDD0-784B0AB88B32}"/>
+              </a:ext>
+            </a:extLst>
+          </p:cNvPr>
+          <p:cNvSpPr txBox="1"/>
+          <p:nvPr/>
+        </p:nvSpPr>
+        <p:spPr>
+          <a:xfrm>
+            <a:off x="-179360" y="1126519"/>
+            <a:ext cx="1165694" cy="261610"/>
+          </a:xfrm>
+          <a:prstGeom prst="rect">
+            <a:avLst/>
+          </a:prstGeom>
+          <a:noFill/>
+        </p:spPr>
+        <p:txBody>
+          <a:bodyPr wrap="square" rtlCol="0">
+            <a:spAutoFit/>
+          </a:bodyPr>
+          <a:lstStyle/>
+          <a:p>
+            <a:pPr algn="ctr"/>
+            <a:r>
+              <a:rPr lang="de-DE" sz="1100" i="1" dirty="0">
+                <a:solidFill>
+                  <a:schemeClr val="tx2">
+                    <a:lumMod val="75000"/>
+                    <a:lumOff val="25000"/>
+                  </a:schemeClr>
+                </a:solidFill>
+                <a:latin typeface="CMU Serif" panose="02000603000000000000" pitchFamily="2" charset="0"/>
+                <a:ea typeface="CMU Serif" panose="02000603000000000000" pitchFamily="2" charset="0"/>
+                <a:cs typeface="CMU Serif" panose="02000603000000000000" pitchFamily="2" charset="0"/>
+              </a:rPr>
+              <a:t>A</a:t>
+            </a:r>
+            <a:r>
+              <a:rPr lang="de-DE" sz="1100" baseline="-25000" dirty="0">
+                <a:solidFill>
+                  <a:schemeClr val="tx2">
+                    <a:lumMod val="75000"/>
+                    <a:lumOff val="25000"/>
+                  </a:schemeClr>
+                </a:solidFill>
+                <a:latin typeface="CMU Serif" panose="02000603000000000000" pitchFamily="2" charset="0"/>
+                <a:ea typeface="CMU Serif" panose="02000603000000000000" pitchFamily="2" charset="0"/>
+                <a:cs typeface="CMU Serif" panose="02000603000000000000" pitchFamily="2" charset="0"/>
+              </a:rPr>
+              <a:t>0 </a:t>
+            </a:r>
+            <a:r>
+              <a:rPr lang="de-DE" sz="1100" dirty="0">
+                <a:solidFill>
+                  <a:schemeClr val="tx2">
+                    <a:lumMod val="75000"/>
+                    <a:lumOff val="25000"/>
+                  </a:schemeClr>
+                </a:solidFill>
+                <a:latin typeface="CMU Serif" panose="02000603000000000000" pitchFamily="2" charset="0"/>
+                <a:ea typeface="CMU Serif" panose="02000603000000000000" pitchFamily="2" charset="0"/>
+                <a:cs typeface="CMU Serif" panose="02000603000000000000" pitchFamily="2" charset="0"/>
+              </a:rPr>
+              <a:t>− </a:t>
+            </a:r>
+            <a:r>
+              <a:rPr lang="de-DE" sz="1100" i="1" dirty="0">
+                <a:solidFill>
+                  <a:schemeClr val="tx2">
+                    <a:lumMod val="75000"/>
+                    <a:lumOff val="25000"/>
+                  </a:schemeClr>
+                </a:solidFill>
+                <a:latin typeface="Latin Modern Math" panose="02000503000000000000" pitchFamily="50" charset="0"/>
+                <a:ea typeface="Latin Modern Math" panose="02000503000000000000" pitchFamily="50" charset="0"/>
+                <a:cs typeface="CMU Serif" panose="02000603000000000000" pitchFamily="2" charset="0"/>
+              </a:rPr>
+              <a:t>α</a:t>
+            </a:r>
+            <a:r>
+              <a:rPr lang="de-DE" sz="1100" dirty="0">
+                <a:solidFill>
+                  <a:schemeClr val="tx2">
+                    <a:lumMod val="75000"/>
+                    <a:lumOff val="25000"/>
+                  </a:schemeClr>
+                </a:solidFill>
+                <a:latin typeface="CMU Serif" panose="02000603000000000000" pitchFamily="2" charset="0"/>
+                <a:ea typeface="CMU Serif" panose="02000603000000000000" pitchFamily="2" charset="0"/>
+                <a:cs typeface="CMU Serif" panose="02000603000000000000" pitchFamily="2" charset="0"/>
+              </a:rPr>
+              <a:t>*</a:t>
+            </a:r>
+          </a:p>
+        </p:txBody>
+      </p:sp>
+      <p:grpSp>
+        <p:nvGrpSpPr>
+          <p:cNvPr id="63" name="Gruppieren 62">
+            <a:extLst>
+              <a:ext uri="{FF2B5EF4-FFF2-40B4-BE49-F238E27FC236}">
+                <a16:creationId xmlns:a16="http://schemas.microsoft.com/office/drawing/2014/main" id="{713D471E-01EB-A78C-F933-16E1D979DFCF}"/>
+              </a:ext>
+            </a:extLst>
+          </p:cNvPr>
+          <p:cNvGrpSpPr/>
+          <p:nvPr/>
+        </p:nvGrpSpPr>
+        <p:grpSpPr>
+          <a:xfrm>
+            <a:off x="324341" y="1292925"/>
+            <a:ext cx="361102" cy="459140"/>
+            <a:chOff x="250934" y="1346504"/>
+            <a:chExt cx="361102" cy="459140"/>
+          </a:xfrm>
+        </p:grpSpPr>
+        <p:sp>
+          <p:nvSpPr>
+            <p:cNvPr id="58" name="Textfeld 57">
+              <a:extLst>
+                <a:ext uri="{FF2B5EF4-FFF2-40B4-BE49-F238E27FC236}">
+                  <a16:creationId xmlns:a16="http://schemas.microsoft.com/office/drawing/2014/main" id="{DD556F77-DA42-9F3D-49CD-28518B720246}"/>
+                </a:ext>
+              </a:extLst>
+            </p:cNvPr>
+            <p:cNvSpPr txBox="1"/>
+            <p:nvPr/>
+          </p:nvSpPr>
+          <p:spPr>
+            <a:xfrm>
+              <a:off x="251088" y="1346504"/>
+              <a:ext cx="360948" cy="261610"/>
+            </a:xfrm>
+            <a:prstGeom prst="rect">
+              <a:avLst/>
+            </a:prstGeom>
+            <a:noFill/>
+          </p:spPr>
+          <p:txBody>
+            <a:bodyPr wrap="square" rtlCol="0">
+              <a:spAutoFit/>
+            </a:bodyPr>
+            <a:lstStyle/>
+            <a:p>
+              <a:pPr algn="ctr"/>
+              <a:r>
+                <a:rPr lang="de-DE" sz="1100" i="1" dirty="0">
+                  <a:solidFill>
+                    <a:schemeClr val="accent6">
+                      <a:lumMod val="75000"/>
+                    </a:schemeClr>
+                  </a:solidFill>
+                  <a:latin typeface="CMU Serif" panose="02000603000000000000" pitchFamily="2" charset="0"/>
+                  <a:ea typeface="CMU Serif" panose="02000603000000000000" pitchFamily="2" charset="0"/>
+                  <a:cs typeface="CMU Serif" panose="02000603000000000000" pitchFamily="2" charset="0"/>
+                </a:rPr>
+                <a:t>A</a:t>
+              </a:r>
+              <a:r>
+                <a:rPr lang="de-DE" sz="1100" baseline="-25000" dirty="0">
+                  <a:solidFill>
+                    <a:schemeClr val="accent6">
+                      <a:lumMod val="75000"/>
+                    </a:schemeClr>
+                  </a:solidFill>
+                  <a:latin typeface="CMU Serif" panose="02000603000000000000" pitchFamily="2" charset="0"/>
+                  <a:ea typeface="CMU Serif" panose="02000603000000000000" pitchFamily="2" charset="0"/>
+                  <a:cs typeface="CMU Serif" panose="02000603000000000000" pitchFamily="2" charset="0"/>
+                </a:rPr>
+                <a:t>1</a:t>
+              </a:r>
+              <a:endParaRPr lang="de-DE" sz="1100" dirty="0">
+                <a:solidFill>
+                  <a:schemeClr val="accent6">
+                    <a:lumMod val="75000"/>
+                  </a:schemeClr>
+                </a:solidFill>
+                <a:latin typeface="CMU Serif" panose="02000603000000000000" pitchFamily="2" charset="0"/>
+                <a:ea typeface="CMU Serif" panose="02000603000000000000" pitchFamily="2" charset="0"/>
+                <a:cs typeface="CMU Serif" panose="02000603000000000000" pitchFamily="2" charset="0"/>
+              </a:endParaRPr>
+            </a:p>
+          </p:txBody>
+        </p:sp>
+        <p:sp>
+          <p:nvSpPr>
+            <p:cNvPr id="60" name="Textfeld 59">
+              <a:extLst>
+                <a:ext uri="{FF2B5EF4-FFF2-40B4-BE49-F238E27FC236}">
+                  <a16:creationId xmlns:a16="http://schemas.microsoft.com/office/drawing/2014/main" id="{10122D72-9D41-5FF4-F7EB-884CDA4A41B2}"/>
+                </a:ext>
+              </a:extLst>
+            </p:cNvPr>
+            <p:cNvSpPr txBox="1"/>
+            <p:nvPr/>
+          </p:nvSpPr>
+          <p:spPr>
+            <a:xfrm>
+              <a:off x="250934" y="1544034"/>
+              <a:ext cx="360948" cy="261610"/>
+            </a:xfrm>
+            <a:prstGeom prst="rect">
+              <a:avLst/>
+            </a:prstGeom>
+            <a:noFill/>
+          </p:spPr>
+          <p:txBody>
+            <a:bodyPr wrap="square" rtlCol="0">
+              <a:spAutoFit/>
+            </a:bodyPr>
+            <a:lstStyle/>
+            <a:p>
+              <a:pPr algn="ctr"/>
+              <a:r>
+                <a:rPr lang="de-DE" sz="1100" dirty="0">
+                  <a:solidFill>
+                    <a:schemeClr val="accent6">
+                      <a:lumMod val="75000"/>
+                    </a:schemeClr>
+                  </a:solidFill>
+                  <a:latin typeface="CMU Serif" panose="02000603000000000000" pitchFamily="2" charset="0"/>
+                  <a:ea typeface="CMU Serif" panose="02000603000000000000" pitchFamily="2" charset="0"/>
+                  <a:cs typeface="CMU Serif" panose="02000603000000000000" pitchFamily="2" charset="0"/>
+                </a:rPr>
+                <a:t>4</a:t>
+              </a:r>
+            </a:p>
+          </p:txBody>
+        </p:sp>
+        <p:cxnSp>
+          <p:nvCxnSpPr>
+            <p:cNvPr id="61" name="Gerader Verbinder 60">
+              <a:extLst>
+                <a:ext uri="{FF2B5EF4-FFF2-40B4-BE49-F238E27FC236}">
+                  <a16:creationId xmlns:a16="http://schemas.microsoft.com/office/drawing/2014/main" id="{7D380A19-5FD4-7BA4-762A-6D4671E438A2}"/>
+                </a:ext>
+              </a:extLst>
+            </p:cNvPr>
+            <p:cNvCxnSpPr>
+              <a:cxnSpLocks/>
+            </p:cNvCxnSpPr>
+            <p:nvPr/>
+          </p:nvCxnSpPr>
+          <p:spPr>
+            <a:xfrm>
+              <a:off x="345603" y="1572093"/>
+              <a:ext cx="173510" cy="0"/>
+            </a:xfrm>
+            <a:prstGeom prst="line">
+              <a:avLst/>
+            </a:prstGeom>
+            <a:ln w="9525" cap="rnd">
+              <a:solidFill>
+                <a:schemeClr val="accent6">
+                  <a:lumMod val="75000"/>
+                </a:schemeClr>
+              </a:solidFill>
+              <a:round/>
+            </a:ln>
+          </p:spPr>
+          <p:style>
+            <a:lnRef idx="2">
+              <a:schemeClr val="dk1"/>
+            </a:lnRef>
+            <a:fillRef idx="0">
+              <a:schemeClr val="dk1"/>
+            </a:fillRef>
+            <a:effectRef idx="1">
+              <a:schemeClr val="dk1"/>
+            </a:effectRef>
+            <a:fontRef idx="minor">
+              <a:schemeClr val="tx1"/>
+            </a:fontRef>
+          </p:style>
+        </p:cxnSp>
+      </p:grpSp>
+      <p:cxnSp>
+        <p:nvCxnSpPr>
+          <p:cNvPr id="64" name="Gerader Verbinder 63">
+            <a:extLst>
+              <a:ext uri="{FF2B5EF4-FFF2-40B4-BE49-F238E27FC236}">
+                <a16:creationId xmlns:a16="http://schemas.microsoft.com/office/drawing/2014/main" id="{C5DF7631-2738-394C-17AB-80FDE6E4101C}"/>
+              </a:ext>
+            </a:extLst>
+          </p:cNvPr>
+          <p:cNvCxnSpPr>
+            <a:cxnSpLocks/>
+          </p:cNvCxnSpPr>
+          <p:nvPr/>
+        </p:nvCxnSpPr>
+        <p:spPr>
+          <a:xfrm>
+            <a:off x="678924" y="1493701"/>
+            <a:ext cx="114686" cy="0"/>
+          </a:xfrm>
+          <a:prstGeom prst="line">
+            <a:avLst/>
+          </a:prstGeom>
+          <a:ln w="19050" cap="rnd">
+            <a:solidFill>
+              <a:schemeClr val="accent6">
+                <a:lumMod val="75000"/>
+              </a:schemeClr>
+            </a:solidFill>
+            <a:prstDash val="solid"/>
+            <a:round/>
+          </a:ln>
+        </p:spPr>
+        <p:style>
+          <a:lnRef idx="2">
+            <a:schemeClr val="accent1"/>
+          </a:lnRef>
+          <a:fillRef idx="0">
+            <a:schemeClr val="accent1"/>
+          </a:fillRef>
+          <a:effectRef idx="1">
+            <a:schemeClr val="accent1"/>
+          </a:effectRef>
+          <a:fontRef idx="minor">
+            <a:schemeClr val="tx1"/>
+          </a:fontRef>
+        </p:style>
+      </p:cxnSp>
+      <p:cxnSp>
+        <p:nvCxnSpPr>
+          <p:cNvPr id="66" name="Gerader Verbinder 65">
+            <a:extLst>
+              <a:ext uri="{FF2B5EF4-FFF2-40B4-BE49-F238E27FC236}">
+                <a16:creationId xmlns:a16="http://schemas.microsoft.com/office/drawing/2014/main" id="{108AE4B0-CEF5-85F8-D472-A742D53A551C}"/>
+              </a:ext>
+            </a:extLst>
+          </p:cNvPr>
+          <p:cNvCxnSpPr>
+            <a:cxnSpLocks/>
+          </p:cNvCxnSpPr>
+          <p:nvPr/>
+        </p:nvCxnSpPr>
+        <p:spPr>
+          <a:xfrm>
+            <a:off x="678924" y="1310344"/>
+            <a:ext cx="114686" cy="0"/>
+          </a:xfrm>
+          <a:prstGeom prst="line">
+            <a:avLst/>
+          </a:prstGeom>
+          <a:ln w="19050" cap="rnd">
+            <a:solidFill>
+              <a:schemeClr val="tx2">
+                <a:lumMod val="75000"/>
+                <a:lumOff val="25000"/>
+              </a:schemeClr>
+            </a:solidFill>
+            <a:prstDash val="solid"/>
+            <a:round/>
+          </a:ln>
+        </p:spPr>
+        <p:style>
+          <a:lnRef idx="2">
+            <a:schemeClr val="accent1"/>
+          </a:lnRef>
+          <a:fillRef idx="0">
+            <a:schemeClr val="accent1"/>
+          </a:fillRef>
+          <a:effectRef idx="1">
+            <a:schemeClr val="accent1"/>
+          </a:effectRef>
+          <a:fontRef idx="minor">
+            <a:schemeClr val="tx1"/>
+          </a:fontRef>
+        </p:style>
+      </p:cxnSp>
+      <p:grpSp>
+        <p:nvGrpSpPr>
+          <p:cNvPr id="68" name="Gruppieren 67">
+            <a:extLst>
+              <a:ext uri="{FF2B5EF4-FFF2-40B4-BE49-F238E27FC236}">
+                <a16:creationId xmlns:a16="http://schemas.microsoft.com/office/drawing/2014/main" id="{96A71507-2FF4-ADBE-C89A-F449215E80F7}"/>
+              </a:ext>
+            </a:extLst>
+          </p:cNvPr>
+          <p:cNvGrpSpPr/>
+          <p:nvPr/>
+        </p:nvGrpSpPr>
+        <p:grpSpPr>
+          <a:xfrm>
+            <a:off x="347684" y="2348920"/>
+            <a:ext cx="361102" cy="459140"/>
+            <a:chOff x="250934" y="1346504"/>
+            <a:chExt cx="361102" cy="459140"/>
+          </a:xfrm>
+        </p:grpSpPr>
+        <p:sp>
+          <p:nvSpPr>
+            <p:cNvPr id="69" name="Textfeld 68">
+              <a:extLst>
+                <a:ext uri="{FF2B5EF4-FFF2-40B4-BE49-F238E27FC236}">
+                  <a16:creationId xmlns:a16="http://schemas.microsoft.com/office/drawing/2014/main" id="{D7D69520-2A8A-B1F5-2450-7E3FA2DB0719}"/>
+                </a:ext>
+              </a:extLst>
+            </p:cNvPr>
+            <p:cNvSpPr txBox="1"/>
+            <p:nvPr/>
+          </p:nvSpPr>
+          <p:spPr>
+            <a:xfrm>
+              <a:off x="251088" y="1346504"/>
+              <a:ext cx="360948" cy="261610"/>
+            </a:xfrm>
+            <a:prstGeom prst="rect">
+              <a:avLst/>
+            </a:prstGeom>
+            <a:noFill/>
+          </p:spPr>
+          <p:txBody>
+            <a:bodyPr wrap="square" rtlCol="0">
+              <a:spAutoFit/>
+            </a:bodyPr>
+            <a:lstStyle/>
+            <a:p>
+              <a:pPr algn="ctr"/>
+              <a:r>
+                <a:rPr lang="de-DE" sz="1100" i="1" dirty="0">
+                  <a:solidFill>
+                    <a:schemeClr val="accent2">
+                      <a:lumMod val="75000"/>
+                    </a:schemeClr>
+                  </a:solidFill>
+                  <a:latin typeface="CMU Serif" panose="02000603000000000000" pitchFamily="2" charset="0"/>
+                  <a:ea typeface="CMU Serif" panose="02000603000000000000" pitchFamily="2" charset="0"/>
+                  <a:cs typeface="CMU Serif" panose="02000603000000000000" pitchFamily="2" charset="0"/>
+                </a:rPr>
+                <a:t>A</a:t>
+              </a:r>
+              <a:r>
+                <a:rPr lang="de-DE" sz="1100" baseline="-25000" dirty="0">
+                  <a:solidFill>
+                    <a:schemeClr val="accent2">
+                      <a:lumMod val="75000"/>
+                    </a:schemeClr>
+                  </a:solidFill>
+                  <a:latin typeface="CMU Serif" panose="02000603000000000000" pitchFamily="2" charset="0"/>
+                  <a:ea typeface="CMU Serif" panose="02000603000000000000" pitchFamily="2" charset="0"/>
+                  <a:cs typeface="CMU Serif" panose="02000603000000000000" pitchFamily="2" charset="0"/>
+                </a:rPr>
+                <a:t>2</a:t>
+              </a:r>
+              <a:endParaRPr lang="de-DE" sz="1100" dirty="0">
+                <a:solidFill>
+                  <a:schemeClr val="accent2">
+                    <a:lumMod val="75000"/>
+                  </a:schemeClr>
+                </a:solidFill>
+                <a:latin typeface="CMU Serif" panose="02000603000000000000" pitchFamily="2" charset="0"/>
+                <a:ea typeface="CMU Serif" panose="02000603000000000000" pitchFamily="2" charset="0"/>
+                <a:cs typeface="CMU Serif" panose="02000603000000000000" pitchFamily="2" charset="0"/>
+              </a:endParaRPr>
+            </a:p>
+          </p:txBody>
+        </p:sp>
+        <p:sp>
+          <p:nvSpPr>
+            <p:cNvPr id="70" name="Textfeld 69">
+              <a:extLst>
+                <a:ext uri="{FF2B5EF4-FFF2-40B4-BE49-F238E27FC236}">
+                  <a16:creationId xmlns:a16="http://schemas.microsoft.com/office/drawing/2014/main" id="{A1FE0EEB-CE4A-6344-9878-73C30C0072D7}"/>
+                </a:ext>
+              </a:extLst>
+            </p:cNvPr>
+            <p:cNvSpPr txBox="1"/>
+            <p:nvPr/>
+          </p:nvSpPr>
+          <p:spPr>
+            <a:xfrm>
+              <a:off x="250934" y="1544034"/>
+              <a:ext cx="360948" cy="261610"/>
+            </a:xfrm>
+            <a:prstGeom prst="rect">
+              <a:avLst/>
+            </a:prstGeom>
+            <a:noFill/>
+          </p:spPr>
+          <p:txBody>
+            <a:bodyPr wrap="square" rtlCol="0">
+              <a:spAutoFit/>
+            </a:bodyPr>
+            <a:lstStyle/>
+            <a:p>
+              <a:pPr algn="ctr"/>
+              <a:r>
+                <a:rPr lang="de-DE" sz="1100" dirty="0">
+                  <a:solidFill>
+                    <a:schemeClr val="accent2">
+                      <a:lumMod val="75000"/>
+                    </a:schemeClr>
+                  </a:solidFill>
+                  <a:latin typeface="CMU Serif" panose="02000603000000000000" pitchFamily="2" charset="0"/>
+                  <a:ea typeface="CMU Serif" panose="02000603000000000000" pitchFamily="2" charset="0"/>
+                  <a:cs typeface="CMU Serif" panose="02000603000000000000" pitchFamily="2" charset="0"/>
+                </a:rPr>
+                <a:t>3</a:t>
+              </a:r>
+            </a:p>
+          </p:txBody>
+        </p:sp>
+        <p:cxnSp>
+          <p:nvCxnSpPr>
+            <p:cNvPr id="71" name="Gerader Verbinder 70">
+              <a:extLst>
+                <a:ext uri="{FF2B5EF4-FFF2-40B4-BE49-F238E27FC236}">
+                  <a16:creationId xmlns:a16="http://schemas.microsoft.com/office/drawing/2014/main" id="{339AEEE7-F688-7EFF-EB85-76378834C9B0}"/>
+                </a:ext>
+              </a:extLst>
+            </p:cNvPr>
+            <p:cNvCxnSpPr>
+              <a:cxnSpLocks/>
+            </p:cNvCxnSpPr>
+            <p:nvPr/>
+          </p:nvCxnSpPr>
+          <p:spPr>
+            <a:xfrm>
+              <a:off x="345603" y="1572093"/>
+              <a:ext cx="173510" cy="0"/>
+            </a:xfrm>
+            <a:prstGeom prst="line">
+              <a:avLst/>
+            </a:prstGeom>
+            <a:ln w="9525" cap="rnd">
+              <a:solidFill>
+                <a:schemeClr val="accent2">
+                  <a:lumMod val="75000"/>
+                </a:schemeClr>
+              </a:solidFill>
+              <a:round/>
+            </a:ln>
+          </p:spPr>
+          <p:style>
+            <a:lnRef idx="2">
+              <a:schemeClr val="dk1"/>
+            </a:lnRef>
+            <a:fillRef idx="0">
+              <a:schemeClr val="dk1"/>
+            </a:fillRef>
+            <a:effectRef idx="1">
+              <a:schemeClr val="dk1"/>
+            </a:effectRef>
+            <a:fontRef idx="minor">
+              <a:schemeClr val="tx1"/>
+            </a:fontRef>
+          </p:style>
+        </p:cxnSp>
+      </p:grpSp>
+      <p:cxnSp>
+        <p:nvCxnSpPr>
+          <p:cNvPr id="72" name="Gerader Verbinder 71">
+            <a:extLst>
+              <a:ext uri="{FF2B5EF4-FFF2-40B4-BE49-F238E27FC236}">
+                <a16:creationId xmlns:a16="http://schemas.microsoft.com/office/drawing/2014/main" id="{B917696B-0EED-EC17-47AD-B14488BDBB2C}"/>
+              </a:ext>
+            </a:extLst>
+          </p:cNvPr>
+          <p:cNvCxnSpPr>
+            <a:cxnSpLocks/>
+          </p:cNvCxnSpPr>
+          <p:nvPr/>
+        </p:nvCxnSpPr>
+        <p:spPr>
+          <a:xfrm>
+            <a:off x="678924" y="2509837"/>
+            <a:ext cx="114686" cy="0"/>
+          </a:xfrm>
+          <a:prstGeom prst="line">
+            <a:avLst/>
+          </a:prstGeom>
+          <a:ln w="19050" cap="rnd">
+            <a:solidFill>
+              <a:schemeClr val="accent2">
+                <a:lumMod val="75000"/>
+              </a:schemeClr>
+            </a:solidFill>
+            <a:prstDash val="solid"/>
+            <a:round/>
+          </a:ln>
+        </p:spPr>
+        <p:style>
+          <a:lnRef idx="2">
+            <a:schemeClr val="accent1"/>
+          </a:lnRef>
+          <a:fillRef idx="0">
+            <a:schemeClr val="accent1"/>
+          </a:fillRef>
+          <a:effectRef idx="1">
+            <a:schemeClr val="accent1"/>
+          </a:effectRef>
+          <a:fontRef idx="minor">
+            <a:schemeClr val="tx1"/>
+          </a:fontRef>
+        </p:style>
+      </p:cxnSp>
+      <p:cxnSp>
+        <p:nvCxnSpPr>
+          <p:cNvPr id="74" name="Gerade Verbindung mit Pfeil 73">
+            <a:extLst>
+              <a:ext uri="{FF2B5EF4-FFF2-40B4-BE49-F238E27FC236}">
+                <a16:creationId xmlns:a16="http://schemas.microsoft.com/office/drawing/2014/main" id="{B312C4DE-8640-0F6F-29C9-690DCD651DBA}"/>
+              </a:ext>
+            </a:extLst>
+          </p:cNvPr>
+          <p:cNvCxnSpPr>
+            <a:cxnSpLocks/>
+          </p:cNvCxnSpPr>
+          <p:nvPr/>
+        </p:nvCxnSpPr>
+        <p:spPr>
+          <a:xfrm>
+            <a:off x="281892" y="1964539"/>
+            <a:ext cx="321008" cy="0"/>
+          </a:xfrm>
+          <a:prstGeom prst="straightConnector1">
+            <a:avLst/>
+          </a:prstGeom>
+          <a:ln w="12700" cap="rnd">
+            <a:round/>
+            <a:tailEnd type="triangle"/>
+          </a:ln>
+        </p:spPr>
+        <p:style>
+          <a:lnRef idx="2">
+            <a:schemeClr val="dk1"/>
+          </a:lnRef>
+          <a:fillRef idx="0">
+            <a:schemeClr val="dk1"/>
+          </a:fillRef>
+          <a:effectRef idx="1">
+            <a:schemeClr val="dk1"/>
+          </a:effectRef>
+          <a:fontRef idx="minor">
+            <a:schemeClr val="tx1"/>
+          </a:fontRef>
+        </p:style>
+      </p:cxnSp>
+      <p:cxnSp>
+        <p:nvCxnSpPr>
+          <p:cNvPr id="76" name="Gerade Verbindung mit Pfeil 75">
+            <a:extLst>
+              <a:ext uri="{FF2B5EF4-FFF2-40B4-BE49-F238E27FC236}">
+                <a16:creationId xmlns:a16="http://schemas.microsoft.com/office/drawing/2014/main" id="{AAABCFCA-DCF3-7B03-6801-1FAD0C3DE912}"/>
+              </a:ext>
+            </a:extLst>
+          </p:cNvPr>
+          <p:cNvCxnSpPr>
+            <a:cxnSpLocks/>
+          </p:cNvCxnSpPr>
+          <p:nvPr/>
+        </p:nvCxnSpPr>
+        <p:spPr>
+          <a:xfrm flipV="1">
+            <a:off x="354806" y="2035975"/>
+            <a:ext cx="273388" cy="191790"/>
+          </a:xfrm>
+          <a:prstGeom prst="straightConnector1">
+            <a:avLst/>
+          </a:prstGeom>
+          <a:ln w="12700" cap="rnd">
+            <a:round/>
+            <a:tailEnd type="triangle"/>
+          </a:ln>
+        </p:spPr>
+        <p:style>
+          <a:lnRef idx="2">
+            <a:schemeClr val="dk1"/>
+          </a:lnRef>
+          <a:fillRef idx="0">
+            <a:schemeClr val="dk1"/>
+          </a:fillRef>
+          <a:effectRef idx="1">
+            <a:schemeClr val="dk1"/>
+          </a:effectRef>
+          <a:fontRef idx="minor">
+            <a:schemeClr val="tx1"/>
+          </a:fontRef>
+        </p:style>
+      </p:cxnSp>
+      <p:sp>
+        <p:nvSpPr>
+          <p:cNvPr id="82" name="Textfeld 81">
+            <a:extLst>
+              <a:ext uri="{FF2B5EF4-FFF2-40B4-BE49-F238E27FC236}">
+                <a16:creationId xmlns:a16="http://schemas.microsoft.com/office/drawing/2014/main" id="{7AFD5268-EAEB-C5F9-6551-D9104CD813B1}"/>
+              </a:ext>
+            </a:extLst>
+          </p:cNvPr>
+          <p:cNvSpPr txBox="1"/>
+          <p:nvPr/>
+        </p:nvSpPr>
+        <p:spPr>
+          <a:xfrm>
+            <a:off x="7178" y="1711045"/>
+            <a:ext cx="703677" cy="430887"/>
+          </a:xfrm>
+          <a:prstGeom prst="rect">
+            <a:avLst/>
+          </a:prstGeom>
+          <a:noFill/>
+        </p:spPr>
+        <p:txBody>
+          <a:bodyPr wrap="square" rtlCol="0">
+            <a:spAutoFit/>
+          </a:bodyPr>
+          <a:lstStyle/>
+          <a:p>
+            <a:pPr algn="ctr"/>
+            <a:r>
+              <a:rPr lang="de-DE" sz="1100" i="1" dirty="0">
+                <a:solidFill>
+                  <a:schemeClr val="accent6">
+                    <a:lumMod val="75000"/>
+                  </a:schemeClr>
+                </a:solidFill>
+                <a:latin typeface="CMU Serif" panose="02000603000000000000" pitchFamily="2" charset="0"/>
+                <a:ea typeface="CMU Serif" panose="02000603000000000000" pitchFamily="2" charset="0"/>
+                <a:cs typeface="CMU Serif" panose="02000603000000000000" pitchFamily="2" charset="0"/>
+              </a:rPr>
+              <a:t>U</a:t>
+            </a:r>
+            <a:r>
+              <a:rPr lang="de-DE" sz="1100" baseline="-25000" dirty="0">
+                <a:solidFill>
+                  <a:schemeClr val="accent6">
+                    <a:lumMod val="75000"/>
+                  </a:schemeClr>
+                </a:solidFill>
+                <a:latin typeface="CMU Serif" panose="02000603000000000000" pitchFamily="2" charset="0"/>
+                <a:ea typeface="CMU Serif" panose="02000603000000000000" pitchFamily="2" charset="0"/>
+                <a:cs typeface="CMU Serif" panose="02000603000000000000" pitchFamily="2" charset="0"/>
+              </a:rPr>
+              <a:t>∞</a:t>
+            </a:r>
+            <a:r>
+              <a:rPr lang="de-DE" sz="1100" dirty="0">
+                <a:solidFill>
+                  <a:schemeClr val="accent6">
+                    <a:lumMod val="75000"/>
+                  </a:schemeClr>
+                </a:solidFill>
+                <a:latin typeface="CMU Serif" panose="02000603000000000000" pitchFamily="2" charset="0"/>
+                <a:ea typeface="CMU Serif" panose="02000603000000000000" pitchFamily="2" charset="0"/>
+                <a:cs typeface="CMU Serif" panose="02000603000000000000" pitchFamily="2" charset="0"/>
+              </a:rPr>
+              <a:t> </a:t>
+            </a:r>
+            <a:r>
+              <a:rPr lang="de-DE" sz="1100" dirty="0">
+                <a:latin typeface="CMU Serif" panose="02000603000000000000" pitchFamily="2" charset="0"/>
+                <a:ea typeface="CMU Serif" panose="02000603000000000000" pitchFamily="2" charset="0"/>
+                <a:cs typeface="CMU Serif" panose="02000603000000000000" pitchFamily="2" charset="0"/>
+              </a:rPr>
+              <a:t>/</a:t>
+            </a:r>
+            <a:r>
+              <a:rPr lang="de-DE" sz="1100" i="1" dirty="0">
+                <a:solidFill>
+                  <a:schemeClr val="accent2">
+                    <a:lumMod val="75000"/>
+                  </a:schemeClr>
+                </a:solidFill>
+                <a:latin typeface="CMU Serif" panose="02000603000000000000" pitchFamily="2" charset="0"/>
+                <a:ea typeface="CMU Serif" panose="02000603000000000000" pitchFamily="2" charset="0"/>
+                <a:cs typeface="CMU Serif" panose="02000603000000000000" pitchFamily="2" charset="0"/>
+              </a:rPr>
+              <a:t>U</a:t>
+            </a:r>
+            <a:r>
+              <a:rPr lang="de-DE" sz="1100" baseline="-25000" dirty="0">
+                <a:solidFill>
+                  <a:schemeClr val="accent2">
+                    <a:lumMod val="75000"/>
+                  </a:schemeClr>
+                </a:solidFill>
+                <a:latin typeface="CMU Serif" panose="02000603000000000000" pitchFamily="2" charset="0"/>
+                <a:ea typeface="CMU Serif" panose="02000603000000000000" pitchFamily="2" charset="0"/>
+                <a:cs typeface="CMU Serif" panose="02000603000000000000" pitchFamily="2" charset="0"/>
+              </a:rPr>
+              <a:t>∞</a:t>
+            </a:r>
+            <a:endParaRPr lang="de-DE" sz="1100" dirty="0">
+              <a:solidFill>
+                <a:schemeClr val="accent2">
+                  <a:lumMod val="75000"/>
+                </a:schemeClr>
+              </a:solidFill>
+              <a:latin typeface="CMU Serif" panose="02000603000000000000" pitchFamily="2" charset="0"/>
+              <a:ea typeface="CMU Serif" panose="02000603000000000000" pitchFamily="2" charset="0"/>
+              <a:cs typeface="CMU Serif" panose="02000603000000000000" pitchFamily="2" charset="0"/>
+            </a:endParaRPr>
+          </a:p>
+          <a:p>
+            <a:pPr algn="ctr"/>
+            <a:endParaRPr lang="de-DE" sz="1100" dirty="0">
+              <a:solidFill>
+                <a:schemeClr val="accent6">
+                  <a:lumMod val="75000"/>
+                </a:schemeClr>
+              </a:solidFill>
+              <a:latin typeface="CMU Serif" panose="02000603000000000000" pitchFamily="2" charset="0"/>
+              <a:ea typeface="CMU Serif" panose="02000603000000000000" pitchFamily="2" charset="0"/>
+              <a:cs typeface="CMU Serif" panose="02000603000000000000" pitchFamily="2" charset="0"/>
+            </a:endParaRPr>
+          </a:p>
+        </p:txBody>
+      </p:sp>
+      <p:sp>
+        <p:nvSpPr>
+          <p:cNvPr id="84" name="Textfeld 83">
+            <a:extLst>
+              <a:ext uri="{FF2B5EF4-FFF2-40B4-BE49-F238E27FC236}">
+                <a16:creationId xmlns:a16="http://schemas.microsoft.com/office/drawing/2014/main" id="{3C707EEF-AC0F-B5A4-B08D-6A1583344E7B}"/>
+              </a:ext>
+            </a:extLst>
+          </p:cNvPr>
+          <p:cNvSpPr txBox="1"/>
+          <p:nvPr/>
+        </p:nvSpPr>
+        <p:spPr>
+          <a:xfrm>
+            <a:off x="96869" y="2200105"/>
+            <a:ext cx="374452" cy="261610"/>
+          </a:xfrm>
+          <a:prstGeom prst="rect">
+            <a:avLst/>
+          </a:prstGeom>
+          <a:noFill/>
+        </p:spPr>
+        <p:txBody>
+          <a:bodyPr wrap="square">
+            <a:spAutoFit/>
+          </a:bodyPr>
+          <a:lstStyle/>
+          <a:p>
+            <a:r>
+              <a:rPr lang="de-DE" sz="1100" i="1" dirty="0">
+                <a:solidFill>
+                  <a:schemeClr val="tx2">
+                    <a:lumMod val="75000"/>
+                    <a:lumOff val="25000"/>
+                  </a:schemeClr>
+                </a:solidFill>
+                <a:latin typeface="CMU Serif" panose="02000603000000000000" pitchFamily="2" charset="0"/>
+                <a:ea typeface="CMU Serif" panose="02000603000000000000" pitchFamily="2" charset="0"/>
+                <a:cs typeface="CMU Serif" panose="02000603000000000000" pitchFamily="2" charset="0"/>
+              </a:rPr>
+              <a:t>U</a:t>
+            </a:r>
+            <a:r>
+              <a:rPr lang="de-DE" sz="1100" baseline="-25000" dirty="0">
+                <a:solidFill>
+                  <a:schemeClr val="tx2">
+                    <a:lumMod val="75000"/>
+                    <a:lumOff val="25000"/>
+                  </a:schemeClr>
+                </a:solidFill>
+                <a:latin typeface="CMU Serif" panose="02000603000000000000" pitchFamily="2" charset="0"/>
+                <a:ea typeface="CMU Serif" panose="02000603000000000000" pitchFamily="2" charset="0"/>
+                <a:cs typeface="CMU Serif" panose="02000603000000000000" pitchFamily="2" charset="0"/>
+              </a:rPr>
+              <a:t>∞</a:t>
+            </a:r>
+            <a:endParaRPr lang="de-DE" dirty="0">
+              <a:solidFill>
+                <a:schemeClr val="tx2">
+                  <a:lumMod val="75000"/>
+                  <a:lumOff val="25000"/>
+                </a:schemeClr>
+              </a:solidFill>
+            </a:endParaRPr>
+          </a:p>
+        </p:txBody>
+      </p:sp>
+      <p:sp>
+        <p:nvSpPr>
+          <p:cNvPr id="85" name="Bogen 84">
+            <a:extLst>
+              <a:ext uri="{FF2B5EF4-FFF2-40B4-BE49-F238E27FC236}">
+                <a16:creationId xmlns:a16="http://schemas.microsoft.com/office/drawing/2014/main" id="{0B6D7B31-023B-B3C1-EEE3-C2CF9016B86A}"/>
+              </a:ext>
+            </a:extLst>
+          </p:cNvPr>
+          <p:cNvSpPr/>
+          <p:nvPr/>
+        </p:nvSpPr>
+        <p:spPr>
+          <a:xfrm>
+            <a:off x="392906" y="1621178"/>
+            <a:ext cx="686722" cy="686722"/>
+          </a:xfrm>
+          <a:prstGeom prst="arc">
+            <a:avLst>
+              <a:gd name="adj1" fmla="val 8858262"/>
+              <a:gd name="adj2" fmla="val 10621352"/>
+            </a:avLst>
+          </a:prstGeom>
+          <a:ln w="12700" cap="rnd">
+            <a:solidFill>
+              <a:schemeClr val="accent5"/>
+            </a:solidFill>
+            <a:round/>
+            <a:headEnd type="triangle" w="sm" len="sm"/>
+          </a:ln>
+        </p:spPr>
+        <p:style>
+          <a:lnRef idx="2">
+            <a:schemeClr val="accent1"/>
+          </a:lnRef>
+          <a:fillRef idx="0">
+            <a:schemeClr val="accent1"/>
+          </a:fillRef>
+          <a:effectRef idx="1">
+            <a:schemeClr val="accent1"/>
+          </a:effectRef>
+          <a:fontRef idx="minor">
+            <a:schemeClr val="tx1"/>
+          </a:fontRef>
+        </p:style>
+        <p:txBody>
+          <a:bodyPr rtlCol="0" anchor="ctr"/>
+          <a:lstStyle/>
+          <a:p>
+            <a:pPr algn="ctr"/>
+            <a:endParaRPr lang="de-DE"/>
+          </a:p>
+        </p:txBody>
+      </p:sp>
+      <p:sp>
+        <p:nvSpPr>
+          <p:cNvPr id="87" name="Textfeld 86">
+            <a:extLst>
+              <a:ext uri="{FF2B5EF4-FFF2-40B4-BE49-F238E27FC236}">
+                <a16:creationId xmlns:a16="http://schemas.microsoft.com/office/drawing/2014/main" id="{D6B011DB-B875-B25A-24F5-767EAAAEDD70}"/>
+              </a:ext>
+            </a:extLst>
+          </p:cNvPr>
+          <p:cNvSpPr txBox="1"/>
+          <p:nvPr/>
+        </p:nvSpPr>
+        <p:spPr>
+          <a:xfrm>
+            <a:off x="107121" y="1990857"/>
+            <a:ext cx="366666" cy="261610"/>
+          </a:xfrm>
+          <a:prstGeom prst="rect">
+            <a:avLst/>
+          </a:prstGeom>
+          <a:noFill/>
+        </p:spPr>
+        <p:txBody>
+          <a:bodyPr wrap="square">
+            <a:spAutoFit/>
+          </a:bodyPr>
+          <a:lstStyle/>
+          <a:p>
+            <a:r>
+              <a:rPr lang="de-DE" sz="1100" i="1" dirty="0">
+                <a:solidFill>
+                  <a:schemeClr val="accent5"/>
+                </a:solidFill>
+                <a:latin typeface="Latin Modern Math" panose="02000503000000000000" pitchFamily="50" charset="0"/>
+                <a:ea typeface="Latin Modern Math" panose="02000503000000000000" pitchFamily="50" charset="0"/>
+                <a:cs typeface="CMU Serif" panose="02000603000000000000" pitchFamily="2" charset="0"/>
+              </a:rPr>
+              <a:t>α</a:t>
+            </a:r>
+            <a:r>
+              <a:rPr lang="de-DE" sz="1100" dirty="0">
+                <a:solidFill>
+                  <a:schemeClr val="accent5"/>
+                </a:solidFill>
+                <a:latin typeface="CMU Serif" panose="02000603000000000000" pitchFamily="2" charset="0"/>
+                <a:ea typeface="CMU Serif" panose="02000603000000000000" pitchFamily="2" charset="0"/>
+                <a:cs typeface="CMU Serif" panose="02000603000000000000" pitchFamily="2" charset="0"/>
+              </a:rPr>
+              <a:t>*</a:t>
+            </a:r>
+            <a:endParaRPr lang="de-DE" dirty="0">
+              <a:solidFill>
+                <a:schemeClr val="accent5"/>
+              </a:solidFill>
+            </a:endParaRPr>
+          </a:p>
+        </p:txBody>
+      </p:sp>
+      <p:sp>
+        <p:nvSpPr>
+          <p:cNvPr id="89" name="Textfeld 88">
+            <a:extLst>
+              <a:ext uri="{FF2B5EF4-FFF2-40B4-BE49-F238E27FC236}">
+                <a16:creationId xmlns:a16="http://schemas.microsoft.com/office/drawing/2014/main" id="{E49A7E6C-C58A-C10C-14FF-E975C0DA7BD5}"/>
+              </a:ext>
+            </a:extLst>
+          </p:cNvPr>
+          <p:cNvSpPr txBox="1"/>
+          <p:nvPr/>
+        </p:nvSpPr>
+        <p:spPr>
+          <a:xfrm>
+            <a:off x="1165810" y="1012124"/>
+            <a:ext cx="512970" cy="261610"/>
+          </a:xfrm>
+          <a:prstGeom prst="rect">
+            <a:avLst/>
+          </a:prstGeom>
+          <a:noFill/>
+        </p:spPr>
+        <p:txBody>
+          <a:bodyPr wrap="square" rtlCol="0">
+            <a:spAutoFit/>
+          </a:bodyPr>
+          <a:lstStyle/>
+          <a:p>
+            <a:pPr algn="ctr"/>
+            <a:r>
+              <a:rPr lang="de-DE" sz="1100" i="1" dirty="0">
+                <a:solidFill>
+                  <a:schemeClr val="tx2">
+                    <a:lumMod val="75000"/>
+                    <a:lumOff val="25000"/>
+                  </a:schemeClr>
+                </a:solidFill>
+                <a:latin typeface="CMU Serif" panose="02000603000000000000" pitchFamily="2" charset="0"/>
+                <a:ea typeface="CMU Serif" panose="02000603000000000000" pitchFamily="2" charset="0"/>
+                <a:cs typeface="CMU Serif" panose="02000603000000000000" pitchFamily="2" charset="0"/>
+              </a:rPr>
+              <a:t>i</a:t>
+            </a:r>
+            <a:r>
+              <a:rPr lang="de-DE" sz="1100" dirty="0">
+                <a:solidFill>
+                  <a:schemeClr val="tx2">
+                    <a:lumMod val="75000"/>
+                    <a:lumOff val="25000"/>
+                  </a:schemeClr>
+                </a:solidFill>
+                <a:latin typeface="CMU Serif" panose="02000603000000000000" pitchFamily="2" charset="0"/>
+                <a:ea typeface="CMU Serif" panose="02000603000000000000" pitchFamily="2" charset="0"/>
+                <a:cs typeface="CMU Serif" panose="02000603000000000000" pitchFamily="2" charset="0"/>
+              </a:rPr>
+              <a:t> = 0</a:t>
+            </a:r>
+          </a:p>
+        </p:txBody>
+      </p:sp>
+      <p:sp>
+        <p:nvSpPr>
+          <p:cNvPr id="91" name="Textfeld 90">
+            <a:extLst>
+              <a:ext uri="{FF2B5EF4-FFF2-40B4-BE49-F238E27FC236}">
+                <a16:creationId xmlns:a16="http://schemas.microsoft.com/office/drawing/2014/main" id="{15019017-63D1-ED4A-FF20-F6FB3D206934}"/>
+              </a:ext>
+            </a:extLst>
+          </p:cNvPr>
+          <p:cNvSpPr txBox="1"/>
+          <p:nvPr/>
+        </p:nvSpPr>
+        <p:spPr>
+          <a:xfrm>
+            <a:off x="1696828" y="1012124"/>
+            <a:ext cx="512970" cy="261610"/>
+          </a:xfrm>
+          <a:prstGeom prst="rect">
+            <a:avLst/>
+          </a:prstGeom>
+          <a:noFill/>
+        </p:spPr>
+        <p:txBody>
+          <a:bodyPr wrap="square" rtlCol="0">
+            <a:spAutoFit/>
+          </a:bodyPr>
+          <a:lstStyle/>
+          <a:p>
+            <a:pPr algn="ctr"/>
+            <a:r>
+              <a:rPr lang="de-DE" sz="1100" i="1" dirty="0">
+                <a:solidFill>
+                  <a:schemeClr val="accent6">
+                    <a:lumMod val="75000"/>
+                  </a:schemeClr>
+                </a:solidFill>
+                <a:latin typeface="CMU Serif" panose="02000603000000000000" pitchFamily="2" charset="0"/>
+                <a:ea typeface="CMU Serif" panose="02000603000000000000" pitchFamily="2" charset="0"/>
+                <a:cs typeface="CMU Serif" panose="02000603000000000000" pitchFamily="2" charset="0"/>
+              </a:rPr>
+              <a:t>i</a:t>
+            </a:r>
+            <a:r>
+              <a:rPr lang="de-DE" sz="1100" dirty="0">
+                <a:solidFill>
+                  <a:schemeClr val="accent6">
+                    <a:lumMod val="75000"/>
+                  </a:schemeClr>
+                </a:solidFill>
+                <a:latin typeface="CMU Serif" panose="02000603000000000000" pitchFamily="2" charset="0"/>
+                <a:ea typeface="CMU Serif" panose="02000603000000000000" pitchFamily="2" charset="0"/>
+                <a:cs typeface="CMU Serif" panose="02000603000000000000" pitchFamily="2" charset="0"/>
+              </a:rPr>
+              <a:t> = 1</a:t>
+            </a:r>
+          </a:p>
+        </p:txBody>
+      </p:sp>
+      <p:sp>
+        <p:nvSpPr>
+          <p:cNvPr id="93" name="Textfeld 92">
+            <a:extLst>
+              <a:ext uri="{FF2B5EF4-FFF2-40B4-BE49-F238E27FC236}">
+                <a16:creationId xmlns:a16="http://schemas.microsoft.com/office/drawing/2014/main" id="{B9993E86-959C-6AE3-65EA-F90303403977}"/>
+              </a:ext>
+            </a:extLst>
+          </p:cNvPr>
+          <p:cNvSpPr txBox="1"/>
+          <p:nvPr/>
+        </p:nvSpPr>
+        <p:spPr>
+          <a:xfrm>
+            <a:off x="1165810" y="2631527"/>
+            <a:ext cx="512970" cy="261610"/>
+          </a:xfrm>
+          <a:prstGeom prst="rect">
+            <a:avLst/>
+          </a:prstGeom>
+          <a:noFill/>
+        </p:spPr>
+        <p:txBody>
+          <a:bodyPr wrap="square" rtlCol="0">
+            <a:spAutoFit/>
+          </a:bodyPr>
+          <a:lstStyle/>
+          <a:p>
+            <a:pPr algn="ctr"/>
+            <a:r>
+              <a:rPr lang="de-DE" sz="1100" i="1" dirty="0">
+                <a:solidFill>
+                  <a:schemeClr val="accent2">
+                    <a:lumMod val="75000"/>
+                  </a:schemeClr>
+                </a:solidFill>
+                <a:latin typeface="CMU Serif" panose="02000603000000000000" pitchFamily="2" charset="0"/>
+                <a:ea typeface="CMU Serif" panose="02000603000000000000" pitchFamily="2" charset="0"/>
+                <a:cs typeface="CMU Serif" panose="02000603000000000000" pitchFamily="2" charset="0"/>
+              </a:rPr>
+              <a:t>i</a:t>
+            </a:r>
+            <a:r>
+              <a:rPr lang="de-DE" sz="1100" dirty="0">
+                <a:solidFill>
+                  <a:schemeClr val="accent2">
+                    <a:lumMod val="75000"/>
+                  </a:schemeClr>
+                </a:solidFill>
+                <a:latin typeface="CMU Serif" panose="02000603000000000000" pitchFamily="2" charset="0"/>
+                <a:ea typeface="CMU Serif" panose="02000603000000000000" pitchFamily="2" charset="0"/>
+                <a:cs typeface="CMU Serif" panose="02000603000000000000" pitchFamily="2" charset="0"/>
+              </a:rPr>
+              <a:t> = 2</a:t>
+            </a:r>
+          </a:p>
+        </p:txBody>
+      </p:sp>
+      <p:cxnSp>
+        <p:nvCxnSpPr>
+          <p:cNvPr id="94" name="Gerader Verbinder 93">
+            <a:extLst>
+              <a:ext uri="{FF2B5EF4-FFF2-40B4-BE49-F238E27FC236}">
+                <a16:creationId xmlns:a16="http://schemas.microsoft.com/office/drawing/2014/main" id="{F5D3A26A-AD07-C4C6-4C64-089BF3EC611B}"/>
+              </a:ext>
+            </a:extLst>
+          </p:cNvPr>
+          <p:cNvCxnSpPr>
+            <a:cxnSpLocks/>
+            <a:stCxn id="30" idx="1"/>
+          </p:cNvCxnSpPr>
+          <p:nvPr/>
+        </p:nvCxnSpPr>
+        <p:spPr>
+          <a:xfrm flipV="1">
+            <a:off x="1868052" y="1222706"/>
+            <a:ext cx="72423" cy="272411"/>
+          </a:xfrm>
+          <a:prstGeom prst="line">
+            <a:avLst/>
+          </a:prstGeom>
+          <a:ln w="6350" cap="rnd">
+            <a:solidFill>
+              <a:schemeClr val="accent6">
+                <a:lumMod val="75000"/>
+              </a:schemeClr>
+            </a:solidFill>
+            <a:prstDash val="solid"/>
+            <a:round/>
+          </a:ln>
+        </p:spPr>
+        <p:style>
+          <a:lnRef idx="2">
+            <a:schemeClr val="accent1"/>
+          </a:lnRef>
+          <a:fillRef idx="0">
+            <a:schemeClr val="accent1"/>
+          </a:fillRef>
+          <a:effectRef idx="1">
+            <a:schemeClr val="accent1"/>
+          </a:effectRef>
+          <a:fontRef idx="minor">
+            <a:schemeClr val="tx1"/>
+          </a:fontRef>
+        </p:style>
+      </p:cxnSp>
+      <p:cxnSp>
+        <p:nvCxnSpPr>
+          <p:cNvPr id="97" name="Gerader Verbinder 96">
+            <a:extLst>
+              <a:ext uri="{FF2B5EF4-FFF2-40B4-BE49-F238E27FC236}">
+                <a16:creationId xmlns:a16="http://schemas.microsoft.com/office/drawing/2014/main" id="{FCA54879-7E73-9417-929D-2B745A82576C}"/>
+              </a:ext>
+            </a:extLst>
+          </p:cNvPr>
+          <p:cNvCxnSpPr>
+            <a:cxnSpLocks/>
+          </p:cNvCxnSpPr>
+          <p:nvPr/>
+        </p:nvCxnSpPr>
+        <p:spPr>
+          <a:xfrm flipV="1">
+            <a:off x="1223963" y="1219756"/>
+            <a:ext cx="167018" cy="225663"/>
+          </a:xfrm>
+          <a:prstGeom prst="line">
+            <a:avLst/>
+          </a:prstGeom>
+          <a:ln w="6350" cap="rnd">
+            <a:solidFill>
+              <a:schemeClr val="tx2">
+                <a:lumMod val="75000"/>
+                <a:lumOff val="25000"/>
+              </a:schemeClr>
+            </a:solidFill>
+            <a:prstDash val="solid"/>
+            <a:round/>
+          </a:ln>
+        </p:spPr>
+        <p:style>
+          <a:lnRef idx="2">
+            <a:schemeClr val="accent1"/>
+          </a:lnRef>
+          <a:fillRef idx="0">
+            <a:schemeClr val="accent1"/>
+          </a:fillRef>
+          <a:effectRef idx="1">
+            <a:schemeClr val="accent1"/>
+          </a:effectRef>
+          <a:fontRef idx="minor">
+            <a:schemeClr val="tx1"/>
+          </a:fontRef>
+        </p:style>
+      </p:cxnSp>
+      <p:cxnSp>
+        <p:nvCxnSpPr>
+          <p:cNvPr id="99" name="Gerader Verbinder 98">
+            <a:extLst>
+              <a:ext uri="{FF2B5EF4-FFF2-40B4-BE49-F238E27FC236}">
+                <a16:creationId xmlns:a16="http://schemas.microsoft.com/office/drawing/2014/main" id="{1772B2E7-A891-FD8D-9B1C-E650CC810C09}"/>
+              </a:ext>
+            </a:extLst>
+          </p:cNvPr>
+          <p:cNvCxnSpPr>
+            <a:cxnSpLocks/>
+          </p:cNvCxnSpPr>
+          <p:nvPr/>
+        </p:nvCxnSpPr>
+        <p:spPr>
+          <a:xfrm flipV="1">
+            <a:off x="1463675" y="2298700"/>
+            <a:ext cx="450850" cy="377825"/>
+          </a:xfrm>
+          <a:prstGeom prst="line">
+            <a:avLst/>
+          </a:prstGeom>
+          <a:ln w="6350" cap="rnd">
+            <a:solidFill>
+              <a:schemeClr val="accent2">
+                <a:lumMod val="75000"/>
+              </a:schemeClr>
+            </a:solidFill>
+            <a:prstDash val="solid"/>
+            <a:round/>
+          </a:ln>
+        </p:spPr>
+        <p:style>
+          <a:lnRef idx="2">
+            <a:schemeClr val="accent1"/>
+          </a:lnRef>
+          <a:fillRef idx="0">
+            <a:schemeClr val="accent1"/>
+          </a:fillRef>
+          <a:effectRef idx="1">
+            <a:schemeClr val="accent1"/>
+          </a:effectRef>
+          <a:fontRef idx="minor">
+            <a:schemeClr val="tx1"/>
+          </a:fontRef>
+        </p:style>
+      </p:cxnSp>
+      <p:sp>
+        <p:nvSpPr>
+          <p:cNvPr id="105" name="Textfeld 104">
+            <a:extLst>
+              <a:ext uri="{FF2B5EF4-FFF2-40B4-BE49-F238E27FC236}">
+                <a16:creationId xmlns:a16="http://schemas.microsoft.com/office/drawing/2014/main" id="{3A11952F-744E-4740-773F-7374777233CE}"/>
+              </a:ext>
+            </a:extLst>
+          </p:cNvPr>
+          <p:cNvSpPr txBox="1"/>
+          <p:nvPr/>
+        </p:nvSpPr>
+        <p:spPr>
+          <a:xfrm>
+            <a:off x="952616" y="1627408"/>
+            <a:ext cx="1165694" cy="261610"/>
+          </a:xfrm>
+          <a:prstGeom prst="rect">
+            <a:avLst/>
+          </a:prstGeom>
+          <a:noFill/>
+        </p:spPr>
+        <p:txBody>
+          <a:bodyPr wrap="square" rtlCol="0">
+            <a:spAutoFit/>
+          </a:bodyPr>
+          <a:lstStyle/>
+          <a:p>
+            <a:pPr algn="ctr"/>
+            <a:r>
+              <a:rPr lang="de-DE" sz="1100" i="1" dirty="0">
+                <a:solidFill>
+                  <a:schemeClr val="tx2">
+                    <a:lumMod val="75000"/>
+                    <a:lumOff val="25000"/>
+                  </a:schemeClr>
+                </a:solidFill>
+                <a:latin typeface="Latin Modern Math" panose="02000503000000000000" pitchFamily="50" charset="0"/>
+                <a:ea typeface="Latin Modern Math" panose="02000503000000000000" pitchFamily="50" charset="0"/>
+                <a:cs typeface="CMU Serif" panose="02000603000000000000" pitchFamily="2" charset="0"/>
+              </a:rPr>
+              <a:t>α</a:t>
+            </a:r>
+            <a:r>
+              <a:rPr lang="de-DE" sz="1100" baseline="-25000" dirty="0">
+                <a:solidFill>
+                  <a:schemeClr val="tx2">
+                    <a:lumMod val="75000"/>
+                    <a:lumOff val="25000"/>
+                  </a:schemeClr>
+                </a:solidFill>
+                <a:latin typeface="CMU Serif" panose="02000603000000000000" pitchFamily="2" charset="0"/>
+                <a:ea typeface="CMU Serif" panose="02000603000000000000" pitchFamily="2" charset="0"/>
+                <a:cs typeface="CMU Serif" panose="02000603000000000000" pitchFamily="2" charset="0"/>
+              </a:rPr>
+              <a:t>0</a:t>
+            </a:r>
+            <a:r>
+              <a:rPr lang="de-DE" sz="1100" i="1" dirty="0">
+                <a:solidFill>
+                  <a:schemeClr val="tx2">
+                    <a:lumMod val="75000"/>
+                    <a:lumOff val="25000"/>
+                  </a:schemeClr>
+                </a:solidFill>
+                <a:latin typeface="Latin Modern Math" panose="02000503000000000000" pitchFamily="50" charset="0"/>
+                <a:ea typeface="Latin Modern Math" panose="02000503000000000000" pitchFamily="50" charset="0"/>
+                <a:cs typeface="CMU Serif" panose="02000603000000000000" pitchFamily="2" charset="0"/>
+              </a:rPr>
+              <a:t> </a:t>
+            </a:r>
+            <a:r>
+              <a:rPr lang="de-DE" sz="1100" dirty="0">
+                <a:solidFill>
+                  <a:schemeClr val="tx2">
+                    <a:lumMod val="75000"/>
+                    <a:lumOff val="25000"/>
+                  </a:schemeClr>
+                </a:solidFill>
+                <a:latin typeface="CMU Serif" panose="02000603000000000000" pitchFamily="2" charset="0"/>
+                <a:ea typeface="CMU Serif" panose="02000603000000000000" pitchFamily="2" charset="0"/>
+                <a:cs typeface="CMU Serif" panose="02000603000000000000" pitchFamily="2" charset="0"/>
+              </a:rPr>
+              <a:t>=</a:t>
+            </a:r>
+            <a:r>
+              <a:rPr lang="de-DE" sz="1100" i="1" dirty="0">
+                <a:solidFill>
+                  <a:schemeClr val="tx2">
+                    <a:lumMod val="75000"/>
+                    <a:lumOff val="25000"/>
+                  </a:schemeClr>
+                </a:solidFill>
+                <a:latin typeface="CMU Serif" panose="02000603000000000000" pitchFamily="2" charset="0"/>
+                <a:ea typeface="CMU Serif" panose="02000603000000000000" pitchFamily="2" charset="0"/>
+                <a:cs typeface="CMU Serif" panose="02000603000000000000" pitchFamily="2" charset="0"/>
+              </a:rPr>
+              <a:t>A</a:t>
+            </a:r>
+            <a:r>
+              <a:rPr lang="de-DE" sz="1100" baseline="-25000" dirty="0">
+                <a:solidFill>
+                  <a:schemeClr val="tx2">
+                    <a:lumMod val="75000"/>
+                    <a:lumOff val="25000"/>
+                  </a:schemeClr>
+                </a:solidFill>
+                <a:latin typeface="CMU Serif" panose="02000603000000000000" pitchFamily="2" charset="0"/>
+                <a:ea typeface="CMU Serif" panose="02000603000000000000" pitchFamily="2" charset="0"/>
+                <a:cs typeface="CMU Serif" panose="02000603000000000000" pitchFamily="2" charset="0"/>
+              </a:rPr>
+              <a:t>0 </a:t>
+            </a:r>
+            <a:r>
+              <a:rPr lang="de-DE" sz="1100" dirty="0">
+                <a:solidFill>
+                  <a:schemeClr val="tx2">
+                    <a:lumMod val="75000"/>
+                    <a:lumOff val="25000"/>
+                  </a:schemeClr>
+                </a:solidFill>
+                <a:latin typeface="CMU Serif" panose="02000603000000000000" pitchFamily="2" charset="0"/>
+                <a:ea typeface="CMU Serif" panose="02000603000000000000" pitchFamily="2" charset="0"/>
+                <a:cs typeface="CMU Serif" panose="02000603000000000000" pitchFamily="2" charset="0"/>
+              </a:rPr>
+              <a:t>− </a:t>
+            </a:r>
+            <a:r>
+              <a:rPr lang="de-DE" sz="1100" i="1" dirty="0">
+                <a:solidFill>
+                  <a:schemeClr val="tx2">
+                    <a:lumMod val="75000"/>
+                    <a:lumOff val="25000"/>
+                  </a:schemeClr>
+                </a:solidFill>
+                <a:latin typeface="Latin Modern Math" panose="02000503000000000000" pitchFamily="50" charset="0"/>
+                <a:ea typeface="Latin Modern Math" panose="02000503000000000000" pitchFamily="50" charset="0"/>
+                <a:cs typeface="CMU Serif" panose="02000603000000000000" pitchFamily="2" charset="0"/>
+              </a:rPr>
+              <a:t>α</a:t>
+            </a:r>
+            <a:r>
+              <a:rPr lang="de-DE" sz="1100" dirty="0">
+                <a:solidFill>
+                  <a:schemeClr val="tx2">
+                    <a:lumMod val="75000"/>
+                    <a:lumOff val="25000"/>
+                  </a:schemeClr>
+                </a:solidFill>
+                <a:latin typeface="CMU Serif" panose="02000603000000000000" pitchFamily="2" charset="0"/>
+                <a:ea typeface="CMU Serif" panose="02000603000000000000" pitchFamily="2" charset="0"/>
+                <a:cs typeface="CMU Serif" panose="02000603000000000000" pitchFamily="2" charset="0"/>
+              </a:rPr>
+              <a:t>*</a:t>
+            </a:r>
+          </a:p>
+        </p:txBody>
+      </p:sp>
+      <p:sp>
+        <p:nvSpPr>
+          <p:cNvPr id="114" name="Textfeld 113">
+            <a:extLst>
+              <a:ext uri="{FF2B5EF4-FFF2-40B4-BE49-F238E27FC236}">
+                <a16:creationId xmlns:a16="http://schemas.microsoft.com/office/drawing/2014/main" id="{BCB4D91D-C06A-C935-D3EE-A2E534FBF164}"/>
+              </a:ext>
+            </a:extLst>
+          </p:cNvPr>
+          <p:cNvSpPr txBox="1"/>
+          <p:nvPr/>
+        </p:nvSpPr>
+        <p:spPr>
+          <a:xfrm>
+            <a:off x="1698598" y="1970501"/>
+            <a:ext cx="1165694" cy="261610"/>
+          </a:xfrm>
+          <a:prstGeom prst="rect">
+            <a:avLst/>
+          </a:prstGeom>
+          <a:noFill/>
+        </p:spPr>
+        <p:txBody>
+          <a:bodyPr wrap="square" rtlCol="0">
+            <a:spAutoFit/>
+          </a:bodyPr>
+          <a:lstStyle/>
+          <a:p>
+            <a:pPr algn="ctr"/>
+            <a:r>
+              <a:rPr lang="de-DE" sz="1100" i="1" dirty="0">
+                <a:solidFill>
+                  <a:schemeClr val="accent2">
+                    <a:lumMod val="75000"/>
+                  </a:schemeClr>
+                </a:solidFill>
+                <a:latin typeface="Latin Modern Math" panose="02000503000000000000" pitchFamily="50" charset="0"/>
+                <a:ea typeface="Latin Modern Math" panose="02000503000000000000" pitchFamily="50" charset="0"/>
+                <a:cs typeface="CMU Serif" panose="02000603000000000000" pitchFamily="2" charset="0"/>
+              </a:rPr>
+              <a:t>α</a:t>
+            </a:r>
+            <a:r>
+              <a:rPr lang="de-DE" sz="1100" baseline="-25000" dirty="0">
+                <a:solidFill>
+                  <a:schemeClr val="accent2">
+                    <a:lumMod val="75000"/>
+                  </a:schemeClr>
+                </a:solidFill>
+                <a:latin typeface="CMU Serif" panose="02000603000000000000" pitchFamily="2" charset="0"/>
+                <a:ea typeface="CMU Serif" panose="02000603000000000000" pitchFamily="2" charset="0"/>
+                <a:cs typeface="CMU Serif" panose="02000603000000000000" pitchFamily="2" charset="0"/>
+              </a:rPr>
+              <a:t>2</a:t>
+            </a:r>
+            <a:r>
+              <a:rPr lang="de-DE" sz="1100" i="1" dirty="0">
+                <a:solidFill>
+                  <a:schemeClr val="accent2">
+                    <a:lumMod val="75000"/>
+                  </a:schemeClr>
+                </a:solidFill>
+                <a:latin typeface="Latin Modern Math" panose="02000503000000000000" pitchFamily="50" charset="0"/>
+                <a:ea typeface="Latin Modern Math" panose="02000503000000000000" pitchFamily="50" charset="0"/>
+                <a:cs typeface="CMU Serif" panose="02000603000000000000" pitchFamily="2" charset="0"/>
+              </a:rPr>
+              <a:t> </a:t>
+            </a:r>
+            <a:r>
+              <a:rPr lang="de-DE" sz="1100" dirty="0">
+                <a:solidFill>
+                  <a:schemeClr val="accent2">
+                    <a:lumMod val="75000"/>
+                  </a:schemeClr>
+                </a:solidFill>
+                <a:latin typeface="CMU Serif" panose="02000603000000000000" pitchFamily="2" charset="0"/>
+                <a:ea typeface="CMU Serif" panose="02000603000000000000" pitchFamily="2" charset="0"/>
+                <a:cs typeface="CMU Serif" panose="02000603000000000000" pitchFamily="2" charset="0"/>
+              </a:rPr>
+              <a:t>=</a:t>
+            </a:r>
+            <a:r>
+              <a:rPr lang="de-DE" sz="1100" i="1" dirty="0">
+                <a:solidFill>
+                  <a:schemeClr val="accent2">
+                    <a:lumMod val="75000"/>
+                  </a:schemeClr>
+                </a:solidFill>
+                <a:latin typeface="CMU Serif" panose="02000603000000000000" pitchFamily="2" charset="0"/>
+                <a:ea typeface="CMU Serif" panose="02000603000000000000" pitchFamily="2" charset="0"/>
+                <a:cs typeface="CMU Serif" panose="02000603000000000000" pitchFamily="2" charset="0"/>
+              </a:rPr>
+              <a:t>A</a:t>
+            </a:r>
+            <a:r>
+              <a:rPr lang="de-DE" sz="1100" baseline="-25000" dirty="0">
+                <a:solidFill>
+                  <a:schemeClr val="accent2">
+                    <a:lumMod val="75000"/>
+                  </a:schemeClr>
+                </a:solidFill>
+                <a:latin typeface="CMU Serif" panose="02000603000000000000" pitchFamily="2" charset="0"/>
+                <a:ea typeface="CMU Serif" panose="02000603000000000000" pitchFamily="2" charset="0"/>
+                <a:cs typeface="CMU Serif" panose="02000603000000000000" pitchFamily="2" charset="0"/>
+              </a:rPr>
+              <a:t>2 </a:t>
+            </a:r>
+            <a:r>
+              <a:rPr lang="de-DE" sz="1100" dirty="0">
+                <a:solidFill>
+                  <a:schemeClr val="accent2">
+                    <a:lumMod val="75000"/>
+                  </a:schemeClr>
+                </a:solidFill>
+                <a:latin typeface="CMU Serif" panose="02000603000000000000" pitchFamily="2" charset="0"/>
+                <a:ea typeface="CMU Serif" panose="02000603000000000000" pitchFamily="2" charset="0"/>
+                <a:cs typeface="CMU Serif" panose="02000603000000000000" pitchFamily="2" charset="0"/>
+              </a:rPr>
+              <a:t>/3</a:t>
+            </a:r>
+          </a:p>
+        </p:txBody>
+      </p:sp>
     </p:spTree>
     <p:extLst>
       <p:ext uri="{BB962C8B-B14F-4D97-AF65-F5344CB8AC3E}">
@@ -5125,6 +7909,1401 @@
 </file>
 
 <file path=ppt/slides/slide3.xml><?xml version="1.0" encoding="utf-8"?>
+<p:sld xmlns:a="http://schemas.openxmlformats.org/drawingml/2006/main" xmlns:r="http://schemas.openxmlformats.org/officeDocument/2006/relationships" xmlns:p="http://schemas.openxmlformats.org/presentationml/2006/main">
+  <p:cSld>
+    <p:spTree>
+      <p:nvGrpSpPr>
+        <p:cNvPr id="1" name="">
+          <a:extLst>
+            <a:ext uri="{FF2B5EF4-FFF2-40B4-BE49-F238E27FC236}">
+              <a16:creationId xmlns:a16="http://schemas.microsoft.com/office/drawing/2014/main" id="{A95ABE8C-0631-F2E6-BDED-92AEB65BDE51}"/>
+            </a:ext>
+          </a:extLst>
+        </p:cNvPr>
+        <p:cNvGrpSpPr/>
+        <p:nvPr/>
+      </p:nvGrpSpPr>
+      <p:grpSpPr>
+        <a:xfrm>
+          <a:off x="0" y="0"/>
+          <a:ext cx="0" cy="0"/>
+          <a:chOff x="0" y="0"/>
+          <a:chExt cx="0" cy="0"/>
+        </a:xfrm>
+      </p:grpSpPr>
+      <p:grpSp>
+        <p:nvGrpSpPr>
+          <p:cNvPr id="14" name="Gruppieren 13">
+            <a:extLst>
+              <a:ext uri="{FF2B5EF4-FFF2-40B4-BE49-F238E27FC236}">
+                <a16:creationId xmlns:a16="http://schemas.microsoft.com/office/drawing/2014/main" id="{C93ACA81-9180-CFEB-5B4C-9444191A75D3}"/>
+              </a:ext>
+            </a:extLst>
+          </p:cNvPr>
+          <p:cNvGrpSpPr/>
+          <p:nvPr/>
+        </p:nvGrpSpPr>
+        <p:grpSpPr>
+          <a:xfrm>
+            <a:off x="3063700" y="1759457"/>
+            <a:ext cx="297655" cy="495659"/>
+            <a:chOff x="2818943" y="1913621"/>
+            <a:chExt cx="297655" cy="495659"/>
+          </a:xfrm>
+        </p:grpSpPr>
+        <p:cxnSp>
+          <p:nvCxnSpPr>
+            <p:cNvPr id="7" name="Gerader Verbinder 6">
+              <a:extLst>
+                <a:ext uri="{FF2B5EF4-FFF2-40B4-BE49-F238E27FC236}">
+                  <a16:creationId xmlns:a16="http://schemas.microsoft.com/office/drawing/2014/main" id="{BADDE350-52D7-B9CA-ED85-7891713AC68F}"/>
+                </a:ext>
+              </a:extLst>
+            </p:cNvPr>
+            <p:cNvCxnSpPr>
+              <a:cxnSpLocks/>
+            </p:cNvCxnSpPr>
+            <p:nvPr/>
+          </p:nvCxnSpPr>
+          <p:spPr>
+            <a:xfrm>
+              <a:off x="2917031" y="2152650"/>
+              <a:ext cx="132274" cy="0"/>
+            </a:xfrm>
+            <a:prstGeom prst="line">
+              <a:avLst/>
+            </a:prstGeom>
+            <a:ln w="9525" cap="rnd">
+              <a:round/>
+            </a:ln>
+          </p:spPr>
+          <p:style>
+            <a:lnRef idx="2">
+              <a:schemeClr val="dk1"/>
+            </a:lnRef>
+            <a:fillRef idx="0">
+              <a:schemeClr val="dk1"/>
+            </a:fillRef>
+            <a:effectRef idx="1">
+              <a:schemeClr val="dk1"/>
+            </a:effectRef>
+            <a:fontRef idx="minor">
+              <a:schemeClr val="tx1"/>
+            </a:fontRef>
+          </p:style>
+        </p:cxnSp>
+        <p:sp>
+          <p:nvSpPr>
+            <p:cNvPr id="9" name="Textfeld 8">
+              <a:extLst>
+                <a:ext uri="{FF2B5EF4-FFF2-40B4-BE49-F238E27FC236}">
+                  <a16:creationId xmlns:a16="http://schemas.microsoft.com/office/drawing/2014/main" id="{C6FD2DB6-E6D6-E278-CB11-2E5423938AAD}"/>
+                </a:ext>
+              </a:extLst>
+            </p:cNvPr>
+            <p:cNvSpPr txBox="1"/>
+            <p:nvPr/>
+          </p:nvSpPr>
+          <p:spPr>
+            <a:xfrm>
+              <a:off x="2821323" y="1913621"/>
+              <a:ext cx="295275" cy="307777"/>
+            </a:xfrm>
+            <a:prstGeom prst="rect">
+              <a:avLst/>
+            </a:prstGeom>
+            <a:noFill/>
+          </p:spPr>
+          <p:txBody>
+            <a:bodyPr wrap="square" rtlCol="0">
+              <a:spAutoFit/>
+            </a:bodyPr>
+            <a:lstStyle/>
+            <a:p>
+              <a:pPr algn="ctr"/>
+              <a:r>
+                <a:rPr lang="de-DE" sz="1400" i="1" dirty="0">
+                  <a:latin typeface="CMU Serif" panose="02000603000000000000" pitchFamily="2" charset="0"/>
+                  <a:ea typeface="CMU Serif" panose="02000603000000000000" pitchFamily="2" charset="0"/>
+                  <a:cs typeface="CMU Serif" panose="02000603000000000000" pitchFamily="2" charset="0"/>
+                </a:rPr>
+                <a:t>x</a:t>
+              </a:r>
+            </a:p>
+          </p:txBody>
+        </p:sp>
+        <p:sp>
+          <p:nvSpPr>
+            <p:cNvPr id="11" name="Textfeld 10">
+              <a:extLst>
+                <a:ext uri="{FF2B5EF4-FFF2-40B4-BE49-F238E27FC236}">
+                  <a16:creationId xmlns:a16="http://schemas.microsoft.com/office/drawing/2014/main" id="{B38EA8C7-0D88-F005-D19B-3C1245AC0656}"/>
+                </a:ext>
+              </a:extLst>
+            </p:cNvPr>
+            <p:cNvSpPr txBox="1"/>
+            <p:nvPr/>
+          </p:nvSpPr>
+          <p:spPr>
+            <a:xfrm>
+              <a:off x="2818943" y="2101503"/>
+              <a:ext cx="295275" cy="307777"/>
+            </a:xfrm>
+            <a:prstGeom prst="rect">
+              <a:avLst/>
+            </a:prstGeom>
+            <a:noFill/>
+          </p:spPr>
+          <p:txBody>
+            <a:bodyPr wrap="square" rtlCol="0">
+              <a:spAutoFit/>
+            </a:bodyPr>
+            <a:lstStyle/>
+            <a:p>
+              <a:pPr algn="ctr"/>
+              <a:r>
+                <a:rPr lang="de-DE" sz="1400" i="1" dirty="0">
+                  <a:latin typeface="CMU Serif" panose="02000603000000000000" pitchFamily="2" charset="0"/>
+                  <a:ea typeface="CMU Serif" panose="02000603000000000000" pitchFamily="2" charset="0"/>
+                  <a:cs typeface="CMU Serif" panose="02000603000000000000" pitchFamily="2" charset="0"/>
+                </a:rPr>
+                <a:t>t</a:t>
+              </a:r>
+            </a:p>
+          </p:txBody>
+        </p:sp>
+        <p:cxnSp>
+          <p:nvCxnSpPr>
+            <p:cNvPr id="12" name="Gerader Verbinder 11">
+              <a:extLst>
+                <a:ext uri="{FF2B5EF4-FFF2-40B4-BE49-F238E27FC236}">
+                  <a16:creationId xmlns:a16="http://schemas.microsoft.com/office/drawing/2014/main" id="{C6BC13BE-4DA4-6279-A038-0B0ADD496EFE}"/>
+                </a:ext>
+              </a:extLst>
+            </p:cNvPr>
+            <p:cNvCxnSpPr>
+              <a:cxnSpLocks/>
+            </p:cNvCxnSpPr>
+            <p:nvPr/>
+          </p:nvCxnSpPr>
+          <p:spPr>
+            <a:xfrm>
+              <a:off x="2961354" y="2006371"/>
+              <a:ext cx="45088" cy="0"/>
+            </a:xfrm>
+            <a:prstGeom prst="line">
+              <a:avLst/>
+            </a:prstGeom>
+            <a:ln w="6350" cap="sq">
+              <a:round/>
+            </a:ln>
+          </p:spPr>
+          <p:style>
+            <a:lnRef idx="2">
+              <a:schemeClr val="dk1"/>
+            </a:lnRef>
+            <a:fillRef idx="0">
+              <a:schemeClr val="dk1"/>
+            </a:fillRef>
+            <a:effectRef idx="1">
+              <a:schemeClr val="dk1"/>
+            </a:effectRef>
+            <a:fontRef idx="minor">
+              <a:schemeClr val="tx1"/>
+            </a:fontRef>
+          </p:style>
+        </p:cxnSp>
+      </p:grpSp>
+      <p:grpSp>
+        <p:nvGrpSpPr>
+          <p:cNvPr id="15" name="Gruppieren 14">
+            <a:extLst>
+              <a:ext uri="{FF2B5EF4-FFF2-40B4-BE49-F238E27FC236}">
+                <a16:creationId xmlns:a16="http://schemas.microsoft.com/office/drawing/2014/main" id="{AE38ADD2-05CC-AA48-7A27-10E90F077F6A}"/>
+              </a:ext>
+            </a:extLst>
+          </p:cNvPr>
+          <p:cNvGrpSpPr/>
+          <p:nvPr/>
+        </p:nvGrpSpPr>
+        <p:grpSpPr>
+          <a:xfrm>
+            <a:off x="214518" y="746425"/>
+            <a:ext cx="370706" cy="492860"/>
+            <a:chOff x="2792428" y="1913091"/>
+            <a:chExt cx="370706" cy="492860"/>
+          </a:xfrm>
+        </p:grpSpPr>
+        <p:cxnSp>
+          <p:nvCxnSpPr>
+            <p:cNvPr id="16" name="Gerader Verbinder 15">
+              <a:extLst>
+                <a:ext uri="{FF2B5EF4-FFF2-40B4-BE49-F238E27FC236}">
+                  <a16:creationId xmlns:a16="http://schemas.microsoft.com/office/drawing/2014/main" id="{62767AD4-7226-FC79-7A90-EF04635B0611}"/>
+                </a:ext>
+              </a:extLst>
+            </p:cNvPr>
+            <p:cNvCxnSpPr>
+              <a:cxnSpLocks/>
+            </p:cNvCxnSpPr>
+            <p:nvPr/>
+          </p:nvCxnSpPr>
+          <p:spPr>
+            <a:xfrm>
+              <a:off x="2917031" y="2152650"/>
+              <a:ext cx="134145" cy="0"/>
+            </a:xfrm>
+            <a:prstGeom prst="line">
+              <a:avLst/>
+            </a:prstGeom>
+            <a:ln w="9525" cap="rnd">
+              <a:round/>
+            </a:ln>
+          </p:spPr>
+          <p:style>
+            <a:lnRef idx="2">
+              <a:schemeClr val="dk1"/>
+            </a:lnRef>
+            <a:fillRef idx="0">
+              <a:schemeClr val="dk1"/>
+            </a:fillRef>
+            <a:effectRef idx="1">
+              <a:schemeClr val="dk1"/>
+            </a:effectRef>
+            <a:fontRef idx="minor">
+              <a:schemeClr val="tx1"/>
+            </a:fontRef>
+          </p:style>
+        </p:cxnSp>
+        <p:sp>
+          <p:nvSpPr>
+            <p:cNvPr id="17" name="Textfeld 16">
+              <a:extLst>
+                <a:ext uri="{FF2B5EF4-FFF2-40B4-BE49-F238E27FC236}">
+                  <a16:creationId xmlns:a16="http://schemas.microsoft.com/office/drawing/2014/main" id="{BD690850-6E7E-FD04-A6FE-3F9B54320004}"/>
+                </a:ext>
+              </a:extLst>
+            </p:cNvPr>
+            <p:cNvSpPr txBox="1"/>
+            <p:nvPr/>
+          </p:nvSpPr>
+          <p:spPr>
+            <a:xfrm>
+              <a:off x="2792428" y="1913091"/>
+              <a:ext cx="370706" cy="307777"/>
+            </a:xfrm>
+            <a:prstGeom prst="rect">
+              <a:avLst/>
+            </a:prstGeom>
+            <a:noFill/>
+          </p:spPr>
+          <p:txBody>
+            <a:bodyPr wrap="square" rtlCol="0">
+              <a:spAutoFit/>
+            </a:bodyPr>
+            <a:lstStyle/>
+            <a:p>
+              <a:pPr algn="ctr"/>
+              <a:r>
+                <a:rPr lang="de-DE" sz="1400" i="1" dirty="0" err="1">
+                  <a:latin typeface="Latin Modern Math" panose="02000503000000000000" pitchFamily="50" charset="0"/>
+                  <a:ea typeface="Latin Modern Math" panose="02000503000000000000" pitchFamily="50" charset="0"/>
+                  <a:cs typeface="CMU Serif" panose="02000603000000000000" pitchFamily="2" charset="0"/>
+                </a:rPr>
+                <a:t>γ</a:t>
+              </a:r>
+              <a:r>
+                <a:rPr lang="de-DE" sz="1400" i="1" baseline="-25000" dirty="0" err="1">
+                  <a:latin typeface="CMU Serif" panose="02000603000000000000" pitchFamily="2" charset="0"/>
+                  <a:ea typeface="CMU Serif" panose="02000603000000000000" pitchFamily="2" charset="0"/>
+                  <a:cs typeface="CMU Serif" panose="02000603000000000000" pitchFamily="2" charset="0"/>
+                </a:rPr>
+                <a:t>i</a:t>
+              </a:r>
+              <a:endParaRPr lang="de-DE" sz="1400" i="1" baseline="-25000" dirty="0">
+                <a:latin typeface="CMU Serif" panose="02000603000000000000" pitchFamily="2" charset="0"/>
+                <a:ea typeface="CMU Serif" panose="02000603000000000000" pitchFamily="2" charset="0"/>
+                <a:cs typeface="CMU Serif" panose="02000603000000000000" pitchFamily="2" charset="0"/>
+              </a:endParaRPr>
+            </a:p>
+          </p:txBody>
+        </p:sp>
+        <p:sp>
+          <p:nvSpPr>
+            <p:cNvPr id="18" name="Textfeld 17">
+              <a:extLst>
+                <a:ext uri="{FF2B5EF4-FFF2-40B4-BE49-F238E27FC236}">
+                  <a16:creationId xmlns:a16="http://schemas.microsoft.com/office/drawing/2014/main" id="{3CF0E126-A898-772F-2820-C997606DA49A}"/>
+                </a:ext>
+              </a:extLst>
+            </p:cNvPr>
+            <p:cNvSpPr txBox="1"/>
+            <p:nvPr/>
+          </p:nvSpPr>
+          <p:spPr>
+            <a:xfrm>
+              <a:off x="2815033" y="2098174"/>
+              <a:ext cx="295275" cy="307777"/>
+            </a:xfrm>
+            <a:prstGeom prst="rect">
+              <a:avLst/>
+            </a:prstGeom>
+            <a:noFill/>
+          </p:spPr>
+          <p:txBody>
+            <a:bodyPr wrap="square" rtlCol="0">
+              <a:spAutoFit/>
+            </a:bodyPr>
+            <a:lstStyle/>
+            <a:p>
+              <a:pPr algn="ctr"/>
+              <a:r>
+                <a:rPr lang="de-DE" sz="1400" i="1" dirty="0">
+                  <a:latin typeface="CMU Serif" panose="02000603000000000000" pitchFamily="2" charset="0"/>
+                  <a:ea typeface="CMU Serif" panose="02000603000000000000" pitchFamily="2" charset="0"/>
+                  <a:cs typeface="CMU Serif" panose="02000603000000000000" pitchFamily="2" charset="0"/>
+                </a:rPr>
+                <a:t>t</a:t>
+              </a:r>
+            </a:p>
+          </p:txBody>
+        </p:sp>
+      </p:grpSp>
+      <p:cxnSp>
+        <p:nvCxnSpPr>
+          <p:cNvPr id="3" name="Gerade Verbindung mit Pfeil 2">
+            <a:extLst>
+              <a:ext uri="{FF2B5EF4-FFF2-40B4-BE49-F238E27FC236}">
+                <a16:creationId xmlns:a16="http://schemas.microsoft.com/office/drawing/2014/main" id="{4942828F-CF00-632D-A0D4-FF13B839B253}"/>
+              </a:ext>
+            </a:extLst>
+          </p:cNvPr>
+          <p:cNvCxnSpPr>
+            <a:cxnSpLocks/>
+          </p:cNvCxnSpPr>
+          <p:nvPr/>
+        </p:nvCxnSpPr>
+        <p:spPr>
+          <a:xfrm flipV="1">
+            <a:off x="584660" y="921543"/>
+            <a:ext cx="0" cy="1824039"/>
+          </a:xfrm>
+          <a:prstGeom prst="straightConnector1">
+            <a:avLst/>
+          </a:prstGeom>
+          <a:ln cap="rnd">
+            <a:round/>
+            <a:tailEnd type="triangle"/>
+          </a:ln>
+        </p:spPr>
+        <p:style>
+          <a:lnRef idx="2">
+            <a:schemeClr val="dk1"/>
+          </a:lnRef>
+          <a:fillRef idx="0">
+            <a:schemeClr val="dk1"/>
+          </a:fillRef>
+          <a:effectRef idx="1">
+            <a:schemeClr val="dk1"/>
+          </a:effectRef>
+          <a:fontRef idx="minor">
+            <a:schemeClr val="tx1"/>
+          </a:fontRef>
+        </p:style>
+      </p:cxnSp>
+      <p:cxnSp>
+        <p:nvCxnSpPr>
+          <p:cNvPr id="4" name="Gerade Verbindung mit Pfeil 3">
+            <a:extLst>
+              <a:ext uri="{FF2B5EF4-FFF2-40B4-BE49-F238E27FC236}">
+                <a16:creationId xmlns:a16="http://schemas.microsoft.com/office/drawing/2014/main" id="{FD7BE870-A661-B8B4-06EA-D9500116FD98}"/>
+              </a:ext>
+            </a:extLst>
+          </p:cNvPr>
+          <p:cNvCxnSpPr>
+            <a:cxnSpLocks/>
+          </p:cNvCxnSpPr>
+          <p:nvPr/>
+        </p:nvCxnSpPr>
+        <p:spPr>
+          <a:xfrm>
+            <a:off x="584660" y="2000020"/>
+            <a:ext cx="2506536" cy="0"/>
+          </a:xfrm>
+          <a:prstGeom prst="straightConnector1">
+            <a:avLst/>
+          </a:prstGeom>
+          <a:ln cap="rnd">
+            <a:round/>
+            <a:tailEnd type="triangle"/>
+          </a:ln>
+        </p:spPr>
+        <p:style>
+          <a:lnRef idx="2">
+            <a:schemeClr val="dk1"/>
+          </a:lnRef>
+          <a:fillRef idx="0">
+            <a:schemeClr val="dk1"/>
+          </a:fillRef>
+          <a:effectRef idx="1">
+            <a:schemeClr val="dk1"/>
+          </a:effectRef>
+          <a:fontRef idx="minor">
+            <a:schemeClr val="tx1"/>
+          </a:fontRef>
+        </p:style>
+      </p:cxnSp>
+      <p:cxnSp>
+        <p:nvCxnSpPr>
+          <p:cNvPr id="35" name="Gerader Verbinder 34">
+            <a:extLst>
+              <a:ext uri="{FF2B5EF4-FFF2-40B4-BE49-F238E27FC236}">
+                <a16:creationId xmlns:a16="http://schemas.microsoft.com/office/drawing/2014/main" id="{A696138A-8C91-CE31-9F4E-1C93777C8E82}"/>
+              </a:ext>
+            </a:extLst>
+          </p:cNvPr>
+          <p:cNvCxnSpPr>
+            <a:cxnSpLocks/>
+          </p:cNvCxnSpPr>
+          <p:nvPr/>
+        </p:nvCxnSpPr>
+        <p:spPr>
+          <a:xfrm flipV="1">
+            <a:off x="2858293" y="1943117"/>
+            <a:ext cx="0" cy="109521"/>
+          </a:xfrm>
+          <a:prstGeom prst="line">
+            <a:avLst/>
+          </a:prstGeom>
+          <a:ln w="12700" cap="rnd">
+            <a:solidFill>
+              <a:schemeClr val="tx1"/>
+            </a:solidFill>
+            <a:prstDash val="solid"/>
+            <a:round/>
+          </a:ln>
+        </p:spPr>
+        <p:style>
+          <a:lnRef idx="2">
+            <a:schemeClr val="accent1"/>
+          </a:lnRef>
+          <a:fillRef idx="0">
+            <a:schemeClr val="accent1"/>
+          </a:fillRef>
+          <a:effectRef idx="1">
+            <a:schemeClr val="accent1"/>
+          </a:effectRef>
+          <a:fontRef idx="minor">
+            <a:schemeClr val="tx1"/>
+          </a:fontRef>
+        </p:style>
+      </p:cxnSp>
+      <p:sp>
+        <p:nvSpPr>
+          <p:cNvPr id="47" name="Textfeld 46">
+            <a:extLst>
+              <a:ext uri="{FF2B5EF4-FFF2-40B4-BE49-F238E27FC236}">
+                <a16:creationId xmlns:a16="http://schemas.microsoft.com/office/drawing/2014/main" id="{2831359E-5A88-CB77-964F-68B78AD9610D}"/>
+              </a:ext>
+            </a:extLst>
+          </p:cNvPr>
+          <p:cNvSpPr txBox="1"/>
+          <p:nvPr/>
+        </p:nvSpPr>
+        <p:spPr>
+          <a:xfrm>
+            <a:off x="2712839" y="2038660"/>
+            <a:ext cx="295275" cy="307777"/>
+          </a:xfrm>
+          <a:prstGeom prst="rect">
+            <a:avLst/>
+          </a:prstGeom>
+          <a:noFill/>
+        </p:spPr>
+        <p:txBody>
+          <a:bodyPr wrap="square" rtlCol="0">
+            <a:spAutoFit/>
+          </a:bodyPr>
+          <a:lstStyle/>
+          <a:p>
+            <a:pPr algn="ctr"/>
+            <a:r>
+              <a:rPr lang="de-DE" sz="1400" dirty="0">
+                <a:latin typeface="CMU Serif" panose="02000603000000000000" pitchFamily="2" charset="0"/>
+                <a:ea typeface="CMU Serif" panose="02000603000000000000" pitchFamily="2" charset="0"/>
+                <a:cs typeface="CMU Serif" panose="02000603000000000000" pitchFamily="2" charset="0"/>
+              </a:rPr>
+              <a:t>1</a:t>
+            </a:r>
+          </a:p>
+        </p:txBody>
+      </p:sp>
+      <p:sp>
+        <p:nvSpPr>
+          <p:cNvPr id="2" name="Freihandform: Form 1">
+            <a:extLst>
+              <a:ext uri="{FF2B5EF4-FFF2-40B4-BE49-F238E27FC236}">
+                <a16:creationId xmlns:a16="http://schemas.microsoft.com/office/drawing/2014/main" id="{279C83AE-48A4-A4D6-AE0B-B5B64A0D5186}"/>
+              </a:ext>
+            </a:extLst>
+          </p:cNvPr>
+          <p:cNvSpPr/>
+          <p:nvPr/>
+        </p:nvSpPr>
+        <p:spPr>
+          <a:xfrm>
+            <a:off x="585786" y="1277924"/>
+            <a:ext cx="2273301" cy="720740"/>
+          </a:xfrm>
+          <a:custGeom>
+            <a:avLst/>
+            <a:gdLst>
+              <a:gd name="csX0" fmla="*/ 0 w 2273300"/>
+              <a:gd name="csY0" fmla="*/ 784225 h 787400"/>
+              <a:gd name="csX1" fmla="*/ 1165225 w 2273300"/>
+              <a:gd name="csY1" fmla="*/ 0 h 787400"/>
+              <a:gd name="csX2" fmla="*/ 2273300 w 2273300"/>
+              <a:gd name="csY2" fmla="*/ 787400 h 787400"/>
+              <a:gd name="csX0" fmla="*/ 0 w 2273300"/>
+              <a:gd name="csY0" fmla="*/ 784225 h 787400"/>
+              <a:gd name="csX1" fmla="*/ 1165225 w 2273300"/>
+              <a:gd name="csY1" fmla="*/ 0 h 787400"/>
+              <a:gd name="csX2" fmla="*/ 2273300 w 2273300"/>
+              <a:gd name="csY2" fmla="*/ 787400 h 787400"/>
+              <a:gd name="csX0" fmla="*/ 0 w 2273300"/>
+              <a:gd name="csY0" fmla="*/ 784225 h 787400"/>
+              <a:gd name="csX1" fmla="*/ 1165225 w 2273300"/>
+              <a:gd name="csY1" fmla="*/ 0 h 787400"/>
+              <a:gd name="csX2" fmla="*/ 2273300 w 2273300"/>
+              <a:gd name="csY2" fmla="*/ 787400 h 787400"/>
+              <a:gd name="csX0" fmla="*/ 0 w 2273300"/>
+              <a:gd name="csY0" fmla="*/ 784225 h 787400"/>
+              <a:gd name="csX1" fmla="*/ 1165225 w 2273300"/>
+              <a:gd name="csY1" fmla="*/ 0 h 787400"/>
+              <a:gd name="csX2" fmla="*/ 2273300 w 2273300"/>
+              <a:gd name="csY2" fmla="*/ 787400 h 787400"/>
+              <a:gd name="csX0" fmla="*/ 0 w 2273300"/>
+              <a:gd name="csY0" fmla="*/ 787400 h 790575"/>
+              <a:gd name="csX1" fmla="*/ 1136650 w 2273300"/>
+              <a:gd name="csY1" fmla="*/ 0 h 790575"/>
+              <a:gd name="csX2" fmla="*/ 2273300 w 2273300"/>
+              <a:gd name="csY2" fmla="*/ 790575 h 790575"/>
+              <a:gd name="csX0" fmla="*/ 0 w 2273300"/>
+              <a:gd name="csY0" fmla="*/ 787418 h 790593"/>
+              <a:gd name="csX1" fmla="*/ 1136650 w 2273300"/>
+              <a:gd name="csY1" fmla="*/ 18 h 790593"/>
+              <a:gd name="csX2" fmla="*/ 2273300 w 2273300"/>
+              <a:gd name="csY2" fmla="*/ 790593 h 790593"/>
+              <a:gd name="csX0" fmla="*/ 0 w 2273300"/>
+              <a:gd name="csY0" fmla="*/ 717575 h 720750"/>
+              <a:gd name="csX1" fmla="*/ 1136650 w 2273300"/>
+              <a:gd name="csY1" fmla="*/ 25 h 720750"/>
+              <a:gd name="csX2" fmla="*/ 2273300 w 2273300"/>
+              <a:gd name="csY2" fmla="*/ 720750 h 720750"/>
+              <a:gd name="csX0" fmla="*/ 20 w 2273320"/>
+              <a:gd name="csY0" fmla="*/ 717575 h 720750"/>
+              <a:gd name="csX1" fmla="*/ 1136670 w 2273320"/>
+              <a:gd name="csY1" fmla="*/ 25 h 720750"/>
+              <a:gd name="csX2" fmla="*/ 2273320 w 2273320"/>
+              <a:gd name="csY2" fmla="*/ 720750 h 720750"/>
+              <a:gd name="csX0" fmla="*/ 20 w 2273320"/>
+              <a:gd name="csY0" fmla="*/ 717568 h 720743"/>
+              <a:gd name="csX1" fmla="*/ 1136670 w 2273320"/>
+              <a:gd name="csY1" fmla="*/ 18 h 720743"/>
+              <a:gd name="csX2" fmla="*/ 2273320 w 2273320"/>
+              <a:gd name="csY2" fmla="*/ 720743 h 720743"/>
+              <a:gd name="csX0" fmla="*/ 20 w 2273320"/>
+              <a:gd name="csY0" fmla="*/ 717565 h 720740"/>
+              <a:gd name="csX1" fmla="*/ 1136670 w 2273320"/>
+              <a:gd name="csY1" fmla="*/ 15 h 720740"/>
+              <a:gd name="csX2" fmla="*/ 2273320 w 2273320"/>
+              <a:gd name="csY2" fmla="*/ 720740 h 720740"/>
+              <a:gd name="csX0" fmla="*/ 1 w 2273301"/>
+              <a:gd name="csY0" fmla="*/ 717565 h 720740"/>
+              <a:gd name="csX1" fmla="*/ 1136651 w 2273301"/>
+              <a:gd name="csY1" fmla="*/ 15 h 720740"/>
+              <a:gd name="csX2" fmla="*/ 2273301 w 2273301"/>
+              <a:gd name="csY2" fmla="*/ 720740 h 720740"/>
+              <a:gd name="csX0" fmla="*/ 1 w 2273301"/>
+              <a:gd name="csY0" fmla="*/ 717565 h 720740"/>
+              <a:gd name="csX1" fmla="*/ 1146176 w 2273301"/>
+              <a:gd name="csY1" fmla="*/ 15 h 720740"/>
+              <a:gd name="csX2" fmla="*/ 2273301 w 2273301"/>
+              <a:gd name="csY2" fmla="*/ 720740 h 720740"/>
+            </a:gdLst>
+            <a:ahLst/>
+            <a:cxnLst>
+              <a:cxn ang="0">
+                <a:pos x="csX0" y="csY0"/>
+              </a:cxn>
+              <a:cxn ang="0">
+                <a:pos x="csX1" y="csY1"/>
+              </a:cxn>
+              <a:cxn ang="0">
+                <a:pos x="csX2" y="csY2"/>
+              </a:cxn>
+            </a:cxnLst>
+            <a:rect l="l" t="t" r="r" b="b"/>
+            <a:pathLst>
+              <a:path w="2273301" h="720740">
+                <a:moveTo>
+                  <a:pt x="1" y="717565"/>
+                </a:moveTo>
+                <a:cubicBezTo>
+                  <a:pt x="-528" y="334713"/>
+                  <a:pt x="494243" y="2661"/>
+                  <a:pt x="1146176" y="15"/>
+                </a:cubicBezTo>
+                <a:cubicBezTo>
+                  <a:pt x="1798109" y="-2631"/>
+                  <a:pt x="2270655" y="352704"/>
+                  <a:pt x="2273301" y="720740"/>
+                </a:cubicBezTo>
+              </a:path>
+            </a:pathLst>
+          </a:custGeom>
+          <a:noFill/>
+          <a:ln cap="rnd">
+            <a:solidFill>
+              <a:schemeClr val="accent6">
+                <a:lumMod val="75000"/>
+              </a:schemeClr>
+            </a:solidFill>
+            <a:round/>
+          </a:ln>
+        </p:spPr>
+        <p:style>
+          <a:lnRef idx="2">
+            <a:schemeClr val="accent1">
+              <a:shade val="15000"/>
+            </a:schemeClr>
+          </a:lnRef>
+          <a:fillRef idx="1">
+            <a:schemeClr val="accent1"/>
+          </a:fillRef>
+          <a:effectRef idx="0">
+            <a:schemeClr val="accent1"/>
+          </a:effectRef>
+          <a:fontRef idx="minor">
+            <a:schemeClr val="lt1"/>
+          </a:fontRef>
+        </p:style>
+        <p:txBody>
+          <a:bodyPr rtlCol="0" anchor="ctr"/>
+          <a:lstStyle/>
+          <a:p>
+            <a:pPr algn="ctr"/>
+            <a:endParaRPr lang="de-DE"/>
+          </a:p>
+        </p:txBody>
+      </p:sp>
+      <p:sp>
+        <p:nvSpPr>
+          <p:cNvPr id="5" name="Freihandform: Form 4">
+            <a:extLst>
+              <a:ext uri="{FF2B5EF4-FFF2-40B4-BE49-F238E27FC236}">
+                <a16:creationId xmlns:a16="http://schemas.microsoft.com/office/drawing/2014/main" id="{BE39D794-1B22-2E30-B374-B02D30D978C4}"/>
+              </a:ext>
+            </a:extLst>
+          </p:cNvPr>
+          <p:cNvSpPr/>
+          <p:nvPr/>
+        </p:nvSpPr>
+        <p:spPr>
+          <a:xfrm>
+            <a:off x="741362" y="954088"/>
+            <a:ext cx="2117725" cy="1044575"/>
+          </a:xfrm>
+          <a:custGeom>
+            <a:avLst/>
+            <a:gdLst>
+              <a:gd name="csX0" fmla="*/ 0 w 2117725"/>
+              <a:gd name="csY0" fmla="*/ 0 h 1044575"/>
+              <a:gd name="csX1" fmla="*/ 993775 w 2117725"/>
+              <a:gd name="csY1" fmla="*/ 615950 h 1044575"/>
+              <a:gd name="csX2" fmla="*/ 2117725 w 2117725"/>
+              <a:gd name="csY2" fmla="*/ 1044575 h 1044575"/>
+              <a:gd name="csX0" fmla="*/ 0 w 2117725"/>
+              <a:gd name="csY0" fmla="*/ 0 h 1044575"/>
+              <a:gd name="csX1" fmla="*/ 993775 w 2117725"/>
+              <a:gd name="csY1" fmla="*/ 615950 h 1044575"/>
+              <a:gd name="csX2" fmla="*/ 2117725 w 2117725"/>
+              <a:gd name="csY2" fmla="*/ 1044575 h 1044575"/>
+              <a:gd name="csX0" fmla="*/ 0 w 2117725"/>
+              <a:gd name="csY0" fmla="*/ 0 h 1044575"/>
+              <a:gd name="csX1" fmla="*/ 993775 w 2117725"/>
+              <a:gd name="csY1" fmla="*/ 615950 h 1044575"/>
+              <a:gd name="csX2" fmla="*/ 2117725 w 2117725"/>
+              <a:gd name="csY2" fmla="*/ 1044575 h 1044575"/>
+              <a:gd name="csX0" fmla="*/ 0 w 2117725"/>
+              <a:gd name="csY0" fmla="*/ 0 h 1044575"/>
+              <a:gd name="csX1" fmla="*/ 993775 w 2117725"/>
+              <a:gd name="csY1" fmla="*/ 615950 h 1044575"/>
+              <a:gd name="csX2" fmla="*/ 2117725 w 2117725"/>
+              <a:gd name="csY2" fmla="*/ 1044575 h 1044575"/>
+              <a:gd name="csX0" fmla="*/ 0 w 2117725"/>
+              <a:gd name="csY0" fmla="*/ 0 h 1044575"/>
+              <a:gd name="csX1" fmla="*/ 990600 w 2117725"/>
+              <a:gd name="csY1" fmla="*/ 584200 h 1044575"/>
+              <a:gd name="csX2" fmla="*/ 2117725 w 2117725"/>
+              <a:gd name="csY2" fmla="*/ 1044575 h 1044575"/>
+              <a:gd name="csX0" fmla="*/ 0 w 2117725"/>
+              <a:gd name="csY0" fmla="*/ 0 h 1044575"/>
+              <a:gd name="csX1" fmla="*/ 1022350 w 2117725"/>
+              <a:gd name="csY1" fmla="*/ 593725 h 1044575"/>
+              <a:gd name="csX2" fmla="*/ 2117725 w 2117725"/>
+              <a:gd name="csY2" fmla="*/ 1044575 h 1044575"/>
+              <a:gd name="csX0" fmla="*/ 0 w 2117725"/>
+              <a:gd name="csY0" fmla="*/ 0 h 1044575"/>
+              <a:gd name="csX1" fmla="*/ 1022350 w 2117725"/>
+              <a:gd name="csY1" fmla="*/ 593725 h 1044575"/>
+              <a:gd name="csX2" fmla="*/ 2117725 w 2117725"/>
+              <a:gd name="csY2" fmla="*/ 1044575 h 1044575"/>
+              <a:gd name="csX0" fmla="*/ 0 w 2117725"/>
+              <a:gd name="csY0" fmla="*/ 0 h 1044575"/>
+              <a:gd name="csX1" fmla="*/ 1022350 w 2117725"/>
+              <a:gd name="csY1" fmla="*/ 593725 h 1044575"/>
+              <a:gd name="csX2" fmla="*/ 2117725 w 2117725"/>
+              <a:gd name="csY2" fmla="*/ 1044575 h 1044575"/>
+              <a:gd name="csX0" fmla="*/ 0 w 2117725"/>
+              <a:gd name="csY0" fmla="*/ 0 h 1044575"/>
+              <a:gd name="csX1" fmla="*/ 1022350 w 2117725"/>
+              <a:gd name="csY1" fmla="*/ 593725 h 1044575"/>
+              <a:gd name="csX2" fmla="*/ 2117725 w 2117725"/>
+              <a:gd name="csY2" fmla="*/ 1044575 h 1044575"/>
+              <a:gd name="csX0" fmla="*/ 0 w 2117725"/>
+              <a:gd name="csY0" fmla="*/ 0 h 1044575"/>
+              <a:gd name="csX1" fmla="*/ 1022350 w 2117725"/>
+              <a:gd name="csY1" fmla="*/ 593725 h 1044575"/>
+              <a:gd name="csX2" fmla="*/ 2117725 w 2117725"/>
+              <a:gd name="csY2" fmla="*/ 1044575 h 1044575"/>
+            </a:gdLst>
+            <a:ahLst/>
+            <a:cxnLst>
+              <a:cxn ang="0">
+                <a:pos x="csX0" y="csY0"/>
+              </a:cxn>
+              <a:cxn ang="0">
+                <a:pos x="csX1" y="csY1"/>
+              </a:cxn>
+              <a:cxn ang="0">
+                <a:pos x="csX2" y="csY2"/>
+              </a:cxn>
+            </a:cxnLst>
+            <a:rect l="l" t="t" r="r" b="b"/>
+            <a:pathLst>
+              <a:path w="2117725" h="1044575">
+                <a:moveTo>
+                  <a:pt x="0" y="0"/>
+                </a:moveTo>
+                <a:cubicBezTo>
+                  <a:pt x="82285" y="411427"/>
+                  <a:pt x="555096" y="489479"/>
+                  <a:pt x="1022350" y="593725"/>
+                </a:cubicBezTo>
+                <a:cubicBezTo>
+                  <a:pt x="1489604" y="697971"/>
+                  <a:pt x="2070629" y="762000"/>
+                  <a:pt x="2117725" y="1044575"/>
+                </a:cubicBezTo>
+              </a:path>
+            </a:pathLst>
+          </a:custGeom>
+          <a:noFill/>
+          <a:ln cap="rnd">
+            <a:solidFill>
+              <a:schemeClr val="tx2">
+                <a:lumMod val="75000"/>
+                <a:lumOff val="25000"/>
+              </a:schemeClr>
+            </a:solidFill>
+            <a:round/>
+          </a:ln>
+        </p:spPr>
+        <p:style>
+          <a:lnRef idx="2">
+            <a:schemeClr val="accent1">
+              <a:shade val="15000"/>
+            </a:schemeClr>
+          </a:lnRef>
+          <a:fillRef idx="1">
+            <a:schemeClr val="accent1"/>
+          </a:fillRef>
+          <a:effectRef idx="0">
+            <a:schemeClr val="accent1"/>
+          </a:effectRef>
+          <a:fontRef idx="minor">
+            <a:schemeClr val="lt1"/>
+          </a:fontRef>
+        </p:style>
+        <p:txBody>
+          <a:bodyPr rtlCol="0" anchor="ctr"/>
+          <a:lstStyle/>
+          <a:p>
+            <a:pPr algn="ctr"/>
+            <a:endParaRPr lang="de-DE"/>
+          </a:p>
+        </p:txBody>
+      </p:sp>
+      <p:sp>
+        <p:nvSpPr>
+          <p:cNvPr id="6" name="Freihandform: Form 5">
+            <a:extLst>
+              <a:ext uri="{FF2B5EF4-FFF2-40B4-BE49-F238E27FC236}">
+                <a16:creationId xmlns:a16="http://schemas.microsoft.com/office/drawing/2014/main" id="{8B356C88-0CDA-6570-3EC9-4DE57FD943A6}"/>
+              </a:ext>
+            </a:extLst>
+          </p:cNvPr>
+          <p:cNvSpPr/>
+          <p:nvPr/>
+        </p:nvSpPr>
+        <p:spPr>
+          <a:xfrm>
+            <a:off x="585787" y="1607331"/>
+            <a:ext cx="2273300" cy="786621"/>
+          </a:xfrm>
+          <a:custGeom>
+            <a:avLst/>
+            <a:gdLst>
+              <a:gd name="csX0" fmla="*/ 0 w 2273300"/>
+              <a:gd name="csY0" fmla="*/ 422275 h 841375"/>
+              <a:gd name="csX1" fmla="*/ 488950 w 2273300"/>
+              <a:gd name="csY1" fmla="*/ 0 h 841375"/>
+              <a:gd name="csX2" fmla="*/ 1155700 w 2273300"/>
+              <a:gd name="csY2" fmla="*/ 419100 h 841375"/>
+              <a:gd name="csX3" fmla="*/ 1749425 w 2273300"/>
+              <a:gd name="csY3" fmla="*/ 841375 h 841375"/>
+              <a:gd name="csX4" fmla="*/ 2273300 w 2273300"/>
+              <a:gd name="csY4" fmla="*/ 419100 h 841375"/>
+              <a:gd name="csX0" fmla="*/ 0 w 2273300"/>
+              <a:gd name="csY0" fmla="*/ 415132 h 834232"/>
+              <a:gd name="csX1" fmla="*/ 534194 w 2273300"/>
+              <a:gd name="csY1" fmla="*/ 1 h 834232"/>
+              <a:gd name="csX2" fmla="*/ 1155700 w 2273300"/>
+              <a:gd name="csY2" fmla="*/ 411957 h 834232"/>
+              <a:gd name="csX3" fmla="*/ 1749425 w 2273300"/>
+              <a:gd name="csY3" fmla="*/ 834232 h 834232"/>
+              <a:gd name="csX4" fmla="*/ 2273300 w 2273300"/>
+              <a:gd name="csY4" fmla="*/ 411957 h 834232"/>
+              <a:gd name="csX0" fmla="*/ 0 w 2273300"/>
+              <a:gd name="csY0" fmla="*/ 412751 h 831851"/>
+              <a:gd name="csX1" fmla="*/ 584200 w 2273300"/>
+              <a:gd name="csY1" fmla="*/ 1 h 831851"/>
+              <a:gd name="csX2" fmla="*/ 1155700 w 2273300"/>
+              <a:gd name="csY2" fmla="*/ 409576 h 831851"/>
+              <a:gd name="csX3" fmla="*/ 1749425 w 2273300"/>
+              <a:gd name="csY3" fmla="*/ 831851 h 831851"/>
+              <a:gd name="csX4" fmla="*/ 2273300 w 2273300"/>
+              <a:gd name="csY4" fmla="*/ 409576 h 831851"/>
+              <a:gd name="csX0" fmla="*/ 0 w 2273300"/>
+              <a:gd name="csY0" fmla="*/ 412751 h 831851"/>
+              <a:gd name="csX1" fmla="*/ 584200 w 2273300"/>
+              <a:gd name="csY1" fmla="*/ 1 h 831851"/>
+              <a:gd name="csX2" fmla="*/ 1165225 w 2273300"/>
+              <a:gd name="csY2" fmla="*/ 414339 h 831851"/>
+              <a:gd name="csX3" fmla="*/ 1749425 w 2273300"/>
+              <a:gd name="csY3" fmla="*/ 831851 h 831851"/>
+              <a:gd name="csX4" fmla="*/ 2273300 w 2273300"/>
+              <a:gd name="csY4" fmla="*/ 409576 h 831851"/>
+              <a:gd name="csX0" fmla="*/ 0 w 2273300"/>
+              <a:gd name="csY0" fmla="*/ 412751 h 831851"/>
+              <a:gd name="csX1" fmla="*/ 584200 w 2273300"/>
+              <a:gd name="csY1" fmla="*/ 1 h 831851"/>
+              <a:gd name="csX2" fmla="*/ 1165225 w 2273300"/>
+              <a:gd name="csY2" fmla="*/ 414339 h 831851"/>
+              <a:gd name="csX3" fmla="*/ 1749425 w 2273300"/>
+              <a:gd name="csY3" fmla="*/ 831851 h 831851"/>
+              <a:gd name="csX4" fmla="*/ 2273300 w 2273300"/>
+              <a:gd name="csY4" fmla="*/ 409576 h 831851"/>
+              <a:gd name="csX0" fmla="*/ 0 w 2273300"/>
+              <a:gd name="csY0" fmla="*/ 396083 h 815183"/>
+              <a:gd name="csX1" fmla="*/ 562768 w 2273300"/>
+              <a:gd name="csY1" fmla="*/ 1 h 815183"/>
+              <a:gd name="csX2" fmla="*/ 1165225 w 2273300"/>
+              <a:gd name="csY2" fmla="*/ 397671 h 815183"/>
+              <a:gd name="csX3" fmla="*/ 1749425 w 2273300"/>
+              <a:gd name="csY3" fmla="*/ 815183 h 815183"/>
+              <a:gd name="csX4" fmla="*/ 2273300 w 2273300"/>
+              <a:gd name="csY4" fmla="*/ 392908 h 815183"/>
+              <a:gd name="csX0" fmla="*/ 0 w 2273300"/>
+              <a:gd name="csY0" fmla="*/ 396083 h 815183"/>
+              <a:gd name="csX1" fmla="*/ 562768 w 2273300"/>
+              <a:gd name="csY1" fmla="*/ 1 h 815183"/>
+              <a:gd name="csX2" fmla="*/ 1165225 w 2273300"/>
+              <a:gd name="csY2" fmla="*/ 397671 h 815183"/>
+              <a:gd name="csX3" fmla="*/ 1749425 w 2273300"/>
+              <a:gd name="csY3" fmla="*/ 815183 h 815183"/>
+              <a:gd name="csX4" fmla="*/ 2273300 w 2273300"/>
+              <a:gd name="csY4" fmla="*/ 392908 h 815183"/>
+              <a:gd name="csX0" fmla="*/ 0 w 2273300"/>
+              <a:gd name="csY0" fmla="*/ 396083 h 815183"/>
+              <a:gd name="csX1" fmla="*/ 562768 w 2273300"/>
+              <a:gd name="csY1" fmla="*/ 1 h 815183"/>
+              <a:gd name="csX2" fmla="*/ 1165225 w 2273300"/>
+              <a:gd name="csY2" fmla="*/ 397671 h 815183"/>
+              <a:gd name="csX3" fmla="*/ 1749425 w 2273300"/>
+              <a:gd name="csY3" fmla="*/ 815183 h 815183"/>
+              <a:gd name="csX4" fmla="*/ 2273300 w 2273300"/>
+              <a:gd name="csY4" fmla="*/ 392908 h 815183"/>
+              <a:gd name="csX0" fmla="*/ 0 w 2273300"/>
+              <a:gd name="csY0" fmla="*/ 396083 h 815183"/>
+              <a:gd name="csX1" fmla="*/ 562768 w 2273300"/>
+              <a:gd name="csY1" fmla="*/ 1 h 815183"/>
+              <a:gd name="csX2" fmla="*/ 1165225 w 2273300"/>
+              <a:gd name="csY2" fmla="*/ 397671 h 815183"/>
+              <a:gd name="csX3" fmla="*/ 1749425 w 2273300"/>
+              <a:gd name="csY3" fmla="*/ 815183 h 815183"/>
+              <a:gd name="csX4" fmla="*/ 2273300 w 2273300"/>
+              <a:gd name="csY4" fmla="*/ 392908 h 815183"/>
+              <a:gd name="csX0" fmla="*/ 0 w 2273300"/>
+              <a:gd name="csY0" fmla="*/ 396083 h 815183"/>
+              <a:gd name="csX1" fmla="*/ 562768 w 2273300"/>
+              <a:gd name="csY1" fmla="*/ 1 h 815183"/>
+              <a:gd name="csX2" fmla="*/ 1165225 w 2273300"/>
+              <a:gd name="csY2" fmla="*/ 397671 h 815183"/>
+              <a:gd name="csX3" fmla="*/ 1749425 w 2273300"/>
+              <a:gd name="csY3" fmla="*/ 815183 h 815183"/>
+              <a:gd name="csX4" fmla="*/ 2273300 w 2273300"/>
+              <a:gd name="csY4" fmla="*/ 392908 h 815183"/>
+              <a:gd name="csX0" fmla="*/ 0 w 2273300"/>
+              <a:gd name="csY0" fmla="*/ 396083 h 791371"/>
+              <a:gd name="csX1" fmla="*/ 562768 w 2273300"/>
+              <a:gd name="csY1" fmla="*/ 1 h 791371"/>
+              <a:gd name="csX2" fmla="*/ 1165225 w 2273300"/>
+              <a:gd name="csY2" fmla="*/ 397671 h 791371"/>
+              <a:gd name="csX3" fmla="*/ 1751806 w 2273300"/>
+              <a:gd name="csY3" fmla="*/ 791371 h 791371"/>
+              <a:gd name="csX4" fmla="*/ 2273300 w 2273300"/>
+              <a:gd name="csY4" fmla="*/ 392908 h 791371"/>
+              <a:gd name="csX0" fmla="*/ 0 w 2273300"/>
+              <a:gd name="csY0" fmla="*/ 396083 h 791371"/>
+              <a:gd name="csX1" fmla="*/ 562768 w 2273300"/>
+              <a:gd name="csY1" fmla="*/ 1 h 791371"/>
+              <a:gd name="csX2" fmla="*/ 1165225 w 2273300"/>
+              <a:gd name="csY2" fmla="*/ 397671 h 791371"/>
+              <a:gd name="csX3" fmla="*/ 1751806 w 2273300"/>
+              <a:gd name="csY3" fmla="*/ 791371 h 791371"/>
+              <a:gd name="csX4" fmla="*/ 2273300 w 2273300"/>
+              <a:gd name="csY4" fmla="*/ 392908 h 791371"/>
+              <a:gd name="csX0" fmla="*/ 0 w 2273300"/>
+              <a:gd name="csY0" fmla="*/ 396083 h 791371"/>
+              <a:gd name="csX1" fmla="*/ 562768 w 2273300"/>
+              <a:gd name="csY1" fmla="*/ 1 h 791371"/>
+              <a:gd name="csX2" fmla="*/ 1165225 w 2273300"/>
+              <a:gd name="csY2" fmla="*/ 397671 h 791371"/>
+              <a:gd name="csX3" fmla="*/ 1751806 w 2273300"/>
+              <a:gd name="csY3" fmla="*/ 791371 h 791371"/>
+              <a:gd name="csX4" fmla="*/ 2273300 w 2273300"/>
+              <a:gd name="csY4" fmla="*/ 392908 h 791371"/>
+              <a:gd name="csX0" fmla="*/ 0 w 2273300"/>
+              <a:gd name="csY0" fmla="*/ 396106 h 791394"/>
+              <a:gd name="csX1" fmla="*/ 562768 w 2273300"/>
+              <a:gd name="csY1" fmla="*/ 24 h 791394"/>
+              <a:gd name="csX2" fmla="*/ 1165225 w 2273300"/>
+              <a:gd name="csY2" fmla="*/ 397694 h 791394"/>
+              <a:gd name="csX3" fmla="*/ 1751806 w 2273300"/>
+              <a:gd name="csY3" fmla="*/ 791394 h 791394"/>
+              <a:gd name="csX4" fmla="*/ 2273300 w 2273300"/>
+              <a:gd name="csY4" fmla="*/ 392931 h 791394"/>
+              <a:gd name="csX0" fmla="*/ 0 w 2273300"/>
+              <a:gd name="csY0" fmla="*/ 396106 h 791394"/>
+              <a:gd name="csX1" fmla="*/ 562768 w 2273300"/>
+              <a:gd name="csY1" fmla="*/ 24 h 791394"/>
+              <a:gd name="csX2" fmla="*/ 1165225 w 2273300"/>
+              <a:gd name="csY2" fmla="*/ 397694 h 791394"/>
+              <a:gd name="csX3" fmla="*/ 1751806 w 2273300"/>
+              <a:gd name="csY3" fmla="*/ 791394 h 791394"/>
+              <a:gd name="csX4" fmla="*/ 2273300 w 2273300"/>
+              <a:gd name="csY4" fmla="*/ 392931 h 791394"/>
+              <a:gd name="csX0" fmla="*/ 0 w 2273300"/>
+              <a:gd name="csY0" fmla="*/ 396106 h 791394"/>
+              <a:gd name="csX1" fmla="*/ 562768 w 2273300"/>
+              <a:gd name="csY1" fmla="*/ 24 h 791394"/>
+              <a:gd name="csX2" fmla="*/ 1165225 w 2273300"/>
+              <a:gd name="csY2" fmla="*/ 397694 h 791394"/>
+              <a:gd name="csX3" fmla="*/ 1751806 w 2273300"/>
+              <a:gd name="csY3" fmla="*/ 791394 h 791394"/>
+              <a:gd name="csX4" fmla="*/ 2273300 w 2273300"/>
+              <a:gd name="csY4" fmla="*/ 392931 h 791394"/>
+              <a:gd name="csX0" fmla="*/ 0 w 2273300"/>
+              <a:gd name="csY0" fmla="*/ 396096 h 791384"/>
+              <a:gd name="csX1" fmla="*/ 562768 w 2273300"/>
+              <a:gd name="csY1" fmla="*/ 14 h 791384"/>
+              <a:gd name="csX2" fmla="*/ 1165225 w 2273300"/>
+              <a:gd name="csY2" fmla="*/ 397684 h 791384"/>
+              <a:gd name="csX3" fmla="*/ 1751806 w 2273300"/>
+              <a:gd name="csY3" fmla="*/ 791384 h 791384"/>
+              <a:gd name="csX4" fmla="*/ 2273300 w 2273300"/>
+              <a:gd name="csY4" fmla="*/ 392921 h 791384"/>
+              <a:gd name="csX0" fmla="*/ 0 w 2273300"/>
+              <a:gd name="csY0" fmla="*/ 396096 h 791384"/>
+              <a:gd name="csX1" fmla="*/ 562768 w 2273300"/>
+              <a:gd name="csY1" fmla="*/ 14 h 791384"/>
+              <a:gd name="csX2" fmla="*/ 1165225 w 2273300"/>
+              <a:gd name="csY2" fmla="*/ 397684 h 791384"/>
+              <a:gd name="csX3" fmla="*/ 1751806 w 2273300"/>
+              <a:gd name="csY3" fmla="*/ 791384 h 791384"/>
+              <a:gd name="csX4" fmla="*/ 2273300 w 2273300"/>
+              <a:gd name="csY4" fmla="*/ 392921 h 791384"/>
+              <a:gd name="csX0" fmla="*/ 0 w 2273300"/>
+              <a:gd name="csY0" fmla="*/ 396095 h 791383"/>
+              <a:gd name="csX1" fmla="*/ 562768 w 2273300"/>
+              <a:gd name="csY1" fmla="*/ 13 h 791383"/>
+              <a:gd name="csX2" fmla="*/ 1165225 w 2273300"/>
+              <a:gd name="csY2" fmla="*/ 397683 h 791383"/>
+              <a:gd name="csX3" fmla="*/ 1727993 w 2273300"/>
+              <a:gd name="csY3" fmla="*/ 791383 h 791383"/>
+              <a:gd name="csX4" fmla="*/ 2273300 w 2273300"/>
+              <a:gd name="csY4" fmla="*/ 392920 h 791383"/>
+              <a:gd name="csX0" fmla="*/ 0 w 2273300"/>
+              <a:gd name="csY0" fmla="*/ 396097 h 791385"/>
+              <a:gd name="csX1" fmla="*/ 562768 w 2273300"/>
+              <a:gd name="csY1" fmla="*/ 15 h 791385"/>
+              <a:gd name="csX2" fmla="*/ 1165225 w 2273300"/>
+              <a:gd name="csY2" fmla="*/ 397685 h 791385"/>
+              <a:gd name="csX3" fmla="*/ 1727993 w 2273300"/>
+              <a:gd name="csY3" fmla="*/ 791385 h 791385"/>
+              <a:gd name="csX4" fmla="*/ 2273300 w 2273300"/>
+              <a:gd name="csY4" fmla="*/ 392922 h 791385"/>
+              <a:gd name="csX0" fmla="*/ 0 w 2273300"/>
+              <a:gd name="csY0" fmla="*/ 391333 h 786621"/>
+              <a:gd name="csX1" fmla="*/ 586581 w 2273300"/>
+              <a:gd name="csY1" fmla="*/ 13 h 786621"/>
+              <a:gd name="csX2" fmla="*/ 1165225 w 2273300"/>
+              <a:gd name="csY2" fmla="*/ 392921 h 786621"/>
+              <a:gd name="csX3" fmla="*/ 1727993 w 2273300"/>
+              <a:gd name="csY3" fmla="*/ 786621 h 786621"/>
+              <a:gd name="csX4" fmla="*/ 2273300 w 2273300"/>
+              <a:gd name="csY4" fmla="*/ 388158 h 786621"/>
+              <a:gd name="csX0" fmla="*/ 0 w 2273300"/>
+              <a:gd name="csY0" fmla="*/ 391333 h 786621"/>
+              <a:gd name="csX1" fmla="*/ 586581 w 2273300"/>
+              <a:gd name="csY1" fmla="*/ 13 h 786621"/>
+              <a:gd name="csX2" fmla="*/ 1165225 w 2273300"/>
+              <a:gd name="csY2" fmla="*/ 392921 h 786621"/>
+              <a:gd name="csX3" fmla="*/ 1727993 w 2273300"/>
+              <a:gd name="csY3" fmla="*/ 786621 h 786621"/>
+              <a:gd name="csX4" fmla="*/ 2273300 w 2273300"/>
+              <a:gd name="csY4" fmla="*/ 388158 h 786621"/>
+              <a:gd name="csX0" fmla="*/ 0 w 2273300"/>
+              <a:gd name="csY0" fmla="*/ 391333 h 786621"/>
+              <a:gd name="csX1" fmla="*/ 586581 w 2273300"/>
+              <a:gd name="csY1" fmla="*/ 13 h 786621"/>
+              <a:gd name="csX2" fmla="*/ 1165225 w 2273300"/>
+              <a:gd name="csY2" fmla="*/ 392921 h 786621"/>
+              <a:gd name="csX3" fmla="*/ 1727993 w 2273300"/>
+              <a:gd name="csY3" fmla="*/ 786621 h 786621"/>
+              <a:gd name="csX4" fmla="*/ 2273300 w 2273300"/>
+              <a:gd name="csY4" fmla="*/ 388158 h 786621"/>
+            </a:gdLst>
+            <a:ahLst/>
+            <a:cxnLst>
+              <a:cxn ang="0">
+                <a:pos x="csX0" y="csY0"/>
+              </a:cxn>
+              <a:cxn ang="0">
+                <a:pos x="csX1" y="csY1"/>
+              </a:cxn>
+              <a:cxn ang="0">
+                <a:pos x="csX2" y="csY2"/>
+              </a:cxn>
+              <a:cxn ang="0">
+                <a:pos x="csX3" y="csY3"/>
+              </a:cxn>
+              <a:cxn ang="0">
+                <a:pos x="csX4" y="csY4"/>
+              </a:cxn>
+            </a:cxnLst>
+            <a:rect l="l" t="t" r="r" b="b"/>
+            <a:pathLst>
+              <a:path w="2273300" h="786621">
+                <a:moveTo>
+                  <a:pt x="0" y="391333"/>
+                </a:moveTo>
+                <a:cubicBezTo>
+                  <a:pt x="145785" y="209035"/>
+                  <a:pt x="344752" y="2130"/>
+                  <a:pt x="586581" y="13"/>
+                </a:cubicBezTo>
+                <a:cubicBezTo>
+                  <a:pt x="828410" y="-2104"/>
+                  <a:pt x="1051190" y="261819"/>
+                  <a:pt x="1165225" y="392921"/>
+                </a:cubicBezTo>
+                <a:cubicBezTo>
+                  <a:pt x="1279260" y="524023"/>
+                  <a:pt x="1470288" y="786621"/>
+                  <a:pt x="1727993" y="786621"/>
+                </a:cubicBezTo>
+                <a:cubicBezTo>
+                  <a:pt x="1985698" y="786621"/>
+                  <a:pt x="2121165" y="580245"/>
+                  <a:pt x="2273300" y="388158"/>
+                </a:cubicBezTo>
+              </a:path>
+            </a:pathLst>
+          </a:custGeom>
+          <a:noFill/>
+          <a:ln cap="rnd">
+            <a:solidFill>
+              <a:schemeClr val="accent2">
+                <a:lumMod val="75000"/>
+              </a:schemeClr>
+            </a:solidFill>
+            <a:round/>
+          </a:ln>
+        </p:spPr>
+        <p:style>
+          <a:lnRef idx="2">
+            <a:schemeClr val="accent1">
+              <a:shade val="15000"/>
+            </a:schemeClr>
+          </a:lnRef>
+          <a:fillRef idx="1">
+            <a:schemeClr val="accent1"/>
+          </a:fillRef>
+          <a:effectRef idx="0">
+            <a:schemeClr val="accent1"/>
+          </a:effectRef>
+          <a:fontRef idx="minor">
+            <a:schemeClr val="lt1"/>
+          </a:fontRef>
+        </p:style>
+        <p:txBody>
+          <a:bodyPr rtlCol="0" anchor="ctr"/>
+          <a:lstStyle/>
+          <a:p>
+            <a:pPr algn="ctr"/>
+            <a:endParaRPr lang="de-DE"/>
+          </a:p>
+        </p:txBody>
+      </p:sp>
+      <p:sp>
+        <p:nvSpPr>
+          <p:cNvPr id="8" name="Textfeld 7">
+            <a:extLst>
+              <a:ext uri="{FF2B5EF4-FFF2-40B4-BE49-F238E27FC236}">
+                <a16:creationId xmlns:a16="http://schemas.microsoft.com/office/drawing/2014/main" id="{3E8DB379-2808-7EE7-2DF2-97C15FE30FFF}"/>
+              </a:ext>
+            </a:extLst>
+          </p:cNvPr>
+          <p:cNvSpPr txBox="1"/>
+          <p:nvPr/>
+        </p:nvSpPr>
+        <p:spPr>
+          <a:xfrm>
+            <a:off x="754647" y="863458"/>
+            <a:ext cx="512970" cy="261610"/>
+          </a:xfrm>
+          <a:prstGeom prst="rect">
+            <a:avLst/>
+          </a:prstGeom>
+          <a:noFill/>
+        </p:spPr>
+        <p:txBody>
+          <a:bodyPr wrap="square" rtlCol="0">
+            <a:spAutoFit/>
+          </a:bodyPr>
+          <a:lstStyle/>
+          <a:p>
+            <a:pPr algn="ctr"/>
+            <a:r>
+              <a:rPr lang="de-DE" sz="1100" i="1" dirty="0">
+                <a:solidFill>
+                  <a:schemeClr val="tx2">
+                    <a:lumMod val="75000"/>
+                    <a:lumOff val="25000"/>
+                  </a:schemeClr>
+                </a:solidFill>
+                <a:latin typeface="CMU Serif" panose="02000603000000000000" pitchFamily="2" charset="0"/>
+                <a:ea typeface="CMU Serif" panose="02000603000000000000" pitchFamily="2" charset="0"/>
+                <a:cs typeface="CMU Serif" panose="02000603000000000000" pitchFamily="2" charset="0"/>
+              </a:rPr>
+              <a:t>i</a:t>
+            </a:r>
+            <a:r>
+              <a:rPr lang="de-DE" sz="1100" dirty="0">
+                <a:solidFill>
+                  <a:schemeClr val="tx2">
+                    <a:lumMod val="75000"/>
+                    <a:lumOff val="25000"/>
+                  </a:schemeClr>
+                </a:solidFill>
+                <a:latin typeface="CMU Serif" panose="02000603000000000000" pitchFamily="2" charset="0"/>
+                <a:ea typeface="CMU Serif" panose="02000603000000000000" pitchFamily="2" charset="0"/>
+                <a:cs typeface="CMU Serif" panose="02000603000000000000" pitchFamily="2" charset="0"/>
+              </a:rPr>
+              <a:t> = 0</a:t>
+            </a:r>
+          </a:p>
+        </p:txBody>
+      </p:sp>
+      <p:sp>
+        <p:nvSpPr>
+          <p:cNvPr id="10" name="Textfeld 9">
+            <a:extLst>
+              <a:ext uri="{FF2B5EF4-FFF2-40B4-BE49-F238E27FC236}">
+                <a16:creationId xmlns:a16="http://schemas.microsoft.com/office/drawing/2014/main" id="{8C14636E-63D0-C4C7-97CD-E04B6B239B81}"/>
+              </a:ext>
+            </a:extLst>
+          </p:cNvPr>
+          <p:cNvSpPr txBox="1"/>
+          <p:nvPr/>
+        </p:nvSpPr>
+        <p:spPr>
+          <a:xfrm>
+            <a:off x="1646237" y="1022829"/>
+            <a:ext cx="1264548" cy="261610"/>
+          </a:xfrm>
+          <a:prstGeom prst="rect">
+            <a:avLst/>
+          </a:prstGeom>
+          <a:noFill/>
+        </p:spPr>
+        <p:txBody>
+          <a:bodyPr wrap="square" rtlCol="0">
+            <a:spAutoFit/>
+          </a:bodyPr>
+          <a:lstStyle/>
+          <a:p>
+            <a:pPr algn="ctr"/>
+            <a:r>
+              <a:rPr lang="de-DE" sz="1100" i="1" dirty="0">
+                <a:solidFill>
+                  <a:schemeClr val="accent6">
+                    <a:lumMod val="75000"/>
+                  </a:schemeClr>
+                </a:solidFill>
+                <a:latin typeface="CMU Serif" panose="02000603000000000000" pitchFamily="2" charset="0"/>
+                <a:ea typeface="CMU Serif" panose="02000603000000000000" pitchFamily="2" charset="0"/>
+                <a:cs typeface="CMU Serif" panose="02000603000000000000" pitchFamily="2" charset="0"/>
+              </a:rPr>
+              <a:t>i</a:t>
+            </a:r>
+            <a:r>
+              <a:rPr lang="de-DE" sz="1100" dirty="0">
+                <a:solidFill>
+                  <a:schemeClr val="accent6">
+                    <a:lumMod val="75000"/>
+                  </a:schemeClr>
+                </a:solidFill>
+                <a:latin typeface="CMU Serif" panose="02000603000000000000" pitchFamily="2" charset="0"/>
+                <a:ea typeface="CMU Serif" panose="02000603000000000000" pitchFamily="2" charset="0"/>
+                <a:cs typeface="CMU Serif" panose="02000603000000000000" pitchFamily="2" charset="0"/>
+              </a:rPr>
+              <a:t> = 1  (elliptisch)</a:t>
+            </a:r>
+          </a:p>
+        </p:txBody>
+      </p:sp>
+      <p:sp>
+        <p:nvSpPr>
+          <p:cNvPr id="22" name="Textfeld 21">
+            <a:extLst>
+              <a:ext uri="{FF2B5EF4-FFF2-40B4-BE49-F238E27FC236}">
+                <a16:creationId xmlns:a16="http://schemas.microsoft.com/office/drawing/2014/main" id="{EE15E482-E8F9-3ABC-42EF-7B801811ED51}"/>
+              </a:ext>
+            </a:extLst>
+          </p:cNvPr>
+          <p:cNvSpPr txBox="1"/>
+          <p:nvPr/>
+        </p:nvSpPr>
+        <p:spPr>
+          <a:xfrm>
+            <a:off x="1324958" y="2052638"/>
+            <a:ext cx="512970" cy="261610"/>
+          </a:xfrm>
+          <a:prstGeom prst="rect">
+            <a:avLst/>
+          </a:prstGeom>
+          <a:noFill/>
+        </p:spPr>
+        <p:txBody>
+          <a:bodyPr wrap="square" rtlCol="0">
+            <a:spAutoFit/>
+          </a:bodyPr>
+          <a:lstStyle/>
+          <a:p>
+            <a:pPr algn="ctr"/>
+            <a:r>
+              <a:rPr lang="de-DE" sz="1100" i="1" dirty="0">
+                <a:solidFill>
+                  <a:schemeClr val="accent2">
+                    <a:lumMod val="75000"/>
+                  </a:schemeClr>
+                </a:solidFill>
+                <a:latin typeface="CMU Serif" panose="02000603000000000000" pitchFamily="2" charset="0"/>
+                <a:ea typeface="CMU Serif" panose="02000603000000000000" pitchFamily="2" charset="0"/>
+                <a:cs typeface="CMU Serif" panose="02000603000000000000" pitchFamily="2" charset="0"/>
+              </a:rPr>
+              <a:t>i</a:t>
+            </a:r>
+            <a:r>
+              <a:rPr lang="de-DE" sz="1100" dirty="0">
+                <a:solidFill>
+                  <a:schemeClr val="accent2">
+                    <a:lumMod val="75000"/>
+                  </a:schemeClr>
+                </a:solidFill>
+                <a:latin typeface="CMU Serif" panose="02000603000000000000" pitchFamily="2" charset="0"/>
+                <a:ea typeface="CMU Serif" panose="02000603000000000000" pitchFamily="2" charset="0"/>
+                <a:cs typeface="CMU Serif" panose="02000603000000000000" pitchFamily="2" charset="0"/>
+              </a:rPr>
+              <a:t> = 2</a:t>
+            </a:r>
+          </a:p>
+        </p:txBody>
+      </p:sp>
+    </p:spTree>
+    <p:extLst>
+      <p:ext uri="{BB962C8B-B14F-4D97-AF65-F5344CB8AC3E}">
+        <p14:creationId xmlns:p14="http://schemas.microsoft.com/office/powerpoint/2010/main" val="1300493935"/>
+      </p:ext>
+    </p:extLst>
+  </p:cSld>
+  <p:clrMapOvr>
+    <a:masterClrMapping/>
+  </p:clrMapOvr>
+</p:sld>
+</file>
+
+<file path=ppt/slides/slide4.xml><?xml version="1.0" encoding="utf-8"?>
+<p:sld xmlns:a="http://schemas.openxmlformats.org/drawingml/2006/main" xmlns:r="http://schemas.openxmlformats.org/officeDocument/2006/relationships" xmlns:p="http://schemas.openxmlformats.org/presentationml/2006/main">
+  <p:cSld>
+    <p:spTree>
+      <p:nvGrpSpPr>
+        <p:cNvPr id="1" name="">
+          <a:extLst>
+            <a:ext uri="{FF2B5EF4-FFF2-40B4-BE49-F238E27FC236}">
+              <a16:creationId xmlns:a16="http://schemas.microsoft.com/office/drawing/2014/main" id="{4AEBE6B5-B784-7829-6FC5-E4C259D78CBC}"/>
+            </a:ext>
+          </a:extLst>
+        </p:cNvPr>
+        <p:cNvGrpSpPr/>
+        <p:nvPr/>
+      </p:nvGrpSpPr>
+      <p:grpSpPr>
+        <a:xfrm>
+          <a:off x="0" y="0"/>
+          <a:ext cx="0" cy="0"/>
+          <a:chOff x="0" y="0"/>
+          <a:chExt cx="0" cy="0"/>
+        </a:xfrm>
+      </p:grpSpPr>
+    </p:spTree>
+    <p:extLst>
+      <p:ext uri="{BB962C8B-B14F-4D97-AF65-F5344CB8AC3E}">
+        <p14:creationId xmlns:p14="http://schemas.microsoft.com/office/powerpoint/2010/main" val="3351771347"/>
+      </p:ext>
+    </p:extLst>
+  </p:cSld>
+  <p:clrMapOvr>
+    <a:masterClrMapping/>
+  </p:clrMapOvr>
+</p:sld>
+</file>
+
+<file path=ppt/slides/slide5.xml><?xml version="1.0" encoding="utf-8"?>
 <p:sld xmlns:a="http://schemas.openxmlformats.org/drawingml/2006/main" xmlns:r="http://schemas.openxmlformats.org/officeDocument/2006/relationships" xmlns:p="http://schemas.openxmlformats.org/presentationml/2006/main">
   <p:cSld>
     <p:spTree>
@@ -11506,7 +15685,7 @@
 </p:sld>
 </file>
 
-<file path=ppt/slides/slide4.xml><?xml version="1.0" encoding="utf-8"?>
+<file path=ppt/slides/slide6.xml><?xml version="1.0" encoding="utf-8"?>
 <p:sld xmlns:a="http://schemas.openxmlformats.org/drawingml/2006/main" xmlns:r="http://schemas.openxmlformats.org/officeDocument/2006/relationships" xmlns:p="http://schemas.openxmlformats.org/presentationml/2006/main">
   <p:cSld>
     <p:spTree>
@@ -13481,7 +17660,7 @@
 </p:sld>
 </file>
 
-<file path=ppt/slides/slide5.xml><?xml version="1.0" encoding="utf-8"?>
+<file path=ppt/slides/slide7.xml><?xml version="1.0" encoding="utf-8"?>
 <p:sld xmlns:a="http://schemas.openxmlformats.org/drawingml/2006/main" xmlns:r="http://schemas.openxmlformats.org/officeDocument/2006/relationships" xmlns:p="http://schemas.openxmlformats.org/presentationml/2006/main">
   <p:cSld>
     <p:spTree>
@@ -14245,7 +18424,7 @@
 </p:sld>
 </file>
 
-<file path=ppt/slides/slide6.xml><?xml version="1.0" encoding="utf-8"?>
+<file path=ppt/slides/slide8.xml><?xml version="1.0" encoding="utf-8"?>
 <p:sld xmlns:a="http://schemas.openxmlformats.org/drawingml/2006/main" xmlns:r="http://schemas.openxmlformats.org/officeDocument/2006/relationships" xmlns:p="http://schemas.openxmlformats.org/presentationml/2006/main">
   <p:cSld>
     <p:spTree>
@@ -18264,7 +22443,7 @@
 </p:sld>
 </file>
 
-<file path=ppt/slides/slide7.xml><?xml version="1.0" encoding="utf-8"?>
+<file path=ppt/slides/slide9.xml><?xml version="1.0" encoding="utf-8"?>
 <p:sld xmlns:a="http://schemas.openxmlformats.org/drawingml/2006/main" xmlns:r="http://schemas.openxmlformats.org/officeDocument/2006/relationships" xmlns:p="http://schemas.openxmlformats.org/presentationml/2006/main">
   <p:cSld>
     <p:spTree>

--- a/LaTeX M.Sc. LRT/Aerodynamik/images/AER-Images.pptx
+++ b/LaTeX M.Sc. LRT/Aerodynamik/images/AER-Images.pptx
@@ -5,18 +5,19 @@
     <p:sldMasterId id="2147483660" r:id="rId1"/>
   </p:sldMasterIdLst>
   <p:notesMasterIdLst>
-    <p:notesMasterId r:id="rId11"/>
+    <p:notesMasterId r:id="rId12"/>
   </p:notesMasterIdLst>
   <p:sldIdLst>
     <p:sldId id="261" r:id="rId2"/>
     <p:sldId id="262" r:id="rId3"/>
     <p:sldId id="264" r:id="rId4"/>
-    <p:sldId id="263" r:id="rId5"/>
-    <p:sldId id="256" r:id="rId6"/>
-    <p:sldId id="257" r:id="rId7"/>
-    <p:sldId id="258" r:id="rId8"/>
-    <p:sldId id="259" r:id="rId9"/>
-    <p:sldId id="260" r:id="rId10"/>
+    <p:sldId id="265" r:id="rId5"/>
+    <p:sldId id="263" r:id="rId6"/>
+    <p:sldId id="256" r:id="rId7"/>
+    <p:sldId id="257" r:id="rId8"/>
+    <p:sldId id="258" r:id="rId9"/>
+    <p:sldId id="259" r:id="rId10"/>
+    <p:sldId id="260" r:id="rId11"/>
   </p:sldIdLst>
   <p:sldSz cx="3600450" cy="3600450"/>
   <p:notesSz cx="6858000" cy="9144000"/>
@@ -205,7 +206,7 @@
           <a:p>
             <a:fld id="{0C596C2D-C72C-406E-B79E-9BAC142DD20E}" type="datetimeFigureOut">
               <a:rPr lang="de-DE" smtClean="0"/>
-              <a:t>21.08.2026</a:t>
+              <a:t>25.08.2026</a:t>
             </a:fld>
             <a:endParaRPr lang="de-DE" dirty="0"/>
           </a:p>
@@ -603,7 +604,7 @@
           <a:p>
             <a:fld id="{6EAE28AA-0912-4DA0-8B30-7F3CA3FE6671}" type="datetimeFigureOut">
               <a:rPr lang="de-DE" smtClean="0"/>
-              <a:t>21.08.2026</a:t>
+              <a:t>25.08.2026</a:t>
             </a:fld>
             <a:endParaRPr lang="de-DE" dirty="0"/>
           </a:p>
@@ -773,7 +774,7 @@
           <a:p>
             <a:fld id="{6EAE28AA-0912-4DA0-8B30-7F3CA3FE6671}" type="datetimeFigureOut">
               <a:rPr lang="de-DE" smtClean="0"/>
-              <a:t>21.08.2026</a:t>
+              <a:t>25.08.2026</a:t>
             </a:fld>
             <a:endParaRPr lang="de-DE" dirty="0"/>
           </a:p>
@@ -953,7 +954,7 @@
           <a:p>
             <a:fld id="{6EAE28AA-0912-4DA0-8B30-7F3CA3FE6671}" type="datetimeFigureOut">
               <a:rPr lang="de-DE" smtClean="0"/>
-              <a:t>21.08.2026</a:t>
+              <a:t>25.08.2026</a:t>
             </a:fld>
             <a:endParaRPr lang="de-DE" dirty="0"/>
           </a:p>
@@ -1123,7 +1124,7 @@
           <a:p>
             <a:fld id="{6EAE28AA-0912-4DA0-8B30-7F3CA3FE6671}" type="datetimeFigureOut">
               <a:rPr lang="de-DE" smtClean="0"/>
-              <a:t>21.08.2026</a:t>
+              <a:t>25.08.2026</a:t>
             </a:fld>
             <a:endParaRPr lang="de-DE" dirty="0"/>
           </a:p>
@@ -1369,7 +1370,7 @@
           <a:p>
             <a:fld id="{6EAE28AA-0912-4DA0-8B30-7F3CA3FE6671}" type="datetimeFigureOut">
               <a:rPr lang="de-DE" smtClean="0"/>
-              <a:t>21.08.2026</a:t>
+              <a:t>25.08.2026</a:t>
             </a:fld>
             <a:endParaRPr lang="de-DE" dirty="0"/>
           </a:p>
@@ -1601,7 +1602,7 @@
           <a:p>
             <a:fld id="{6EAE28AA-0912-4DA0-8B30-7F3CA3FE6671}" type="datetimeFigureOut">
               <a:rPr lang="de-DE" smtClean="0"/>
-              <a:t>21.08.2026</a:t>
+              <a:t>25.08.2026</a:t>
             </a:fld>
             <a:endParaRPr lang="de-DE" dirty="0"/>
           </a:p>
@@ -1968,7 +1969,7 @@
           <a:p>
             <a:fld id="{6EAE28AA-0912-4DA0-8B30-7F3CA3FE6671}" type="datetimeFigureOut">
               <a:rPr lang="de-DE" smtClean="0"/>
-              <a:t>21.08.2026</a:t>
+              <a:t>25.08.2026</a:t>
             </a:fld>
             <a:endParaRPr lang="de-DE" dirty="0"/>
           </a:p>
@@ -2086,7 +2087,7 @@
           <a:p>
             <a:fld id="{6EAE28AA-0912-4DA0-8B30-7F3CA3FE6671}" type="datetimeFigureOut">
               <a:rPr lang="de-DE" smtClean="0"/>
-              <a:t>21.08.2026</a:t>
+              <a:t>25.08.2026</a:t>
             </a:fld>
             <a:endParaRPr lang="de-DE" dirty="0"/>
           </a:p>
@@ -2181,7 +2182,7 @@
           <a:p>
             <a:fld id="{6EAE28AA-0912-4DA0-8B30-7F3CA3FE6671}" type="datetimeFigureOut">
               <a:rPr lang="de-DE" smtClean="0"/>
-              <a:t>21.08.2026</a:t>
+              <a:t>25.08.2026</a:t>
             </a:fld>
             <a:endParaRPr lang="de-DE" dirty="0"/>
           </a:p>
@@ -2458,7 +2459,7 @@
           <a:p>
             <a:fld id="{6EAE28AA-0912-4DA0-8B30-7F3CA3FE6671}" type="datetimeFigureOut">
               <a:rPr lang="de-DE" smtClean="0"/>
-              <a:t>21.08.2026</a:t>
+              <a:t>25.08.2026</a:t>
             </a:fld>
             <a:endParaRPr lang="de-DE" dirty="0"/>
           </a:p>
@@ -2715,7 +2716,7 @@
           <a:p>
             <a:fld id="{6EAE28AA-0912-4DA0-8B30-7F3CA3FE6671}" type="datetimeFigureOut">
               <a:rPr lang="de-DE" smtClean="0"/>
-              <a:t>21.08.2026</a:t>
+              <a:t>25.08.2026</a:t>
             </a:fld>
             <a:endParaRPr lang="de-DE" dirty="0"/>
           </a:p>
@@ -2928,7 +2929,7 @@
           <a:p>
             <a:fld id="{6EAE28AA-0912-4DA0-8B30-7F3CA3FE6671}" type="datetimeFigureOut">
               <a:rPr lang="de-DE" smtClean="0"/>
-              <a:t>21.08.2026</a:t>
+              <a:t>25.08.2026</a:t>
             </a:fld>
             <a:endParaRPr lang="de-DE" dirty="0"/>
           </a:p>
@@ -5096,6 +5097,2651 @@
 </p:sld>
 </file>
 
+<file path=ppt/slides/slide10.xml><?xml version="1.0" encoding="utf-8"?>
+<p:sld xmlns:a="http://schemas.openxmlformats.org/drawingml/2006/main" xmlns:r="http://schemas.openxmlformats.org/officeDocument/2006/relationships" xmlns:p="http://schemas.openxmlformats.org/presentationml/2006/main">
+  <p:cSld>
+    <p:spTree>
+      <p:nvGrpSpPr>
+        <p:cNvPr id="1" name=""/>
+        <p:cNvGrpSpPr/>
+        <p:nvPr/>
+      </p:nvGrpSpPr>
+      <p:grpSpPr>
+        <a:xfrm>
+          <a:off x="0" y="0"/>
+          <a:ext cx="0" cy="0"/>
+          <a:chOff x="0" y="0"/>
+          <a:chExt cx="0" cy="0"/>
+        </a:xfrm>
+      </p:grpSpPr>
+      <p:grpSp>
+        <p:nvGrpSpPr>
+          <p:cNvPr id="49" name="Gruppieren 48">
+            <a:extLst>
+              <a:ext uri="{FF2B5EF4-FFF2-40B4-BE49-F238E27FC236}">
+                <a16:creationId xmlns:a16="http://schemas.microsoft.com/office/drawing/2014/main" id="{E32F85D3-A54D-969B-1CD9-2E346EF21701}"/>
+              </a:ext>
+            </a:extLst>
+          </p:cNvPr>
+          <p:cNvGrpSpPr/>
+          <p:nvPr/>
+        </p:nvGrpSpPr>
+        <p:grpSpPr>
+          <a:xfrm>
+            <a:off x="275999" y="503649"/>
+            <a:ext cx="2980688" cy="2704628"/>
+            <a:chOff x="181105" y="541227"/>
+            <a:chExt cx="2980688" cy="2704628"/>
+          </a:xfrm>
+        </p:grpSpPr>
+        <p:grpSp>
+          <p:nvGrpSpPr>
+            <p:cNvPr id="22" name="Gruppieren 21">
+              <a:extLst>
+                <a:ext uri="{FF2B5EF4-FFF2-40B4-BE49-F238E27FC236}">
+                  <a16:creationId xmlns:a16="http://schemas.microsoft.com/office/drawing/2014/main" id="{D92B1F24-5A92-3590-663A-9579EBCFF870}"/>
+                </a:ext>
+              </a:extLst>
+            </p:cNvPr>
+            <p:cNvGrpSpPr/>
+            <p:nvPr/>
+          </p:nvGrpSpPr>
+          <p:grpSpPr>
+            <a:xfrm>
+              <a:off x="550545" y="650668"/>
+              <a:ext cx="2434955" cy="2368757"/>
+              <a:chOff x="550545" y="650668"/>
+              <a:chExt cx="2434955" cy="2368757"/>
+            </a:xfrm>
+          </p:grpSpPr>
+          <p:cxnSp>
+            <p:nvCxnSpPr>
+              <p:cNvPr id="6" name="Gerader Verbinder 5">
+                <a:extLst>
+                  <a:ext uri="{FF2B5EF4-FFF2-40B4-BE49-F238E27FC236}">
+                    <a16:creationId xmlns:a16="http://schemas.microsoft.com/office/drawing/2014/main" id="{81A82260-3DA2-11ED-4556-1EDDA066CECB}"/>
+                  </a:ext>
+                </a:extLst>
+              </p:cNvPr>
+              <p:cNvCxnSpPr>
+                <a:cxnSpLocks/>
+              </p:cNvCxnSpPr>
+              <p:nvPr/>
+            </p:nvCxnSpPr>
+            <p:spPr>
+              <a:xfrm>
+                <a:off x="1089060" y="650798"/>
+                <a:ext cx="0" cy="2298853"/>
+              </a:xfrm>
+              <a:prstGeom prst="line">
+                <a:avLst/>
+              </a:prstGeom>
+              <a:ln w="12700" cap="rnd">
+                <a:solidFill>
+                  <a:schemeClr val="bg1">
+                    <a:lumMod val="65000"/>
+                  </a:schemeClr>
+                </a:solidFill>
+                <a:round/>
+              </a:ln>
+            </p:spPr>
+            <p:style>
+              <a:lnRef idx="2">
+                <a:schemeClr val="accent1"/>
+              </a:lnRef>
+              <a:fillRef idx="0">
+                <a:schemeClr val="accent1"/>
+              </a:fillRef>
+              <a:effectRef idx="1">
+                <a:schemeClr val="accent1"/>
+              </a:effectRef>
+              <a:fontRef idx="minor">
+                <a:schemeClr val="tx1"/>
+              </a:fontRef>
+            </p:style>
+          </p:cxnSp>
+          <p:cxnSp>
+            <p:nvCxnSpPr>
+              <p:cNvPr id="7" name="Gerader Verbinder 6">
+                <a:extLst>
+                  <a:ext uri="{FF2B5EF4-FFF2-40B4-BE49-F238E27FC236}">
+                    <a16:creationId xmlns:a16="http://schemas.microsoft.com/office/drawing/2014/main" id="{135734E5-F363-0E41-CFDF-C3E70C925F40}"/>
+                  </a:ext>
+                </a:extLst>
+              </p:cNvPr>
+              <p:cNvCxnSpPr>
+                <a:cxnSpLocks/>
+              </p:cNvCxnSpPr>
+              <p:nvPr/>
+            </p:nvCxnSpPr>
+            <p:spPr>
+              <a:xfrm>
+                <a:off x="1563171" y="650798"/>
+                <a:ext cx="0" cy="2298853"/>
+              </a:xfrm>
+              <a:prstGeom prst="line">
+                <a:avLst/>
+              </a:prstGeom>
+              <a:ln w="12700" cap="rnd">
+                <a:solidFill>
+                  <a:schemeClr val="bg1">
+                    <a:lumMod val="65000"/>
+                  </a:schemeClr>
+                </a:solidFill>
+                <a:round/>
+              </a:ln>
+            </p:spPr>
+            <p:style>
+              <a:lnRef idx="2">
+                <a:schemeClr val="accent1"/>
+              </a:lnRef>
+              <a:fillRef idx="0">
+                <a:schemeClr val="accent1"/>
+              </a:fillRef>
+              <a:effectRef idx="1">
+                <a:schemeClr val="accent1"/>
+              </a:effectRef>
+              <a:fontRef idx="minor">
+                <a:schemeClr val="tx1"/>
+              </a:fontRef>
+            </p:style>
+          </p:cxnSp>
+          <p:cxnSp>
+            <p:nvCxnSpPr>
+              <p:cNvPr id="8" name="Gerader Verbinder 7">
+                <a:extLst>
+                  <a:ext uri="{FF2B5EF4-FFF2-40B4-BE49-F238E27FC236}">
+                    <a16:creationId xmlns:a16="http://schemas.microsoft.com/office/drawing/2014/main" id="{CC13891C-10AF-5437-83F8-A4D0ECA72A30}"/>
+                  </a:ext>
+                </a:extLst>
+              </p:cNvPr>
+              <p:cNvCxnSpPr>
+                <a:cxnSpLocks/>
+              </p:cNvCxnSpPr>
+              <p:nvPr/>
+            </p:nvCxnSpPr>
+            <p:spPr>
+              <a:xfrm>
+                <a:off x="2037281" y="650798"/>
+                <a:ext cx="0" cy="2298853"/>
+              </a:xfrm>
+              <a:prstGeom prst="line">
+                <a:avLst/>
+              </a:prstGeom>
+              <a:ln w="12700" cap="rnd">
+                <a:solidFill>
+                  <a:schemeClr val="bg1">
+                    <a:lumMod val="65000"/>
+                  </a:schemeClr>
+                </a:solidFill>
+                <a:round/>
+              </a:ln>
+            </p:spPr>
+            <p:style>
+              <a:lnRef idx="2">
+                <a:schemeClr val="accent1"/>
+              </a:lnRef>
+              <a:fillRef idx="0">
+                <a:schemeClr val="accent1"/>
+              </a:fillRef>
+              <a:effectRef idx="1">
+                <a:schemeClr val="accent1"/>
+              </a:effectRef>
+              <a:fontRef idx="minor">
+                <a:schemeClr val="tx1"/>
+              </a:fontRef>
+            </p:style>
+          </p:cxnSp>
+          <p:cxnSp>
+            <p:nvCxnSpPr>
+              <p:cNvPr id="9" name="Gerader Verbinder 8">
+                <a:extLst>
+                  <a:ext uri="{FF2B5EF4-FFF2-40B4-BE49-F238E27FC236}">
+                    <a16:creationId xmlns:a16="http://schemas.microsoft.com/office/drawing/2014/main" id="{BB913743-D1B7-5E2F-8BF4-F1C83F7EF6D5}"/>
+                  </a:ext>
+                </a:extLst>
+              </p:cNvPr>
+              <p:cNvCxnSpPr>
+                <a:cxnSpLocks/>
+              </p:cNvCxnSpPr>
+              <p:nvPr/>
+            </p:nvCxnSpPr>
+            <p:spPr>
+              <a:xfrm>
+                <a:off x="2511392" y="650798"/>
+                <a:ext cx="0" cy="2298853"/>
+              </a:xfrm>
+              <a:prstGeom prst="line">
+                <a:avLst/>
+              </a:prstGeom>
+              <a:ln w="12700" cap="rnd">
+                <a:solidFill>
+                  <a:schemeClr val="bg1">
+                    <a:lumMod val="65000"/>
+                  </a:schemeClr>
+                </a:solidFill>
+                <a:round/>
+              </a:ln>
+            </p:spPr>
+            <p:style>
+              <a:lnRef idx="2">
+                <a:schemeClr val="accent1"/>
+              </a:lnRef>
+              <a:fillRef idx="0">
+                <a:schemeClr val="accent1"/>
+              </a:fillRef>
+              <a:effectRef idx="1">
+                <a:schemeClr val="accent1"/>
+              </a:effectRef>
+              <a:fontRef idx="minor">
+                <a:schemeClr val="tx1"/>
+              </a:fontRef>
+            </p:style>
+          </p:cxnSp>
+          <p:cxnSp>
+            <p:nvCxnSpPr>
+              <p:cNvPr id="10" name="Gerader Verbinder 9">
+                <a:extLst>
+                  <a:ext uri="{FF2B5EF4-FFF2-40B4-BE49-F238E27FC236}">
+                    <a16:creationId xmlns:a16="http://schemas.microsoft.com/office/drawing/2014/main" id="{2A9C0E40-FBCA-18BE-FC80-0C25F13CEA89}"/>
+                  </a:ext>
+                </a:extLst>
+              </p:cNvPr>
+              <p:cNvCxnSpPr>
+                <a:cxnSpLocks/>
+              </p:cNvCxnSpPr>
+              <p:nvPr/>
+            </p:nvCxnSpPr>
+            <p:spPr>
+              <a:xfrm>
+                <a:off x="2985500" y="650798"/>
+                <a:ext cx="0" cy="2298853"/>
+              </a:xfrm>
+              <a:prstGeom prst="line">
+                <a:avLst/>
+              </a:prstGeom>
+              <a:ln w="12700" cap="rnd">
+                <a:solidFill>
+                  <a:schemeClr val="bg1">
+                    <a:lumMod val="65000"/>
+                  </a:schemeClr>
+                </a:solidFill>
+                <a:round/>
+              </a:ln>
+            </p:spPr>
+            <p:style>
+              <a:lnRef idx="2">
+                <a:schemeClr val="accent1"/>
+              </a:lnRef>
+              <a:fillRef idx="0">
+                <a:schemeClr val="accent1"/>
+              </a:fillRef>
+              <a:effectRef idx="1">
+                <a:schemeClr val="accent1"/>
+              </a:effectRef>
+              <a:fontRef idx="minor">
+                <a:schemeClr val="tx1"/>
+              </a:fontRef>
+            </p:style>
+          </p:cxnSp>
+          <p:grpSp>
+            <p:nvGrpSpPr>
+              <p:cNvPr id="20" name="Gruppieren 19">
+                <a:extLst>
+                  <a:ext uri="{FF2B5EF4-FFF2-40B4-BE49-F238E27FC236}">
+                    <a16:creationId xmlns:a16="http://schemas.microsoft.com/office/drawing/2014/main" id="{4167EEB5-7764-643A-F45F-3C678C44B523}"/>
+                  </a:ext>
+                </a:extLst>
+              </p:cNvPr>
+              <p:cNvGrpSpPr/>
+              <p:nvPr/>
+            </p:nvGrpSpPr>
+            <p:grpSpPr>
+              <a:xfrm>
+                <a:off x="550545" y="650668"/>
+                <a:ext cx="2434955" cy="2301985"/>
+                <a:chOff x="550545" y="650668"/>
+                <a:chExt cx="2434955" cy="2301985"/>
+              </a:xfrm>
+            </p:grpSpPr>
+            <p:cxnSp>
+              <p:nvCxnSpPr>
+                <p:cNvPr id="12" name="Gerader Verbinder 11">
+                  <a:extLst>
+                    <a:ext uri="{FF2B5EF4-FFF2-40B4-BE49-F238E27FC236}">
+                      <a16:creationId xmlns:a16="http://schemas.microsoft.com/office/drawing/2014/main" id="{A810AFF0-6EDB-93E1-E1DF-F7C7BB033A8F}"/>
+                    </a:ext>
+                  </a:extLst>
+                </p:cNvPr>
+                <p:cNvCxnSpPr>
+                  <a:cxnSpLocks/>
+                </p:cNvCxnSpPr>
+                <p:nvPr/>
+              </p:nvCxnSpPr>
+              <p:spPr>
+                <a:xfrm>
+                  <a:off x="614950" y="650668"/>
+                  <a:ext cx="2370550" cy="0"/>
+                </a:xfrm>
+                <a:prstGeom prst="line">
+                  <a:avLst/>
+                </a:prstGeom>
+                <a:ln w="12700" cap="rnd">
+                  <a:solidFill>
+                    <a:schemeClr val="bg1">
+                      <a:lumMod val="65000"/>
+                    </a:schemeClr>
+                  </a:solidFill>
+                  <a:round/>
+                </a:ln>
+              </p:spPr>
+              <p:style>
+                <a:lnRef idx="2">
+                  <a:schemeClr val="accent1"/>
+                </a:lnRef>
+                <a:fillRef idx="0">
+                  <a:schemeClr val="accent1"/>
+                </a:fillRef>
+                <a:effectRef idx="1">
+                  <a:schemeClr val="accent1"/>
+                </a:effectRef>
+                <a:fontRef idx="minor">
+                  <a:schemeClr val="tx1"/>
+                </a:fontRef>
+              </p:style>
+            </p:cxnSp>
+            <p:cxnSp>
+              <p:nvCxnSpPr>
+                <p:cNvPr id="15" name="Gerader Verbinder 14">
+                  <a:extLst>
+                    <a:ext uri="{FF2B5EF4-FFF2-40B4-BE49-F238E27FC236}">
+                      <a16:creationId xmlns:a16="http://schemas.microsoft.com/office/drawing/2014/main" id="{FC635500-1844-B8AB-24E8-9B42D56DFEE6}"/>
+                    </a:ext>
+                  </a:extLst>
+                </p:cNvPr>
+                <p:cNvCxnSpPr>
+                  <a:cxnSpLocks/>
+                </p:cNvCxnSpPr>
+                <p:nvPr/>
+              </p:nvCxnSpPr>
+              <p:spPr>
+                <a:xfrm>
+                  <a:off x="614950" y="1226164"/>
+                  <a:ext cx="2370550" cy="0"/>
+                </a:xfrm>
+                <a:prstGeom prst="line">
+                  <a:avLst/>
+                </a:prstGeom>
+                <a:ln w="12700" cap="rnd">
+                  <a:solidFill>
+                    <a:schemeClr val="bg1">
+                      <a:lumMod val="65000"/>
+                    </a:schemeClr>
+                  </a:solidFill>
+                  <a:round/>
+                </a:ln>
+              </p:spPr>
+              <p:style>
+                <a:lnRef idx="2">
+                  <a:schemeClr val="accent1"/>
+                </a:lnRef>
+                <a:fillRef idx="0">
+                  <a:schemeClr val="accent1"/>
+                </a:fillRef>
+                <a:effectRef idx="1">
+                  <a:schemeClr val="accent1"/>
+                </a:effectRef>
+                <a:fontRef idx="minor">
+                  <a:schemeClr val="tx1"/>
+                </a:fontRef>
+              </p:style>
+            </p:cxnSp>
+            <p:cxnSp>
+              <p:nvCxnSpPr>
+                <p:cNvPr id="16" name="Gerader Verbinder 15">
+                  <a:extLst>
+                    <a:ext uri="{FF2B5EF4-FFF2-40B4-BE49-F238E27FC236}">
+                      <a16:creationId xmlns:a16="http://schemas.microsoft.com/office/drawing/2014/main" id="{35629FED-E994-F10E-2F2C-57A5D1E0B7DB}"/>
+                    </a:ext>
+                  </a:extLst>
+                </p:cNvPr>
+                <p:cNvCxnSpPr>
+                  <a:cxnSpLocks/>
+                </p:cNvCxnSpPr>
+                <p:nvPr/>
+              </p:nvCxnSpPr>
+              <p:spPr>
+                <a:xfrm>
+                  <a:off x="614950" y="1801660"/>
+                  <a:ext cx="2370550" cy="0"/>
+                </a:xfrm>
+                <a:prstGeom prst="line">
+                  <a:avLst/>
+                </a:prstGeom>
+                <a:ln w="12700" cap="rnd">
+                  <a:solidFill>
+                    <a:schemeClr val="bg1">
+                      <a:lumMod val="65000"/>
+                    </a:schemeClr>
+                  </a:solidFill>
+                  <a:round/>
+                </a:ln>
+              </p:spPr>
+              <p:style>
+                <a:lnRef idx="2">
+                  <a:schemeClr val="accent1"/>
+                </a:lnRef>
+                <a:fillRef idx="0">
+                  <a:schemeClr val="accent1"/>
+                </a:fillRef>
+                <a:effectRef idx="1">
+                  <a:schemeClr val="accent1"/>
+                </a:effectRef>
+                <a:fontRef idx="minor">
+                  <a:schemeClr val="tx1"/>
+                </a:fontRef>
+              </p:style>
+            </p:cxnSp>
+            <p:cxnSp>
+              <p:nvCxnSpPr>
+                <p:cNvPr id="19" name="Gerader Verbinder 18">
+                  <a:extLst>
+                    <a:ext uri="{FF2B5EF4-FFF2-40B4-BE49-F238E27FC236}">
+                      <a16:creationId xmlns:a16="http://schemas.microsoft.com/office/drawing/2014/main" id="{0E0A5A03-F348-599A-8F55-54C725842CC5}"/>
+                    </a:ext>
+                  </a:extLst>
+                </p:cNvPr>
+                <p:cNvCxnSpPr>
+                  <a:cxnSpLocks/>
+                </p:cNvCxnSpPr>
+                <p:nvPr/>
+              </p:nvCxnSpPr>
+              <p:spPr>
+                <a:xfrm>
+                  <a:off x="614950" y="2377156"/>
+                  <a:ext cx="2370550" cy="0"/>
+                </a:xfrm>
+                <a:prstGeom prst="line">
+                  <a:avLst/>
+                </a:prstGeom>
+                <a:ln w="12700" cap="rnd">
+                  <a:solidFill>
+                    <a:schemeClr val="bg1">
+                      <a:lumMod val="65000"/>
+                    </a:schemeClr>
+                  </a:solidFill>
+                  <a:round/>
+                </a:ln>
+              </p:spPr>
+              <p:style>
+                <a:lnRef idx="2">
+                  <a:schemeClr val="accent1"/>
+                </a:lnRef>
+                <a:fillRef idx="0">
+                  <a:schemeClr val="accent1"/>
+                </a:fillRef>
+                <a:effectRef idx="1">
+                  <a:schemeClr val="accent1"/>
+                </a:effectRef>
+                <a:fontRef idx="minor">
+                  <a:schemeClr val="tx1"/>
+                </a:fontRef>
+              </p:style>
+            </p:cxnSp>
+            <p:cxnSp>
+              <p:nvCxnSpPr>
+                <p:cNvPr id="17" name="Gerader Verbinder 16">
+                  <a:extLst>
+                    <a:ext uri="{FF2B5EF4-FFF2-40B4-BE49-F238E27FC236}">
+                      <a16:creationId xmlns:a16="http://schemas.microsoft.com/office/drawing/2014/main" id="{36E897C2-513E-7F0A-D487-E83D94F8068F}"/>
+                    </a:ext>
+                  </a:extLst>
+                </p:cNvPr>
+                <p:cNvCxnSpPr>
+                  <a:cxnSpLocks/>
+                </p:cNvCxnSpPr>
+                <p:nvPr/>
+              </p:nvCxnSpPr>
+              <p:spPr>
+                <a:xfrm>
+                  <a:off x="550545" y="2952653"/>
+                  <a:ext cx="2434955" cy="0"/>
+                </a:xfrm>
+                <a:prstGeom prst="line">
+                  <a:avLst/>
+                </a:prstGeom>
+                <a:ln w="12700" cap="rnd">
+                  <a:solidFill>
+                    <a:schemeClr val="tx1"/>
+                  </a:solidFill>
+                  <a:round/>
+                </a:ln>
+              </p:spPr>
+              <p:style>
+                <a:lnRef idx="2">
+                  <a:schemeClr val="accent1"/>
+                </a:lnRef>
+                <a:fillRef idx="0">
+                  <a:schemeClr val="accent1"/>
+                </a:fillRef>
+                <a:effectRef idx="1">
+                  <a:schemeClr val="accent1"/>
+                </a:effectRef>
+                <a:fontRef idx="minor">
+                  <a:schemeClr val="tx1"/>
+                </a:fontRef>
+              </p:style>
+            </p:cxnSp>
+          </p:grpSp>
+          <p:cxnSp>
+            <p:nvCxnSpPr>
+              <p:cNvPr id="5" name="Gerader Verbinder 4">
+                <a:extLst>
+                  <a:ext uri="{FF2B5EF4-FFF2-40B4-BE49-F238E27FC236}">
+                    <a16:creationId xmlns:a16="http://schemas.microsoft.com/office/drawing/2014/main" id="{7F2EA998-EED8-69AE-31A6-E7674B8801ED}"/>
+                  </a:ext>
+                </a:extLst>
+              </p:cNvPr>
+              <p:cNvCxnSpPr>
+                <a:cxnSpLocks/>
+              </p:cNvCxnSpPr>
+              <p:nvPr/>
+            </p:nvCxnSpPr>
+            <p:spPr>
+              <a:xfrm>
+                <a:off x="614950" y="650798"/>
+                <a:ext cx="0" cy="2368627"/>
+              </a:xfrm>
+              <a:prstGeom prst="line">
+                <a:avLst/>
+              </a:prstGeom>
+              <a:ln w="12700" cap="rnd">
+                <a:solidFill>
+                  <a:schemeClr val="tx1"/>
+                </a:solidFill>
+                <a:round/>
+              </a:ln>
+            </p:spPr>
+            <p:style>
+              <a:lnRef idx="2">
+                <a:schemeClr val="accent1"/>
+              </a:lnRef>
+              <a:fillRef idx="0">
+                <a:schemeClr val="accent1"/>
+              </a:fillRef>
+              <a:effectRef idx="1">
+                <a:schemeClr val="accent1"/>
+              </a:effectRef>
+              <a:fontRef idx="minor">
+                <a:schemeClr val="tx1"/>
+              </a:fontRef>
+            </p:style>
+          </p:cxnSp>
+        </p:grpSp>
+        <p:cxnSp>
+          <p:nvCxnSpPr>
+            <p:cNvPr id="25" name="Gerader Verbinder 24">
+              <a:extLst>
+                <a:ext uri="{FF2B5EF4-FFF2-40B4-BE49-F238E27FC236}">
+                  <a16:creationId xmlns:a16="http://schemas.microsoft.com/office/drawing/2014/main" id="{3B0F5731-70A9-C364-89CD-3ACBB970AC19}"/>
+                </a:ext>
+              </a:extLst>
+            </p:cNvPr>
+            <p:cNvCxnSpPr>
+              <a:cxnSpLocks/>
+            </p:cNvCxnSpPr>
+            <p:nvPr/>
+          </p:nvCxnSpPr>
+          <p:spPr>
+            <a:xfrm>
+              <a:off x="1089060" y="2954655"/>
+              <a:ext cx="0" cy="64770"/>
+            </a:xfrm>
+            <a:prstGeom prst="line">
+              <a:avLst/>
+            </a:prstGeom>
+            <a:ln w="12700" cap="rnd">
+              <a:solidFill>
+                <a:schemeClr val="tx1"/>
+              </a:solidFill>
+              <a:round/>
+            </a:ln>
+          </p:spPr>
+          <p:style>
+            <a:lnRef idx="2">
+              <a:schemeClr val="accent1"/>
+            </a:lnRef>
+            <a:fillRef idx="0">
+              <a:schemeClr val="accent1"/>
+            </a:fillRef>
+            <a:effectRef idx="1">
+              <a:schemeClr val="accent1"/>
+            </a:effectRef>
+            <a:fontRef idx="minor">
+              <a:schemeClr val="tx1"/>
+            </a:fontRef>
+          </p:style>
+        </p:cxnSp>
+        <p:cxnSp>
+          <p:nvCxnSpPr>
+            <p:cNvPr id="28" name="Gerader Verbinder 27">
+              <a:extLst>
+                <a:ext uri="{FF2B5EF4-FFF2-40B4-BE49-F238E27FC236}">
+                  <a16:creationId xmlns:a16="http://schemas.microsoft.com/office/drawing/2014/main" id="{8C7AF1F6-630D-8CB2-BB42-4366006F7EEF}"/>
+                </a:ext>
+              </a:extLst>
+            </p:cNvPr>
+            <p:cNvCxnSpPr>
+              <a:cxnSpLocks/>
+            </p:cNvCxnSpPr>
+            <p:nvPr/>
+          </p:nvCxnSpPr>
+          <p:spPr>
+            <a:xfrm>
+              <a:off x="1563171" y="2954655"/>
+              <a:ext cx="0" cy="64770"/>
+            </a:xfrm>
+            <a:prstGeom prst="line">
+              <a:avLst/>
+            </a:prstGeom>
+            <a:ln w="12700" cap="rnd">
+              <a:solidFill>
+                <a:schemeClr val="tx1"/>
+              </a:solidFill>
+              <a:round/>
+            </a:ln>
+          </p:spPr>
+          <p:style>
+            <a:lnRef idx="2">
+              <a:schemeClr val="accent1"/>
+            </a:lnRef>
+            <a:fillRef idx="0">
+              <a:schemeClr val="accent1"/>
+            </a:fillRef>
+            <a:effectRef idx="1">
+              <a:schemeClr val="accent1"/>
+            </a:effectRef>
+            <a:fontRef idx="minor">
+              <a:schemeClr val="tx1"/>
+            </a:fontRef>
+          </p:style>
+        </p:cxnSp>
+        <p:cxnSp>
+          <p:nvCxnSpPr>
+            <p:cNvPr id="29" name="Gerader Verbinder 28">
+              <a:extLst>
+                <a:ext uri="{FF2B5EF4-FFF2-40B4-BE49-F238E27FC236}">
+                  <a16:creationId xmlns:a16="http://schemas.microsoft.com/office/drawing/2014/main" id="{C2BDAF8E-C458-60CF-196E-F79BAB327871}"/>
+                </a:ext>
+              </a:extLst>
+            </p:cNvPr>
+            <p:cNvCxnSpPr>
+              <a:cxnSpLocks/>
+            </p:cNvCxnSpPr>
+            <p:nvPr/>
+          </p:nvCxnSpPr>
+          <p:spPr>
+            <a:xfrm>
+              <a:off x="2037281" y="2954655"/>
+              <a:ext cx="0" cy="64770"/>
+            </a:xfrm>
+            <a:prstGeom prst="line">
+              <a:avLst/>
+            </a:prstGeom>
+            <a:ln w="12700" cap="rnd">
+              <a:solidFill>
+                <a:schemeClr val="tx1"/>
+              </a:solidFill>
+              <a:round/>
+            </a:ln>
+          </p:spPr>
+          <p:style>
+            <a:lnRef idx="2">
+              <a:schemeClr val="accent1"/>
+            </a:lnRef>
+            <a:fillRef idx="0">
+              <a:schemeClr val="accent1"/>
+            </a:fillRef>
+            <a:effectRef idx="1">
+              <a:schemeClr val="accent1"/>
+            </a:effectRef>
+            <a:fontRef idx="minor">
+              <a:schemeClr val="tx1"/>
+            </a:fontRef>
+          </p:style>
+        </p:cxnSp>
+        <p:cxnSp>
+          <p:nvCxnSpPr>
+            <p:cNvPr id="30" name="Gerader Verbinder 29">
+              <a:extLst>
+                <a:ext uri="{FF2B5EF4-FFF2-40B4-BE49-F238E27FC236}">
+                  <a16:creationId xmlns:a16="http://schemas.microsoft.com/office/drawing/2014/main" id="{31BECC8C-19F3-ADD7-0090-8A06C1771488}"/>
+                </a:ext>
+              </a:extLst>
+            </p:cNvPr>
+            <p:cNvCxnSpPr>
+              <a:cxnSpLocks/>
+            </p:cNvCxnSpPr>
+            <p:nvPr/>
+          </p:nvCxnSpPr>
+          <p:spPr>
+            <a:xfrm>
+              <a:off x="2511392" y="2954655"/>
+              <a:ext cx="0" cy="64770"/>
+            </a:xfrm>
+            <a:prstGeom prst="line">
+              <a:avLst/>
+            </a:prstGeom>
+            <a:ln w="12700" cap="rnd">
+              <a:solidFill>
+                <a:schemeClr val="tx1"/>
+              </a:solidFill>
+              <a:round/>
+            </a:ln>
+          </p:spPr>
+          <p:style>
+            <a:lnRef idx="2">
+              <a:schemeClr val="accent1"/>
+            </a:lnRef>
+            <a:fillRef idx="0">
+              <a:schemeClr val="accent1"/>
+            </a:fillRef>
+            <a:effectRef idx="1">
+              <a:schemeClr val="accent1"/>
+            </a:effectRef>
+            <a:fontRef idx="minor">
+              <a:schemeClr val="tx1"/>
+            </a:fontRef>
+          </p:style>
+        </p:cxnSp>
+        <p:cxnSp>
+          <p:nvCxnSpPr>
+            <p:cNvPr id="31" name="Gerader Verbinder 30">
+              <a:extLst>
+                <a:ext uri="{FF2B5EF4-FFF2-40B4-BE49-F238E27FC236}">
+                  <a16:creationId xmlns:a16="http://schemas.microsoft.com/office/drawing/2014/main" id="{8795920F-D712-91A1-E19B-4C737C040707}"/>
+                </a:ext>
+              </a:extLst>
+            </p:cNvPr>
+            <p:cNvCxnSpPr>
+              <a:cxnSpLocks/>
+            </p:cNvCxnSpPr>
+            <p:nvPr/>
+          </p:nvCxnSpPr>
+          <p:spPr>
+            <a:xfrm>
+              <a:off x="2985500" y="2952750"/>
+              <a:ext cx="0" cy="64770"/>
+            </a:xfrm>
+            <a:prstGeom prst="line">
+              <a:avLst/>
+            </a:prstGeom>
+            <a:ln w="12700" cap="rnd">
+              <a:solidFill>
+                <a:schemeClr val="tx1"/>
+              </a:solidFill>
+              <a:round/>
+            </a:ln>
+          </p:spPr>
+          <p:style>
+            <a:lnRef idx="2">
+              <a:schemeClr val="accent1"/>
+            </a:lnRef>
+            <a:fillRef idx="0">
+              <a:schemeClr val="accent1"/>
+            </a:fillRef>
+            <a:effectRef idx="1">
+              <a:schemeClr val="accent1"/>
+            </a:effectRef>
+            <a:fontRef idx="minor">
+              <a:schemeClr val="tx1"/>
+            </a:fontRef>
+          </p:style>
+        </p:cxnSp>
+        <p:cxnSp>
+          <p:nvCxnSpPr>
+            <p:cNvPr id="32" name="Gerader Verbinder 31">
+              <a:extLst>
+                <a:ext uri="{FF2B5EF4-FFF2-40B4-BE49-F238E27FC236}">
+                  <a16:creationId xmlns:a16="http://schemas.microsoft.com/office/drawing/2014/main" id="{3F7F2635-DAE7-14BD-0C44-468903B172E6}"/>
+                </a:ext>
+              </a:extLst>
+            </p:cNvPr>
+            <p:cNvCxnSpPr>
+              <a:cxnSpLocks/>
+            </p:cNvCxnSpPr>
+            <p:nvPr/>
+          </p:nvCxnSpPr>
+          <p:spPr>
+            <a:xfrm>
+              <a:off x="548640" y="2377156"/>
+              <a:ext cx="64170" cy="0"/>
+            </a:xfrm>
+            <a:prstGeom prst="line">
+              <a:avLst/>
+            </a:prstGeom>
+            <a:ln w="12700" cap="rnd">
+              <a:solidFill>
+                <a:schemeClr val="tx1"/>
+              </a:solidFill>
+              <a:round/>
+            </a:ln>
+          </p:spPr>
+          <p:style>
+            <a:lnRef idx="2">
+              <a:schemeClr val="accent1"/>
+            </a:lnRef>
+            <a:fillRef idx="0">
+              <a:schemeClr val="accent1"/>
+            </a:fillRef>
+            <a:effectRef idx="1">
+              <a:schemeClr val="accent1"/>
+            </a:effectRef>
+            <a:fontRef idx="minor">
+              <a:schemeClr val="tx1"/>
+            </a:fontRef>
+          </p:style>
+        </p:cxnSp>
+        <p:cxnSp>
+          <p:nvCxnSpPr>
+            <p:cNvPr id="35" name="Gerader Verbinder 34">
+              <a:extLst>
+                <a:ext uri="{FF2B5EF4-FFF2-40B4-BE49-F238E27FC236}">
+                  <a16:creationId xmlns:a16="http://schemas.microsoft.com/office/drawing/2014/main" id="{F43B1B4D-9FAE-0BE3-53E3-37706D20F506}"/>
+                </a:ext>
+              </a:extLst>
+            </p:cNvPr>
+            <p:cNvCxnSpPr>
+              <a:cxnSpLocks/>
+            </p:cNvCxnSpPr>
+            <p:nvPr/>
+          </p:nvCxnSpPr>
+          <p:spPr>
+            <a:xfrm>
+              <a:off x="548640" y="1799940"/>
+              <a:ext cx="64170" cy="0"/>
+            </a:xfrm>
+            <a:prstGeom prst="line">
+              <a:avLst/>
+            </a:prstGeom>
+            <a:ln w="12700" cap="rnd">
+              <a:solidFill>
+                <a:schemeClr val="tx1"/>
+              </a:solidFill>
+              <a:round/>
+            </a:ln>
+          </p:spPr>
+          <p:style>
+            <a:lnRef idx="2">
+              <a:schemeClr val="accent1"/>
+            </a:lnRef>
+            <a:fillRef idx="0">
+              <a:schemeClr val="accent1"/>
+            </a:fillRef>
+            <a:effectRef idx="1">
+              <a:schemeClr val="accent1"/>
+            </a:effectRef>
+            <a:fontRef idx="minor">
+              <a:schemeClr val="tx1"/>
+            </a:fontRef>
+          </p:style>
+        </p:cxnSp>
+        <p:cxnSp>
+          <p:nvCxnSpPr>
+            <p:cNvPr id="36" name="Gerader Verbinder 35">
+              <a:extLst>
+                <a:ext uri="{FF2B5EF4-FFF2-40B4-BE49-F238E27FC236}">
+                  <a16:creationId xmlns:a16="http://schemas.microsoft.com/office/drawing/2014/main" id="{D7464445-CD6B-584C-D198-E71A024869C0}"/>
+                </a:ext>
+              </a:extLst>
+            </p:cNvPr>
+            <p:cNvCxnSpPr>
+              <a:cxnSpLocks/>
+            </p:cNvCxnSpPr>
+            <p:nvPr/>
+          </p:nvCxnSpPr>
+          <p:spPr>
+            <a:xfrm>
+              <a:off x="548640" y="1226164"/>
+              <a:ext cx="64170" cy="0"/>
+            </a:xfrm>
+            <a:prstGeom prst="line">
+              <a:avLst/>
+            </a:prstGeom>
+            <a:ln w="12700" cap="rnd">
+              <a:solidFill>
+                <a:schemeClr val="tx1"/>
+              </a:solidFill>
+              <a:round/>
+            </a:ln>
+          </p:spPr>
+          <p:style>
+            <a:lnRef idx="2">
+              <a:schemeClr val="accent1"/>
+            </a:lnRef>
+            <a:fillRef idx="0">
+              <a:schemeClr val="accent1"/>
+            </a:fillRef>
+            <a:effectRef idx="1">
+              <a:schemeClr val="accent1"/>
+            </a:effectRef>
+            <a:fontRef idx="minor">
+              <a:schemeClr val="tx1"/>
+            </a:fontRef>
+          </p:style>
+        </p:cxnSp>
+        <p:cxnSp>
+          <p:nvCxnSpPr>
+            <p:cNvPr id="37" name="Gerader Verbinder 36">
+              <a:extLst>
+                <a:ext uri="{FF2B5EF4-FFF2-40B4-BE49-F238E27FC236}">
+                  <a16:creationId xmlns:a16="http://schemas.microsoft.com/office/drawing/2014/main" id="{C981F174-DEEF-9363-3996-7552953D15EA}"/>
+                </a:ext>
+              </a:extLst>
+            </p:cNvPr>
+            <p:cNvCxnSpPr>
+              <a:cxnSpLocks/>
+            </p:cNvCxnSpPr>
+            <p:nvPr/>
+          </p:nvCxnSpPr>
+          <p:spPr>
+            <a:xfrm>
+              <a:off x="550545" y="650668"/>
+              <a:ext cx="64170" cy="0"/>
+            </a:xfrm>
+            <a:prstGeom prst="line">
+              <a:avLst/>
+            </a:prstGeom>
+            <a:ln w="12700" cap="rnd">
+              <a:solidFill>
+                <a:schemeClr val="tx1"/>
+              </a:solidFill>
+              <a:round/>
+            </a:ln>
+          </p:spPr>
+          <p:style>
+            <a:lnRef idx="2">
+              <a:schemeClr val="accent1"/>
+            </a:lnRef>
+            <a:fillRef idx="0">
+              <a:schemeClr val="accent1"/>
+            </a:fillRef>
+            <a:effectRef idx="1">
+              <a:schemeClr val="accent1"/>
+            </a:effectRef>
+            <a:fontRef idx="minor">
+              <a:schemeClr val="tx1"/>
+            </a:fontRef>
+          </p:style>
+        </p:cxnSp>
+        <p:sp>
+          <p:nvSpPr>
+            <p:cNvPr id="38" name="Textfeld 37">
+              <a:extLst>
+                <a:ext uri="{FF2B5EF4-FFF2-40B4-BE49-F238E27FC236}">
+                  <a16:creationId xmlns:a16="http://schemas.microsoft.com/office/drawing/2014/main" id="{B721A7DB-1C56-58B6-F7C5-A1ABBC24CCA2}"/>
+                </a:ext>
+              </a:extLst>
+            </p:cNvPr>
+            <p:cNvSpPr txBox="1"/>
+            <p:nvPr/>
+          </p:nvSpPr>
+          <p:spPr>
+            <a:xfrm>
+              <a:off x="181106" y="541227"/>
+              <a:ext cx="412147" cy="215444"/>
+            </a:xfrm>
+            <a:prstGeom prst="rect">
+              <a:avLst/>
+            </a:prstGeom>
+            <a:noFill/>
+          </p:spPr>
+          <p:txBody>
+            <a:bodyPr wrap="square" rtlCol="0" anchor="ctr">
+              <a:spAutoFit/>
+            </a:bodyPr>
+            <a:lstStyle/>
+            <a:p>
+              <a:pPr algn="ctr"/>
+              <a:r>
+                <a:rPr lang="de-DE" sz="800" dirty="0">
+                  <a:latin typeface="CMU Serif" panose="02000603000000000000" pitchFamily="2" charset="0"/>
+                  <a:ea typeface="CMU Serif" panose="02000603000000000000" pitchFamily="2" charset="0"/>
+                  <a:cs typeface="CMU Serif" panose="02000603000000000000" pitchFamily="2" charset="0"/>
+                </a:rPr>
+                <a:t>0,16</a:t>
+              </a:r>
+              <a:endParaRPr lang="de-DE" sz="800" baseline="-25000" dirty="0">
+                <a:latin typeface="CMU Serif" panose="02000603000000000000" pitchFamily="2" charset="0"/>
+                <a:ea typeface="CMU Serif" panose="02000603000000000000" pitchFamily="2" charset="0"/>
+                <a:cs typeface="CMU Serif" panose="02000603000000000000" pitchFamily="2" charset="0"/>
+              </a:endParaRPr>
+            </a:p>
+          </p:txBody>
+        </p:sp>
+        <p:sp>
+          <p:nvSpPr>
+            <p:cNvPr id="39" name="Textfeld 38">
+              <a:extLst>
+                <a:ext uri="{FF2B5EF4-FFF2-40B4-BE49-F238E27FC236}">
+                  <a16:creationId xmlns:a16="http://schemas.microsoft.com/office/drawing/2014/main" id="{DEB91C06-67E0-30F7-D4E6-3B838A656804}"/>
+                </a:ext>
+              </a:extLst>
+            </p:cNvPr>
+            <p:cNvSpPr txBox="1"/>
+            <p:nvPr/>
+          </p:nvSpPr>
+          <p:spPr>
+            <a:xfrm>
+              <a:off x="181106" y="1115863"/>
+              <a:ext cx="412147" cy="215444"/>
+            </a:xfrm>
+            <a:prstGeom prst="rect">
+              <a:avLst/>
+            </a:prstGeom>
+            <a:noFill/>
+          </p:spPr>
+          <p:txBody>
+            <a:bodyPr wrap="square" rtlCol="0" anchor="ctr">
+              <a:spAutoFit/>
+            </a:bodyPr>
+            <a:lstStyle/>
+            <a:p>
+              <a:pPr algn="ctr"/>
+              <a:r>
+                <a:rPr lang="de-DE" sz="800" dirty="0">
+                  <a:latin typeface="CMU Serif" panose="02000603000000000000" pitchFamily="2" charset="0"/>
+                  <a:ea typeface="CMU Serif" panose="02000603000000000000" pitchFamily="2" charset="0"/>
+                  <a:cs typeface="CMU Serif" panose="02000603000000000000" pitchFamily="2" charset="0"/>
+                </a:rPr>
+                <a:t>0,12</a:t>
+              </a:r>
+            </a:p>
+          </p:txBody>
+        </p:sp>
+        <p:sp>
+          <p:nvSpPr>
+            <p:cNvPr id="40" name="Textfeld 39">
+              <a:extLst>
+                <a:ext uri="{FF2B5EF4-FFF2-40B4-BE49-F238E27FC236}">
+                  <a16:creationId xmlns:a16="http://schemas.microsoft.com/office/drawing/2014/main" id="{0D460FE6-49BA-A131-B01D-0336D5937EB1}"/>
+                </a:ext>
+              </a:extLst>
+            </p:cNvPr>
+            <p:cNvSpPr txBox="1"/>
+            <p:nvPr/>
+          </p:nvSpPr>
+          <p:spPr>
+            <a:xfrm>
+              <a:off x="181105" y="1690499"/>
+              <a:ext cx="412147" cy="215444"/>
+            </a:xfrm>
+            <a:prstGeom prst="rect">
+              <a:avLst/>
+            </a:prstGeom>
+            <a:noFill/>
+          </p:spPr>
+          <p:txBody>
+            <a:bodyPr wrap="square" rtlCol="0" anchor="ctr">
+              <a:spAutoFit/>
+            </a:bodyPr>
+            <a:lstStyle/>
+            <a:p>
+              <a:pPr algn="ctr"/>
+              <a:r>
+                <a:rPr lang="de-DE" sz="800" dirty="0">
+                  <a:latin typeface="CMU Serif" panose="02000603000000000000" pitchFamily="2" charset="0"/>
+                  <a:ea typeface="CMU Serif" panose="02000603000000000000" pitchFamily="2" charset="0"/>
+                  <a:cs typeface="CMU Serif" panose="02000603000000000000" pitchFamily="2" charset="0"/>
+                </a:rPr>
+                <a:t>0,08</a:t>
+              </a:r>
+              <a:endParaRPr lang="de-DE" sz="800" baseline="-25000" dirty="0">
+                <a:latin typeface="CMU Serif" panose="02000603000000000000" pitchFamily="2" charset="0"/>
+                <a:ea typeface="CMU Serif" panose="02000603000000000000" pitchFamily="2" charset="0"/>
+                <a:cs typeface="CMU Serif" panose="02000603000000000000" pitchFamily="2" charset="0"/>
+              </a:endParaRPr>
+            </a:p>
+          </p:txBody>
+        </p:sp>
+        <p:sp>
+          <p:nvSpPr>
+            <p:cNvPr id="41" name="Textfeld 40">
+              <a:extLst>
+                <a:ext uri="{FF2B5EF4-FFF2-40B4-BE49-F238E27FC236}">
+                  <a16:creationId xmlns:a16="http://schemas.microsoft.com/office/drawing/2014/main" id="{D9E7EF81-AB4C-2EFE-FBB9-48CBFE359100}"/>
+                </a:ext>
+              </a:extLst>
+            </p:cNvPr>
+            <p:cNvSpPr txBox="1"/>
+            <p:nvPr/>
+          </p:nvSpPr>
+          <p:spPr>
+            <a:xfrm>
+              <a:off x="181105" y="2265994"/>
+              <a:ext cx="412147" cy="215444"/>
+            </a:xfrm>
+            <a:prstGeom prst="rect">
+              <a:avLst/>
+            </a:prstGeom>
+            <a:noFill/>
+          </p:spPr>
+          <p:txBody>
+            <a:bodyPr wrap="square" rtlCol="0" anchor="ctr">
+              <a:spAutoFit/>
+            </a:bodyPr>
+            <a:lstStyle/>
+            <a:p>
+              <a:pPr algn="ctr"/>
+              <a:r>
+                <a:rPr lang="de-DE" sz="800" dirty="0">
+                  <a:latin typeface="CMU Serif" panose="02000603000000000000" pitchFamily="2" charset="0"/>
+                  <a:ea typeface="CMU Serif" panose="02000603000000000000" pitchFamily="2" charset="0"/>
+                  <a:cs typeface="CMU Serif" panose="02000603000000000000" pitchFamily="2" charset="0"/>
+                </a:rPr>
+                <a:t>0,04</a:t>
+              </a:r>
+              <a:endParaRPr lang="de-DE" sz="800" baseline="-25000" dirty="0">
+                <a:latin typeface="CMU Serif" panose="02000603000000000000" pitchFamily="2" charset="0"/>
+                <a:ea typeface="CMU Serif" panose="02000603000000000000" pitchFamily="2" charset="0"/>
+                <a:cs typeface="CMU Serif" panose="02000603000000000000" pitchFamily="2" charset="0"/>
+              </a:endParaRPr>
+            </a:p>
+          </p:txBody>
+        </p:sp>
+        <p:sp>
+          <p:nvSpPr>
+            <p:cNvPr id="42" name="Textfeld 41">
+              <a:extLst>
+                <a:ext uri="{FF2B5EF4-FFF2-40B4-BE49-F238E27FC236}">
+                  <a16:creationId xmlns:a16="http://schemas.microsoft.com/office/drawing/2014/main" id="{8A06907F-8457-E947-E3B0-3B11B00B7271}"/>
+                </a:ext>
+              </a:extLst>
+            </p:cNvPr>
+            <p:cNvSpPr txBox="1"/>
+            <p:nvPr/>
+          </p:nvSpPr>
+          <p:spPr>
+            <a:xfrm>
+              <a:off x="213190" y="2848371"/>
+              <a:ext cx="412147" cy="215444"/>
+            </a:xfrm>
+            <a:prstGeom prst="rect">
+              <a:avLst/>
+            </a:prstGeom>
+            <a:noFill/>
+          </p:spPr>
+          <p:txBody>
+            <a:bodyPr wrap="square" rtlCol="0" anchor="ctr">
+              <a:spAutoFit/>
+            </a:bodyPr>
+            <a:lstStyle/>
+            <a:p>
+              <a:pPr algn="ctr"/>
+              <a:r>
+                <a:rPr lang="de-DE" sz="800" dirty="0">
+                  <a:latin typeface="CMU Serif" panose="02000603000000000000" pitchFamily="2" charset="0"/>
+                  <a:ea typeface="CMU Serif" panose="02000603000000000000" pitchFamily="2" charset="0"/>
+                  <a:cs typeface="CMU Serif" panose="02000603000000000000" pitchFamily="2" charset="0"/>
+                </a:rPr>
+                <a:t>0</a:t>
+              </a:r>
+              <a:endParaRPr lang="de-DE" sz="800" baseline="-25000" dirty="0">
+                <a:latin typeface="CMU Serif" panose="02000603000000000000" pitchFamily="2" charset="0"/>
+                <a:ea typeface="CMU Serif" panose="02000603000000000000" pitchFamily="2" charset="0"/>
+                <a:cs typeface="CMU Serif" panose="02000603000000000000" pitchFamily="2" charset="0"/>
+              </a:endParaRPr>
+            </a:p>
+          </p:txBody>
+        </p:sp>
+        <p:sp>
+          <p:nvSpPr>
+            <p:cNvPr id="43" name="Textfeld 42">
+              <a:extLst>
+                <a:ext uri="{FF2B5EF4-FFF2-40B4-BE49-F238E27FC236}">
+                  <a16:creationId xmlns:a16="http://schemas.microsoft.com/office/drawing/2014/main" id="{16130A72-B53A-0FFC-FF21-41B57CDA68B8}"/>
+                </a:ext>
+              </a:extLst>
+            </p:cNvPr>
+            <p:cNvSpPr txBox="1"/>
+            <p:nvPr/>
+          </p:nvSpPr>
+          <p:spPr>
+            <a:xfrm>
+              <a:off x="434356" y="3030411"/>
+              <a:ext cx="356907" cy="215444"/>
+            </a:xfrm>
+            <a:prstGeom prst="rect">
+              <a:avLst/>
+            </a:prstGeom>
+            <a:noFill/>
+          </p:spPr>
+          <p:txBody>
+            <a:bodyPr wrap="square" rtlCol="0" anchor="ctr">
+              <a:spAutoFit/>
+            </a:bodyPr>
+            <a:lstStyle/>
+            <a:p>
+              <a:pPr algn="ctr"/>
+              <a:r>
+                <a:rPr lang="de-DE" sz="800" dirty="0">
+                  <a:latin typeface="CMU Serif" panose="02000603000000000000" pitchFamily="2" charset="0"/>
+                  <a:ea typeface="CMU Serif" panose="02000603000000000000" pitchFamily="2" charset="0"/>
+                  <a:cs typeface="CMU Serif" panose="02000603000000000000" pitchFamily="2" charset="0"/>
+                </a:rPr>
+                <a:t>0</a:t>
+              </a:r>
+              <a:endParaRPr lang="de-DE" sz="800" baseline="-25000" dirty="0">
+                <a:latin typeface="CMU Serif" panose="02000603000000000000" pitchFamily="2" charset="0"/>
+                <a:ea typeface="CMU Serif" panose="02000603000000000000" pitchFamily="2" charset="0"/>
+                <a:cs typeface="CMU Serif" panose="02000603000000000000" pitchFamily="2" charset="0"/>
+              </a:endParaRPr>
+            </a:p>
+          </p:txBody>
+        </p:sp>
+        <p:sp>
+          <p:nvSpPr>
+            <p:cNvPr id="44" name="Textfeld 43">
+              <a:extLst>
+                <a:ext uri="{FF2B5EF4-FFF2-40B4-BE49-F238E27FC236}">
+                  <a16:creationId xmlns:a16="http://schemas.microsoft.com/office/drawing/2014/main" id="{1EE4F030-7E5E-6278-3244-D2813CC18B29}"/>
+                </a:ext>
+              </a:extLst>
+            </p:cNvPr>
+            <p:cNvSpPr txBox="1"/>
+            <p:nvPr/>
+          </p:nvSpPr>
+          <p:spPr>
+            <a:xfrm>
+              <a:off x="908462" y="3025596"/>
+              <a:ext cx="356907" cy="215444"/>
+            </a:xfrm>
+            <a:prstGeom prst="rect">
+              <a:avLst/>
+            </a:prstGeom>
+            <a:noFill/>
+          </p:spPr>
+          <p:txBody>
+            <a:bodyPr wrap="square" rtlCol="0" anchor="ctr">
+              <a:spAutoFit/>
+            </a:bodyPr>
+            <a:lstStyle/>
+            <a:p>
+              <a:pPr algn="ctr"/>
+              <a:r>
+                <a:rPr lang="de-DE" sz="800" dirty="0">
+                  <a:latin typeface="CMU Serif" panose="02000603000000000000" pitchFamily="2" charset="0"/>
+                  <a:ea typeface="CMU Serif" panose="02000603000000000000" pitchFamily="2" charset="0"/>
+                  <a:cs typeface="CMU Serif" panose="02000603000000000000" pitchFamily="2" charset="0"/>
+                </a:rPr>
+                <a:t>0,2</a:t>
+              </a:r>
+              <a:endParaRPr lang="de-DE" sz="800" baseline="-25000" dirty="0">
+                <a:latin typeface="CMU Serif" panose="02000603000000000000" pitchFamily="2" charset="0"/>
+                <a:ea typeface="CMU Serif" panose="02000603000000000000" pitchFamily="2" charset="0"/>
+                <a:cs typeface="CMU Serif" panose="02000603000000000000" pitchFamily="2" charset="0"/>
+              </a:endParaRPr>
+            </a:p>
+          </p:txBody>
+        </p:sp>
+        <p:sp>
+          <p:nvSpPr>
+            <p:cNvPr id="45" name="Textfeld 44">
+              <a:extLst>
+                <a:ext uri="{FF2B5EF4-FFF2-40B4-BE49-F238E27FC236}">
+                  <a16:creationId xmlns:a16="http://schemas.microsoft.com/office/drawing/2014/main" id="{589CF959-E7E1-7C61-46C4-2E98A5EF95B5}"/>
+                </a:ext>
+              </a:extLst>
+            </p:cNvPr>
+            <p:cNvSpPr txBox="1"/>
+            <p:nvPr/>
+          </p:nvSpPr>
+          <p:spPr>
+            <a:xfrm>
+              <a:off x="1382568" y="3025595"/>
+              <a:ext cx="356907" cy="215444"/>
+            </a:xfrm>
+            <a:prstGeom prst="rect">
+              <a:avLst/>
+            </a:prstGeom>
+            <a:noFill/>
+          </p:spPr>
+          <p:txBody>
+            <a:bodyPr wrap="square" rtlCol="0" anchor="ctr">
+              <a:spAutoFit/>
+            </a:bodyPr>
+            <a:lstStyle/>
+            <a:p>
+              <a:pPr algn="ctr"/>
+              <a:r>
+                <a:rPr lang="de-DE" sz="800" dirty="0">
+                  <a:latin typeface="CMU Serif" panose="02000603000000000000" pitchFamily="2" charset="0"/>
+                  <a:ea typeface="CMU Serif" panose="02000603000000000000" pitchFamily="2" charset="0"/>
+                  <a:cs typeface="CMU Serif" panose="02000603000000000000" pitchFamily="2" charset="0"/>
+                </a:rPr>
+                <a:t>0,4</a:t>
+              </a:r>
+              <a:endParaRPr lang="de-DE" sz="800" baseline="-25000" dirty="0">
+                <a:latin typeface="CMU Serif" panose="02000603000000000000" pitchFamily="2" charset="0"/>
+                <a:ea typeface="CMU Serif" panose="02000603000000000000" pitchFamily="2" charset="0"/>
+                <a:cs typeface="CMU Serif" panose="02000603000000000000" pitchFamily="2" charset="0"/>
+              </a:endParaRPr>
+            </a:p>
+          </p:txBody>
+        </p:sp>
+        <p:sp>
+          <p:nvSpPr>
+            <p:cNvPr id="46" name="Textfeld 45">
+              <a:extLst>
+                <a:ext uri="{FF2B5EF4-FFF2-40B4-BE49-F238E27FC236}">
+                  <a16:creationId xmlns:a16="http://schemas.microsoft.com/office/drawing/2014/main" id="{DBE7F180-3B61-07D6-3C90-E46A0E995FF5}"/>
+                </a:ext>
+              </a:extLst>
+            </p:cNvPr>
+            <p:cNvSpPr txBox="1"/>
+            <p:nvPr/>
+          </p:nvSpPr>
+          <p:spPr>
+            <a:xfrm>
+              <a:off x="1856674" y="3025594"/>
+              <a:ext cx="356907" cy="215444"/>
+            </a:xfrm>
+            <a:prstGeom prst="rect">
+              <a:avLst/>
+            </a:prstGeom>
+            <a:noFill/>
+          </p:spPr>
+          <p:txBody>
+            <a:bodyPr wrap="square" rtlCol="0" anchor="ctr">
+              <a:spAutoFit/>
+            </a:bodyPr>
+            <a:lstStyle/>
+            <a:p>
+              <a:pPr algn="ctr"/>
+              <a:r>
+                <a:rPr lang="de-DE" sz="800" dirty="0">
+                  <a:latin typeface="CMU Serif" panose="02000603000000000000" pitchFamily="2" charset="0"/>
+                  <a:ea typeface="CMU Serif" panose="02000603000000000000" pitchFamily="2" charset="0"/>
+                  <a:cs typeface="CMU Serif" panose="02000603000000000000" pitchFamily="2" charset="0"/>
+                </a:rPr>
+                <a:t>0,6</a:t>
+              </a:r>
+              <a:endParaRPr lang="de-DE" sz="800" baseline="-25000" dirty="0">
+                <a:latin typeface="CMU Serif" panose="02000603000000000000" pitchFamily="2" charset="0"/>
+                <a:ea typeface="CMU Serif" panose="02000603000000000000" pitchFamily="2" charset="0"/>
+                <a:cs typeface="CMU Serif" panose="02000603000000000000" pitchFamily="2" charset="0"/>
+              </a:endParaRPr>
+            </a:p>
+          </p:txBody>
+        </p:sp>
+        <p:sp>
+          <p:nvSpPr>
+            <p:cNvPr id="47" name="Textfeld 46">
+              <a:extLst>
+                <a:ext uri="{FF2B5EF4-FFF2-40B4-BE49-F238E27FC236}">
+                  <a16:creationId xmlns:a16="http://schemas.microsoft.com/office/drawing/2014/main" id="{A6107613-11D1-5E4B-4933-0A5FD50C5D8E}"/>
+                </a:ext>
+              </a:extLst>
+            </p:cNvPr>
+            <p:cNvSpPr txBox="1"/>
+            <p:nvPr/>
+          </p:nvSpPr>
+          <p:spPr>
+            <a:xfrm>
+              <a:off x="2330780" y="3025593"/>
+              <a:ext cx="356907" cy="215444"/>
+            </a:xfrm>
+            <a:prstGeom prst="rect">
+              <a:avLst/>
+            </a:prstGeom>
+            <a:noFill/>
+          </p:spPr>
+          <p:txBody>
+            <a:bodyPr wrap="square" rtlCol="0" anchor="ctr">
+              <a:spAutoFit/>
+            </a:bodyPr>
+            <a:lstStyle/>
+            <a:p>
+              <a:pPr algn="ctr"/>
+              <a:r>
+                <a:rPr lang="de-DE" sz="800" dirty="0">
+                  <a:latin typeface="CMU Serif" panose="02000603000000000000" pitchFamily="2" charset="0"/>
+                  <a:ea typeface="CMU Serif" panose="02000603000000000000" pitchFamily="2" charset="0"/>
+                  <a:cs typeface="CMU Serif" panose="02000603000000000000" pitchFamily="2" charset="0"/>
+                </a:rPr>
+                <a:t>0,8</a:t>
+              </a:r>
+              <a:endParaRPr lang="de-DE" sz="800" baseline="-25000" dirty="0">
+                <a:latin typeface="CMU Serif" panose="02000603000000000000" pitchFamily="2" charset="0"/>
+                <a:ea typeface="CMU Serif" panose="02000603000000000000" pitchFamily="2" charset="0"/>
+                <a:cs typeface="CMU Serif" panose="02000603000000000000" pitchFamily="2" charset="0"/>
+              </a:endParaRPr>
+            </a:p>
+          </p:txBody>
+        </p:sp>
+        <p:sp>
+          <p:nvSpPr>
+            <p:cNvPr id="48" name="Textfeld 47">
+              <a:extLst>
+                <a:ext uri="{FF2B5EF4-FFF2-40B4-BE49-F238E27FC236}">
+                  <a16:creationId xmlns:a16="http://schemas.microsoft.com/office/drawing/2014/main" id="{CA4066A9-6BC8-B0F8-3E47-BA7B47274121}"/>
+                </a:ext>
+              </a:extLst>
+            </p:cNvPr>
+            <p:cNvSpPr txBox="1"/>
+            <p:nvPr/>
+          </p:nvSpPr>
+          <p:spPr>
+            <a:xfrm>
+              <a:off x="2804886" y="3023580"/>
+              <a:ext cx="356907" cy="215444"/>
+            </a:xfrm>
+            <a:prstGeom prst="rect">
+              <a:avLst/>
+            </a:prstGeom>
+            <a:noFill/>
+          </p:spPr>
+          <p:txBody>
+            <a:bodyPr wrap="square" rtlCol="0" anchor="ctr">
+              <a:spAutoFit/>
+            </a:bodyPr>
+            <a:lstStyle/>
+            <a:p>
+              <a:pPr algn="ctr"/>
+              <a:r>
+                <a:rPr lang="de-DE" sz="800" dirty="0">
+                  <a:latin typeface="CMU Serif" panose="02000603000000000000" pitchFamily="2" charset="0"/>
+                  <a:ea typeface="CMU Serif" panose="02000603000000000000" pitchFamily="2" charset="0"/>
+                  <a:cs typeface="CMU Serif" panose="02000603000000000000" pitchFamily="2" charset="0"/>
+                </a:rPr>
+                <a:t>1,0</a:t>
+              </a:r>
+              <a:endParaRPr lang="de-DE" sz="800" baseline="-25000" dirty="0">
+                <a:latin typeface="CMU Serif" panose="02000603000000000000" pitchFamily="2" charset="0"/>
+                <a:ea typeface="CMU Serif" panose="02000603000000000000" pitchFamily="2" charset="0"/>
+                <a:cs typeface="CMU Serif" panose="02000603000000000000" pitchFamily="2" charset="0"/>
+              </a:endParaRPr>
+            </a:p>
+          </p:txBody>
+        </p:sp>
+      </p:grpSp>
+      <p:sp>
+        <p:nvSpPr>
+          <p:cNvPr id="62" name="Rechteck 61">
+            <a:extLst>
+              <a:ext uri="{FF2B5EF4-FFF2-40B4-BE49-F238E27FC236}">
+                <a16:creationId xmlns:a16="http://schemas.microsoft.com/office/drawing/2014/main" id="{4C9A8623-824D-5A61-F8E1-0F7607F3BC5F}"/>
+              </a:ext>
+            </a:extLst>
+          </p:cNvPr>
+          <p:cNvSpPr/>
+          <p:nvPr/>
+        </p:nvSpPr>
+        <p:spPr>
+          <a:xfrm>
+            <a:off x="2461030" y="1545193"/>
+            <a:ext cx="254874" cy="137108"/>
+          </a:xfrm>
+          <a:prstGeom prst="rect">
+            <a:avLst/>
+          </a:prstGeom>
+          <a:solidFill>
+            <a:schemeClr val="bg1"/>
+          </a:solidFill>
+          <a:ln>
+            <a:noFill/>
+          </a:ln>
+        </p:spPr>
+        <p:style>
+          <a:lnRef idx="2">
+            <a:schemeClr val="accent1">
+              <a:shade val="15000"/>
+            </a:schemeClr>
+          </a:lnRef>
+          <a:fillRef idx="1">
+            <a:schemeClr val="accent1"/>
+          </a:fillRef>
+          <a:effectRef idx="0">
+            <a:schemeClr val="accent1"/>
+          </a:effectRef>
+          <a:fontRef idx="minor">
+            <a:schemeClr val="lt1"/>
+          </a:fontRef>
+        </p:style>
+        <p:txBody>
+          <a:bodyPr rtlCol="0" anchor="ctr"/>
+          <a:lstStyle/>
+          <a:p>
+            <a:pPr algn="ctr"/>
+            <a:endParaRPr lang="de-DE"/>
+          </a:p>
+        </p:txBody>
+      </p:sp>
+      <p:sp>
+        <p:nvSpPr>
+          <p:cNvPr id="52" name="Textfeld 51">
+            <a:extLst>
+              <a:ext uri="{FF2B5EF4-FFF2-40B4-BE49-F238E27FC236}">
+                <a16:creationId xmlns:a16="http://schemas.microsoft.com/office/drawing/2014/main" id="{546A3AD7-2388-FF4D-094F-AB47E15F56F8}"/>
+              </a:ext>
+            </a:extLst>
+          </p:cNvPr>
+          <p:cNvSpPr txBox="1"/>
+          <p:nvPr/>
+        </p:nvSpPr>
+        <p:spPr>
+          <a:xfrm>
+            <a:off x="1711156" y="3126962"/>
+            <a:ext cx="356907" cy="215444"/>
+          </a:xfrm>
+          <a:prstGeom prst="rect">
+            <a:avLst/>
+          </a:prstGeom>
+          <a:noFill/>
+        </p:spPr>
+        <p:txBody>
+          <a:bodyPr wrap="square" rtlCol="0" anchor="ctr">
+            <a:spAutoFit/>
+          </a:bodyPr>
+          <a:lstStyle/>
+          <a:p>
+            <a:pPr algn="ctr"/>
+            <a:r>
+              <a:rPr lang="de-DE" sz="800" i="1" dirty="0">
+                <a:latin typeface="Latin Modern Math" panose="02000503000000000000" pitchFamily="50" charset="0"/>
+                <a:ea typeface="Latin Modern Math" panose="02000503000000000000" pitchFamily="50" charset="0"/>
+                <a:cs typeface="CMU Serif" panose="02000603000000000000" pitchFamily="2" charset="0"/>
+              </a:rPr>
+              <a:t>λ</a:t>
+            </a:r>
+            <a:endParaRPr lang="de-DE" sz="800" i="1" baseline="-25000" dirty="0">
+              <a:latin typeface="Latin Modern Math" panose="02000503000000000000" pitchFamily="50" charset="0"/>
+              <a:ea typeface="Latin Modern Math" panose="02000503000000000000" pitchFamily="50" charset="0"/>
+              <a:cs typeface="CMU Serif" panose="02000603000000000000" pitchFamily="2" charset="0"/>
+            </a:endParaRPr>
+          </a:p>
+        </p:txBody>
+      </p:sp>
+      <p:sp>
+        <p:nvSpPr>
+          <p:cNvPr id="53" name="Textfeld 52">
+            <a:extLst>
+              <a:ext uri="{FF2B5EF4-FFF2-40B4-BE49-F238E27FC236}">
+                <a16:creationId xmlns:a16="http://schemas.microsoft.com/office/drawing/2014/main" id="{7F4CB9EF-4F44-BC04-E829-6A9E01CEEE50}"/>
+              </a:ext>
+            </a:extLst>
+          </p:cNvPr>
+          <p:cNvSpPr txBox="1"/>
+          <p:nvPr/>
+        </p:nvSpPr>
+        <p:spPr>
+          <a:xfrm>
+            <a:off x="318711" y="768863"/>
+            <a:ext cx="356907" cy="215444"/>
+          </a:xfrm>
+          <a:prstGeom prst="rect">
+            <a:avLst/>
+          </a:prstGeom>
+          <a:noFill/>
+        </p:spPr>
+        <p:txBody>
+          <a:bodyPr wrap="square" rtlCol="0" anchor="ctr">
+            <a:spAutoFit/>
+          </a:bodyPr>
+          <a:lstStyle/>
+          <a:p>
+            <a:pPr algn="ctr"/>
+            <a:r>
+              <a:rPr lang="de-DE" sz="800" i="1" dirty="0">
+                <a:latin typeface="Latin Modern Math" panose="02000503000000000000" pitchFamily="50" charset="0"/>
+                <a:ea typeface="Latin Modern Math" panose="02000503000000000000" pitchFamily="50" charset="0"/>
+                <a:cs typeface="CMU Serif" panose="02000603000000000000" pitchFamily="2" charset="0"/>
+              </a:rPr>
+              <a:t>δ</a:t>
+            </a:r>
+            <a:endParaRPr lang="de-DE" sz="800" i="1" baseline="-25000" dirty="0">
+              <a:latin typeface="Latin Modern Math" panose="02000503000000000000" pitchFamily="50" charset="0"/>
+              <a:ea typeface="Latin Modern Math" panose="02000503000000000000" pitchFamily="50" charset="0"/>
+              <a:cs typeface="CMU Serif" panose="02000603000000000000" pitchFamily="2" charset="0"/>
+            </a:endParaRPr>
+          </a:p>
+        </p:txBody>
+      </p:sp>
+      <p:sp>
+        <p:nvSpPr>
+          <p:cNvPr id="54" name="Freihandform: Form 53">
+            <a:extLst>
+              <a:ext uri="{FF2B5EF4-FFF2-40B4-BE49-F238E27FC236}">
+                <a16:creationId xmlns:a16="http://schemas.microsoft.com/office/drawing/2014/main" id="{B94B4EC5-74EE-1552-5E90-561BED20E40C}"/>
+              </a:ext>
+            </a:extLst>
+          </p:cNvPr>
+          <p:cNvSpPr/>
+          <p:nvPr/>
+        </p:nvSpPr>
+        <p:spPr>
+          <a:xfrm>
+            <a:off x="710565" y="692064"/>
+            <a:ext cx="2366010" cy="2106640"/>
+          </a:xfrm>
+          <a:custGeom>
+            <a:avLst/>
+            <a:gdLst>
+              <a:gd name="csX0" fmla="*/ 0 w 2383076"/>
+              <a:gd name="csY0" fmla="*/ 0 h 2082558"/>
+              <a:gd name="csX1" fmla="*/ 303756 w 2383076"/>
+              <a:gd name="csY1" fmla="*/ 1734855 h 2082558"/>
+              <a:gd name="csX2" fmla="*/ 591854 w 2383076"/>
+              <a:gd name="csY2" fmla="*/ 2076189 h 2082558"/>
+              <a:gd name="csX3" fmla="*/ 1180578 w 2383076"/>
+              <a:gd name="csY3" fmla="*/ 1910219 h 2082558"/>
+              <a:gd name="csX4" fmla="*/ 1781827 w 2383076"/>
+              <a:gd name="csY4" fmla="*/ 1349679 h 2082558"/>
+              <a:gd name="csX5" fmla="*/ 2383076 w 2383076"/>
+              <a:gd name="csY5" fmla="*/ 670142 h 2082558"/>
+              <a:gd name="csX0" fmla="*/ 0 w 2383076"/>
+              <a:gd name="csY0" fmla="*/ 0 h 2082558"/>
+              <a:gd name="csX1" fmla="*/ 303756 w 2383076"/>
+              <a:gd name="csY1" fmla="*/ 1734855 h 2082558"/>
+              <a:gd name="csX2" fmla="*/ 591854 w 2383076"/>
+              <a:gd name="csY2" fmla="*/ 2076189 h 2082558"/>
+              <a:gd name="csX3" fmla="*/ 1180578 w 2383076"/>
+              <a:gd name="csY3" fmla="*/ 1910219 h 2082558"/>
+              <a:gd name="csX4" fmla="*/ 1781827 w 2383076"/>
+              <a:gd name="csY4" fmla="*/ 1349679 h 2082558"/>
+              <a:gd name="csX5" fmla="*/ 2383076 w 2383076"/>
+              <a:gd name="csY5" fmla="*/ 670142 h 2082558"/>
+              <a:gd name="csX0" fmla="*/ 0 w 2383076"/>
+              <a:gd name="csY0" fmla="*/ 0 h 2103263"/>
+              <a:gd name="csX1" fmla="*/ 303756 w 2383076"/>
+              <a:gd name="csY1" fmla="*/ 1734855 h 2103263"/>
+              <a:gd name="csX2" fmla="*/ 591854 w 2383076"/>
+              <a:gd name="csY2" fmla="*/ 2076189 h 2103263"/>
+              <a:gd name="csX3" fmla="*/ 1180578 w 2383076"/>
+              <a:gd name="csY3" fmla="*/ 1910219 h 2103263"/>
+              <a:gd name="csX4" fmla="*/ 1781827 w 2383076"/>
+              <a:gd name="csY4" fmla="*/ 1349679 h 2103263"/>
+              <a:gd name="csX5" fmla="*/ 2383076 w 2383076"/>
+              <a:gd name="csY5" fmla="*/ 670142 h 2103263"/>
+              <a:gd name="csX0" fmla="*/ 0 w 2383076"/>
+              <a:gd name="csY0" fmla="*/ 0 h 2106144"/>
+              <a:gd name="csX1" fmla="*/ 303756 w 2383076"/>
+              <a:gd name="csY1" fmla="*/ 1734855 h 2106144"/>
+              <a:gd name="csX2" fmla="*/ 591854 w 2383076"/>
+              <a:gd name="csY2" fmla="*/ 2076189 h 2106144"/>
+              <a:gd name="csX3" fmla="*/ 1180578 w 2383076"/>
+              <a:gd name="csY3" fmla="*/ 1910219 h 2106144"/>
+              <a:gd name="csX4" fmla="*/ 1781827 w 2383076"/>
+              <a:gd name="csY4" fmla="*/ 1349679 h 2106144"/>
+              <a:gd name="csX5" fmla="*/ 2383076 w 2383076"/>
+              <a:gd name="csY5" fmla="*/ 670142 h 2106144"/>
+              <a:gd name="csX0" fmla="*/ 0 w 2383076"/>
+              <a:gd name="csY0" fmla="*/ 0 h 2108624"/>
+              <a:gd name="csX1" fmla="*/ 303756 w 2383076"/>
+              <a:gd name="csY1" fmla="*/ 1734855 h 2108624"/>
+              <a:gd name="csX2" fmla="*/ 591854 w 2383076"/>
+              <a:gd name="csY2" fmla="*/ 2076189 h 2108624"/>
+              <a:gd name="csX3" fmla="*/ 1180578 w 2383076"/>
+              <a:gd name="csY3" fmla="*/ 1910219 h 2108624"/>
+              <a:gd name="csX4" fmla="*/ 1781827 w 2383076"/>
+              <a:gd name="csY4" fmla="*/ 1349679 h 2108624"/>
+              <a:gd name="csX5" fmla="*/ 2383076 w 2383076"/>
+              <a:gd name="csY5" fmla="*/ 670142 h 2108624"/>
+              <a:gd name="csX0" fmla="*/ 0 w 2383076"/>
+              <a:gd name="csY0" fmla="*/ 0 h 2085300"/>
+              <a:gd name="csX1" fmla="*/ 303756 w 2383076"/>
+              <a:gd name="csY1" fmla="*/ 1734855 h 2085300"/>
+              <a:gd name="csX2" fmla="*/ 591854 w 2383076"/>
+              <a:gd name="csY2" fmla="*/ 2076189 h 2085300"/>
+              <a:gd name="csX3" fmla="*/ 1178673 w 2383076"/>
+              <a:gd name="csY3" fmla="*/ 1908314 h 2085300"/>
+              <a:gd name="csX4" fmla="*/ 1781827 w 2383076"/>
+              <a:gd name="csY4" fmla="*/ 1349679 h 2085300"/>
+              <a:gd name="csX5" fmla="*/ 2383076 w 2383076"/>
+              <a:gd name="csY5" fmla="*/ 670142 h 2085300"/>
+              <a:gd name="csX0" fmla="*/ 0 w 2383076"/>
+              <a:gd name="csY0" fmla="*/ 0 h 2104106"/>
+              <a:gd name="csX1" fmla="*/ 303756 w 2383076"/>
+              <a:gd name="csY1" fmla="*/ 1734855 h 2104106"/>
+              <a:gd name="csX2" fmla="*/ 591854 w 2383076"/>
+              <a:gd name="csY2" fmla="*/ 2076189 h 2104106"/>
+              <a:gd name="csX3" fmla="*/ 1178673 w 2383076"/>
+              <a:gd name="csY3" fmla="*/ 1908314 h 2104106"/>
+              <a:gd name="csX4" fmla="*/ 1781827 w 2383076"/>
+              <a:gd name="csY4" fmla="*/ 1349679 h 2104106"/>
+              <a:gd name="csX5" fmla="*/ 2383076 w 2383076"/>
+              <a:gd name="csY5" fmla="*/ 670142 h 2104106"/>
+              <a:gd name="csX0" fmla="*/ 0 w 2383076"/>
+              <a:gd name="csY0" fmla="*/ 0 h 2098989"/>
+              <a:gd name="csX1" fmla="*/ 303756 w 2383076"/>
+              <a:gd name="csY1" fmla="*/ 1734855 h 2098989"/>
+              <a:gd name="csX2" fmla="*/ 591854 w 2383076"/>
+              <a:gd name="csY2" fmla="*/ 2076189 h 2098989"/>
+              <a:gd name="csX3" fmla="*/ 1178673 w 2383076"/>
+              <a:gd name="csY3" fmla="*/ 1908314 h 2098989"/>
+              <a:gd name="csX4" fmla="*/ 1774207 w 2383076"/>
+              <a:gd name="csY4" fmla="*/ 1355394 h 2098989"/>
+              <a:gd name="csX5" fmla="*/ 2383076 w 2383076"/>
+              <a:gd name="csY5" fmla="*/ 670142 h 2098989"/>
+              <a:gd name="csX0" fmla="*/ 0 w 2383076"/>
+              <a:gd name="csY0" fmla="*/ 0 h 2104321"/>
+              <a:gd name="csX1" fmla="*/ 303756 w 2383076"/>
+              <a:gd name="csY1" fmla="*/ 1734855 h 2104321"/>
+              <a:gd name="csX2" fmla="*/ 591854 w 2383076"/>
+              <a:gd name="csY2" fmla="*/ 2076189 h 2104321"/>
+              <a:gd name="csX3" fmla="*/ 1178673 w 2383076"/>
+              <a:gd name="csY3" fmla="*/ 1908314 h 2104321"/>
+              <a:gd name="csX4" fmla="*/ 1774207 w 2383076"/>
+              <a:gd name="csY4" fmla="*/ 1355394 h 2104321"/>
+              <a:gd name="csX5" fmla="*/ 2383076 w 2383076"/>
+              <a:gd name="csY5" fmla="*/ 670142 h 2104321"/>
+              <a:gd name="csX0" fmla="*/ 0 w 2383076"/>
+              <a:gd name="csY0" fmla="*/ 0 h 2106640"/>
+              <a:gd name="csX1" fmla="*/ 303756 w 2383076"/>
+              <a:gd name="csY1" fmla="*/ 1734855 h 2106640"/>
+              <a:gd name="csX2" fmla="*/ 591854 w 2383076"/>
+              <a:gd name="csY2" fmla="*/ 2076189 h 2106640"/>
+              <a:gd name="csX3" fmla="*/ 1178673 w 2383076"/>
+              <a:gd name="csY3" fmla="*/ 1908314 h 2106640"/>
+              <a:gd name="csX4" fmla="*/ 1774207 w 2383076"/>
+              <a:gd name="csY4" fmla="*/ 1355394 h 2106640"/>
+              <a:gd name="csX5" fmla="*/ 2383076 w 2383076"/>
+              <a:gd name="csY5" fmla="*/ 670142 h 2106640"/>
+              <a:gd name="csX0" fmla="*/ 0 w 2383076"/>
+              <a:gd name="csY0" fmla="*/ 0 h 2106640"/>
+              <a:gd name="csX1" fmla="*/ 303756 w 2383076"/>
+              <a:gd name="csY1" fmla="*/ 1734855 h 2106640"/>
+              <a:gd name="csX2" fmla="*/ 591854 w 2383076"/>
+              <a:gd name="csY2" fmla="*/ 2076189 h 2106640"/>
+              <a:gd name="csX3" fmla="*/ 1178673 w 2383076"/>
+              <a:gd name="csY3" fmla="*/ 1908314 h 2106640"/>
+              <a:gd name="csX4" fmla="*/ 1774207 w 2383076"/>
+              <a:gd name="csY4" fmla="*/ 1355394 h 2106640"/>
+              <a:gd name="csX5" fmla="*/ 2383076 w 2383076"/>
+              <a:gd name="csY5" fmla="*/ 670142 h 2106640"/>
+            </a:gdLst>
+            <a:ahLst/>
+            <a:cxnLst>
+              <a:cxn ang="0">
+                <a:pos x="csX0" y="csY0"/>
+              </a:cxn>
+              <a:cxn ang="0">
+                <a:pos x="csX1" y="csY1"/>
+              </a:cxn>
+              <a:cxn ang="0">
+                <a:pos x="csX2" y="csY2"/>
+              </a:cxn>
+              <a:cxn ang="0">
+                <a:pos x="csX3" y="csY3"/>
+              </a:cxn>
+              <a:cxn ang="0">
+                <a:pos x="csX4" y="csY4"/>
+              </a:cxn>
+              <a:cxn ang="0">
+                <a:pos x="csX5" y="csY5"/>
+              </a:cxn>
+            </a:cxnLst>
+            <a:rect l="l" t="t" r="r" b="b"/>
+            <a:pathLst>
+              <a:path w="2383076" h="2106640">
+                <a:moveTo>
+                  <a:pt x="0" y="0"/>
+                </a:moveTo>
+                <a:cubicBezTo>
+                  <a:pt x="68267" y="1109702"/>
+                  <a:pt x="218449" y="1567894"/>
+                  <a:pt x="303756" y="1734855"/>
+                </a:cubicBezTo>
+                <a:cubicBezTo>
+                  <a:pt x="389063" y="1901816"/>
+                  <a:pt x="423175" y="1982509"/>
+                  <a:pt x="591854" y="2076189"/>
+                </a:cubicBezTo>
+                <a:cubicBezTo>
+                  <a:pt x="760533" y="2169869"/>
+                  <a:pt x="981614" y="2028446"/>
+                  <a:pt x="1178673" y="1908314"/>
+                </a:cubicBezTo>
+                <a:cubicBezTo>
+                  <a:pt x="1375732" y="1788182"/>
+                  <a:pt x="1573791" y="1562073"/>
+                  <a:pt x="1774207" y="1355394"/>
+                </a:cubicBezTo>
+                <a:cubicBezTo>
+                  <a:pt x="1974623" y="1148715"/>
+                  <a:pt x="2182659" y="906571"/>
+                  <a:pt x="2383076" y="670142"/>
+                </a:cubicBezTo>
+              </a:path>
+            </a:pathLst>
+          </a:custGeom>
+          <a:noFill/>
+          <a:ln cap="rnd">
+            <a:solidFill>
+              <a:schemeClr val="accent6">
+                <a:lumMod val="75000"/>
+              </a:schemeClr>
+            </a:solidFill>
+            <a:round/>
+          </a:ln>
+        </p:spPr>
+        <p:style>
+          <a:lnRef idx="2">
+            <a:schemeClr val="accent1">
+              <a:shade val="15000"/>
+            </a:schemeClr>
+          </a:lnRef>
+          <a:fillRef idx="1">
+            <a:schemeClr val="accent1"/>
+          </a:fillRef>
+          <a:effectRef idx="0">
+            <a:schemeClr val="accent1"/>
+          </a:effectRef>
+          <a:fontRef idx="minor">
+            <a:schemeClr val="lt1"/>
+          </a:fontRef>
+        </p:style>
+        <p:txBody>
+          <a:bodyPr rtlCol="0" anchor="ctr"/>
+          <a:lstStyle/>
+          <a:p>
+            <a:pPr algn="ctr"/>
+            <a:endParaRPr lang="de-DE"/>
+          </a:p>
+        </p:txBody>
+      </p:sp>
+      <p:sp>
+        <p:nvSpPr>
+          <p:cNvPr id="55" name="Freihandform: Form 54">
+            <a:extLst>
+              <a:ext uri="{FF2B5EF4-FFF2-40B4-BE49-F238E27FC236}">
+                <a16:creationId xmlns:a16="http://schemas.microsoft.com/office/drawing/2014/main" id="{523CF2AF-B700-41B1-56DF-079E37A9F36F}"/>
+              </a:ext>
+            </a:extLst>
+          </p:cNvPr>
+          <p:cNvSpPr/>
+          <p:nvPr/>
+        </p:nvSpPr>
+        <p:spPr>
+          <a:xfrm>
+            <a:off x="710565" y="986791"/>
+            <a:ext cx="2367915" cy="1866984"/>
+          </a:xfrm>
+          <a:custGeom>
+            <a:avLst/>
+            <a:gdLst>
+              <a:gd name="csX0" fmla="*/ 0 w 2377440"/>
+              <a:gd name="csY0" fmla="*/ 0 h 1851059"/>
+              <a:gd name="csX1" fmla="*/ 300990 w 2377440"/>
+              <a:gd name="csY1" fmla="*/ 1550670 h 1851059"/>
+              <a:gd name="csX2" fmla="*/ 586740 w 2377440"/>
+              <a:gd name="csY2" fmla="*/ 1845945 h 1851059"/>
+              <a:gd name="csX3" fmla="*/ 1175385 w 2377440"/>
+              <a:gd name="csY3" fmla="*/ 1701165 h 1851059"/>
+              <a:gd name="csX4" fmla="*/ 1771650 w 2377440"/>
+              <a:gd name="csY4" fmla="*/ 1247775 h 1851059"/>
+              <a:gd name="csX5" fmla="*/ 2377440 w 2377440"/>
+              <a:gd name="csY5" fmla="*/ 672465 h 1851059"/>
+              <a:gd name="csX0" fmla="*/ 0 w 2377440"/>
+              <a:gd name="csY0" fmla="*/ 0 h 1851059"/>
+              <a:gd name="csX1" fmla="*/ 300990 w 2377440"/>
+              <a:gd name="csY1" fmla="*/ 1550670 h 1851059"/>
+              <a:gd name="csX2" fmla="*/ 586740 w 2377440"/>
+              <a:gd name="csY2" fmla="*/ 1845945 h 1851059"/>
+              <a:gd name="csX3" fmla="*/ 1175385 w 2377440"/>
+              <a:gd name="csY3" fmla="*/ 1701165 h 1851059"/>
+              <a:gd name="csX4" fmla="*/ 1771650 w 2377440"/>
+              <a:gd name="csY4" fmla="*/ 1247775 h 1851059"/>
+              <a:gd name="csX5" fmla="*/ 2377440 w 2377440"/>
+              <a:gd name="csY5" fmla="*/ 672465 h 1851059"/>
+              <a:gd name="csX0" fmla="*/ 0 w 2377440"/>
+              <a:gd name="csY0" fmla="*/ 0 h 1851059"/>
+              <a:gd name="csX1" fmla="*/ 300990 w 2377440"/>
+              <a:gd name="csY1" fmla="*/ 1550670 h 1851059"/>
+              <a:gd name="csX2" fmla="*/ 586740 w 2377440"/>
+              <a:gd name="csY2" fmla="*/ 1845945 h 1851059"/>
+              <a:gd name="csX3" fmla="*/ 1175385 w 2377440"/>
+              <a:gd name="csY3" fmla="*/ 1701165 h 1851059"/>
+              <a:gd name="csX4" fmla="*/ 1771650 w 2377440"/>
+              <a:gd name="csY4" fmla="*/ 1247775 h 1851059"/>
+              <a:gd name="csX5" fmla="*/ 2377440 w 2377440"/>
+              <a:gd name="csY5" fmla="*/ 672465 h 1851059"/>
+              <a:gd name="csX0" fmla="*/ 0 w 2377440"/>
+              <a:gd name="csY0" fmla="*/ 0 h 1866984"/>
+              <a:gd name="csX1" fmla="*/ 300990 w 2377440"/>
+              <a:gd name="csY1" fmla="*/ 1550670 h 1866984"/>
+              <a:gd name="csX2" fmla="*/ 586740 w 2377440"/>
+              <a:gd name="csY2" fmla="*/ 1845945 h 1866984"/>
+              <a:gd name="csX3" fmla="*/ 1175385 w 2377440"/>
+              <a:gd name="csY3" fmla="*/ 1701165 h 1866984"/>
+              <a:gd name="csX4" fmla="*/ 1771650 w 2377440"/>
+              <a:gd name="csY4" fmla="*/ 1247775 h 1866984"/>
+              <a:gd name="csX5" fmla="*/ 2377440 w 2377440"/>
+              <a:gd name="csY5" fmla="*/ 672465 h 1866984"/>
+              <a:gd name="csX0" fmla="*/ 0 w 2377440"/>
+              <a:gd name="csY0" fmla="*/ 0 h 1866984"/>
+              <a:gd name="csX1" fmla="*/ 300990 w 2377440"/>
+              <a:gd name="csY1" fmla="*/ 1550670 h 1866984"/>
+              <a:gd name="csX2" fmla="*/ 586740 w 2377440"/>
+              <a:gd name="csY2" fmla="*/ 1845945 h 1866984"/>
+              <a:gd name="csX3" fmla="*/ 1175385 w 2377440"/>
+              <a:gd name="csY3" fmla="*/ 1701165 h 1866984"/>
+              <a:gd name="csX4" fmla="*/ 1771650 w 2377440"/>
+              <a:gd name="csY4" fmla="*/ 1247775 h 1866984"/>
+              <a:gd name="csX5" fmla="*/ 2377440 w 2377440"/>
+              <a:gd name="csY5" fmla="*/ 672465 h 1866984"/>
+              <a:gd name="csX0" fmla="*/ 0 w 2377440"/>
+              <a:gd name="csY0" fmla="*/ 0 h 1866984"/>
+              <a:gd name="csX1" fmla="*/ 300990 w 2377440"/>
+              <a:gd name="csY1" fmla="*/ 1550670 h 1866984"/>
+              <a:gd name="csX2" fmla="*/ 586740 w 2377440"/>
+              <a:gd name="csY2" fmla="*/ 1845945 h 1866984"/>
+              <a:gd name="csX3" fmla="*/ 1175385 w 2377440"/>
+              <a:gd name="csY3" fmla="*/ 1701165 h 1866984"/>
+              <a:gd name="csX4" fmla="*/ 1771650 w 2377440"/>
+              <a:gd name="csY4" fmla="*/ 1247775 h 1866984"/>
+              <a:gd name="csX5" fmla="*/ 2377440 w 2377440"/>
+              <a:gd name="csY5" fmla="*/ 672465 h 1866984"/>
+            </a:gdLst>
+            <a:ahLst/>
+            <a:cxnLst>
+              <a:cxn ang="0">
+                <a:pos x="csX0" y="csY0"/>
+              </a:cxn>
+              <a:cxn ang="0">
+                <a:pos x="csX1" y="csY1"/>
+              </a:cxn>
+              <a:cxn ang="0">
+                <a:pos x="csX2" y="csY2"/>
+              </a:cxn>
+              <a:cxn ang="0">
+                <a:pos x="csX3" y="csY3"/>
+              </a:cxn>
+              <a:cxn ang="0">
+                <a:pos x="csX4" y="csY4"/>
+              </a:cxn>
+              <a:cxn ang="0">
+                <a:pos x="csX5" y="csY5"/>
+              </a:cxn>
+            </a:cxnLst>
+            <a:rect l="l" t="t" r="r" b="b"/>
+            <a:pathLst>
+              <a:path w="2377440" h="1866984">
+                <a:moveTo>
+                  <a:pt x="0" y="0"/>
+                </a:moveTo>
+                <a:cubicBezTo>
+                  <a:pt x="25400" y="741521"/>
+                  <a:pt x="191770" y="1349692"/>
+                  <a:pt x="300990" y="1550670"/>
+                </a:cubicBezTo>
+                <a:cubicBezTo>
+                  <a:pt x="410210" y="1751648"/>
+                  <a:pt x="427673" y="1777048"/>
+                  <a:pt x="586740" y="1845945"/>
+                </a:cubicBezTo>
+                <a:cubicBezTo>
+                  <a:pt x="745807" y="1914842"/>
+                  <a:pt x="977900" y="1800860"/>
+                  <a:pt x="1175385" y="1701165"/>
+                </a:cubicBezTo>
+                <a:cubicBezTo>
+                  <a:pt x="1372870" y="1601470"/>
+                  <a:pt x="1571307" y="1419225"/>
+                  <a:pt x="1771650" y="1247775"/>
+                </a:cubicBezTo>
+                <a:cubicBezTo>
+                  <a:pt x="1971993" y="1076325"/>
+                  <a:pt x="2174716" y="874395"/>
+                  <a:pt x="2377440" y="672465"/>
+                </a:cubicBezTo>
+              </a:path>
+            </a:pathLst>
+          </a:custGeom>
+          <a:noFill/>
+          <a:ln cap="rnd">
+            <a:solidFill>
+              <a:schemeClr val="accent2">
+                <a:lumMod val="75000"/>
+              </a:schemeClr>
+            </a:solidFill>
+            <a:round/>
+          </a:ln>
+        </p:spPr>
+        <p:style>
+          <a:lnRef idx="2">
+            <a:schemeClr val="accent1">
+              <a:shade val="15000"/>
+            </a:schemeClr>
+          </a:lnRef>
+          <a:fillRef idx="1">
+            <a:schemeClr val="accent1"/>
+          </a:fillRef>
+          <a:effectRef idx="0">
+            <a:schemeClr val="accent1"/>
+          </a:effectRef>
+          <a:fontRef idx="minor">
+            <a:schemeClr val="lt1"/>
+          </a:fontRef>
+        </p:style>
+        <p:txBody>
+          <a:bodyPr rtlCol="0" anchor="ctr"/>
+          <a:lstStyle/>
+          <a:p>
+            <a:pPr algn="ctr"/>
+            <a:endParaRPr lang="de-DE"/>
+          </a:p>
+        </p:txBody>
+      </p:sp>
+      <p:sp>
+        <p:nvSpPr>
+          <p:cNvPr id="56" name="Freihandform: Form 55">
+            <a:extLst>
+              <a:ext uri="{FF2B5EF4-FFF2-40B4-BE49-F238E27FC236}">
+                <a16:creationId xmlns:a16="http://schemas.microsoft.com/office/drawing/2014/main" id="{FB15F09D-AD2B-4F98-AD3A-4C6409BD6D87}"/>
+              </a:ext>
+            </a:extLst>
+          </p:cNvPr>
+          <p:cNvSpPr/>
+          <p:nvPr/>
+        </p:nvSpPr>
+        <p:spPr>
+          <a:xfrm>
+            <a:off x="710564" y="1327785"/>
+            <a:ext cx="2367915" cy="1552444"/>
+          </a:xfrm>
+          <a:custGeom>
+            <a:avLst/>
+            <a:gdLst>
+              <a:gd name="csX0" fmla="*/ 0 w 2377440"/>
+              <a:gd name="csY0" fmla="*/ 0 h 1541972"/>
+              <a:gd name="csX1" fmla="*/ 300990 w 2377440"/>
+              <a:gd name="csY1" fmla="*/ 1301115 h 1541972"/>
+              <a:gd name="csX2" fmla="*/ 588645 w 2377440"/>
+              <a:gd name="csY2" fmla="*/ 1537335 h 1541972"/>
+              <a:gd name="csX3" fmla="*/ 1181100 w 2377440"/>
+              <a:gd name="csY3" fmla="*/ 1428750 h 1541972"/>
+              <a:gd name="csX4" fmla="*/ 1781175 w 2377440"/>
+              <a:gd name="csY4" fmla="*/ 1085850 h 1541972"/>
+              <a:gd name="csX5" fmla="*/ 2377440 w 2377440"/>
+              <a:gd name="csY5" fmla="*/ 645795 h 1541972"/>
+              <a:gd name="csX0" fmla="*/ 0 w 2377440"/>
+              <a:gd name="csY0" fmla="*/ 0 h 1541972"/>
+              <a:gd name="csX1" fmla="*/ 300990 w 2377440"/>
+              <a:gd name="csY1" fmla="*/ 1301115 h 1541972"/>
+              <a:gd name="csX2" fmla="*/ 588645 w 2377440"/>
+              <a:gd name="csY2" fmla="*/ 1537335 h 1541972"/>
+              <a:gd name="csX3" fmla="*/ 1181100 w 2377440"/>
+              <a:gd name="csY3" fmla="*/ 1428750 h 1541972"/>
+              <a:gd name="csX4" fmla="*/ 1781175 w 2377440"/>
+              <a:gd name="csY4" fmla="*/ 1085850 h 1541972"/>
+              <a:gd name="csX5" fmla="*/ 2377440 w 2377440"/>
+              <a:gd name="csY5" fmla="*/ 645795 h 1541972"/>
+              <a:gd name="csX0" fmla="*/ 0 w 2377440"/>
+              <a:gd name="csY0" fmla="*/ 0 h 1548034"/>
+              <a:gd name="csX1" fmla="*/ 300990 w 2377440"/>
+              <a:gd name="csY1" fmla="*/ 1301115 h 1548034"/>
+              <a:gd name="csX2" fmla="*/ 588645 w 2377440"/>
+              <a:gd name="csY2" fmla="*/ 1537335 h 1548034"/>
+              <a:gd name="csX3" fmla="*/ 1181100 w 2377440"/>
+              <a:gd name="csY3" fmla="*/ 1428750 h 1548034"/>
+              <a:gd name="csX4" fmla="*/ 1781175 w 2377440"/>
+              <a:gd name="csY4" fmla="*/ 1085850 h 1548034"/>
+              <a:gd name="csX5" fmla="*/ 2377440 w 2377440"/>
+              <a:gd name="csY5" fmla="*/ 645795 h 1548034"/>
+              <a:gd name="csX0" fmla="*/ 0 w 2377440"/>
+              <a:gd name="csY0" fmla="*/ 0 h 1552444"/>
+              <a:gd name="csX1" fmla="*/ 300990 w 2377440"/>
+              <a:gd name="csY1" fmla="*/ 1301115 h 1552444"/>
+              <a:gd name="csX2" fmla="*/ 588645 w 2377440"/>
+              <a:gd name="csY2" fmla="*/ 1537335 h 1552444"/>
+              <a:gd name="csX3" fmla="*/ 1181100 w 2377440"/>
+              <a:gd name="csY3" fmla="*/ 1428750 h 1552444"/>
+              <a:gd name="csX4" fmla="*/ 1781175 w 2377440"/>
+              <a:gd name="csY4" fmla="*/ 1085850 h 1552444"/>
+              <a:gd name="csX5" fmla="*/ 2377440 w 2377440"/>
+              <a:gd name="csY5" fmla="*/ 645795 h 1552444"/>
+              <a:gd name="csX0" fmla="*/ 0 w 2377440"/>
+              <a:gd name="csY0" fmla="*/ 0 h 1552444"/>
+              <a:gd name="csX1" fmla="*/ 300990 w 2377440"/>
+              <a:gd name="csY1" fmla="*/ 1301115 h 1552444"/>
+              <a:gd name="csX2" fmla="*/ 588645 w 2377440"/>
+              <a:gd name="csY2" fmla="*/ 1537335 h 1552444"/>
+              <a:gd name="csX3" fmla="*/ 1181100 w 2377440"/>
+              <a:gd name="csY3" fmla="*/ 1428750 h 1552444"/>
+              <a:gd name="csX4" fmla="*/ 1781175 w 2377440"/>
+              <a:gd name="csY4" fmla="*/ 1085850 h 1552444"/>
+              <a:gd name="csX5" fmla="*/ 2377440 w 2377440"/>
+              <a:gd name="csY5" fmla="*/ 645795 h 1552444"/>
+              <a:gd name="csX0" fmla="*/ 0 w 2377440"/>
+              <a:gd name="csY0" fmla="*/ 0 h 1552444"/>
+              <a:gd name="csX1" fmla="*/ 300990 w 2377440"/>
+              <a:gd name="csY1" fmla="*/ 1301115 h 1552444"/>
+              <a:gd name="csX2" fmla="*/ 588645 w 2377440"/>
+              <a:gd name="csY2" fmla="*/ 1537335 h 1552444"/>
+              <a:gd name="csX3" fmla="*/ 1181100 w 2377440"/>
+              <a:gd name="csY3" fmla="*/ 1428750 h 1552444"/>
+              <a:gd name="csX4" fmla="*/ 1781175 w 2377440"/>
+              <a:gd name="csY4" fmla="*/ 1085850 h 1552444"/>
+              <a:gd name="csX5" fmla="*/ 2377440 w 2377440"/>
+              <a:gd name="csY5" fmla="*/ 645795 h 1552444"/>
+              <a:gd name="csX0" fmla="*/ 0 w 2377440"/>
+              <a:gd name="csY0" fmla="*/ 0 h 1552444"/>
+              <a:gd name="csX1" fmla="*/ 300990 w 2377440"/>
+              <a:gd name="csY1" fmla="*/ 1301115 h 1552444"/>
+              <a:gd name="csX2" fmla="*/ 588645 w 2377440"/>
+              <a:gd name="csY2" fmla="*/ 1537335 h 1552444"/>
+              <a:gd name="csX3" fmla="*/ 1181100 w 2377440"/>
+              <a:gd name="csY3" fmla="*/ 1428750 h 1552444"/>
+              <a:gd name="csX4" fmla="*/ 1781175 w 2377440"/>
+              <a:gd name="csY4" fmla="*/ 1085850 h 1552444"/>
+              <a:gd name="csX5" fmla="*/ 2377440 w 2377440"/>
+              <a:gd name="csY5" fmla="*/ 645795 h 1552444"/>
+            </a:gdLst>
+            <a:ahLst/>
+            <a:cxnLst>
+              <a:cxn ang="0">
+                <a:pos x="csX0" y="csY0"/>
+              </a:cxn>
+              <a:cxn ang="0">
+                <a:pos x="csX1" y="csY1"/>
+              </a:cxn>
+              <a:cxn ang="0">
+                <a:pos x="csX2" y="csY2"/>
+              </a:cxn>
+              <a:cxn ang="0">
+                <a:pos x="csX3" y="csY3"/>
+              </a:cxn>
+              <a:cxn ang="0">
+                <a:pos x="csX4" y="csY4"/>
+              </a:cxn>
+              <a:cxn ang="0">
+                <a:pos x="csX5" y="csY5"/>
+              </a:cxn>
+            </a:cxnLst>
+            <a:rect l="l" t="t" r="r" b="b"/>
+            <a:pathLst>
+              <a:path w="2377440" h="1552444">
+                <a:moveTo>
+                  <a:pt x="0" y="0"/>
+                </a:moveTo>
+                <a:cubicBezTo>
+                  <a:pt x="70961" y="667226"/>
+                  <a:pt x="216218" y="1159193"/>
+                  <a:pt x="300990" y="1301115"/>
+                </a:cubicBezTo>
+                <a:cubicBezTo>
+                  <a:pt x="385762" y="1443037"/>
+                  <a:pt x="430530" y="1487488"/>
+                  <a:pt x="588645" y="1537335"/>
+                </a:cubicBezTo>
+                <a:cubicBezTo>
+                  <a:pt x="746760" y="1587182"/>
+                  <a:pt x="982345" y="1503997"/>
+                  <a:pt x="1181100" y="1428750"/>
+                </a:cubicBezTo>
+                <a:cubicBezTo>
+                  <a:pt x="1379855" y="1353503"/>
+                  <a:pt x="1581785" y="1216343"/>
+                  <a:pt x="1781175" y="1085850"/>
+                </a:cubicBezTo>
+                <a:cubicBezTo>
+                  <a:pt x="1980565" y="955358"/>
+                  <a:pt x="2179002" y="800576"/>
+                  <a:pt x="2377440" y="645795"/>
+                </a:cubicBezTo>
+              </a:path>
+            </a:pathLst>
+          </a:custGeom>
+          <a:noFill/>
+          <a:ln cap="rnd">
+            <a:solidFill>
+              <a:schemeClr val="tx2">
+                <a:lumMod val="75000"/>
+                <a:lumOff val="25000"/>
+              </a:schemeClr>
+            </a:solidFill>
+            <a:round/>
+          </a:ln>
+        </p:spPr>
+        <p:style>
+          <a:lnRef idx="2">
+            <a:schemeClr val="accent1">
+              <a:shade val="15000"/>
+            </a:schemeClr>
+          </a:lnRef>
+          <a:fillRef idx="1">
+            <a:schemeClr val="accent1"/>
+          </a:fillRef>
+          <a:effectRef idx="0">
+            <a:schemeClr val="accent1"/>
+          </a:effectRef>
+          <a:fontRef idx="minor">
+            <a:schemeClr val="lt1"/>
+          </a:fontRef>
+        </p:style>
+        <p:txBody>
+          <a:bodyPr rtlCol="0" anchor="ctr"/>
+          <a:lstStyle/>
+          <a:p>
+            <a:pPr algn="ctr"/>
+            <a:endParaRPr lang="de-DE"/>
+          </a:p>
+        </p:txBody>
+      </p:sp>
+      <p:sp>
+        <p:nvSpPr>
+          <p:cNvPr id="57" name="Freihandform: Form 56">
+            <a:extLst>
+              <a:ext uri="{FF2B5EF4-FFF2-40B4-BE49-F238E27FC236}">
+                <a16:creationId xmlns:a16="http://schemas.microsoft.com/office/drawing/2014/main" id="{4B657633-4455-548B-D0AE-A6DA3F8759BE}"/>
+              </a:ext>
+            </a:extLst>
+          </p:cNvPr>
+          <p:cNvSpPr/>
+          <p:nvPr/>
+        </p:nvSpPr>
+        <p:spPr>
+          <a:xfrm>
+            <a:off x="710565" y="1794510"/>
+            <a:ext cx="2369820" cy="1119167"/>
+          </a:xfrm>
+          <a:custGeom>
+            <a:avLst/>
+            <a:gdLst>
+              <a:gd name="csX0" fmla="*/ 0 w 2375535"/>
+              <a:gd name="csY0" fmla="*/ 0 h 1127289"/>
+              <a:gd name="csX1" fmla="*/ 297180 w 2375535"/>
+              <a:gd name="csY1" fmla="*/ 998220 h 1127289"/>
+              <a:gd name="csX2" fmla="*/ 582930 w 2375535"/>
+              <a:gd name="csY2" fmla="*/ 1118235 h 1127289"/>
+              <a:gd name="csX3" fmla="*/ 1173480 w 2375535"/>
+              <a:gd name="csY3" fmla="*/ 1032510 h 1127289"/>
+              <a:gd name="csX4" fmla="*/ 1775460 w 2375535"/>
+              <a:gd name="csY4" fmla="*/ 798195 h 1127289"/>
+              <a:gd name="csX5" fmla="*/ 2375535 w 2375535"/>
+              <a:gd name="csY5" fmla="*/ 502920 h 1127289"/>
+              <a:gd name="csX0" fmla="*/ 0 w 2375535"/>
+              <a:gd name="csY0" fmla="*/ 0 h 1127289"/>
+              <a:gd name="csX1" fmla="*/ 297180 w 2375535"/>
+              <a:gd name="csY1" fmla="*/ 998220 h 1127289"/>
+              <a:gd name="csX2" fmla="*/ 582930 w 2375535"/>
+              <a:gd name="csY2" fmla="*/ 1118235 h 1127289"/>
+              <a:gd name="csX3" fmla="*/ 1173480 w 2375535"/>
+              <a:gd name="csY3" fmla="*/ 1032510 h 1127289"/>
+              <a:gd name="csX4" fmla="*/ 1775460 w 2375535"/>
+              <a:gd name="csY4" fmla="*/ 798195 h 1127289"/>
+              <a:gd name="csX5" fmla="*/ 2375535 w 2375535"/>
+              <a:gd name="csY5" fmla="*/ 502920 h 1127289"/>
+              <a:gd name="csX0" fmla="*/ 0 w 2375535"/>
+              <a:gd name="csY0" fmla="*/ 0 h 1118802"/>
+              <a:gd name="csX1" fmla="*/ 297180 w 2375535"/>
+              <a:gd name="csY1" fmla="*/ 998220 h 1118802"/>
+              <a:gd name="csX2" fmla="*/ 582930 w 2375535"/>
+              <a:gd name="csY2" fmla="*/ 1118235 h 1118802"/>
+              <a:gd name="csX3" fmla="*/ 1173480 w 2375535"/>
+              <a:gd name="csY3" fmla="*/ 1032510 h 1118802"/>
+              <a:gd name="csX4" fmla="*/ 1775460 w 2375535"/>
+              <a:gd name="csY4" fmla="*/ 798195 h 1118802"/>
+              <a:gd name="csX5" fmla="*/ 2375535 w 2375535"/>
+              <a:gd name="csY5" fmla="*/ 502920 h 1118802"/>
+              <a:gd name="csX0" fmla="*/ 0 w 2375535"/>
+              <a:gd name="csY0" fmla="*/ 0 h 1119167"/>
+              <a:gd name="csX1" fmla="*/ 297180 w 2375535"/>
+              <a:gd name="csY1" fmla="*/ 998220 h 1119167"/>
+              <a:gd name="csX2" fmla="*/ 582930 w 2375535"/>
+              <a:gd name="csY2" fmla="*/ 1118235 h 1119167"/>
+              <a:gd name="csX3" fmla="*/ 1173480 w 2375535"/>
+              <a:gd name="csY3" fmla="*/ 1032510 h 1119167"/>
+              <a:gd name="csX4" fmla="*/ 1775460 w 2375535"/>
+              <a:gd name="csY4" fmla="*/ 798195 h 1119167"/>
+              <a:gd name="csX5" fmla="*/ 2375535 w 2375535"/>
+              <a:gd name="csY5" fmla="*/ 502920 h 1119167"/>
+              <a:gd name="csX0" fmla="*/ 0 w 2375535"/>
+              <a:gd name="csY0" fmla="*/ 0 h 1119167"/>
+              <a:gd name="csX1" fmla="*/ 297180 w 2375535"/>
+              <a:gd name="csY1" fmla="*/ 998220 h 1119167"/>
+              <a:gd name="csX2" fmla="*/ 582930 w 2375535"/>
+              <a:gd name="csY2" fmla="*/ 1118235 h 1119167"/>
+              <a:gd name="csX3" fmla="*/ 1173480 w 2375535"/>
+              <a:gd name="csY3" fmla="*/ 1032510 h 1119167"/>
+              <a:gd name="csX4" fmla="*/ 1775460 w 2375535"/>
+              <a:gd name="csY4" fmla="*/ 798195 h 1119167"/>
+              <a:gd name="csX5" fmla="*/ 2375535 w 2375535"/>
+              <a:gd name="csY5" fmla="*/ 502920 h 1119167"/>
+            </a:gdLst>
+            <a:ahLst/>
+            <a:cxnLst>
+              <a:cxn ang="0">
+                <a:pos x="csX0" y="csY0"/>
+              </a:cxn>
+              <a:cxn ang="0">
+                <a:pos x="csX1" y="csY1"/>
+              </a:cxn>
+              <a:cxn ang="0">
+                <a:pos x="csX2" y="csY2"/>
+              </a:cxn>
+              <a:cxn ang="0">
+                <a:pos x="csX3" y="csY3"/>
+              </a:cxn>
+              <a:cxn ang="0">
+                <a:pos x="csX4" y="csY4"/>
+              </a:cxn>
+              <a:cxn ang="0">
+                <a:pos x="csX5" y="csY5"/>
+              </a:cxn>
+            </a:cxnLst>
+            <a:rect l="l" t="t" r="r" b="b"/>
+            <a:pathLst>
+              <a:path w="2375535" h="1119167">
+                <a:moveTo>
+                  <a:pt x="0" y="0"/>
+                </a:moveTo>
+                <a:cubicBezTo>
+                  <a:pt x="46672" y="579279"/>
+                  <a:pt x="175260" y="893763"/>
+                  <a:pt x="297180" y="998220"/>
+                </a:cubicBezTo>
+                <a:cubicBezTo>
+                  <a:pt x="419100" y="1102677"/>
+                  <a:pt x="486410" y="1110615"/>
+                  <a:pt x="582930" y="1118235"/>
+                </a:cubicBezTo>
+                <a:cubicBezTo>
+                  <a:pt x="679450" y="1125855"/>
+                  <a:pt x="974725" y="1085850"/>
+                  <a:pt x="1173480" y="1032510"/>
+                </a:cubicBezTo>
+                <a:cubicBezTo>
+                  <a:pt x="1372235" y="979170"/>
+                  <a:pt x="1575118" y="886460"/>
+                  <a:pt x="1775460" y="798195"/>
+                </a:cubicBezTo>
+                <a:cubicBezTo>
+                  <a:pt x="1975802" y="709930"/>
+                  <a:pt x="2175668" y="606425"/>
+                  <a:pt x="2375535" y="502920"/>
+                </a:cubicBezTo>
+              </a:path>
+            </a:pathLst>
+          </a:custGeom>
+          <a:noFill/>
+          <a:ln cap="rnd">
+            <a:solidFill>
+              <a:srgbClr val="C00000"/>
+            </a:solidFill>
+            <a:round/>
+          </a:ln>
+        </p:spPr>
+        <p:style>
+          <a:lnRef idx="2">
+            <a:schemeClr val="accent1">
+              <a:shade val="15000"/>
+            </a:schemeClr>
+          </a:lnRef>
+          <a:fillRef idx="1">
+            <a:schemeClr val="accent1"/>
+          </a:fillRef>
+          <a:effectRef idx="0">
+            <a:schemeClr val="accent1"/>
+          </a:effectRef>
+          <a:fontRef idx="minor">
+            <a:schemeClr val="lt1"/>
+          </a:fontRef>
+        </p:style>
+        <p:txBody>
+          <a:bodyPr rtlCol="0" anchor="ctr"/>
+          <a:lstStyle/>
+          <a:p>
+            <a:pPr algn="ctr"/>
+            <a:endParaRPr lang="de-DE"/>
+          </a:p>
+        </p:txBody>
+      </p:sp>
+      <p:sp>
+        <p:nvSpPr>
+          <p:cNvPr id="58" name="Textfeld 57">
+            <a:extLst>
+              <a:ext uri="{FF2B5EF4-FFF2-40B4-BE49-F238E27FC236}">
+                <a16:creationId xmlns:a16="http://schemas.microsoft.com/office/drawing/2014/main" id="{AB7511FA-0BC9-8A60-4D77-A73A7BB6954D}"/>
+              </a:ext>
+            </a:extLst>
+          </p:cNvPr>
+          <p:cNvSpPr txBox="1"/>
+          <p:nvPr/>
+        </p:nvSpPr>
+        <p:spPr>
+          <a:xfrm>
+            <a:off x="2196692" y="1522184"/>
+            <a:ext cx="819176" cy="215444"/>
+          </a:xfrm>
+          <a:prstGeom prst="rect">
+            <a:avLst/>
+          </a:prstGeom>
+          <a:noFill/>
+        </p:spPr>
+        <p:txBody>
+          <a:bodyPr wrap="square" rtlCol="0" anchor="ctr">
+            <a:spAutoFit/>
+          </a:bodyPr>
+          <a:lstStyle/>
+          <a:p>
+            <a:pPr algn="ctr"/>
+            <a:r>
+              <a:rPr lang="de-DE" sz="800" dirty="0">
+                <a:solidFill>
+                  <a:schemeClr val="accent6">
+                    <a:lumMod val="75000"/>
+                  </a:schemeClr>
+                </a:solidFill>
+                <a:latin typeface="Latin Modern Math" panose="02000503000000000000" pitchFamily="50" charset="0"/>
+                <a:ea typeface="Latin Modern Math" panose="02000503000000000000" pitchFamily="50" charset="0"/>
+                <a:cs typeface="CMU Serif" panose="02000603000000000000" pitchFamily="2" charset="0"/>
+              </a:rPr>
+              <a:t>Λ</a:t>
+            </a:r>
+            <a:r>
+              <a:rPr lang="de-DE" sz="800" dirty="0">
+                <a:solidFill>
+                  <a:schemeClr val="accent6">
+                    <a:lumMod val="75000"/>
+                  </a:schemeClr>
+                </a:solidFill>
+                <a:latin typeface="CMU Serif" panose="02000603000000000000" pitchFamily="2" charset="0"/>
+                <a:ea typeface="CMU Serif" panose="02000603000000000000" pitchFamily="2" charset="0"/>
+                <a:cs typeface="CMU Serif" panose="02000603000000000000" pitchFamily="2" charset="0"/>
+              </a:rPr>
+              <a:t> = 10</a:t>
+            </a:r>
+            <a:endParaRPr lang="de-DE" sz="800" baseline="-25000" dirty="0">
+              <a:solidFill>
+                <a:schemeClr val="accent6">
+                  <a:lumMod val="75000"/>
+                </a:schemeClr>
+              </a:solidFill>
+              <a:latin typeface="CMU Serif" panose="02000603000000000000" pitchFamily="2" charset="0"/>
+              <a:ea typeface="CMU Serif" panose="02000603000000000000" pitchFamily="2" charset="0"/>
+              <a:cs typeface="CMU Serif" panose="02000603000000000000" pitchFamily="2" charset="0"/>
+            </a:endParaRPr>
+          </a:p>
+        </p:txBody>
+      </p:sp>
+      <p:sp>
+        <p:nvSpPr>
+          <p:cNvPr id="59" name="Textfeld 58">
+            <a:extLst>
+              <a:ext uri="{FF2B5EF4-FFF2-40B4-BE49-F238E27FC236}">
+                <a16:creationId xmlns:a16="http://schemas.microsoft.com/office/drawing/2014/main" id="{C7297B51-2F35-F8F9-F307-C0E63B0B1DC3}"/>
+              </a:ext>
+            </a:extLst>
+          </p:cNvPr>
+          <p:cNvSpPr txBox="1"/>
+          <p:nvPr/>
+        </p:nvSpPr>
+        <p:spPr>
+          <a:xfrm>
+            <a:off x="2649223" y="1745384"/>
+            <a:ext cx="266716" cy="215444"/>
+          </a:xfrm>
+          <a:prstGeom prst="rect">
+            <a:avLst/>
+          </a:prstGeom>
+          <a:noFill/>
+        </p:spPr>
+        <p:txBody>
+          <a:bodyPr wrap="square" rtlCol="0" anchor="ctr">
+            <a:spAutoFit/>
+          </a:bodyPr>
+          <a:lstStyle/>
+          <a:p>
+            <a:pPr algn="ctr"/>
+            <a:r>
+              <a:rPr lang="de-DE" sz="800" dirty="0">
+                <a:solidFill>
+                  <a:schemeClr val="accent2">
+                    <a:lumMod val="75000"/>
+                  </a:schemeClr>
+                </a:solidFill>
+                <a:latin typeface="CMU Serif" panose="02000603000000000000" pitchFamily="2" charset="0"/>
+                <a:ea typeface="CMU Serif" panose="02000603000000000000" pitchFamily="2" charset="0"/>
+                <a:cs typeface="CMU Serif" panose="02000603000000000000" pitchFamily="2" charset="0"/>
+              </a:rPr>
+              <a:t>8</a:t>
+            </a:r>
+            <a:endParaRPr lang="de-DE" sz="800" baseline="-25000" dirty="0">
+              <a:solidFill>
+                <a:schemeClr val="accent2">
+                  <a:lumMod val="75000"/>
+                </a:schemeClr>
+              </a:solidFill>
+              <a:latin typeface="CMU Serif" panose="02000603000000000000" pitchFamily="2" charset="0"/>
+              <a:ea typeface="CMU Serif" panose="02000603000000000000" pitchFamily="2" charset="0"/>
+              <a:cs typeface="CMU Serif" panose="02000603000000000000" pitchFamily="2" charset="0"/>
+            </a:endParaRPr>
+          </a:p>
+        </p:txBody>
+      </p:sp>
+      <p:sp>
+        <p:nvSpPr>
+          <p:cNvPr id="60" name="Textfeld 59">
+            <a:extLst>
+              <a:ext uri="{FF2B5EF4-FFF2-40B4-BE49-F238E27FC236}">
+                <a16:creationId xmlns:a16="http://schemas.microsoft.com/office/drawing/2014/main" id="{1F6F98CD-370F-2331-9B89-A0C2006DB1EC}"/>
+              </a:ext>
+            </a:extLst>
+          </p:cNvPr>
+          <p:cNvSpPr txBox="1"/>
+          <p:nvPr/>
+        </p:nvSpPr>
+        <p:spPr>
+          <a:xfrm>
+            <a:off x="2729541" y="1926686"/>
+            <a:ext cx="266716" cy="215444"/>
+          </a:xfrm>
+          <a:prstGeom prst="rect">
+            <a:avLst/>
+          </a:prstGeom>
+          <a:noFill/>
+        </p:spPr>
+        <p:txBody>
+          <a:bodyPr wrap="square" rtlCol="0" anchor="ctr">
+            <a:spAutoFit/>
+          </a:bodyPr>
+          <a:lstStyle/>
+          <a:p>
+            <a:pPr algn="ctr"/>
+            <a:r>
+              <a:rPr lang="de-DE" sz="800" dirty="0">
+                <a:solidFill>
+                  <a:schemeClr val="tx2">
+                    <a:lumMod val="75000"/>
+                    <a:lumOff val="25000"/>
+                  </a:schemeClr>
+                </a:solidFill>
+                <a:latin typeface="CMU Serif" panose="02000603000000000000" pitchFamily="2" charset="0"/>
+                <a:ea typeface="CMU Serif" panose="02000603000000000000" pitchFamily="2" charset="0"/>
+                <a:cs typeface="CMU Serif" panose="02000603000000000000" pitchFamily="2" charset="0"/>
+              </a:rPr>
+              <a:t>6</a:t>
+            </a:r>
+            <a:endParaRPr lang="de-DE" sz="800" baseline="-25000" dirty="0">
+              <a:solidFill>
+                <a:schemeClr val="tx2">
+                  <a:lumMod val="75000"/>
+                  <a:lumOff val="25000"/>
+                </a:schemeClr>
+              </a:solidFill>
+              <a:latin typeface="CMU Serif" panose="02000603000000000000" pitchFamily="2" charset="0"/>
+              <a:ea typeface="CMU Serif" panose="02000603000000000000" pitchFamily="2" charset="0"/>
+              <a:cs typeface="CMU Serif" panose="02000603000000000000" pitchFamily="2" charset="0"/>
+            </a:endParaRPr>
+          </a:p>
+        </p:txBody>
+      </p:sp>
+      <p:sp>
+        <p:nvSpPr>
+          <p:cNvPr id="61" name="Textfeld 60">
+            <a:extLst>
+              <a:ext uri="{FF2B5EF4-FFF2-40B4-BE49-F238E27FC236}">
+                <a16:creationId xmlns:a16="http://schemas.microsoft.com/office/drawing/2014/main" id="{39949C8F-FD7E-0322-6959-3D6ADBCFE408}"/>
+              </a:ext>
+            </a:extLst>
+          </p:cNvPr>
+          <p:cNvSpPr txBox="1"/>
+          <p:nvPr/>
+        </p:nvSpPr>
+        <p:spPr>
+          <a:xfrm>
+            <a:off x="2809860" y="2133160"/>
+            <a:ext cx="266716" cy="215444"/>
+          </a:xfrm>
+          <a:prstGeom prst="rect">
+            <a:avLst/>
+          </a:prstGeom>
+          <a:noFill/>
+        </p:spPr>
+        <p:txBody>
+          <a:bodyPr wrap="square" rtlCol="0" anchor="ctr">
+            <a:spAutoFit/>
+          </a:bodyPr>
+          <a:lstStyle/>
+          <a:p>
+            <a:pPr algn="ctr"/>
+            <a:r>
+              <a:rPr lang="de-DE" sz="800" dirty="0">
+                <a:solidFill>
+                  <a:srgbClr val="C00000"/>
+                </a:solidFill>
+                <a:latin typeface="CMU Serif" panose="02000603000000000000" pitchFamily="2" charset="0"/>
+                <a:ea typeface="CMU Serif" panose="02000603000000000000" pitchFamily="2" charset="0"/>
+                <a:cs typeface="CMU Serif" panose="02000603000000000000" pitchFamily="2" charset="0"/>
+              </a:rPr>
+              <a:t>4</a:t>
+            </a:r>
+            <a:endParaRPr lang="de-DE" sz="800" baseline="-25000" dirty="0">
+              <a:solidFill>
+                <a:srgbClr val="C00000"/>
+              </a:solidFill>
+              <a:latin typeface="CMU Serif" panose="02000603000000000000" pitchFamily="2" charset="0"/>
+              <a:ea typeface="CMU Serif" panose="02000603000000000000" pitchFamily="2" charset="0"/>
+              <a:cs typeface="CMU Serif" panose="02000603000000000000" pitchFamily="2" charset="0"/>
+            </a:endParaRPr>
+          </a:p>
+        </p:txBody>
+      </p:sp>
+    </p:spTree>
+    <p:extLst>
+      <p:ext uri="{BB962C8B-B14F-4D97-AF65-F5344CB8AC3E}">
+        <p14:creationId xmlns:p14="http://schemas.microsoft.com/office/powerpoint/2010/main" val="1508409965"/>
+      </p:ext>
+    </p:extLst>
+  </p:cSld>
+  <p:clrMapOvr>
+    <a:masterClrMapping/>
+  </p:clrMapOvr>
+</p:sld>
+</file>
+
 <file path=ppt/slides/slide2.xml><?xml version="1.0" encoding="utf-8"?>
 <p:sld xmlns:a="http://schemas.openxmlformats.org/drawingml/2006/main" xmlns:r="http://schemas.openxmlformats.org/officeDocument/2006/relationships" xmlns:p="http://schemas.openxmlformats.org/presentationml/2006/main">
   <p:cSld>
@@ -9275,6 +11921,1216 @@
         <p:cNvPr id="1" name="">
           <a:extLst>
             <a:ext uri="{FF2B5EF4-FFF2-40B4-BE49-F238E27FC236}">
+              <a16:creationId xmlns:a16="http://schemas.microsoft.com/office/drawing/2014/main" id="{B1B27ED4-CD45-D298-8BF9-7CE30C4C198B}"/>
+            </a:ext>
+          </a:extLst>
+        </p:cNvPr>
+        <p:cNvGrpSpPr/>
+        <p:nvPr/>
+      </p:nvGrpSpPr>
+      <p:grpSpPr>
+        <a:xfrm>
+          <a:off x="0" y="0"/>
+          <a:ext cx="0" cy="0"/>
+          <a:chOff x="0" y="0"/>
+          <a:chExt cx="0" cy="0"/>
+        </a:xfrm>
+      </p:grpSpPr>
+      <p:grpSp>
+        <p:nvGrpSpPr>
+          <p:cNvPr id="14" name="Gruppieren 13">
+            <a:extLst>
+              <a:ext uri="{FF2B5EF4-FFF2-40B4-BE49-F238E27FC236}">
+                <a16:creationId xmlns:a16="http://schemas.microsoft.com/office/drawing/2014/main" id="{1FF5AB41-C51E-1B59-FA26-839019B262C1}"/>
+              </a:ext>
+            </a:extLst>
+          </p:cNvPr>
+          <p:cNvGrpSpPr/>
+          <p:nvPr/>
+        </p:nvGrpSpPr>
+        <p:grpSpPr>
+          <a:xfrm>
+            <a:off x="3063700" y="1759457"/>
+            <a:ext cx="297655" cy="495659"/>
+            <a:chOff x="2818943" y="1913621"/>
+            <a:chExt cx="297655" cy="495659"/>
+          </a:xfrm>
+        </p:grpSpPr>
+        <p:cxnSp>
+          <p:nvCxnSpPr>
+            <p:cNvPr id="7" name="Gerader Verbinder 6">
+              <a:extLst>
+                <a:ext uri="{FF2B5EF4-FFF2-40B4-BE49-F238E27FC236}">
+                  <a16:creationId xmlns:a16="http://schemas.microsoft.com/office/drawing/2014/main" id="{291C5C54-04FA-1DBB-515D-BE01F0E720F3}"/>
+                </a:ext>
+              </a:extLst>
+            </p:cNvPr>
+            <p:cNvCxnSpPr>
+              <a:cxnSpLocks/>
+            </p:cNvCxnSpPr>
+            <p:nvPr/>
+          </p:nvCxnSpPr>
+          <p:spPr>
+            <a:xfrm>
+              <a:off x="2917031" y="2152650"/>
+              <a:ext cx="132274" cy="0"/>
+            </a:xfrm>
+            <a:prstGeom prst="line">
+              <a:avLst/>
+            </a:prstGeom>
+            <a:ln w="9525" cap="rnd">
+              <a:round/>
+            </a:ln>
+          </p:spPr>
+          <p:style>
+            <a:lnRef idx="2">
+              <a:schemeClr val="dk1"/>
+            </a:lnRef>
+            <a:fillRef idx="0">
+              <a:schemeClr val="dk1"/>
+            </a:fillRef>
+            <a:effectRef idx="1">
+              <a:schemeClr val="dk1"/>
+            </a:effectRef>
+            <a:fontRef idx="minor">
+              <a:schemeClr val="tx1"/>
+            </a:fontRef>
+          </p:style>
+        </p:cxnSp>
+        <p:sp>
+          <p:nvSpPr>
+            <p:cNvPr id="9" name="Textfeld 8">
+              <a:extLst>
+                <a:ext uri="{FF2B5EF4-FFF2-40B4-BE49-F238E27FC236}">
+                  <a16:creationId xmlns:a16="http://schemas.microsoft.com/office/drawing/2014/main" id="{406D1307-7EEB-D40B-052B-CA4C2051E65C}"/>
+                </a:ext>
+              </a:extLst>
+            </p:cNvPr>
+            <p:cNvSpPr txBox="1"/>
+            <p:nvPr/>
+          </p:nvSpPr>
+          <p:spPr>
+            <a:xfrm>
+              <a:off x="2821323" y="1913621"/>
+              <a:ext cx="295275" cy="307777"/>
+            </a:xfrm>
+            <a:prstGeom prst="rect">
+              <a:avLst/>
+            </a:prstGeom>
+            <a:noFill/>
+          </p:spPr>
+          <p:txBody>
+            <a:bodyPr wrap="square" rtlCol="0">
+              <a:spAutoFit/>
+            </a:bodyPr>
+            <a:lstStyle/>
+            <a:p>
+              <a:pPr algn="ctr"/>
+              <a:r>
+                <a:rPr lang="de-DE" sz="1400" i="1" dirty="0">
+                  <a:latin typeface="CMU Serif" panose="02000603000000000000" pitchFamily="2" charset="0"/>
+                  <a:ea typeface="CMU Serif" panose="02000603000000000000" pitchFamily="2" charset="0"/>
+                  <a:cs typeface="CMU Serif" panose="02000603000000000000" pitchFamily="2" charset="0"/>
+                </a:rPr>
+                <a:t>x</a:t>
+              </a:r>
+            </a:p>
+          </p:txBody>
+        </p:sp>
+        <p:sp>
+          <p:nvSpPr>
+            <p:cNvPr id="11" name="Textfeld 10">
+              <a:extLst>
+                <a:ext uri="{FF2B5EF4-FFF2-40B4-BE49-F238E27FC236}">
+                  <a16:creationId xmlns:a16="http://schemas.microsoft.com/office/drawing/2014/main" id="{776B7766-B8B3-D65D-EBF6-1112AF9B688D}"/>
+                </a:ext>
+              </a:extLst>
+            </p:cNvPr>
+            <p:cNvSpPr txBox="1"/>
+            <p:nvPr/>
+          </p:nvSpPr>
+          <p:spPr>
+            <a:xfrm>
+              <a:off x="2818943" y="2101503"/>
+              <a:ext cx="295275" cy="307777"/>
+            </a:xfrm>
+            <a:prstGeom prst="rect">
+              <a:avLst/>
+            </a:prstGeom>
+            <a:noFill/>
+          </p:spPr>
+          <p:txBody>
+            <a:bodyPr wrap="square" rtlCol="0">
+              <a:spAutoFit/>
+            </a:bodyPr>
+            <a:lstStyle/>
+            <a:p>
+              <a:pPr algn="ctr"/>
+              <a:r>
+                <a:rPr lang="de-DE" sz="1400" i="1" dirty="0">
+                  <a:latin typeface="CMU Serif" panose="02000603000000000000" pitchFamily="2" charset="0"/>
+                  <a:ea typeface="CMU Serif" panose="02000603000000000000" pitchFamily="2" charset="0"/>
+                  <a:cs typeface="CMU Serif" panose="02000603000000000000" pitchFamily="2" charset="0"/>
+                </a:rPr>
+                <a:t>t</a:t>
+              </a:r>
+            </a:p>
+          </p:txBody>
+        </p:sp>
+        <p:cxnSp>
+          <p:nvCxnSpPr>
+            <p:cNvPr id="12" name="Gerader Verbinder 11">
+              <a:extLst>
+                <a:ext uri="{FF2B5EF4-FFF2-40B4-BE49-F238E27FC236}">
+                  <a16:creationId xmlns:a16="http://schemas.microsoft.com/office/drawing/2014/main" id="{0A546A60-0666-0455-B46B-B1601BFB1723}"/>
+                </a:ext>
+              </a:extLst>
+            </p:cNvPr>
+            <p:cNvCxnSpPr>
+              <a:cxnSpLocks/>
+            </p:cNvCxnSpPr>
+            <p:nvPr/>
+          </p:nvCxnSpPr>
+          <p:spPr>
+            <a:xfrm>
+              <a:off x="2961354" y="2006371"/>
+              <a:ext cx="45088" cy="0"/>
+            </a:xfrm>
+            <a:prstGeom prst="line">
+              <a:avLst/>
+            </a:prstGeom>
+            <a:ln w="6350" cap="sq">
+              <a:round/>
+            </a:ln>
+          </p:spPr>
+          <p:style>
+            <a:lnRef idx="2">
+              <a:schemeClr val="dk1"/>
+            </a:lnRef>
+            <a:fillRef idx="0">
+              <a:schemeClr val="dk1"/>
+            </a:fillRef>
+            <a:effectRef idx="1">
+              <a:schemeClr val="dk1"/>
+            </a:effectRef>
+            <a:fontRef idx="minor">
+              <a:schemeClr val="tx1"/>
+            </a:fontRef>
+          </p:style>
+        </p:cxnSp>
+      </p:grpSp>
+      <p:grpSp>
+        <p:nvGrpSpPr>
+          <p:cNvPr id="15" name="Gruppieren 14">
+            <a:extLst>
+              <a:ext uri="{FF2B5EF4-FFF2-40B4-BE49-F238E27FC236}">
+                <a16:creationId xmlns:a16="http://schemas.microsoft.com/office/drawing/2014/main" id="{F4B4208C-DBC2-5F12-63C3-B8F1F4AFEF0A}"/>
+              </a:ext>
+            </a:extLst>
+          </p:cNvPr>
+          <p:cNvGrpSpPr/>
+          <p:nvPr/>
+        </p:nvGrpSpPr>
+        <p:grpSpPr>
+          <a:xfrm>
+            <a:off x="214518" y="746425"/>
+            <a:ext cx="370706" cy="492860"/>
+            <a:chOff x="2792428" y="1913091"/>
+            <a:chExt cx="370706" cy="492860"/>
+          </a:xfrm>
+        </p:grpSpPr>
+        <p:cxnSp>
+          <p:nvCxnSpPr>
+            <p:cNvPr id="16" name="Gerader Verbinder 15">
+              <a:extLst>
+                <a:ext uri="{FF2B5EF4-FFF2-40B4-BE49-F238E27FC236}">
+                  <a16:creationId xmlns:a16="http://schemas.microsoft.com/office/drawing/2014/main" id="{0C832285-B7CF-8BAF-2207-D834CAAD9205}"/>
+                </a:ext>
+              </a:extLst>
+            </p:cNvPr>
+            <p:cNvCxnSpPr>
+              <a:cxnSpLocks/>
+            </p:cNvCxnSpPr>
+            <p:nvPr/>
+          </p:nvCxnSpPr>
+          <p:spPr>
+            <a:xfrm>
+              <a:off x="2917031" y="2152650"/>
+              <a:ext cx="134145" cy="0"/>
+            </a:xfrm>
+            <a:prstGeom prst="line">
+              <a:avLst/>
+            </a:prstGeom>
+            <a:ln w="9525" cap="rnd">
+              <a:round/>
+            </a:ln>
+          </p:spPr>
+          <p:style>
+            <a:lnRef idx="2">
+              <a:schemeClr val="dk1"/>
+            </a:lnRef>
+            <a:fillRef idx="0">
+              <a:schemeClr val="dk1"/>
+            </a:fillRef>
+            <a:effectRef idx="1">
+              <a:schemeClr val="dk1"/>
+            </a:effectRef>
+            <a:fontRef idx="minor">
+              <a:schemeClr val="tx1"/>
+            </a:fontRef>
+          </p:style>
+        </p:cxnSp>
+        <p:sp>
+          <p:nvSpPr>
+            <p:cNvPr id="17" name="Textfeld 16">
+              <a:extLst>
+                <a:ext uri="{FF2B5EF4-FFF2-40B4-BE49-F238E27FC236}">
+                  <a16:creationId xmlns:a16="http://schemas.microsoft.com/office/drawing/2014/main" id="{C5F70A09-FB60-6E25-C848-8435CD3BB1AB}"/>
+                </a:ext>
+              </a:extLst>
+            </p:cNvPr>
+            <p:cNvSpPr txBox="1"/>
+            <p:nvPr/>
+          </p:nvSpPr>
+          <p:spPr>
+            <a:xfrm>
+              <a:off x="2792428" y="1913091"/>
+              <a:ext cx="370706" cy="307777"/>
+            </a:xfrm>
+            <a:prstGeom prst="rect">
+              <a:avLst/>
+            </a:prstGeom>
+            <a:noFill/>
+          </p:spPr>
+          <p:txBody>
+            <a:bodyPr wrap="square" rtlCol="0">
+              <a:spAutoFit/>
+            </a:bodyPr>
+            <a:lstStyle/>
+            <a:p>
+              <a:pPr algn="ctr"/>
+              <a:r>
+                <a:rPr lang="de-DE" sz="1400" i="1" dirty="0" err="1">
+                  <a:latin typeface="CMU Serif" panose="02000603000000000000" pitchFamily="2" charset="0"/>
+                  <a:ea typeface="CMU Serif" panose="02000603000000000000" pitchFamily="2" charset="0"/>
+                  <a:cs typeface="CMU Serif" panose="02000603000000000000" pitchFamily="2" charset="0"/>
+                </a:rPr>
+                <a:t>w</a:t>
+              </a:r>
+              <a:r>
+                <a:rPr lang="de-DE" sz="1400" i="1" baseline="-25000" dirty="0" err="1">
+                  <a:latin typeface="CMU Serif" panose="02000603000000000000" pitchFamily="2" charset="0"/>
+                  <a:ea typeface="CMU Serif" panose="02000603000000000000" pitchFamily="2" charset="0"/>
+                  <a:cs typeface="CMU Serif" panose="02000603000000000000" pitchFamily="2" charset="0"/>
+                </a:rPr>
+                <a:t>i</a:t>
+              </a:r>
+              <a:endParaRPr lang="de-DE" sz="1400" i="1" baseline="-25000" dirty="0">
+                <a:latin typeface="CMU Serif" panose="02000603000000000000" pitchFamily="2" charset="0"/>
+                <a:ea typeface="CMU Serif" panose="02000603000000000000" pitchFamily="2" charset="0"/>
+                <a:cs typeface="CMU Serif" panose="02000603000000000000" pitchFamily="2" charset="0"/>
+              </a:endParaRPr>
+            </a:p>
+          </p:txBody>
+        </p:sp>
+        <p:sp>
+          <p:nvSpPr>
+            <p:cNvPr id="18" name="Textfeld 17">
+              <a:extLst>
+                <a:ext uri="{FF2B5EF4-FFF2-40B4-BE49-F238E27FC236}">
+                  <a16:creationId xmlns:a16="http://schemas.microsoft.com/office/drawing/2014/main" id="{4ECB5D55-6B12-500A-1A65-D2DD65DD8AA1}"/>
+                </a:ext>
+              </a:extLst>
+            </p:cNvPr>
+            <p:cNvSpPr txBox="1"/>
+            <p:nvPr/>
+          </p:nvSpPr>
+          <p:spPr>
+            <a:xfrm>
+              <a:off x="2815033" y="2098174"/>
+              <a:ext cx="295275" cy="307777"/>
+            </a:xfrm>
+            <a:prstGeom prst="rect">
+              <a:avLst/>
+            </a:prstGeom>
+            <a:noFill/>
+          </p:spPr>
+          <p:txBody>
+            <a:bodyPr wrap="square" rtlCol="0">
+              <a:spAutoFit/>
+            </a:bodyPr>
+            <a:lstStyle/>
+            <a:p>
+              <a:pPr algn="ctr"/>
+              <a:r>
+                <a:rPr lang="de-DE" sz="1400" i="1" dirty="0">
+                  <a:latin typeface="CMU Serif" panose="02000603000000000000" pitchFamily="2" charset="0"/>
+                  <a:ea typeface="CMU Serif" panose="02000603000000000000" pitchFamily="2" charset="0"/>
+                  <a:cs typeface="CMU Serif" panose="02000603000000000000" pitchFamily="2" charset="0"/>
+                </a:rPr>
+                <a:t>t</a:t>
+              </a:r>
+            </a:p>
+          </p:txBody>
+        </p:sp>
+      </p:grpSp>
+      <p:cxnSp>
+        <p:nvCxnSpPr>
+          <p:cNvPr id="3" name="Gerade Verbindung mit Pfeil 2">
+            <a:extLst>
+              <a:ext uri="{FF2B5EF4-FFF2-40B4-BE49-F238E27FC236}">
+                <a16:creationId xmlns:a16="http://schemas.microsoft.com/office/drawing/2014/main" id="{FDCC2E98-C548-DE2D-63FD-15F1E1E7660D}"/>
+              </a:ext>
+            </a:extLst>
+          </p:cNvPr>
+          <p:cNvCxnSpPr>
+            <a:cxnSpLocks/>
+          </p:cNvCxnSpPr>
+          <p:nvPr/>
+        </p:nvCxnSpPr>
+        <p:spPr>
+          <a:xfrm flipV="1">
+            <a:off x="584660" y="921543"/>
+            <a:ext cx="0" cy="1824039"/>
+          </a:xfrm>
+          <a:prstGeom prst="straightConnector1">
+            <a:avLst/>
+          </a:prstGeom>
+          <a:ln cap="rnd">
+            <a:round/>
+            <a:tailEnd type="triangle"/>
+          </a:ln>
+        </p:spPr>
+        <p:style>
+          <a:lnRef idx="2">
+            <a:schemeClr val="dk1"/>
+          </a:lnRef>
+          <a:fillRef idx="0">
+            <a:schemeClr val="dk1"/>
+          </a:fillRef>
+          <a:effectRef idx="1">
+            <a:schemeClr val="dk1"/>
+          </a:effectRef>
+          <a:fontRef idx="minor">
+            <a:schemeClr val="tx1"/>
+          </a:fontRef>
+        </p:style>
+      </p:cxnSp>
+      <p:cxnSp>
+        <p:nvCxnSpPr>
+          <p:cNvPr id="4" name="Gerade Verbindung mit Pfeil 3">
+            <a:extLst>
+              <a:ext uri="{FF2B5EF4-FFF2-40B4-BE49-F238E27FC236}">
+                <a16:creationId xmlns:a16="http://schemas.microsoft.com/office/drawing/2014/main" id="{3C7E6E52-95C6-7607-4FFF-A181341367D0}"/>
+              </a:ext>
+            </a:extLst>
+          </p:cNvPr>
+          <p:cNvCxnSpPr>
+            <a:cxnSpLocks/>
+          </p:cNvCxnSpPr>
+          <p:nvPr/>
+        </p:nvCxnSpPr>
+        <p:spPr>
+          <a:xfrm>
+            <a:off x="584660" y="2000020"/>
+            <a:ext cx="2506536" cy="0"/>
+          </a:xfrm>
+          <a:prstGeom prst="straightConnector1">
+            <a:avLst/>
+          </a:prstGeom>
+          <a:ln cap="rnd">
+            <a:round/>
+            <a:tailEnd type="triangle"/>
+          </a:ln>
+        </p:spPr>
+        <p:style>
+          <a:lnRef idx="2">
+            <a:schemeClr val="dk1"/>
+          </a:lnRef>
+          <a:fillRef idx="0">
+            <a:schemeClr val="dk1"/>
+          </a:fillRef>
+          <a:effectRef idx="1">
+            <a:schemeClr val="dk1"/>
+          </a:effectRef>
+          <a:fontRef idx="minor">
+            <a:schemeClr val="tx1"/>
+          </a:fontRef>
+        </p:style>
+      </p:cxnSp>
+      <p:cxnSp>
+        <p:nvCxnSpPr>
+          <p:cNvPr id="35" name="Gerader Verbinder 34">
+            <a:extLst>
+              <a:ext uri="{FF2B5EF4-FFF2-40B4-BE49-F238E27FC236}">
+                <a16:creationId xmlns:a16="http://schemas.microsoft.com/office/drawing/2014/main" id="{17409D2F-7A0C-169C-CE3B-FA6E0E3EF0E6}"/>
+              </a:ext>
+            </a:extLst>
+          </p:cNvPr>
+          <p:cNvCxnSpPr>
+            <a:cxnSpLocks/>
+          </p:cNvCxnSpPr>
+          <p:nvPr/>
+        </p:nvCxnSpPr>
+        <p:spPr>
+          <a:xfrm flipV="1">
+            <a:off x="2858293" y="1943117"/>
+            <a:ext cx="0" cy="109521"/>
+          </a:xfrm>
+          <a:prstGeom prst="line">
+            <a:avLst/>
+          </a:prstGeom>
+          <a:ln w="12700" cap="rnd">
+            <a:solidFill>
+              <a:schemeClr val="tx1"/>
+            </a:solidFill>
+            <a:prstDash val="solid"/>
+            <a:round/>
+          </a:ln>
+        </p:spPr>
+        <p:style>
+          <a:lnRef idx="2">
+            <a:schemeClr val="accent1"/>
+          </a:lnRef>
+          <a:fillRef idx="0">
+            <a:schemeClr val="accent1"/>
+          </a:fillRef>
+          <a:effectRef idx="1">
+            <a:schemeClr val="accent1"/>
+          </a:effectRef>
+          <a:fontRef idx="minor">
+            <a:schemeClr val="tx1"/>
+          </a:fontRef>
+        </p:style>
+      </p:cxnSp>
+      <p:sp>
+        <p:nvSpPr>
+          <p:cNvPr id="47" name="Textfeld 46">
+            <a:extLst>
+              <a:ext uri="{FF2B5EF4-FFF2-40B4-BE49-F238E27FC236}">
+                <a16:creationId xmlns:a16="http://schemas.microsoft.com/office/drawing/2014/main" id="{EDFC3AB1-DA71-6A3A-57CD-408A606EEADF}"/>
+              </a:ext>
+            </a:extLst>
+          </p:cNvPr>
+          <p:cNvSpPr txBox="1"/>
+          <p:nvPr/>
+        </p:nvSpPr>
+        <p:spPr>
+          <a:xfrm>
+            <a:off x="2712839" y="2038660"/>
+            <a:ext cx="295275" cy="307777"/>
+          </a:xfrm>
+          <a:prstGeom prst="rect">
+            <a:avLst/>
+          </a:prstGeom>
+          <a:noFill/>
+        </p:spPr>
+        <p:txBody>
+          <a:bodyPr wrap="square" rtlCol="0">
+            <a:spAutoFit/>
+          </a:bodyPr>
+          <a:lstStyle/>
+          <a:p>
+            <a:pPr algn="ctr"/>
+            <a:r>
+              <a:rPr lang="de-DE" sz="1400" dirty="0">
+                <a:latin typeface="CMU Serif" panose="02000603000000000000" pitchFamily="2" charset="0"/>
+                <a:ea typeface="CMU Serif" panose="02000603000000000000" pitchFamily="2" charset="0"/>
+                <a:cs typeface="CMU Serif" panose="02000603000000000000" pitchFamily="2" charset="0"/>
+              </a:rPr>
+              <a:t>1</a:t>
+            </a:r>
+          </a:p>
+        </p:txBody>
+      </p:sp>
+      <p:sp>
+        <p:nvSpPr>
+          <p:cNvPr id="8" name="Textfeld 7">
+            <a:extLst>
+              <a:ext uri="{FF2B5EF4-FFF2-40B4-BE49-F238E27FC236}">
+                <a16:creationId xmlns:a16="http://schemas.microsoft.com/office/drawing/2014/main" id="{246D3696-03E6-FB87-DBA2-C2EB57E89DE5}"/>
+              </a:ext>
+            </a:extLst>
+          </p:cNvPr>
+          <p:cNvSpPr txBox="1"/>
+          <p:nvPr/>
+        </p:nvSpPr>
+        <p:spPr>
+          <a:xfrm>
+            <a:off x="1471974" y="2458891"/>
+            <a:ext cx="512970" cy="261610"/>
+          </a:xfrm>
+          <a:prstGeom prst="rect">
+            <a:avLst/>
+          </a:prstGeom>
+          <a:noFill/>
+        </p:spPr>
+        <p:txBody>
+          <a:bodyPr wrap="square" rtlCol="0">
+            <a:spAutoFit/>
+          </a:bodyPr>
+          <a:lstStyle/>
+          <a:p>
+            <a:pPr algn="ctr"/>
+            <a:r>
+              <a:rPr lang="de-DE" sz="1100" i="1" dirty="0">
+                <a:solidFill>
+                  <a:schemeClr val="tx2">
+                    <a:lumMod val="75000"/>
+                    <a:lumOff val="25000"/>
+                  </a:schemeClr>
+                </a:solidFill>
+                <a:latin typeface="CMU Serif" panose="02000603000000000000" pitchFamily="2" charset="0"/>
+                <a:ea typeface="CMU Serif" panose="02000603000000000000" pitchFamily="2" charset="0"/>
+                <a:cs typeface="CMU Serif" panose="02000603000000000000" pitchFamily="2" charset="0"/>
+              </a:rPr>
+              <a:t>i</a:t>
+            </a:r>
+            <a:r>
+              <a:rPr lang="de-DE" sz="1100" dirty="0">
+                <a:solidFill>
+                  <a:schemeClr val="tx2">
+                    <a:lumMod val="75000"/>
+                    <a:lumOff val="25000"/>
+                  </a:schemeClr>
+                </a:solidFill>
+                <a:latin typeface="CMU Serif" panose="02000603000000000000" pitchFamily="2" charset="0"/>
+                <a:ea typeface="CMU Serif" panose="02000603000000000000" pitchFamily="2" charset="0"/>
+                <a:cs typeface="CMU Serif" panose="02000603000000000000" pitchFamily="2" charset="0"/>
+              </a:rPr>
+              <a:t> = 0</a:t>
+            </a:r>
+          </a:p>
+        </p:txBody>
+      </p:sp>
+      <p:sp>
+        <p:nvSpPr>
+          <p:cNvPr id="10" name="Textfeld 9">
+            <a:extLst>
+              <a:ext uri="{FF2B5EF4-FFF2-40B4-BE49-F238E27FC236}">
+                <a16:creationId xmlns:a16="http://schemas.microsoft.com/office/drawing/2014/main" id="{60337EBA-A3A7-313C-CB8F-4AA239969B60}"/>
+              </a:ext>
+            </a:extLst>
+          </p:cNvPr>
+          <p:cNvSpPr txBox="1"/>
+          <p:nvPr/>
+        </p:nvSpPr>
+        <p:spPr>
+          <a:xfrm>
+            <a:off x="1647119" y="2174233"/>
+            <a:ext cx="1264548" cy="261610"/>
+          </a:xfrm>
+          <a:prstGeom prst="rect">
+            <a:avLst/>
+          </a:prstGeom>
+          <a:noFill/>
+        </p:spPr>
+        <p:txBody>
+          <a:bodyPr wrap="square" rtlCol="0">
+            <a:spAutoFit/>
+          </a:bodyPr>
+          <a:lstStyle/>
+          <a:p>
+            <a:pPr algn="ctr"/>
+            <a:r>
+              <a:rPr lang="de-DE" sz="1100" i="1" dirty="0">
+                <a:solidFill>
+                  <a:schemeClr val="accent6">
+                    <a:lumMod val="75000"/>
+                  </a:schemeClr>
+                </a:solidFill>
+                <a:latin typeface="CMU Serif" panose="02000603000000000000" pitchFamily="2" charset="0"/>
+                <a:ea typeface="CMU Serif" panose="02000603000000000000" pitchFamily="2" charset="0"/>
+                <a:cs typeface="CMU Serif" panose="02000603000000000000" pitchFamily="2" charset="0"/>
+              </a:rPr>
+              <a:t>i</a:t>
+            </a:r>
+            <a:r>
+              <a:rPr lang="de-DE" sz="1100" dirty="0">
+                <a:solidFill>
+                  <a:schemeClr val="accent6">
+                    <a:lumMod val="75000"/>
+                  </a:schemeClr>
+                </a:solidFill>
+                <a:latin typeface="CMU Serif" panose="02000603000000000000" pitchFamily="2" charset="0"/>
+                <a:ea typeface="CMU Serif" panose="02000603000000000000" pitchFamily="2" charset="0"/>
+                <a:cs typeface="CMU Serif" panose="02000603000000000000" pitchFamily="2" charset="0"/>
+              </a:rPr>
+              <a:t> = 1</a:t>
+            </a:r>
+          </a:p>
+        </p:txBody>
+      </p:sp>
+      <p:sp>
+        <p:nvSpPr>
+          <p:cNvPr id="22" name="Textfeld 21">
+            <a:extLst>
+              <a:ext uri="{FF2B5EF4-FFF2-40B4-BE49-F238E27FC236}">
+                <a16:creationId xmlns:a16="http://schemas.microsoft.com/office/drawing/2014/main" id="{EF9059F7-0934-5AF3-94A9-CE9BA0F59D22}"/>
+              </a:ext>
+            </a:extLst>
+          </p:cNvPr>
+          <p:cNvSpPr txBox="1"/>
+          <p:nvPr/>
+        </p:nvSpPr>
+        <p:spPr>
+          <a:xfrm>
+            <a:off x="2207044" y="1448823"/>
+            <a:ext cx="512970" cy="261610"/>
+          </a:xfrm>
+          <a:prstGeom prst="rect">
+            <a:avLst/>
+          </a:prstGeom>
+          <a:noFill/>
+        </p:spPr>
+        <p:txBody>
+          <a:bodyPr wrap="square" rtlCol="0">
+            <a:spAutoFit/>
+          </a:bodyPr>
+          <a:lstStyle/>
+          <a:p>
+            <a:pPr algn="ctr"/>
+            <a:r>
+              <a:rPr lang="de-DE" sz="1100" i="1" dirty="0">
+                <a:solidFill>
+                  <a:schemeClr val="accent2">
+                    <a:lumMod val="75000"/>
+                  </a:schemeClr>
+                </a:solidFill>
+                <a:latin typeface="CMU Serif" panose="02000603000000000000" pitchFamily="2" charset="0"/>
+                <a:ea typeface="CMU Serif" panose="02000603000000000000" pitchFamily="2" charset="0"/>
+                <a:cs typeface="CMU Serif" panose="02000603000000000000" pitchFamily="2" charset="0"/>
+              </a:rPr>
+              <a:t>i</a:t>
+            </a:r>
+            <a:r>
+              <a:rPr lang="de-DE" sz="1100" dirty="0">
+                <a:solidFill>
+                  <a:schemeClr val="accent2">
+                    <a:lumMod val="75000"/>
+                  </a:schemeClr>
+                </a:solidFill>
+                <a:latin typeface="CMU Serif" panose="02000603000000000000" pitchFamily="2" charset="0"/>
+                <a:ea typeface="CMU Serif" panose="02000603000000000000" pitchFamily="2" charset="0"/>
+                <a:cs typeface="CMU Serif" panose="02000603000000000000" pitchFamily="2" charset="0"/>
+              </a:rPr>
+              <a:t> = 2</a:t>
+            </a:r>
+          </a:p>
+        </p:txBody>
+      </p:sp>
+      <p:cxnSp>
+        <p:nvCxnSpPr>
+          <p:cNvPr id="19" name="Gerader Verbinder 18">
+            <a:extLst>
+              <a:ext uri="{FF2B5EF4-FFF2-40B4-BE49-F238E27FC236}">
+                <a16:creationId xmlns:a16="http://schemas.microsoft.com/office/drawing/2014/main" id="{55DA62EC-2950-994C-A3E1-72EB5ED33B1C}"/>
+              </a:ext>
+            </a:extLst>
+          </p:cNvPr>
+          <p:cNvCxnSpPr/>
+          <p:nvPr/>
+        </p:nvCxnSpPr>
+        <p:spPr>
+          <a:xfrm>
+            <a:off x="584660" y="2458891"/>
+            <a:ext cx="2273633" cy="0"/>
+          </a:xfrm>
+          <a:prstGeom prst="line">
+            <a:avLst/>
+          </a:prstGeom>
+          <a:ln cap="rnd">
+            <a:solidFill>
+              <a:schemeClr val="tx2">
+                <a:lumMod val="75000"/>
+                <a:lumOff val="25000"/>
+              </a:schemeClr>
+            </a:solidFill>
+            <a:round/>
+          </a:ln>
+        </p:spPr>
+        <p:style>
+          <a:lnRef idx="2">
+            <a:schemeClr val="accent1"/>
+          </a:lnRef>
+          <a:fillRef idx="0">
+            <a:schemeClr val="accent1"/>
+          </a:fillRef>
+          <a:effectRef idx="1">
+            <a:schemeClr val="accent1"/>
+          </a:effectRef>
+          <a:fontRef idx="minor">
+            <a:schemeClr val="tx1"/>
+          </a:fontRef>
+        </p:style>
+      </p:cxnSp>
+      <p:sp>
+        <p:nvSpPr>
+          <p:cNvPr id="21" name="Textfeld 20">
+            <a:extLst>
+              <a:ext uri="{FF2B5EF4-FFF2-40B4-BE49-F238E27FC236}">
+                <a16:creationId xmlns:a16="http://schemas.microsoft.com/office/drawing/2014/main" id="{E06F970F-7CF7-9A90-94DF-C282D2803731}"/>
+              </a:ext>
+            </a:extLst>
+          </p:cNvPr>
+          <p:cNvSpPr txBox="1"/>
+          <p:nvPr/>
+        </p:nvSpPr>
+        <p:spPr>
+          <a:xfrm>
+            <a:off x="2835739" y="2328086"/>
+            <a:ext cx="583653" cy="261610"/>
+          </a:xfrm>
+          <a:prstGeom prst="rect">
+            <a:avLst/>
+          </a:prstGeom>
+          <a:noFill/>
+        </p:spPr>
+        <p:txBody>
+          <a:bodyPr wrap="square" rtlCol="0">
+            <a:spAutoFit/>
+          </a:bodyPr>
+          <a:lstStyle/>
+          <a:p>
+            <a:pPr algn="ctr"/>
+            <a:r>
+              <a:rPr lang="de-DE" sz="1100" dirty="0" err="1">
+                <a:solidFill>
+                  <a:schemeClr val="tx2">
+                    <a:lumMod val="75000"/>
+                    <a:lumOff val="25000"/>
+                  </a:schemeClr>
+                </a:solidFill>
+                <a:latin typeface="CMU Serif" panose="02000603000000000000" pitchFamily="2" charset="0"/>
+                <a:ea typeface="CMU Serif" panose="02000603000000000000" pitchFamily="2" charset="0"/>
+                <a:cs typeface="CMU Serif" panose="02000603000000000000" pitchFamily="2" charset="0"/>
+              </a:rPr>
+              <a:t>const</a:t>
+            </a:r>
+            <a:r>
+              <a:rPr lang="de-DE" sz="1100" dirty="0">
+                <a:solidFill>
+                  <a:schemeClr val="tx2">
+                    <a:lumMod val="75000"/>
+                    <a:lumOff val="25000"/>
+                  </a:schemeClr>
+                </a:solidFill>
+                <a:latin typeface="CMU Serif" panose="02000603000000000000" pitchFamily="2" charset="0"/>
+                <a:ea typeface="CMU Serif" panose="02000603000000000000" pitchFamily="2" charset="0"/>
+                <a:cs typeface="CMU Serif" panose="02000603000000000000" pitchFamily="2" charset="0"/>
+              </a:rPr>
+              <a:t>.</a:t>
+            </a:r>
+          </a:p>
+        </p:txBody>
+      </p:sp>
+      <p:sp>
+        <p:nvSpPr>
+          <p:cNvPr id="23" name="Textfeld 22">
+            <a:extLst>
+              <a:ext uri="{FF2B5EF4-FFF2-40B4-BE49-F238E27FC236}">
+                <a16:creationId xmlns:a16="http://schemas.microsoft.com/office/drawing/2014/main" id="{3BAED1A0-8ACA-1A8A-8A14-9165903490F6}"/>
+              </a:ext>
+            </a:extLst>
+          </p:cNvPr>
+          <p:cNvSpPr txBox="1"/>
+          <p:nvPr/>
+        </p:nvSpPr>
+        <p:spPr>
+          <a:xfrm>
+            <a:off x="150383" y="2328086"/>
+            <a:ext cx="441952" cy="261610"/>
+          </a:xfrm>
+          <a:prstGeom prst="rect">
+            <a:avLst/>
+          </a:prstGeom>
+          <a:noFill/>
+        </p:spPr>
+        <p:txBody>
+          <a:bodyPr wrap="square" rtlCol="0">
+            <a:spAutoFit/>
+          </a:bodyPr>
+          <a:lstStyle/>
+          <a:p>
+            <a:pPr algn="ctr"/>
+            <a:r>
+              <a:rPr lang="de-DE" sz="1100" dirty="0">
+                <a:solidFill>
+                  <a:schemeClr val="tx2">
+                    <a:lumMod val="75000"/>
+                    <a:lumOff val="25000"/>
+                  </a:schemeClr>
+                </a:solidFill>
+                <a:latin typeface="CMU Serif" panose="02000603000000000000" pitchFamily="2" charset="0"/>
+                <a:ea typeface="CMU Serif" panose="02000603000000000000" pitchFamily="2" charset="0"/>
+                <a:cs typeface="CMU Serif" panose="02000603000000000000" pitchFamily="2" charset="0"/>
+              </a:rPr>
+              <a:t>−</a:t>
+            </a:r>
+            <a:r>
+              <a:rPr lang="de-DE" sz="1100" i="1" dirty="0">
+                <a:solidFill>
+                  <a:schemeClr val="tx2">
+                    <a:lumMod val="75000"/>
+                    <a:lumOff val="25000"/>
+                  </a:schemeClr>
+                </a:solidFill>
+                <a:latin typeface="CMU Serif" panose="02000603000000000000" pitchFamily="2" charset="0"/>
+                <a:ea typeface="CMU Serif" panose="02000603000000000000" pitchFamily="2" charset="0"/>
+                <a:cs typeface="CMU Serif" panose="02000603000000000000" pitchFamily="2" charset="0"/>
+              </a:rPr>
+              <a:t>A</a:t>
+            </a:r>
+            <a:r>
+              <a:rPr lang="de-DE" sz="1100" baseline="-25000" dirty="0">
+                <a:solidFill>
+                  <a:schemeClr val="tx2">
+                    <a:lumMod val="75000"/>
+                    <a:lumOff val="25000"/>
+                  </a:schemeClr>
+                </a:solidFill>
+                <a:latin typeface="CMU Serif" panose="02000603000000000000" pitchFamily="2" charset="0"/>
+                <a:ea typeface="CMU Serif" panose="02000603000000000000" pitchFamily="2" charset="0"/>
+                <a:cs typeface="CMU Serif" panose="02000603000000000000" pitchFamily="2" charset="0"/>
+              </a:rPr>
+              <a:t>0</a:t>
+            </a:r>
+            <a:endParaRPr lang="de-DE" sz="1100" dirty="0">
+              <a:solidFill>
+                <a:schemeClr val="tx2">
+                  <a:lumMod val="75000"/>
+                  <a:lumOff val="25000"/>
+                </a:schemeClr>
+              </a:solidFill>
+              <a:latin typeface="CMU Serif" panose="02000603000000000000" pitchFamily="2" charset="0"/>
+              <a:ea typeface="CMU Serif" panose="02000603000000000000" pitchFamily="2" charset="0"/>
+              <a:cs typeface="CMU Serif" panose="02000603000000000000" pitchFamily="2" charset="0"/>
+            </a:endParaRPr>
+          </a:p>
+        </p:txBody>
+      </p:sp>
+      <p:cxnSp>
+        <p:nvCxnSpPr>
+          <p:cNvPr id="25" name="Gerader Verbinder 24">
+            <a:extLst>
+              <a:ext uri="{FF2B5EF4-FFF2-40B4-BE49-F238E27FC236}">
+                <a16:creationId xmlns:a16="http://schemas.microsoft.com/office/drawing/2014/main" id="{AD0E8EA6-C88C-D358-666A-7D2794EFD00F}"/>
+              </a:ext>
+            </a:extLst>
+          </p:cNvPr>
+          <p:cNvCxnSpPr>
+            <a:cxnSpLocks/>
+          </p:cNvCxnSpPr>
+          <p:nvPr/>
+        </p:nvCxnSpPr>
+        <p:spPr>
+          <a:xfrm>
+            <a:off x="584097" y="1682455"/>
+            <a:ext cx="2275308" cy="626405"/>
+          </a:xfrm>
+          <a:prstGeom prst="line">
+            <a:avLst/>
+          </a:prstGeom>
+          <a:ln cap="rnd">
+            <a:solidFill>
+              <a:schemeClr val="accent6">
+                <a:lumMod val="75000"/>
+              </a:schemeClr>
+            </a:solidFill>
+            <a:round/>
+          </a:ln>
+        </p:spPr>
+        <p:style>
+          <a:lnRef idx="2">
+            <a:schemeClr val="accent1"/>
+          </a:lnRef>
+          <a:fillRef idx="0">
+            <a:schemeClr val="accent1"/>
+          </a:fillRef>
+          <a:effectRef idx="1">
+            <a:schemeClr val="accent1"/>
+          </a:effectRef>
+          <a:fontRef idx="minor">
+            <a:schemeClr val="tx1"/>
+          </a:fontRef>
+        </p:style>
+      </p:cxnSp>
+      <p:sp>
+        <p:nvSpPr>
+          <p:cNvPr id="30" name="Textfeld 29">
+            <a:extLst>
+              <a:ext uri="{FF2B5EF4-FFF2-40B4-BE49-F238E27FC236}">
+                <a16:creationId xmlns:a16="http://schemas.microsoft.com/office/drawing/2014/main" id="{038BC301-9199-A40E-01CE-45C85B8A985B}"/>
+              </a:ext>
+            </a:extLst>
+          </p:cNvPr>
+          <p:cNvSpPr txBox="1"/>
+          <p:nvPr/>
+        </p:nvSpPr>
+        <p:spPr>
+          <a:xfrm>
+            <a:off x="150383" y="1551651"/>
+            <a:ext cx="441952" cy="261610"/>
+          </a:xfrm>
+          <a:prstGeom prst="rect">
+            <a:avLst/>
+          </a:prstGeom>
+          <a:noFill/>
+        </p:spPr>
+        <p:txBody>
+          <a:bodyPr wrap="square" rtlCol="0">
+            <a:spAutoFit/>
+          </a:bodyPr>
+          <a:lstStyle/>
+          <a:p>
+            <a:pPr algn="ctr"/>
+            <a:r>
+              <a:rPr lang="de-DE" sz="1100" dirty="0">
+                <a:solidFill>
+                  <a:schemeClr val="accent6">
+                    <a:lumMod val="75000"/>
+                  </a:schemeClr>
+                </a:solidFill>
+                <a:latin typeface="CMU Serif" panose="02000603000000000000" pitchFamily="2" charset="0"/>
+                <a:ea typeface="CMU Serif" panose="02000603000000000000" pitchFamily="2" charset="0"/>
+                <a:cs typeface="CMU Serif" panose="02000603000000000000" pitchFamily="2" charset="0"/>
+              </a:rPr>
+              <a:t>+</a:t>
+            </a:r>
+            <a:r>
+              <a:rPr lang="de-DE" sz="1100" i="1" dirty="0">
+                <a:solidFill>
+                  <a:schemeClr val="accent6">
+                    <a:lumMod val="75000"/>
+                  </a:schemeClr>
+                </a:solidFill>
+                <a:latin typeface="CMU Serif" panose="02000603000000000000" pitchFamily="2" charset="0"/>
+                <a:ea typeface="CMU Serif" panose="02000603000000000000" pitchFamily="2" charset="0"/>
+                <a:cs typeface="CMU Serif" panose="02000603000000000000" pitchFamily="2" charset="0"/>
+              </a:rPr>
+              <a:t>A</a:t>
+            </a:r>
+            <a:r>
+              <a:rPr lang="de-DE" sz="1100" baseline="-25000" dirty="0">
+                <a:solidFill>
+                  <a:schemeClr val="accent6">
+                    <a:lumMod val="75000"/>
+                  </a:schemeClr>
+                </a:solidFill>
+                <a:latin typeface="CMU Serif" panose="02000603000000000000" pitchFamily="2" charset="0"/>
+                <a:ea typeface="CMU Serif" panose="02000603000000000000" pitchFamily="2" charset="0"/>
+                <a:cs typeface="CMU Serif" panose="02000603000000000000" pitchFamily="2" charset="0"/>
+              </a:rPr>
+              <a:t>1</a:t>
+            </a:r>
+            <a:endParaRPr lang="de-DE" sz="1100" dirty="0">
+              <a:solidFill>
+                <a:schemeClr val="accent6">
+                  <a:lumMod val="75000"/>
+                </a:schemeClr>
+              </a:solidFill>
+              <a:latin typeface="CMU Serif" panose="02000603000000000000" pitchFamily="2" charset="0"/>
+              <a:ea typeface="CMU Serif" panose="02000603000000000000" pitchFamily="2" charset="0"/>
+              <a:cs typeface="CMU Serif" panose="02000603000000000000" pitchFamily="2" charset="0"/>
+            </a:endParaRPr>
+          </a:p>
+        </p:txBody>
+      </p:sp>
+      <p:sp>
+        <p:nvSpPr>
+          <p:cNvPr id="31" name="Freihandform: Form 30">
+            <a:extLst>
+              <a:ext uri="{FF2B5EF4-FFF2-40B4-BE49-F238E27FC236}">
+                <a16:creationId xmlns:a16="http://schemas.microsoft.com/office/drawing/2014/main" id="{6E96D426-6209-6457-36A2-072C456F1E67}"/>
+              </a:ext>
+            </a:extLst>
+          </p:cNvPr>
+          <p:cNvSpPr/>
+          <p:nvPr/>
+        </p:nvSpPr>
+        <p:spPr>
+          <a:xfrm>
+            <a:off x="584890" y="1482161"/>
+            <a:ext cx="2273404" cy="766923"/>
+          </a:xfrm>
+          <a:custGeom>
+            <a:avLst/>
+            <a:gdLst>
+              <a:gd name="csX0" fmla="*/ 0 w 2128007"/>
+              <a:gd name="csY0" fmla="*/ 0 h 755951"/>
+              <a:gd name="csX1" fmla="*/ 1093592 w 2128007"/>
+              <a:gd name="csY1" fmla="*/ 755932 h 755951"/>
+              <a:gd name="csX2" fmla="*/ 2128007 w 2128007"/>
+              <a:gd name="csY2" fmla="*/ 5362 h 755951"/>
+            </a:gdLst>
+            <a:ahLst/>
+            <a:cxnLst>
+              <a:cxn ang="0">
+                <a:pos x="csX0" y="csY0"/>
+              </a:cxn>
+              <a:cxn ang="0">
+                <a:pos x="csX1" y="csY1"/>
+              </a:cxn>
+              <a:cxn ang="0">
+                <a:pos x="csX2" y="csY2"/>
+              </a:cxn>
+            </a:cxnLst>
+            <a:rect l="l" t="t" r="r" b="b"/>
+            <a:pathLst>
+              <a:path w="2128007" h="755951">
+                <a:moveTo>
+                  <a:pt x="0" y="0"/>
+                </a:moveTo>
+                <a:cubicBezTo>
+                  <a:pt x="370205" y="367347"/>
+                  <a:pt x="738627" y="759107"/>
+                  <a:pt x="1093592" y="755932"/>
+                </a:cubicBezTo>
+                <a:cubicBezTo>
+                  <a:pt x="1448557" y="752757"/>
+                  <a:pt x="1788282" y="379059"/>
+                  <a:pt x="2128007" y="5362"/>
+                </a:cubicBezTo>
+              </a:path>
+            </a:pathLst>
+          </a:custGeom>
+          <a:noFill/>
+          <a:ln cap="rnd">
+            <a:solidFill>
+              <a:schemeClr val="accent2">
+                <a:lumMod val="75000"/>
+              </a:schemeClr>
+            </a:solidFill>
+            <a:round/>
+          </a:ln>
+        </p:spPr>
+        <p:style>
+          <a:lnRef idx="2">
+            <a:schemeClr val="accent1">
+              <a:shade val="15000"/>
+            </a:schemeClr>
+          </a:lnRef>
+          <a:fillRef idx="1">
+            <a:schemeClr val="accent1"/>
+          </a:fillRef>
+          <a:effectRef idx="0">
+            <a:schemeClr val="accent1"/>
+          </a:effectRef>
+          <a:fontRef idx="minor">
+            <a:schemeClr val="lt1"/>
+          </a:fontRef>
+        </p:style>
+        <p:txBody>
+          <a:bodyPr rtlCol="0" anchor="ctr"/>
+          <a:lstStyle/>
+          <a:p>
+            <a:pPr algn="ctr"/>
+            <a:endParaRPr lang="de-DE"/>
+          </a:p>
+        </p:txBody>
+      </p:sp>
+      <p:sp>
+        <p:nvSpPr>
+          <p:cNvPr id="33" name="Textfeld 32">
+            <a:extLst>
+              <a:ext uri="{FF2B5EF4-FFF2-40B4-BE49-F238E27FC236}">
+                <a16:creationId xmlns:a16="http://schemas.microsoft.com/office/drawing/2014/main" id="{EF64627B-4496-CD21-7D2D-0B046A1245D0}"/>
+              </a:ext>
+            </a:extLst>
+          </p:cNvPr>
+          <p:cNvSpPr txBox="1"/>
+          <p:nvPr/>
+        </p:nvSpPr>
+        <p:spPr>
+          <a:xfrm>
+            <a:off x="150383" y="1333287"/>
+            <a:ext cx="441952" cy="261610"/>
+          </a:xfrm>
+          <a:prstGeom prst="rect">
+            <a:avLst/>
+          </a:prstGeom>
+          <a:noFill/>
+        </p:spPr>
+        <p:txBody>
+          <a:bodyPr wrap="square" rtlCol="0">
+            <a:spAutoFit/>
+          </a:bodyPr>
+          <a:lstStyle/>
+          <a:p>
+            <a:pPr algn="ctr"/>
+            <a:r>
+              <a:rPr lang="de-DE" sz="1100" dirty="0">
+                <a:solidFill>
+                  <a:schemeClr val="accent2">
+                    <a:lumMod val="75000"/>
+                  </a:schemeClr>
+                </a:solidFill>
+                <a:latin typeface="CMU Serif" panose="02000603000000000000" pitchFamily="2" charset="0"/>
+                <a:ea typeface="CMU Serif" panose="02000603000000000000" pitchFamily="2" charset="0"/>
+                <a:cs typeface="CMU Serif" panose="02000603000000000000" pitchFamily="2" charset="0"/>
+              </a:rPr>
+              <a:t>−</a:t>
+            </a:r>
+            <a:r>
+              <a:rPr lang="de-DE" sz="1100" i="1" dirty="0">
+                <a:solidFill>
+                  <a:schemeClr val="accent2">
+                    <a:lumMod val="75000"/>
+                  </a:schemeClr>
+                </a:solidFill>
+                <a:latin typeface="CMU Serif" panose="02000603000000000000" pitchFamily="2" charset="0"/>
+                <a:ea typeface="CMU Serif" panose="02000603000000000000" pitchFamily="2" charset="0"/>
+                <a:cs typeface="CMU Serif" panose="02000603000000000000" pitchFamily="2" charset="0"/>
+              </a:rPr>
+              <a:t>A</a:t>
+            </a:r>
+            <a:r>
+              <a:rPr lang="de-DE" sz="1100" baseline="-25000" dirty="0">
+                <a:solidFill>
+                  <a:schemeClr val="accent2">
+                    <a:lumMod val="75000"/>
+                  </a:schemeClr>
+                </a:solidFill>
+                <a:latin typeface="CMU Serif" panose="02000603000000000000" pitchFamily="2" charset="0"/>
+                <a:ea typeface="CMU Serif" panose="02000603000000000000" pitchFamily="2" charset="0"/>
+                <a:cs typeface="CMU Serif" panose="02000603000000000000" pitchFamily="2" charset="0"/>
+              </a:rPr>
+              <a:t>2</a:t>
+            </a:r>
+            <a:endParaRPr lang="de-DE" sz="1100" dirty="0">
+              <a:solidFill>
+                <a:schemeClr val="accent2">
+                  <a:lumMod val="75000"/>
+                </a:schemeClr>
+              </a:solidFill>
+              <a:latin typeface="CMU Serif" panose="02000603000000000000" pitchFamily="2" charset="0"/>
+              <a:ea typeface="CMU Serif" panose="02000603000000000000" pitchFamily="2" charset="0"/>
+              <a:cs typeface="CMU Serif" panose="02000603000000000000" pitchFamily="2" charset="0"/>
+            </a:endParaRPr>
+          </a:p>
+        </p:txBody>
+      </p:sp>
+    </p:spTree>
+    <p:extLst>
+      <p:ext uri="{BB962C8B-B14F-4D97-AF65-F5344CB8AC3E}">
+        <p14:creationId xmlns:p14="http://schemas.microsoft.com/office/powerpoint/2010/main" val="1442083681"/>
+      </p:ext>
+    </p:extLst>
+  </p:cSld>
+  <p:clrMapOvr>
+    <a:masterClrMapping/>
+  </p:clrMapOvr>
+</p:sld>
+</file>
+
+<file path=ppt/slides/slide5.xml><?xml version="1.0" encoding="utf-8"?>
+<p:sld xmlns:a="http://schemas.openxmlformats.org/drawingml/2006/main" xmlns:r="http://schemas.openxmlformats.org/officeDocument/2006/relationships" xmlns:p="http://schemas.openxmlformats.org/presentationml/2006/main">
+  <p:cSld>
+    <p:spTree>
+      <p:nvGrpSpPr>
+        <p:cNvPr id="1" name="">
+          <a:extLst>
+            <a:ext uri="{FF2B5EF4-FFF2-40B4-BE49-F238E27FC236}">
               <a16:creationId xmlns:a16="http://schemas.microsoft.com/office/drawing/2014/main" id="{4AEBE6B5-B784-7829-6FC5-E4C259D78CBC}"/>
             </a:ext>
           </a:extLst>
@@ -9303,7 +13159,7 @@
 </p:sld>
 </file>
 
-<file path=ppt/slides/slide5.xml><?xml version="1.0" encoding="utf-8"?>
+<file path=ppt/slides/slide6.xml><?xml version="1.0" encoding="utf-8"?>
 <p:sld xmlns:a="http://schemas.openxmlformats.org/drawingml/2006/main" xmlns:r="http://schemas.openxmlformats.org/officeDocument/2006/relationships" xmlns:p="http://schemas.openxmlformats.org/presentationml/2006/main">
   <p:cSld>
     <p:spTree>
@@ -15685,7 +19541,7 @@
 </p:sld>
 </file>
 
-<file path=ppt/slides/slide6.xml><?xml version="1.0" encoding="utf-8"?>
+<file path=ppt/slides/slide7.xml><?xml version="1.0" encoding="utf-8"?>
 <p:sld xmlns:a="http://schemas.openxmlformats.org/drawingml/2006/main" xmlns:r="http://schemas.openxmlformats.org/officeDocument/2006/relationships" xmlns:p="http://schemas.openxmlformats.org/presentationml/2006/main">
   <p:cSld>
     <p:spTree>
@@ -17660,7 +21516,7 @@
 </p:sld>
 </file>
 
-<file path=ppt/slides/slide7.xml><?xml version="1.0" encoding="utf-8"?>
+<file path=ppt/slides/slide8.xml><?xml version="1.0" encoding="utf-8"?>
 <p:sld xmlns:a="http://schemas.openxmlformats.org/drawingml/2006/main" xmlns:r="http://schemas.openxmlformats.org/officeDocument/2006/relationships" xmlns:p="http://schemas.openxmlformats.org/presentationml/2006/main">
   <p:cSld>
     <p:spTree>
@@ -18424,7 +22280,7 @@
 </p:sld>
 </file>
 
-<file path=ppt/slides/slide8.xml><?xml version="1.0" encoding="utf-8"?>
+<file path=ppt/slides/slide9.xml><?xml version="1.0" encoding="utf-8"?>
 <p:sld xmlns:a="http://schemas.openxmlformats.org/drawingml/2006/main" xmlns:r="http://schemas.openxmlformats.org/officeDocument/2006/relationships" xmlns:p="http://schemas.openxmlformats.org/presentationml/2006/main">
   <p:cSld>
     <p:spTree>
@@ -22434,2651 +26290,6 @@
     <p:extLst>
       <p:ext uri="{BB962C8B-B14F-4D97-AF65-F5344CB8AC3E}">
         <p14:creationId xmlns:p14="http://schemas.microsoft.com/office/powerpoint/2010/main" val="3299783584"/>
-      </p:ext>
-    </p:extLst>
-  </p:cSld>
-  <p:clrMapOvr>
-    <a:masterClrMapping/>
-  </p:clrMapOvr>
-</p:sld>
-</file>
-
-<file path=ppt/slides/slide9.xml><?xml version="1.0" encoding="utf-8"?>
-<p:sld xmlns:a="http://schemas.openxmlformats.org/drawingml/2006/main" xmlns:r="http://schemas.openxmlformats.org/officeDocument/2006/relationships" xmlns:p="http://schemas.openxmlformats.org/presentationml/2006/main">
-  <p:cSld>
-    <p:spTree>
-      <p:nvGrpSpPr>
-        <p:cNvPr id="1" name=""/>
-        <p:cNvGrpSpPr/>
-        <p:nvPr/>
-      </p:nvGrpSpPr>
-      <p:grpSpPr>
-        <a:xfrm>
-          <a:off x="0" y="0"/>
-          <a:ext cx="0" cy="0"/>
-          <a:chOff x="0" y="0"/>
-          <a:chExt cx="0" cy="0"/>
-        </a:xfrm>
-      </p:grpSpPr>
-      <p:grpSp>
-        <p:nvGrpSpPr>
-          <p:cNvPr id="49" name="Gruppieren 48">
-            <a:extLst>
-              <a:ext uri="{FF2B5EF4-FFF2-40B4-BE49-F238E27FC236}">
-                <a16:creationId xmlns:a16="http://schemas.microsoft.com/office/drawing/2014/main" id="{E32F85D3-A54D-969B-1CD9-2E346EF21701}"/>
-              </a:ext>
-            </a:extLst>
-          </p:cNvPr>
-          <p:cNvGrpSpPr/>
-          <p:nvPr/>
-        </p:nvGrpSpPr>
-        <p:grpSpPr>
-          <a:xfrm>
-            <a:off x="275999" y="503649"/>
-            <a:ext cx="2980688" cy="2704628"/>
-            <a:chOff x="181105" y="541227"/>
-            <a:chExt cx="2980688" cy="2704628"/>
-          </a:xfrm>
-        </p:grpSpPr>
-        <p:grpSp>
-          <p:nvGrpSpPr>
-            <p:cNvPr id="22" name="Gruppieren 21">
-              <a:extLst>
-                <a:ext uri="{FF2B5EF4-FFF2-40B4-BE49-F238E27FC236}">
-                  <a16:creationId xmlns:a16="http://schemas.microsoft.com/office/drawing/2014/main" id="{D92B1F24-5A92-3590-663A-9579EBCFF870}"/>
-                </a:ext>
-              </a:extLst>
-            </p:cNvPr>
-            <p:cNvGrpSpPr/>
-            <p:nvPr/>
-          </p:nvGrpSpPr>
-          <p:grpSpPr>
-            <a:xfrm>
-              <a:off x="550545" y="650668"/>
-              <a:ext cx="2434955" cy="2368757"/>
-              <a:chOff x="550545" y="650668"/>
-              <a:chExt cx="2434955" cy="2368757"/>
-            </a:xfrm>
-          </p:grpSpPr>
-          <p:cxnSp>
-            <p:nvCxnSpPr>
-              <p:cNvPr id="6" name="Gerader Verbinder 5">
-                <a:extLst>
-                  <a:ext uri="{FF2B5EF4-FFF2-40B4-BE49-F238E27FC236}">
-                    <a16:creationId xmlns:a16="http://schemas.microsoft.com/office/drawing/2014/main" id="{81A82260-3DA2-11ED-4556-1EDDA066CECB}"/>
-                  </a:ext>
-                </a:extLst>
-              </p:cNvPr>
-              <p:cNvCxnSpPr>
-                <a:cxnSpLocks/>
-              </p:cNvCxnSpPr>
-              <p:nvPr/>
-            </p:nvCxnSpPr>
-            <p:spPr>
-              <a:xfrm>
-                <a:off x="1089060" y="650798"/>
-                <a:ext cx="0" cy="2298853"/>
-              </a:xfrm>
-              <a:prstGeom prst="line">
-                <a:avLst/>
-              </a:prstGeom>
-              <a:ln w="12700" cap="rnd">
-                <a:solidFill>
-                  <a:schemeClr val="bg1">
-                    <a:lumMod val="65000"/>
-                  </a:schemeClr>
-                </a:solidFill>
-                <a:round/>
-              </a:ln>
-            </p:spPr>
-            <p:style>
-              <a:lnRef idx="2">
-                <a:schemeClr val="accent1"/>
-              </a:lnRef>
-              <a:fillRef idx="0">
-                <a:schemeClr val="accent1"/>
-              </a:fillRef>
-              <a:effectRef idx="1">
-                <a:schemeClr val="accent1"/>
-              </a:effectRef>
-              <a:fontRef idx="minor">
-                <a:schemeClr val="tx1"/>
-              </a:fontRef>
-            </p:style>
-          </p:cxnSp>
-          <p:cxnSp>
-            <p:nvCxnSpPr>
-              <p:cNvPr id="7" name="Gerader Verbinder 6">
-                <a:extLst>
-                  <a:ext uri="{FF2B5EF4-FFF2-40B4-BE49-F238E27FC236}">
-                    <a16:creationId xmlns:a16="http://schemas.microsoft.com/office/drawing/2014/main" id="{135734E5-F363-0E41-CFDF-C3E70C925F40}"/>
-                  </a:ext>
-                </a:extLst>
-              </p:cNvPr>
-              <p:cNvCxnSpPr>
-                <a:cxnSpLocks/>
-              </p:cNvCxnSpPr>
-              <p:nvPr/>
-            </p:nvCxnSpPr>
-            <p:spPr>
-              <a:xfrm>
-                <a:off x="1563171" y="650798"/>
-                <a:ext cx="0" cy="2298853"/>
-              </a:xfrm>
-              <a:prstGeom prst="line">
-                <a:avLst/>
-              </a:prstGeom>
-              <a:ln w="12700" cap="rnd">
-                <a:solidFill>
-                  <a:schemeClr val="bg1">
-                    <a:lumMod val="65000"/>
-                  </a:schemeClr>
-                </a:solidFill>
-                <a:round/>
-              </a:ln>
-            </p:spPr>
-            <p:style>
-              <a:lnRef idx="2">
-                <a:schemeClr val="accent1"/>
-              </a:lnRef>
-              <a:fillRef idx="0">
-                <a:schemeClr val="accent1"/>
-              </a:fillRef>
-              <a:effectRef idx="1">
-                <a:schemeClr val="accent1"/>
-              </a:effectRef>
-              <a:fontRef idx="minor">
-                <a:schemeClr val="tx1"/>
-              </a:fontRef>
-            </p:style>
-          </p:cxnSp>
-          <p:cxnSp>
-            <p:nvCxnSpPr>
-              <p:cNvPr id="8" name="Gerader Verbinder 7">
-                <a:extLst>
-                  <a:ext uri="{FF2B5EF4-FFF2-40B4-BE49-F238E27FC236}">
-                    <a16:creationId xmlns:a16="http://schemas.microsoft.com/office/drawing/2014/main" id="{CC13891C-10AF-5437-83F8-A4D0ECA72A30}"/>
-                  </a:ext>
-                </a:extLst>
-              </p:cNvPr>
-              <p:cNvCxnSpPr>
-                <a:cxnSpLocks/>
-              </p:cNvCxnSpPr>
-              <p:nvPr/>
-            </p:nvCxnSpPr>
-            <p:spPr>
-              <a:xfrm>
-                <a:off x="2037281" y="650798"/>
-                <a:ext cx="0" cy="2298853"/>
-              </a:xfrm>
-              <a:prstGeom prst="line">
-                <a:avLst/>
-              </a:prstGeom>
-              <a:ln w="12700" cap="rnd">
-                <a:solidFill>
-                  <a:schemeClr val="bg1">
-                    <a:lumMod val="65000"/>
-                  </a:schemeClr>
-                </a:solidFill>
-                <a:round/>
-              </a:ln>
-            </p:spPr>
-            <p:style>
-              <a:lnRef idx="2">
-                <a:schemeClr val="accent1"/>
-              </a:lnRef>
-              <a:fillRef idx="0">
-                <a:schemeClr val="accent1"/>
-              </a:fillRef>
-              <a:effectRef idx="1">
-                <a:schemeClr val="accent1"/>
-              </a:effectRef>
-              <a:fontRef idx="minor">
-                <a:schemeClr val="tx1"/>
-              </a:fontRef>
-            </p:style>
-          </p:cxnSp>
-          <p:cxnSp>
-            <p:nvCxnSpPr>
-              <p:cNvPr id="9" name="Gerader Verbinder 8">
-                <a:extLst>
-                  <a:ext uri="{FF2B5EF4-FFF2-40B4-BE49-F238E27FC236}">
-                    <a16:creationId xmlns:a16="http://schemas.microsoft.com/office/drawing/2014/main" id="{BB913743-D1B7-5E2F-8BF4-F1C83F7EF6D5}"/>
-                  </a:ext>
-                </a:extLst>
-              </p:cNvPr>
-              <p:cNvCxnSpPr>
-                <a:cxnSpLocks/>
-              </p:cNvCxnSpPr>
-              <p:nvPr/>
-            </p:nvCxnSpPr>
-            <p:spPr>
-              <a:xfrm>
-                <a:off x="2511392" y="650798"/>
-                <a:ext cx="0" cy="2298853"/>
-              </a:xfrm>
-              <a:prstGeom prst="line">
-                <a:avLst/>
-              </a:prstGeom>
-              <a:ln w="12700" cap="rnd">
-                <a:solidFill>
-                  <a:schemeClr val="bg1">
-                    <a:lumMod val="65000"/>
-                  </a:schemeClr>
-                </a:solidFill>
-                <a:round/>
-              </a:ln>
-            </p:spPr>
-            <p:style>
-              <a:lnRef idx="2">
-                <a:schemeClr val="accent1"/>
-              </a:lnRef>
-              <a:fillRef idx="0">
-                <a:schemeClr val="accent1"/>
-              </a:fillRef>
-              <a:effectRef idx="1">
-                <a:schemeClr val="accent1"/>
-              </a:effectRef>
-              <a:fontRef idx="minor">
-                <a:schemeClr val="tx1"/>
-              </a:fontRef>
-            </p:style>
-          </p:cxnSp>
-          <p:cxnSp>
-            <p:nvCxnSpPr>
-              <p:cNvPr id="10" name="Gerader Verbinder 9">
-                <a:extLst>
-                  <a:ext uri="{FF2B5EF4-FFF2-40B4-BE49-F238E27FC236}">
-                    <a16:creationId xmlns:a16="http://schemas.microsoft.com/office/drawing/2014/main" id="{2A9C0E40-FBCA-18BE-FC80-0C25F13CEA89}"/>
-                  </a:ext>
-                </a:extLst>
-              </p:cNvPr>
-              <p:cNvCxnSpPr>
-                <a:cxnSpLocks/>
-              </p:cNvCxnSpPr>
-              <p:nvPr/>
-            </p:nvCxnSpPr>
-            <p:spPr>
-              <a:xfrm>
-                <a:off x="2985500" y="650798"/>
-                <a:ext cx="0" cy="2298853"/>
-              </a:xfrm>
-              <a:prstGeom prst="line">
-                <a:avLst/>
-              </a:prstGeom>
-              <a:ln w="12700" cap="rnd">
-                <a:solidFill>
-                  <a:schemeClr val="bg1">
-                    <a:lumMod val="65000"/>
-                  </a:schemeClr>
-                </a:solidFill>
-                <a:round/>
-              </a:ln>
-            </p:spPr>
-            <p:style>
-              <a:lnRef idx="2">
-                <a:schemeClr val="accent1"/>
-              </a:lnRef>
-              <a:fillRef idx="0">
-                <a:schemeClr val="accent1"/>
-              </a:fillRef>
-              <a:effectRef idx="1">
-                <a:schemeClr val="accent1"/>
-              </a:effectRef>
-              <a:fontRef idx="minor">
-                <a:schemeClr val="tx1"/>
-              </a:fontRef>
-            </p:style>
-          </p:cxnSp>
-          <p:grpSp>
-            <p:nvGrpSpPr>
-              <p:cNvPr id="20" name="Gruppieren 19">
-                <a:extLst>
-                  <a:ext uri="{FF2B5EF4-FFF2-40B4-BE49-F238E27FC236}">
-                    <a16:creationId xmlns:a16="http://schemas.microsoft.com/office/drawing/2014/main" id="{4167EEB5-7764-643A-F45F-3C678C44B523}"/>
-                  </a:ext>
-                </a:extLst>
-              </p:cNvPr>
-              <p:cNvGrpSpPr/>
-              <p:nvPr/>
-            </p:nvGrpSpPr>
-            <p:grpSpPr>
-              <a:xfrm>
-                <a:off x="550545" y="650668"/>
-                <a:ext cx="2434955" cy="2301985"/>
-                <a:chOff x="550545" y="650668"/>
-                <a:chExt cx="2434955" cy="2301985"/>
-              </a:xfrm>
-            </p:grpSpPr>
-            <p:cxnSp>
-              <p:nvCxnSpPr>
-                <p:cNvPr id="12" name="Gerader Verbinder 11">
-                  <a:extLst>
-                    <a:ext uri="{FF2B5EF4-FFF2-40B4-BE49-F238E27FC236}">
-                      <a16:creationId xmlns:a16="http://schemas.microsoft.com/office/drawing/2014/main" id="{A810AFF0-6EDB-93E1-E1DF-F7C7BB033A8F}"/>
-                    </a:ext>
-                  </a:extLst>
-                </p:cNvPr>
-                <p:cNvCxnSpPr>
-                  <a:cxnSpLocks/>
-                </p:cNvCxnSpPr>
-                <p:nvPr/>
-              </p:nvCxnSpPr>
-              <p:spPr>
-                <a:xfrm>
-                  <a:off x="614950" y="650668"/>
-                  <a:ext cx="2370550" cy="0"/>
-                </a:xfrm>
-                <a:prstGeom prst="line">
-                  <a:avLst/>
-                </a:prstGeom>
-                <a:ln w="12700" cap="rnd">
-                  <a:solidFill>
-                    <a:schemeClr val="bg1">
-                      <a:lumMod val="65000"/>
-                    </a:schemeClr>
-                  </a:solidFill>
-                  <a:round/>
-                </a:ln>
-              </p:spPr>
-              <p:style>
-                <a:lnRef idx="2">
-                  <a:schemeClr val="accent1"/>
-                </a:lnRef>
-                <a:fillRef idx="0">
-                  <a:schemeClr val="accent1"/>
-                </a:fillRef>
-                <a:effectRef idx="1">
-                  <a:schemeClr val="accent1"/>
-                </a:effectRef>
-                <a:fontRef idx="minor">
-                  <a:schemeClr val="tx1"/>
-                </a:fontRef>
-              </p:style>
-            </p:cxnSp>
-            <p:cxnSp>
-              <p:nvCxnSpPr>
-                <p:cNvPr id="15" name="Gerader Verbinder 14">
-                  <a:extLst>
-                    <a:ext uri="{FF2B5EF4-FFF2-40B4-BE49-F238E27FC236}">
-                      <a16:creationId xmlns:a16="http://schemas.microsoft.com/office/drawing/2014/main" id="{FC635500-1844-B8AB-24E8-9B42D56DFEE6}"/>
-                    </a:ext>
-                  </a:extLst>
-                </p:cNvPr>
-                <p:cNvCxnSpPr>
-                  <a:cxnSpLocks/>
-                </p:cNvCxnSpPr>
-                <p:nvPr/>
-              </p:nvCxnSpPr>
-              <p:spPr>
-                <a:xfrm>
-                  <a:off x="614950" y="1226164"/>
-                  <a:ext cx="2370550" cy="0"/>
-                </a:xfrm>
-                <a:prstGeom prst="line">
-                  <a:avLst/>
-                </a:prstGeom>
-                <a:ln w="12700" cap="rnd">
-                  <a:solidFill>
-                    <a:schemeClr val="bg1">
-                      <a:lumMod val="65000"/>
-                    </a:schemeClr>
-                  </a:solidFill>
-                  <a:round/>
-                </a:ln>
-              </p:spPr>
-              <p:style>
-                <a:lnRef idx="2">
-                  <a:schemeClr val="accent1"/>
-                </a:lnRef>
-                <a:fillRef idx="0">
-                  <a:schemeClr val="accent1"/>
-                </a:fillRef>
-                <a:effectRef idx="1">
-                  <a:schemeClr val="accent1"/>
-                </a:effectRef>
-                <a:fontRef idx="minor">
-                  <a:schemeClr val="tx1"/>
-                </a:fontRef>
-              </p:style>
-            </p:cxnSp>
-            <p:cxnSp>
-              <p:nvCxnSpPr>
-                <p:cNvPr id="16" name="Gerader Verbinder 15">
-                  <a:extLst>
-                    <a:ext uri="{FF2B5EF4-FFF2-40B4-BE49-F238E27FC236}">
-                      <a16:creationId xmlns:a16="http://schemas.microsoft.com/office/drawing/2014/main" id="{35629FED-E994-F10E-2F2C-57A5D1E0B7DB}"/>
-                    </a:ext>
-                  </a:extLst>
-                </p:cNvPr>
-                <p:cNvCxnSpPr>
-                  <a:cxnSpLocks/>
-                </p:cNvCxnSpPr>
-                <p:nvPr/>
-              </p:nvCxnSpPr>
-              <p:spPr>
-                <a:xfrm>
-                  <a:off x="614950" y="1801660"/>
-                  <a:ext cx="2370550" cy="0"/>
-                </a:xfrm>
-                <a:prstGeom prst="line">
-                  <a:avLst/>
-                </a:prstGeom>
-                <a:ln w="12700" cap="rnd">
-                  <a:solidFill>
-                    <a:schemeClr val="bg1">
-                      <a:lumMod val="65000"/>
-                    </a:schemeClr>
-                  </a:solidFill>
-                  <a:round/>
-                </a:ln>
-              </p:spPr>
-              <p:style>
-                <a:lnRef idx="2">
-                  <a:schemeClr val="accent1"/>
-                </a:lnRef>
-                <a:fillRef idx="0">
-                  <a:schemeClr val="accent1"/>
-                </a:fillRef>
-                <a:effectRef idx="1">
-                  <a:schemeClr val="accent1"/>
-                </a:effectRef>
-                <a:fontRef idx="minor">
-                  <a:schemeClr val="tx1"/>
-                </a:fontRef>
-              </p:style>
-            </p:cxnSp>
-            <p:cxnSp>
-              <p:nvCxnSpPr>
-                <p:cNvPr id="19" name="Gerader Verbinder 18">
-                  <a:extLst>
-                    <a:ext uri="{FF2B5EF4-FFF2-40B4-BE49-F238E27FC236}">
-                      <a16:creationId xmlns:a16="http://schemas.microsoft.com/office/drawing/2014/main" id="{0E0A5A03-F348-599A-8F55-54C725842CC5}"/>
-                    </a:ext>
-                  </a:extLst>
-                </p:cNvPr>
-                <p:cNvCxnSpPr>
-                  <a:cxnSpLocks/>
-                </p:cNvCxnSpPr>
-                <p:nvPr/>
-              </p:nvCxnSpPr>
-              <p:spPr>
-                <a:xfrm>
-                  <a:off x="614950" y="2377156"/>
-                  <a:ext cx="2370550" cy="0"/>
-                </a:xfrm>
-                <a:prstGeom prst="line">
-                  <a:avLst/>
-                </a:prstGeom>
-                <a:ln w="12700" cap="rnd">
-                  <a:solidFill>
-                    <a:schemeClr val="bg1">
-                      <a:lumMod val="65000"/>
-                    </a:schemeClr>
-                  </a:solidFill>
-                  <a:round/>
-                </a:ln>
-              </p:spPr>
-              <p:style>
-                <a:lnRef idx="2">
-                  <a:schemeClr val="accent1"/>
-                </a:lnRef>
-                <a:fillRef idx="0">
-                  <a:schemeClr val="accent1"/>
-                </a:fillRef>
-                <a:effectRef idx="1">
-                  <a:schemeClr val="accent1"/>
-                </a:effectRef>
-                <a:fontRef idx="minor">
-                  <a:schemeClr val="tx1"/>
-                </a:fontRef>
-              </p:style>
-            </p:cxnSp>
-            <p:cxnSp>
-              <p:nvCxnSpPr>
-                <p:cNvPr id="17" name="Gerader Verbinder 16">
-                  <a:extLst>
-                    <a:ext uri="{FF2B5EF4-FFF2-40B4-BE49-F238E27FC236}">
-                      <a16:creationId xmlns:a16="http://schemas.microsoft.com/office/drawing/2014/main" id="{36E897C2-513E-7F0A-D487-E83D94F8068F}"/>
-                    </a:ext>
-                  </a:extLst>
-                </p:cNvPr>
-                <p:cNvCxnSpPr>
-                  <a:cxnSpLocks/>
-                </p:cNvCxnSpPr>
-                <p:nvPr/>
-              </p:nvCxnSpPr>
-              <p:spPr>
-                <a:xfrm>
-                  <a:off x="550545" y="2952653"/>
-                  <a:ext cx="2434955" cy="0"/>
-                </a:xfrm>
-                <a:prstGeom prst="line">
-                  <a:avLst/>
-                </a:prstGeom>
-                <a:ln w="12700" cap="rnd">
-                  <a:solidFill>
-                    <a:schemeClr val="tx1"/>
-                  </a:solidFill>
-                  <a:round/>
-                </a:ln>
-              </p:spPr>
-              <p:style>
-                <a:lnRef idx="2">
-                  <a:schemeClr val="accent1"/>
-                </a:lnRef>
-                <a:fillRef idx="0">
-                  <a:schemeClr val="accent1"/>
-                </a:fillRef>
-                <a:effectRef idx="1">
-                  <a:schemeClr val="accent1"/>
-                </a:effectRef>
-                <a:fontRef idx="minor">
-                  <a:schemeClr val="tx1"/>
-                </a:fontRef>
-              </p:style>
-            </p:cxnSp>
-          </p:grpSp>
-          <p:cxnSp>
-            <p:nvCxnSpPr>
-              <p:cNvPr id="5" name="Gerader Verbinder 4">
-                <a:extLst>
-                  <a:ext uri="{FF2B5EF4-FFF2-40B4-BE49-F238E27FC236}">
-                    <a16:creationId xmlns:a16="http://schemas.microsoft.com/office/drawing/2014/main" id="{7F2EA998-EED8-69AE-31A6-E7674B8801ED}"/>
-                  </a:ext>
-                </a:extLst>
-              </p:cNvPr>
-              <p:cNvCxnSpPr>
-                <a:cxnSpLocks/>
-              </p:cNvCxnSpPr>
-              <p:nvPr/>
-            </p:nvCxnSpPr>
-            <p:spPr>
-              <a:xfrm>
-                <a:off x="614950" y="650798"/>
-                <a:ext cx="0" cy="2368627"/>
-              </a:xfrm>
-              <a:prstGeom prst="line">
-                <a:avLst/>
-              </a:prstGeom>
-              <a:ln w="12700" cap="rnd">
-                <a:solidFill>
-                  <a:schemeClr val="tx1"/>
-                </a:solidFill>
-                <a:round/>
-              </a:ln>
-            </p:spPr>
-            <p:style>
-              <a:lnRef idx="2">
-                <a:schemeClr val="accent1"/>
-              </a:lnRef>
-              <a:fillRef idx="0">
-                <a:schemeClr val="accent1"/>
-              </a:fillRef>
-              <a:effectRef idx="1">
-                <a:schemeClr val="accent1"/>
-              </a:effectRef>
-              <a:fontRef idx="minor">
-                <a:schemeClr val="tx1"/>
-              </a:fontRef>
-            </p:style>
-          </p:cxnSp>
-        </p:grpSp>
-        <p:cxnSp>
-          <p:nvCxnSpPr>
-            <p:cNvPr id="25" name="Gerader Verbinder 24">
-              <a:extLst>
-                <a:ext uri="{FF2B5EF4-FFF2-40B4-BE49-F238E27FC236}">
-                  <a16:creationId xmlns:a16="http://schemas.microsoft.com/office/drawing/2014/main" id="{3B0F5731-70A9-C364-89CD-3ACBB970AC19}"/>
-                </a:ext>
-              </a:extLst>
-            </p:cNvPr>
-            <p:cNvCxnSpPr>
-              <a:cxnSpLocks/>
-            </p:cNvCxnSpPr>
-            <p:nvPr/>
-          </p:nvCxnSpPr>
-          <p:spPr>
-            <a:xfrm>
-              <a:off x="1089060" y="2954655"/>
-              <a:ext cx="0" cy="64770"/>
-            </a:xfrm>
-            <a:prstGeom prst="line">
-              <a:avLst/>
-            </a:prstGeom>
-            <a:ln w="12700" cap="rnd">
-              <a:solidFill>
-                <a:schemeClr val="tx1"/>
-              </a:solidFill>
-              <a:round/>
-            </a:ln>
-          </p:spPr>
-          <p:style>
-            <a:lnRef idx="2">
-              <a:schemeClr val="accent1"/>
-            </a:lnRef>
-            <a:fillRef idx="0">
-              <a:schemeClr val="accent1"/>
-            </a:fillRef>
-            <a:effectRef idx="1">
-              <a:schemeClr val="accent1"/>
-            </a:effectRef>
-            <a:fontRef idx="minor">
-              <a:schemeClr val="tx1"/>
-            </a:fontRef>
-          </p:style>
-        </p:cxnSp>
-        <p:cxnSp>
-          <p:nvCxnSpPr>
-            <p:cNvPr id="28" name="Gerader Verbinder 27">
-              <a:extLst>
-                <a:ext uri="{FF2B5EF4-FFF2-40B4-BE49-F238E27FC236}">
-                  <a16:creationId xmlns:a16="http://schemas.microsoft.com/office/drawing/2014/main" id="{8C7AF1F6-630D-8CB2-BB42-4366006F7EEF}"/>
-                </a:ext>
-              </a:extLst>
-            </p:cNvPr>
-            <p:cNvCxnSpPr>
-              <a:cxnSpLocks/>
-            </p:cNvCxnSpPr>
-            <p:nvPr/>
-          </p:nvCxnSpPr>
-          <p:spPr>
-            <a:xfrm>
-              <a:off x="1563171" y="2954655"/>
-              <a:ext cx="0" cy="64770"/>
-            </a:xfrm>
-            <a:prstGeom prst="line">
-              <a:avLst/>
-            </a:prstGeom>
-            <a:ln w="12700" cap="rnd">
-              <a:solidFill>
-                <a:schemeClr val="tx1"/>
-              </a:solidFill>
-              <a:round/>
-            </a:ln>
-          </p:spPr>
-          <p:style>
-            <a:lnRef idx="2">
-              <a:schemeClr val="accent1"/>
-            </a:lnRef>
-            <a:fillRef idx="0">
-              <a:schemeClr val="accent1"/>
-            </a:fillRef>
-            <a:effectRef idx="1">
-              <a:schemeClr val="accent1"/>
-            </a:effectRef>
-            <a:fontRef idx="minor">
-              <a:schemeClr val="tx1"/>
-            </a:fontRef>
-          </p:style>
-        </p:cxnSp>
-        <p:cxnSp>
-          <p:nvCxnSpPr>
-            <p:cNvPr id="29" name="Gerader Verbinder 28">
-              <a:extLst>
-                <a:ext uri="{FF2B5EF4-FFF2-40B4-BE49-F238E27FC236}">
-                  <a16:creationId xmlns:a16="http://schemas.microsoft.com/office/drawing/2014/main" id="{C2BDAF8E-C458-60CF-196E-F79BAB327871}"/>
-                </a:ext>
-              </a:extLst>
-            </p:cNvPr>
-            <p:cNvCxnSpPr>
-              <a:cxnSpLocks/>
-            </p:cNvCxnSpPr>
-            <p:nvPr/>
-          </p:nvCxnSpPr>
-          <p:spPr>
-            <a:xfrm>
-              <a:off x="2037281" y="2954655"/>
-              <a:ext cx="0" cy="64770"/>
-            </a:xfrm>
-            <a:prstGeom prst="line">
-              <a:avLst/>
-            </a:prstGeom>
-            <a:ln w="12700" cap="rnd">
-              <a:solidFill>
-                <a:schemeClr val="tx1"/>
-              </a:solidFill>
-              <a:round/>
-            </a:ln>
-          </p:spPr>
-          <p:style>
-            <a:lnRef idx="2">
-              <a:schemeClr val="accent1"/>
-            </a:lnRef>
-            <a:fillRef idx="0">
-              <a:schemeClr val="accent1"/>
-            </a:fillRef>
-            <a:effectRef idx="1">
-              <a:schemeClr val="accent1"/>
-            </a:effectRef>
-            <a:fontRef idx="minor">
-              <a:schemeClr val="tx1"/>
-            </a:fontRef>
-          </p:style>
-        </p:cxnSp>
-        <p:cxnSp>
-          <p:nvCxnSpPr>
-            <p:cNvPr id="30" name="Gerader Verbinder 29">
-              <a:extLst>
-                <a:ext uri="{FF2B5EF4-FFF2-40B4-BE49-F238E27FC236}">
-                  <a16:creationId xmlns:a16="http://schemas.microsoft.com/office/drawing/2014/main" id="{31BECC8C-19F3-ADD7-0090-8A06C1771488}"/>
-                </a:ext>
-              </a:extLst>
-            </p:cNvPr>
-            <p:cNvCxnSpPr>
-              <a:cxnSpLocks/>
-            </p:cNvCxnSpPr>
-            <p:nvPr/>
-          </p:nvCxnSpPr>
-          <p:spPr>
-            <a:xfrm>
-              <a:off x="2511392" y="2954655"/>
-              <a:ext cx="0" cy="64770"/>
-            </a:xfrm>
-            <a:prstGeom prst="line">
-              <a:avLst/>
-            </a:prstGeom>
-            <a:ln w="12700" cap="rnd">
-              <a:solidFill>
-                <a:schemeClr val="tx1"/>
-              </a:solidFill>
-              <a:round/>
-            </a:ln>
-          </p:spPr>
-          <p:style>
-            <a:lnRef idx="2">
-              <a:schemeClr val="accent1"/>
-            </a:lnRef>
-            <a:fillRef idx="0">
-              <a:schemeClr val="accent1"/>
-            </a:fillRef>
-            <a:effectRef idx="1">
-              <a:schemeClr val="accent1"/>
-            </a:effectRef>
-            <a:fontRef idx="minor">
-              <a:schemeClr val="tx1"/>
-            </a:fontRef>
-          </p:style>
-        </p:cxnSp>
-        <p:cxnSp>
-          <p:nvCxnSpPr>
-            <p:cNvPr id="31" name="Gerader Verbinder 30">
-              <a:extLst>
-                <a:ext uri="{FF2B5EF4-FFF2-40B4-BE49-F238E27FC236}">
-                  <a16:creationId xmlns:a16="http://schemas.microsoft.com/office/drawing/2014/main" id="{8795920F-D712-91A1-E19B-4C737C040707}"/>
-                </a:ext>
-              </a:extLst>
-            </p:cNvPr>
-            <p:cNvCxnSpPr>
-              <a:cxnSpLocks/>
-            </p:cNvCxnSpPr>
-            <p:nvPr/>
-          </p:nvCxnSpPr>
-          <p:spPr>
-            <a:xfrm>
-              <a:off x="2985500" y="2952750"/>
-              <a:ext cx="0" cy="64770"/>
-            </a:xfrm>
-            <a:prstGeom prst="line">
-              <a:avLst/>
-            </a:prstGeom>
-            <a:ln w="12700" cap="rnd">
-              <a:solidFill>
-                <a:schemeClr val="tx1"/>
-              </a:solidFill>
-              <a:round/>
-            </a:ln>
-          </p:spPr>
-          <p:style>
-            <a:lnRef idx="2">
-              <a:schemeClr val="accent1"/>
-            </a:lnRef>
-            <a:fillRef idx="0">
-              <a:schemeClr val="accent1"/>
-            </a:fillRef>
-            <a:effectRef idx="1">
-              <a:schemeClr val="accent1"/>
-            </a:effectRef>
-            <a:fontRef idx="minor">
-              <a:schemeClr val="tx1"/>
-            </a:fontRef>
-          </p:style>
-        </p:cxnSp>
-        <p:cxnSp>
-          <p:nvCxnSpPr>
-            <p:cNvPr id="32" name="Gerader Verbinder 31">
-              <a:extLst>
-                <a:ext uri="{FF2B5EF4-FFF2-40B4-BE49-F238E27FC236}">
-                  <a16:creationId xmlns:a16="http://schemas.microsoft.com/office/drawing/2014/main" id="{3F7F2635-DAE7-14BD-0C44-468903B172E6}"/>
-                </a:ext>
-              </a:extLst>
-            </p:cNvPr>
-            <p:cNvCxnSpPr>
-              <a:cxnSpLocks/>
-            </p:cNvCxnSpPr>
-            <p:nvPr/>
-          </p:nvCxnSpPr>
-          <p:spPr>
-            <a:xfrm>
-              <a:off x="548640" y="2377156"/>
-              <a:ext cx="64170" cy="0"/>
-            </a:xfrm>
-            <a:prstGeom prst="line">
-              <a:avLst/>
-            </a:prstGeom>
-            <a:ln w="12700" cap="rnd">
-              <a:solidFill>
-                <a:schemeClr val="tx1"/>
-              </a:solidFill>
-              <a:round/>
-            </a:ln>
-          </p:spPr>
-          <p:style>
-            <a:lnRef idx="2">
-              <a:schemeClr val="accent1"/>
-            </a:lnRef>
-            <a:fillRef idx="0">
-              <a:schemeClr val="accent1"/>
-            </a:fillRef>
-            <a:effectRef idx="1">
-              <a:schemeClr val="accent1"/>
-            </a:effectRef>
-            <a:fontRef idx="minor">
-              <a:schemeClr val="tx1"/>
-            </a:fontRef>
-          </p:style>
-        </p:cxnSp>
-        <p:cxnSp>
-          <p:nvCxnSpPr>
-            <p:cNvPr id="35" name="Gerader Verbinder 34">
-              <a:extLst>
-                <a:ext uri="{FF2B5EF4-FFF2-40B4-BE49-F238E27FC236}">
-                  <a16:creationId xmlns:a16="http://schemas.microsoft.com/office/drawing/2014/main" id="{F43B1B4D-9FAE-0BE3-53E3-37706D20F506}"/>
-                </a:ext>
-              </a:extLst>
-            </p:cNvPr>
-            <p:cNvCxnSpPr>
-              <a:cxnSpLocks/>
-            </p:cNvCxnSpPr>
-            <p:nvPr/>
-          </p:nvCxnSpPr>
-          <p:spPr>
-            <a:xfrm>
-              <a:off x="548640" y="1799940"/>
-              <a:ext cx="64170" cy="0"/>
-            </a:xfrm>
-            <a:prstGeom prst="line">
-              <a:avLst/>
-            </a:prstGeom>
-            <a:ln w="12700" cap="rnd">
-              <a:solidFill>
-                <a:schemeClr val="tx1"/>
-              </a:solidFill>
-              <a:round/>
-            </a:ln>
-          </p:spPr>
-          <p:style>
-            <a:lnRef idx="2">
-              <a:schemeClr val="accent1"/>
-            </a:lnRef>
-            <a:fillRef idx="0">
-              <a:schemeClr val="accent1"/>
-            </a:fillRef>
-            <a:effectRef idx="1">
-              <a:schemeClr val="accent1"/>
-            </a:effectRef>
-            <a:fontRef idx="minor">
-              <a:schemeClr val="tx1"/>
-            </a:fontRef>
-          </p:style>
-        </p:cxnSp>
-        <p:cxnSp>
-          <p:nvCxnSpPr>
-            <p:cNvPr id="36" name="Gerader Verbinder 35">
-              <a:extLst>
-                <a:ext uri="{FF2B5EF4-FFF2-40B4-BE49-F238E27FC236}">
-                  <a16:creationId xmlns:a16="http://schemas.microsoft.com/office/drawing/2014/main" id="{D7464445-CD6B-584C-D198-E71A024869C0}"/>
-                </a:ext>
-              </a:extLst>
-            </p:cNvPr>
-            <p:cNvCxnSpPr>
-              <a:cxnSpLocks/>
-            </p:cNvCxnSpPr>
-            <p:nvPr/>
-          </p:nvCxnSpPr>
-          <p:spPr>
-            <a:xfrm>
-              <a:off x="548640" y="1226164"/>
-              <a:ext cx="64170" cy="0"/>
-            </a:xfrm>
-            <a:prstGeom prst="line">
-              <a:avLst/>
-            </a:prstGeom>
-            <a:ln w="12700" cap="rnd">
-              <a:solidFill>
-                <a:schemeClr val="tx1"/>
-              </a:solidFill>
-              <a:round/>
-            </a:ln>
-          </p:spPr>
-          <p:style>
-            <a:lnRef idx="2">
-              <a:schemeClr val="accent1"/>
-            </a:lnRef>
-            <a:fillRef idx="0">
-              <a:schemeClr val="accent1"/>
-            </a:fillRef>
-            <a:effectRef idx="1">
-              <a:schemeClr val="accent1"/>
-            </a:effectRef>
-            <a:fontRef idx="minor">
-              <a:schemeClr val="tx1"/>
-            </a:fontRef>
-          </p:style>
-        </p:cxnSp>
-        <p:cxnSp>
-          <p:nvCxnSpPr>
-            <p:cNvPr id="37" name="Gerader Verbinder 36">
-              <a:extLst>
-                <a:ext uri="{FF2B5EF4-FFF2-40B4-BE49-F238E27FC236}">
-                  <a16:creationId xmlns:a16="http://schemas.microsoft.com/office/drawing/2014/main" id="{C981F174-DEEF-9363-3996-7552953D15EA}"/>
-                </a:ext>
-              </a:extLst>
-            </p:cNvPr>
-            <p:cNvCxnSpPr>
-              <a:cxnSpLocks/>
-            </p:cNvCxnSpPr>
-            <p:nvPr/>
-          </p:nvCxnSpPr>
-          <p:spPr>
-            <a:xfrm>
-              <a:off x="550545" y="650668"/>
-              <a:ext cx="64170" cy="0"/>
-            </a:xfrm>
-            <a:prstGeom prst="line">
-              <a:avLst/>
-            </a:prstGeom>
-            <a:ln w="12700" cap="rnd">
-              <a:solidFill>
-                <a:schemeClr val="tx1"/>
-              </a:solidFill>
-              <a:round/>
-            </a:ln>
-          </p:spPr>
-          <p:style>
-            <a:lnRef idx="2">
-              <a:schemeClr val="accent1"/>
-            </a:lnRef>
-            <a:fillRef idx="0">
-              <a:schemeClr val="accent1"/>
-            </a:fillRef>
-            <a:effectRef idx="1">
-              <a:schemeClr val="accent1"/>
-            </a:effectRef>
-            <a:fontRef idx="minor">
-              <a:schemeClr val="tx1"/>
-            </a:fontRef>
-          </p:style>
-        </p:cxnSp>
-        <p:sp>
-          <p:nvSpPr>
-            <p:cNvPr id="38" name="Textfeld 37">
-              <a:extLst>
-                <a:ext uri="{FF2B5EF4-FFF2-40B4-BE49-F238E27FC236}">
-                  <a16:creationId xmlns:a16="http://schemas.microsoft.com/office/drawing/2014/main" id="{B721A7DB-1C56-58B6-F7C5-A1ABBC24CCA2}"/>
-                </a:ext>
-              </a:extLst>
-            </p:cNvPr>
-            <p:cNvSpPr txBox="1"/>
-            <p:nvPr/>
-          </p:nvSpPr>
-          <p:spPr>
-            <a:xfrm>
-              <a:off x="181106" y="541227"/>
-              <a:ext cx="412147" cy="215444"/>
-            </a:xfrm>
-            <a:prstGeom prst="rect">
-              <a:avLst/>
-            </a:prstGeom>
-            <a:noFill/>
-          </p:spPr>
-          <p:txBody>
-            <a:bodyPr wrap="square" rtlCol="0" anchor="ctr">
-              <a:spAutoFit/>
-            </a:bodyPr>
-            <a:lstStyle/>
-            <a:p>
-              <a:pPr algn="ctr"/>
-              <a:r>
-                <a:rPr lang="de-DE" sz="800" dirty="0">
-                  <a:latin typeface="CMU Serif" panose="02000603000000000000" pitchFamily="2" charset="0"/>
-                  <a:ea typeface="CMU Serif" panose="02000603000000000000" pitchFamily="2" charset="0"/>
-                  <a:cs typeface="CMU Serif" panose="02000603000000000000" pitchFamily="2" charset="0"/>
-                </a:rPr>
-                <a:t>0,16</a:t>
-              </a:r>
-              <a:endParaRPr lang="de-DE" sz="800" baseline="-25000" dirty="0">
-                <a:latin typeface="CMU Serif" panose="02000603000000000000" pitchFamily="2" charset="0"/>
-                <a:ea typeface="CMU Serif" panose="02000603000000000000" pitchFamily="2" charset="0"/>
-                <a:cs typeface="CMU Serif" panose="02000603000000000000" pitchFamily="2" charset="0"/>
-              </a:endParaRPr>
-            </a:p>
-          </p:txBody>
-        </p:sp>
-        <p:sp>
-          <p:nvSpPr>
-            <p:cNvPr id="39" name="Textfeld 38">
-              <a:extLst>
-                <a:ext uri="{FF2B5EF4-FFF2-40B4-BE49-F238E27FC236}">
-                  <a16:creationId xmlns:a16="http://schemas.microsoft.com/office/drawing/2014/main" id="{DEB91C06-67E0-30F7-D4E6-3B838A656804}"/>
-                </a:ext>
-              </a:extLst>
-            </p:cNvPr>
-            <p:cNvSpPr txBox="1"/>
-            <p:nvPr/>
-          </p:nvSpPr>
-          <p:spPr>
-            <a:xfrm>
-              <a:off x="181106" y="1115863"/>
-              <a:ext cx="412147" cy="215444"/>
-            </a:xfrm>
-            <a:prstGeom prst="rect">
-              <a:avLst/>
-            </a:prstGeom>
-            <a:noFill/>
-          </p:spPr>
-          <p:txBody>
-            <a:bodyPr wrap="square" rtlCol="0" anchor="ctr">
-              <a:spAutoFit/>
-            </a:bodyPr>
-            <a:lstStyle/>
-            <a:p>
-              <a:pPr algn="ctr"/>
-              <a:r>
-                <a:rPr lang="de-DE" sz="800" dirty="0">
-                  <a:latin typeface="CMU Serif" panose="02000603000000000000" pitchFamily="2" charset="0"/>
-                  <a:ea typeface="CMU Serif" panose="02000603000000000000" pitchFamily="2" charset="0"/>
-                  <a:cs typeface="CMU Serif" panose="02000603000000000000" pitchFamily="2" charset="0"/>
-                </a:rPr>
-                <a:t>0,12</a:t>
-              </a:r>
-            </a:p>
-          </p:txBody>
-        </p:sp>
-        <p:sp>
-          <p:nvSpPr>
-            <p:cNvPr id="40" name="Textfeld 39">
-              <a:extLst>
-                <a:ext uri="{FF2B5EF4-FFF2-40B4-BE49-F238E27FC236}">
-                  <a16:creationId xmlns:a16="http://schemas.microsoft.com/office/drawing/2014/main" id="{0D460FE6-49BA-A131-B01D-0336D5937EB1}"/>
-                </a:ext>
-              </a:extLst>
-            </p:cNvPr>
-            <p:cNvSpPr txBox="1"/>
-            <p:nvPr/>
-          </p:nvSpPr>
-          <p:spPr>
-            <a:xfrm>
-              <a:off x="181105" y="1690499"/>
-              <a:ext cx="412147" cy="215444"/>
-            </a:xfrm>
-            <a:prstGeom prst="rect">
-              <a:avLst/>
-            </a:prstGeom>
-            <a:noFill/>
-          </p:spPr>
-          <p:txBody>
-            <a:bodyPr wrap="square" rtlCol="0" anchor="ctr">
-              <a:spAutoFit/>
-            </a:bodyPr>
-            <a:lstStyle/>
-            <a:p>
-              <a:pPr algn="ctr"/>
-              <a:r>
-                <a:rPr lang="de-DE" sz="800" dirty="0">
-                  <a:latin typeface="CMU Serif" panose="02000603000000000000" pitchFamily="2" charset="0"/>
-                  <a:ea typeface="CMU Serif" panose="02000603000000000000" pitchFamily="2" charset="0"/>
-                  <a:cs typeface="CMU Serif" panose="02000603000000000000" pitchFamily="2" charset="0"/>
-                </a:rPr>
-                <a:t>0,08</a:t>
-              </a:r>
-              <a:endParaRPr lang="de-DE" sz="800" baseline="-25000" dirty="0">
-                <a:latin typeface="CMU Serif" panose="02000603000000000000" pitchFamily="2" charset="0"/>
-                <a:ea typeface="CMU Serif" panose="02000603000000000000" pitchFamily="2" charset="0"/>
-                <a:cs typeface="CMU Serif" panose="02000603000000000000" pitchFamily="2" charset="0"/>
-              </a:endParaRPr>
-            </a:p>
-          </p:txBody>
-        </p:sp>
-        <p:sp>
-          <p:nvSpPr>
-            <p:cNvPr id="41" name="Textfeld 40">
-              <a:extLst>
-                <a:ext uri="{FF2B5EF4-FFF2-40B4-BE49-F238E27FC236}">
-                  <a16:creationId xmlns:a16="http://schemas.microsoft.com/office/drawing/2014/main" id="{D9E7EF81-AB4C-2EFE-FBB9-48CBFE359100}"/>
-                </a:ext>
-              </a:extLst>
-            </p:cNvPr>
-            <p:cNvSpPr txBox="1"/>
-            <p:nvPr/>
-          </p:nvSpPr>
-          <p:spPr>
-            <a:xfrm>
-              <a:off x="181105" y="2265994"/>
-              <a:ext cx="412147" cy="215444"/>
-            </a:xfrm>
-            <a:prstGeom prst="rect">
-              <a:avLst/>
-            </a:prstGeom>
-            <a:noFill/>
-          </p:spPr>
-          <p:txBody>
-            <a:bodyPr wrap="square" rtlCol="0" anchor="ctr">
-              <a:spAutoFit/>
-            </a:bodyPr>
-            <a:lstStyle/>
-            <a:p>
-              <a:pPr algn="ctr"/>
-              <a:r>
-                <a:rPr lang="de-DE" sz="800" dirty="0">
-                  <a:latin typeface="CMU Serif" panose="02000603000000000000" pitchFamily="2" charset="0"/>
-                  <a:ea typeface="CMU Serif" panose="02000603000000000000" pitchFamily="2" charset="0"/>
-                  <a:cs typeface="CMU Serif" panose="02000603000000000000" pitchFamily="2" charset="0"/>
-                </a:rPr>
-                <a:t>0,04</a:t>
-              </a:r>
-              <a:endParaRPr lang="de-DE" sz="800" baseline="-25000" dirty="0">
-                <a:latin typeface="CMU Serif" panose="02000603000000000000" pitchFamily="2" charset="0"/>
-                <a:ea typeface="CMU Serif" panose="02000603000000000000" pitchFamily="2" charset="0"/>
-                <a:cs typeface="CMU Serif" panose="02000603000000000000" pitchFamily="2" charset="0"/>
-              </a:endParaRPr>
-            </a:p>
-          </p:txBody>
-        </p:sp>
-        <p:sp>
-          <p:nvSpPr>
-            <p:cNvPr id="42" name="Textfeld 41">
-              <a:extLst>
-                <a:ext uri="{FF2B5EF4-FFF2-40B4-BE49-F238E27FC236}">
-                  <a16:creationId xmlns:a16="http://schemas.microsoft.com/office/drawing/2014/main" id="{8A06907F-8457-E947-E3B0-3B11B00B7271}"/>
-                </a:ext>
-              </a:extLst>
-            </p:cNvPr>
-            <p:cNvSpPr txBox="1"/>
-            <p:nvPr/>
-          </p:nvSpPr>
-          <p:spPr>
-            <a:xfrm>
-              <a:off x="213190" y="2848371"/>
-              <a:ext cx="412147" cy="215444"/>
-            </a:xfrm>
-            <a:prstGeom prst="rect">
-              <a:avLst/>
-            </a:prstGeom>
-            <a:noFill/>
-          </p:spPr>
-          <p:txBody>
-            <a:bodyPr wrap="square" rtlCol="0" anchor="ctr">
-              <a:spAutoFit/>
-            </a:bodyPr>
-            <a:lstStyle/>
-            <a:p>
-              <a:pPr algn="ctr"/>
-              <a:r>
-                <a:rPr lang="de-DE" sz="800" dirty="0">
-                  <a:latin typeface="CMU Serif" panose="02000603000000000000" pitchFamily="2" charset="0"/>
-                  <a:ea typeface="CMU Serif" panose="02000603000000000000" pitchFamily="2" charset="0"/>
-                  <a:cs typeface="CMU Serif" panose="02000603000000000000" pitchFamily="2" charset="0"/>
-                </a:rPr>
-                <a:t>0</a:t>
-              </a:r>
-              <a:endParaRPr lang="de-DE" sz="800" baseline="-25000" dirty="0">
-                <a:latin typeface="CMU Serif" panose="02000603000000000000" pitchFamily="2" charset="0"/>
-                <a:ea typeface="CMU Serif" panose="02000603000000000000" pitchFamily="2" charset="0"/>
-                <a:cs typeface="CMU Serif" panose="02000603000000000000" pitchFamily="2" charset="0"/>
-              </a:endParaRPr>
-            </a:p>
-          </p:txBody>
-        </p:sp>
-        <p:sp>
-          <p:nvSpPr>
-            <p:cNvPr id="43" name="Textfeld 42">
-              <a:extLst>
-                <a:ext uri="{FF2B5EF4-FFF2-40B4-BE49-F238E27FC236}">
-                  <a16:creationId xmlns:a16="http://schemas.microsoft.com/office/drawing/2014/main" id="{16130A72-B53A-0FFC-FF21-41B57CDA68B8}"/>
-                </a:ext>
-              </a:extLst>
-            </p:cNvPr>
-            <p:cNvSpPr txBox="1"/>
-            <p:nvPr/>
-          </p:nvSpPr>
-          <p:spPr>
-            <a:xfrm>
-              <a:off x="434356" y="3030411"/>
-              <a:ext cx="356907" cy="215444"/>
-            </a:xfrm>
-            <a:prstGeom prst="rect">
-              <a:avLst/>
-            </a:prstGeom>
-            <a:noFill/>
-          </p:spPr>
-          <p:txBody>
-            <a:bodyPr wrap="square" rtlCol="0" anchor="ctr">
-              <a:spAutoFit/>
-            </a:bodyPr>
-            <a:lstStyle/>
-            <a:p>
-              <a:pPr algn="ctr"/>
-              <a:r>
-                <a:rPr lang="de-DE" sz="800" dirty="0">
-                  <a:latin typeface="CMU Serif" panose="02000603000000000000" pitchFamily="2" charset="0"/>
-                  <a:ea typeface="CMU Serif" panose="02000603000000000000" pitchFamily="2" charset="0"/>
-                  <a:cs typeface="CMU Serif" panose="02000603000000000000" pitchFamily="2" charset="0"/>
-                </a:rPr>
-                <a:t>0</a:t>
-              </a:r>
-              <a:endParaRPr lang="de-DE" sz="800" baseline="-25000" dirty="0">
-                <a:latin typeface="CMU Serif" panose="02000603000000000000" pitchFamily="2" charset="0"/>
-                <a:ea typeface="CMU Serif" panose="02000603000000000000" pitchFamily="2" charset="0"/>
-                <a:cs typeface="CMU Serif" panose="02000603000000000000" pitchFamily="2" charset="0"/>
-              </a:endParaRPr>
-            </a:p>
-          </p:txBody>
-        </p:sp>
-        <p:sp>
-          <p:nvSpPr>
-            <p:cNvPr id="44" name="Textfeld 43">
-              <a:extLst>
-                <a:ext uri="{FF2B5EF4-FFF2-40B4-BE49-F238E27FC236}">
-                  <a16:creationId xmlns:a16="http://schemas.microsoft.com/office/drawing/2014/main" id="{1EE4F030-7E5E-6278-3244-D2813CC18B29}"/>
-                </a:ext>
-              </a:extLst>
-            </p:cNvPr>
-            <p:cNvSpPr txBox="1"/>
-            <p:nvPr/>
-          </p:nvSpPr>
-          <p:spPr>
-            <a:xfrm>
-              <a:off x="908462" y="3025596"/>
-              <a:ext cx="356907" cy="215444"/>
-            </a:xfrm>
-            <a:prstGeom prst="rect">
-              <a:avLst/>
-            </a:prstGeom>
-            <a:noFill/>
-          </p:spPr>
-          <p:txBody>
-            <a:bodyPr wrap="square" rtlCol="0" anchor="ctr">
-              <a:spAutoFit/>
-            </a:bodyPr>
-            <a:lstStyle/>
-            <a:p>
-              <a:pPr algn="ctr"/>
-              <a:r>
-                <a:rPr lang="de-DE" sz="800" dirty="0">
-                  <a:latin typeface="CMU Serif" panose="02000603000000000000" pitchFamily="2" charset="0"/>
-                  <a:ea typeface="CMU Serif" panose="02000603000000000000" pitchFamily="2" charset="0"/>
-                  <a:cs typeface="CMU Serif" panose="02000603000000000000" pitchFamily="2" charset="0"/>
-                </a:rPr>
-                <a:t>0,2</a:t>
-              </a:r>
-              <a:endParaRPr lang="de-DE" sz="800" baseline="-25000" dirty="0">
-                <a:latin typeface="CMU Serif" panose="02000603000000000000" pitchFamily="2" charset="0"/>
-                <a:ea typeface="CMU Serif" panose="02000603000000000000" pitchFamily="2" charset="0"/>
-                <a:cs typeface="CMU Serif" panose="02000603000000000000" pitchFamily="2" charset="0"/>
-              </a:endParaRPr>
-            </a:p>
-          </p:txBody>
-        </p:sp>
-        <p:sp>
-          <p:nvSpPr>
-            <p:cNvPr id="45" name="Textfeld 44">
-              <a:extLst>
-                <a:ext uri="{FF2B5EF4-FFF2-40B4-BE49-F238E27FC236}">
-                  <a16:creationId xmlns:a16="http://schemas.microsoft.com/office/drawing/2014/main" id="{589CF959-E7E1-7C61-46C4-2E98A5EF95B5}"/>
-                </a:ext>
-              </a:extLst>
-            </p:cNvPr>
-            <p:cNvSpPr txBox="1"/>
-            <p:nvPr/>
-          </p:nvSpPr>
-          <p:spPr>
-            <a:xfrm>
-              <a:off x="1382568" y="3025595"/>
-              <a:ext cx="356907" cy="215444"/>
-            </a:xfrm>
-            <a:prstGeom prst="rect">
-              <a:avLst/>
-            </a:prstGeom>
-            <a:noFill/>
-          </p:spPr>
-          <p:txBody>
-            <a:bodyPr wrap="square" rtlCol="0" anchor="ctr">
-              <a:spAutoFit/>
-            </a:bodyPr>
-            <a:lstStyle/>
-            <a:p>
-              <a:pPr algn="ctr"/>
-              <a:r>
-                <a:rPr lang="de-DE" sz="800" dirty="0">
-                  <a:latin typeface="CMU Serif" panose="02000603000000000000" pitchFamily="2" charset="0"/>
-                  <a:ea typeface="CMU Serif" panose="02000603000000000000" pitchFamily="2" charset="0"/>
-                  <a:cs typeface="CMU Serif" panose="02000603000000000000" pitchFamily="2" charset="0"/>
-                </a:rPr>
-                <a:t>0,4</a:t>
-              </a:r>
-              <a:endParaRPr lang="de-DE" sz="800" baseline="-25000" dirty="0">
-                <a:latin typeface="CMU Serif" panose="02000603000000000000" pitchFamily="2" charset="0"/>
-                <a:ea typeface="CMU Serif" panose="02000603000000000000" pitchFamily="2" charset="0"/>
-                <a:cs typeface="CMU Serif" panose="02000603000000000000" pitchFamily="2" charset="0"/>
-              </a:endParaRPr>
-            </a:p>
-          </p:txBody>
-        </p:sp>
-        <p:sp>
-          <p:nvSpPr>
-            <p:cNvPr id="46" name="Textfeld 45">
-              <a:extLst>
-                <a:ext uri="{FF2B5EF4-FFF2-40B4-BE49-F238E27FC236}">
-                  <a16:creationId xmlns:a16="http://schemas.microsoft.com/office/drawing/2014/main" id="{DBE7F180-3B61-07D6-3C90-E46A0E995FF5}"/>
-                </a:ext>
-              </a:extLst>
-            </p:cNvPr>
-            <p:cNvSpPr txBox="1"/>
-            <p:nvPr/>
-          </p:nvSpPr>
-          <p:spPr>
-            <a:xfrm>
-              <a:off x="1856674" y="3025594"/>
-              <a:ext cx="356907" cy="215444"/>
-            </a:xfrm>
-            <a:prstGeom prst="rect">
-              <a:avLst/>
-            </a:prstGeom>
-            <a:noFill/>
-          </p:spPr>
-          <p:txBody>
-            <a:bodyPr wrap="square" rtlCol="0" anchor="ctr">
-              <a:spAutoFit/>
-            </a:bodyPr>
-            <a:lstStyle/>
-            <a:p>
-              <a:pPr algn="ctr"/>
-              <a:r>
-                <a:rPr lang="de-DE" sz="800" dirty="0">
-                  <a:latin typeface="CMU Serif" panose="02000603000000000000" pitchFamily="2" charset="0"/>
-                  <a:ea typeface="CMU Serif" panose="02000603000000000000" pitchFamily="2" charset="0"/>
-                  <a:cs typeface="CMU Serif" panose="02000603000000000000" pitchFamily="2" charset="0"/>
-                </a:rPr>
-                <a:t>0,6</a:t>
-              </a:r>
-              <a:endParaRPr lang="de-DE" sz="800" baseline="-25000" dirty="0">
-                <a:latin typeface="CMU Serif" panose="02000603000000000000" pitchFamily="2" charset="0"/>
-                <a:ea typeface="CMU Serif" panose="02000603000000000000" pitchFamily="2" charset="0"/>
-                <a:cs typeface="CMU Serif" panose="02000603000000000000" pitchFamily="2" charset="0"/>
-              </a:endParaRPr>
-            </a:p>
-          </p:txBody>
-        </p:sp>
-        <p:sp>
-          <p:nvSpPr>
-            <p:cNvPr id="47" name="Textfeld 46">
-              <a:extLst>
-                <a:ext uri="{FF2B5EF4-FFF2-40B4-BE49-F238E27FC236}">
-                  <a16:creationId xmlns:a16="http://schemas.microsoft.com/office/drawing/2014/main" id="{A6107613-11D1-5E4B-4933-0A5FD50C5D8E}"/>
-                </a:ext>
-              </a:extLst>
-            </p:cNvPr>
-            <p:cNvSpPr txBox="1"/>
-            <p:nvPr/>
-          </p:nvSpPr>
-          <p:spPr>
-            <a:xfrm>
-              <a:off x="2330780" y="3025593"/>
-              <a:ext cx="356907" cy="215444"/>
-            </a:xfrm>
-            <a:prstGeom prst="rect">
-              <a:avLst/>
-            </a:prstGeom>
-            <a:noFill/>
-          </p:spPr>
-          <p:txBody>
-            <a:bodyPr wrap="square" rtlCol="0" anchor="ctr">
-              <a:spAutoFit/>
-            </a:bodyPr>
-            <a:lstStyle/>
-            <a:p>
-              <a:pPr algn="ctr"/>
-              <a:r>
-                <a:rPr lang="de-DE" sz="800" dirty="0">
-                  <a:latin typeface="CMU Serif" panose="02000603000000000000" pitchFamily="2" charset="0"/>
-                  <a:ea typeface="CMU Serif" panose="02000603000000000000" pitchFamily="2" charset="0"/>
-                  <a:cs typeface="CMU Serif" panose="02000603000000000000" pitchFamily="2" charset="0"/>
-                </a:rPr>
-                <a:t>0,8</a:t>
-              </a:r>
-              <a:endParaRPr lang="de-DE" sz="800" baseline="-25000" dirty="0">
-                <a:latin typeface="CMU Serif" panose="02000603000000000000" pitchFamily="2" charset="0"/>
-                <a:ea typeface="CMU Serif" panose="02000603000000000000" pitchFamily="2" charset="0"/>
-                <a:cs typeface="CMU Serif" panose="02000603000000000000" pitchFamily="2" charset="0"/>
-              </a:endParaRPr>
-            </a:p>
-          </p:txBody>
-        </p:sp>
-        <p:sp>
-          <p:nvSpPr>
-            <p:cNvPr id="48" name="Textfeld 47">
-              <a:extLst>
-                <a:ext uri="{FF2B5EF4-FFF2-40B4-BE49-F238E27FC236}">
-                  <a16:creationId xmlns:a16="http://schemas.microsoft.com/office/drawing/2014/main" id="{CA4066A9-6BC8-B0F8-3E47-BA7B47274121}"/>
-                </a:ext>
-              </a:extLst>
-            </p:cNvPr>
-            <p:cNvSpPr txBox="1"/>
-            <p:nvPr/>
-          </p:nvSpPr>
-          <p:spPr>
-            <a:xfrm>
-              <a:off x="2804886" y="3023580"/>
-              <a:ext cx="356907" cy="215444"/>
-            </a:xfrm>
-            <a:prstGeom prst="rect">
-              <a:avLst/>
-            </a:prstGeom>
-            <a:noFill/>
-          </p:spPr>
-          <p:txBody>
-            <a:bodyPr wrap="square" rtlCol="0" anchor="ctr">
-              <a:spAutoFit/>
-            </a:bodyPr>
-            <a:lstStyle/>
-            <a:p>
-              <a:pPr algn="ctr"/>
-              <a:r>
-                <a:rPr lang="de-DE" sz="800" dirty="0">
-                  <a:latin typeface="CMU Serif" panose="02000603000000000000" pitchFamily="2" charset="0"/>
-                  <a:ea typeface="CMU Serif" panose="02000603000000000000" pitchFamily="2" charset="0"/>
-                  <a:cs typeface="CMU Serif" panose="02000603000000000000" pitchFamily="2" charset="0"/>
-                </a:rPr>
-                <a:t>1,0</a:t>
-              </a:r>
-              <a:endParaRPr lang="de-DE" sz="800" baseline="-25000" dirty="0">
-                <a:latin typeface="CMU Serif" panose="02000603000000000000" pitchFamily="2" charset="0"/>
-                <a:ea typeface="CMU Serif" panose="02000603000000000000" pitchFamily="2" charset="0"/>
-                <a:cs typeface="CMU Serif" panose="02000603000000000000" pitchFamily="2" charset="0"/>
-              </a:endParaRPr>
-            </a:p>
-          </p:txBody>
-        </p:sp>
-      </p:grpSp>
-      <p:sp>
-        <p:nvSpPr>
-          <p:cNvPr id="62" name="Rechteck 61">
-            <a:extLst>
-              <a:ext uri="{FF2B5EF4-FFF2-40B4-BE49-F238E27FC236}">
-                <a16:creationId xmlns:a16="http://schemas.microsoft.com/office/drawing/2014/main" id="{4C9A8623-824D-5A61-F8E1-0F7607F3BC5F}"/>
-              </a:ext>
-            </a:extLst>
-          </p:cNvPr>
-          <p:cNvSpPr/>
-          <p:nvPr/>
-        </p:nvSpPr>
-        <p:spPr>
-          <a:xfrm>
-            <a:off x="2461030" y="1545193"/>
-            <a:ext cx="254874" cy="137108"/>
-          </a:xfrm>
-          <a:prstGeom prst="rect">
-            <a:avLst/>
-          </a:prstGeom>
-          <a:solidFill>
-            <a:schemeClr val="bg1"/>
-          </a:solidFill>
-          <a:ln>
-            <a:noFill/>
-          </a:ln>
-        </p:spPr>
-        <p:style>
-          <a:lnRef idx="2">
-            <a:schemeClr val="accent1">
-              <a:shade val="15000"/>
-            </a:schemeClr>
-          </a:lnRef>
-          <a:fillRef idx="1">
-            <a:schemeClr val="accent1"/>
-          </a:fillRef>
-          <a:effectRef idx="0">
-            <a:schemeClr val="accent1"/>
-          </a:effectRef>
-          <a:fontRef idx="minor">
-            <a:schemeClr val="lt1"/>
-          </a:fontRef>
-        </p:style>
-        <p:txBody>
-          <a:bodyPr rtlCol="0" anchor="ctr"/>
-          <a:lstStyle/>
-          <a:p>
-            <a:pPr algn="ctr"/>
-            <a:endParaRPr lang="de-DE"/>
-          </a:p>
-        </p:txBody>
-      </p:sp>
-      <p:sp>
-        <p:nvSpPr>
-          <p:cNvPr id="52" name="Textfeld 51">
-            <a:extLst>
-              <a:ext uri="{FF2B5EF4-FFF2-40B4-BE49-F238E27FC236}">
-                <a16:creationId xmlns:a16="http://schemas.microsoft.com/office/drawing/2014/main" id="{546A3AD7-2388-FF4D-094F-AB47E15F56F8}"/>
-              </a:ext>
-            </a:extLst>
-          </p:cNvPr>
-          <p:cNvSpPr txBox="1"/>
-          <p:nvPr/>
-        </p:nvSpPr>
-        <p:spPr>
-          <a:xfrm>
-            <a:off x="1711156" y="3126962"/>
-            <a:ext cx="356907" cy="215444"/>
-          </a:xfrm>
-          <a:prstGeom prst="rect">
-            <a:avLst/>
-          </a:prstGeom>
-          <a:noFill/>
-        </p:spPr>
-        <p:txBody>
-          <a:bodyPr wrap="square" rtlCol="0" anchor="ctr">
-            <a:spAutoFit/>
-          </a:bodyPr>
-          <a:lstStyle/>
-          <a:p>
-            <a:pPr algn="ctr"/>
-            <a:r>
-              <a:rPr lang="de-DE" sz="800" i="1" dirty="0">
-                <a:latin typeface="Latin Modern Math" panose="02000503000000000000" pitchFamily="50" charset="0"/>
-                <a:ea typeface="Latin Modern Math" panose="02000503000000000000" pitchFamily="50" charset="0"/>
-                <a:cs typeface="CMU Serif" panose="02000603000000000000" pitchFamily="2" charset="0"/>
-              </a:rPr>
-              <a:t>λ</a:t>
-            </a:r>
-            <a:endParaRPr lang="de-DE" sz="800" i="1" baseline="-25000" dirty="0">
-              <a:latin typeface="Latin Modern Math" panose="02000503000000000000" pitchFamily="50" charset="0"/>
-              <a:ea typeface="Latin Modern Math" panose="02000503000000000000" pitchFamily="50" charset="0"/>
-              <a:cs typeface="CMU Serif" panose="02000603000000000000" pitchFamily="2" charset="0"/>
-            </a:endParaRPr>
-          </a:p>
-        </p:txBody>
-      </p:sp>
-      <p:sp>
-        <p:nvSpPr>
-          <p:cNvPr id="53" name="Textfeld 52">
-            <a:extLst>
-              <a:ext uri="{FF2B5EF4-FFF2-40B4-BE49-F238E27FC236}">
-                <a16:creationId xmlns:a16="http://schemas.microsoft.com/office/drawing/2014/main" id="{7F4CB9EF-4F44-BC04-E829-6A9E01CEEE50}"/>
-              </a:ext>
-            </a:extLst>
-          </p:cNvPr>
-          <p:cNvSpPr txBox="1"/>
-          <p:nvPr/>
-        </p:nvSpPr>
-        <p:spPr>
-          <a:xfrm>
-            <a:off x="318711" y="768863"/>
-            <a:ext cx="356907" cy="215444"/>
-          </a:xfrm>
-          <a:prstGeom prst="rect">
-            <a:avLst/>
-          </a:prstGeom>
-          <a:noFill/>
-        </p:spPr>
-        <p:txBody>
-          <a:bodyPr wrap="square" rtlCol="0" anchor="ctr">
-            <a:spAutoFit/>
-          </a:bodyPr>
-          <a:lstStyle/>
-          <a:p>
-            <a:pPr algn="ctr"/>
-            <a:r>
-              <a:rPr lang="de-DE" sz="800" i="1" dirty="0">
-                <a:latin typeface="Latin Modern Math" panose="02000503000000000000" pitchFamily="50" charset="0"/>
-                <a:ea typeface="Latin Modern Math" panose="02000503000000000000" pitchFamily="50" charset="0"/>
-                <a:cs typeface="CMU Serif" panose="02000603000000000000" pitchFamily="2" charset="0"/>
-              </a:rPr>
-              <a:t>δ</a:t>
-            </a:r>
-            <a:endParaRPr lang="de-DE" sz="800" i="1" baseline="-25000" dirty="0">
-              <a:latin typeface="Latin Modern Math" panose="02000503000000000000" pitchFamily="50" charset="0"/>
-              <a:ea typeface="Latin Modern Math" panose="02000503000000000000" pitchFamily="50" charset="0"/>
-              <a:cs typeface="CMU Serif" panose="02000603000000000000" pitchFamily="2" charset="0"/>
-            </a:endParaRPr>
-          </a:p>
-        </p:txBody>
-      </p:sp>
-      <p:sp>
-        <p:nvSpPr>
-          <p:cNvPr id="54" name="Freihandform: Form 53">
-            <a:extLst>
-              <a:ext uri="{FF2B5EF4-FFF2-40B4-BE49-F238E27FC236}">
-                <a16:creationId xmlns:a16="http://schemas.microsoft.com/office/drawing/2014/main" id="{B94B4EC5-74EE-1552-5E90-561BED20E40C}"/>
-              </a:ext>
-            </a:extLst>
-          </p:cNvPr>
-          <p:cNvSpPr/>
-          <p:nvPr/>
-        </p:nvSpPr>
-        <p:spPr>
-          <a:xfrm>
-            <a:off x="710565" y="692064"/>
-            <a:ext cx="2366010" cy="2106640"/>
-          </a:xfrm>
-          <a:custGeom>
-            <a:avLst/>
-            <a:gdLst>
-              <a:gd name="csX0" fmla="*/ 0 w 2383076"/>
-              <a:gd name="csY0" fmla="*/ 0 h 2082558"/>
-              <a:gd name="csX1" fmla="*/ 303756 w 2383076"/>
-              <a:gd name="csY1" fmla="*/ 1734855 h 2082558"/>
-              <a:gd name="csX2" fmla="*/ 591854 w 2383076"/>
-              <a:gd name="csY2" fmla="*/ 2076189 h 2082558"/>
-              <a:gd name="csX3" fmla="*/ 1180578 w 2383076"/>
-              <a:gd name="csY3" fmla="*/ 1910219 h 2082558"/>
-              <a:gd name="csX4" fmla="*/ 1781827 w 2383076"/>
-              <a:gd name="csY4" fmla="*/ 1349679 h 2082558"/>
-              <a:gd name="csX5" fmla="*/ 2383076 w 2383076"/>
-              <a:gd name="csY5" fmla="*/ 670142 h 2082558"/>
-              <a:gd name="csX0" fmla="*/ 0 w 2383076"/>
-              <a:gd name="csY0" fmla="*/ 0 h 2082558"/>
-              <a:gd name="csX1" fmla="*/ 303756 w 2383076"/>
-              <a:gd name="csY1" fmla="*/ 1734855 h 2082558"/>
-              <a:gd name="csX2" fmla="*/ 591854 w 2383076"/>
-              <a:gd name="csY2" fmla="*/ 2076189 h 2082558"/>
-              <a:gd name="csX3" fmla="*/ 1180578 w 2383076"/>
-              <a:gd name="csY3" fmla="*/ 1910219 h 2082558"/>
-              <a:gd name="csX4" fmla="*/ 1781827 w 2383076"/>
-              <a:gd name="csY4" fmla="*/ 1349679 h 2082558"/>
-              <a:gd name="csX5" fmla="*/ 2383076 w 2383076"/>
-              <a:gd name="csY5" fmla="*/ 670142 h 2082558"/>
-              <a:gd name="csX0" fmla="*/ 0 w 2383076"/>
-              <a:gd name="csY0" fmla="*/ 0 h 2103263"/>
-              <a:gd name="csX1" fmla="*/ 303756 w 2383076"/>
-              <a:gd name="csY1" fmla="*/ 1734855 h 2103263"/>
-              <a:gd name="csX2" fmla="*/ 591854 w 2383076"/>
-              <a:gd name="csY2" fmla="*/ 2076189 h 2103263"/>
-              <a:gd name="csX3" fmla="*/ 1180578 w 2383076"/>
-              <a:gd name="csY3" fmla="*/ 1910219 h 2103263"/>
-              <a:gd name="csX4" fmla="*/ 1781827 w 2383076"/>
-              <a:gd name="csY4" fmla="*/ 1349679 h 2103263"/>
-              <a:gd name="csX5" fmla="*/ 2383076 w 2383076"/>
-              <a:gd name="csY5" fmla="*/ 670142 h 2103263"/>
-              <a:gd name="csX0" fmla="*/ 0 w 2383076"/>
-              <a:gd name="csY0" fmla="*/ 0 h 2106144"/>
-              <a:gd name="csX1" fmla="*/ 303756 w 2383076"/>
-              <a:gd name="csY1" fmla="*/ 1734855 h 2106144"/>
-              <a:gd name="csX2" fmla="*/ 591854 w 2383076"/>
-              <a:gd name="csY2" fmla="*/ 2076189 h 2106144"/>
-              <a:gd name="csX3" fmla="*/ 1180578 w 2383076"/>
-              <a:gd name="csY3" fmla="*/ 1910219 h 2106144"/>
-              <a:gd name="csX4" fmla="*/ 1781827 w 2383076"/>
-              <a:gd name="csY4" fmla="*/ 1349679 h 2106144"/>
-              <a:gd name="csX5" fmla="*/ 2383076 w 2383076"/>
-              <a:gd name="csY5" fmla="*/ 670142 h 2106144"/>
-              <a:gd name="csX0" fmla="*/ 0 w 2383076"/>
-              <a:gd name="csY0" fmla="*/ 0 h 2108624"/>
-              <a:gd name="csX1" fmla="*/ 303756 w 2383076"/>
-              <a:gd name="csY1" fmla="*/ 1734855 h 2108624"/>
-              <a:gd name="csX2" fmla="*/ 591854 w 2383076"/>
-              <a:gd name="csY2" fmla="*/ 2076189 h 2108624"/>
-              <a:gd name="csX3" fmla="*/ 1180578 w 2383076"/>
-              <a:gd name="csY3" fmla="*/ 1910219 h 2108624"/>
-              <a:gd name="csX4" fmla="*/ 1781827 w 2383076"/>
-              <a:gd name="csY4" fmla="*/ 1349679 h 2108624"/>
-              <a:gd name="csX5" fmla="*/ 2383076 w 2383076"/>
-              <a:gd name="csY5" fmla="*/ 670142 h 2108624"/>
-              <a:gd name="csX0" fmla="*/ 0 w 2383076"/>
-              <a:gd name="csY0" fmla="*/ 0 h 2085300"/>
-              <a:gd name="csX1" fmla="*/ 303756 w 2383076"/>
-              <a:gd name="csY1" fmla="*/ 1734855 h 2085300"/>
-              <a:gd name="csX2" fmla="*/ 591854 w 2383076"/>
-              <a:gd name="csY2" fmla="*/ 2076189 h 2085300"/>
-              <a:gd name="csX3" fmla="*/ 1178673 w 2383076"/>
-              <a:gd name="csY3" fmla="*/ 1908314 h 2085300"/>
-              <a:gd name="csX4" fmla="*/ 1781827 w 2383076"/>
-              <a:gd name="csY4" fmla="*/ 1349679 h 2085300"/>
-              <a:gd name="csX5" fmla="*/ 2383076 w 2383076"/>
-              <a:gd name="csY5" fmla="*/ 670142 h 2085300"/>
-              <a:gd name="csX0" fmla="*/ 0 w 2383076"/>
-              <a:gd name="csY0" fmla="*/ 0 h 2104106"/>
-              <a:gd name="csX1" fmla="*/ 303756 w 2383076"/>
-              <a:gd name="csY1" fmla="*/ 1734855 h 2104106"/>
-              <a:gd name="csX2" fmla="*/ 591854 w 2383076"/>
-              <a:gd name="csY2" fmla="*/ 2076189 h 2104106"/>
-              <a:gd name="csX3" fmla="*/ 1178673 w 2383076"/>
-              <a:gd name="csY3" fmla="*/ 1908314 h 2104106"/>
-              <a:gd name="csX4" fmla="*/ 1781827 w 2383076"/>
-              <a:gd name="csY4" fmla="*/ 1349679 h 2104106"/>
-              <a:gd name="csX5" fmla="*/ 2383076 w 2383076"/>
-              <a:gd name="csY5" fmla="*/ 670142 h 2104106"/>
-              <a:gd name="csX0" fmla="*/ 0 w 2383076"/>
-              <a:gd name="csY0" fmla="*/ 0 h 2098989"/>
-              <a:gd name="csX1" fmla="*/ 303756 w 2383076"/>
-              <a:gd name="csY1" fmla="*/ 1734855 h 2098989"/>
-              <a:gd name="csX2" fmla="*/ 591854 w 2383076"/>
-              <a:gd name="csY2" fmla="*/ 2076189 h 2098989"/>
-              <a:gd name="csX3" fmla="*/ 1178673 w 2383076"/>
-              <a:gd name="csY3" fmla="*/ 1908314 h 2098989"/>
-              <a:gd name="csX4" fmla="*/ 1774207 w 2383076"/>
-              <a:gd name="csY4" fmla="*/ 1355394 h 2098989"/>
-              <a:gd name="csX5" fmla="*/ 2383076 w 2383076"/>
-              <a:gd name="csY5" fmla="*/ 670142 h 2098989"/>
-              <a:gd name="csX0" fmla="*/ 0 w 2383076"/>
-              <a:gd name="csY0" fmla="*/ 0 h 2104321"/>
-              <a:gd name="csX1" fmla="*/ 303756 w 2383076"/>
-              <a:gd name="csY1" fmla="*/ 1734855 h 2104321"/>
-              <a:gd name="csX2" fmla="*/ 591854 w 2383076"/>
-              <a:gd name="csY2" fmla="*/ 2076189 h 2104321"/>
-              <a:gd name="csX3" fmla="*/ 1178673 w 2383076"/>
-              <a:gd name="csY3" fmla="*/ 1908314 h 2104321"/>
-              <a:gd name="csX4" fmla="*/ 1774207 w 2383076"/>
-              <a:gd name="csY4" fmla="*/ 1355394 h 2104321"/>
-              <a:gd name="csX5" fmla="*/ 2383076 w 2383076"/>
-              <a:gd name="csY5" fmla="*/ 670142 h 2104321"/>
-              <a:gd name="csX0" fmla="*/ 0 w 2383076"/>
-              <a:gd name="csY0" fmla="*/ 0 h 2106640"/>
-              <a:gd name="csX1" fmla="*/ 303756 w 2383076"/>
-              <a:gd name="csY1" fmla="*/ 1734855 h 2106640"/>
-              <a:gd name="csX2" fmla="*/ 591854 w 2383076"/>
-              <a:gd name="csY2" fmla="*/ 2076189 h 2106640"/>
-              <a:gd name="csX3" fmla="*/ 1178673 w 2383076"/>
-              <a:gd name="csY3" fmla="*/ 1908314 h 2106640"/>
-              <a:gd name="csX4" fmla="*/ 1774207 w 2383076"/>
-              <a:gd name="csY4" fmla="*/ 1355394 h 2106640"/>
-              <a:gd name="csX5" fmla="*/ 2383076 w 2383076"/>
-              <a:gd name="csY5" fmla="*/ 670142 h 2106640"/>
-              <a:gd name="csX0" fmla="*/ 0 w 2383076"/>
-              <a:gd name="csY0" fmla="*/ 0 h 2106640"/>
-              <a:gd name="csX1" fmla="*/ 303756 w 2383076"/>
-              <a:gd name="csY1" fmla="*/ 1734855 h 2106640"/>
-              <a:gd name="csX2" fmla="*/ 591854 w 2383076"/>
-              <a:gd name="csY2" fmla="*/ 2076189 h 2106640"/>
-              <a:gd name="csX3" fmla="*/ 1178673 w 2383076"/>
-              <a:gd name="csY3" fmla="*/ 1908314 h 2106640"/>
-              <a:gd name="csX4" fmla="*/ 1774207 w 2383076"/>
-              <a:gd name="csY4" fmla="*/ 1355394 h 2106640"/>
-              <a:gd name="csX5" fmla="*/ 2383076 w 2383076"/>
-              <a:gd name="csY5" fmla="*/ 670142 h 2106640"/>
-            </a:gdLst>
-            <a:ahLst/>
-            <a:cxnLst>
-              <a:cxn ang="0">
-                <a:pos x="csX0" y="csY0"/>
-              </a:cxn>
-              <a:cxn ang="0">
-                <a:pos x="csX1" y="csY1"/>
-              </a:cxn>
-              <a:cxn ang="0">
-                <a:pos x="csX2" y="csY2"/>
-              </a:cxn>
-              <a:cxn ang="0">
-                <a:pos x="csX3" y="csY3"/>
-              </a:cxn>
-              <a:cxn ang="0">
-                <a:pos x="csX4" y="csY4"/>
-              </a:cxn>
-              <a:cxn ang="0">
-                <a:pos x="csX5" y="csY5"/>
-              </a:cxn>
-            </a:cxnLst>
-            <a:rect l="l" t="t" r="r" b="b"/>
-            <a:pathLst>
-              <a:path w="2383076" h="2106640">
-                <a:moveTo>
-                  <a:pt x="0" y="0"/>
-                </a:moveTo>
-                <a:cubicBezTo>
-                  <a:pt x="68267" y="1109702"/>
-                  <a:pt x="218449" y="1567894"/>
-                  <a:pt x="303756" y="1734855"/>
-                </a:cubicBezTo>
-                <a:cubicBezTo>
-                  <a:pt x="389063" y="1901816"/>
-                  <a:pt x="423175" y="1982509"/>
-                  <a:pt x="591854" y="2076189"/>
-                </a:cubicBezTo>
-                <a:cubicBezTo>
-                  <a:pt x="760533" y="2169869"/>
-                  <a:pt x="981614" y="2028446"/>
-                  <a:pt x="1178673" y="1908314"/>
-                </a:cubicBezTo>
-                <a:cubicBezTo>
-                  <a:pt x="1375732" y="1788182"/>
-                  <a:pt x="1573791" y="1562073"/>
-                  <a:pt x="1774207" y="1355394"/>
-                </a:cubicBezTo>
-                <a:cubicBezTo>
-                  <a:pt x="1974623" y="1148715"/>
-                  <a:pt x="2182659" y="906571"/>
-                  <a:pt x="2383076" y="670142"/>
-                </a:cubicBezTo>
-              </a:path>
-            </a:pathLst>
-          </a:custGeom>
-          <a:noFill/>
-          <a:ln cap="rnd">
-            <a:solidFill>
-              <a:schemeClr val="accent6">
-                <a:lumMod val="75000"/>
-              </a:schemeClr>
-            </a:solidFill>
-            <a:round/>
-          </a:ln>
-        </p:spPr>
-        <p:style>
-          <a:lnRef idx="2">
-            <a:schemeClr val="accent1">
-              <a:shade val="15000"/>
-            </a:schemeClr>
-          </a:lnRef>
-          <a:fillRef idx="1">
-            <a:schemeClr val="accent1"/>
-          </a:fillRef>
-          <a:effectRef idx="0">
-            <a:schemeClr val="accent1"/>
-          </a:effectRef>
-          <a:fontRef idx="minor">
-            <a:schemeClr val="lt1"/>
-          </a:fontRef>
-        </p:style>
-        <p:txBody>
-          <a:bodyPr rtlCol="0" anchor="ctr"/>
-          <a:lstStyle/>
-          <a:p>
-            <a:pPr algn="ctr"/>
-            <a:endParaRPr lang="de-DE"/>
-          </a:p>
-        </p:txBody>
-      </p:sp>
-      <p:sp>
-        <p:nvSpPr>
-          <p:cNvPr id="55" name="Freihandform: Form 54">
-            <a:extLst>
-              <a:ext uri="{FF2B5EF4-FFF2-40B4-BE49-F238E27FC236}">
-                <a16:creationId xmlns:a16="http://schemas.microsoft.com/office/drawing/2014/main" id="{523CF2AF-B700-41B1-56DF-079E37A9F36F}"/>
-              </a:ext>
-            </a:extLst>
-          </p:cNvPr>
-          <p:cNvSpPr/>
-          <p:nvPr/>
-        </p:nvSpPr>
-        <p:spPr>
-          <a:xfrm>
-            <a:off x="710565" y="986791"/>
-            <a:ext cx="2367915" cy="1866984"/>
-          </a:xfrm>
-          <a:custGeom>
-            <a:avLst/>
-            <a:gdLst>
-              <a:gd name="csX0" fmla="*/ 0 w 2377440"/>
-              <a:gd name="csY0" fmla="*/ 0 h 1851059"/>
-              <a:gd name="csX1" fmla="*/ 300990 w 2377440"/>
-              <a:gd name="csY1" fmla="*/ 1550670 h 1851059"/>
-              <a:gd name="csX2" fmla="*/ 586740 w 2377440"/>
-              <a:gd name="csY2" fmla="*/ 1845945 h 1851059"/>
-              <a:gd name="csX3" fmla="*/ 1175385 w 2377440"/>
-              <a:gd name="csY3" fmla="*/ 1701165 h 1851059"/>
-              <a:gd name="csX4" fmla="*/ 1771650 w 2377440"/>
-              <a:gd name="csY4" fmla="*/ 1247775 h 1851059"/>
-              <a:gd name="csX5" fmla="*/ 2377440 w 2377440"/>
-              <a:gd name="csY5" fmla="*/ 672465 h 1851059"/>
-              <a:gd name="csX0" fmla="*/ 0 w 2377440"/>
-              <a:gd name="csY0" fmla="*/ 0 h 1851059"/>
-              <a:gd name="csX1" fmla="*/ 300990 w 2377440"/>
-              <a:gd name="csY1" fmla="*/ 1550670 h 1851059"/>
-              <a:gd name="csX2" fmla="*/ 586740 w 2377440"/>
-              <a:gd name="csY2" fmla="*/ 1845945 h 1851059"/>
-              <a:gd name="csX3" fmla="*/ 1175385 w 2377440"/>
-              <a:gd name="csY3" fmla="*/ 1701165 h 1851059"/>
-              <a:gd name="csX4" fmla="*/ 1771650 w 2377440"/>
-              <a:gd name="csY4" fmla="*/ 1247775 h 1851059"/>
-              <a:gd name="csX5" fmla="*/ 2377440 w 2377440"/>
-              <a:gd name="csY5" fmla="*/ 672465 h 1851059"/>
-              <a:gd name="csX0" fmla="*/ 0 w 2377440"/>
-              <a:gd name="csY0" fmla="*/ 0 h 1851059"/>
-              <a:gd name="csX1" fmla="*/ 300990 w 2377440"/>
-              <a:gd name="csY1" fmla="*/ 1550670 h 1851059"/>
-              <a:gd name="csX2" fmla="*/ 586740 w 2377440"/>
-              <a:gd name="csY2" fmla="*/ 1845945 h 1851059"/>
-              <a:gd name="csX3" fmla="*/ 1175385 w 2377440"/>
-              <a:gd name="csY3" fmla="*/ 1701165 h 1851059"/>
-              <a:gd name="csX4" fmla="*/ 1771650 w 2377440"/>
-              <a:gd name="csY4" fmla="*/ 1247775 h 1851059"/>
-              <a:gd name="csX5" fmla="*/ 2377440 w 2377440"/>
-              <a:gd name="csY5" fmla="*/ 672465 h 1851059"/>
-              <a:gd name="csX0" fmla="*/ 0 w 2377440"/>
-              <a:gd name="csY0" fmla="*/ 0 h 1866984"/>
-              <a:gd name="csX1" fmla="*/ 300990 w 2377440"/>
-              <a:gd name="csY1" fmla="*/ 1550670 h 1866984"/>
-              <a:gd name="csX2" fmla="*/ 586740 w 2377440"/>
-              <a:gd name="csY2" fmla="*/ 1845945 h 1866984"/>
-              <a:gd name="csX3" fmla="*/ 1175385 w 2377440"/>
-              <a:gd name="csY3" fmla="*/ 1701165 h 1866984"/>
-              <a:gd name="csX4" fmla="*/ 1771650 w 2377440"/>
-              <a:gd name="csY4" fmla="*/ 1247775 h 1866984"/>
-              <a:gd name="csX5" fmla="*/ 2377440 w 2377440"/>
-              <a:gd name="csY5" fmla="*/ 672465 h 1866984"/>
-              <a:gd name="csX0" fmla="*/ 0 w 2377440"/>
-              <a:gd name="csY0" fmla="*/ 0 h 1866984"/>
-              <a:gd name="csX1" fmla="*/ 300990 w 2377440"/>
-              <a:gd name="csY1" fmla="*/ 1550670 h 1866984"/>
-              <a:gd name="csX2" fmla="*/ 586740 w 2377440"/>
-              <a:gd name="csY2" fmla="*/ 1845945 h 1866984"/>
-              <a:gd name="csX3" fmla="*/ 1175385 w 2377440"/>
-              <a:gd name="csY3" fmla="*/ 1701165 h 1866984"/>
-              <a:gd name="csX4" fmla="*/ 1771650 w 2377440"/>
-              <a:gd name="csY4" fmla="*/ 1247775 h 1866984"/>
-              <a:gd name="csX5" fmla="*/ 2377440 w 2377440"/>
-              <a:gd name="csY5" fmla="*/ 672465 h 1866984"/>
-              <a:gd name="csX0" fmla="*/ 0 w 2377440"/>
-              <a:gd name="csY0" fmla="*/ 0 h 1866984"/>
-              <a:gd name="csX1" fmla="*/ 300990 w 2377440"/>
-              <a:gd name="csY1" fmla="*/ 1550670 h 1866984"/>
-              <a:gd name="csX2" fmla="*/ 586740 w 2377440"/>
-              <a:gd name="csY2" fmla="*/ 1845945 h 1866984"/>
-              <a:gd name="csX3" fmla="*/ 1175385 w 2377440"/>
-              <a:gd name="csY3" fmla="*/ 1701165 h 1866984"/>
-              <a:gd name="csX4" fmla="*/ 1771650 w 2377440"/>
-              <a:gd name="csY4" fmla="*/ 1247775 h 1866984"/>
-              <a:gd name="csX5" fmla="*/ 2377440 w 2377440"/>
-              <a:gd name="csY5" fmla="*/ 672465 h 1866984"/>
-            </a:gdLst>
-            <a:ahLst/>
-            <a:cxnLst>
-              <a:cxn ang="0">
-                <a:pos x="csX0" y="csY0"/>
-              </a:cxn>
-              <a:cxn ang="0">
-                <a:pos x="csX1" y="csY1"/>
-              </a:cxn>
-              <a:cxn ang="0">
-                <a:pos x="csX2" y="csY2"/>
-              </a:cxn>
-              <a:cxn ang="0">
-                <a:pos x="csX3" y="csY3"/>
-              </a:cxn>
-              <a:cxn ang="0">
-                <a:pos x="csX4" y="csY4"/>
-              </a:cxn>
-              <a:cxn ang="0">
-                <a:pos x="csX5" y="csY5"/>
-              </a:cxn>
-            </a:cxnLst>
-            <a:rect l="l" t="t" r="r" b="b"/>
-            <a:pathLst>
-              <a:path w="2377440" h="1866984">
-                <a:moveTo>
-                  <a:pt x="0" y="0"/>
-                </a:moveTo>
-                <a:cubicBezTo>
-                  <a:pt x="25400" y="741521"/>
-                  <a:pt x="191770" y="1349692"/>
-                  <a:pt x="300990" y="1550670"/>
-                </a:cubicBezTo>
-                <a:cubicBezTo>
-                  <a:pt x="410210" y="1751648"/>
-                  <a:pt x="427673" y="1777048"/>
-                  <a:pt x="586740" y="1845945"/>
-                </a:cubicBezTo>
-                <a:cubicBezTo>
-                  <a:pt x="745807" y="1914842"/>
-                  <a:pt x="977900" y="1800860"/>
-                  <a:pt x="1175385" y="1701165"/>
-                </a:cubicBezTo>
-                <a:cubicBezTo>
-                  <a:pt x="1372870" y="1601470"/>
-                  <a:pt x="1571307" y="1419225"/>
-                  <a:pt x="1771650" y="1247775"/>
-                </a:cubicBezTo>
-                <a:cubicBezTo>
-                  <a:pt x="1971993" y="1076325"/>
-                  <a:pt x="2174716" y="874395"/>
-                  <a:pt x="2377440" y="672465"/>
-                </a:cubicBezTo>
-              </a:path>
-            </a:pathLst>
-          </a:custGeom>
-          <a:noFill/>
-          <a:ln cap="rnd">
-            <a:solidFill>
-              <a:schemeClr val="accent2">
-                <a:lumMod val="75000"/>
-              </a:schemeClr>
-            </a:solidFill>
-            <a:round/>
-          </a:ln>
-        </p:spPr>
-        <p:style>
-          <a:lnRef idx="2">
-            <a:schemeClr val="accent1">
-              <a:shade val="15000"/>
-            </a:schemeClr>
-          </a:lnRef>
-          <a:fillRef idx="1">
-            <a:schemeClr val="accent1"/>
-          </a:fillRef>
-          <a:effectRef idx="0">
-            <a:schemeClr val="accent1"/>
-          </a:effectRef>
-          <a:fontRef idx="minor">
-            <a:schemeClr val="lt1"/>
-          </a:fontRef>
-        </p:style>
-        <p:txBody>
-          <a:bodyPr rtlCol="0" anchor="ctr"/>
-          <a:lstStyle/>
-          <a:p>
-            <a:pPr algn="ctr"/>
-            <a:endParaRPr lang="de-DE"/>
-          </a:p>
-        </p:txBody>
-      </p:sp>
-      <p:sp>
-        <p:nvSpPr>
-          <p:cNvPr id="56" name="Freihandform: Form 55">
-            <a:extLst>
-              <a:ext uri="{FF2B5EF4-FFF2-40B4-BE49-F238E27FC236}">
-                <a16:creationId xmlns:a16="http://schemas.microsoft.com/office/drawing/2014/main" id="{FB15F09D-AD2B-4F98-AD3A-4C6409BD6D87}"/>
-              </a:ext>
-            </a:extLst>
-          </p:cNvPr>
-          <p:cNvSpPr/>
-          <p:nvPr/>
-        </p:nvSpPr>
-        <p:spPr>
-          <a:xfrm>
-            <a:off x="710564" y="1327785"/>
-            <a:ext cx="2367915" cy="1552444"/>
-          </a:xfrm>
-          <a:custGeom>
-            <a:avLst/>
-            <a:gdLst>
-              <a:gd name="csX0" fmla="*/ 0 w 2377440"/>
-              <a:gd name="csY0" fmla="*/ 0 h 1541972"/>
-              <a:gd name="csX1" fmla="*/ 300990 w 2377440"/>
-              <a:gd name="csY1" fmla="*/ 1301115 h 1541972"/>
-              <a:gd name="csX2" fmla="*/ 588645 w 2377440"/>
-              <a:gd name="csY2" fmla="*/ 1537335 h 1541972"/>
-              <a:gd name="csX3" fmla="*/ 1181100 w 2377440"/>
-              <a:gd name="csY3" fmla="*/ 1428750 h 1541972"/>
-              <a:gd name="csX4" fmla="*/ 1781175 w 2377440"/>
-              <a:gd name="csY4" fmla="*/ 1085850 h 1541972"/>
-              <a:gd name="csX5" fmla="*/ 2377440 w 2377440"/>
-              <a:gd name="csY5" fmla="*/ 645795 h 1541972"/>
-              <a:gd name="csX0" fmla="*/ 0 w 2377440"/>
-              <a:gd name="csY0" fmla="*/ 0 h 1541972"/>
-              <a:gd name="csX1" fmla="*/ 300990 w 2377440"/>
-              <a:gd name="csY1" fmla="*/ 1301115 h 1541972"/>
-              <a:gd name="csX2" fmla="*/ 588645 w 2377440"/>
-              <a:gd name="csY2" fmla="*/ 1537335 h 1541972"/>
-              <a:gd name="csX3" fmla="*/ 1181100 w 2377440"/>
-              <a:gd name="csY3" fmla="*/ 1428750 h 1541972"/>
-              <a:gd name="csX4" fmla="*/ 1781175 w 2377440"/>
-              <a:gd name="csY4" fmla="*/ 1085850 h 1541972"/>
-              <a:gd name="csX5" fmla="*/ 2377440 w 2377440"/>
-              <a:gd name="csY5" fmla="*/ 645795 h 1541972"/>
-              <a:gd name="csX0" fmla="*/ 0 w 2377440"/>
-              <a:gd name="csY0" fmla="*/ 0 h 1548034"/>
-              <a:gd name="csX1" fmla="*/ 300990 w 2377440"/>
-              <a:gd name="csY1" fmla="*/ 1301115 h 1548034"/>
-              <a:gd name="csX2" fmla="*/ 588645 w 2377440"/>
-              <a:gd name="csY2" fmla="*/ 1537335 h 1548034"/>
-              <a:gd name="csX3" fmla="*/ 1181100 w 2377440"/>
-              <a:gd name="csY3" fmla="*/ 1428750 h 1548034"/>
-              <a:gd name="csX4" fmla="*/ 1781175 w 2377440"/>
-              <a:gd name="csY4" fmla="*/ 1085850 h 1548034"/>
-              <a:gd name="csX5" fmla="*/ 2377440 w 2377440"/>
-              <a:gd name="csY5" fmla="*/ 645795 h 1548034"/>
-              <a:gd name="csX0" fmla="*/ 0 w 2377440"/>
-              <a:gd name="csY0" fmla="*/ 0 h 1552444"/>
-              <a:gd name="csX1" fmla="*/ 300990 w 2377440"/>
-              <a:gd name="csY1" fmla="*/ 1301115 h 1552444"/>
-              <a:gd name="csX2" fmla="*/ 588645 w 2377440"/>
-              <a:gd name="csY2" fmla="*/ 1537335 h 1552444"/>
-              <a:gd name="csX3" fmla="*/ 1181100 w 2377440"/>
-              <a:gd name="csY3" fmla="*/ 1428750 h 1552444"/>
-              <a:gd name="csX4" fmla="*/ 1781175 w 2377440"/>
-              <a:gd name="csY4" fmla="*/ 1085850 h 1552444"/>
-              <a:gd name="csX5" fmla="*/ 2377440 w 2377440"/>
-              <a:gd name="csY5" fmla="*/ 645795 h 1552444"/>
-              <a:gd name="csX0" fmla="*/ 0 w 2377440"/>
-              <a:gd name="csY0" fmla="*/ 0 h 1552444"/>
-              <a:gd name="csX1" fmla="*/ 300990 w 2377440"/>
-              <a:gd name="csY1" fmla="*/ 1301115 h 1552444"/>
-              <a:gd name="csX2" fmla="*/ 588645 w 2377440"/>
-              <a:gd name="csY2" fmla="*/ 1537335 h 1552444"/>
-              <a:gd name="csX3" fmla="*/ 1181100 w 2377440"/>
-              <a:gd name="csY3" fmla="*/ 1428750 h 1552444"/>
-              <a:gd name="csX4" fmla="*/ 1781175 w 2377440"/>
-              <a:gd name="csY4" fmla="*/ 1085850 h 1552444"/>
-              <a:gd name="csX5" fmla="*/ 2377440 w 2377440"/>
-              <a:gd name="csY5" fmla="*/ 645795 h 1552444"/>
-              <a:gd name="csX0" fmla="*/ 0 w 2377440"/>
-              <a:gd name="csY0" fmla="*/ 0 h 1552444"/>
-              <a:gd name="csX1" fmla="*/ 300990 w 2377440"/>
-              <a:gd name="csY1" fmla="*/ 1301115 h 1552444"/>
-              <a:gd name="csX2" fmla="*/ 588645 w 2377440"/>
-              <a:gd name="csY2" fmla="*/ 1537335 h 1552444"/>
-              <a:gd name="csX3" fmla="*/ 1181100 w 2377440"/>
-              <a:gd name="csY3" fmla="*/ 1428750 h 1552444"/>
-              <a:gd name="csX4" fmla="*/ 1781175 w 2377440"/>
-              <a:gd name="csY4" fmla="*/ 1085850 h 1552444"/>
-              <a:gd name="csX5" fmla="*/ 2377440 w 2377440"/>
-              <a:gd name="csY5" fmla="*/ 645795 h 1552444"/>
-              <a:gd name="csX0" fmla="*/ 0 w 2377440"/>
-              <a:gd name="csY0" fmla="*/ 0 h 1552444"/>
-              <a:gd name="csX1" fmla="*/ 300990 w 2377440"/>
-              <a:gd name="csY1" fmla="*/ 1301115 h 1552444"/>
-              <a:gd name="csX2" fmla="*/ 588645 w 2377440"/>
-              <a:gd name="csY2" fmla="*/ 1537335 h 1552444"/>
-              <a:gd name="csX3" fmla="*/ 1181100 w 2377440"/>
-              <a:gd name="csY3" fmla="*/ 1428750 h 1552444"/>
-              <a:gd name="csX4" fmla="*/ 1781175 w 2377440"/>
-              <a:gd name="csY4" fmla="*/ 1085850 h 1552444"/>
-              <a:gd name="csX5" fmla="*/ 2377440 w 2377440"/>
-              <a:gd name="csY5" fmla="*/ 645795 h 1552444"/>
-            </a:gdLst>
-            <a:ahLst/>
-            <a:cxnLst>
-              <a:cxn ang="0">
-                <a:pos x="csX0" y="csY0"/>
-              </a:cxn>
-              <a:cxn ang="0">
-                <a:pos x="csX1" y="csY1"/>
-              </a:cxn>
-              <a:cxn ang="0">
-                <a:pos x="csX2" y="csY2"/>
-              </a:cxn>
-              <a:cxn ang="0">
-                <a:pos x="csX3" y="csY3"/>
-              </a:cxn>
-              <a:cxn ang="0">
-                <a:pos x="csX4" y="csY4"/>
-              </a:cxn>
-              <a:cxn ang="0">
-                <a:pos x="csX5" y="csY5"/>
-              </a:cxn>
-            </a:cxnLst>
-            <a:rect l="l" t="t" r="r" b="b"/>
-            <a:pathLst>
-              <a:path w="2377440" h="1552444">
-                <a:moveTo>
-                  <a:pt x="0" y="0"/>
-                </a:moveTo>
-                <a:cubicBezTo>
-                  <a:pt x="70961" y="667226"/>
-                  <a:pt x="216218" y="1159193"/>
-                  <a:pt x="300990" y="1301115"/>
-                </a:cubicBezTo>
-                <a:cubicBezTo>
-                  <a:pt x="385762" y="1443037"/>
-                  <a:pt x="430530" y="1487488"/>
-                  <a:pt x="588645" y="1537335"/>
-                </a:cubicBezTo>
-                <a:cubicBezTo>
-                  <a:pt x="746760" y="1587182"/>
-                  <a:pt x="982345" y="1503997"/>
-                  <a:pt x="1181100" y="1428750"/>
-                </a:cubicBezTo>
-                <a:cubicBezTo>
-                  <a:pt x="1379855" y="1353503"/>
-                  <a:pt x="1581785" y="1216343"/>
-                  <a:pt x="1781175" y="1085850"/>
-                </a:cubicBezTo>
-                <a:cubicBezTo>
-                  <a:pt x="1980565" y="955358"/>
-                  <a:pt x="2179002" y="800576"/>
-                  <a:pt x="2377440" y="645795"/>
-                </a:cubicBezTo>
-              </a:path>
-            </a:pathLst>
-          </a:custGeom>
-          <a:noFill/>
-          <a:ln cap="rnd">
-            <a:solidFill>
-              <a:schemeClr val="tx2">
-                <a:lumMod val="75000"/>
-                <a:lumOff val="25000"/>
-              </a:schemeClr>
-            </a:solidFill>
-            <a:round/>
-          </a:ln>
-        </p:spPr>
-        <p:style>
-          <a:lnRef idx="2">
-            <a:schemeClr val="accent1">
-              <a:shade val="15000"/>
-            </a:schemeClr>
-          </a:lnRef>
-          <a:fillRef idx="1">
-            <a:schemeClr val="accent1"/>
-          </a:fillRef>
-          <a:effectRef idx="0">
-            <a:schemeClr val="accent1"/>
-          </a:effectRef>
-          <a:fontRef idx="minor">
-            <a:schemeClr val="lt1"/>
-          </a:fontRef>
-        </p:style>
-        <p:txBody>
-          <a:bodyPr rtlCol="0" anchor="ctr"/>
-          <a:lstStyle/>
-          <a:p>
-            <a:pPr algn="ctr"/>
-            <a:endParaRPr lang="de-DE"/>
-          </a:p>
-        </p:txBody>
-      </p:sp>
-      <p:sp>
-        <p:nvSpPr>
-          <p:cNvPr id="57" name="Freihandform: Form 56">
-            <a:extLst>
-              <a:ext uri="{FF2B5EF4-FFF2-40B4-BE49-F238E27FC236}">
-                <a16:creationId xmlns:a16="http://schemas.microsoft.com/office/drawing/2014/main" id="{4B657633-4455-548B-D0AE-A6DA3F8759BE}"/>
-              </a:ext>
-            </a:extLst>
-          </p:cNvPr>
-          <p:cNvSpPr/>
-          <p:nvPr/>
-        </p:nvSpPr>
-        <p:spPr>
-          <a:xfrm>
-            <a:off x="710565" y="1794510"/>
-            <a:ext cx="2369820" cy="1119167"/>
-          </a:xfrm>
-          <a:custGeom>
-            <a:avLst/>
-            <a:gdLst>
-              <a:gd name="csX0" fmla="*/ 0 w 2375535"/>
-              <a:gd name="csY0" fmla="*/ 0 h 1127289"/>
-              <a:gd name="csX1" fmla="*/ 297180 w 2375535"/>
-              <a:gd name="csY1" fmla="*/ 998220 h 1127289"/>
-              <a:gd name="csX2" fmla="*/ 582930 w 2375535"/>
-              <a:gd name="csY2" fmla="*/ 1118235 h 1127289"/>
-              <a:gd name="csX3" fmla="*/ 1173480 w 2375535"/>
-              <a:gd name="csY3" fmla="*/ 1032510 h 1127289"/>
-              <a:gd name="csX4" fmla="*/ 1775460 w 2375535"/>
-              <a:gd name="csY4" fmla="*/ 798195 h 1127289"/>
-              <a:gd name="csX5" fmla="*/ 2375535 w 2375535"/>
-              <a:gd name="csY5" fmla="*/ 502920 h 1127289"/>
-              <a:gd name="csX0" fmla="*/ 0 w 2375535"/>
-              <a:gd name="csY0" fmla="*/ 0 h 1127289"/>
-              <a:gd name="csX1" fmla="*/ 297180 w 2375535"/>
-              <a:gd name="csY1" fmla="*/ 998220 h 1127289"/>
-              <a:gd name="csX2" fmla="*/ 582930 w 2375535"/>
-              <a:gd name="csY2" fmla="*/ 1118235 h 1127289"/>
-              <a:gd name="csX3" fmla="*/ 1173480 w 2375535"/>
-              <a:gd name="csY3" fmla="*/ 1032510 h 1127289"/>
-              <a:gd name="csX4" fmla="*/ 1775460 w 2375535"/>
-              <a:gd name="csY4" fmla="*/ 798195 h 1127289"/>
-              <a:gd name="csX5" fmla="*/ 2375535 w 2375535"/>
-              <a:gd name="csY5" fmla="*/ 502920 h 1127289"/>
-              <a:gd name="csX0" fmla="*/ 0 w 2375535"/>
-              <a:gd name="csY0" fmla="*/ 0 h 1118802"/>
-              <a:gd name="csX1" fmla="*/ 297180 w 2375535"/>
-              <a:gd name="csY1" fmla="*/ 998220 h 1118802"/>
-              <a:gd name="csX2" fmla="*/ 582930 w 2375535"/>
-              <a:gd name="csY2" fmla="*/ 1118235 h 1118802"/>
-              <a:gd name="csX3" fmla="*/ 1173480 w 2375535"/>
-              <a:gd name="csY3" fmla="*/ 1032510 h 1118802"/>
-              <a:gd name="csX4" fmla="*/ 1775460 w 2375535"/>
-              <a:gd name="csY4" fmla="*/ 798195 h 1118802"/>
-              <a:gd name="csX5" fmla="*/ 2375535 w 2375535"/>
-              <a:gd name="csY5" fmla="*/ 502920 h 1118802"/>
-              <a:gd name="csX0" fmla="*/ 0 w 2375535"/>
-              <a:gd name="csY0" fmla="*/ 0 h 1119167"/>
-              <a:gd name="csX1" fmla="*/ 297180 w 2375535"/>
-              <a:gd name="csY1" fmla="*/ 998220 h 1119167"/>
-              <a:gd name="csX2" fmla="*/ 582930 w 2375535"/>
-              <a:gd name="csY2" fmla="*/ 1118235 h 1119167"/>
-              <a:gd name="csX3" fmla="*/ 1173480 w 2375535"/>
-              <a:gd name="csY3" fmla="*/ 1032510 h 1119167"/>
-              <a:gd name="csX4" fmla="*/ 1775460 w 2375535"/>
-              <a:gd name="csY4" fmla="*/ 798195 h 1119167"/>
-              <a:gd name="csX5" fmla="*/ 2375535 w 2375535"/>
-              <a:gd name="csY5" fmla="*/ 502920 h 1119167"/>
-              <a:gd name="csX0" fmla="*/ 0 w 2375535"/>
-              <a:gd name="csY0" fmla="*/ 0 h 1119167"/>
-              <a:gd name="csX1" fmla="*/ 297180 w 2375535"/>
-              <a:gd name="csY1" fmla="*/ 998220 h 1119167"/>
-              <a:gd name="csX2" fmla="*/ 582930 w 2375535"/>
-              <a:gd name="csY2" fmla="*/ 1118235 h 1119167"/>
-              <a:gd name="csX3" fmla="*/ 1173480 w 2375535"/>
-              <a:gd name="csY3" fmla="*/ 1032510 h 1119167"/>
-              <a:gd name="csX4" fmla="*/ 1775460 w 2375535"/>
-              <a:gd name="csY4" fmla="*/ 798195 h 1119167"/>
-              <a:gd name="csX5" fmla="*/ 2375535 w 2375535"/>
-              <a:gd name="csY5" fmla="*/ 502920 h 1119167"/>
-            </a:gdLst>
-            <a:ahLst/>
-            <a:cxnLst>
-              <a:cxn ang="0">
-                <a:pos x="csX0" y="csY0"/>
-              </a:cxn>
-              <a:cxn ang="0">
-                <a:pos x="csX1" y="csY1"/>
-              </a:cxn>
-              <a:cxn ang="0">
-                <a:pos x="csX2" y="csY2"/>
-              </a:cxn>
-              <a:cxn ang="0">
-                <a:pos x="csX3" y="csY3"/>
-              </a:cxn>
-              <a:cxn ang="0">
-                <a:pos x="csX4" y="csY4"/>
-              </a:cxn>
-              <a:cxn ang="0">
-                <a:pos x="csX5" y="csY5"/>
-              </a:cxn>
-            </a:cxnLst>
-            <a:rect l="l" t="t" r="r" b="b"/>
-            <a:pathLst>
-              <a:path w="2375535" h="1119167">
-                <a:moveTo>
-                  <a:pt x="0" y="0"/>
-                </a:moveTo>
-                <a:cubicBezTo>
-                  <a:pt x="46672" y="579279"/>
-                  <a:pt x="175260" y="893763"/>
-                  <a:pt x="297180" y="998220"/>
-                </a:cubicBezTo>
-                <a:cubicBezTo>
-                  <a:pt x="419100" y="1102677"/>
-                  <a:pt x="486410" y="1110615"/>
-                  <a:pt x="582930" y="1118235"/>
-                </a:cubicBezTo>
-                <a:cubicBezTo>
-                  <a:pt x="679450" y="1125855"/>
-                  <a:pt x="974725" y="1085850"/>
-                  <a:pt x="1173480" y="1032510"/>
-                </a:cubicBezTo>
-                <a:cubicBezTo>
-                  <a:pt x="1372235" y="979170"/>
-                  <a:pt x="1575118" y="886460"/>
-                  <a:pt x="1775460" y="798195"/>
-                </a:cubicBezTo>
-                <a:cubicBezTo>
-                  <a:pt x="1975802" y="709930"/>
-                  <a:pt x="2175668" y="606425"/>
-                  <a:pt x="2375535" y="502920"/>
-                </a:cubicBezTo>
-              </a:path>
-            </a:pathLst>
-          </a:custGeom>
-          <a:noFill/>
-          <a:ln cap="rnd">
-            <a:solidFill>
-              <a:srgbClr val="C00000"/>
-            </a:solidFill>
-            <a:round/>
-          </a:ln>
-        </p:spPr>
-        <p:style>
-          <a:lnRef idx="2">
-            <a:schemeClr val="accent1">
-              <a:shade val="15000"/>
-            </a:schemeClr>
-          </a:lnRef>
-          <a:fillRef idx="1">
-            <a:schemeClr val="accent1"/>
-          </a:fillRef>
-          <a:effectRef idx="0">
-            <a:schemeClr val="accent1"/>
-          </a:effectRef>
-          <a:fontRef idx="minor">
-            <a:schemeClr val="lt1"/>
-          </a:fontRef>
-        </p:style>
-        <p:txBody>
-          <a:bodyPr rtlCol="0" anchor="ctr"/>
-          <a:lstStyle/>
-          <a:p>
-            <a:pPr algn="ctr"/>
-            <a:endParaRPr lang="de-DE"/>
-          </a:p>
-        </p:txBody>
-      </p:sp>
-      <p:sp>
-        <p:nvSpPr>
-          <p:cNvPr id="58" name="Textfeld 57">
-            <a:extLst>
-              <a:ext uri="{FF2B5EF4-FFF2-40B4-BE49-F238E27FC236}">
-                <a16:creationId xmlns:a16="http://schemas.microsoft.com/office/drawing/2014/main" id="{AB7511FA-0BC9-8A60-4D77-A73A7BB6954D}"/>
-              </a:ext>
-            </a:extLst>
-          </p:cNvPr>
-          <p:cNvSpPr txBox="1"/>
-          <p:nvPr/>
-        </p:nvSpPr>
-        <p:spPr>
-          <a:xfrm>
-            <a:off x="2196692" y="1522184"/>
-            <a:ext cx="819176" cy="215444"/>
-          </a:xfrm>
-          <a:prstGeom prst="rect">
-            <a:avLst/>
-          </a:prstGeom>
-          <a:noFill/>
-        </p:spPr>
-        <p:txBody>
-          <a:bodyPr wrap="square" rtlCol="0" anchor="ctr">
-            <a:spAutoFit/>
-          </a:bodyPr>
-          <a:lstStyle/>
-          <a:p>
-            <a:pPr algn="ctr"/>
-            <a:r>
-              <a:rPr lang="de-DE" sz="800" dirty="0">
-                <a:solidFill>
-                  <a:schemeClr val="accent6">
-                    <a:lumMod val="75000"/>
-                  </a:schemeClr>
-                </a:solidFill>
-                <a:latin typeface="Latin Modern Math" panose="02000503000000000000" pitchFamily="50" charset="0"/>
-                <a:ea typeface="Latin Modern Math" panose="02000503000000000000" pitchFamily="50" charset="0"/>
-                <a:cs typeface="CMU Serif" panose="02000603000000000000" pitchFamily="2" charset="0"/>
-              </a:rPr>
-              <a:t>Λ</a:t>
-            </a:r>
-            <a:r>
-              <a:rPr lang="de-DE" sz="800" dirty="0">
-                <a:solidFill>
-                  <a:schemeClr val="accent6">
-                    <a:lumMod val="75000"/>
-                  </a:schemeClr>
-                </a:solidFill>
-                <a:latin typeface="CMU Serif" panose="02000603000000000000" pitchFamily="2" charset="0"/>
-                <a:ea typeface="CMU Serif" panose="02000603000000000000" pitchFamily="2" charset="0"/>
-                <a:cs typeface="CMU Serif" panose="02000603000000000000" pitchFamily="2" charset="0"/>
-              </a:rPr>
-              <a:t> = 10</a:t>
-            </a:r>
-            <a:endParaRPr lang="de-DE" sz="800" baseline="-25000" dirty="0">
-              <a:solidFill>
-                <a:schemeClr val="accent6">
-                  <a:lumMod val="75000"/>
-                </a:schemeClr>
-              </a:solidFill>
-              <a:latin typeface="CMU Serif" panose="02000603000000000000" pitchFamily="2" charset="0"/>
-              <a:ea typeface="CMU Serif" panose="02000603000000000000" pitchFamily="2" charset="0"/>
-              <a:cs typeface="CMU Serif" panose="02000603000000000000" pitchFamily="2" charset="0"/>
-            </a:endParaRPr>
-          </a:p>
-        </p:txBody>
-      </p:sp>
-      <p:sp>
-        <p:nvSpPr>
-          <p:cNvPr id="59" name="Textfeld 58">
-            <a:extLst>
-              <a:ext uri="{FF2B5EF4-FFF2-40B4-BE49-F238E27FC236}">
-                <a16:creationId xmlns:a16="http://schemas.microsoft.com/office/drawing/2014/main" id="{C7297B51-2F35-F8F9-F307-C0E63B0B1DC3}"/>
-              </a:ext>
-            </a:extLst>
-          </p:cNvPr>
-          <p:cNvSpPr txBox="1"/>
-          <p:nvPr/>
-        </p:nvSpPr>
-        <p:spPr>
-          <a:xfrm>
-            <a:off x="2649223" y="1745384"/>
-            <a:ext cx="266716" cy="215444"/>
-          </a:xfrm>
-          <a:prstGeom prst="rect">
-            <a:avLst/>
-          </a:prstGeom>
-          <a:noFill/>
-        </p:spPr>
-        <p:txBody>
-          <a:bodyPr wrap="square" rtlCol="0" anchor="ctr">
-            <a:spAutoFit/>
-          </a:bodyPr>
-          <a:lstStyle/>
-          <a:p>
-            <a:pPr algn="ctr"/>
-            <a:r>
-              <a:rPr lang="de-DE" sz="800" dirty="0">
-                <a:solidFill>
-                  <a:schemeClr val="accent2">
-                    <a:lumMod val="75000"/>
-                  </a:schemeClr>
-                </a:solidFill>
-                <a:latin typeface="CMU Serif" panose="02000603000000000000" pitchFamily="2" charset="0"/>
-                <a:ea typeface="CMU Serif" panose="02000603000000000000" pitchFamily="2" charset="0"/>
-                <a:cs typeface="CMU Serif" panose="02000603000000000000" pitchFamily="2" charset="0"/>
-              </a:rPr>
-              <a:t>8</a:t>
-            </a:r>
-            <a:endParaRPr lang="de-DE" sz="800" baseline="-25000" dirty="0">
-              <a:solidFill>
-                <a:schemeClr val="accent2">
-                  <a:lumMod val="75000"/>
-                </a:schemeClr>
-              </a:solidFill>
-              <a:latin typeface="CMU Serif" panose="02000603000000000000" pitchFamily="2" charset="0"/>
-              <a:ea typeface="CMU Serif" panose="02000603000000000000" pitchFamily="2" charset="0"/>
-              <a:cs typeface="CMU Serif" panose="02000603000000000000" pitchFamily="2" charset="0"/>
-            </a:endParaRPr>
-          </a:p>
-        </p:txBody>
-      </p:sp>
-      <p:sp>
-        <p:nvSpPr>
-          <p:cNvPr id="60" name="Textfeld 59">
-            <a:extLst>
-              <a:ext uri="{FF2B5EF4-FFF2-40B4-BE49-F238E27FC236}">
-                <a16:creationId xmlns:a16="http://schemas.microsoft.com/office/drawing/2014/main" id="{1F6F98CD-370F-2331-9B89-A0C2006DB1EC}"/>
-              </a:ext>
-            </a:extLst>
-          </p:cNvPr>
-          <p:cNvSpPr txBox="1"/>
-          <p:nvPr/>
-        </p:nvSpPr>
-        <p:spPr>
-          <a:xfrm>
-            <a:off x="2729541" y="1926686"/>
-            <a:ext cx="266716" cy="215444"/>
-          </a:xfrm>
-          <a:prstGeom prst="rect">
-            <a:avLst/>
-          </a:prstGeom>
-          <a:noFill/>
-        </p:spPr>
-        <p:txBody>
-          <a:bodyPr wrap="square" rtlCol="0" anchor="ctr">
-            <a:spAutoFit/>
-          </a:bodyPr>
-          <a:lstStyle/>
-          <a:p>
-            <a:pPr algn="ctr"/>
-            <a:r>
-              <a:rPr lang="de-DE" sz="800" dirty="0">
-                <a:solidFill>
-                  <a:schemeClr val="tx2">
-                    <a:lumMod val="75000"/>
-                    <a:lumOff val="25000"/>
-                  </a:schemeClr>
-                </a:solidFill>
-                <a:latin typeface="CMU Serif" panose="02000603000000000000" pitchFamily="2" charset="0"/>
-                <a:ea typeface="CMU Serif" panose="02000603000000000000" pitchFamily="2" charset="0"/>
-                <a:cs typeface="CMU Serif" panose="02000603000000000000" pitchFamily="2" charset="0"/>
-              </a:rPr>
-              <a:t>6</a:t>
-            </a:r>
-            <a:endParaRPr lang="de-DE" sz="800" baseline="-25000" dirty="0">
-              <a:solidFill>
-                <a:schemeClr val="tx2">
-                  <a:lumMod val="75000"/>
-                  <a:lumOff val="25000"/>
-                </a:schemeClr>
-              </a:solidFill>
-              <a:latin typeface="CMU Serif" panose="02000603000000000000" pitchFamily="2" charset="0"/>
-              <a:ea typeface="CMU Serif" panose="02000603000000000000" pitchFamily="2" charset="0"/>
-              <a:cs typeface="CMU Serif" panose="02000603000000000000" pitchFamily="2" charset="0"/>
-            </a:endParaRPr>
-          </a:p>
-        </p:txBody>
-      </p:sp>
-      <p:sp>
-        <p:nvSpPr>
-          <p:cNvPr id="61" name="Textfeld 60">
-            <a:extLst>
-              <a:ext uri="{FF2B5EF4-FFF2-40B4-BE49-F238E27FC236}">
-                <a16:creationId xmlns:a16="http://schemas.microsoft.com/office/drawing/2014/main" id="{39949C8F-FD7E-0322-6959-3D6ADBCFE408}"/>
-              </a:ext>
-            </a:extLst>
-          </p:cNvPr>
-          <p:cNvSpPr txBox="1"/>
-          <p:nvPr/>
-        </p:nvSpPr>
-        <p:spPr>
-          <a:xfrm>
-            <a:off x="2809860" y="2133160"/>
-            <a:ext cx="266716" cy="215444"/>
-          </a:xfrm>
-          <a:prstGeom prst="rect">
-            <a:avLst/>
-          </a:prstGeom>
-          <a:noFill/>
-        </p:spPr>
-        <p:txBody>
-          <a:bodyPr wrap="square" rtlCol="0" anchor="ctr">
-            <a:spAutoFit/>
-          </a:bodyPr>
-          <a:lstStyle/>
-          <a:p>
-            <a:pPr algn="ctr"/>
-            <a:r>
-              <a:rPr lang="de-DE" sz="800" dirty="0">
-                <a:solidFill>
-                  <a:srgbClr val="C00000"/>
-                </a:solidFill>
-                <a:latin typeface="CMU Serif" panose="02000603000000000000" pitchFamily="2" charset="0"/>
-                <a:ea typeface="CMU Serif" panose="02000603000000000000" pitchFamily="2" charset="0"/>
-                <a:cs typeface="CMU Serif" panose="02000603000000000000" pitchFamily="2" charset="0"/>
-              </a:rPr>
-              <a:t>4</a:t>
-            </a:r>
-            <a:endParaRPr lang="de-DE" sz="800" baseline="-25000" dirty="0">
-              <a:solidFill>
-                <a:srgbClr val="C00000"/>
-              </a:solidFill>
-              <a:latin typeface="CMU Serif" panose="02000603000000000000" pitchFamily="2" charset="0"/>
-              <a:ea typeface="CMU Serif" panose="02000603000000000000" pitchFamily="2" charset="0"/>
-              <a:cs typeface="CMU Serif" panose="02000603000000000000" pitchFamily="2" charset="0"/>
-            </a:endParaRPr>
-          </a:p>
-        </p:txBody>
-      </p:sp>
-    </p:spTree>
-    <p:extLst>
-      <p:ext uri="{BB962C8B-B14F-4D97-AF65-F5344CB8AC3E}">
-        <p14:creationId xmlns:p14="http://schemas.microsoft.com/office/powerpoint/2010/main" val="1508409965"/>
       </p:ext>
     </p:extLst>
   </p:cSld>

--- a/LaTeX M.Sc. LRT/Aerodynamik/images/AER-Images.pptx
+++ b/LaTeX M.Sc. LRT/Aerodynamik/images/AER-Images.pptx
@@ -5,7 +5,7 @@
     <p:sldMasterId id="2147483660" r:id="rId1"/>
   </p:sldMasterIdLst>
   <p:notesMasterIdLst>
-    <p:notesMasterId r:id="rId12"/>
+    <p:notesMasterId r:id="rId13"/>
   </p:notesMasterIdLst>
   <p:sldIdLst>
     <p:sldId id="261" r:id="rId2"/>
@@ -13,11 +13,12 @@
     <p:sldId id="264" r:id="rId4"/>
     <p:sldId id="265" r:id="rId5"/>
     <p:sldId id="263" r:id="rId6"/>
-    <p:sldId id="256" r:id="rId7"/>
-    <p:sldId id="257" r:id="rId8"/>
-    <p:sldId id="258" r:id="rId9"/>
-    <p:sldId id="259" r:id="rId10"/>
-    <p:sldId id="260" r:id="rId11"/>
+    <p:sldId id="266" r:id="rId7"/>
+    <p:sldId id="256" r:id="rId8"/>
+    <p:sldId id="257" r:id="rId9"/>
+    <p:sldId id="258" r:id="rId10"/>
+    <p:sldId id="259" r:id="rId11"/>
+    <p:sldId id="260" r:id="rId12"/>
   </p:sldIdLst>
   <p:sldSz cx="3600450" cy="3600450"/>
   <p:notesSz cx="6858000" cy="9144000"/>
@@ -206,7 +207,7 @@
           <a:p>
             <a:fld id="{0C596C2D-C72C-406E-B79E-9BAC142DD20E}" type="datetimeFigureOut">
               <a:rPr lang="de-DE" smtClean="0"/>
-              <a:t>25.08.2026</a:t>
+              <a:t>03.09.2026</a:t>
             </a:fld>
             <a:endParaRPr lang="de-DE" dirty="0"/>
           </a:p>
@@ -604,7 +605,7 @@
           <a:p>
             <a:fld id="{6EAE28AA-0912-4DA0-8B30-7F3CA3FE6671}" type="datetimeFigureOut">
               <a:rPr lang="de-DE" smtClean="0"/>
-              <a:t>25.08.2026</a:t>
+              <a:t>03.09.2026</a:t>
             </a:fld>
             <a:endParaRPr lang="de-DE" dirty="0"/>
           </a:p>
@@ -774,7 +775,7 @@
           <a:p>
             <a:fld id="{6EAE28AA-0912-4DA0-8B30-7F3CA3FE6671}" type="datetimeFigureOut">
               <a:rPr lang="de-DE" smtClean="0"/>
-              <a:t>25.08.2026</a:t>
+              <a:t>03.09.2026</a:t>
             </a:fld>
             <a:endParaRPr lang="de-DE" dirty="0"/>
           </a:p>
@@ -954,7 +955,7 @@
           <a:p>
             <a:fld id="{6EAE28AA-0912-4DA0-8B30-7F3CA3FE6671}" type="datetimeFigureOut">
               <a:rPr lang="de-DE" smtClean="0"/>
-              <a:t>25.08.2026</a:t>
+              <a:t>03.09.2026</a:t>
             </a:fld>
             <a:endParaRPr lang="de-DE" dirty="0"/>
           </a:p>
@@ -1124,7 +1125,7 @@
           <a:p>
             <a:fld id="{6EAE28AA-0912-4DA0-8B30-7F3CA3FE6671}" type="datetimeFigureOut">
               <a:rPr lang="de-DE" smtClean="0"/>
-              <a:t>25.08.2026</a:t>
+              <a:t>03.09.2026</a:t>
             </a:fld>
             <a:endParaRPr lang="de-DE" dirty="0"/>
           </a:p>
@@ -1370,7 +1371,7 @@
           <a:p>
             <a:fld id="{6EAE28AA-0912-4DA0-8B30-7F3CA3FE6671}" type="datetimeFigureOut">
               <a:rPr lang="de-DE" smtClean="0"/>
-              <a:t>25.08.2026</a:t>
+              <a:t>03.09.2026</a:t>
             </a:fld>
             <a:endParaRPr lang="de-DE" dirty="0"/>
           </a:p>
@@ -1602,7 +1603,7 @@
           <a:p>
             <a:fld id="{6EAE28AA-0912-4DA0-8B30-7F3CA3FE6671}" type="datetimeFigureOut">
               <a:rPr lang="de-DE" smtClean="0"/>
-              <a:t>25.08.2026</a:t>
+              <a:t>03.09.2026</a:t>
             </a:fld>
             <a:endParaRPr lang="de-DE" dirty="0"/>
           </a:p>
@@ -1969,7 +1970,7 @@
           <a:p>
             <a:fld id="{6EAE28AA-0912-4DA0-8B30-7F3CA3FE6671}" type="datetimeFigureOut">
               <a:rPr lang="de-DE" smtClean="0"/>
-              <a:t>25.08.2026</a:t>
+              <a:t>03.09.2026</a:t>
             </a:fld>
             <a:endParaRPr lang="de-DE" dirty="0"/>
           </a:p>
@@ -2087,7 +2088,7 @@
           <a:p>
             <a:fld id="{6EAE28AA-0912-4DA0-8B30-7F3CA3FE6671}" type="datetimeFigureOut">
               <a:rPr lang="de-DE" smtClean="0"/>
-              <a:t>25.08.2026</a:t>
+              <a:t>03.09.2026</a:t>
             </a:fld>
             <a:endParaRPr lang="de-DE" dirty="0"/>
           </a:p>
@@ -2182,7 +2183,7 @@
           <a:p>
             <a:fld id="{6EAE28AA-0912-4DA0-8B30-7F3CA3FE6671}" type="datetimeFigureOut">
               <a:rPr lang="de-DE" smtClean="0"/>
-              <a:t>25.08.2026</a:t>
+              <a:t>03.09.2026</a:t>
             </a:fld>
             <a:endParaRPr lang="de-DE" dirty="0"/>
           </a:p>
@@ -2459,7 +2460,7 @@
           <a:p>
             <a:fld id="{6EAE28AA-0912-4DA0-8B30-7F3CA3FE6671}" type="datetimeFigureOut">
               <a:rPr lang="de-DE" smtClean="0"/>
-              <a:t>25.08.2026</a:t>
+              <a:t>03.09.2026</a:t>
             </a:fld>
             <a:endParaRPr lang="de-DE" dirty="0"/>
           </a:p>
@@ -2716,7 +2717,7 @@
           <a:p>
             <a:fld id="{6EAE28AA-0912-4DA0-8B30-7F3CA3FE6671}" type="datetimeFigureOut">
               <a:rPr lang="de-DE" smtClean="0"/>
-              <a:t>25.08.2026</a:t>
+              <a:t>03.09.2026</a:t>
             </a:fld>
             <a:endParaRPr lang="de-DE" dirty="0"/>
           </a:p>
@@ -2929,7 +2930,7 @@
           <a:p>
             <a:fld id="{6EAE28AA-0912-4DA0-8B30-7F3CA3FE6671}" type="datetimeFigureOut">
               <a:rPr lang="de-DE" smtClean="0"/>
-              <a:t>25.08.2026</a:t>
+              <a:t>03.09.2026</a:t>
             </a:fld>
             <a:endParaRPr lang="de-DE" dirty="0"/>
           </a:p>
@@ -5098,6 +5099,4025 @@
 </file>
 
 <file path=ppt/slides/slide10.xml><?xml version="1.0" encoding="utf-8"?>
+<p:sld xmlns:a="http://schemas.openxmlformats.org/drawingml/2006/main" xmlns:r="http://schemas.openxmlformats.org/officeDocument/2006/relationships" xmlns:p="http://schemas.openxmlformats.org/presentationml/2006/main">
+  <p:cSld>
+    <p:spTree>
+      <p:nvGrpSpPr>
+        <p:cNvPr id="1" name=""/>
+        <p:cNvGrpSpPr/>
+        <p:nvPr/>
+      </p:nvGrpSpPr>
+      <p:grpSpPr>
+        <a:xfrm>
+          <a:off x="0" y="0"/>
+          <a:ext cx="0" cy="0"/>
+          <a:chOff x="0" y="0"/>
+          <a:chExt cx="0" cy="0"/>
+        </a:xfrm>
+      </p:grpSpPr>
+      <p:cxnSp>
+        <p:nvCxnSpPr>
+          <p:cNvPr id="90" name="Gerader Verbinder 89">
+            <a:extLst>
+              <a:ext uri="{FF2B5EF4-FFF2-40B4-BE49-F238E27FC236}">
+                <a16:creationId xmlns:a16="http://schemas.microsoft.com/office/drawing/2014/main" id="{EDF8C47F-9B9F-B367-5DC1-C4460D3C5F67}"/>
+              </a:ext>
+            </a:extLst>
+          </p:cNvPr>
+          <p:cNvCxnSpPr>
+            <a:cxnSpLocks/>
+          </p:cNvCxnSpPr>
+          <p:nvPr/>
+        </p:nvCxnSpPr>
+        <p:spPr>
+          <a:xfrm flipH="1">
+            <a:off x="651843" y="2480597"/>
+            <a:ext cx="574298" cy="0"/>
+          </a:xfrm>
+          <a:prstGeom prst="line">
+            <a:avLst/>
+          </a:prstGeom>
+          <a:ln w="6350" cap="rnd">
+            <a:solidFill>
+              <a:schemeClr val="tx1"/>
+            </a:solidFill>
+            <a:round/>
+            <a:headEnd type="triangle" w="sm" len="sm"/>
+            <a:tailEnd type="triangle" w="sm" len="sm"/>
+          </a:ln>
+        </p:spPr>
+        <p:style>
+          <a:lnRef idx="2">
+            <a:schemeClr val="accent1"/>
+          </a:lnRef>
+          <a:fillRef idx="0">
+            <a:schemeClr val="accent1"/>
+          </a:fillRef>
+          <a:effectRef idx="1">
+            <a:schemeClr val="accent1"/>
+          </a:effectRef>
+          <a:fontRef idx="minor">
+            <a:schemeClr val="tx1"/>
+          </a:fontRef>
+        </p:style>
+      </p:cxnSp>
+      <p:cxnSp>
+        <p:nvCxnSpPr>
+          <p:cNvPr id="100" name="Gerader Verbinder 99">
+            <a:extLst>
+              <a:ext uri="{FF2B5EF4-FFF2-40B4-BE49-F238E27FC236}">
+                <a16:creationId xmlns:a16="http://schemas.microsoft.com/office/drawing/2014/main" id="{15DC9AE8-69B3-6FDC-3261-D4006F003BF2}"/>
+              </a:ext>
+            </a:extLst>
+          </p:cNvPr>
+          <p:cNvCxnSpPr>
+            <a:cxnSpLocks/>
+          </p:cNvCxnSpPr>
+          <p:nvPr/>
+        </p:nvCxnSpPr>
+        <p:spPr>
+          <a:xfrm flipH="1">
+            <a:off x="1233089" y="2480597"/>
+            <a:ext cx="1738962" cy="0"/>
+          </a:xfrm>
+          <a:prstGeom prst="line">
+            <a:avLst/>
+          </a:prstGeom>
+          <a:ln w="6350" cap="rnd">
+            <a:solidFill>
+              <a:schemeClr val="tx1"/>
+            </a:solidFill>
+            <a:round/>
+            <a:headEnd type="triangle" w="sm" len="sm"/>
+            <a:tailEnd type="triangle" w="sm" len="sm"/>
+          </a:ln>
+        </p:spPr>
+        <p:style>
+          <a:lnRef idx="2">
+            <a:schemeClr val="accent1"/>
+          </a:lnRef>
+          <a:fillRef idx="0">
+            <a:schemeClr val="accent1"/>
+          </a:fillRef>
+          <a:effectRef idx="1">
+            <a:schemeClr val="accent1"/>
+          </a:effectRef>
+          <a:fontRef idx="minor">
+            <a:schemeClr val="tx1"/>
+          </a:fontRef>
+        </p:style>
+      </p:cxnSp>
+      <p:cxnSp>
+        <p:nvCxnSpPr>
+          <p:cNvPr id="68" name="Gerader Verbinder 67">
+            <a:extLst>
+              <a:ext uri="{FF2B5EF4-FFF2-40B4-BE49-F238E27FC236}">
+                <a16:creationId xmlns:a16="http://schemas.microsoft.com/office/drawing/2014/main" id="{F386A702-4DE4-6FB2-A979-1B4E70F9F708}"/>
+              </a:ext>
+            </a:extLst>
+          </p:cNvPr>
+          <p:cNvCxnSpPr>
+            <a:cxnSpLocks/>
+          </p:cNvCxnSpPr>
+          <p:nvPr/>
+        </p:nvCxnSpPr>
+        <p:spPr>
+          <a:xfrm flipH="1">
+            <a:off x="1233090" y="1941427"/>
+            <a:ext cx="290231" cy="0"/>
+          </a:xfrm>
+          <a:prstGeom prst="line">
+            <a:avLst/>
+          </a:prstGeom>
+          <a:ln w="6350" cap="rnd">
+            <a:solidFill>
+              <a:schemeClr val="tx1"/>
+            </a:solidFill>
+            <a:round/>
+            <a:headEnd type="triangle" w="sm" len="sm"/>
+            <a:tailEnd type="triangle" w="sm" len="sm"/>
+          </a:ln>
+        </p:spPr>
+        <p:style>
+          <a:lnRef idx="2">
+            <a:schemeClr val="accent1"/>
+          </a:lnRef>
+          <a:fillRef idx="0">
+            <a:schemeClr val="accent1"/>
+          </a:fillRef>
+          <a:effectRef idx="1">
+            <a:schemeClr val="accent1"/>
+          </a:effectRef>
+          <a:fontRef idx="minor">
+            <a:schemeClr val="tx1"/>
+          </a:fontRef>
+        </p:style>
+      </p:cxnSp>
+      <p:cxnSp>
+        <p:nvCxnSpPr>
+          <p:cNvPr id="61" name="Gerader Verbinder 60">
+            <a:extLst>
+              <a:ext uri="{FF2B5EF4-FFF2-40B4-BE49-F238E27FC236}">
+                <a16:creationId xmlns:a16="http://schemas.microsoft.com/office/drawing/2014/main" id="{405C7A3A-ECE8-6788-80B1-A1E6C0E957FD}"/>
+              </a:ext>
+            </a:extLst>
+          </p:cNvPr>
+          <p:cNvCxnSpPr>
+            <a:cxnSpLocks/>
+          </p:cNvCxnSpPr>
+          <p:nvPr/>
+        </p:nvCxnSpPr>
+        <p:spPr>
+          <a:xfrm flipH="1">
+            <a:off x="863757" y="1941427"/>
+            <a:ext cx="362384" cy="0"/>
+          </a:xfrm>
+          <a:prstGeom prst="line">
+            <a:avLst/>
+          </a:prstGeom>
+          <a:ln w="6350" cap="rnd">
+            <a:solidFill>
+              <a:schemeClr val="tx1"/>
+            </a:solidFill>
+            <a:round/>
+            <a:headEnd type="triangle" w="sm" len="sm"/>
+            <a:tailEnd type="triangle" w="sm" len="sm"/>
+          </a:ln>
+        </p:spPr>
+        <p:style>
+          <a:lnRef idx="2">
+            <a:schemeClr val="accent1"/>
+          </a:lnRef>
+          <a:fillRef idx="0">
+            <a:schemeClr val="accent1"/>
+          </a:fillRef>
+          <a:effectRef idx="1">
+            <a:schemeClr val="accent1"/>
+          </a:effectRef>
+          <a:fontRef idx="minor">
+            <a:schemeClr val="tx1"/>
+          </a:fontRef>
+        </p:style>
+      </p:cxnSp>
+      <p:cxnSp>
+        <p:nvCxnSpPr>
+          <p:cNvPr id="43" name="Gerader Verbinder 42">
+            <a:extLst>
+              <a:ext uri="{FF2B5EF4-FFF2-40B4-BE49-F238E27FC236}">
+                <a16:creationId xmlns:a16="http://schemas.microsoft.com/office/drawing/2014/main" id="{ED8BFC9F-2DC8-48CA-8C41-A51D694DCCD7}"/>
+              </a:ext>
+            </a:extLst>
+          </p:cNvPr>
+          <p:cNvCxnSpPr>
+            <a:cxnSpLocks/>
+          </p:cNvCxnSpPr>
+          <p:nvPr/>
+        </p:nvCxnSpPr>
+        <p:spPr>
+          <a:xfrm flipH="1">
+            <a:off x="863757" y="1264186"/>
+            <a:ext cx="2103554" cy="0"/>
+          </a:xfrm>
+          <a:prstGeom prst="line">
+            <a:avLst/>
+          </a:prstGeom>
+          <a:ln w="6350" cap="rnd">
+            <a:solidFill>
+              <a:schemeClr val="tx1"/>
+            </a:solidFill>
+            <a:round/>
+            <a:headEnd type="triangle" w="sm" len="sm"/>
+            <a:tailEnd type="triangle" w="sm" len="sm"/>
+          </a:ln>
+        </p:spPr>
+        <p:style>
+          <a:lnRef idx="2">
+            <a:schemeClr val="accent1"/>
+          </a:lnRef>
+          <a:fillRef idx="0">
+            <a:schemeClr val="accent1"/>
+          </a:fillRef>
+          <a:effectRef idx="1">
+            <a:schemeClr val="accent1"/>
+          </a:effectRef>
+          <a:fontRef idx="minor">
+            <a:schemeClr val="tx1"/>
+          </a:fontRef>
+        </p:style>
+      </p:cxnSp>
+      <p:grpSp>
+        <p:nvGrpSpPr>
+          <p:cNvPr id="7" name="Gruppieren 6">
+            <a:extLst>
+              <a:ext uri="{FF2B5EF4-FFF2-40B4-BE49-F238E27FC236}">
+                <a16:creationId xmlns:a16="http://schemas.microsoft.com/office/drawing/2014/main" id="{570C8645-88AC-7063-02BA-0E01AD557D13}"/>
+              </a:ext>
+            </a:extLst>
+          </p:cNvPr>
+          <p:cNvGrpSpPr/>
+          <p:nvPr/>
+        </p:nvGrpSpPr>
+        <p:grpSpPr>
+          <a:xfrm>
+            <a:off x="653748" y="1563077"/>
+            <a:ext cx="972020" cy="208859"/>
+            <a:chOff x="401400" y="1422760"/>
+            <a:chExt cx="1101645" cy="246020"/>
+          </a:xfrm>
+        </p:grpSpPr>
+        <p:sp>
+          <p:nvSpPr>
+            <p:cNvPr id="5" name="Freihandform: Form 4">
+              <a:extLst>
+                <a:ext uri="{FF2B5EF4-FFF2-40B4-BE49-F238E27FC236}">
+                  <a16:creationId xmlns:a16="http://schemas.microsoft.com/office/drawing/2014/main" id="{8DC15251-2E4D-6DC9-91E3-7164A43A5BD3}"/>
+                </a:ext>
+              </a:extLst>
+            </p:cNvPr>
+            <p:cNvSpPr/>
+            <p:nvPr/>
+          </p:nvSpPr>
+          <p:spPr>
+            <a:xfrm>
+              <a:off x="403860" y="1422760"/>
+              <a:ext cx="1099185" cy="246020"/>
+            </a:xfrm>
+            <a:custGeom>
+              <a:avLst/>
+              <a:gdLst>
+                <a:gd name="csX0" fmla="*/ 0 w 1099185"/>
+                <a:gd name="csY0" fmla="*/ 74523 h 259308"/>
+                <a:gd name="csX1" fmla="*/ 259080 w 1099185"/>
+                <a:gd name="csY1" fmla="*/ 9753 h 259308"/>
+                <a:gd name="csX2" fmla="*/ 1099185 w 1099185"/>
+                <a:gd name="csY2" fmla="*/ 259308 h 259308"/>
+                <a:gd name="csX0" fmla="*/ 0 w 1099185"/>
+                <a:gd name="csY0" fmla="*/ 76197 h 260982"/>
+                <a:gd name="csX1" fmla="*/ 226695 w 1099185"/>
+                <a:gd name="csY1" fmla="*/ 9522 h 260982"/>
+                <a:gd name="csX2" fmla="*/ 1099185 w 1099185"/>
+                <a:gd name="csY2" fmla="*/ 260982 h 260982"/>
+                <a:gd name="csX0" fmla="*/ 0 w 1099185"/>
+                <a:gd name="csY0" fmla="*/ 68602 h 253387"/>
+                <a:gd name="csX1" fmla="*/ 226695 w 1099185"/>
+                <a:gd name="csY1" fmla="*/ 1927 h 253387"/>
+                <a:gd name="csX2" fmla="*/ 1099185 w 1099185"/>
+                <a:gd name="csY2" fmla="*/ 253387 h 253387"/>
+                <a:gd name="csX0" fmla="*/ 0 w 1099185"/>
+                <a:gd name="csY0" fmla="*/ 56168 h 240953"/>
+                <a:gd name="csX1" fmla="*/ 320040 w 1099185"/>
+                <a:gd name="csY1" fmla="*/ 2828 h 240953"/>
+                <a:gd name="csX2" fmla="*/ 1099185 w 1099185"/>
+                <a:gd name="csY2" fmla="*/ 240953 h 240953"/>
+                <a:gd name="csX0" fmla="*/ 0 w 1099185"/>
+                <a:gd name="csY0" fmla="*/ 58433 h 243218"/>
+                <a:gd name="csX1" fmla="*/ 320040 w 1099185"/>
+                <a:gd name="csY1" fmla="*/ 5093 h 243218"/>
+                <a:gd name="csX2" fmla="*/ 1099185 w 1099185"/>
+                <a:gd name="csY2" fmla="*/ 243218 h 243218"/>
+                <a:gd name="csX0" fmla="*/ 0 w 1099185"/>
+                <a:gd name="csY0" fmla="*/ 56534 h 241319"/>
+                <a:gd name="csX1" fmla="*/ 320040 w 1099185"/>
+                <a:gd name="csY1" fmla="*/ 3194 h 241319"/>
+                <a:gd name="csX2" fmla="*/ 1099185 w 1099185"/>
+                <a:gd name="csY2" fmla="*/ 241319 h 241319"/>
+                <a:gd name="csX0" fmla="*/ 0 w 1099185"/>
+                <a:gd name="csY0" fmla="*/ 61235 h 246020"/>
+                <a:gd name="csX1" fmla="*/ 320040 w 1099185"/>
+                <a:gd name="csY1" fmla="*/ 7895 h 246020"/>
+                <a:gd name="csX2" fmla="*/ 1099185 w 1099185"/>
+                <a:gd name="csY2" fmla="*/ 246020 h 246020"/>
+                <a:gd name="csX0" fmla="*/ 0 w 1099185"/>
+                <a:gd name="csY0" fmla="*/ 61235 h 246020"/>
+                <a:gd name="csX1" fmla="*/ 320040 w 1099185"/>
+                <a:gd name="csY1" fmla="*/ 7895 h 246020"/>
+                <a:gd name="csX2" fmla="*/ 1099185 w 1099185"/>
+                <a:gd name="csY2" fmla="*/ 246020 h 246020"/>
+              </a:gdLst>
+              <a:ahLst/>
+              <a:cxnLst>
+                <a:cxn ang="0">
+                  <a:pos x="csX0" y="csY0"/>
+                </a:cxn>
+                <a:cxn ang="0">
+                  <a:pos x="csX1" y="csY1"/>
+                </a:cxn>
+                <a:cxn ang="0">
+                  <a:pos x="csX2" y="csY2"/>
+                </a:cxn>
+              </a:cxnLst>
+              <a:rect l="l" t="t" r="r" b="b"/>
+              <a:pathLst>
+                <a:path w="1099185" h="246020">
+                  <a:moveTo>
+                    <a:pt x="0" y="61235"/>
+                  </a:moveTo>
+                  <a:cubicBezTo>
+                    <a:pt x="11271" y="9641"/>
+                    <a:pt x="110172" y="-13378"/>
+                    <a:pt x="320040" y="7895"/>
+                  </a:cubicBezTo>
+                  <a:cubicBezTo>
+                    <a:pt x="529908" y="29168"/>
+                    <a:pt x="782161" y="111876"/>
+                    <a:pt x="1099185" y="246020"/>
+                  </a:cubicBezTo>
+                </a:path>
+              </a:pathLst>
+            </a:custGeom>
+            <a:noFill/>
+            <a:ln w="9525" cap="rnd">
+              <a:solidFill>
+                <a:schemeClr val="tx1"/>
+              </a:solidFill>
+              <a:round/>
+            </a:ln>
+          </p:spPr>
+          <p:style>
+            <a:lnRef idx="2">
+              <a:schemeClr val="accent1">
+                <a:shade val="15000"/>
+              </a:schemeClr>
+            </a:lnRef>
+            <a:fillRef idx="1">
+              <a:schemeClr val="accent1"/>
+            </a:fillRef>
+            <a:effectRef idx="0">
+              <a:schemeClr val="accent1"/>
+            </a:effectRef>
+            <a:fontRef idx="minor">
+              <a:schemeClr val="lt1"/>
+            </a:fontRef>
+          </p:style>
+          <p:txBody>
+            <a:bodyPr rtlCol="0" anchor="ctr"/>
+            <a:lstStyle/>
+            <a:p>
+              <a:pPr algn="ctr"/>
+              <a:endParaRPr lang="de-DE" sz="800" dirty="0"/>
+            </a:p>
+          </p:txBody>
+        </p:sp>
+        <p:sp>
+          <p:nvSpPr>
+            <p:cNvPr id="6" name="Freihandform: Form 5">
+              <a:extLst>
+                <a:ext uri="{FF2B5EF4-FFF2-40B4-BE49-F238E27FC236}">
+                  <a16:creationId xmlns:a16="http://schemas.microsoft.com/office/drawing/2014/main" id="{246FA57C-45C3-1559-52A6-A075FE195E38}"/>
+                </a:ext>
+              </a:extLst>
+            </p:cNvPr>
+            <p:cNvSpPr/>
+            <p:nvPr/>
+          </p:nvSpPr>
+          <p:spPr>
+            <a:xfrm>
+              <a:off x="401400" y="1482090"/>
+              <a:ext cx="1097835" cy="186690"/>
+            </a:xfrm>
+            <a:custGeom>
+              <a:avLst/>
+              <a:gdLst>
+                <a:gd name="csX0" fmla="*/ 3248 w 1092908"/>
+                <a:gd name="csY0" fmla="*/ 0 h 186690"/>
+                <a:gd name="csX1" fmla="*/ 168983 w 1092908"/>
+                <a:gd name="csY1" fmla="*/ 140970 h 186690"/>
+                <a:gd name="csX2" fmla="*/ 1092908 w 1092908"/>
+                <a:gd name="csY2" fmla="*/ 186690 h 186690"/>
+                <a:gd name="csX0" fmla="*/ 1906 w 1091566"/>
+                <a:gd name="csY0" fmla="*/ 0 h 186690"/>
+                <a:gd name="csX1" fmla="*/ 184689 w 1091566"/>
+                <a:gd name="csY1" fmla="*/ 133350 h 186690"/>
+                <a:gd name="csX2" fmla="*/ 1091566 w 1091566"/>
+                <a:gd name="csY2" fmla="*/ 186690 h 186690"/>
+                <a:gd name="csX0" fmla="*/ 1906 w 1091566"/>
+                <a:gd name="csY0" fmla="*/ 0 h 186690"/>
+                <a:gd name="csX1" fmla="*/ 184689 w 1091566"/>
+                <a:gd name="csY1" fmla="*/ 133350 h 186690"/>
+                <a:gd name="csX2" fmla="*/ 1091566 w 1091566"/>
+                <a:gd name="csY2" fmla="*/ 186690 h 186690"/>
+              </a:gdLst>
+              <a:ahLst/>
+              <a:cxnLst>
+                <a:cxn ang="0">
+                  <a:pos x="csX0" y="csY0"/>
+                </a:cxn>
+                <a:cxn ang="0">
+                  <a:pos x="csX1" y="csY1"/>
+                </a:cxn>
+                <a:cxn ang="0">
+                  <a:pos x="csX2" y="csY2"/>
+                </a:cxn>
+              </a:cxnLst>
+              <a:rect l="l" t="t" r="r" b="b"/>
+              <a:pathLst>
+                <a:path w="1091566" h="186690">
+                  <a:moveTo>
+                    <a:pt x="1906" y="0"/>
+                  </a:moveTo>
+                  <a:cubicBezTo>
+                    <a:pt x="-6032" y="54927"/>
+                    <a:pt x="3079" y="102235"/>
+                    <a:pt x="184689" y="133350"/>
+                  </a:cubicBezTo>
+                  <a:cubicBezTo>
+                    <a:pt x="366299" y="164465"/>
+                    <a:pt x="665478" y="181292"/>
+                    <a:pt x="1091566" y="186690"/>
+                  </a:cubicBezTo>
+                </a:path>
+              </a:pathLst>
+            </a:custGeom>
+            <a:noFill/>
+            <a:ln w="9525" cap="rnd">
+              <a:solidFill>
+                <a:schemeClr val="tx1"/>
+              </a:solidFill>
+              <a:round/>
+            </a:ln>
+          </p:spPr>
+          <p:style>
+            <a:lnRef idx="2">
+              <a:schemeClr val="accent1">
+                <a:shade val="15000"/>
+              </a:schemeClr>
+            </a:lnRef>
+            <a:fillRef idx="1">
+              <a:schemeClr val="accent1"/>
+            </a:fillRef>
+            <a:effectRef idx="0">
+              <a:schemeClr val="accent1"/>
+            </a:effectRef>
+            <a:fontRef idx="minor">
+              <a:schemeClr val="lt1"/>
+            </a:fontRef>
+          </p:style>
+          <p:txBody>
+            <a:bodyPr rtlCol="0" anchor="ctr"/>
+            <a:lstStyle/>
+            <a:p>
+              <a:pPr algn="ctr"/>
+              <a:endParaRPr lang="de-DE" sz="800" dirty="0"/>
+            </a:p>
+          </p:txBody>
+        </p:sp>
+      </p:grpSp>
+      <p:sp>
+        <p:nvSpPr>
+          <p:cNvPr id="8" name="Textfeld 7">
+            <a:extLst>
+              <a:ext uri="{FF2B5EF4-FFF2-40B4-BE49-F238E27FC236}">
+                <a16:creationId xmlns:a16="http://schemas.microsoft.com/office/drawing/2014/main" id="{DD11CB4C-3EC0-B6F7-DF76-4709A5C796B2}"/>
+              </a:ext>
+            </a:extLst>
+          </p:cNvPr>
+          <p:cNvSpPr txBox="1"/>
+          <p:nvPr/>
+        </p:nvSpPr>
+        <p:spPr>
+          <a:xfrm>
+            <a:off x="243305" y="1624918"/>
+            <a:ext cx="450936" cy="215444"/>
+          </a:xfrm>
+          <a:prstGeom prst="rect">
+            <a:avLst/>
+          </a:prstGeom>
+          <a:noFill/>
+        </p:spPr>
+        <p:txBody>
+          <a:bodyPr wrap="square" rtlCol="0" anchor="ctr">
+            <a:spAutoFit/>
+          </a:bodyPr>
+          <a:lstStyle/>
+          <a:p>
+            <a:pPr algn="ctr"/>
+            <a:r>
+              <a:rPr lang="de-DE" sz="800" i="1" dirty="0">
+                <a:solidFill>
+                  <a:schemeClr val="tx2">
+                    <a:lumMod val="75000"/>
+                    <a:lumOff val="25000"/>
+                  </a:schemeClr>
+                </a:solidFill>
+                <a:latin typeface="CMU Serif" panose="02000603000000000000" pitchFamily="2" charset="0"/>
+                <a:ea typeface="CMU Serif" panose="02000603000000000000" pitchFamily="2" charset="0"/>
+                <a:cs typeface="CMU Serif" panose="02000603000000000000" pitchFamily="2" charset="0"/>
+              </a:rPr>
+              <a:t>v</a:t>
+            </a:r>
+          </a:p>
+        </p:txBody>
+      </p:sp>
+      <p:cxnSp>
+        <p:nvCxnSpPr>
+          <p:cNvPr id="9" name="Gerade Verbindung mit Pfeil 8">
+            <a:extLst>
+              <a:ext uri="{FF2B5EF4-FFF2-40B4-BE49-F238E27FC236}">
+                <a16:creationId xmlns:a16="http://schemas.microsoft.com/office/drawing/2014/main" id="{38E1CFED-EFFC-5F05-2D08-82DF9A11C9D7}"/>
+              </a:ext>
+            </a:extLst>
+          </p:cNvPr>
+          <p:cNvCxnSpPr>
+            <a:cxnSpLocks/>
+          </p:cNvCxnSpPr>
+          <p:nvPr/>
+        </p:nvCxnSpPr>
+        <p:spPr>
+          <a:xfrm>
+            <a:off x="191726" y="1622681"/>
+            <a:ext cx="418761" cy="0"/>
+          </a:xfrm>
+          <a:prstGeom prst="straightConnector1">
+            <a:avLst/>
+          </a:prstGeom>
+          <a:ln w="15875" cap="rnd">
+            <a:solidFill>
+              <a:schemeClr val="tx2">
+                <a:lumMod val="75000"/>
+                <a:lumOff val="25000"/>
+              </a:schemeClr>
+            </a:solidFill>
+            <a:round/>
+            <a:headEnd type="none" w="sm" len="sm"/>
+            <a:tailEnd type="triangle" w="med" len="med"/>
+          </a:ln>
+        </p:spPr>
+        <p:style>
+          <a:lnRef idx="2">
+            <a:schemeClr val="accent1"/>
+          </a:lnRef>
+          <a:fillRef idx="0">
+            <a:schemeClr val="accent1"/>
+          </a:fillRef>
+          <a:effectRef idx="1">
+            <a:schemeClr val="accent1"/>
+          </a:effectRef>
+          <a:fontRef idx="minor">
+            <a:schemeClr val="tx1"/>
+          </a:fontRef>
+        </p:style>
+      </p:cxnSp>
+      <p:cxnSp>
+        <p:nvCxnSpPr>
+          <p:cNvPr id="12" name="Gerader Verbinder 11">
+            <a:extLst>
+              <a:ext uri="{FF2B5EF4-FFF2-40B4-BE49-F238E27FC236}">
+                <a16:creationId xmlns:a16="http://schemas.microsoft.com/office/drawing/2014/main" id="{F11B0308-50A7-143F-D433-8A0781855D71}"/>
+              </a:ext>
+            </a:extLst>
+          </p:cNvPr>
+          <p:cNvCxnSpPr>
+            <a:cxnSpLocks/>
+          </p:cNvCxnSpPr>
+          <p:nvPr/>
+        </p:nvCxnSpPr>
+        <p:spPr>
+          <a:xfrm>
+            <a:off x="197308" y="1510952"/>
+            <a:ext cx="1579378" cy="287655"/>
+          </a:xfrm>
+          <a:prstGeom prst="line">
+            <a:avLst/>
+          </a:prstGeom>
+          <a:ln w="6350" cap="rnd">
+            <a:solidFill>
+              <a:schemeClr val="tx1"/>
+            </a:solidFill>
+            <a:prstDash val="sysDash"/>
+            <a:round/>
+          </a:ln>
+        </p:spPr>
+        <p:style>
+          <a:lnRef idx="2">
+            <a:schemeClr val="accent1"/>
+          </a:lnRef>
+          <a:fillRef idx="0">
+            <a:schemeClr val="accent1"/>
+          </a:fillRef>
+          <a:effectRef idx="1">
+            <a:schemeClr val="accent1"/>
+          </a:effectRef>
+          <a:fontRef idx="minor">
+            <a:schemeClr val="tx1"/>
+          </a:fontRef>
+        </p:style>
+      </p:cxnSp>
+      <p:sp>
+        <p:nvSpPr>
+          <p:cNvPr id="17" name="Bogen 16">
+            <a:extLst>
+              <a:ext uri="{FF2B5EF4-FFF2-40B4-BE49-F238E27FC236}">
+                <a16:creationId xmlns:a16="http://schemas.microsoft.com/office/drawing/2014/main" id="{BD4AFE16-EE88-49B0-7283-2D8E21D33ED7}"/>
+              </a:ext>
+            </a:extLst>
+          </p:cNvPr>
+          <p:cNvSpPr/>
+          <p:nvPr/>
+        </p:nvSpPr>
+        <p:spPr>
+          <a:xfrm>
+            <a:off x="324113" y="1254120"/>
+            <a:ext cx="669280" cy="669278"/>
+          </a:xfrm>
+          <a:prstGeom prst="arc">
+            <a:avLst>
+              <a:gd name="adj1" fmla="val 11292003"/>
+              <a:gd name="adj2" fmla="val 12806432"/>
+            </a:avLst>
+          </a:prstGeom>
+          <a:ln w="9525" cap="rnd">
+            <a:solidFill>
+              <a:schemeClr val="tx1"/>
+            </a:solidFill>
+            <a:round/>
+            <a:headEnd type="triangle" w="sm" len="sm"/>
+            <a:tailEnd w="sm" len="sm"/>
+          </a:ln>
+        </p:spPr>
+        <p:style>
+          <a:lnRef idx="2">
+            <a:schemeClr val="accent1"/>
+          </a:lnRef>
+          <a:fillRef idx="0">
+            <a:schemeClr val="accent1"/>
+          </a:fillRef>
+          <a:effectRef idx="1">
+            <a:schemeClr val="accent1"/>
+          </a:effectRef>
+          <a:fontRef idx="minor">
+            <a:schemeClr val="tx1"/>
+          </a:fontRef>
+        </p:style>
+        <p:txBody>
+          <a:bodyPr rtlCol="0" anchor="ctr"/>
+          <a:lstStyle/>
+          <a:p>
+            <a:pPr algn="ctr"/>
+            <a:endParaRPr lang="de-DE" sz="800" dirty="0"/>
+          </a:p>
+        </p:txBody>
+      </p:sp>
+      <p:sp>
+        <p:nvSpPr>
+          <p:cNvPr id="18" name="Bogen 17">
+            <a:extLst>
+              <a:ext uri="{FF2B5EF4-FFF2-40B4-BE49-F238E27FC236}">
+                <a16:creationId xmlns:a16="http://schemas.microsoft.com/office/drawing/2014/main" id="{8ABA536B-D52F-236B-485F-F221CCDF5EDC}"/>
+              </a:ext>
+            </a:extLst>
+          </p:cNvPr>
+          <p:cNvSpPr/>
+          <p:nvPr/>
+        </p:nvSpPr>
+        <p:spPr>
+          <a:xfrm>
+            <a:off x="324113" y="1254120"/>
+            <a:ext cx="669280" cy="669278"/>
+          </a:xfrm>
+          <a:prstGeom prst="arc">
+            <a:avLst>
+              <a:gd name="adj1" fmla="val 9219348"/>
+              <a:gd name="adj2" fmla="val 10439424"/>
+            </a:avLst>
+          </a:prstGeom>
+          <a:ln w="9525" cap="rnd">
+            <a:solidFill>
+              <a:schemeClr val="tx1"/>
+            </a:solidFill>
+            <a:round/>
+            <a:headEnd type="none" w="sm" len="sm"/>
+            <a:tailEnd type="triangle" w="sm" len="sm"/>
+          </a:ln>
+        </p:spPr>
+        <p:style>
+          <a:lnRef idx="2">
+            <a:schemeClr val="accent1"/>
+          </a:lnRef>
+          <a:fillRef idx="0">
+            <a:schemeClr val="accent1"/>
+          </a:fillRef>
+          <a:effectRef idx="1">
+            <a:schemeClr val="accent1"/>
+          </a:effectRef>
+          <a:fontRef idx="minor">
+            <a:schemeClr val="tx1"/>
+          </a:fontRef>
+        </p:style>
+        <p:txBody>
+          <a:bodyPr rtlCol="0" anchor="ctr"/>
+          <a:lstStyle/>
+          <a:p>
+            <a:pPr algn="ctr"/>
+            <a:endParaRPr lang="de-DE" sz="800" dirty="0"/>
+          </a:p>
+        </p:txBody>
+      </p:sp>
+      <p:sp>
+        <p:nvSpPr>
+          <p:cNvPr id="19" name="Bogen 18">
+            <a:extLst>
+              <a:ext uri="{FF2B5EF4-FFF2-40B4-BE49-F238E27FC236}">
+                <a16:creationId xmlns:a16="http://schemas.microsoft.com/office/drawing/2014/main" id="{7C66FEAD-9F53-26D8-FEEA-3D350381C44A}"/>
+              </a:ext>
+            </a:extLst>
+          </p:cNvPr>
+          <p:cNvSpPr/>
+          <p:nvPr/>
+        </p:nvSpPr>
+        <p:spPr>
+          <a:xfrm>
+            <a:off x="324113" y="1254120"/>
+            <a:ext cx="669280" cy="669278"/>
+          </a:xfrm>
+          <a:prstGeom prst="arc">
+            <a:avLst>
+              <a:gd name="adj1" fmla="val 9980127"/>
+              <a:gd name="adj2" fmla="val 11586429"/>
+            </a:avLst>
+          </a:prstGeom>
+          <a:ln w="9525" cap="rnd">
+            <a:solidFill>
+              <a:schemeClr val="tx1"/>
+            </a:solidFill>
+            <a:round/>
+            <a:headEnd type="none" w="sm" len="sm"/>
+            <a:tailEnd w="sm" len="sm"/>
+          </a:ln>
+        </p:spPr>
+        <p:style>
+          <a:lnRef idx="2">
+            <a:schemeClr val="accent1"/>
+          </a:lnRef>
+          <a:fillRef idx="0">
+            <a:schemeClr val="accent1"/>
+          </a:fillRef>
+          <a:effectRef idx="1">
+            <a:schemeClr val="accent1"/>
+          </a:effectRef>
+          <a:fontRef idx="minor">
+            <a:schemeClr val="tx1"/>
+          </a:fontRef>
+        </p:style>
+        <p:txBody>
+          <a:bodyPr rtlCol="0" anchor="ctr"/>
+          <a:lstStyle/>
+          <a:p>
+            <a:pPr algn="ctr"/>
+            <a:endParaRPr lang="de-DE" sz="800" dirty="0"/>
+          </a:p>
+        </p:txBody>
+      </p:sp>
+      <p:sp>
+        <p:nvSpPr>
+          <p:cNvPr id="21" name="Textfeld 20">
+            <a:extLst>
+              <a:ext uri="{FF2B5EF4-FFF2-40B4-BE49-F238E27FC236}">
+                <a16:creationId xmlns:a16="http://schemas.microsoft.com/office/drawing/2014/main" id="{C7E5661A-1D70-EAFA-6474-AEB0D376F705}"/>
+              </a:ext>
+            </a:extLst>
+          </p:cNvPr>
+          <p:cNvSpPr txBox="1"/>
+          <p:nvPr/>
+        </p:nvSpPr>
+        <p:spPr>
+          <a:xfrm>
+            <a:off x="24404" y="1321553"/>
+            <a:ext cx="450936" cy="215444"/>
+          </a:xfrm>
+          <a:prstGeom prst="rect">
+            <a:avLst/>
+          </a:prstGeom>
+          <a:noFill/>
+        </p:spPr>
+        <p:txBody>
+          <a:bodyPr wrap="square" rtlCol="0" anchor="ctr">
+            <a:spAutoFit/>
+          </a:bodyPr>
+          <a:lstStyle/>
+          <a:p>
+            <a:pPr algn="ctr"/>
+            <a:r>
+              <a:rPr lang="de-DE" sz="800" i="1" dirty="0">
+                <a:latin typeface="Latin Modern Math" panose="02000503000000000000" pitchFamily="50" charset="0"/>
+                <a:ea typeface="Latin Modern Math" panose="02000503000000000000" pitchFamily="50" charset="0"/>
+                <a:cs typeface="CMU Serif" panose="02000603000000000000" pitchFamily="2" charset="0"/>
+              </a:rPr>
+              <a:t>α</a:t>
+            </a:r>
+          </a:p>
+        </p:txBody>
+      </p:sp>
+      <p:cxnSp>
+        <p:nvCxnSpPr>
+          <p:cNvPr id="23" name="Gerade Verbindung mit Pfeil 22">
+            <a:extLst>
+              <a:ext uri="{FF2B5EF4-FFF2-40B4-BE49-F238E27FC236}">
+                <a16:creationId xmlns:a16="http://schemas.microsoft.com/office/drawing/2014/main" id="{ECBF27D5-844B-1F43-E501-8A1D17226679}"/>
+              </a:ext>
+            </a:extLst>
+          </p:cNvPr>
+          <p:cNvCxnSpPr>
+            <a:cxnSpLocks/>
+          </p:cNvCxnSpPr>
+          <p:nvPr/>
+        </p:nvCxnSpPr>
+        <p:spPr>
+          <a:xfrm flipV="1">
+            <a:off x="863757" y="988982"/>
+            <a:ext cx="0" cy="632473"/>
+          </a:xfrm>
+          <a:prstGeom prst="straightConnector1">
+            <a:avLst/>
+          </a:prstGeom>
+          <a:ln w="15875" cap="rnd">
+            <a:solidFill>
+              <a:schemeClr val="accent3"/>
+            </a:solidFill>
+            <a:round/>
+            <a:headEnd type="none" w="sm" len="sm"/>
+            <a:tailEnd type="triangle" w="med" len="med"/>
+          </a:ln>
+        </p:spPr>
+        <p:style>
+          <a:lnRef idx="2">
+            <a:schemeClr val="accent1"/>
+          </a:lnRef>
+          <a:fillRef idx="0">
+            <a:schemeClr val="accent1"/>
+          </a:fillRef>
+          <a:effectRef idx="1">
+            <a:schemeClr val="accent1"/>
+          </a:effectRef>
+          <a:fontRef idx="minor">
+            <a:schemeClr val="tx1"/>
+          </a:fontRef>
+        </p:style>
+      </p:cxnSp>
+      <p:sp>
+        <p:nvSpPr>
+          <p:cNvPr id="26" name="Textfeld 25">
+            <a:extLst>
+              <a:ext uri="{FF2B5EF4-FFF2-40B4-BE49-F238E27FC236}">
+                <a16:creationId xmlns:a16="http://schemas.microsoft.com/office/drawing/2014/main" id="{1DD59D24-6641-A34B-4AB4-47CCAE8543DF}"/>
+              </a:ext>
+            </a:extLst>
+          </p:cNvPr>
+          <p:cNvSpPr txBox="1"/>
+          <p:nvPr/>
+        </p:nvSpPr>
+        <p:spPr>
+          <a:xfrm>
+            <a:off x="773702" y="908975"/>
+            <a:ext cx="450936" cy="215444"/>
+          </a:xfrm>
+          <a:prstGeom prst="rect">
+            <a:avLst/>
+          </a:prstGeom>
+          <a:noFill/>
+        </p:spPr>
+        <p:txBody>
+          <a:bodyPr wrap="square" rtlCol="0" anchor="ctr">
+            <a:spAutoFit/>
+          </a:bodyPr>
+          <a:lstStyle/>
+          <a:p>
+            <a:pPr algn="ctr"/>
+            <a:r>
+              <a:rPr lang="de-DE" sz="800" i="1" dirty="0">
+                <a:solidFill>
+                  <a:schemeClr val="accent3"/>
+                </a:solidFill>
+                <a:latin typeface="CMU Serif" panose="02000603000000000000" pitchFamily="2" charset="0"/>
+                <a:ea typeface="CMU Serif" panose="02000603000000000000" pitchFamily="2" charset="0"/>
+                <a:cs typeface="CMU Serif" panose="02000603000000000000" pitchFamily="2" charset="0"/>
+              </a:rPr>
+              <a:t>A</a:t>
+            </a:r>
+            <a:r>
+              <a:rPr lang="de-DE" sz="800" baseline="-25000" dirty="0">
+                <a:solidFill>
+                  <a:schemeClr val="accent3"/>
+                </a:solidFill>
+                <a:latin typeface="CMU Serif" panose="02000603000000000000" pitchFamily="2" charset="0"/>
+                <a:ea typeface="CMU Serif" panose="02000603000000000000" pitchFamily="2" charset="0"/>
+                <a:cs typeface="CMU Serif" panose="02000603000000000000" pitchFamily="2" charset="0"/>
+              </a:rPr>
+              <a:t>F</a:t>
+            </a:r>
+          </a:p>
+        </p:txBody>
+      </p:sp>
+      <p:grpSp>
+        <p:nvGrpSpPr>
+          <p:cNvPr id="27" name="Gruppieren 26">
+            <a:extLst>
+              <a:ext uri="{FF2B5EF4-FFF2-40B4-BE49-F238E27FC236}">
+                <a16:creationId xmlns:a16="http://schemas.microsoft.com/office/drawing/2014/main" id="{342B5DA0-B165-08EE-0B30-33BA952E86EB}"/>
+              </a:ext>
+            </a:extLst>
+          </p:cNvPr>
+          <p:cNvGrpSpPr/>
+          <p:nvPr/>
+        </p:nvGrpSpPr>
+        <p:grpSpPr>
+          <a:xfrm rot="20192606">
+            <a:off x="2821559" y="1562534"/>
+            <a:ext cx="527683" cy="117842"/>
+            <a:chOff x="401400" y="1422760"/>
+            <a:chExt cx="1101645" cy="246020"/>
+          </a:xfrm>
+        </p:grpSpPr>
+        <p:sp>
+          <p:nvSpPr>
+            <p:cNvPr id="28" name="Freihandform: Form 27">
+              <a:extLst>
+                <a:ext uri="{FF2B5EF4-FFF2-40B4-BE49-F238E27FC236}">
+                  <a16:creationId xmlns:a16="http://schemas.microsoft.com/office/drawing/2014/main" id="{490BA162-0A45-C25B-81F5-6C54DC1E4182}"/>
+                </a:ext>
+              </a:extLst>
+            </p:cNvPr>
+            <p:cNvSpPr/>
+            <p:nvPr/>
+          </p:nvSpPr>
+          <p:spPr>
+            <a:xfrm>
+              <a:off x="403860" y="1422760"/>
+              <a:ext cx="1099185" cy="246020"/>
+            </a:xfrm>
+            <a:custGeom>
+              <a:avLst/>
+              <a:gdLst>
+                <a:gd name="csX0" fmla="*/ 0 w 1099185"/>
+                <a:gd name="csY0" fmla="*/ 74523 h 259308"/>
+                <a:gd name="csX1" fmla="*/ 259080 w 1099185"/>
+                <a:gd name="csY1" fmla="*/ 9753 h 259308"/>
+                <a:gd name="csX2" fmla="*/ 1099185 w 1099185"/>
+                <a:gd name="csY2" fmla="*/ 259308 h 259308"/>
+                <a:gd name="csX0" fmla="*/ 0 w 1099185"/>
+                <a:gd name="csY0" fmla="*/ 76197 h 260982"/>
+                <a:gd name="csX1" fmla="*/ 226695 w 1099185"/>
+                <a:gd name="csY1" fmla="*/ 9522 h 260982"/>
+                <a:gd name="csX2" fmla="*/ 1099185 w 1099185"/>
+                <a:gd name="csY2" fmla="*/ 260982 h 260982"/>
+                <a:gd name="csX0" fmla="*/ 0 w 1099185"/>
+                <a:gd name="csY0" fmla="*/ 68602 h 253387"/>
+                <a:gd name="csX1" fmla="*/ 226695 w 1099185"/>
+                <a:gd name="csY1" fmla="*/ 1927 h 253387"/>
+                <a:gd name="csX2" fmla="*/ 1099185 w 1099185"/>
+                <a:gd name="csY2" fmla="*/ 253387 h 253387"/>
+                <a:gd name="csX0" fmla="*/ 0 w 1099185"/>
+                <a:gd name="csY0" fmla="*/ 56168 h 240953"/>
+                <a:gd name="csX1" fmla="*/ 320040 w 1099185"/>
+                <a:gd name="csY1" fmla="*/ 2828 h 240953"/>
+                <a:gd name="csX2" fmla="*/ 1099185 w 1099185"/>
+                <a:gd name="csY2" fmla="*/ 240953 h 240953"/>
+                <a:gd name="csX0" fmla="*/ 0 w 1099185"/>
+                <a:gd name="csY0" fmla="*/ 58433 h 243218"/>
+                <a:gd name="csX1" fmla="*/ 320040 w 1099185"/>
+                <a:gd name="csY1" fmla="*/ 5093 h 243218"/>
+                <a:gd name="csX2" fmla="*/ 1099185 w 1099185"/>
+                <a:gd name="csY2" fmla="*/ 243218 h 243218"/>
+                <a:gd name="csX0" fmla="*/ 0 w 1099185"/>
+                <a:gd name="csY0" fmla="*/ 56534 h 241319"/>
+                <a:gd name="csX1" fmla="*/ 320040 w 1099185"/>
+                <a:gd name="csY1" fmla="*/ 3194 h 241319"/>
+                <a:gd name="csX2" fmla="*/ 1099185 w 1099185"/>
+                <a:gd name="csY2" fmla="*/ 241319 h 241319"/>
+                <a:gd name="csX0" fmla="*/ 0 w 1099185"/>
+                <a:gd name="csY0" fmla="*/ 61235 h 246020"/>
+                <a:gd name="csX1" fmla="*/ 320040 w 1099185"/>
+                <a:gd name="csY1" fmla="*/ 7895 h 246020"/>
+                <a:gd name="csX2" fmla="*/ 1099185 w 1099185"/>
+                <a:gd name="csY2" fmla="*/ 246020 h 246020"/>
+                <a:gd name="csX0" fmla="*/ 0 w 1099185"/>
+                <a:gd name="csY0" fmla="*/ 61235 h 246020"/>
+                <a:gd name="csX1" fmla="*/ 320040 w 1099185"/>
+                <a:gd name="csY1" fmla="*/ 7895 h 246020"/>
+                <a:gd name="csX2" fmla="*/ 1099185 w 1099185"/>
+                <a:gd name="csY2" fmla="*/ 246020 h 246020"/>
+              </a:gdLst>
+              <a:ahLst/>
+              <a:cxnLst>
+                <a:cxn ang="0">
+                  <a:pos x="csX0" y="csY0"/>
+                </a:cxn>
+                <a:cxn ang="0">
+                  <a:pos x="csX1" y="csY1"/>
+                </a:cxn>
+                <a:cxn ang="0">
+                  <a:pos x="csX2" y="csY2"/>
+                </a:cxn>
+              </a:cxnLst>
+              <a:rect l="l" t="t" r="r" b="b"/>
+              <a:pathLst>
+                <a:path w="1099185" h="246020">
+                  <a:moveTo>
+                    <a:pt x="0" y="61235"/>
+                  </a:moveTo>
+                  <a:cubicBezTo>
+                    <a:pt x="11271" y="9641"/>
+                    <a:pt x="110172" y="-13378"/>
+                    <a:pt x="320040" y="7895"/>
+                  </a:cubicBezTo>
+                  <a:cubicBezTo>
+                    <a:pt x="529908" y="29168"/>
+                    <a:pt x="782161" y="111876"/>
+                    <a:pt x="1099185" y="246020"/>
+                  </a:cubicBezTo>
+                </a:path>
+              </a:pathLst>
+            </a:custGeom>
+            <a:noFill/>
+            <a:ln w="9525" cap="rnd">
+              <a:solidFill>
+                <a:schemeClr val="tx1"/>
+              </a:solidFill>
+              <a:round/>
+            </a:ln>
+          </p:spPr>
+          <p:style>
+            <a:lnRef idx="2">
+              <a:schemeClr val="accent1">
+                <a:shade val="15000"/>
+              </a:schemeClr>
+            </a:lnRef>
+            <a:fillRef idx="1">
+              <a:schemeClr val="accent1"/>
+            </a:fillRef>
+            <a:effectRef idx="0">
+              <a:schemeClr val="accent1"/>
+            </a:effectRef>
+            <a:fontRef idx="minor">
+              <a:schemeClr val="lt1"/>
+            </a:fontRef>
+          </p:style>
+          <p:txBody>
+            <a:bodyPr rtlCol="0" anchor="ctr"/>
+            <a:lstStyle/>
+            <a:p>
+              <a:pPr algn="ctr"/>
+              <a:endParaRPr lang="de-DE" sz="800" dirty="0"/>
+            </a:p>
+          </p:txBody>
+        </p:sp>
+        <p:sp>
+          <p:nvSpPr>
+            <p:cNvPr id="29" name="Freihandform: Form 28">
+              <a:extLst>
+                <a:ext uri="{FF2B5EF4-FFF2-40B4-BE49-F238E27FC236}">
+                  <a16:creationId xmlns:a16="http://schemas.microsoft.com/office/drawing/2014/main" id="{86FD859F-4BB5-7FFF-F929-7ED0C423CB9A}"/>
+                </a:ext>
+              </a:extLst>
+            </p:cNvPr>
+            <p:cNvSpPr/>
+            <p:nvPr/>
+          </p:nvSpPr>
+          <p:spPr>
+            <a:xfrm>
+              <a:off x="401400" y="1482090"/>
+              <a:ext cx="1097835" cy="186690"/>
+            </a:xfrm>
+            <a:custGeom>
+              <a:avLst/>
+              <a:gdLst>
+                <a:gd name="csX0" fmla="*/ 3248 w 1092908"/>
+                <a:gd name="csY0" fmla="*/ 0 h 186690"/>
+                <a:gd name="csX1" fmla="*/ 168983 w 1092908"/>
+                <a:gd name="csY1" fmla="*/ 140970 h 186690"/>
+                <a:gd name="csX2" fmla="*/ 1092908 w 1092908"/>
+                <a:gd name="csY2" fmla="*/ 186690 h 186690"/>
+                <a:gd name="csX0" fmla="*/ 1906 w 1091566"/>
+                <a:gd name="csY0" fmla="*/ 0 h 186690"/>
+                <a:gd name="csX1" fmla="*/ 184689 w 1091566"/>
+                <a:gd name="csY1" fmla="*/ 133350 h 186690"/>
+                <a:gd name="csX2" fmla="*/ 1091566 w 1091566"/>
+                <a:gd name="csY2" fmla="*/ 186690 h 186690"/>
+                <a:gd name="csX0" fmla="*/ 1906 w 1091566"/>
+                <a:gd name="csY0" fmla="*/ 0 h 186690"/>
+                <a:gd name="csX1" fmla="*/ 184689 w 1091566"/>
+                <a:gd name="csY1" fmla="*/ 133350 h 186690"/>
+                <a:gd name="csX2" fmla="*/ 1091566 w 1091566"/>
+                <a:gd name="csY2" fmla="*/ 186690 h 186690"/>
+              </a:gdLst>
+              <a:ahLst/>
+              <a:cxnLst>
+                <a:cxn ang="0">
+                  <a:pos x="csX0" y="csY0"/>
+                </a:cxn>
+                <a:cxn ang="0">
+                  <a:pos x="csX1" y="csY1"/>
+                </a:cxn>
+                <a:cxn ang="0">
+                  <a:pos x="csX2" y="csY2"/>
+                </a:cxn>
+              </a:cxnLst>
+              <a:rect l="l" t="t" r="r" b="b"/>
+              <a:pathLst>
+                <a:path w="1091566" h="186690">
+                  <a:moveTo>
+                    <a:pt x="1906" y="0"/>
+                  </a:moveTo>
+                  <a:cubicBezTo>
+                    <a:pt x="-6032" y="54927"/>
+                    <a:pt x="3079" y="102235"/>
+                    <a:pt x="184689" y="133350"/>
+                  </a:cubicBezTo>
+                  <a:cubicBezTo>
+                    <a:pt x="366299" y="164465"/>
+                    <a:pt x="665478" y="181292"/>
+                    <a:pt x="1091566" y="186690"/>
+                  </a:cubicBezTo>
+                </a:path>
+              </a:pathLst>
+            </a:custGeom>
+            <a:noFill/>
+            <a:ln w="9525" cap="rnd">
+              <a:solidFill>
+                <a:schemeClr val="tx1"/>
+              </a:solidFill>
+              <a:round/>
+            </a:ln>
+          </p:spPr>
+          <p:style>
+            <a:lnRef idx="2">
+              <a:schemeClr val="accent1">
+                <a:shade val="15000"/>
+              </a:schemeClr>
+            </a:lnRef>
+            <a:fillRef idx="1">
+              <a:schemeClr val="accent1"/>
+            </a:fillRef>
+            <a:effectRef idx="0">
+              <a:schemeClr val="accent1"/>
+            </a:effectRef>
+            <a:fontRef idx="minor">
+              <a:schemeClr val="lt1"/>
+            </a:fontRef>
+          </p:style>
+          <p:txBody>
+            <a:bodyPr rtlCol="0" anchor="ctr"/>
+            <a:lstStyle/>
+            <a:p>
+              <a:pPr algn="ctr"/>
+              <a:endParaRPr lang="de-DE" sz="800" dirty="0"/>
+            </a:p>
+          </p:txBody>
+        </p:sp>
+      </p:grpSp>
+      <p:cxnSp>
+        <p:nvCxnSpPr>
+          <p:cNvPr id="30" name="Gerader Verbinder 29">
+            <a:extLst>
+              <a:ext uri="{FF2B5EF4-FFF2-40B4-BE49-F238E27FC236}">
+                <a16:creationId xmlns:a16="http://schemas.microsoft.com/office/drawing/2014/main" id="{5C3EB844-CBFC-92C4-6CF1-0AB56FEF6C13}"/>
+              </a:ext>
+            </a:extLst>
+          </p:cNvPr>
+          <p:cNvCxnSpPr>
+            <a:cxnSpLocks/>
+          </p:cNvCxnSpPr>
+          <p:nvPr/>
+        </p:nvCxnSpPr>
+        <p:spPr>
+          <a:xfrm flipH="1">
+            <a:off x="2413887" y="1539053"/>
+            <a:ext cx="1055370" cy="271950"/>
+          </a:xfrm>
+          <a:prstGeom prst="line">
+            <a:avLst/>
+          </a:prstGeom>
+          <a:ln w="6350" cap="rnd">
+            <a:solidFill>
+              <a:schemeClr val="tx1"/>
+            </a:solidFill>
+            <a:prstDash val="sysDash"/>
+            <a:round/>
+          </a:ln>
+        </p:spPr>
+        <p:style>
+          <a:lnRef idx="2">
+            <a:schemeClr val="accent1"/>
+          </a:lnRef>
+          <a:fillRef idx="0">
+            <a:schemeClr val="accent1"/>
+          </a:fillRef>
+          <a:effectRef idx="1">
+            <a:schemeClr val="accent1"/>
+          </a:effectRef>
+          <a:fontRef idx="minor">
+            <a:schemeClr val="tx1"/>
+          </a:fontRef>
+        </p:style>
+      </p:cxnSp>
+      <p:cxnSp>
+        <p:nvCxnSpPr>
+          <p:cNvPr id="35" name="Gerader Verbinder 34">
+            <a:extLst>
+              <a:ext uri="{FF2B5EF4-FFF2-40B4-BE49-F238E27FC236}">
+                <a16:creationId xmlns:a16="http://schemas.microsoft.com/office/drawing/2014/main" id="{F35C4CC1-AF50-7238-C2CA-570D5CCADB61}"/>
+              </a:ext>
+            </a:extLst>
+          </p:cNvPr>
+          <p:cNvCxnSpPr>
+            <a:cxnSpLocks/>
+          </p:cNvCxnSpPr>
+          <p:nvPr/>
+        </p:nvCxnSpPr>
+        <p:spPr>
+          <a:xfrm flipH="1" flipV="1">
+            <a:off x="2421507" y="1565258"/>
+            <a:ext cx="550545" cy="99540"/>
+          </a:xfrm>
+          <a:prstGeom prst="line">
+            <a:avLst/>
+          </a:prstGeom>
+          <a:ln w="6350" cap="rnd">
+            <a:solidFill>
+              <a:schemeClr val="tx1"/>
+            </a:solidFill>
+            <a:prstDash val="sysDash"/>
+            <a:round/>
+          </a:ln>
+        </p:spPr>
+        <p:style>
+          <a:lnRef idx="2">
+            <a:schemeClr val="accent1"/>
+          </a:lnRef>
+          <a:fillRef idx="0">
+            <a:schemeClr val="accent1"/>
+          </a:fillRef>
+          <a:effectRef idx="1">
+            <a:schemeClr val="accent1"/>
+          </a:effectRef>
+          <a:fontRef idx="minor">
+            <a:schemeClr val="tx1"/>
+          </a:fontRef>
+        </p:style>
+      </p:cxnSp>
+      <p:cxnSp>
+        <p:nvCxnSpPr>
+          <p:cNvPr id="39" name="Gerade Verbindung mit Pfeil 38">
+            <a:extLst>
+              <a:ext uri="{FF2B5EF4-FFF2-40B4-BE49-F238E27FC236}">
+                <a16:creationId xmlns:a16="http://schemas.microsoft.com/office/drawing/2014/main" id="{C7B18244-F236-FB86-F64E-33115B88BC2D}"/>
+              </a:ext>
+            </a:extLst>
+          </p:cNvPr>
+          <p:cNvCxnSpPr>
+            <a:cxnSpLocks/>
+          </p:cNvCxnSpPr>
+          <p:nvPr/>
+        </p:nvCxnSpPr>
+        <p:spPr>
+          <a:xfrm flipV="1">
+            <a:off x="2972052" y="1126142"/>
+            <a:ext cx="0" cy="526762"/>
+          </a:xfrm>
+          <a:prstGeom prst="straightConnector1">
+            <a:avLst/>
+          </a:prstGeom>
+          <a:ln w="15875" cap="rnd">
+            <a:solidFill>
+              <a:schemeClr val="accent3"/>
+            </a:solidFill>
+            <a:round/>
+            <a:headEnd type="none" w="sm" len="sm"/>
+            <a:tailEnd type="triangle" w="med" len="med"/>
+          </a:ln>
+        </p:spPr>
+        <p:style>
+          <a:lnRef idx="2">
+            <a:schemeClr val="accent1"/>
+          </a:lnRef>
+          <a:fillRef idx="0">
+            <a:schemeClr val="accent1"/>
+          </a:fillRef>
+          <a:effectRef idx="1">
+            <a:schemeClr val="accent1"/>
+          </a:effectRef>
+          <a:fontRef idx="minor">
+            <a:schemeClr val="tx1"/>
+          </a:fontRef>
+        </p:style>
+      </p:cxnSp>
+      <p:sp>
+        <p:nvSpPr>
+          <p:cNvPr id="42" name="Textfeld 41">
+            <a:extLst>
+              <a:ext uri="{FF2B5EF4-FFF2-40B4-BE49-F238E27FC236}">
+                <a16:creationId xmlns:a16="http://schemas.microsoft.com/office/drawing/2014/main" id="{53441D75-F72E-FA97-FAF8-9CF451F1C582}"/>
+              </a:ext>
+            </a:extLst>
+          </p:cNvPr>
+          <p:cNvSpPr txBox="1"/>
+          <p:nvPr/>
+        </p:nvSpPr>
+        <p:spPr>
+          <a:xfrm>
+            <a:off x="2888757" y="1048476"/>
+            <a:ext cx="450936" cy="215444"/>
+          </a:xfrm>
+          <a:prstGeom prst="rect">
+            <a:avLst/>
+          </a:prstGeom>
+          <a:noFill/>
+        </p:spPr>
+        <p:txBody>
+          <a:bodyPr wrap="square" rtlCol="0" anchor="ctr">
+            <a:spAutoFit/>
+          </a:bodyPr>
+          <a:lstStyle/>
+          <a:p>
+            <a:pPr algn="ctr"/>
+            <a:r>
+              <a:rPr lang="de-DE" sz="800" i="1" dirty="0">
+                <a:solidFill>
+                  <a:schemeClr val="accent3"/>
+                </a:solidFill>
+                <a:latin typeface="CMU Serif" panose="02000603000000000000" pitchFamily="2" charset="0"/>
+                <a:ea typeface="CMU Serif" panose="02000603000000000000" pitchFamily="2" charset="0"/>
+                <a:cs typeface="CMU Serif" panose="02000603000000000000" pitchFamily="2" charset="0"/>
+              </a:rPr>
+              <a:t>A</a:t>
+            </a:r>
+            <a:r>
+              <a:rPr lang="de-DE" sz="800" baseline="-25000" dirty="0">
+                <a:solidFill>
+                  <a:schemeClr val="accent3"/>
+                </a:solidFill>
+                <a:latin typeface="CMU Serif" panose="02000603000000000000" pitchFamily="2" charset="0"/>
+                <a:ea typeface="CMU Serif" panose="02000603000000000000" pitchFamily="2" charset="0"/>
+                <a:cs typeface="CMU Serif" panose="02000603000000000000" pitchFamily="2" charset="0"/>
+              </a:rPr>
+              <a:t>H</a:t>
+            </a:r>
+          </a:p>
+        </p:txBody>
+      </p:sp>
+      <p:sp>
+        <p:nvSpPr>
+          <p:cNvPr id="44" name="Textfeld 43">
+            <a:extLst>
+              <a:ext uri="{FF2B5EF4-FFF2-40B4-BE49-F238E27FC236}">
+                <a16:creationId xmlns:a16="http://schemas.microsoft.com/office/drawing/2014/main" id="{53426C88-2461-FFA4-84B5-D4073970F249}"/>
+              </a:ext>
+            </a:extLst>
+          </p:cNvPr>
+          <p:cNvSpPr txBox="1"/>
+          <p:nvPr/>
+        </p:nvSpPr>
+        <p:spPr>
+          <a:xfrm>
+            <a:off x="1755094" y="1047916"/>
+            <a:ext cx="295428" cy="215444"/>
+          </a:xfrm>
+          <a:prstGeom prst="rect">
+            <a:avLst/>
+          </a:prstGeom>
+          <a:noFill/>
+        </p:spPr>
+        <p:txBody>
+          <a:bodyPr wrap="square" rtlCol="0" anchor="ctr">
+            <a:spAutoFit/>
+          </a:bodyPr>
+          <a:lstStyle/>
+          <a:p>
+            <a:pPr algn="ctr"/>
+            <a:r>
+              <a:rPr lang="de-DE" sz="800" i="1" dirty="0">
+                <a:latin typeface="CMU Serif" panose="02000603000000000000" pitchFamily="2" charset="0"/>
+                <a:ea typeface="CMU Serif" panose="02000603000000000000" pitchFamily="2" charset="0"/>
+                <a:cs typeface="CMU Serif" panose="02000603000000000000" pitchFamily="2" charset="0"/>
+              </a:rPr>
+              <a:t>r</a:t>
+            </a:r>
+            <a:r>
+              <a:rPr lang="de-DE" sz="800" baseline="-25000" dirty="0">
+                <a:latin typeface="CMU Serif" panose="02000603000000000000" pitchFamily="2" charset="0"/>
+                <a:ea typeface="CMU Serif" panose="02000603000000000000" pitchFamily="2" charset="0"/>
+                <a:cs typeface="CMU Serif" panose="02000603000000000000" pitchFamily="2" charset="0"/>
+              </a:rPr>
+              <a:t>0</a:t>
+            </a:r>
+          </a:p>
+        </p:txBody>
+      </p:sp>
+      <p:grpSp>
+        <p:nvGrpSpPr>
+          <p:cNvPr id="49" name="Gruppieren 48">
+            <a:extLst>
+              <a:ext uri="{FF2B5EF4-FFF2-40B4-BE49-F238E27FC236}">
+                <a16:creationId xmlns:a16="http://schemas.microsoft.com/office/drawing/2014/main" id="{A3300799-40B5-FB3E-4CD3-AA66A3B1FFB3}"/>
+              </a:ext>
+            </a:extLst>
+          </p:cNvPr>
+          <p:cNvGrpSpPr/>
+          <p:nvPr/>
+        </p:nvGrpSpPr>
+        <p:grpSpPr>
+          <a:xfrm>
+            <a:off x="2535935" y="1221625"/>
+            <a:ext cx="872234" cy="878938"/>
+            <a:chOff x="2376174" y="1276909"/>
+            <a:chExt cx="669281" cy="674424"/>
+          </a:xfrm>
+        </p:grpSpPr>
+        <p:sp>
+          <p:nvSpPr>
+            <p:cNvPr id="46" name="Bogen 45">
+              <a:extLst>
+                <a:ext uri="{FF2B5EF4-FFF2-40B4-BE49-F238E27FC236}">
+                  <a16:creationId xmlns:a16="http://schemas.microsoft.com/office/drawing/2014/main" id="{470D47DC-6862-0535-172F-6FB879DE7BCC}"/>
+                </a:ext>
+              </a:extLst>
+            </p:cNvPr>
+            <p:cNvSpPr/>
+            <p:nvPr/>
+          </p:nvSpPr>
+          <p:spPr>
+            <a:xfrm>
+              <a:off x="2376175" y="1276909"/>
+              <a:ext cx="669280" cy="669278"/>
+            </a:xfrm>
+            <a:prstGeom prst="arc">
+              <a:avLst>
+                <a:gd name="adj1" fmla="val 11348918"/>
+                <a:gd name="adj2" fmla="val 12298312"/>
+              </a:avLst>
+            </a:prstGeom>
+            <a:ln w="9525" cap="rnd">
+              <a:solidFill>
+                <a:schemeClr val="tx1"/>
+              </a:solidFill>
+              <a:round/>
+              <a:headEnd type="triangle" w="sm" len="sm"/>
+              <a:tailEnd w="sm" len="sm"/>
+            </a:ln>
+          </p:spPr>
+          <p:style>
+            <a:lnRef idx="2">
+              <a:schemeClr val="accent1"/>
+            </a:lnRef>
+            <a:fillRef idx="0">
+              <a:schemeClr val="accent1"/>
+            </a:fillRef>
+            <a:effectRef idx="1">
+              <a:schemeClr val="accent1"/>
+            </a:effectRef>
+            <a:fontRef idx="minor">
+              <a:schemeClr val="tx1"/>
+            </a:fontRef>
+          </p:style>
+          <p:txBody>
+            <a:bodyPr rtlCol="0" anchor="ctr"/>
+            <a:lstStyle/>
+            <a:p>
+              <a:pPr algn="ctr"/>
+              <a:endParaRPr lang="de-DE" sz="800" dirty="0"/>
+            </a:p>
+          </p:txBody>
+        </p:sp>
+        <p:sp>
+          <p:nvSpPr>
+            <p:cNvPr id="47" name="Bogen 46">
+              <a:extLst>
+                <a:ext uri="{FF2B5EF4-FFF2-40B4-BE49-F238E27FC236}">
+                  <a16:creationId xmlns:a16="http://schemas.microsoft.com/office/drawing/2014/main" id="{2F5A6F87-37BA-6DA2-C8C7-8370AE44E0B9}"/>
+                </a:ext>
+              </a:extLst>
+            </p:cNvPr>
+            <p:cNvSpPr/>
+            <p:nvPr/>
+          </p:nvSpPr>
+          <p:spPr>
+            <a:xfrm>
+              <a:off x="2376174" y="1282055"/>
+              <a:ext cx="669280" cy="669278"/>
+            </a:xfrm>
+            <a:prstGeom prst="arc">
+              <a:avLst>
+                <a:gd name="adj1" fmla="val 9071079"/>
+                <a:gd name="adj2" fmla="val 9934287"/>
+              </a:avLst>
+            </a:prstGeom>
+            <a:ln w="9525" cap="rnd">
+              <a:solidFill>
+                <a:schemeClr val="tx1"/>
+              </a:solidFill>
+              <a:round/>
+              <a:headEnd type="none" w="sm" len="sm"/>
+              <a:tailEnd type="triangle" w="sm" len="sm"/>
+            </a:ln>
+          </p:spPr>
+          <p:style>
+            <a:lnRef idx="2">
+              <a:schemeClr val="accent1"/>
+            </a:lnRef>
+            <a:fillRef idx="0">
+              <a:schemeClr val="accent1"/>
+            </a:fillRef>
+            <a:effectRef idx="1">
+              <a:schemeClr val="accent1"/>
+            </a:effectRef>
+            <a:fontRef idx="minor">
+              <a:schemeClr val="tx1"/>
+            </a:fontRef>
+          </p:style>
+          <p:txBody>
+            <a:bodyPr rtlCol="0" anchor="ctr"/>
+            <a:lstStyle/>
+            <a:p>
+              <a:pPr algn="ctr"/>
+              <a:endParaRPr lang="de-DE" sz="800" dirty="0"/>
+            </a:p>
+          </p:txBody>
+        </p:sp>
+        <p:sp>
+          <p:nvSpPr>
+            <p:cNvPr id="48" name="Bogen 47">
+              <a:extLst>
+                <a:ext uri="{FF2B5EF4-FFF2-40B4-BE49-F238E27FC236}">
+                  <a16:creationId xmlns:a16="http://schemas.microsoft.com/office/drawing/2014/main" id="{16D0B117-EE4A-2467-8C23-863FEF5F428A}"/>
+                </a:ext>
+              </a:extLst>
+            </p:cNvPr>
+            <p:cNvSpPr/>
+            <p:nvPr/>
+          </p:nvSpPr>
+          <p:spPr>
+            <a:xfrm>
+              <a:off x="2376174" y="1282055"/>
+              <a:ext cx="669280" cy="669278"/>
+            </a:xfrm>
+            <a:prstGeom prst="arc">
+              <a:avLst>
+                <a:gd name="adj1" fmla="val 9695124"/>
+                <a:gd name="adj2" fmla="val 11586429"/>
+              </a:avLst>
+            </a:prstGeom>
+            <a:ln w="9525" cap="rnd">
+              <a:solidFill>
+                <a:schemeClr val="tx1"/>
+              </a:solidFill>
+              <a:round/>
+              <a:headEnd type="none" w="sm" len="sm"/>
+              <a:tailEnd w="sm" len="sm"/>
+            </a:ln>
+          </p:spPr>
+          <p:style>
+            <a:lnRef idx="2">
+              <a:schemeClr val="accent1"/>
+            </a:lnRef>
+            <a:fillRef idx="0">
+              <a:schemeClr val="accent1"/>
+            </a:fillRef>
+            <a:effectRef idx="1">
+              <a:schemeClr val="accent1"/>
+            </a:effectRef>
+            <a:fontRef idx="minor">
+              <a:schemeClr val="tx1"/>
+            </a:fontRef>
+          </p:style>
+          <p:txBody>
+            <a:bodyPr rtlCol="0" anchor="ctr"/>
+            <a:lstStyle/>
+            <a:p>
+              <a:pPr algn="ctr"/>
+              <a:endParaRPr lang="de-DE" sz="800" dirty="0"/>
+            </a:p>
+          </p:txBody>
+        </p:sp>
+      </p:grpSp>
+      <p:sp>
+        <p:nvSpPr>
+          <p:cNvPr id="50" name="Textfeld 49">
+            <a:extLst>
+              <a:ext uri="{FF2B5EF4-FFF2-40B4-BE49-F238E27FC236}">
+                <a16:creationId xmlns:a16="http://schemas.microsoft.com/office/drawing/2014/main" id="{ECFD9FCB-AA54-FD91-EE0D-F1DF1E938D10}"/>
+              </a:ext>
+            </a:extLst>
+          </p:cNvPr>
+          <p:cNvSpPr txBox="1"/>
+          <p:nvPr/>
+        </p:nvSpPr>
+        <p:spPr>
+          <a:xfrm>
+            <a:off x="2069081" y="1590163"/>
+            <a:ext cx="498896" cy="215444"/>
+          </a:xfrm>
+          <a:prstGeom prst="rect">
+            <a:avLst/>
+          </a:prstGeom>
+          <a:noFill/>
+        </p:spPr>
+        <p:txBody>
+          <a:bodyPr wrap="square" rtlCol="0" anchor="ctr">
+            <a:spAutoFit/>
+          </a:bodyPr>
+          <a:lstStyle/>
+          <a:p>
+            <a:pPr algn="ctr"/>
+            <a:r>
+              <a:rPr lang="de-DE" sz="800" dirty="0">
+                <a:latin typeface="Latin Modern Math" panose="02000503000000000000" pitchFamily="50" charset="0"/>
+                <a:ea typeface="Latin Modern Math" panose="02000503000000000000" pitchFamily="50" charset="0"/>
+                <a:cs typeface="CMU Serif" panose="02000603000000000000" pitchFamily="2" charset="0"/>
+              </a:rPr>
+              <a:t>−</a:t>
+            </a:r>
+            <a:r>
+              <a:rPr lang="de-DE" sz="800" i="1" dirty="0">
+                <a:latin typeface="Latin Modern Math" panose="02000503000000000000" pitchFamily="50" charset="0"/>
+                <a:ea typeface="Latin Modern Math" panose="02000503000000000000" pitchFamily="50" charset="0"/>
+                <a:cs typeface="CMU Serif" panose="02000603000000000000" pitchFamily="2" charset="0"/>
+              </a:rPr>
+              <a:t>ε</a:t>
+            </a:r>
+            <a:r>
+              <a:rPr lang="de-DE" sz="800" baseline="-25000" dirty="0">
+                <a:latin typeface="CMU Serif" panose="02000603000000000000" pitchFamily="2" charset="0"/>
+                <a:ea typeface="CMU Serif" panose="02000603000000000000" pitchFamily="2" charset="0"/>
+                <a:cs typeface="CMU Serif" panose="02000603000000000000" pitchFamily="2" charset="0"/>
+              </a:rPr>
+              <a:t>H0</a:t>
+            </a:r>
+          </a:p>
+        </p:txBody>
+      </p:sp>
+      <p:cxnSp>
+        <p:nvCxnSpPr>
+          <p:cNvPr id="55" name="Gerade Verbindung mit Pfeil 54">
+            <a:extLst>
+              <a:ext uri="{FF2B5EF4-FFF2-40B4-BE49-F238E27FC236}">
+                <a16:creationId xmlns:a16="http://schemas.microsoft.com/office/drawing/2014/main" id="{CDB78DE7-D0BC-1C7F-111D-7D9AB11A8289}"/>
+              </a:ext>
+            </a:extLst>
+          </p:cNvPr>
+          <p:cNvCxnSpPr>
+            <a:cxnSpLocks/>
+          </p:cNvCxnSpPr>
+          <p:nvPr/>
+        </p:nvCxnSpPr>
+        <p:spPr>
+          <a:xfrm>
+            <a:off x="1231185" y="1711221"/>
+            <a:ext cx="0" cy="984641"/>
+          </a:xfrm>
+          <a:prstGeom prst="straightConnector1">
+            <a:avLst/>
+          </a:prstGeom>
+          <a:ln w="15875" cap="rnd">
+            <a:solidFill>
+              <a:srgbClr val="C00000"/>
+            </a:solidFill>
+            <a:round/>
+            <a:headEnd type="none" w="sm" len="sm"/>
+            <a:tailEnd type="triangle" w="med" len="med"/>
+          </a:ln>
+        </p:spPr>
+        <p:style>
+          <a:lnRef idx="2">
+            <a:schemeClr val="accent1"/>
+          </a:lnRef>
+          <a:fillRef idx="0">
+            <a:schemeClr val="accent1"/>
+          </a:fillRef>
+          <a:effectRef idx="1">
+            <a:schemeClr val="accent1"/>
+          </a:effectRef>
+          <a:fontRef idx="minor">
+            <a:schemeClr val="tx1"/>
+          </a:fontRef>
+        </p:style>
+      </p:cxnSp>
+      <p:grpSp>
+        <p:nvGrpSpPr>
+          <p:cNvPr id="54" name="Gruppieren 53">
+            <a:extLst>
+              <a:ext uri="{FF2B5EF4-FFF2-40B4-BE49-F238E27FC236}">
+                <a16:creationId xmlns:a16="http://schemas.microsoft.com/office/drawing/2014/main" id="{D61F6E76-3148-7CB0-FFB3-430E3E6AA2F6}"/>
+              </a:ext>
+            </a:extLst>
+          </p:cNvPr>
+          <p:cNvGrpSpPr/>
+          <p:nvPr/>
+        </p:nvGrpSpPr>
+        <p:grpSpPr>
+          <a:xfrm>
+            <a:off x="1195185" y="1662429"/>
+            <a:ext cx="72673" cy="72000"/>
+            <a:chOff x="1110231" y="657130"/>
+            <a:chExt cx="112469" cy="113199"/>
+          </a:xfrm>
+        </p:grpSpPr>
+        <p:sp>
+          <p:nvSpPr>
+            <p:cNvPr id="51" name="Ellipse 50">
+              <a:extLst>
+                <a:ext uri="{FF2B5EF4-FFF2-40B4-BE49-F238E27FC236}">
+                  <a16:creationId xmlns:a16="http://schemas.microsoft.com/office/drawing/2014/main" id="{8CAF7C18-8F45-2394-32A2-854C83090F22}"/>
+                </a:ext>
+              </a:extLst>
+            </p:cNvPr>
+            <p:cNvSpPr/>
+            <p:nvPr/>
+          </p:nvSpPr>
+          <p:spPr>
+            <a:xfrm>
+              <a:off x="1113103" y="659519"/>
+              <a:ext cx="106650" cy="106650"/>
+            </a:xfrm>
+            <a:prstGeom prst="ellipse">
+              <a:avLst/>
+            </a:prstGeom>
+            <a:solidFill>
+              <a:schemeClr val="bg1"/>
+            </a:solidFill>
+            <a:ln w="6350">
+              <a:solidFill>
+                <a:schemeClr val="tx1"/>
+              </a:solidFill>
+            </a:ln>
+          </p:spPr>
+          <p:style>
+            <a:lnRef idx="2">
+              <a:schemeClr val="accent1">
+                <a:shade val="15000"/>
+              </a:schemeClr>
+            </a:lnRef>
+            <a:fillRef idx="1">
+              <a:schemeClr val="accent1"/>
+            </a:fillRef>
+            <a:effectRef idx="0">
+              <a:schemeClr val="accent1"/>
+            </a:effectRef>
+            <a:fontRef idx="minor">
+              <a:schemeClr val="lt1"/>
+            </a:fontRef>
+          </p:style>
+          <p:txBody>
+            <a:bodyPr rtlCol="0" anchor="ctr"/>
+            <a:lstStyle/>
+            <a:p>
+              <a:pPr algn="ctr"/>
+              <a:endParaRPr lang="de-DE" sz="800" dirty="0"/>
+            </a:p>
+          </p:txBody>
+        </p:sp>
+        <p:sp>
+          <p:nvSpPr>
+            <p:cNvPr id="52" name="Bogen 51">
+              <a:extLst>
+                <a:ext uri="{FF2B5EF4-FFF2-40B4-BE49-F238E27FC236}">
+                  <a16:creationId xmlns:a16="http://schemas.microsoft.com/office/drawing/2014/main" id="{5A37D944-FD62-08E8-D9B6-9B74D8FD11E5}"/>
+                </a:ext>
+              </a:extLst>
+            </p:cNvPr>
+            <p:cNvSpPr/>
+            <p:nvPr/>
+          </p:nvSpPr>
+          <p:spPr>
+            <a:xfrm>
+              <a:off x="1110231" y="658901"/>
+              <a:ext cx="111428" cy="111428"/>
+            </a:xfrm>
+            <a:prstGeom prst="arc">
+              <a:avLst/>
+            </a:prstGeom>
+            <a:solidFill>
+              <a:schemeClr val="tx1"/>
+            </a:solidFill>
+            <a:ln>
+              <a:noFill/>
+            </a:ln>
+          </p:spPr>
+          <p:style>
+            <a:lnRef idx="2">
+              <a:schemeClr val="accent1"/>
+            </a:lnRef>
+            <a:fillRef idx="0">
+              <a:schemeClr val="accent1"/>
+            </a:fillRef>
+            <a:effectRef idx="1">
+              <a:schemeClr val="accent1"/>
+            </a:effectRef>
+            <a:fontRef idx="minor">
+              <a:schemeClr val="tx1"/>
+            </a:fontRef>
+          </p:style>
+          <p:txBody>
+            <a:bodyPr rtlCol="0" anchor="ctr"/>
+            <a:lstStyle/>
+            <a:p>
+              <a:pPr algn="ctr"/>
+              <a:endParaRPr lang="de-DE" sz="800" dirty="0"/>
+            </a:p>
+          </p:txBody>
+        </p:sp>
+        <p:sp>
+          <p:nvSpPr>
+            <p:cNvPr id="53" name="Bogen 52">
+              <a:extLst>
+                <a:ext uri="{FF2B5EF4-FFF2-40B4-BE49-F238E27FC236}">
+                  <a16:creationId xmlns:a16="http://schemas.microsoft.com/office/drawing/2014/main" id="{4D64363E-8B5D-0E5A-EC8E-E64EF0FD24A9}"/>
+                </a:ext>
+              </a:extLst>
+            </p:cNvPr>
+            <p:cNvSpPr/>
+            <p:nvPr/>
+          </p:nvSpPr>
+          <p:spPr>
+            <a:xfrm rot="10800000">
+              <a:off x="1115084" y="657130"/>
+              <a:ext cx="107616" cy="111427"/>
+            </a:xfrm>
+            <a:prstGeom prst="arc">
+              <a:avLst/>
+            </a:prstGeom>
+            <a:solidFill>
+              <a:schemeClr val="tx1"/>
+            </a:solidFill>
+            <a:ln>
+              <a:noFill/>
+            </a:ln>
+          </p:spPr>
+          <p:style>
+            <a:lnRef idx="2">
+              <a:schemeClr val="accent1"/>
+            </a:lnRef>
+            <a:fillRef idx="0">
+              <a:schemeClr val="accent1"/>
+            </a:fillRef>
+            <a:effectRef idx="1">
+              <a:schemeClr val="accent1"/>
+            </a:effectRef>
+            <a:fontRef idx="minor">
+              <a:schemeClr val="tx1"/>
+            </a:fontRef>
+          </p:style>
+          <p:txBody>
+            <a:bodyPr rtlCol="0" anchor="ctr"/>
+            <a:lstStyle/>
+            <a:p>
+              <a:pPr algn="ctr"/>
+              <a:endParaRPr lang="de-DE" sz="800" dirty="0"/>
+            </a:p>
+          </p:txBody>
+        </p:sp>
+      </p:grpSp>
+      <p:sp>
+        <p:nvSpPr>
+          <p:cNvPr id="57" name="Textfeld 56">
+            <a:extLst>
+              <a:ext uri="{FF2B5EF4-FFF2-40B4-BE49-F238E27FC236}">
+                <a16:creationId xmlns:a16="http://schemas.microsoft.com/office/drawing/2014/main" id="{0EF93118-1EDA-BC68-7D65-77A08A2C3A2D}"/>
+              </a:ext>
+            </a:extLst>
+          </p:cNvPr>
+          <p:cNvSpPr txBox="1"/>
+          <p:nvPr/>
+        </p:nvSpPr>
+        <p:spPr>
+          <a:xfrm>
+            <a:off x="1138077" y="2545188"/>
+            <a:ext cx="450936" cy="215444"/>
+          </a:xfrm>
+          <a:prstGeom prst="rect">
+            <a:avLst/>
+          </a:prstGeom>
+          <a:noFill/>
+        </p:spPr>
+        <p:txBody>
+          <a:bodyPr wrap="square" rtlCol="0" anchor="ctr">
+            <a:spAutoFit/>
+          </a:bodyPr>
+          <a:lstStyle/>
+          <a:p>
+            <a:pPr algn="ctr"/>
+            <a:r>
+              <a:rPr lang="de-DE" sz="800" i="1" dirty="0">
+                <a:solidFill>
+                  <a:srgbClr val="C00000"/>
+                </a:solidFill>
+                <a:latin typeface="CMU Serif" panose="02000603000000000000" pitchFamily="2" charset="0"/>
+                <a:ea typeface="CMU Serif" panose="02000603000000000000" pitchFamily="2" charset="0"/>
+                <a:cs typeface="CMU Serif" panose="02000603000000000000" pitchFamily="2" charset="0"/>
+              </a:rPr>
+              <a:t>G</a:t>
+            </a:r>
+            <a:endParaRPr lang="de-DE" sz="800" baseline="-25000" dirty="0">
+              <a:solidFill>
+                <a:srgbClr val="C00000"/>
+              </a:solidFill>
+              <a:latin typeface="CMU Serif" panose="02000603000000000000" pitchFamily="2" charset="0"/>
+              <a:ea typeface="CMU Serif" panose="02000603000000000000" pitchFamily="2" charset="0"/>
+              <a:cs typeface="CMU Serif" panose="02000603000000000000" pitchFamily="2" charset="0"/>
+            </a:endParaRPr>
+          </a:p>
+        </p:txBody>
+      </p:sp>
+      <p:cxnSp>
+        <p:nvCxnSpPr>
+          <p:cNvPr id="58" name="Gerader Verbinder 57">
+            <a:extLst>
+              <a:ext uri="{FF2B5EF4-FFF2-40B4-BE49-F238E27FC236}">
+                <a16:creationId xmlns:a16="http://schemas.microsoft.com/office/drawing/2014/main" id="{55F0F71C-CC31-7EC8-0186-AFBAD0981419}"/>
+              </a:ext>
+            </a:extLst>
+          </p:cNvPr>
+          <p:cNvCxnSpPr>
+            <a:cxnSpLocks/>
+          </p:cNvCxnSpPr>
+          <p:nvPr/>
+        </p:nvCxnSpPr>
+        <p:spPr>
+          <a:xfrm>
+            <a:off x="861539" y="1647189"/>
+            <a:ext cx="0" cy="524798"/>
+          </a:xfrm>
+          <a:prstGeom prst="line">
+            <a:avLst/>
+          </a:prstGeom>
+          <a:ln w="6350" cap="rnd">
+            <a:solidFill>
+              <a:schemeClr val="tx1"/>
+            </a:solidFill>
+            <a:round/>
+          </a:ln>
+        </p:spPr>
+        <p:style>
+          <a:lnRef idx="2">
+            <a:schemeClr val="accent1"/>
+          </a:lnRef>
+          <a:fillRef idx="0">
+            <a:schemeClr val="accent1"/>
+          </a:fillRef>
+          <a:effectRef idx="1">
+            <a:schemeClr val="accent1"/>
+          </a:effectRef>
+          <a:fontRef idx="minor">
+            <a:schemeClr val="tx1"/>
+          </a:fontRef>
+        </p:style>
+      </p:cxnSp>
+      <p:cxnSp>
+        <p:nvCxnSpPr>
+          <p:cNvPr id="63" name="Gerader Verbinder 62">
+            <a:extLst>
+              <a:ext uri="{FF2B5EF4-FFF2-40B4-BE49-F238E27FC236}">
+                <a16:creationId xmlns:a16="http://schemas.microsoft.com/office/drawing/2014/main" id="{DEC643A3-AFEB-F63F-D6DE-39A5470E76F7}"/>
+              </a:ext>
+            </a:extLst>
+          </p:cNvPr>
+          <p:cNvCxnSpPr>
+            <a:cxnSpLocks/>
+          </p:cNvCxnSpPr>
+          <p:nvPr/>
+        </p:nvCxnSpPr>
+        <p:spPr>
+          <a:xfrm flipH="1">
+            <a:off x="861539" y="2121411"/>
+            <a:ext cx="663687" cy="0"/>
+          </a:xfrm>
+          <a:prstGeom prst="line">
+            <a:avLst/>
+          </a:prstGeom>
+          <a:ln w="6350" cap="rnd">
+            <a:solidFill>
+              <a:schemeClr val="tx1"/>
+            </a:solidFill>
+            <a:round/>
+            <a:headEnd type="triangle" w="sm" len="sm"/>
+            <a:tailEnd type="triangle" w="sm" len="sm"/>
+          </a:ln>
+        </p:spPr>
+        <p:style>
+          <a:lnRef idx="2">
+            <a:schemeClr val="accent1"/>
+          </a:lnRef>
+          <a:fillRef idx="0">
+            <a:schemeClr val="accent1"/>
+          </a:fillRef>
+          <a:effectRef idx="1">
+            <a:schemeClr val="accent1"/>
+          </a:effectRef>
+          <a:fontRef idx="minor">
+            <a:schemeClr val="tx1"/>
+          </a:fontRef>
+        </p:style>
+      </p:cxnSp>
+      <p:cxnSp>
+        <p:nvCxnSpPr>
+          <p:cNvPr id="65" name="Gerader Verbinder 64">
+            <a:extLst>
+              <a:ext uri="{FF2B5EF4-FFF2-40B4-BE49-F238E27FC236}">
+                <a16:creationId xmlns:a16="http://schemas.microsoft.com/office/drawing/2014/main" id="{4547791A-1926-9590-0984-5248E1907F4A}"/>
+              </a:ext>
+            </a:extLst>
+          </p:cNvPr>
+          <p:cNvCxnSpPr>
+            <a:cxnSpLocks/>
+          </p:cNvCxnSpPr>
+          <p:nvPr/>
+        </p:nvCxnSpPr>
+        <p:spPr>
+          <a:xfrm>
+            <a:off x="1523792" y="1749442"/>
+            <a:ext cx="0" cy="601615"/>
+          </a:xfrm>
+          <a:prstGeom prst="line">
+            <a:avLst/>
+          </a:prstGeom>
+          <a:ln w="6350" cap="rnd">
+            <a:solidFill>
+              <a:schemeClr val="tx1"/>
+            </a:solidFill>
+            <a:round/>
+          </a:ln>
+        </p:spPr>
+        <p:style>
+          <a:lnRef idx="2">
+            <a:schemeClr val="accent1"/>
+          </a:lnRef>
+          <a:fillRef idx="0">
+            <a:schemeClr val="accent1"/>
+          </a:fillRef>
+          <a:effectRef idx="1">
+            <a:schemeClr val="accent1"/>
+          </a:effectRef>
+          <a:fontRef idx="minor">
+            <a:schemeClr val="tx1"/>
+          </a:fontRef>
+        </p:style>
+      </p:cxnSp>
+      <p:cxnSp>
+        <p:nvCxnSpPr>
+          <p:cNvPr id="71" name="Gerader Verbinder 70">
+            <a:extLst>
+              <a:ext uri="{FF2B5EF4-FFF2-40B4-BE49-F238E27FC236}">
+                <a16:creationId xmlns:a16="http://schemas.microsoft.com/office/drawing/2014/main" id="{50BB11E3-7C49-E08E-C889-E6AB2FD5BBE3}"/>
+              </a:ext>
+            </a:extLst>
+          </p:cNvPr>
+          <p:cNvCxnSpPr>
+            <a:cxnSpLocks/>
+          </p:cNvCxnSpPr>
+          <p:nvPr/>
+        </p:nvCxnSpPr>
+        <p:spPr>
+          <a:xfrm>
+            <a:off x="651843" y="1612899"/>
+            <a:ext cx="0" cy="919039"/>
+          </a:xfrm>
+          <a:prstGeom prst="line">
+            <a:avLst/>
+          </a:prstGeom>
+          <a:ln w="6350" cap="rnd">
+            <a:solidFill>
+              <a:schemeClr val="tx1"/>
+            </a:solidFill>
+            <a:round/>
+          </a:ln>
+        </p:spPr>
+        <p:style>
+          <a:lnRef idx="2">
+            <a:schemeClr val="accent1"/>
+          </a:lnRef>
+          <a:fillRef idx="0">
+            <a:schemeClr val="accent1"/>
+          </a:fillRef>
+          <a:effectRef idx="1">
+            <a:schemeClr val="accent1"/>
+          </a:effectRef>
+          <a:fontRef idx="minor">
+            <a:schemeClr val="tx1"/>
+          </a:fontRef>
+        </p:style>
+      </p:cxnSp>
+      <p:cxnSp>
+        <p:nvCxnSpPr>
+          <p:cNvPr id="75" name="Gerader Verbinder 74">
+            <a:extLst>
+              <a:ext uri="{FF2B5EF4-FFF2-40B4-BE49-F238E27FC236}">
+                <a16:creationId xmlns:a16="http://schemas.microsoft.com/office/drawing/2014/main" id="{1B0CCD80-2800-C6B4-D28B-DBE8180FE821}"/>
+              </a:ext>
+            </a:extLst>
+          </p:cNvPr>
+          <p:cNvCxnSpPr>
+            <a:cxnSpLocks/>
+          </p:cNvCxnSpPr>
+          <p:nvPr/>
+        </p:nvCxnSpPr>
+        <p:spPr>
+          <a:xfrm flipH="1">
+            <a:off x="651843" y="2298576"/>
+            <a:ext cx="871478" cy="0"/>
+          </a:xfrm>
+          <a:prstGeom prst="line">
+            <a:avLst/>
+          </a:prstGeom>
+          <a:ln w="6350" cap="rnd">
+            <a:solidFill>
+              <a:schemeClr val="tx1"/>
+            </a:solidFill>
+            <a:round/>
+            <a:headEnd type="triangle" w="sm" len="sm"/>
+            <a:tailEnd type="triangle" w="sm" len="sm"/>
+          </a:ln>
+        </p:spPr>
+        <p:style>
+          <a:lnRef idx="2">
+            <a:schemeClr val="accent1"/>
+          </a:lnRef>
+          <a:fillRef idx="0">
+            <a:schemeClr val="accent1"/>
+          </a:fillRef>
+          <a:effectRef idx="1">
+            <a:schemeClr val="accent1"/>
+          </a:effectRef>
+          <a:fontRef idx="minor">
+            <a:schemeClr val="tx1"/>
+          </a:fontRef>
+        </p:style>
+      </p:cxnSp>
+      <p:cxnSp>
+        <p:nvCxnSpPr>
+          <p:cNvPr id="77" name="Gerader Verbinder 76">
+            <a:extLst>
+              <a:ext uri="{FF2B5EF4-FFF2-40B4-BE49-F238E27FC236}">
+                <a16:creationId xmlns:a16="http://schemas.microsoft.com/office/drawing/2014/main" id="{A40AE3FE-3779-3DCA-FB40-008C4C4AE3A1}"/>
+              </a:ext>
+            </a:extLst>
+          </p:cNvPr>
+          <p:cNvCxnSpPr>
+            <a:cxnSpLocks/>
+          </p:cNvCxnSpPr>
+          <p:nvPr/>
+        </p:nvCxnSpPr>
+        <p:spPr>
+          <a:xfrm flipH="1">
+            <a:off x="651843" y="2121411"/>
+            <a:ext cx="209696" cy="0"/>
+          </a:xfrm>
+          <a:prstGeom prst="line">
+            <a:avLst/>
+          </a:prstGeom>
+          <a:ln w="6350" cap="rnd">
+            <a:solidFill>
+              <a:schemeClr val="tx1"/>
+            </a:solidFill>
+            <a:round/>
+            <a:headEnd type="triangle" w="sm" len="sm"/>
+            <a:tailEnd type="triangle" w="sm" len="sm"/>
+          </a:ln>
+        </p:spPr>
+        <p:style>
+          <a:lnRef idx="2">
+            <a:schemeClr val="accent1"/>
+          </a:lnRef>
+          <a:fillRef idx="0">
+            <a:schemeClr val="accent1"/>
+          </a:fillRef>
+          <a:effectRef idx="1">
+            <a:schemeClr val="accent1"/>
+          </a:effectRef>
+          <a:fontRef idx="minor">
+            <a:schemeClr val="tx1"/>
+          </a:fontRef>
+        </p:style>
+      </p:cxnSp>
+      <p:sp>
+        <p:nvSpPr>
+          <p:cNvPr id="79" name="Textfeld 78">
+            <a:extLst>
+              <a:ext uri="{FF2B5EF4-FFF2-40B4-BE49-F238E27FC236}">
+                <a16:creationId xmlns:a16="http://schemas.microsoft.com/office/drawing/2014/main" id="{41765BE6-5AEE-B7E3-C15A-259D8BF625F7}"/>
+              </a:ext>
+            </a:extLst>
+          </p:cNvPr>
+          <p:cNvSpPr txBox="1"/>
+          <p:nvPr/>
+        </p:nvSpPr>
+        <p:spPr>
+          <a:xfrm>
+            <a:off x="832669" y="1744498"/>
+            <a:ext cx="435125" cy="215444"/>
+          </a:xfrm>
+          <a:prstGeom prst="rect">
+            <a:avLst/>
+          </a:prstGeom>
+          <a:noFill/>
+        </p:spPr>
+        <p:txBody>
+          <a:bodyPr wrap="square" rtlCol="0" anchor="ctr">
+            <a:spAutoFit/>
+          </a:bodyPr>
+          <a:lstStyle/>
+          <a:p>
+            <a:pPr algn="ctr"/>
+            <a:r>
+              <a:rPr lang="de-DE" sz="800" dirty="0">
+                <a:latin typeface="CMU Serif" panose="02000603000000000000" pitchFamily="2" charset="0"/>
+                <a:ea typeface="CMU Serif" panose="02000603000000000000" pitchFamily="2" charset="0"/>
+                <a:cs typeface="CMU Serif" panose="02000603000000000000" pitchFamily="2" charset="0"/>
+              </a:rPr>
+              <a:t>Δ</a:t>
+            </a:r>
+            <a:r>
+              <a:rPr lang="de-DE" sz="800" i="1" dirty="0">
+                <a:latin typeface="CMU Serif" panose="02000603000000000000" pitchFamily="2" charset="0"/>
+                <a:ea typeface="CMU Serif" panose="02000603000000000000" pitchFamily="2" charset="0"/>
+                <a:cs typeface="CMU Serif" panose="02000603000000000000" pitchFamily="2" charset="0"/>
+              </a:rPr>
+              <a:t>x</a:t>
+            </a:r>
+            <a:r>
+              <a:rPr lang="de-DE" sz="200" i="1" dirty="0">
+                <a:latin typeface="CMU Serif" panose="02000603000000000000" pitchFamily="2" charset="0"/>
+                <a:ea typeface="CMU Serif" panose="02000603000000000000" pitchFamily="2" charset="0"/>
+                <a:cs typeface="CMU Serif" panose="02000603000000000000" pitchFamily="2" charset="0"/>
+              </a:rPr>
+              <a:t> </a:t>
+            </a:r>
+            <a:r>
+              <a:rPr lang="de-DE" sz="800" baseline="-25000" dirty="0">
+                <a:latin typeface="CMU Serif" panose="02000603000000000000" pitchFamily="2" charset="0"/>
+                <a:ea typeface="CMU Serif" panose="02000603000000000000" pitchFamily="2" charset="0"/>
+                <a:cs typeface="CMU Serif" panose="02000603000000000000" pitchFamily="2" charset="0"/>
+              </a:rPr>
+              <a:t>s</a:t>
+            </a:r>
+          </a:p>
+        </p:txBody>
+      </p:sp>
+      <p:sp>
+        <p:nvSpPr>
+          <p:cNvPr id="80" name="Textfeld 79">
+            <a:extLst>
+              <a:ext uri="{FF2B5EF4-FFF2-40B4-BE49-F238E27FC236}">
+                <a16:creationId xmlns:a16="http://schemas.microsoft.com/office/drawing/2014/main" id="{CFA6E799-30CE-4A70-8A3B-229115201928}"/>
+              </a:ext>
+            </a:extLst>
+          </p:cNvPr>
+          <p:cNvSpPr txBox="1"/>
+          <p:nvPr/>
+        </p:nvSpPr>
+        <p:spPr>
+          <a:xfrm>
+            <a:off x="1158736" y="1748453"/>
+            <a:ext cx="435125" cy="215444"/>
+          </a:xfrm>
+          <a:prstGeom prst="rect">
+            <a:avLst/>
+          </a:prstGeom>
+          <a:noFill/>
+        </p:spPr>
+        <p:txBody>
+          <a:bodyPr wrap="square" rtlCol="0" anchor="ctr">
+            <a:spAutoFit/>
+          </a:bodyPr>
+          <a:lstStyle/>
+          <a:p>
+            <a:pPr algn="ctr"/>
+            <a:r>
+              <a:rPr lang="de-DE" sz="800" dirty="0">
+                <a:latin typeface="CMU Serif" panose="02000603000000000000" pitchFamily="2" charset="0"/>
+                <a:ea typeface="CMU Serif" panose="02000603000000000000" pitchFamily="2" charset="0"/>
+                <a:cs typeface="CMU Serif" panose="02000603000000000000" pitchFamily="2" charset="0"/>
+              </a:rPr>
+              <a:t>Δ</a:t>
+            </a:r>
+            <a:r>
+              <a:rPr lang="de-DE" sz="800" i="1" dirty="0">
+                <a:latin typeface="CMU Serif" panose="02000603000000000000" pitchFamily="2" charset="0"/>
+                <a:ea typeface="CMU Serif" panose="02000603000000000000" pitchFamily="2" charset="0"/>
+                <a:cs typeface="CMU Serif" panose="02000603000000000000" pitchFamily="2" charset="0"/>
+              </a:rPr>
+              <a:t>x</a:t>
+            </a:r>
+            <a:r>
+              <a:rPr lang="de-DE" sz="200" i="1" dirty="0">
+                <a:latin typeface="CMU Serif" panose="02000603000000000000" pitchFamily="2" charset="0"/>
+                <a:ea typeface="CMU Serif" panose="02000603000000000000" pitchFamily="2" charset="0"/>
+                <a:cs typeface="CMU Serif" panose="02000603000000000000" pitchFamily="2" charset="0"/>
+              </a:rPr>
+              <a:t> </a:t>
+            </a:r>
+            <a:r>
+              <a:rPr lang="de-DE" sz="800" baseline="-25000" dirty="0">
+                <a:latin typeface="CMU Serif" panose="02000603000000000000" pitchFamily="2" charset="0"/>
+                <a:ea typeface="CMU Serif" panose="02000603000000000000" pitchFamily="2" charset="0"/>
+                <a:cs typeface="CMU Serif" panose="02000603000000000000" pitchFamily="2" charset="0"/>
+              </a:rPr>
+              <a:t>St</a:t>
+            </a:r>
+          </a:p>
+        </p:txBody>
+      </p:sp>
+      <p:sp>
+        <p:nvSpPr>
+          <p:cNvPr id="81" name="Textfeld 80">
+            <a:extLst>
+              <a:ext uri="{FF2B5EF4-FFF2-40B4-BE49-F238E27FC236}">
+                <a16:creationId xmlns:a16="http://schemas.microsoft.com/office/drawing/2014/main" id="{B02FB151-EC95-41EA-D1D2-73EB54AC2957}"/>
+              </a:ext>
+            </a:extLst>
+          </p:cNvPr>
+          <p:cNvSpPr txBox="1"/>
+          <p:nvPr/>
+        </p:nvSpPr>
+        <p:spPr>
+          <a:xfrm>
+            <a:off x="823156" y="1929555"/>
+            <a:ext cx="435125" cy="215444"/>
+          </a:xfrm>
+          <a:prstGeom prst="rect">
+            <a:avLst/>
+          </a:prstGeom>
+          <a:noFill/>
+        </p:spPr>
+        <p:txBody>
+          <a:bodyPr wrap="square" rtlCol="0" anchor="ctr">
+            <a:spAutoFit/>
+          </a:bodyPr>
+          <a:lstStyle/>
+          <a:p>
+            <a:pPr algn="ctr"/>
+            <a:r>
+              <a:rPr lang="de-DE" sz="800" dirty="0">
+                <a:latin typeface="CMU Serif" panose="02000603000000000000" pitchFamily="2" charset="0"/>
+                <a:ea typeface="CMU Serif" panose="02000603000000000000" pitchFamily="2" charset="0"/>
+                <a:cs typeface="CMU Serif" panose="02000603000000000000" pitchFamily="2" charset="0"/>
+              </a:rPr>
+              <a:t>Δ</a:t>
+            </a:r>
+            <a:r>
+              <a:rPr lang="de-DE" sz="800" i="1" dirty="0">
+                <a:latin typeface="CMU Serif" panose="02000603000000000000" pitchFamily="2" charset="0"/>
+                <a:ea typeface="CMU Serif" panose="02000603000000000000" pitchFamily="2" charset="0"/>
+                <a:cs typeface="CMU Serif" panose="02000603000000000000" pitchFamily="2" charset="0"/>
+              </a:rPr>
+              <a:t>x</a:t>
+            </a:r>
+            <a:r>
+              <a:rPr lang="de-DE" sz="200" i="1" dirty="0">
+                <a:latin typeface="CMU Serif" panose="02000603000000000000" pitchFamily="2" charset="0"/>
+                <a:ea typeface="CMU Serif" panose="02000603000000000000" pitchFamily="2" charset="0"/>
+                <a:cs typeface="CMU Serif" panose="02000603000000000000" pitchFamily="2" charset="0"/>
+              </a:rPr>
+              <a:t> </a:t>
+            </a:r>
+            <a:r>
+              <a:rPr lang="de-DE" sz="800" baseline="-25000" dirty="0">
+                <a:latin typeface="CMU Serif" panose="02000603000000000000" pitchFamily="2" charset="0"/>
+                <a:ea typeface="CMU Serif" panose="02000603000000000000" pitchFamily="2" charset="0"/>
+                <a:cs typeface="CMU Serif" panose="02000603000000000000" pitchFamily="2" charset="0"/>
+              </a:rPr>
+              <a:t>N</a:t>
+            </a:r>
+          </a:p>
+        </p:txBody>
+      </p:sp>
+      <p:cxnSp>
+        <p:nvCxnSpPr>
+          <p:cNvPr id="93" name="Gerader Verbinder 92">
+            <a:extLst>
+              <a:ext uri="{FF2B5EF4-FFF2-40B4-BE49-F238E27FC236}">
+                <a16:creationId xmlns:a16="http://schemas.microsoft.com/office/drawing/2014/main" id="{0D6AAA25-AE51-00BF-8930-442F5FCD1285}"/>
+              </a:ext>
+            </a:extLst>
+          </p:cNvPr>
+          <p:cNvCxnSpPr>
+            <a:cxnSpLocks/>
+          </p:cNvCxnSpPr>
+          <p:nvPr/>
+        </p:nvCxnSpPr>
+        <p:spPr>
+          <a:xfrm>
+            <a:off x="2972052" y="1664798"/>
+            <a:ext cx="0" cy="867140"/>
+          </a:xfrm>
+          <a:prstGeom prst="line">
+            <a:avLst/>
+          </a:prstGeom>
+          <a:ln w="6350" cap="rnd">
+            <a:solidFill>
+              <a:schemeClr val="tx1"/>
+            </a:solidFill>
+            <a:round/>
+          </a:ln>
+        </p:spPr>
+        <p:style>
+          <a:lnRef idx="2">
+            <a:schemeClr val="accent1"/>
+          </a:lnRef>
+          <a:fillRef idx="0">
+            <a:schemeClr val="accent1"/>
+          </a:fillRef>
+          <a:effectRef idx="1">
+            <a:schemeClr val="accent1"/>
+          </a:effectRef>
+          <a:fontRef idx="minor">
+            <a:schemeClr val="tx1"/>
+          </a:fontRef>
+        </p:style>
+      </p:cxnSp>
+      <p:sp>
+        <p:nvSpPr>
+          <p:cNvPr id="95" name="Textfeld 94">
+            <a:extLst>
+              <a:ext uri="{FF2B5EF4-FFF2-40B4-BE49-F238E27FC236}">
+                <a16:creationId xmlns:a16="http://schemas.microsoft.com/office/drawing/2014/main" id="{E538A534-9B42-0F94-C67F-A5ABBCF88EEE}"/>
+              </a:ext>
+            </a:extLst>
+          </p:cNvPr>
+          <p:cNvSpPr txBox="1"/>
+          <p:nvPr/>
+        </p:nvSpPr>
+        <p:spPr>
+          <a:xfrm>
+            <a:off x="544505" y="1921662"/>
+            <a:ext cx="435125" cy="215444"/>
+          </a:xfrm>
+          <a:prstGeom prst="rect">
+            <a:avLst/>
+          </a:prstGeom>
+          <a:noFill/>
+        </p:spPr>
+        <p:txBody>
+          <a:bodyPr wrap="square" rtlCol="0" anchor="ctr">
+            <a:spAutoFit/>
+          </a:bodyPr>
+          <a:lstStyle/>
+          <a:p>
+            <a:pPr algn="ctr"/>
+            <a:r>
+              <a:rPr lang="de-DE" sz="800" i="1" dirty="0">
+                <a:latin typeface="CMU Serif" panose="02000603000000000000" pitchFamily="2" charset="0"/>
+                <a:ea typeface="CMU Serif" panose="02000603000000000000" pitchFamily="2" charset="0"/>
+                <a:cs typeface="CMU Serif" panose="02000603000000000000" pitchFamily="2" charset="0"/>
+              </a:rPr>
+              <a:t>x</a:t>
+            </a:r>
+            <a:r>
+              <a:rPr lang="de-DE" sz="200" i="1" dirty="0">
+                <a:latin typeface="CMU Serif" panose="02000603000000000000" pitchFamily="2" charset="0"/>
+                <a:ea typeface="CMU Serif" panose="02000603000000000000" pitchFamily="2" charset="0"/>
+                <a:cs typeface="CMU Serif" panose="02000603000000000000" pitchFamily="2" charset="0"/>
+              </a:rPr>
+              <a:t> </a:t>
+            </a:r>
+            <a:r>
+              <a:rPr lang="de-DE" sz="800" baseline="-25000" dirty="0">
+                <a:latin typeface="CMU Serif" panose="02000603000000000000" pitchFamily="2" charset="0"/>
+                <a:ea typeface="CMU Serif" panose="02000603000000000000" pitchFamily="2" charset="0"/>
+                <a:cs typeface="CMU Serif" panose="02000603000000000000" pitchFamily="2" charset="0"/>
+              </a:rPr>
+              <a:t>NF</a:t>
+            </a:r>
+          </a:p>
+        </p:txBody>
+      </p:sp>
+      <p:sp>
+        <p:nvSpPr>
+          <p:cNvPr id="96" name="Textfeld 95">
+            <a:extLst>
+              <a:ext uri="{FF2B5EF4-FFF2-40B4-BE49-F238E27FC236}">
+                <a16:creationId xmlns:a16="http://schemas.microsoft.com/office/drawing/2014/main" id="{1C68E2FC-2FDF-6B58-1FF8-779CCB0DB2C2}"/>
+              </a:ext>
+            </a:extLst>
+          </p:cNvPr>
+          <p:cNvSpPr txBox="1"/>
+          <p:nvPr/>
+        </p:nvSpPr>
+        <p:spPr>
+          <a:xfrm>
+            <a:off x="870634" y="2111818"/>
+            <a:ext cx="435125" cy="215444"/>
+          </a:xfrm>
+          <a:prstGeom prst="rect">
+            <a:avLst/>
+          </a:prstGeom>
+          <a:noFill/>
+        </p:spPr>
+        <p:txBody>
+          <a:bodyPr wrap="square" rtlCol="0" anchor="ctr">
+            <a:spAutoFit/>
+          </a:bodyPr>
+          <a:lstStyle/>
+          <a:p>
+            <a:pPr algn="ctr"/>
+            <a:r>
+              <a:rPr lang="de-DE" sz="800" i="1" dirty="0">
+                <a:latin typeface="CMU Serif" panose="02000603000000000000" pitchFamily="2" charset="0"/>
+                <a:ea typeface="CMU Serif" panose="02000603000000000000" pitchFamily="2" charset="0"/>
+                <a:cs typeface="CMU Serif" panose="02000603000000000000" pitchFamily="2" charset="0"/>
+              </a:rPr>
+              <a:t>x</a:t>
+            </a:r>
+            <a:r>
+              <a:rPr lang="de-DE" sz="200" i="1" dirty="0">
+                <a:latin typeface="CMU Serif" panose="02000603000000000000" pitchFamily="2" charset="0"/>
+                <a:ea typeface="CMU Serif" panose="02000603000000000000" pitchFamily="2" charset="0"/>
+                <a:cs typeface="CMU Serif" panose="02000603000000000000" pitchFamily="2" charset="0"/>
+              </a:rPr>
+              <a:t> </a:t>
+            </a:r>
+            <a:r>
+              <a:rPr lang="de-DE" sz="800" baseline="-25000" dirty="0">
+                <a:latin typeface="CMU Serif" panose="02000603000000000000" pitchFamily="2" charset="0"/>
+                <a:ea typeface="CMU Serif" panose="02000603000000000000" pitchFamily="2" charset="0"/>
+                <a:cs typeface="CMU Serif" panose="02000603000000000000" pitchFamily="2" charset="0"/>
+              </a:rPr>
+              <a:t>N</a:t>
+            </a:r>
+          </a:p>
+        </p:txBody>
+      </p:sp>
+      <p:sp>
+        <p:nvSpPr>
+          <p:cNvPr id="97" name="Textfeld 96">
+            <a:extLst>
+              <a:ext uri="{FF2B5EF4-FFF2-40B4-BE49-F238E27FC236}">
+                <a16:creationId xmlns:a16="http://schemas.microsoft.com/office/drawing/2014/main" id="{FBA5A073-E8E2-669B-6FE7-68BA3D66033B}"/>
+              </a:ext>
+            </a:extLst>
+          </p:cNvPr>
+          <p:cNvSpPr txBox="1"/>
+          <p:nvPr/>
+        </p:nvSpPr>
+        <p:spPr>
+          <a:xfrm>
+            <a:off x="786623" y="2287283"/>
+            <a:ext cx="320152" cy="215444"/>
+          </a:xfrm>
+          <a:prstGeom prst="rect">
+            <a:avLst/>
+          </a:prstGeom>
+          <a:noFill/>
+        </p:spPr>
+        <p:txBody>
+          <a:bodyPr wrap="square" rtlCol="0" anchor="ctr">
+            <a:spAutoFit/>
+          </a:bodyPr>
+          <a:lstStyle/>
+          <a:p>
+            <a:pPr algn="ctr"/>
+            <a:r>
+              <a:rPr lang="de-DE" sz="800" i="1" dirty="0">
+                <a:latin typeface="CMU Serif" panose="02000603000000000000" pitchFamily="2" charset="0"/>
+                <a:ea typeface="CMU Serif" panose="02000603000000000000" pitchFamily="2" charset="0"/>
+                <a:cs typeface="CMU Serif" panose="02000603000000000000" pitchFamily="2" charset="0"/>
+              </a:rPr>
+              <a:t>x</a:t>
+            </a:r>
+            <a:r>
+              <a:rPr lang="de-DE" sz="200" i="1" dirty="0">
+                <a:latin typeface="CMU Serif" panose="02000603000000000000" pitchFamily="2" charset="0"/>
+                <a:ea typeface="CMU Serif" panose="02000603000000000000" pitchFamily="2" charset="0"/>
+                <a:cs typeface="CMU Serif" panose="02000603000000000000" pitchFamily="2" charset="0"/>
+              </a:rPr>
+              <a:t> </a:t>
+            </a:r>
+            <a:r>
+              <a:rPr lang="de-DE" sz="800" baseline="-25000" dirty="0">
+                <a:latin typeface="CMU Serif" panose="02000603000000000000" pitchFamily="2" charset="0"/>
+                <a:ea typeface="CMU Serif" panose="02000603000000000000" pitchFamily="2" charset="0"/>
+                <a:cs typeface="CMU Serif" panose="02000603000000000000" pitchFamily="2" charset="0"/>
+              </a:rPr>
+              <a:t>S</a:t>
+            </a:r>
+          </a:p>
+        </p:txBody>
+      </p:sp>
+      <p:sp>
+        <p:nvSpPr>
+          <p:cNvPr id="103" name="Textfeld 102">
+            <a:extLst>
+              <a:ext uri="{FF2B5EF4-FFF2-40B4-BE49-F238E27FC236}">
+                <a16:creationId xmlns:a16="http://schemas.microsoft.com/office/drawing/2014/main" id="{23FB7ABF-CB56-2B6B-E294-F9CD8D09282E}"/>
+              </a:ext>
+            </a:extLst>
+          </p:cNvPr>
+          <p:cNvSpPr txBox="1"/>
+          <p:nvPr/>
+        </p:nvSpPr>
+        <p:spPr>
+          <a:xfrm>
+            <a:off x="1936498" y="2286081"/>
+            <a:ext cx="320152" cy="215444"/>
+          </a:xfrm>
+          <a:prstGeom prst="rect">
+            <a:avLst/>
+          </a:prstGeom>
+          <a:noFill/>
+        </p:spPr>
+        <p:txBody>
+          <a:bodyPr wrap="square" rtlCol="0" anchor="ctr">
+            <a:spAutoFit/>
+          </a:bodyPr>
+          <a:lstStyle/>
+          <a:p>
+            <a:pPr algn="ctr"/>
+            <a:r>
+              <a:rPr lang="de-DE" sz="800" i="1" dirty="0">
+                <a:latin typeface="CMU Serif" panose="02000603000000000000" pitchFamily="2" charset="0"/>
+                <a:ea typeface="CMU Serif" panose="02000603000000000000" pitchFamily="2" charset="0"/>
+                <a:cs typeface="CMU Serif" panose="02000603000000000000" pitchFamily="2" charset="0"/>
+              </a:rPr>
+              <a:t>r</a:t>
+            </a:r>
+            <a:r>
+              <a:rPr lang="de-DE" sz="200" i="1" dirty="0">
+                <a:latin typeface="CMU Serif" panose="02000603000000000000" pitchFamily="2" charset="0"/>
+                <a:ea typeface="CMU Serif" panose="02000603000000000000" pitchFamily="2" charset="0"/>
+                <a:cs typeface="CMU Serif" panose="02000603000000000000" pitchFamily="2" charset="0"/>
+              </a:rPr>
+              <a:t> </a:t>
+            </a:r>
+            <a:r>
+              <a:rPr lang="de-DE" sz="800" baseline="-25000" dirty="0">
+                <a:latin typeface="CMU Serif" panose="02000603000000000000" pitchFamily="2" charset="0"/>
+                <a:ea typeface="CMU Serif" panose="02000603000000000000" pitchFamily="2" charset="0"/>
+                <a:cs typeface="CMU Serif" panose="02000603000000000000" pitchFamily="2" charset="0"/>
+              </a:rPr>
+              <a:t>H</a:t>
+            </a:r>
+          </a:p>
+        </p:txBody>
+      </p:sp>
+      <p:cxnSp>
+        <p:nvCxnSpPr>
+          <p:cNvPr id="104" name="Gerade Verbindung mit Pfeil 103">
+            <a:extLst>
+              <a:ext uri="{FF2B5EF4-FFF2-40B4-BE49-F238E27FC236}">
+                <a16:creationId xmlns:a16="http://schemas.microsoft.com/office/drawing/2014/main" id="{1F565099-27E5-7192-F8F7-CC1CC39CAD4B}"/>
+              </a:ext>
+            </a:extLst>
+          </p:cNvPr>
+          <p:cNvCxnSpPr>
+            <a:cxnSpLocks/>
+          </p:cNvCxnSpPr>
+          <p:nvPr/>
+        </p:nvCxnSpPr>
+        <p:spPr>
+          <a:xfrm>
+            <a:off x="876463" y="1634429"/>
+            <a:ext cx="241093" cy="0"/>
+          </a:xfrm>
+          <a:prstGeom prst="straightConnector1">
+            <a:avLst/>
+          </a:prstGeom>
+          <a:ln w="15875" cap="rnd">
+            <a:solidFill>
+              <a:schemeClr val="accent2">
+                <a:lumMod val="75000"/>
+              </a:schemeClr>
+            </a:solidFill>
+            <a:round/>
+            <a:headEnd type="none" w="sm" len="sm"/>
+            <a:tailEnd type="triangle" w="med" len="med"/>
+          </a:ln>
+        </p:spPr>
+        <p:style>
+          <a:lnRef idx="2">
+            <a:schemeClr val="accent1"/>
+          </a:lnRef>
+          <a:fillRef idx="0">
+            <a:schemeClr val="accent1"/>
+          </a:fillRef>
+          <a:effectRef idx="1">
+            <a:schemeClr val="accent1"/>
+          </a:effectRef>
+          <a:fontRef idx="minor">
+            <a:schemeClr val="tx1"/>
+          </a:fontRef>
+        </p:style>
+      </p:cxnSp>
+      <p:sp>
+        <p:nvSpPr>
+          <p:cNvPr id="22" name="Ellipse 21">
+            <a:extLst>
+              <a:ext uri="{FF2B5EF4-FFF2-40B4-BE49-F238E27FC236}">
+                <a16:creationId xmlns:a16="http://schemas.microsoft.com/office/drawing/2014/main" id="{C1071813-055E-C3A7-3684-9A4CECCC441E}"/>
+              </a:ext>
+            </a:extLst>
+          </p:cNvPr>
+          <p:cNvSpPr/>
+          <p:nvPr/>
+        </p:nvSpPr>
+        <p:spPr>
+          <a:xfrm>
+            <a:off x="840898" y="1611930"/>
+            <a:ext cx="45719" cy="45719"/>
+          </a:xfrm>
+          <a:prstGeom prst="ellipse">
+            <a:avLst/>
+          </a:prstGeom>
+          <a:solidFill>
+            <a:schemeClr val="tx1"/>
+          </a:solidFill>
+          <a:ln>
+            <a:noFill/>
+          </a:ln>
+        </p:spPr>
+        <p:style>
+          <a:lnRef idx="2">
+            <a:schemeClr val="accent1">
+              <a:shade val="15000"/>
+            </a:schemeClr>
+          </a:lnRef>
+          <a:fillRef idx="1">
+            <a:schemeClr val="accent1"/>
+          </a:fillRef>
+          <a:effectRef idx="0">
+            <a:schemeClr val="accent1"/>
+          </a:effectRef>
+          <a:fontRef idx="minor">
+            <a:schemeClr val="lt1"/>
+          </a:fontRef>
+        </p:style>
+        <p:txBody>
+          <a:bodyPr rtlCol="0" anchor="ctr"/>
+          <a:lstStyle/>
+          <a:p>
+            <a:pPr algn="ctr"/>
+            <a:endParaRPr lang="de-DE" sz="800" dirty="0"/>
+          </a:p>
+        </p:txBody>
+      </p:sp>
+      <p:sp>
+        <p:nvSpPr>
+          <p:cNvPr id="107" name="Textfeld 106">
+            <a:extLst>
+              <a:ext uri="{FF2B5EF4-FFF2-40B4-BE49-F238E27FC236}">
+                <a16:creationId xmlns:a16="http://schemas.microsoft.com/office/drawing/2014/main" id="{B7341C8D-A09B-03B9-29A0-EAC2A730BC75}"/>
+              </a:ext>
+            </a:extLst>
+          </p:cNvPr>
+          <p:cNvSpPr txBox="1"/>
+          <p:nvPr/>
+        </p:nvSpPr>
+        <p:spPr>
+          <a:xfrm>
+            <a:off x="963486" y="1445597"/>
+            <a:ext cx="450936" cy="215444"/>
+          </a:xfrm>
+          <a:prstGeom prst="rect">
+            <a:avLst/>
+          </a:prstGeom>
+          <a:noFill/>
+        </p:spPr>
+        <p:txBody>
+          <a:bodyPr wrap="square" rtlCol="0" anchor="ctr">
+            <a:spAutoFit/>
+          </a:bodyPr>
+          <a:lstStyle/>
+          <a:p>
+            <a:pPr algn="ctr"/>
+            <a:r>
+              <a:rPr lang="de-DE" sz="800" i="1" dirty="0">
+                <a:solidFill>
+                  <a:schemeClr val="accent2">
+                    <a:lumMod val="75000"/>
+                  </a:schemeClr>
+                </a:solidFill>
+                <a:latin typeface="CMU Serif" panose="02000603000000000000" pitchFamily="2" charset="0"/>
+                <a:ea typeface="CMU Serif" panose="02000603000000000000" pitchFamily="2" charset="0"/>
+                <a:cs typeface="CMU Serif" panose="02000603000000000000" pitchFamily="2" charset="0"/>
+              </a:rPr>
+              <a:t>W</a:t>
+            </a:r>
+            <a:endParaRPr lang="de-DE" sz="800" baseline="-25000" dirty="0">
+              <a:solidFill>
+                <a:schemeClr val="accent2">
+                  <a:lumMod val="75000"/>
+                </a:schemeClr>
+              </a:solidFill>
+              <a:latin typeface="CMU Serif" panose="02000603000000000000" pitchFamily="2" charset="0"/>
+              <a:ea typeface="CMU Serif" panose="02000603000000000000" pitchFamily="2" charset="0"/>
+              <a:cs typeface="CMU Serif" panose="02000603000000000000" pitchFamily="2" charset="0"/>
+            </a:endParaRPr>
+          </a:p>
+        </p:txBody>
+      </p:sp>
+      <p:cxnSp>
+        <p:nvCxnSpPr>
+          <p:cNvPr id="108" name="Gerade Verbindung mit Pfeil 107">
+            <a:extLst>
+              <a:ext uri="{FF2B5EF4-FFF2-40B4-BE49-F238E27FC236}">
+                <a16:creationId xmlns:a16="http://schemas.microsoft.com/office/drawing/2014/main" id="{5FC4A5B0-F661-2F48-C4EB-9D3C34CBD917}"/>
+              </a:ext>
+            </a:extLst>
+          </p:cNvPr>
+          <p:cNvCxnSpPr>
+            <a:cxnSpLocks/>
+          </p:cNvCxnSpPr>
+          <p:nvPr/>
+        </p:nvCxnSpPr>
+        <p:spPr>
+          <a:xfrm flipH="1" flipV="1">
+            <a:off x="1692474" y="1667162"/>
+            <a:ext cx="358214" cy="65274"/>
+          </a:xfrm>
+          <a:prstGeom prst="straightConnector1">
+            <a:avLst/>
+          </a:prstGeom>
+          <a:ln w="15875" cap="rnd">
+            <a:solidFill>
+              <a:schemeClr val="accent5">
+                <a:lumMod val="75000"/>
+              </a:schemeClr>
+            </a:solidFill>
+            <a:round/>
+            <a:headEnd type="none" w="sm" len="sm"/>
+            <a:tailEnd type="triangle" w="med" len="med"/>
+          </a:ln>
+        </p:spPr>
+        <p:style>
+          <a:lnRef idx="2">
+            <a:schemeClr val="accent1"/>
+          </a:lnRef>
+          <a:fillRef idx="0">
+            <a:schemeClr val="accent1"/>
+          </a:fillRef>
+          <a:effectRef idx="1">
+            <a:schemeClr val="accent1"/>
+          </a:effectRef>
+          <a:fontRef idx="minor">
+            <a:schemeClr val="tx1"/>
+          </a:fontRef>
+        </p:style>
+      </p:cxnSp>
+      <p:sp>
+        <p:nvSpPr>
+          <p:cNvPr id="110" name="Textfeld 109">
+            <a:extLst>
+              <a:ext uri="{FF2B5EF4-FFF2-40B4-BE49-F238E27FC236}">
+                <a16:creationId xmlns:a16="http://schemas.microsoft.com/office/drawing/2014/main" id="{8DB82D20-5AD9-D66A-0A77-C81563F15471}"/>
+              </a:ext>
+            </a:extLst>
+          </p:cNvPr>
+          <p:cNvSpPr txBox="1"/>
+          <p:nvPr/>
+        </p:nvSpPr>
+        <p:spPr>
+          <a:xfrm>
+            <a:off x="1684201" y="1520381"/>
+            <a:ext cx="450936" cy="215444"/>
+          </a:xfrm>
+          <a:prstGeom prst="rect">
+            <a:avLst/>
+          </a:prstGeom>
+          <a:noFill/>
+        </p:spPr>
+        <p:txBody>
+          <a:bodyPr wrap="square" rtlCol="0" anchor="ctr">
+            <a:spAutoFit/>
+          </a:bodyPr>
+          <a:lstStyle/>
+          <a:p>
+            <a:pPr algn="ctr"/>
+            <a:r>
+              <a:rPr lang="de-DE" sz="800" i="1" dirty="0">
+                <a:solidFill>
+                  <a:schemeClr val="accent5">
+                    <a:lumMod val="75000"/>
+                  </a:schemeClr>
+                </a:solidFill>
+                <a:latin typeface="CMU Serif" panose="02000603000000000000" pitchFamily="2" charset="0"/>
+                <a:ea typeface="CMU Serif" panose="02000603000000000000" pitchFamily="2" charset="0"/>
+                <a:cs typeface="CMU Serif" panose="02000603000000000000" pitchFamily="2" charset="0"/>
+              </a:rPr>
+              <a:t>F</a:t>
+            </a:r>
+            <a:endParaRPr lang="de-DE" sz="800" baseline="-25000" dirty="0">
+              <a:solidFill>
+                <a:schemeClr val="accent5">
+                  <a:lumMod val="75000"/>
+                </a:schemeClr>
+              </a:solidFill>
+              <a:latin typeface="CMU Serif" panose="02000603000000000000" pitchFamily="2" charset="0"/>
+              <a:ea typeface="CMU Serif" panose="02000603000000000000" pitchFamily="2" charset="0"/>
+              <a:cs typeface="CMU Serif" panose="02000603000000000000" pitchFamily="2" charset="0"/>
+            </a:endParaRPr>
+          </a:p>
+        </p:txBody>
+      </p:sp>
+      <p:sp>
+        <p:nvSpPr>
+          <p:cNvPr id="114" name="Ellipse 113">
+            <a:extLst>
+              <a:ext uri="{FF2B5EF4-FFF2-40B4-BE49-F238E27FC236}">
+                <a16:creationId xmlns:a16="http://schemas.microsoft.com/office/drawing/2014/main" id="{A01E66ED-1D64-50B9-4981-E46E619EF643}"/>
+              </a:ext>
+            </a:extLst>
+          </p:cNvPr>
+          <p:cNvSpPr/>
+          <p:nvPr/>
+        </p:nvSpPr>
+        <p:spPr>
+          <a:xfrm>
+            <a:off x="1503746" y="1734429"/>
+            <a:ext cx="36000" cy="36000"/>
+          </a:xfrm>
+          <a:prstGeom prst="ellipse">
+            <a:avLst/>
+          </a:prstGeom>
+          <a:solidFill>
+            <a:schemeClr val="bg1"/>
+          </a:solidFill>
+          <a:ln w="6350">
+            <a:solidFill>
+              <a:schemeClr val="tx1"/>
+            </a:solidFill>
+          </a:ln>
+        </p:spPr>
+        <p:style>
+          <a:lnRef idx="2">
+            <a:schemeClr val="accent1">
+              <a:shade val="15000"/>
+            </a:schemeClr>
+          </a:lnRef>
+          <a:fillRef idx="1">
+            <a:schemeClr val="accent1"/>
+          </a:fillRef>
+          <a:effectRef idx="0">
+            <a:schemeClr val="accent1"/>
+          </a:effectRef>
+          <a:fontRef idx="minor">
+            <a:schemeClr val="lt1"/>
+          </a:fontRef>
+        </p:style>
+        <p:txBody>
+          <a:bodyPr rtlCol="0" anchor="ctr"/>
+          <a:lstStyle/>
+          <a:p>
+            <a:pPr algn="ctr"/>
+            <a:endParaRPr lang="de-DE" sz="800" dirty="0"/>
+          </a:p>
+        </p:txBody>
+      </p:sp>
+      <p:cxnSp>
+        <p:nvCxnSpPr>
+          <p:cNvPr id="117" name="Gerader Verbinder 116">
+            <a:extLst>
+              <a:ext uri="{FF2B5EF4-FFF2-40B4-BE49-F238E27FC236}">
+                <a16:creationId xmlns:a16="http://schemas.microsoft.com/office/drawing/2014/main" id="{2199D088-B4C5-3AC6-731A-F2E992FACC13}"/>
+              </a:ext>
+            </a:extLst>
+          </p:cNvPr>
+          <p:cNvCxnSpPr>
+            <a:cxnSpLocks/>
+          </p:cNvCxnSpPr>
+          <p:nvPr/>
+        </p:nvCxnSpPr>
+        <p:spPr>
+          <a:xfrm>
+            <a:off x="1463204" y="1460320"/>
+            <a:ext cx="52441" cy="243028"/>
+          </a:xfrm>
+          <a:prstGeom prst="line">
+            <a:avLst/>
+          </a:prstGeom>
+          <a:ln w="6350" cap="rnd">
+            <a:solidFill>
+              <a:schemeClr val="tx1"/>
+            </a:solidFill>
+            <a:round/>
+          </a:ln>
+        </p:spPr>
+        <p:style>
+          <a:lnRef idx="2">
+            <a:schemeClr val="accent1"/>
+          </a:lnRef>
+          <a:fillRef idx="0">
+            <a:schemeClr val="accent1"/>
+          </a:fillRef>
+          <a:effectRef idx="1">
+            <a:schemeClr val="accent1"/>
+          </a:effectRef>
+          <a:fontRef idx="minor">
+            <a:schemeClr val="tx1"/>
+          </a:fontRef>
+        </p:style>
+      </p:cxnSp>
+      <p:sp>
+        <p:nvSpPr>
+          <p:cNvPr id="120" name="Textfeld 119">
+            <a:extLst>
+              <a:ext uri="{FF2B5EF4-FFF2-40B4-BE49-F238E27FC236}">
+                <a16:creationId xmlns:a16="http://schemas.microsoft.com/office/drawing/2014/main" id="{4C17432C-3174-67BB-F5B8-6AB4C8ABE838}"/>
+              </a:ext>
+            </a:extLst>
+          </p:cNvPr>
+          <p:cNvSpPr txBox="1"/>
+          <p:nvPr/>
+        </p:nvSpPr>
+        <p:spPr>
+          <a:xfrm>
+            <a:off x="1174574" y="1300233"/>
+            <a:ext cx="857220" cy="200055"/>
+          </a:xfrm>
+          <a:prstGeom prst="rect">
+            <a:avLst/>
+          </a:prstGeom>
+          <a:noFill/>
+        </p:spPr>
+        <p:txBody>
+          <a:bodyPr wrap="square" rtlCol="0" anchor="ctr">
+            <a:spAutoFit/>
+          </a:bodyPr>
+          <a:lstStyle/>
+          <a:p>
+            <a:pPr algn="ctr"/>
+            <a:r>
+              <a:rPr lang="de-DE" sz="700" dirty="0">
+                <a:latin typeface="CMU Serif" panose="02000603000000000000" pitchFamily="2" charset="0"/>
+                <a:ea typeface="CMU Serif" panose="02000603000000000000" pitchFamily="2" charset="0"/>
+                <a:cs typeface="CMU Serif" panose="02000603000000000000" pitchFamily="2" charset="0"/>
+              </a:rPr>
+              <a:t>Neutralpunkt</a:t>
+            </a:r>
+            <a:endParaRPr lang="de-DE" sz="700" baseline="-25000" dirty="0">
+              <a:latin typeface="CMU Serif" panose="02000603000000000000" pitchFamily="2" charset="0"/>
+              <a:ea typeface="CMU Serif" panose="02000603000000000000" pitchFamily="2" charset="0"/>
+              <a:cs typeface="CMU Serif" panose="02000603000000000000" pitchFamily="2" charset="0"/>
+            </a:endParaRPr>
+          </a:p>
+        </p:txBody>
+      </p:sp>
+      <p:cxnSp>
+        <p:nvCxnSpPr>
+          <p:cNvPr id="123" name="Gerader Verbinder 122">
+            <a:extLst>
+              <a:ext uri="{FF2B5EF4-FFF2-40B4-BE49-F238E27FC236}">
+                <a16:creationId xmlns:a16="http://schemas.microsoft.com/office/drawing/2014/main" id="{B060041A-DC74-A80F-436C-314675744BFB}"/>
+              </a:ext>
+            </a:extLst>
+          </p:cNvPr>
+          <p:cNvCxnSpPr>
+            <a:cxnSpLocks/>
+          </p:cNvCxnSpPr>
+          <p:nvPr/>
+        </p:nvCxnSpPr>
+        <p:spPr>
+          <a:xfrm>
+            <a:off x="521291" y="1295415"/>
+            <a:ext cx="80010" cy="261257"/>
+          </a:xfrm>
+          <a:prstGeom prst="line">
+            <a:avLst/>
+          </a:prstGeom>
+          <a:ln w="6350" cap="rnd">
+            <a:solidFill>
+              <a:schemeClr val="tx1"/>
+            </a:solidFill>
+            <a:round/>
+          </a:ln>
+        </p:spPr>
+        <p:style>
+          <a:lnRef idx="2">
+            <a:schemeClr val="accent1"/>
+          </a:lnRef>
+          <a:fillRef idx="0">
+            <a:schemeClr val="accent1"/>
+          </a:fillRef>
+          <a:effectRef idx="1">
+            <a:schemeClr val="accent1"/>
+          </a:effectRef>
+          <a:fontRef idx="minor">
+            <a:schemeClr val="tx1"/>
+          </a:fontRef>
+        </p:style>
+      </p:cxnSp>
+      <p:sp>
+        <p:nvSpPr>
+          <p:cNvPr id="124" name="Textfeld 123">
+            <a:extLst>
+              <a:ext uri="{FF2B5EF4-FFF2-40B4-BE49-F238E27FC236}">
+                <a16:creationId xmlns:a16="http://schemas.microsoft.com/office/drawing/2014/main" id="{A75D698C-F27A-2934-83A2-9074947097A0}"/>
+              </a:ext>
+            </a:extLst>
+          </p:cNvPr>
+          <p:cNvSpPr txBox="1"/>
+          <p:nvPr/>
+        </p:nvSpPr>
+        <p:spPr>
+          <a:xfrm>
+            <a:off x="68514" y="956681"/>
+            <a:ext cx="729802" cy="369332"/>
+          </a:xfrm>
+          <a:prstGeom prst="rect">
+            <a:avLst/>
+          </a:prstGeom>
+          <a:noFill/>
+        </p:spPr>
+        <p:txBody>
+          <a:bodyPr wrap="square" rtlCol="0" anchor="ctr">
+            <a:spAutoFit/>
+          </a:bodyPr>
+          <a:lstStyle/>
+          <a:p>
+            <a:pPr algn="ctr"/>
+            <a:r>
+              <a:rPr lang="de-DE" sz="600" dirty="0">
+                <a:latin typeface="CMU Serif" panose="02000603000000000000" pitchFamily="2" charset="0"/>
+                <a:ea typeface="CMU Serif" panose="02000603000000000000" pitchFamily="2" charset="0"/>
+                <a:cs typeface="CMU Serif" panose="02000603000000000000" pitchFamily="2" charset="0"/>
+              </a:rPr>
+              <a:t>Nullauftriebs-Richtung des Flügels</a:t>
+            </a:r>
+            <a:endParaRPr lang="de-DE" sz="600" baseline="-25000" dirty="0">
+              <a:latin typeface="CMU Serif" panose="02000603000000000000" pitchFamily="2" charset="0"/>
+              <a:ea typeface="CMU Serif" panose="02000603000000000000" pitchFamily="2" charset="0"/>
+              <a:cs typeface="CMU Serif" panose="02000603000000000000" pitchFamily="2" charset="0"/>
+            </a:endParaRPr>
+          </a:p>
+        </p:txBody>
+      </p:sp>
+      <p:sp>
+        <p:nvSpPr>
+          <p:cNvPr id="134" name="Bogen 133">
+            <a:extLst>
+              <a:ext uri="{FF2B5EF4-FFF2-40B4-BE49-F238E27FC236}">
+                <a16:creationId xmlns:a16="http://schemas.microsoft.com/office/drawing/2014/main" id="{BE9F03B0-0704-9B5E-9ABF-8923C8E965A3}"/>
+              </a:ext>
+            </a:extLst>
+          </p:cNvPr>
+          <p:cNvSpPr/>
+          <p:nvPr/>
+        </p:nvSpPr>
+        <p:spPr>
+          <a:xfrm>
+            <a:off x="758863" y="1522705"/>
+            <a:ext cx="212764" cy="212764"/>
+          </a:xfrm>
+          <a:prstGeom prst="arc">
+            <a:avLst>
+              <a:gd name="adj1" fmla="val 2589229"/>
+              <a:gd name="adj2" fmla="val 21020068"/>
+            </a:avLst>
+          </a:prstGeom>
+          <a:ln w="15875" cap="rnd">
+            <a:solidFill>
+              <a:schemeClr val="accent6"/>
+            </a:solidFill>
+            <a:round/>
+            <a:headEnd type="none"/>
+            <a:tailEnd type="triangle"/>
+          </a:ln>
+        </p:spPr>
+        <p:style>
+          <a:lnRef idx="2">
+            <a:schemeClr val="accent1"/>
+          </a:lnRef>
+          <a:fillRef idx="0">
+            <a:schemeClr val="accent1"/>
+          </a:fillRef>
+          <a:effectRef idx="1">
+            <a:schemeClr val="accent1"/>
+          </a:effectRef>
+          <a:fontRef idx="minor">
+            <a:schemeClr val="tx1"/>
+          </a:fontRef>
+        </p:style>
+        <p:txBody>
+          <a:bodyPr rtlCol="0" anchor="ctr"/>
+          <a:lstStyle/>
+          <a:p>
+            <a:pPr algn="ctr"/>
+            <a:endParaRPr lang="de-DE" sz="800"/>
+          </a:p>
+        </p:txBody>
+      </p:sp>
+      <p:sp>
+        <p:nvSpPr>
+          <p:cNvPr id="135" name="Textfeld 134">
+            <a:extLst>
+              <a:ext uri="{FF2B5EF4-FFF2-40B4-BE49-F238E27FC236}">
+                <a16:creationId xmlns:a16="http://schemas.microsoft.com/office/drawing/2014/main" id="{CF99DE8E-DF97-1670-097E-2146FE95E0C2}"/>
+              </a:ext>
+            </a:extLst>
+          </p:cNvPr>
+          <p:cNvSpPr txBox="1"/>
+          <p:nvPr/>
+        </p:nvSpPr>
+        <p:spPr>
+          <a:xfrm>
+            <a:off x="752032" y="1329418"/>
+            <a:ext cx="450936" cy="215444"/>
+          </a:xfrm>
+          <a:prstGeom prst="rect">
+            <a:avLst/>
+          </a:prstGeom>
+          <a:noFill/>
+        </p:spPr>
+        <p:txBody>
+          <a:bodyPr wrap="square" rtlCol="0" anchor="ctr">
+            <a:spAutoFit/>
+          </a:bodyPr>
+          <a:lstStyle/>
+          <a:p>
+            <a:pPr algn="ctr"/>
+            <a:r>
+              <a:rPr lang="de-DE" sz="800" i="1" dirty="0" err="1">
+                <a:solidFill>
+                  <a:schemeClr val="accent6"/>
+                </a:solidFill>
+                <a:latin typeface="CMU Serif" panose="02000603000000000000" pitchFamily="2" charset="0"/>
+                <a:ea typeface="CMU Serif" panose="02000603000000000000" pitchFamily="2" charset="0"/>
+                <a:cs typeface="CMU Serif" panose="02000603000000000000" pitchFamily="2" charset="0"/>
+              </a:rPr>
+              <a:t>M</a:t>
+            </a:r>
+            <a:r>
+              <a:rPr lang="de-DE" sz="800" baseline="-25000" dirty="0" err="1">
+                <a:solidFill>
+                  <a:schemeClr val="accent6"/>
+                </a:solidFill>
+                <a:latin typeface="CMU Serif" panose="02000603000000000000" pitchFamily="2" charset="0"/>
+                <a:ea typeface="CMU Serif" panose="02000603000000000000" pitchFamily="2" charset="0"/>
+                <a:cs typeface="CMU Serif" panose="02000603000000000000" pitchFamily="2" charset="0"/>
+              </a:rPr>
+              <a:t>oF</a:t>
+            </a:r>
+            <a:endParaRPr lang="de-DE" sz="800" baseline="-25000" dirty="0">
+              <a:solidFill>
+                <a:schemeClr val="accent6"/>
+              </a:solidFill>
+              <a:latin typeface="CMU Serif" panose="02000603000000000000" pitchFamily="2" charset="0"/>
+              <a:ea typeface="CMU Serif" panose="02000603000000000000" pitchFamily="2" charset="0"/>
+              <a:cs typeface="CMU Serif" panose="02000603000000000000" pitchFamily="2" charset="0"/>
+            </a:endParaRPr>
+          </a:p>
+        </p:txBody>
+      </p:sp>
+      <p:sp>
+        <p:nvSpPr>
+          <p:cNvPr id="138" name="Bogen 137">
+            <a:extLst>
+              <a:ext uri="{FF2B5EF4-FFF2-40B4-BE49-F238E27FC236}">
+                <a16:creationId xmlns:a16="http://schemas.microsoft.com/office/drawing/2014/main" id="{DCF576A8-9905-70C9-A622-45A180DEB3FC}"/>
+              </a:ext>
+            </a:extLst>
+          </p:cNvPr>
+          <p:cNvSpPr/>
+          <p:nvPr/>
+        </p:nvSpPr>
+        <p:spPr>
+          <a:xfrm>
+            <a:off x="1658012" y="1882967"/>
+            <a:ext cx="265230" cy="265230"/>
+          </a:xfrm>
+          <a:prstGeom prst="arc">
+            <a:avLst>
+              <a:gd name="adj1" fmla="val 7249083"/>
+              <a:gd name="adj2" fmla="val 4437620"/>
+            </a:avLst>
+          </a:prstGeom>
+          <a:ln w="15875" cap="rnd">
+            <a:solidFill>
+              <a:schemeClr val="accent6"/>
+            </a:solidFill>
+            <a:round/>
+            <a:headEnd type="none"/>
+            <a:tailEnd type="triangle"/>
+          </a:ln>
+        </p:spPr>
+        <p:style>
+          <a:lnRef idx="2">
+            <a:schemeClr val="accent1"/>
+          </a:lnRef>
+          <a:fillRef idx="0">
+            <a:schemeClr val="accent1"/>
+          </a:fillRef>
+          <a:effectRef idx="1">
+            <a:schemeClr val="accent1"/>
+          </a:effectRef>
+          <a:fontRef idx="minor">
+            <a:schemeClr val="tx1"/>
+          </a:fontRef>
+        </p:style>
+        <p:txBody>
+          <a:bodyPr rtlCol="0" anchor="ctr"/>
+          <a:lstStyle/>
+          <a:p>
+            <a:pPr algn="ctr"/>
+            <a:endParaRPr lang="de-DE" sz="800"/>
+          </a:p>
+        </p:txBody>
+      </p:sp>
+      <p:sp>
+        <p:nvSpPr>
+          <p:cNvPr id="139" name="Textfeld 138">
+            <a:extLst>
+              <a:ext uri="{FF2B5EF4-FFF2-40B4-BE49-F238E27FC236}">
+                <a16:creationId xmlns:a16="http://schemas.microsoft.com/office/drawing/2014/main" id="{8E9B8731-BF11-964C-13EF-28DD7DE1E228}"/>
+              </a:ext>
+            </a:extLst>
+          </p:cNvPr>
+          <p:cNvSpPr txBox="1"/>
+          <p:nvPr/>
+        </p:nvSpPr>
+        <p:spPr>
+          <a:xfrm>
+            <a:off x="1619274" y="1898339"/>
+            <a:ext cx="340562" cy="215444"/>
+          </a:xfrm>
+          <a:prstGeom prst="rect">
+            <a:avLst/>
+          </a:prstGeom>
+          <a:noFill/>
+        </p:spPr>
+        <p:txBody>
+          <a:bodyPr wrap="square" rtlCol="0" anchor="ctr">
+            <a:spAutoFit/>
+          </a:bodyPr>
+          <a:lstStyle/>
+          <a:p>
+            <a:pPr algn="ctr"/>
+            <a:r>
+              <a:rPr lang="de-DE" sz="800" i="1" dirty="0">
+                <a:solidFill>
+                  <a:schemeClr val="accent6"/>
+                </a:solidFill>
+                <a:latin typeface="CMU Serif" panose="02000603000000000000" pitchFamily="2" charset="0"/>
+                <a:ea typeface="CMU Serif" panose="02000603000000000000" pitchFamily="2" charset="0"/>
+                <a:cs typeface="CMU Serif" panose="02000603000000000000" pitchFamily="2" charset="0"/>
+              </a:rPr>
+              <a:t>M</a:t>
+            </a:r>
+            <a:r>
+              <a:rPr lang="de-DE" sz="800" baseline="-25000" dirty="0">
+                <a:solidFill>
+                  <a:schemeClr val="accent6"/>
+                </a:solidFill>
+                <a:latin typeface="CMU Serif" panose="02000603000000000000" pitchFamily="2" charset="0"/>
+                <a:ea typeface="CMU Serif" panose="02000603000000000000" pitchFamily="2" charset="0"/>
+                <a:cs typeface="CMU Serif" panose="02000603000000000000" pitchFamily="2" charset="0"/>
+              </a:rPr>
+              <a:t>R</a:t>
+            </a:r>
+          </a:p>
+        </p:txBody>
+      </p:sp>
+      <p:sp>
+        <p:nvSpPr>
+          <p:cNvPr id="140" name="Bogen 139">
+            <a:extLst>
+              <a:ext uri="{FF2B5EF4-FFF2-40B4-BE49-F238E27FC236}">
+                <a16:creationId xmlns:a16="http://schemas.microsoft.com/office/drawing/2014/main" id="{ABBC84AB-DFFC-B64F-DE3F-625D8DD1C149}"/>
+              </a:ext>
+            </a:extLst>
+          </p:cNvPr>
+          <p:cNvSpPr/>
+          <p:nvPr/>
+        </p:nvSpPr>
+        <p:spPr>
+          <a:xfrm>
+            <a:off x="2867203" y="1559191"/>
+            <a:ext cx="212764" cy="212764"/>
+          </a:xfrm>
+          <a:prstGeom prst="arc">
+            <a:avLst>
+              <a:gd name="adj1" fmla="val 2112536"/>
+              <a:gd name="adj2" fmla="val 20406014"/>
+            </a:avLst>
+          </a:prstGeom>
+          <a:ln w="15875" cap="rnd">
+            <a:solidFill>
+              <a:schemeClr val="accent6"/>
+            </a:solidFill>
+            <a:round/>
+            <a:headEnd type="none"/>
+            <a:tailEnd type="triangle"/>
+          </a:ln>
+        </p:spPr>
+        <p:style>
+          <a:lnRef idx="2">
+            <a:schemeClr val="accent1"/>
+          </a:lnRef>
+          <a:fillRef idx="0">
+            <a:schemeClr val="accent1"/>
+          </a:fillRef>
+          <a:effectRef idx="1">
+            <a:schemeClr val="accent1"/>
+          </a:effectRef>
+          <a:fontRef idx="minor">
+            <a:schemeClr val="tx1"/>
+          </a:fontRef>
+        </p:style>
+        <p:txBody>
+          <a:bodyPr rtlCol="0" anchor="ctr"/>
+          <a:lstStyle/>
+          <a:p>
+            <a:pPr algn="ctr"/>
+            <a:endParaRPr lang="de-DE" sz="800"/>
+          </a:p>
+        </p:txBody>
+      </p:sp>
+      <p:sp>
+        <p:nvSpPr>
+          <p:cNvPr id="141" name="Textfeld 140">
+            <a:extLst>
+              <a:ext uri="{FF2B5EF4-FFF2-40B4-BE49-F238E27FC236}">
+                <a16:creationId xmlns:a16="http://schemas.microsoft.com/office/drawing/2014/main" id="{AFA254EE-5F0E-7AC5-AD20-8E96D818CFA2}"/>
+              </a:ext>
+            </a:extLst>
+          </p:cNvPr>
+          <p:cNvSpPr txBox="1"/>
+          <p:nvPr/>
+        </p:nvSpPr>
+        <p:spPr>
+          <a:xfrm>
+            <a:off x="2898283" y="1381454"/>
+            <a:ext cx="450936" cy="215444"/>
+          </a:xfrm>
+          <a:prstGeom prst="rect">
+            <a:avLst/>
+          </a:prstGeom>
+          <a:noFill/>
+        </p:spPr>
+        <p:txBody>
+          <a:bodyPr wrap="square" rtlCol="0" anchor="ctr">
+            <a:spAutoFit/>
+          </a:bodyPr>
+          <a:lstStyle/>
+          <a:p>
+            <a:pPr algn="ctr"/>
+            <a:r>
+              <a:rPr lang="de-DE" sz="800" i="1" dirty="0" err="1">
+                <a:solidFill>
+                  <a:schemeClr val="accent6"/>
+                </a:solidFill>
+                <a:latin typeface="CMU Serif" panose="02000603000000000000" pitchFamily="2" charset="0"/>
+                <a:ea typeface="CMU Serif" panose="02000603000000000000" pitchFamily="2" charset="0"/>
+                <a:cs typeface="CMU Serif" panose="02000603000000000000" pitchFamily="2" charset="0"/>
+              </a:rPr>
+              <a:t>M</a:t>
+            </a:r>
+            <a:r>
+              <a:rPr lang="de-DE" sz="800" baseline="-25000" dirty="0" err="1">
+                <a:solidFill>
+                  <a:schemeClr val="accent6"/>
+                </a:solidFill>
+                <a:latin typeface="CMU Serif" panose="02000603000000000000" pitchFamily="2" charset="0"/>
+                <a:ea typeface="CMU Serif" panose="02000603000000000000" pitchFamily="2" charset="0"/>
+                <a:cs typeface="CMU Serif" panose="02000603000000000000" pitchFamily="2" charset="0"/>
+              </a:rPr>
+              <a:t>oH</a:t>
+            </a:r>
+            <a:endParaRPr lang="de-DE" sz="800" baseline="-25000" dirty="0">
+              <a:solidFill>
+                <a:schemeClr val="accent6"/>
+              </a:solidFill>
+              <a:latin typeface="CMU Serif" panose="02000603000000000000" pitchFamily="2" charset="0"/>
+              <a:ea typeface="CMU Serif" panose="02000603000000000000" pitchFamily="2" charset="0"/>
+              <a:cs typeface="CMU Serif" panose="02000603000000000000" pitchFamily="2" charset="0"/>
+            </a:endParaRPr>
+          </a:p>
+        </p:txBody>
+      </p:sp>
+      <p:cxnSp>
+        <p:nvCxnSpPr>
+          <p:cNvPr id="142" name="Gerade Verbindung mit Pfeil 141">
+            <a:extLst>
+              <a:ext uri="{FF2B5EF4-FFF2-40B4-BE49-F238E27FC236}">
+                <a16:creationId xmlns:a16="http://schemas.microsoft.com/office/drawing/2014/main" id="{13745FE0-FDA7-B7A1-D318-B66EE522ED08}"/>
+              </a:ext>
+            </a:extLst>
+          </p:cNvPr>
+          <p:cNvCxnSpPr>
+            <a:cxnSpLocks/>
+          </p:cNvCxnSpPr>
+          <p:nvPr/>
+        </p:nvCxnSpPr>
+        <p:spPr>
+          <a:xfrm>
+            <a:off x="2982975" y="1667492"/>
+            <a:ext cx="241093" cy="0"/>
+          </a:xfrm>
+          <a:prstGeom prst="straightConnector1">
+            <a:avLst/>
+          </a:prstGeom>
+          <a:ln w="15875" cap="rnd">
+            <a:solidFill>
+              <a:schemeClr val="accent2">
+                <a:lumMod val="75000"/>
+              </a:schemeClr>
+            </a:solidFill>
+            <a:round/>
+            <a:headEnd type="none" w="sm" len="sm"/>
+            <a:tailEnd type="triangle" w="med" len="med"/>
+          </a:ln>
+        </p:spPr>
+        <p:style>
+          <a:lnRef idx="2">
+            <a:schemeClr val="accent1"/>
+          </a:lnRef>
+          <a:fillRef idx="0">
+            <a:schemeClr val="accent1"/>
+          </a:fillRef>
+          <a:effectRef idx="1">
+            <a:schemeClr val="accent1"/>
+          </a:effectRef>
+          <a:fontRef idx="minor">
+            <a:schemeClr val="tx1"/>
+          </a:fontRef>
+        </p:style>
+      </p:cxnSp>
+      <p:sp>
+        <p:nvSpPr>
+          <p:cNvPr id="143" name="Textfeld 142">
+            <a:extLst>
+              <a:ext uri="{FF2B5EF4-FFF2-40B4-BE49-F238E27FC236}">
+                <a16:creationId xmlns:a16="http://schemas.microsoft.com/office/drawing/2014/main" id="{A7E9AF6F-E2E0-62F8-8E0D-76AB8E020745}"/>
+              </a:ext>
+            </a:extLst>
+          </p:cNvPr>
+          <p:cNvSpPr txBox="1"/>
+          <p:nvPr/>
+        </p:nvSpPr>
+        <p:spPr>
+          <a:xfrm>
+            <a:off x="3025941" y="1658278"/>
+            <a:ext cx="450936" cy="215444"/>
+          </a:xfrm>
+          <a:prstGeom prst="rect">
+            <a:avLst/>
+          </a:prstGeom>
+          <a:noFill/>
+        </p:spPr>
+        <p:txBody>
+          <a:bodyPr wrap="square" rtlCol="0" anchor="ctr">
+            <a:spAutoFit/>
+          </a:bodyPr>
+          <a:lstStyle/>
+          <a:p>
+            <a:pPr algn="ctr"/>
+            <a:r>
+              <a:rPr lang="de-DE" sz="800" i="1" dirty="0">
+                <a:solidFill>
+                  <a:schemeClr val="accent2">
+                    <a:lumMod val="75000"/>
+                  </a:schemeClr>
+                </a:solidFill>
+                <a:latin typeface="CMU Serif" panose="02000603000000000000" pitchFamily="2" charset="0"/>
+                <a:ea typeface="CMU Serif" panose="02000603000000000000" pitchFamily="2" charset="0"/>
+                <a:cs typeface="CMU Serif" panose="02000603000000000000" pitchFamily="2" charset="0"/>
+              </a:rPr>
+              <a:t>W</a:t>
+            </a:r>
+            <a:r>
+              <a:rPr lang="de-DE" sz="800" baseline="-25000" dirty="0">
+                <a:solidFill>
+                  <a:schemeClr val="accent2">
+                    <a:lumMod val="75000"/>
+                  </a:schemeClr>
+                </a:solidFill>
+                <a:latin typeface="CMU Serif" panose="02000603000000000000" pitchFamily="2" charset="0"/>
+                <a:ea typeface="CMU Serif" panose="02000603000000000000" pitchFamily="2" charset="0"/>
+                <a:cs typeface="CMU Serif" panose="02000603000000000000" pitchFamily="2" charset="0"/>
+              </a:rPr>
+              <a:t>H</a:t>
+            </a:r>
+          </a:p>
+        </p:txBody>
+      </p:sp>
+      <p:sp>
+        <p:nvSpPr>
+          <p:cNvPr id="38" name="Ellipse 37">
+            <a:extLst>
+              <a:ext uri="{FF2B5EF4-FFF2-40B4-BE49-F238E27FC236}">
+                <a16:creationId xmlns:a16="http://schemas.microsoft.com/office/drawing/2014/main" id="{613861E4-B950-47CC-E1BE-283841B586BB}"/>
+              </a:ext>
+            </a:extLst>
+          </p:cNvPr>
+          <p:cNvSpPr/>
+          <p:nvPr/>
+        </p:nvSpPr>
+        <p:spPr>
+          <a:xfrm>
+            <a:off x="2954907" y="1649094"/>
+            <a:ext cx="36000" cy="36000"/>
+          </a:xfrm>
+          <a:prstGeom prst="ellipse">
+            <a:avLst/>
+          </a:prstGeom>
+          <a:solidFill>
+            <a:schemeClr val="tx1"/>
+          </a:solidFill>
+          <a:ln>
+            <a:noFill/>
+          </a:ln>
+        </p:spPr>
+        <p:style>
+          <a:lnRef idx="2">
+            <a:schemeClr val="accent1">
+              <a:shade val="15000"/>
+            </a:schemeClr>
+          </a:lnRef>
+          <a:fillRef idx="1">
+            <a:schemeClr val="accent1"/>
+          </a:fillRef>
+          <a:effectRef idx="0">
+            <a:schemeClr val="accent1"/>
+          </a:effectRef>
+          <a:fontRef idx="minor">
+            <a:schemeClr val="lt1"/>
+          </a:fontRef>
+        </p:style>
+        <p:txBody>
+          <a:bodyPr rtlCol="0" anchor="ctr"/>
+          <a:lstStyle/>
+          <a:p>
+            <a:pPr algn="ctr"/>
+            <a:endParaRPr lang="de-DE" sz="800" dirty="0"/>
+          </a:p>
+        </p:txBody>
+      </p:sp>
+      <p:sp>
+        <p:nvSpPr>
+          <p:cNvPr id="145" name="Textfeld 144">
+            <a:extLst>
+              <a:ext uri="{FF2B5EF4-FFF2-40B4-BE49-F238E27FC236}">
+                <a16:creationId xmlns:a16="http://schemas.microsoft.com/office/drawing/2014/main" id="{E5D7AFCC-EB1F-EEB4-C5F3-A1F41F0F98E3}"/>
+              </a:ext>
+            </a:extLst>
+          </p:cNvPr>
+          <p:cNvSpPr txBox="1"/>
+          <p:nvPr/>
+        </p:nvSpPr>
+        <p:spPr>
+          <a:xfrm>
+            <a:off x="2059427" y="1955777"/>
+            <a:ext cx="771646" cy="369332"/>
+          </a:xfrm>
+          <a:prstGeom prst="rect">
+            <a:avLst/>
+          </a:prstGeom>
+          <a:noFill/>
+        </p:spPr>
+        <p:txBody>
+          <a:bodyPr wrap="square" rtlCol="0" anchor="ctr">
+            <a:spAutoFit/>
+          </a:bodyPr>
+          <a:lstStyle/>
+          <a:p>
+            <a:pPr algn="ctr"/>
+            <a:r>
+              <a:rPr lang="de-DE" sz="600" dirty="0">
+                <a:latin typeface="CMU Serif" panose="02000603000000000000" pitchFamily="2" charset="0"/>
+                <a:ea typeface="CMU Serif" panose="02000603000000000000" pitchFamily="2" charset="0"/>
+                <a:cs typeface="CMU Serif" panose="02000603000000000000" pitchFamily="2" charset="0"/>
+              </a:rPr>
+              <a:t>Nullauftriebs-Richtung des Flügels</a:t>
+            </a:r>
+            <a:endParaRPr lang="de-DE" sz="600" baseline="-25000" dirty="0">
+              <a:latin typeface="CMU Serif" panose="02000603000000000000" pitchFamily="2" charset="0"/>
+              <a:ea typeface="CMU Serif" panose="02000603000000000000" pitchFamily="2" charset="0"/>
+              <a:cs typeface="CMU Serif" panose="02000603000000000000" pitchFamily="2" charset="0"/>
+            </a:endParaRPr>
+          </a:p>
+        </p:txBody>
+      </p:sp>
+      <p:cxnSp>
+        <p:nvCxnSpPr>
+          <p:cNvPr id="148" name="Gerader Verbinder 147">
+            <a:extLst>
+              <a:ext uri="{FF2B5EF4-FFF2-40B4-BE49-F238E27FC236}">
+                <a16:creationId xmlns:a16="http://schemas.microsoft.com/office/drawing/2014/main" id="{710A2D93-ED39-7364-E9E6-2973F3B7668D}"/>
+              </a:ext>
+            </a:extLst>
+          </p:cNvPr>
+          <p:cNvCxnSpPr>
+            <a:cxnSpLocks/>
+          </p:cNvCxnSpPr>
+          <p:nvPr/>
+        </p:nvCxnSpPr>
+        <p:spPr>
+          <a:xfrm flipH="1">
+            <a:off x="2622538" y="1641568"/>
+            <a:ext cx="100576" cy="339606"/>
+          </a:xfrm>
+          <a:prstGeom prst="line">
+            <a:avLst/>
+          </a:prstGeom>
+          <a:ln w="6350" cap="rnd">
+            <a:solidFill>
+              <a:schemeClr val="tx1"/>
+            </a:solidFill>
+            <a:round/>
+          </a:ln>
+        </p:spPr>
+        <p:style>
+          <a:lnRef idx="2">
+            <a:schemeClr val="accent1"/>
+          </a:lnRef>
+          <a:fillRef idx="0">
+            <a:schemeClr val="accent1"/>
+          </a:fillRef>
+          <a:effectRef idx="1">
+            <a:schemeClr val="accent1"/>
+          </a:effectRef>
+          <a:fontRef idx="minor">
+            <a:schemeClr val="tx1"/>
+          </a:fontRef>
+        </p:style>
+      </p:cxnSp>
+      <p:cxnSp>
+        <p:nvCxnSpPr>
+          <p:cNvPr id="153" name="Gerader Verbinder 152">
+            <a:extLst>
+              <a:ext uri="{FF2B5EF4-FFF2-40B4-BE49-F238E27FC236}">
+                <a16:creationId xmlns:a16="http://schemas.microsoft.com/office/drawing/2014/main" id="{69953BBA-FCB5-46F4-B5F1-4CB7E8CE2312}"/>
+              </a:ext>
+            </a:extLst>
+          </p:cNvPr>
+          <p:cNvCxnSpPr>
+            <a:cxnSpLocks/>
+          </p:cNvCxnSpPr>
+          <p:nvPr/>
+        </p:nvCxnSpPr>
+        <p:spPr>
+          <a:xfrm>
+            <a:off x="2829315" y="1692690"/>
+            <a:ext cx="0" cy="658367"/>
+          </a:xfrm>
+          <a:prstGeom prst="line">
+            <a:avLst/>
+          </a:prstGeom>
+          <a:ln w="6350" cap="rnd">
+            <a:solidFill>
+              <a:schemeClr val="tx1"/>
+            </a:solidFill>
+            <a:round/>
+          </a:ln>
+        </p:spPr>
+        <p:style>
+          <a:lnRef idx="2">
+            <a:schemeClr val="accent1"/>
+          </a:lnRef>
+          <a:fillRef idx="0">
+            <a:schemeClr val="accent1"/>
+          </a:fillRef>
+          <a:effectRef idx="1">
+            <a:schemeClr val="accent1"/>
+          </a:effectRef>
+          <a:fontRef idx="minor">
+            <a:schemeClr val="tx1"/>
+          </a:fontRef>
+        </p:style>
+      </p:cxnSp>
+      <p:cxnSp>
+        <p:nvCxnSpPr>
+          <p:cNvPr id="155" name="Gerader Verbinder 154">
+            <a:extLst>
+              <a:ext uri="{FF2B5EF4-FFF2-40B4-BE49-F238E27FC236}">
+                <a16:creationId xmlns:a16="http://schemas.microsoft.com/office/drawing/2014/main" id="{67FCF6A5-923B-F28E-0260-D1B296CEE23C}"/>
+              </a:ext>
+            </a:extLst>
+          </p:cNvPr>
+          <p:cNvCxnSpPr>
+            <a:cxnSpLocks/>
+          </p:cNvCxnSpPr>
+          <p:nvPr/>
+        </p:nvCxnSpPr>
+        <p:spPr>
+          <a:xfrm flipH="1">
+            <a:off x="2973325" y="2298576"/>
+            <a:ext cx="274274" cy="0"/>
+          </a:xfrm>
+          <a:prstGeom prst="line">
+            <a:avLst/>
+          </a:prstGeom>
+          <a:ln w="6350" cap="rnd">
+            <a:solidFill>
+              <a:schemeClr val="tx1"/>
+            </a:solidFill>
+            <a:round/>
+            <a:headEnd type="none" w="sm" len="sm"/>
+            <a:tailEnd type="triangle" w="sm" len="sm"/>
+          </a:ln>
+        </p:spPr>
+        <p:style>
+          <a:lnRef idx="2">
+            <a:schemeClr val="accent1"/>
+          </a:lnRef>
+          <a:fillRef idx="0">
+            <a:schemeClr val="accent1"/>
+          </a:fillRef>
+          <a:effectRef idx="1">
+            <a:schemeClr val="accent1"/>
+          </a:effectRef>
+          <a:fontRef idx="minor">
+            <a:schemeClr val="tx1"/>
+          </a:fontRef>
+        </p:style>
+      </p:cxnSp>
+      <p:cxnSp>
+        <p:nvCxnSpPr>
+          <p:cNvPr id="158" name="Gerader Verbinder 157">
+            <a:extLst>
+              <a:ext uri="{FF2B5EF4-FFF2-40B4-BE49-F238E27FC236}">
+                <a16:creationId xmlns:a16="http://schemas.microsoft.com/office/drawing/2014/main" id="{14B59B77-2D7E-BB41-6961-5CC7A9D15F4B}"/>
+              </a:ext>
+            </a:extLst>
+          </p:cNvPr>
+          <p:cNvCxnSpPr>
+            <a:cxnSpLocks/>
+          </p:cNvCxnSpPr>
+          <p:nvPr/>
+        </p:nvCxnSpPr>
+        <p:spPr>
+          <a:xfrm>
+            <a:off x="2725721" y="2298576"/>
+            <a:ext cx="103594" cy="0"/>
+          </a:xfrm>
+          <a:prstGeom prst="line">
+            <a:avLst/>
+          </a:prstGeom>
+          <a:ln w="6350" cap="rnd">
+            <a:solidFill>
+              <a:schemeClr val="tx1"/>
+            </a:solidFill>
+            <a:round/>
+            <a:headEnd type="none" w="sm" len="sm"/>
+            <a:tailEnd type="triangle" w="sm" len="sm"/>
+          </a:ln>
+        </p:spPr>
+        <p:style>
+          <a:lnRef idx="2">
+            <a:schemeClr val="accent1"/>
+          </a:lnRef>
+          <a:fillRef idx="0">
+            <a:schemeClr val="accent1"/>
+          </a:fillRef>
+          <a:effectRef idx="1">
+            <a:schemeClr val="accent1"/>
+          </a:effectRef>
+          <a:fontRef idx="minor">
+            <a:schemeClr val="tx1"/>
+          </a:fontRef>
+        </p:style>
+      </p:cxnSp>
+      <p:cxnSp>
+        <p:nvCxnSpPr>
+          <p:cNvPr id="160" name="Gerader Verbinder 159">
+            <a:extLst>
+              <a:ext uri="{FF2B5EF4-FFF2-40B4-BE49-F238E27FC236}">
+                <a16:creationId xmlns:a16="http://schemas.microsoft.com/office/drawing/2014/main" id="{E8CBAB2C-F766-8D2B-DF44-CFA7A073126A}"/>
+              </a:ext>
+            </a:extLst>
+          </p:cNvPr>
+          <p:cNvCxnSpPr>
+            <a:cxnSpLocks/>
+          </p:cNvCxnSpPr>
+          <p:nvPr/>
+        </p:nvCxnSpPr>
+        <p:spPr>
+          <a:xfrm flipH="1">
+            <a:off x="2804160" y="2299722"/>
+            <a:ext cx="205740" cy="0"/>
+          </a:xfrm>
+          <a:prstGeom prst="line">
+            <a:avLst/>
+          </a:prstGeom>
+          <a:ln w="6350" cap="rnd">
+            <a:solidFill>
+              <a:schemeClr val="tx1"/>
+            </a:solidFill>
+            <a:round/>
+            <a:headEnd type="none" w="sm" len="sm"/>
+            <a:tailEnd type="none" w="sm" len="sm"/>
+          </a:ln>
+        </p:spPr>
+        <p:style>
+          <a:lnRef idx="2">
+            <a:schemeClr val="accent1"/>
+          </a:lnRef>
+          <a:fillRef idx="0">
+            <a:schemeClr val="accent1"/>
+          </a:fillRef>
+          <a:effectRef idx="1">
+            <a:schemeClr val="accent1"/>
+          </a:effectRef>
+          <a:fontRef idx="minor">
+            <a:schemeClr val="tx1"/>
+          </a:fontRef>
+        </p:style>
+      </p:cxnSp>
+      <p:sp>
+        <p:nvSpPr>
+          <p:cNvPr id="164" name="Textfeld 163">
+            <a:extLst>
+              <a:ext uri="{FF2B5EF4-FFF2-40B4-BE49-F238E27FC236}">
+                <a16:creationId xmlns:a16="http://schemas.microsoft.com/office/drawing/2014/main" id="{3D3947FF-4367-4B6D-F0A1-21B783CDAC4B}"/>
+              </a:ext>
+            </a:extLst>
+          </p:cNvPr>
+          <p:cNvSpPr txBox="1"/>
+          <p:nvPr/>
+        </p:nvSpPr>
+        <p:spPr>
+          <a:xfrm>
+            <a:off x="2925523" y="2107356"/>
+            <a:ext cx="435125" cy="215444"/>
+          </a:xfrm>
+          <a:prstGeom prst="rect">
+            <a:avLst/>
+          </a:prstGeom>
+          <a:noFill/>
+        </p:spPr>
+        <p:txBody>
+          <a:bodyPr wrap="square" rtlCol="0" anchor="ctr">
+            <a:spAutoFit/>
+          </a:bodyPr>
+          <a:lstStyle/>
+          <a:p>
+            <a:pPr algn="ctr"/>
+            <a:r>
+              <a:rPr lang="de-DE" sz="800" i="1" dirty="0">
+                <a:latin typeface="CMU Serif" panose="02000603000000000000" pitchFamily="2" charset="0"/>
+                <a:ea typeface="CMU Serif" panose="02000603000000000000" pitchFamily="2" charset="0"/>
+                <a:cs typeface="CMU Serif" panose="02000603000000000000" pitchFamily="2" charset="0"/>
+              </a:rPr>
+              <a:t>x</a:t>
+            </a:r>
+            <a:r>
+              <a:rPr lang="de-DE" sz="200" i="1" dirty="0">
+                <a:latin typeface="CMU Serif" panose="02000603000000000000" pitchFamily="2" charset="0"/>
+                <a:ea typeface="CMU Serif" panose="02000603000000000000" pitchFamily="2" charset="0"/>
+                <a:cs typeface="CMU Serif" panose="02000603000000000000" pitchFamily="2" charset="0"/>
+              </a:rPr>
+              <a:t> </a:t>
+            </a:r>
+            <a:r>
+              <a:rPr lang="de-DE" sz="800" baseline="-25000" dirty="0">
+                <a:latin typeface="CMU Serif" panose="02000603000000000000" pitchFamily="2" charset="0"/>
+                <a:ea typeface="CMU Serif" panose="02000603000000000000" pitchFamily="2" charset="0"/>
+                <a:cs typeface="CMU Serif" panose="02000603000000000000" pitchFamily="2" charset="0"/>
+              </a:rPr>
+              <a:t>NH</a:t>
+            </a:r>
+          </a:p>
+        </p:txBody>
+      </p:sp>
+    </p:spTree>
+    <p:extLst>
+      <p:ext uri="{BB962C8B-B14F-4D97-AF65-F5344CB8AC3E}">
+        <p14:creationId xmlns:p14="http://schemas.microsoft.com/office/powerpoint/2010/main" val="3299783584"/>
+      </p:ext>
+    </p:extLst>
+  </p:cSld>
+  <p:clrMapOvr>
+    <a:masterClrMapping/>
+  </p:clrMapOvr>
+</p:sld>
+</file>
+
+<file path=ppt/slides/slide11.xml><?xml version="1.0" encoding="utf-8"?>
 <p:sld xmlns:a="http://schemas.openxmlformats.org/drawingml/2006/main" xmlns:r="http://schemas.openxmlformats.org/officeDocument/2006/relationships" xmlns:p="http://schemas.openxmlformats.org/presentationml/2006/main">
   <p:cSld>
     <p:spTree>
@@ -13146,6 +17166,1194 @@
           <a:chExt cx="0" cy="0"/>
         </a:xfrm>
       </p:grpSpPr>
+      <p:cxnSp>
+        <p:nvCxnSpPr>
+          <p:cNvPr id="2" name="Gerade Verbindung mit Pfeil 1">
+            <a:extLst>
+              <a:ext uri="{FF2B5EF4-FFF2-40B4-BE49-F238E27FC236}">
+                <a16:creationId xmlns:a16="http://schemas.microsoft.com/office/drawing/2014/main" id="{B5E9B793-9D44-42F1-3BB0-04C8A86054A8}"/>
+              </a:ext>
+            </a:extLst>
+          </p:cNvPr>
+          <p:cNvCxnSpPr>
+            <a:cxnSpLocks/>
+          </p:cNvCxnSpPr>
+          <p:nvPr/>
+        </p:nvCxnSpPr>
+        <p:spPr>
+          <a:xfrm flipV="1">
+            <a:off x="1720215" y="1668871"/>
+            <a:ext cx="0" cy="1203563"/>
+          </a:xfrm>
+          <a:prstGeom prst="straightConnector1">
+            <a:avLst/>
+          </a:prstGeom>
+          <a:ln cap="rnd">
+            <a:round/>
+            <a:tailEnd type="none"/>
+          </a:ln>
+        </p:spPr>
+        <p:style>
+          <a:lnRef idx="2">
+            <a:schemeClr val="dk1"/>
+          </a:lnRef>
+          <a:fillRef idx="0">
+            <a:schemeClr val="dk1"/>
+          </a:fillRef>
+          <a:effectRef idx="1">
+            <a:schemeClr val="dk1"/>
+          </a:effectRef>
+          <a:fontRef idx="minor">
+            <a:schemeClr val="tx1"/>
+          </a:fontRef>
+        </p:style>
+      </p:cxnSp>
+      <p:cxnSp>
+        <p:nvCxnSpPr>
+          <p:cNvPr id="4" name="Gerade Verbindung mit Pfeil 3">
+            <a:extLst>
+              <a:ext uri="{FF2B5EF4-FFF2-40B4-BE49-F238E27FC236}">
+                <a16:creationId xmlns:a16="http://schemas.microsoft.com/office/drawing/2014/main" id="{6BBD1F47-E349-C415-FDEC-02F8804B0B18}"/>
+              </a:ext>
+            </a:extLst>
+          </p:cNvPr>
+          <p:cNvCxnSpPr>
+            <a:cxnSpLocks/>
+          </p:cNvCxnSpPr>
+          <p:nvPr/>
+        </p:nvCxnSpPr>
+        <p:spPr>
+          <a:xfrm>
+            <a:off x="1373148" y="1432670"/>
+            <a:ext cx="1333340" cy="1393330"/>
+          </a:xfrm>
+          <a:prstGeom prst="straightConnector1">
+            <a:avLst/>
+          </a:prstGeom>
+          <a:ln cap="rnd">
+            <a:round/>
+            <a:tailEnd type="triangle"/>
+          </a:ln>
+        </p:spPr>
+        <p:style>
+          <a:lnRef idx="2">
+            <a:schemeClr val="dk1"/>
+          </a:lnRef>
+          <a:fillRef idx="0">
+            <a:schemeClr val="dk1"/>
+          </a:fillRef>
+          <a:effectRef idx="1">
+            <a:schemeClr val="dk1"/>
+          </a:effectRef>
+          <a:fontRef idx="minor">
+            <a:schemeClr val="tx1"/>
+          </a:fontRef>
+        </p:style>
+      </p:cxnSp>
+      <p:cxnSp>
+        <p:nvCxnSpPr>
+          <p:cNvPr id="7" name="Gerade Verbindung mit Pfeil 6">
+            <a:extLst>
+              <a:ext uri="{FF2B5EF4-FFF2-40B4-BE49-F238E27FC236}">
+                <a16:creationId xmlns:a16="http://schemas.microsoft.com/office/drawing/2014/main" id="{029F0472-E9FC-184B-DB52-CBC5EF379070}"/>
+              </a:ext>
+            </a:extLst>
+          </p:cNvPr>
+          <p:cNvCxnSpPr>
+            <a:cxnSpLocks/>
+          </p:cNvCxnSpPr>
+          <p:nvPr/>
+        </p:nvCxnSpPr>
+        <p:spPr>
+          <a:xfrm flipV="1">
+            <a:off x="496996" y="1264495"/>
+            <a:ext cx="2446437" cy="1051322"/>
+          </a:xfrm>
+          <a:prstGeom prst="straightConnector1">
+            <a:avLst/>
+          </a:prstGeom>
+          <a:ln cap="rnd">
+            <a:round/>
+            <a:tailEnd type="triangle"/>
+          </a:ln>
+        </p:spPr>
+        <p:style>
+          <a:lnRef idx="2">
+            <a:schemeClr val="dk1"/>
+          </a:lnRef>
+          <a:fillRef idx="0">
+            <a:schemeClr val="dk1"/>
+          </a:fillRef>
+          <a:effectRef idx="1">
+            <a:schemeClr val="dk1"/>
+          </a:effectRef>
+          <a:fontRef idx="minor">
+            <a:schemeClr val="tx1"/>
+          </a:fontRef>
+        </p:style>
+      </p:cxnSp>
+      <p:sp>
+        <p:nvSpPr>
+          <p:cNvPr id="15" name="Freihandform: Form 14">
+            <a:extLst>
+              <a:ext uri="{FF2B5EF4-FFF2-40B4-BE49-F238E27FC236}">
+                <a16:creationId xmlns:a16="http://schemas.microsoft.com/office/drawing/2014/main" id="{66CD9F39-45DA-AACE-FF5F-C6BC25C1D883}"/>
+              </a:ext>
+            </a:extLst>
+          </p:cNvPr>
+          <p:cNvSpPr/>
+          <p:nvPr/>
+        </p:nvSpPr>
+        <p:spPr>
+          <a:xfrm>
+            <a:off x="788526" y="1359018"/>
+            <a:ext cx="1863733" cy="882413"/>
+          </a:xfrm>
+          <a:custGeom>
+            <a:avLst/>
+            <a:gdLst>
+              <a:gd name="csX0" fmla="*/ 15385 w 1863733"/>
+              <a:gd name="csY0" fmla="*/ 830552 h 882413"/>
+              <a:gd name="csX1" fmla="*/ 807865 w 1863733"/>
+              <a:gd name="csY1" fmla="*/ 294612 h 882413"/>
+              <a:gd name="csX2" fmla="*/ 1856885 w 1863733"/>
+              <a:gd name="csY2" fmla="*/ 32992 h 882413"/>
+              <a:gd name="csX3" fmla="*/ 1143145 w 1863733"/>
+              <a:gd name="csY3" fmla="*/ 667992 h 882413"/>
+              <a:gd name="csX4" fmla="*/ 15385 w 1863733"/>
+              <a:gd name="csY4" fmla="*/ 830552 h 882413"/>
+            </a:gdLst>
+            <a:ahLst/>
+            <a:cxnLst>
+              <a:cxn ang="0">
+                <a:pos x="csX0" y="csY0"/>
+              </a:cxn>
+              <a:cxn ang="0">
+                <a:pos x="csX1" y="csY1"/>
+              </a:cxn>
+              <a:cxn ang="0">
+                <a:pos x="csX2" y="csY2"/>
+              </a:cxn>
+              <a:cxn ang="0">
+                <a:pos x="csX3" y="csY3"/>
+              </a:cxn>
+              <a:cxn ang="0">
+                <a:pos x="csX4" y="csY4"/>
+              </a:cxn>
+            </a:cxnLst>
+            <a:rect l="l" t="t" r="r" b="b"/>
+            <a:pathLst>
+              <a:path w="1863733" h="882413">
+                <a:moveTo>
+                  <a:pt x="15385" y="830552"/>
+                </a:moveTo>
+                <a:cubicBezTo>
+                  <a:pt x="-103995" y="709902"/>
+                  <a:pt x="500948" y="427539"/>
+                  <a:pt x="807865" y="294612"/>
+                </a:cubicBezTo>
+                <a:cubicBezTo>
+                  <a:pt x="1114782" y="161685"/>
+                  <a:pt x="1793385" y="-90198"/>
+                  <a:pt x="1856885" y="32992"/>
+                </a:cubicBezTo>
+                <a:cubicBezTo>
+                  <a:pt x="1920385" y="156182"/>
+                  <a:pt x="1531342" y="489345"/>
+                  <a:pt x="1143145" y="667992"/>
+                </a:cubicBezTo>
+                <a:cubicBezTo>
+                  <a:pt x="754948" y="846639"/>
+                  <a:pt x="134765" y="951202"/>
+                  <a:pt x="15385" y="830552"/>
+                </a:cubicBezTo>
+                <a:close/>
+              </a:path>
+            </a:pathLst>
+          </a:custGeom>
+          <a:noFill/>
+          <a:ln>
+            <a:solidFill>
+              <a:schemeClr val="accent2">
+                <a:lumMod val="75000"/>
+              </a:schemeClr>
+            </a:solidFill>
+          </a:ln>
+        </p:spPr>
+        <p:style>
+          <a:lnRef idx="2">
+            <a:schemeClr val="accent1">
+              <a:shade val="15000"/>
+            </a:schemeClr>
+          </a:lnRef>
+          <a:fillRef idx="1">
+            <a:schemeClr val="accent1"/>
+          </a:fillRef>
+          <a:effectRef idx="0">
+            <a:schemeClr val="accent1"/>
+          </a:effectRef>
+          <a:fontRef idx="minor">
+            <a:schemeClr val="lt1"/>
+          </a:fontRef>
+        </p:style>
+        <p:txBody>
+          <a:bodyPr rtlCol="0" anchor="ctr"/>
+          <a:lstStyle/>
+          <a:p>
+            <a:pPr algn="ctr"/>
+            <a:endParaRPr lang="de-DE"/>
+          </a:p>
+        </p:txBody>
+      </p:sp>
+      <p:cxnSp>
+        <p:nvCxnSpPr>
+          <p:cNvPr id="16" name="Gerade Verbindung mit Pfeil 15">
+            <a:extLst>
+              <a:ext uri="{FF2B5EF4-FFF2-40B4-BE49-F238E27FC236}">
+                <a16:creationId xmlns:a16="http://schemas.microsoft.com/office/drawing/2014/main" id="{699D9FFA-E261-9A9C-8089-E582C1E369BD}"/>
+              </a:ext>
+            </a:extLst>
+          </p:cNvPr>
+          <p:cNvCxnSpPr>
+            <a:cxnSpLocks/>
+          </p:cNvCxnSpPr>
+          <p:nvPr/>
+        </p:nvCxnSpPr>
+        <p:spPr>
+          <a:xfrm flipV="1">
+            <a:off x="1720214" y="680811"/>
+            <a:ext cx="0" cy="1145540"/>
+          </a:xfrm>
+          <a:prstGeom prst="straightConnector1">
+            <a:avLst/>
+          </a:prstGeom>
+          <a:ln cap="rnd">
+            <a:round/>
+            <a:tailEnd type="triangle"/>
+          </a:ln>
+        </p:spPr>
+        <p:style>
+          <a:lnRef idx="2">
+            <a:schemeClr val="dk1"/>
+          </a:lnRef>
+          <a:fillRef idx="0">
+            <a:schemeClr val="dk1"/>
+          </a:fillRef>
+          <a:effectRef idx="1">
+            <a:schemeClr val="dk1"/>
+          </a:effectRef>
+          <a:fontRef idx="minor">
+            <a:schemeClr val="tx1"/>
+          </a:fontRef>
+        </p:style>
+      </p:cxnSp>
+      <p:sp>
+        <p:nvSpPr>
+          <p:cNvPr id="21" name="Freihandform: Form 20">
+            <a:extLst>
+              <a:ext uri="{FF2B5EF4-FFF2-40B4-BE49-F238E27FC236}">
+                <a16:creationId xmlns:a16="http://schemas.microsoft.com/office/drawing/2014/main" id="{7ACE082F-DD59-9671-7921-F8FFB7EFDD19}"/>
+              </a:ext>
+            </a:extLst>
+          </p:cNvPr>
+          <p:cNvSpPr/>
+          <p:nvPr/>
+        </p:nvSpPr>
+        <p:spPr>
+          <a:xfrm>
+            <a:off x="1225078" y="1816790"/>
+            <a:ext cx="334853" cy="333796"/>
+          </a:xfrm>
+          <a:custGeom>
+            <a:avLst/>
+            <a:gdLst>
+              <a:gd name="csX0" fmla="*/ 5693 w 276203"/>
+              <a:gd name="csY0" fmla="*/ 10296 h 362721"/>
+              <a:gd name="csX1" fmla="*/ 22077 w 276203"/>
+              <a:gd name="csY1" fmla="*/ 69429 h 362721"/>
+              <a:gd name="csX2" fmla="*/ 129518 w 276203"/>
+              <a:gd name="csY2" fmla="*/ 166506 h 362721"/>
+              <a:gd name="csX3" fmla="*/ 276203 w 276203"/>
+              <a:gd name="csY3" fmla="*/ 362721 h 362721"/>
+              <a:gd name="csX4" fmla="*/ 108563 w 276203"/>
+              <a:gd name="csY4" fmla="*/ 42681 h 362721"/>
+              <a:gd name="csX5" fmla="*/ 5693 w 276203"/>
+              <a:gd name="csY5" fmla="*/ 10296 h 362721"/>
+            </a:gdLst>
+            <a:ahLst/>
+            <a:cxnLst>
+              <a:cxn ang="0">
+                <a:pos x="csX0" y="csY0"/>
+              </a:cxn>
+              <a:cxn ang="0">
+                <a:pos x="csX1" y="csY1"/>
+              </a:cxn>
+              <a:cxn ang="0">
+                <a:pos x="csX2" y="csY2"/>
+              </a:cxn>
+              <a:cxn ang="0">
+                <a:pos x="csX3" y="csY3"/>
+              </a:cxn>
+              <a:cxn ang="0">
+                <a:pos x="csX4" y="csY4"/>
+              </a:cxn>
+              <a:cxn ang="0">
+                <a:pos x="csX5" y="csY5"/>
+              </a:cxn>
+            </a:cxnLst>
+            <a:rect l="l" t="t" r="r" b="b"/>
+            <a:pathLst>
+              <a:path w="276203" h="362721">
+                <a:moveTo>
+                  <a:pt x="5693" y="10296"/>
+                </a:moveTo>
+                <a:cubicBezTo>
+                  <a:pt x="-6588" y="27550"/>
+                  <a:pt x="1973" y="43927"/>
+                  <a:pt x="22077" y="69429"/>
+                </a:cubicBezTo>
+                <a:cubicBezTo>
+                  <a:pt x="42181" y="94931"/>
+                  <a:pt x="93030" y="128288"/>
+                  <a:pt x="129518" y="166506"/>
+                </a:cubicBezTo>
+                <a:cubicBezTo>
+                  <a:pt x="166006" y="204724"/>
+                  <a:pt x="227878" y="282142"/>
+                  <a:pt x="276203" y="362721"/>
+                </a:cubicBezTo>
+                <a:cubicBezTo>
+                  <a:pt x="224569" y="212923"/>
+                  <a:pt x="157381" y="91821"/>
+                  <a:pt x="108563" y="42681"/>
+                </a:cubicBezTo>
+                <a:cubicBezTo>
+                  <a:pt x="59745" y="-6459"/>
+                  <a:pt x="17974" y="-6958"/>
+                  <a:pt x="5693" y="10296"/>
+                </a:cubicBezTo>
+                <a:close/>
+              </a:path>
+            </a:pathLst>
+          </a:custGeom>
+          <a:solidFill>
+            <a:schemeClr val="bg1">
+              <a:alpha val="50000"/>
+            </a:schemeClr>
+          </a:solidFill>
+          <a:ln w="9525" cap="rnd">
+            <a:round/>
+          </a:ln>
+        </p:spPr>
+        <p:style>
+          <a:lnRef idx="2">
+            <a:schemeClr val="accent1">
+              <a:shade val="15000"/>
+            </a:schemeClr>
+          </a:lnRef>
+          <a:fillRef idx="1">
+            <a:schemeClr val="accent1"/>
+          </a:fillRef>
+          <a:effectRef idx="0">
+            <a:schemeClr val="accent1"/>
+          </a:effectRef>
+          <a:fontRef idx="minor">
+            <a:schemeClr val="lt1"/>
+          </a:fontRef>
+        </p:style>
+        <p:txBody>
+          <a:bodyPr rtlCol="0" anchor="ctr"/>
+          <a:lstStyle/>
+          <a:p>
+            <a:pPr algn="ctr"/>
+            <a:endParaRPr lang="de-DE"/>
+          </a:p>
+        </p:txBody>
+      </p:sp>
+      <p:cxnSp>
+        <p:nvCxnSpPr>
+          <p:cNvPr id="22" name="Gerade Verbindung mit Pfeil 21">
+            <a:extLst>
+              <a:ext uri="{FF2B5EF4-FFF2-40B4-BE49-F238E27FC236}">
+                <a16:creationId xmlns:a16="http://schemas.microsoft.com/office/drawing/2014/main" id="{DB0815EA-56B5-9289-4945-0E2894AEBC94}"/>
+              </a:ext>
+            </a:extLst>
+          </p:cNvPr>
+          <p:cNvCxnSpPr>
+            <a:cxnSpLocks/>
+          </p:cNvCxnSpPr>
+          <p:nvPr/>
+        </p:nvCxnSpPr>
+        <p:spPr>
+          <a:xfrm flipV="1">
+            <a:off x="1323417" y="1936841"/>
+            <a:ext cx="57351" cy="24646"/>
+          </a:xfrm>
+          <a:prstGeom prst="straightConnector1">
+            <a:avLst/>
+          </a:prstGeom>
+          <a:ln cap="rnd">
+            <a:round/>
+            <a:tailEnd type="none"/>
+          </a:ln>
+        </p:spPr>
+        <p:style>
+          <a:lnRef idx="2">
+            <a:schemeClr val="dk1"/>
+          </a:lnRef>
+          <a:fillRef idx="0">
+            <a:schemeClr val="dk1"/>
+          </a:fillRef>
+          <a:effectRef idx="1">
+            <a:schemeClr val="dk1"/>
+          </a:effectRef>
+          <a:fontRef idx="minor">
+            <a:schemeClr val="tx1"/>
+          </a:fontRef>
+        </p:style>
+      </p:cxnSp>
+      <p:sp>
+        <p:nvSpPr>
+          <p:cNvPr id="24" name="Freihandform: Form 23">
+            <a:extLst>
+              <a:ext uri="{FF2B5EF4-FFF2-40B4-BE49-F238E27FC236}">
+                <a16:creationId xmlns:a16="http://schemas.microsoft.com/office/drawing/2014/main" id="{3903B541-CF64-D25E-10FD-F432464AF2BC}"/>
+              </a:ext>
+            </a:extLst>
+          </p:cNvPr>
+          <p:cNvSpPr/>
+          <p:nvPr/>
+        </p:nvSpPr>
+        <p:spPr>
+          <a:xfrm>
+            <a:off x="1875905" y="1494882"/>
+            <a:ext cx="407307" cy="392430"/>
+          </a:xfrm>
+          <a:custGeom>
+            <a:avLst/>
+            <a:gdLst>
+              <a:gd name="csX0" fmla="*/ 0 w 407660"/>
+              <a:gd name="csY0" fmla="*/ 47349 h 411388"/>
+              <a:gd name="csX1" fmla="*/ 180951 w 407660"/>
+              <a:gd name="csY1" fmla="*/ 209918 h 411388"/>
+              <a:gd name="csX2" fmla="*/ 310508 w 407660"/>
+              <a:gd name="csY2" fmla="*/ 411388 h 411388"/>
+              <a:gd name="csX3" fmla="*/ 407660 w 407660"/>
+              <a:gd name="csY3" fmla="*/ 344437 h 411388"/>
+              <a:gd name="csX4" fmla="*/ 285717 w 407660"/>
+              <a:gd name="csY4" fmla="*/ 145148 h 411388"/>
+              <a:gd name="csX5" fmla="*/ 127633 w 407660"/>
+              <a:gd name="csY5" fmla="*/ 0 h 411388"/>
+              <a:gd name="csX6" fmla="*/ 0 w 407660"/>
+              <a:gd name="csY6" fmla="*/ 47349 h 411388"/>
+            </a:gdLst>
+            <a:ahLst/>
+            <a:cxnLst>
+              <a:cxn ang="0">
+                <a:pos x="csX0" y="csY0"/>
+              </a:cxn>
+              <a:cxn ang="0">
+                <a:pos x="csX1" y="csY1"/>
+              </a:cxn>
+              <a:cxn ang="0">
+                <a:pos x="csX2" y="csY2"/>
+              </a:cxn>
+              <a:cxn ang="0">
+                <a:pos x="csX3" y="csY3"/>
+              </a:cxn>
+              <a:cxn ang="0">
+                <a:pos x="csX4" y="csY4"/>
+              </a:cxn>
+              <a:cxn ang="0">
+                <a:pos x="csX5" y="csY5"/>
+              </a:cxn>
+              <a:cxn ang="0">
+                <a:pos x="csX6" y="csY6"/>
+              </a:cxn>
+            </a:cxnLst>
+            <a:rect l="l" t="t" r="r" b="b"/>
+            <a:pathLst>
+              <a:path w="407660" h="411388">
+                <a:moveTo>
+                  <a:pt x="0" y="47349"/>
+                </a:moveTo>
+                <a:cubicBezTo>
+                  <a:pt x="77311" y="91640"/>
+                  <a:pt x="129200" y="149245"/>
+                  <a:pt x="180951" y="209918"/>
+                </a:cubicBezTo>
+                <a:cubicBezTo>
+                  <a:pt x="232702" y="270591"/>
+                  <a:pt x="286061" y="351063"/>
+                  <a:pt x="310508" y="411388"/>
+                </a:cubicBezTo>
+                <a:lnTo>
+                  <a:pt x="407660" y="344437"/>
+                </a:lnTo>
+                <a:cubicBezTo>
+                  <a:pt x="375910" y="272682"/>
+                  <a:pt x="333977" y="203886"/>
+                  <a:pt x="285717" y="145148"/>
+                </a:cubicBezTo>
+                <a:cubicBezTo>
+                  <a:pt x="237457" y="86410"/>
+                  <a:pt x="200658" y="39211"/>
+                  <a:pt x="127633" y="0"/>
+                </a:cubicBezTo>
+                <a:lnTo>
+                  <a:pt x="0" y="47349"/>
+                </a:lnTo>
+                <a:close/>
+              </a:path>
+            </a:pathLst>
+          </a:custGeom>
+          <a:solidFill>
+            <a:schemeClr val="accent2">
+              <a:lumMod val="75000"/>
+              <a:alpha val="50000"/>
+            </a:schemeClr>
+          </a:solidFill>
+          <a:ln w="12700" cap="rnd">
+            <a:solidFill>
+              <a:schemeClr val="accent2">
+                <a:lumMod val="75000"/>
+              </a:schemeClr>
+            </a:solidFill>
+            <a:round/>
+          </a:ln>
+        </p:spPr>
+        <p:style>
+          <a:lnRef idx="2">
+            <a:schemeClr val="accent1">
+              <a:shade val="15000"/>
+            </a:schemeClr>
+          </a:lnRef>
+          <a:fillRef idx="1">
+            <a:schemeClr val="accent1"/>
+          </a:fillRef>
+          <a:effectRef idx="0">
+            <a:schemeClr val="accent1"/>
+          </a:effectRef>
+          <a:fontRef idx="minor">
+            <a:schemeClr val="lt1"/>
+          </a:fontRef>
+        </p:style>
+        <p:txBody>
+          <a:bodyPr rtlCol="0" anchor="ctr"/>
+          <a:lstStyle/>
+          <a:p>
+            <a:pPr algn="ctr"/>
+            <a:endParaRPr lang="de-DE"/>
+          </a:p>
+        </p:txBody>
+      </p:sp>
+      <p:sp>
+        <p:nvSpPr>
+          <p:cNvPr id="25" name="Bogen 24">
+            <a:extLst>
+              <a:ext uri="{FF2B5EF4-FFF2-40B4-BE49-F238E27FC236}">
+                <a16:creationId xmlns:a16="http://schemas.microsoft.com/office/drawing/2014/main" id="{06729D36-4692-90DD-0FDC-3EA6A626E495}"/>
+              </a:ext>
+            </a:extLst>
+          </p:cNvPr>
+          <p:cNvSpPr/>
+          <p:nvPr/>
+        </p:nvSpPr>
+        <p:spPr>
+          <a:xfrm>
+            <a:off x="1544239" y="1140566"/>
+            <a:ext cx="351949" cy="172018"/>
+          </a:xfrm>
+          <a:prstGeom prst="arc">
+            <a:avLst>
+              <a:gd name="adj1" fmla="val 18208173"/>
+              <a:gd name="adj2" fmla="val 13754952"/>
+            </a:avLst>
+          </a:prstGeom>
+          <a:ln cap="rnd">
+            <a:solidFill>
+              <a:schemeClr val="accent6">
+                <a:lumMod val="75000"/>
+              </a:schemeClr>
+            </a:solidFill>
+            <a:headEnd type="triangle"/>
+          </a:ln>
+        </p:spPr>
+        <p:style>
+          <a:lnRef idx="2">
+            <a:schemeClr val="accent1"/>
+          </a:lnRef>
+          <a:fillRef idx="0">
+            <a:schemeClr val="accent1"/>
+          </a:fillRef>
+          <a:effectRef idx="1">
+            <a:schemeClr val="accent1"/>
+          </a:effectRef>
+          <a:fontRef idx="minor">
+            <a:schemeClr val="tx1"/>
+          </a:fontRef>
+        </p:style>
+        <p:txBody>
+          <a:bodyPr rtlCol="0" anchor="ctr"/>
+          <a:lstStyle/>
+          <a:p>
+            <a:pPr algn="ctr"/>
+            <a:endParaRPr lang="de-DE"/>
+          </a:p>
+        </p:txBody>
+      </p:sp>
+      <p:sp>
+        <p:nvSpPr>
+          <p:cNvPr id="27" name="Bogen 26">
+            <a:extLst>
+              <a:ext uri="{FF2B5EF4-FFF2-40B4-BE49-F238E27FC236}">
+                <a16:creationId xmlns:a16="http://schemas.microsoft.com/office/drawing/2014/main" id="{00F7E143-85A3-6EF0-F7B5-FE9E741B7A4E}"/>
+              </a:ext>
+            </a:extLst>
+          </p:cNvPr>
+          <p:cNvSpPr/>
+          <p:nvPr/>
+        </p:nvSpPr>
+        <p:spPr>
+          <a:xfrm rot="8237875">
+            <a:off x="2184691" y="2370960"/>
+            <a:ext cx="351949" cy="182028"/>
+          </a:xfrm>
+          <a:prstGeom prst="arc">
+            <a:avLst>
+              <a:gd name="adj1" fmla="val 18208173"/>
+              <a:gd name="adj2" fmla="val 13754952"/>
+            </a:avLst>
+          </a:prstGeom>
+          <a:ln cap="rnd">
+            <a:solidFill>
+              <a:schemeClr val="accent6">
+                <a:lumMod val="75000"/>
+              </a:schemeClr>
+            </a:solidFill>
+            <a:headEnd type="triangle"/>
+            <a:tailEnd type="none"/>
+          </a:ln>
+        </p:spPr>
+        <p:style>
+          <a:lnRef idx="2">
+            <a:schemeClr val="accent1"/>
+          </a:lnRef>
+          <a:fillRef idx="0">
+            <a:schemeClr val="accent1"/>
+          </a:fillRef>
+          <a:effectRef idx="1">
+            <a:schemeClr val="accent1"/>
+          </a:effectRef>
+          <a:fontRef idx="minor">
+            <a:schemeClr val="tx1"/>
+          </a:fontRef>
+        </p:style>
+        <p:txBody>
+          <a:bodyPr rtlCol="0" anchor="ctr"/>
+          <a:lstStyle/>
+          <a:p>
+            <a:pPr algn="ctr"/>
+            <a:endParaRPr lang="de-DE"/>
+          </a:p>
+        </p:txBody>
+      </p:sp>
+      <p:sp>
+        <p:nvSpPr>
+          <p:cNvPr id="28" name="Textfeld 27">
+            <a:extLst>
+              <a:ext uri="{FF2B5EF4-FFF2-40B4-BE49-F238E27FC236}">
+                <a16:creationId xmlns:a16="http://schemas.microsoft.com/office/drawing/2014/main" id="{2EAF12C2-741F-D215-B4CE-44455BD936C1}"/>
+              </a:ext>
+            </a:extLst>
+          </p:cNvPr>
+          <p:cNvSpPr txBox="1"/>
+          <p:nvPr/>
+        </p:nvSpPr>
+        <p:spPr>
+          <a:xfrm>
+            <a:off x="974860" y="894753"/>
+            <a:ext cx="841580" cy="307777"/>
+          </a:xfrm>
+          <a:prstGeom prst="rect">
+            <a:avLst/>
+          </a:prstGeom>
+          <a:noFill/>
+        </p:spPr>
+        <p:txBody>
+          <a:bodyPr wrap="square" rtlCol="0" anchor="ctr">
+            <a:spAutoFit/>
+          </a:bodyPr>
+          <a:lstStyle/>
+          <a:p>
+            <a:pPr algn="ctr"/>
+            <a:r>
+              <a:rPr lang="de-DE" sz="1400" i="1" dirty="0" err="1">
+                <a:solidFill>
+                  <a:schemeClr val="accent6">
+                    <a:lumMod val="75000"/>
+                  </a:schemeClr>
+                </a:solidFill>
+                <a:latin typeface="CMU Serif" panose="02000603000000000000" pitchFamily="2" charset="0"/>
+                <a:ea typeface="CMU Serif" panose="02000603000000000000" pitchFamily="2" charset="0"/>
+                <a:cs typeface="CMU Serif" panose="02000603000000000000" pitchFamily="2" charset="0"/>
+              </a:rPr>
+              <a:t>M</a:t>
+            </a:r>
+            <a:r>
+              <a:rPr lang="de-DE" sz="1400" i="1" baseline="-25000" dirty="0" err="1">
+                <a:solidFill>
+                  <a:schemeClr val="accent6">
+                    <a:lumMod val="75000"/>
+                  </a:schemeClr>
+                </a:solidFill>
+                <a:latin typeface="CMU Serif" panose="02000603000000000000" pitchFamily="2" charset="0"/>
+                <a:ea typeface="CMU Serif" panose="02000603000000000000" pitchFamily="2" charset="0"/>
+                <a:cs typeface="CMU Serif" panose="02000603000000000000" pitchFamily="2" charset="0"/>
+              </a:rPr>
+              <a:t>z</a:t>
+            </a:r>
+            <a:endParaRPr lang="de-DE" sz="1400" i="1" baseline="-25000" dirty="0">
+              <a:solidFill>
+                <a:schemeClr val="accent6">
+                  <a:lumMod val="75000"/>
+                </a:schemeClr>
+              </a:solidFill>
+              <a:latin typeface="CMU Serif" panose="02000603000000000000" pitchFamily="2" charset="0"/>
+              <a:ea typeface="CMU Serif" panose="02000603000000000000" pitchFamily="2" charset="0"/>
+              <a:cs typeface="CMU Serif" panose="02000603000000000000" pitchFamily="2" charset="0"/>
+            </a:endParaRPr>
+          </a:p>
+        </p:txBody>
+      </p:sp>
+      <p:sp>
+        <p:nvSpPr>
+          <p:cNvPr id="30" name="Textfeld 29">
+            <a:extLst>
+              <a:ext uri="{FF2B5EF4-FFF2-40B4-BE49-F238E27FC236}">
+                <a16:creationId xmlns:a16="http://schemas.microsoft.com/office/drawing/2014/main" id="{D7CD437B-BC0B-ACEA-0C29-525CFCF0357F}"/>
+              </a:ext>
+            </a:extLst>
+          </p:cNvPr>
+          <p:cNvSpPr txBox="1"/>
+          <p:nvPr/>
+        </p:nvSpPr>
+        <p:spPr>
+          <a:xfrm>
+            <a:off x="1694385" y="2564657"/>
+            <a:ext cx="841580" cy="307777"/>
+          </a:xfrm>
+          <a:prstGeom prst="rect">
+            <a:avLst/>
+          </a:prstGeom>
+          <a:noFill/>
+        </p:spPr>
+        <p:txBody>
+          <a:bodyPr wrap="square" rtlCol="0" anchor="ctr">
+            <a:spAutoFit/>
+          </a:bodyPr>
+          <a:lstStyle/>
+          <a:p>
+            <a:pPr algn="ctr"/>
+            <a:r>
+              <a:rPr lang="de-DE" sz="1400" i="1" dirty="0" err="1">
+                <a:solidFill>
+                  <a:schemeClr val="accent6">
+                    <a:lumMod val="75000"/>
+                  </a:schemeClr>
+                </a:solidFill>
+                <a:latin typeface="CMU Serif" panose="02000603000000000000" pitchFamily="2" charset="0"/>
+                <a:ea typeface="CMU Serif" panose="02000603000000000000" pitchFamily="2" charset="0"/>
+                <a:cs typeface="CMU Serif" panose="02000603000000000000" pitchFamily="2" charset="0"/>
+              </a:rPr>
+              <a:t>M</a:t>
+            </a:r>
+            <a:r>
+              <a:rPr lang="de-DE" sz="1400" i="1" baseline="-25000" dirty="0" err="1">
+                <a:solidFill>
+                  <a:schemeClr val="accent6">
+                    <a:lumMod val="75000"/>
+                  </a:schemeClr>
+                </a:solidFill>
+                <a:latin typeface="CMU Serif" panose="02000603000000000000" pitchFamily="2" charset="0"/>
+                <a:ea typeface="CMU Serif" panose="02000603000000000000" pitchFamily="2" charset="0"/>
+                <a:cs typeface="CMU Serif" panose="02000603000000000000" pitchFamily="2" charset="0"/>
+              </a:rPr>
+              <a:t>x</a:t>
+            </a:r>
+            <a:endParaRPr lang="de-DE" sz="1400" i="1" baseline="-25000" dirty="0">
+              <a:solidFill>
+                <a:schemeClr val="accent6">
+                  <a:lumMod val="75000"/>
+                </a:schemeClr>
+              </a:solidFill>
+              <a:latin typeface="CMU Serif" panose="02000603000000000000" pitchFamily="2" charset="0"/>
+              <a:ea typeface="CMU Serif" panose="02000603000000000000" pitchFamily="2" charset="0"/>
+              <a:cs typeface="CMU Serif" panose="02000603000000000000" pitchFamily="2" charset="0"/>
+            </a:endParaRPr>
+          </a:p>
+        </p:txBody>
+      </p:sp>
+      <p:sp>
+        <p:nvSpPr>
+          <p:cNvPr id="32" name="Textfeld 31">
+            <a:extLst>
+              <a:ext uri="{FF2B5EF4-FFF2-40B4-BE49-F238E27FC236}">
+                <a16:creationId xmlns:a16="http://schemas.microsoft.com/office/drawing/2014/main" id="{028C3DEF-087E-EABC-3C6A-3EDD9B0FB0DC}"/>
+              </a:ext>
+            </a:extLst>
+          </p:cNvPr>
+          <p:cNvSpPr txBox="1"/>
+          <p:nvPr/>
+        </p:nvSpPr>
+        <p:spPr>
+          <a:xfrm>
+            <a:off x="2610000" y="2745763"/>
+            <a:ext cx="348666" cy="307777"/>
+          </a:xfrm>
+          <a:prstGeom prst="rect">
+            <a:avLst/>
+          </a:prstGeom>
+          <a:noFill/>
+        </p:spPr>
+        <p:txBody>
+          <a:bodyPr wrap="square" rtlCol="0" anchor="ctr">
+            <a:spAutoFit/>
+          </a:bodyPr>
+          <a:lstStyle/>
+          <a:p>
+            <a:pPr algn="ctr"/>
+            <a:r>
+              <a:rPr lang="de-DE" sz="1400" i="1" dirty="0">
+                <a:latin typeface="CMU Serif" panose="02000603000000000000" pitchFamily="2" charset="0"/>
+                <a:ea typeface="CMU Serif" panose="02000603000000000000" pitchFamily="2" charset="0"/>
+                <a:cs typeface="CMU Serif" panose="02000603000000000000" pitchFamily="2" charset="0"/>
+              </a:rPr>
+              <a:t>x</a:t>
+            </a:r>
+            <a:endParaRPr lang="de-DE" sz="1400" i="1" baseline="-25000" dirty="0">
+              <a:latin typeface="CMU Serif" panose="02000603000000000000" pitchFamily="2" charset="0"/>
+              <a:ea typeface="CMU Serif" panose="02000603000000000000" pitchFamily="2" charset="0"/>
+              <a:cs typeface="CMU Serif" panose="02000603000000000000" pitchFamily="2" charset="0"/>
+            </a:endParaRPr>
+          </a:p>
+        </p:txBody>
+      </p:sp>
+      <p:sp>
+        <p:nvSpPr>
+          <p:cNvPr id="34" name="Textfeld 33">
+            <a:extLst>
+              <a:ext uri="{FF2B5EF4-FFF2-40B4-BE49-F238E27FC236}">
+                <a16:creationId xmlns:a16="http://schemas.microsoft.com/office/drawing/2014/main" id="{56871D21-EA9C-94A8-1073-6F555C5EC441}"/>
+              </a:ext>
+            </a:extLst>
+          </p:cNvPr>
+          <p:cNvSpPr txBox="1"/>
+          <p:nvPr/>
+        </p:nvSpPr>
+        <p:spPr>
+          <a:xfrm>
+            <a:off x="2886297" y="1058710"/>
+            <a:ext cx="348666" cy="307777"/>
+          </a:xfrm>
+          <a:prstGeom prst="rect">
+            <a:avLst/>
+          </a:prstGeom>
+          <a:noFill/>
+        </p:spPr>
+        <p:txBody>
+          <a:bodyPr wrap="square" rtlCol="0" anchor="ctr">
+            <a:spAutoFit/>
+          </a:bodyPr>
+          <a:lstStyle/>
+          <a:p>
+            <a:pPr algn="ctr"/>
+            <a:r>
+              <a:rPr lang="de-DE" sz="1400" i="1" dirty="0">
+                <a:latin typeface="CMU Serif" panose="02000603000000000000" pitchFamily="2" charset="0"/>
+                <a:ea typeface="CMU Serif" panose="02000603000000000000" pitchFamily="2" charset="0"/>
+                <a:cs typeface="CMU Serif" panose="02000603000000000000" pitchFamily="2" charset="0"/>
+              </a:rPr>
+              <a:t>y</a:t>
+            </a:r>
+            <a:endParaRPr lang="de-DE" sz="1400" i="1" baseline="-25000" dirty="0">
+              <a:latin typeface="CMU Serif" panose="02000603000000000000" pitchFamily="2" charset="0"/>
+              <a:ea typeface="CMU Serif" panose="02000603000000000000" pitchFamily="2" charset="0"/>
+              <a:cs typeface="CMU Serif" panose="02000603000000000000" pitchFamily="2" charset="0"/>
+            </a:endParaRPr>
+          </a:p>
+        </p:txBody>
+      </p:sp>
+      <p:sp>
+        <p:nvSpPr>
+          <p:cNvPr id="36" name="Textfeld 35">
+            <a:extLst>
+              <a:ext uri="{FF2B5EF4-FFF2-40B4-BE49-F238E27FC236}">
+                <a16:creationId xmlns:a16="http://schemas.microsoft.com/office/drawing/2014/main" id="{198B1FDB-6746-4BB4-FA6E-B856010870CE}"/>
+              </a:ext>
+            </a:extLst>
+          </p:cNvPr>
+          <p:cNvSpPr txBox="1"/>
+          <p:nvPr/>
+        </p:nvSpPr>
+        <p:spPr>
+          <a:xfrm>
+            <a:off x="1534383" y="405385"/>
+            <a:ext cx="348666" cy="307777"/>
+          </a:xfrm>
+          <a:prstGeom prst="rect">
+            <a:avLst/>
+          </a:prstGeom>
+          <a:noFill/>
+        </p:spPr>
+        <p:txBody>
+          <a:bodyPr wrap="square" rtlCol="0" anchor="ctr">
+            <a:spAutoFit/>
+          </a:bodyPr>
+          <a:lstStyle/>
+          <a:p>
+            <a:pPr algn="ctr"/>
+            <a:r>
+              <a:rPr lang="de-DE" sz="1400" i="1" dirty="0">
+                <a:latin typeface="CMU Serif" panose="02000603000000000000" pitchFamily="2" charset="0"/>
+                <a:ea typeface="CMU Serif" panose="02000603000000000000" pitchFamily="2" charset="0"/>
+                <a:cs typeface="CMU Serif" panose="02000603000000000000" pitchFamily="2" charset="0"/>
+              </a:rPr>
+              <a:t>z</a:t>
+            </a:r>
+            <a:endParaRPr lang="de-DE" sz="1400" i="1" baseline="-25000" dirty="0">
+              <a:latin typeface="CMU Serif" panose="02000603000000000000" pitchFamily="2" charset="0"/>
+              <a:ea typeface="CMU Serif" panose="02000603000000000000" pitchFamily="2" charset="0"/>
+              <a:cs typeface="CMU Serif" panose="02000603000000000000" pitchFamily="2" charset="0"/>
+            </a:endParaRPr>
+          </a:p>
+        </p:txBody>
+      </p:sp>
+      <p:cxnSp>
+        <p:nvCxnSpPr>
+          <p:cNvPr id="37" name="Gerade Verbindung mit Pfeil 36">
+            <a:extLst>
+              <a:ext uri="{FF2B5EF4-FFF2-40B4-BE49-F238E27FC236}">
+                <a16:creationId xmlns:a16="http://schemas.microsoft.com/office/drawing/2014/main" id="{22DD482F-5103-A442-27E4-EFA6F8A51436}"/>
+              </a:ext>
+            </a:extLst>
+          </p:cNvPr>
+          <p:cNvCxnSpPr>
+            <a:cxnSpLocks/>
+          </p:cNvCxnSpPr>
+          <p:nvPr/>
+        </p:nvCxnSpPr>
+        <p:spPr>
+          <a:xfrm flipV="1">
+            <a:off x="2017394" y="1129787"/>
+            <a:ext cx="0" cy="447009"/>
+          </a:xfrm>
+          <a:prstGeom prst="straightConnector1">
+            <a:avLst/>
+          </a:prstGeom>
+          <a:ln w="19050" cap="rnd">
+            <a:solidFill>
+              <a:srgbClr val="FF0000"/>
+            </a:solidFill>
+            <a:round/>
+            <a:tailEnd type="triangle"/>
+          </a:ln>
+        </p:spPr>
+        <p:style>
+          <a:lnRef idx="2">
+            <a:schemeClr val="dk1"/>
+          </a:lnRef>
+          <a:fillRef idx="0">
+            <a:schemeClr val="dk1"/>
+          </a:fillRef>
+          <a:effectRef idx="1">
+            <a:schemeClr val="dk1"/>
+          </a:effectRef>
+          <a:fontRef idx="minor">
+            <a:schemeClr val="tx1"/>
+          </a:fontRef>
+        </p:style>
+      </p:cxnSp>
+      <p:sp>
+        <p:nvSpPr>
+          <p:cNvPr id="41" name="Textfeld 40">
+            <a:extLst>
+              <a:ext uri="{FF2B5EF4-FFF2-40B4-BE49-F238E27FC236}">
+                <a16:creationId xmlns:a16="http://schemas.microsoft.com/office/drawing/2014/main" id="{20A1D1EA-04B6-FD22-96D3-80EE12BF591B}"/>
+              </a:ext>
+            </a:extLst>
+          </p:cNvPr>
+          <p:cNvSpPr txBox="1"/>
+          <p:nvPr/>
+        </p:nvSpPr>
+        <p:spPr>
+          <a:xfrm>
+            <a:off x="1768420" y="910376"/>
+            <a:ext cx="841580" cy="307777"/>
+          </a:xfrm>
+          <a:prstGeom prst="rect">
+            <a:avLst/>
+          </a:prstGeom>
+          <a:noFill/>
+        </p:spPr>
+        <p:txBody>
+          <a:bodyPr wrap="square" rtlCol="0" anchor="ctr">
+            <a:spAutoFit/>
+          </a:bodyPr>
+          <a:lstStyle/>
+          <a:p>
+            <a:pPr algn="ctr"/>
+            <a:r>
+              <a:rPr lang="de-DE" sz="1400" dirty="0" err="1">
+                <a:solidFill>
+                  <a:srgbClr val="FF0000"/>
+                </a:solidFill>
+                <a:latin typeface="CMU Serif" panose="02000603000000000000" pitchFamily="2" charset="0"/>
+                <a:ea typeface="CMU Serif" panose="02000603000000000000" pitchFamily="2" charset="0"/>
+                <a:cs typeface="CMU Serif" panose="02000603000000000000" pitchFamily="2" charset="0"/>
+              </a:rPr>
+              <a:t>d</a:t>
+            </a:r>
+            <a:r>
+              <a:rPr lang="de-DE" sz="1400" i="1" dirty="0" err="1">
+                <a:solidFill>
+                  <a:srgbClr val="FF0000"/>
+                </a:solidFill>
+                <a:latin typeface="CMU Serif" panose="02000603000000000000" pitchFamily="2" charset="0"/>
+                <a:ea typeface="CMU Serif" panose="02000603000000000000" pitchFamily="2" charset="0"/>
+                <a:cs typeface="CMU Serif" panose="02000603000000000000" pitchFamily="2" charset="0"/>
+              </a:rPr>
+              <a:t>A</a:t>
+            </a:r>
+            <a:endParaRPr lang="de-DE" sz="1400" i="1" baseline="-25000" dirty="0">
+              <a:solidFill>
+                <a:srgbClr val="FF0000"/>
+              </a:solidFill>
+              <a:latin typeface="CMU Serif" panose="02000603000000000000" pitchFamily="2" charset="0"/>
+              <a:ea typeface="CMU Serif" panose="02000603000000000000" pitchFamily="2" charset="0"/>
+              <a:cs typeface="CMU Serif" panose="02000603000000000000" pitchFamily="2" charset="0"/>
+            </a:endParaRPr>
+          </a:p>
+        </p:txBody>
+      </p:sp>
+      <p:cxnSp>
+        <p:nvCxnSpPr>
+          <p:cNvPr id="43" name="Gerade Verbindung mit Pfeil 42">
+            <a:extLst>
+              <a:ext uri="{FF2B5EF4-FFF2-40B4-BE49-F238E27FC236}">
+                <a16:creationId xmlns:a16="http://schemas.microsoft.com/office/drawing/2014/main" id="{D1CCFCDF-4009-E00A-3C5F-48ACFD65A3C6}"/>
+              </a:ext>
+            </a:extLst>
+          </p:cNvPr>
+          <p:cNvCxnSpPr>
+            <a:cxnSpLocks/>
+          </p:cNvCxnSpPr>
+          <p:nvPr/>
+        </p:nvCxnSpPr>
+        <p:spPr>
+          <a:xfrm>
+            <a:off x="2187512" y="1777369"/>
+            <a:ext cx="332456" cy="346886"/>
+          </a:xfrm>
+          <a:prstGeom prst="straightConnector1">
+            <a:avLst/>
+          </a:prstGeom>
+          <a:ln w="19050" cap="rnd">
+            <a:solidFill>
+              <a:srgbClr val="FF0000"/>
+            </a:solidFill>
+            <a:round/>
+            <a:tailEnd type="triangle"/>
+          </a:ln>
+        </p:spPr>
+        <p:style>
+          <a:lnRef idx="2">
+            <a:schemeClr val="dk1"/>
+          </a:lnRef>
+          <a:fillRef idx="0">
+            <a:schemeClr val="dk1"/>
+          </a:fillRef>
+          <a:effectRef idx="1">
+            <a:schemeClr val="dk1"/>
+          </a:effectRef>
+          <a:fontRef idx="minor">
+            <a:schemeClr val="tx1"/>
+          </a:fontRef>
+        </p:style>
+      </p:cxnSp>
+      <p:sp>
+        <p:nvSpPr>
+          <p:cNvPr id="48" name="Textfeld 47">
+            <a:extLst>
+              <a:ext uri="{FF2B5EF4-FFF2-40B4-BE49-F238E27FC236}">
+                <a16:creationId xmlns:a16="http://schemas.microsoft.com/office/drawing/2014/main" id="{BCDFC50D-E9EF-E48D-7C4C-82F437A30C59}"/>
+              </a:ext>
+            </a:extLst>
+          </p:cNvPr>
+          <p:cNvSpPr txBox="1"/>
+          <p:nvPr/>
+        </p:nvSpPr>
+        <p:spPr>
+          <a:xfrm>
+            <a:off x="2290115" y="1818875"/>
+            <a:ext cx="841580" cy="307777"/>
+          </a:xfrm>
+          <a:prstGeom prst="rect">
+            <a:avLst/>
+          </a:prstGeom>
+          <a:noFill/>
+        </p:spPr>
+        <p:txBody>
+          <a:bodyPr wrap="square" rtlCol="0" anchor="ctr">
+            <a:spAutoFit/>
+          </a:bodyPr>
+          <a:lstStyle/>
+          <a:p>
+            <a:pPr algn="ctr"/>
+            <a:r>
+              <a:rPr lang="de-DE" sz="1400" dirty="0" err="1">
+                <a:solidFill>
+                  <a:srgbClr val="FF0000"/>
+                </a:solidFill>
+                <a:latin typeface="CMU Serif" panose="02000603000000000000" pitchFamily="2" charset="0"/>
+                <a:ea typeface="CMU Serif" panose="02000603000000000000" pitchFamily="2" charset="0"/>
+                <a:cs typeface="CMU Serif" panose="02000603000000000000" pitchFamily="2" charset="0"/>
+              </a:rPr>
+              <a:t>d</a:t>
+            </a:r>
+            <a:r>
+              <a:rPr lang="de-DE" sz="1400" i="1" dirty="0" err="1">
+                <a:solidFill>
+                  <a:srgbClr val="FF0000"/>
+                </a:solidFill>
+                <a:latin typeface="CMU Serif" panose="02000603000000000000" pitchFamily="2" charset="0"/>
+                <a:ea typeface="CMU Serif" panose="02000603000000000000" pitchFamily="2" charset="0"/>
+                <a:cs typeface="CMU Serif" panose="02000603000000000000" pitchFamily="2" charset="0"/>
+              </a:rPr>
+              <a:t>W</a:t>
+            </a:r>
+            <a:r>
+              <a:rPr lang="de-DE" sz="1400" baseline="-25000" dirty="0" err="1">
+                <a:solidFill>
+                  <a:srgbClr val="FF0000"/>
+                </a:solidFill>
+                <a:latin typeface="CMU Serif" panose="02000603000000000000" pitchFamily="2" charset="0"/>
+                <a:ea typeface="CMU Serif" panose="02000603000000000000" pitchFamily="2" charset="0"/>
+                <a:cs typeface="CMU Serif" panose="02000603000000000000" pitchFamily="2" charset="0"/>
+              </a:rPr>
+              <a:t>i</a:t>
+            </a:r>
+            <a:endParaRPr lang="de-DE" sz="1400" baseline="-25000" dirty="0">
+              <a:solidFill>
+                <a:srgbClr val="FF0000"/>
+              </a:solidFill>
+              <a:latin typeface="CMU Serif" panose="02000603000000000000" pitchFamily="2" charset="0"/>
+              <a:ea typeface="CMU Serif" panose="02000603000000000000" pitchFamily="2" charset="0"/>
+              <a:cs typeface="CMU Serif" panose="02000603000000000000" pitchFamily="2" charset="0"/>
+            </a:endParaRPr>
+          </a:p>
+        </p:txBody>
+      </p:sp>
     </p:spTree>
     <p:extLst>
       <p:ext uri="{BB962C8B-B14F-4D97-AF65-F5344CB8AC3E}">
@@ -13160,6 +18368,36 @@
 </file>
 
 <file path=ppt/slides/slide6.xml><?xml version="1.0" encoding="utf-8"?>
+<p:sld xmlns:a="http://schemas.openxmlformats.org/drawingml/2006/main" xmlns:r="http://schemas.openxmlformats.org/officeDocument/2006/relationships" xmlns:p="http://schemas.openxmlformats.org/presentationml/2006/main">
+  <p:cSld>
+    <p:spTree>
+      <p:nvGrpSpPr>
+        <p:cNvPr id="1" name=""/>
+        <p:cNvGrpSpPr/>
+        <p:nvPr/>
+      </p:nvGrpSpPr>
+      <p:grpSpPr>
+        <a:xfrm>
+          <a:off x="0" y="0"/>
+          <a:ext cx="0" cy="0"/>
+          <a:chOff x="0" y="0"/>
+          <a:chExt cx="0" cy="0"/>
+        </a:xfrm>
+      </p:grpSpPr>
+    </p:spTree>
+    <p:extLst>
+      <p:ext uri="{BB962C8B-B14F-4D97-AF65-F5344CB8AC3E}">
+        <p14:creationId xmlns:p14="http://schemas.microsoft.com/office/powerpoint/2010/main" val="2370921253"/>
+      </p:ext>
+    </p:extLst>
+  </p:cSld>
+  <p:clrMapOvr>
+    <a:masterClrMapping/>
+  </p:clrMapOvr>
+</p:sld>
+</file>
+
+<file path=ppt/slides/slide7.xml><?xml version="1.0" encoding="utf-8"?>
 <p:sld xmlns:a="http://schemas.openxmlformats.org/drawingml/2006/main" xmlns:r="http://schemas.openxmlformats.org/officeDocument/2006/relationships" xmlns:p="http://schemas.openxmlformats.org/presentationml/2006/main">
   <p:cSld>
     <p:spTree>
@@ -19541,7 +24779,7 @@
 </p:sld>
 </file>
 
-<file path=ppt/slides/slide7.xml><?xml version="1.0" encoding="utf-8"?>
+<file path=ppt/slides/slide8.xml><?xml version="1.0" encoding="utf-8"?>
 <p:sld xmlns:a="http://schemas.openxmlformats.org/drawingml/2006/main" xmlns:r="http://schemas.openxmlformats.org/officeDocument/2006/relationships" xmlns:p="http://schemas.openxmlformats.org/presentationml/2006/main">
   <p:cSld>
     <p:spTree>
@@ -21516,7 +26754,7 @@
 </p:sld>
 </file>
 
-<file path=ppt/slides/slide8.xml><?xml version="1.0" encoding="utf-8"?>
+<file path=ppt/slides/slide9.xml><?xml version="1.0" encoding="utf-8"?>
 <p:sld xmlns:a="http://schemas.openxmlformats.org/drawingml/2006/main" xmlns:r="http://schemas.openxmlformats.org/officeDocument/2006/relationships" xmlns:p="http://schemas.openxmlformats.org/presentationml/2006/main">
   <p:cSld>
     <p:spTree>
@@ -22271,4025 +27509,6 @@
     <p:extLst>
       <p:ext uri="{BB962C8B-B14F-4D97-AF65-F5344CB8AC3E}">
         <p14:creationId xmlns:p14="http://schemas.microsoft.com/office/powerpoint/2010/main" val="4010601396"/>
-      </p:ext>
-    </p:extLst>
-  </p:cSld>
-  <p:clrMapOvr>
-    <a:masterClrMapping/>
-  </p:clrMapOvr>
-</p:sld>
-</file>
-
-<file path=ppt/slides/slide9.xml><?xml version="1.0" encoding="utf-8"?>
-<p:sld xmlns:a="http://schemas.openxmlformats.org/drawingml/2006/main" xmlns:r="http://schemas.openxmlformats.org/officeDocument/2006/relationships" xmlns:p="http://schemas.openxmlformats.org/presentationml/2006/main">
-  <p:cSld>
-    <p:spTree>
-      <p:nvGrpSpPr>
-        <p:cNvPr id="1" name=""/>
-        <p:cNvGrpSpPr/>
-        <p:nvPr/>
-      </p:nvGrpSpPr>
-      <p:grpSpPr>
-        <a:xfrm>
-          <a:off x="0" y="0"/>
-          <a:ext cx="0" cy="0"/>
-          <a:chOff x="0" y="0"/>
-          <a:chExt cx="0" cy="0"/>
-        </a:xfrm>
-      </p:grpSpPr>
-      <p:cxnSp>
-        <p:nvCxnSpPr>
-          <p:cNvPr id="90" name="Gerader Verbinder 89">
-            <a:extLst>
-              <a:ext uri="{FF2B5EF4-FFF2-40B4-BE49-F238E27FC236}">
-                <a16:creationId xmlns:a16="http://schemas.microsoft.com/office/drawing/2014/main" id="{EDF8C47F-9B9F-B367-5DC1-C4460D3C5F67}"/>
-              </a:ext>
-            </a:extLst>
-          </p:cNvPr>
-          <p:cNvCxnSpPr>
-            <a:cxnSpLocks/>
-          </p:cNvCxnSpPr>
-          <p:nvPr/>
-        </p:nvCxnSpPr>
-        <p:spPr>
-          <a:xfrm flipH="1">
-            <a:off x="651843" y="2480597"/>
-            <a:ext cx="574298" cy="0"/>
-          </a:xfrm>
-          <a:prstGeom prst="line">
-            <a:avLst/>
-          </a:prstGeom>
-          <a:ln w="6350" cap="rnd">
-            <a:solidFill>
-              <a:schemeClr val="tx1"/>
-            </a:solidFill>
-            <a:round/>
-            <a:headEnd type="triangle" w="sm" len="sm"/>
-            <a:tailEnd type="triangle" w="sm" len="sm"/>
-          </a:ln>
-        </p:spPr>
-        <p:style>
-          <a:lnRef idx="2">
-            <a:schemeClr val="accent1"/>
-          </a:lnRef>
-          <a:fillRef idx="0">
-            <a:schemeClr val="accent1"/>
-          </a:fillRef>
-          <a:effectRef idx="1">
-            <a:schemeClr val="accent1"/>
-          </a:effectRef>
-          <a:fontRef idx="minor">
-            <a:schemeClr val="tx1"/>
-          </a:fontRef>
-        </p:style>
-      </p:cxnSp>
-      <p:cxnSp>
-        <p:nvCxnSpPr>
-          <p:cNvPr id="100" name="Gerader Verbinder 99">
-            <a:extLst>
-              <a:ext uri="{FF2B5EF4-FFF2-40B4-BE49-F238E27FC236}">
-                <a16:creationId xmlns:a16="http://schemas.microsoft.com/office/drawing/2014/main" id="{15DC9AE8-69B3-6FDC-3261-D4006F003BF2}"/>
-              </a:ext>
-            </a:extLst>
-          </p:cNvPr>
-          <p:cNvCxnSpPr>
-            <a:cxnSpLocks/>
-          </p:cNvCxnSpPr>
-          <p:nvPr/>
-        </p:nvCxnSpPr>
-        <p:spPr>
-          <a:xfrm flipH="1">
-            <a:off x="1233089" y="2480597"/>
-            <a:ext cx="1738962" cy="0"/>
-          </a:xfrm>
-          <a:prstGeom prst="line">
-            <a:avLst/>
-          </a:prstGeom>
-          <a:ln w="6350" cap="rnd">
-            <a:solidFill>
-              <a:schemeClr val="tx1"/>
-            </a:solidFill>
-            <a:round/>
-            <a:headEnd type="triangle" w="sm" len="sm"/>
-            <a:tailEnd type="triangle" w="sm" len="sm"/>
-          </a:ln>
-        </p:spPr>
-        <p:style>
-          <a:lnRef idx="2">
-            <a:schemeClr val="accent1"/>
-          </a:lnRef>
-          <a:fillRef idx="0">
-            <a:schemeClr val="accent1"/>
-          </a:fillRef>
-          <a:effectRef idx="1">
-            <a:schemeClr val="accent1"/>
-          </a:effectRef>
-          <a:fontRef idx="minor">
-            <a:schemeClr val="tx1"/>
-          </a:fontRef>
-        </p:style>
-      </p:cxnSp>
-      <p:cxnSp>
-        <p:nvCxnSpPr>
-          <p:cNvPr id="68" name="Gerader Verbinder 67">
-            <a:extLst>
-              <a:ext uri="{FF2B5EF4-FFF2-40B4-BE49-F238E27FC236}">
-                <a16:creationId xmlns:a16="http://schemas.microsoft.com/office/drawing/2014/main" id="{F386A702-4DE4-6FB2-A979-1B4E70F9F708}"/>
-              </a:ext>
-            </a:extLst>
-          </p:cNvPr>
-          <p:cNvCxnSpPr>
-            <a:cxnSpLocks/>
-          </p:cNvCxnSpPr>
-          <p:nvPr/>
-        </p:nvCxnSpPr>
-        <p:spPr>
-          <a:xfrm flipH="1">
-            <a:off x="1233090" y="1941427"/>
-            <a:ext cx="290231" cy="0"/>
-          </a:xfrm>
-          <a:prstGeom prst="line">
-            <a:avLst/>
-          </a:prstGeom>
-          <a:ln w="6350" cap="rnd">
-            <a:solidFill>
-              <a:schemeClr val="tx1"/>
-            </a:solidFill>
-            <a:round/>
-            <a:headEnd type="triangle" w="sm" len="sm"/>
-            <a:tailEnd type="triangle" w="sm" len="sm"/>
-          </a:ln>
-        </p:spPr>
-        <p:style>
-          <a:lnRef idx="2">
-            <a:schemeClr val="accent1"/>
-          </a:lnRef>
-          <a:fillRef idx="0">
-            <a:schemeClr val="accent1"/>
-          </a:fillRef>
-          <a:effectRef idx="1">
-            <a:schemeClr val="accent1"/>
-          </a:effectRef>
-          <a:fontRef idx="minor">
-            <a:schemeClr val="tx1"/>
-          </a:fontRef>
-        </p:style>
-      </p:cxnSp>
-      <p:cxnSp>
-        <p:nvCxnSpPr>
-          <p:cNvPr id="61" name="Gerader Verbinder 60">
-            <a:extLst>
-              <a:ext uri="{FF2B5EF4-FFF2-40B4-BE49-F238E27FC236}">
-                <a16:creationId xmlns:a16="http://schemas.microsoft.com/office/drawing/2014/main" id="{405C7A3A-ECE8-6788-80B1-A1E6C0E957FD}"/>
-              </a:ext>
-            </a:extLst>
-          </p:cNvPr>
-          <p:cNvCxnSpPr>
-            <a:cxnSpLocks/>
-          </p:cNvCxnSpPr>
-          <p:nvPr/>
-        </p:nvCxnSpPr>
-        <p:spPr>
-          <a:xfrm flipH="1">
-            <a:off x="863757" y="1941427"/>
-            <a:ext cx="362384" cy="0"/>
-          </a:xfrm>
-          <a:prstGeom prst="line">
-            <a:avLst/>
-          </a:prstGeom>
-          <a:ln w="6350" cap="rnd">
-            <a:solidFill>
-              <a:schemeClr val="tx1"/>
-            </a:solidFill>
-            <a:round/>
-            <a:headEnd type="triangle" w="sm" len="sm"/>
-            <a:tailEnd type="triangle" w="sm" len="sm"/>
-          </a:ln>
-        </p:spPr>
-        <p:style>
-          <a:lnRef idx="2">
-            <a:schemeClr val="accent1"/>
-          </a:lnRef>
-          <a:fillRef idx="0">
-            <a:schemeClr val="accent1"/>
-          </a:fillRef>
-          <a:effectRef idx="1">
-            <a:schemeClr val="accent1"/>
-          </a:effectRef>
-          <a:fontRef idx="minor">
-            <a:schemeClr val="tx1"/>
-          </a:fontRef>
-        </p:style>
-      </p:cxnSp>
-      <p:cxnSp>
-        <p:nvCxnSpPr>
-          <p:cNvPr id="43" name="Gerader Verbinder 42">
-            <a:extLst>
-              <a:ext uri="{FF2B5EF4-FFF2-40B4-BE49-F238E27FC236}">
-                <a16:creationId xmlns:a16="http://schemas.microsoft.com/office/drawing/2014/main" id="{ED8BFC9F-2DC8-48CA-8C41-A51D694DCCD7}"/>
-              </a:ext>
-            </a:extLst>
-          </p:cNvPr>
-          <p:cNvCxnSpPr>
-            <a:cxnSpLocks/>
-          </p:cNvCxnSpPr>
-          <p:nvPr/>
-        </p:nvCxnSpPr>
-        <p:spPr>
-          <a:xfrm flipH="1">
-            <a:off x="863757" y="1264186"/>
-            <a:ext cx="2103554" cy="0"/>
-          </a:xfrm>
-          <a:prstGeom prst="line">
-            <a:avLst/>
-          </a:prstGeom>
-          <a:ln w="6350" cap="rnd">
-            <a:solidFill>
-              <a:schemeClr val="tx1"/>
-            </a:solidFill>
-            <a:round/>
-            <a:headEnd type="triangle" w="sm" len="sm"/>
-            <a:tailEnd type="triangle" w="sm" len="sm"/>
-          </a:ln>
-        </p:spPr>
-        <p:style>
-          <a:lnRef idx="2">
-            <a:schemeClr val="accent1"/>
-          </a:lnRef>
-          <a:fillRef idx="0">
-            <a:schemeClr val="accent1"/>
-          </a:fillRef>
-          <a:effectRef idx="1">
-            <a:schemeClr val="accent1"/>
-          </a:effectRef>
-          <a:fontRef idx="minor">
-            <a:schemeClr val="tx1"/>
-          </a:fontRef>
-        </p:style>
-      </p:cxnSp>
-      <p:grpSp>
-        <p:nvGrpSpPr>
-          <p:cNvPr id="7" name="Gruppieren 6">
-            <a:extLst>
-              <a:ext uri="{FF2B5EF4-FFF2-40B4-BE49-F238E27FC236}">
-                <a16:creationId xmlns:a16="http://schemas.microsoft.com/office/drawing/2014/main" id="{570C8645-88AC-7063-02BA-0E01AD557D13}"/>
-              </a:ext>
-            </a:extLst>
-          </p:cNvPr>
-          <p:cNvGrpSpPr/>
-          <p:nvPr/>
-        </p:nvGrpSpPr>
-        <p:grpSpPr>
-          <a:xfrm>
-            <a:off x="653748" y="1563077"/>
-            <a:ext cx="972020" cy="208859"/>
-            <a:chOff x="401400" y="1422760"/>
-            <a:chExt cx="1101645" cy="246020"/>
-          </a:xfrm>
-        </p:grpSpPr>
-        <p:sp>
-          <p:nvSpPr>
-            <p:cNvPr id="5" name="Freihandform: Form 4">
-              <a:extLst>
-                <a:ext uri="{FF2B5EF4-FFF2-40B4-BE49-F238E27FC236}">
-                  <a16:creationId xmlns:a16="http://schemas.microsoft.com/office/drawing/2014/main" id="{8DC15251-2E4D-6DC9-91E3-7164A43A5BD3}"/>
-                </a:ext>
-              </a:extLst>
-            </p:cNvPr>
-            <p:cNvSpPr/>
-            <p:nvPr/>
-          </p:nvSpPr>
-          <p:spPr>
-            <a:xfrm>
-              <a:off x="403860" y="1422760"/>
-              <a:ext cx="1099185" cy="246020"/>
-            </a:xfrm>
-            <a:custGeom>
-              <a:avLst/>
-              <a:gdLst>
-                <a:gd name="csX0" fmla="*/ 0 w 1099185"/>
-                <a:gd name="csY0" fmla="*/ 74523 h 259308"/>
-                <a:gd name="csX1" fmla="*/ 259080 w 1099185"/>
-                <a:gd name="csY1" fmla="*/ 9753 h 259308"/>
-                <a:gd name="csX2" fmla="*/ 1099185 w 1099185"/>
-                <a:gd name="csY2" fmla="*/ 259308 h 259308"/>
-                <a:gd name="csX0" fmla="*/ 0 w 1099185"/>
-                <a:gd name="csY0" fmla="*/ 76197 h 260982"/>
-                <a:gd name="csX1" fmla="*/ 226695 w 1099185"/>
-                <a:gd name="csY1" fmla="*/ 9522 h 260982"/>
-                <a:gd name="csX2" fmla="*/ 1099185 w 1099185"/>
-                <a:gd name="csY2" fmla="*/ 260982 h 260982"/>
-                <a:gd name="csX0" fmla="*/ 0 w 1099185"/>
-                <a:gd name="csY0" fmla="*/ 68602 h 253387"/>
-                <a:gd name="csX1" fmla="*/ 226695 w 1099185"/>
-                <a:gd name="csY1" fmla="*/ 1927 h 253387"/>
-                <a:gd name="csX2" fmla="*/ 1099185 w 1099185"/>
-                <a:gd name="csY2" fmla="*/ 253387 h 253387"/>
-                <a:gd name="csX0" fmla="*/ 0 w 1099185"/>
-                <a:gd name="csY0" fmla="*/ 56168 h 240953"/>
-                <a:gd name="csX1" fmla="*/ 320040 w 1099185"/>
-                <a:gd name="csY1" fmla="*/ 2828 h 240953"/>
-                <a:gd name="csX2" fmla="*/ 1099185 w 1099185"/>
-                <a:gd name="csY2" fmla="*/ 240953 h 240953"/>
-                <a:gd name="csX0" fmla="*/ 0 w 1099185"/>
-                <a:gd name="csY0" fmla="*/ 58433 h 243218"/>
-                <a:gd name="csX1" fmla="*/ 320040 w 1099185"/>
-                <a:gd name="csY1" fmla="*/ 5093 h 243218"/>
-                <a:gd name="csX2" fmla="*/ 1099185 w 1099185"/>
-                <a:gd name="csY2" fmla="*/ 243218 h 243218"/>
-                <a:gd name="csX0" fmla="*/ 0 w 1099185"/>
-                <a:gd name="csY0" fmla="*/ 56534 h 241319"/>
-                <a:gd name="csX1" fmla="*/ 320040 w 1099185"/>
-                <a:gd name="csY1" fmla="*/ 3194 h 241319"/>
-                <a:gd name="csX2" fmla="*/ 1099185 w 1099185"/>
-                <a:gd name="csY2" fmla="*/ 241319 h 241319"/>
-                <a:gd name="csX0" fmla="*/ 0 w 1099185"/>
-                <a:gd name="csY0" fmla="*/ 61235 h 246020"/>
-                <a:gd name="csX1" fmla="*/ 320040 w 1099185"/>
-                <a:gd name="csY1" fmla="*/ 7895 h 246020"/>
-                <a:gd name="csX2" fmla="*/ 1099185 w 1099185"/>
-                <a:gd name="csY2" fmla="*/ 246020 h 246020"/>
-                <a:gd name="csX0" fmla="*/ 0 w 1099185"/>
-                <a:gd name="csY0" fmla="*/ 61235 h 246020"/>
-                <a:gd name="csX1" fmla="*/ 320040 w 1099185"/>
-                <a:gd name="csY1" fmla="*/ 7895 h 246020"/>
-                <a:gd name="csX2" fmla="*/ 1099185 w 1099185"/>
-                <a:gd name="csY2" fmla="*/ 246020 h 246020"/>
-              </a:gdLst>
-              <a:ahLst/>
-              <a:cxnLst>
-                <a:cxn ang="0">
-                  <a:pos x="csX0" y="csY0"/>
-                </a:cxn>
-                <a:cxn ang="0">
-                  <a:pos x="csX1" y="csY1"/>
-                </a:cxn>
-                <a:cxn ang="0">
-                  <a:pos x="csX2" y="csY2"/>
-                </a:cxn>
-              </a:cxnLst>
-              <a:rect l="l" t="t" r="r" b="b"/>
-              <a:pathLst>
-                <a:path w="1099185" h="246020">
-                  <a:moveTo>
-                    <a:pt x="0" y="61235"/>
-                  </a:moveTo>
-                  <a:cubicBezTo>
-                    <a:pt x="11271" y="9641"/>
-                    <a:pt x="110172" y="-13378"/>
-                    <a:pt x="320040" y="7895"/>
-                  </a:cubicBezTo>
-                  <a:cubicBezTo>
-                    <a:pt x="529908" y="29168"/>
-                    <a:pt x="782161" y="111876"/>
-                    <a:pt x="1099185" y="246020"/>
-                  </a:cubicBezTo>
-                </a:path>
-              </a:pathLst>
-            </a:custGeom>
-            <a:noFill/>
-            <a:ln w="9525" cap="rnd">
-              <a:solidFill>
-                <a:schemeClr val="tx1"/>
-              </a:solidFill>
-              <a:round/>
-            </a:ln>
-          </p:spPr>
-          <p:style>
-            <a:lnRef idx="2">
-              <a:schemeClr val="accent1">
-                <a:shade val="15000"/>
-              </a:schemeClr>
-            </a:lnRef>
-            <a:fillRef idx="1">
-              <a:schemeClr val="accent1"/>
-            </a:fillRef>
-            <a:effectRef idx="0">
-              <a:schemeClr val="accent1"/>
-            </a:effectRef>
-            <a:fontRef idx="minor">
-              <a:schemeClr val="lt1"/>
-            </a:fontRef>
-          </p:style>
-          <p:txBody>
-            <a:bodyPr rtlCol="0" anchor="ctr"/>
-            <a:lstStyle/>
-            <a:p>
-              <a:pPr algn="ctr"/>
-              <a:endParaRPr lang="de-DE" sz="800" dirty="0"/>
-            </a:p>
-          </p:txBody>
-        </p:sp>
-        <p:sp>
-          <p:nvSpPr>
-            <p:cNvPr id="6" name="Freihandform: Form 5">
-              <a:extLst>
-                <a:ext uri="{FF2B5EF4-FFF2-40B4-BE49-F238E27FC236}">
-                  <a16:creationId xmlns:a16="http://schemas.microsoft.com/office/drawing/2014/main" id="{246FA57C-45C3-1559-52A6-A075FE195E38}"/>
-                </a:ext>
-              </a:extLst>
-            </p:cNvPr>
-            <p:cNvSpPr/>
-            <p:nvPr/>
-          </p:nvSpPr>
-          <p:spPr>
-            <a:xfrm>
-              <a:off x="401400" y="1482090"/>
-              <a:ext cx="1097835" cy="186690"/>
-            </a:xfrm>
-            <a:custGeom>
-              <a:avLst/>
-              <a:gdLst>
-                <a:gd name="csX0" fmla="*/ 3248 w 1092908"/>
-                <a:gd name="csY0" fmla="*/ 0 h 186690"/>
-                <a:gd name="csX1" fmla="*/ 168983 w 1092908"/>
-                <a:gd name="csY1" fmla="*/ 140970 h 186690"/>
-                <a:gd name="csX2" fmla="*/ 1092908 w 1092908"/>
-                <a:gd name="csY2" fmla="*/ 186690 h 186690"/>
-                <a:gd name="csX0" fmla="*/ 1906 w 1091566"/>
-                <a:gd name="csY0" fmla="*/ 0 h 186690"/>
-                <a:gd name="csX1" fmla="*/ 184689 w 1091566"/>
-                <a:gd name="csY1" fmla="*/ 133350 h 186690"/>
-                <a:gd name="csX2" fmla="*/ 1091566 w 1091566"/>
-                <a:gd name="csY2" fmla="*/ 186690 h 186690"/>
-                <a:gd name="csX0" fmla="*/ 1906 w 1091566"/>
-                <a:gd name="csY0" fmla="*/ 0 h 186690"/>
-                <a:gd name="csX1" fmla="*/ 184689 w 1091566"/>
-                <a:gd name="csY1" fmla="*/ 133350 h 186690"/>
-                <a:gd name="csX2" fmla="*/ 1091566 w 1091566"/>
-                <a:gd name="csY2" fmla="*/ 186690 h 186690"/>
-              </a:gdLst>
-              <a:ahLst/>
-              <a:cxnLst>
-                <a:cxn ang="0">
-                  <a:pos x="csX0" y="csY0"/>
-                </a:cxn>
-                <a:cxn ang="0">
-                  <a:pos x="csX1" y="csY1"/>
-                </a:cxn>
-                <a:cxn ang="0">
-                  <a:pos x="csX2" y="csY2"/>
-                </a:cxn>
-              </a:cxnLst>
-              <a:rect l="l" t="t" r="r" b="b"/>
-              <a:pathLst>
-                <a:path w="1091566" h="186690">
-                  <a:moveTo>
-                    <a:pt x="1906" y="0"/>
-                  </a:moveTo>
-                  <a:cubicBezTo>
-                    <a:pt x="-6032" y="54927"/>
-                    <a:pt x="3079" y="102235"/>
-                    <a:pt x="184689" y="133350"/>
-                  </a:cubicBezTo>
-                  <a:cubicBezTo>
-                    <a:pt x="366299" y="164465"/>
-                    <a:pt x="665478" y="181292"/>
-                    <a:pt x="1091566" y="186690"/>
-                  </a:cubicBezTo>
-                </a:path>
-              </a:pathLst>
-            </a:custGeom>
-            <a:noFill/>
-            <a:ln w="9525" cap="rnd">
-              <a:solidFill>
-                <a:schemeClr val="tx1"/>
-              </a:solidFill>
-              <a:round/>
-            </a:ln>
-          </p:spPr>
-          <p:style>
-            <a:lnRef idx="2">
-              <a:schemeClr val="accent1">
-                <a:shade val="15000"/>
-              </a:schemeClr>
-            </a:lnRef>
-            <a:fillRef idx="1">
-              <a:schemeClr val="accent1"/>
-            </a:fillRef>
-            <a:effectRef idx="0">
-              <a:schemeClr val="accent1"/>
-            </a:effectRef>
-            <a:fontRef idx="minor">
-              <a:schemeClr val="lt1"/>
-            </a:fontRef>
-          </p:style>
-          <p:txBody>
-            <a:bodyPr rtlCol="0" anchor="ctr"/>
-            <a:lstStyle/>
-            <a:p>
-              <a:pPr algn="ctr"/>
-              <a:endParaRPr lang="de-DE" sz="800" dirty="0"/>
-            </a:p>
-          </p:txBody>
-        </p:sp>
-      </p:grpSp>
-      <p:sp>
-        <p:nvSpPr>
-          <p:cNvPr id="8" name="Textfeld 7">
-            <a:extLst>
-              <a:ext uri="{FF2B5EF4-FFF2-40B4-BE49-F238E27FC236}">
-                <a16:creationId xmlns:a16="http://schemas.microsoft.com/office/drawing/2014/main" id="{DD11CB4C-3EC0-B6F7-DF76-4709A5C796B2}"/>
-              </a:ext>
-            </a:extLst>
-          </p:cNvPr>
-          <p:cNvSpPr txBox="1"/>
-          <p:nvPr/>
-        </p:nvSpPr>
-        <p:spPr>
-          <a:xfrm>
-            <a:off x="243305" y="1624918"/>
-            <a:ext cx="450936" cy="215444"/>
-          </a:xfrm>
-          <a:prstGeom prst="rect">
-            <a:avLst/>
-          </a:prstGeom>
-          <a:noFill/>
-        </p:spPr>
-        <p:txBody>
-          <a:bodyPr wrap="square" rtlCol="0" anchor="ctr">
-            <a:spAutoFit/>
-          </a:bodyPr>
-          <a:lstStyle/>
-          <a:p>
-            <a:pPr algn="ctr"/>
-            <a:r>
-              <a:rPr lang="de-DE" sz="800" i="1" dirty="0">
-                <a:solidFill>
-                  <a:schemeClr val="tx2">
-                    <a:lumMod val="75000"/>
-                    <a:lumOff val="25000"/>
-                  </a:schemeClr>
-                </a:solidFill>
-                <a:latin typeface="CMU Serif" panose="02000603000000000000" pitchFamily="2" charset="0"/>
-                <a:ea typeface="CMU Serif" panose="02000603000000000000" pitchFamily="2" charset="0"/>
-                <a:cs typeface="CMU Serif" panose="02000603000000000000" pitchFamily="2" charset="0"/>
-              </a:rPr>
-              <a:t>v</a:t>
-            </a:r>
-          </a:p>
-        </p:txBody>
-      </p:sp>
-      <p:cxnSp>
-        <p:nvCxnSpPr>
-          <p:cNvPr id="9" name="Gerade Verbindung mit Pfeil 8">
-            <a:extLst>
-              <a:ext uri="{FF2B5EF4-FFF2-40B4-BE49-F238E27FC236}">
-                <a16:creationId xmlns:a16="http://schemas.microsoft.com/office/drawing/2014/main" id="{38E1CFED-EFFC-5F05-2D08-82DF9A11C9D7}"/>
-              </a:ext>
-            </a:extLst>
-          </p:cNvPr>
-          <p:cNvCxnSpPr>
-            <a:cxnSpLocks/>
-          </p:cNvCxnSpPr>
-          <p:nvPr/>
-        </p:nvCxnSpPr>
-        <p:spPr>
-          <a:xfrm>
-            <a:off x="191726" y="1622681"/>
-            <a:ext cx="418761" cy="0"/>
-          </a:xfrm>
-          <a:prstGeom prst="straightConnector1">
-            <a:avLst/>
-          </a:prstGeom>
-          <a:ln w="15875" cap="rnd">
-            <a:solidFill>
-              <a:schemeClr val="tx2">
-                <a:lumMod val="75000"/>
-                <a:lumOff val="25000"/>
-              </a:schemeClr>
-            </a:solidFill>
-            <a:round/>
-            <a:headEnd type="none" w="sm" len="sm"/>
-            <a:tailEnd type="triangle" w="med" len="med"/>
-          </a:ln>
-        </p:spPr>
-        <p:style>
-          <a:lnRef idx="2">
-            <a:schemeClr val="accent1"/>
-          </a:lnRef>
-          <a:fillRef idx="0">
-            <a:schemeClr val="accent1"/>
-          </a:fillRef>
-          <a:effectRef idx="1">
-            <a:schemeClr val="accent1"/>
-          </a:effectRef>
-          <a:fontRef idx="minor">
-            <a:schemeClr val="tx1"/>
-          </a:fontRef>
-        </p:style>
-      </p:cxnSp>
-      <p:cxnSp>
-        <p:nvCxnSpPr>
-          <p:cNvPr id="12" name="Gerader Verbinder 11">
-            <a:extLst>
-              <a:ext uri="{FF2B5EF4-FFF2-40B4-BE49-F238E27FC236}">
-                <a16:creationId xmlns:a16="http://schemas.microsoft.com/office/drawing/2014/main" id="{F11B0308-50A7-143F-D433-8A0781855D71}"/>
-              </a:ext>
-            </a:extLst>
-          </p:cNvPr>
-          <p:cNvCxnSpPr>
-            <a:cxnSpLocks/>
-          </p:cNvCxnSpPr>
-          <p:nvPr/>
-        </p:nvCxnSpPr>
-        <p:spPr>
-          <a:xfrm>
-            <a:off x="197308" y="1510952"/>
-            <a:ext cx="1579378" cy="287655"/>
-          </a:xfrm>
-          <a:prstGeom prst="line">
-            <a:avLst/>
-          </a:prstGeom>
-          <a:ln w="6350" cap="rnd">
-            <a:solidFill>
-              <a:schemeClr val="tx1"/>
-            </a:solidFill>
-            <a:prstDash val="sysDash"/>
-            <a:round/>
-          </a:ln>
-        </p:spPr>
-        <p:style>
-          <a:lnRef idx="2">
-            <a:schemeClr val="accent1"/>
-          </a:lnRef>
-          <a:fillRef idx="0">
-            <a:schemeClr val="accent1"/>
-          </a:fillRef>
-          <a:effectRef idx="1">
-            <a:schemeClr val="accent1"/>
-          </a:effectRef>
-          <a:fontRef idx="minor">
-            <a:schemeClr val="tx1"/>
-          </a:fontRef>
-        </p:style>
-      </p:cxnSp>
-      <p:sp>
-        <p:nvSpPr>
-          <p:cNvPr id="17" name="Bogen 16">
-            <a:extLst>
-              <a:ext uri="{FF2B5EF4-FFF2-40B4-BE49-F238E27FC236}">
-                <a16:creationId xmlns:a16="http://schemas.microsoft.com/office/drawing/2014/main" id="{BD4AFE16-EE88-49B0-7283-2D8E21D33ED7}"/>
-              </a:ext>
-            </a:extLst>
-          </p:cNvPr>
-          <p:cNvSpPr/>
-          <p:nvPr/>
-        </p:nvSpPr>
-        <p:spPr>
-          <a:xfrm>
-            <a:off x="324113" y="1254120"/>
-            <a:ext cx="669280" cy="669278"/>
-          </a:xfrm>
-          <a:prstGeom prst="arc">
-            <a:avLst>
-              <a:gd name="adj1" fmla="val 11292003"/>
-              <a:gd name="adj2" fmla="val 12806432"/>
-            </a:avLst>
-          </a:prstGeom>
-          <a:ln w="9525" cap="rnd">
-            <a:solidFill>
-              <a:schemeClr val="tx1"/>
-            </a:solidFill>
-            <a:round/>
-            <a:headEnd type="triangle" w="sm" len="sm"/>
-            <a:tailEnd w="sm" len="sm"/>
-          </a:ln>
-        </p:spPr>
-        <p:style>
-          <a:lnRef idx="2">
-            <a:schemeClr val="accent1"/>
-          </a:lnRef>
-          <a:fillRef idx="0">
-            <a:schemeClr val="accent1"/>
-          </a:fillRef>
-          <a:effectRef idx="1">
-            <a:schemeClr val="accent1"/>
-          </a:effectRef>
-          <a:fontRef idx="minor">
-            <a:schemeClr val="tx1"/>
-          </a:fontRef>
-        </p:style>
-        <p:txBody>
-          <a:bodyPr rtlCol="0" anchor="ctr"/>
-          <a:lstStyle/>
-          <a:p>
-            <a:pPr algn="ctr"/>
-            <a:endParaRPr lang="de-DE" sz="800" dirty="0"/>
-          </a:p>
-        </p:txBody>
-      </p:sp>
-      <p:sp>
-        <p:nvSpPr>
-          <p:cNvPr id="18" name="Bogen 17">
-            <a:extLst>
-              <a:ext uri="{FF2B5EF4-FFF2-40B4-BE49-F238E27FC236}">
-                <a16:creationId xmlns:a16="http://schemas.microsoft.com/office/drawing/2014/main" id="{8ABA536B-D52F-236B-485F-F221CCDF5EDC}"/>
-              </a:ext>
-            </a:extLst>
-          </p:cNvPr>
-          <p:cNvSpPr/>
-          <p:nvPr/>
-        </p:nvSpPr>
-        <p:spPr>
-          <a:xfrm>
-            <a:off x="324113" y="1254120"/>
-            <a:ext cx="669280" cy="669278"/>
-          </a:xfrm>
-          <a:prstGeom prst="arc">
-            <a:avLst>
-              <a:gd name="adj1" fmla="val 9219348"/>
-              <a:gd name="adj2" fmla="val 10439424"/>
-            </a:avLst>
-          </a:prstGeom>
-          <a:ln w="9525" cap="rnd">
-            <a:solidFill>
-              <a:schemeClr val="tx1"/>
-            </a:solidFill>
-            <a:round/>
-            <a:headEnd type="none" w="sm" len="sm"/>
-            <a:tailEnd type="triangle" w="sm" len="sm"/>
-          </a:ln>
-        </p:spPr>
-        <p:style>
-          <a:lnRef idx="2">
-            <a:schemeClr val="accent1"/>
-          </a:lnRef>
-          <a:fillRef idx="0">
-            <a:schemeClr val="accent1"/>
-          </a:fillRef>
-          <a:effectRef idx="1">
-            <a:schemeClr val="accent1"/>
-          </a:effectRef>
-          <a:fontRef idx="minor">
-            <a:schemeClr val="tx1"/>
-          </a:fontRef>
-        </p:style>
-        <p:txBody>
-          <a:bodyPr rtlCol="0" anchor="ctr"/>
-          <a:lstStyle/>
-          <a:p>
-            <a:pPr algn="ctr"/>
-            <a:endParaRPr lang="de-DE" sz="800" dirty="0"/>
-          </a:p>
-        </p:txBody>
-      </p:sp>
-      <p:sp>
-        <p:nvSpPr>
-          <p:cNvPr id="19" name="Bogen 18">
-            <a:extLst>
-              <a:ext uri="{FF2B5EF4-FFF2-40B4-BE49-F238E27FC236}">
-                <a16:creationId xmlns:a16="http://schemas.microsoft.com/office/drawing/2014/main" id="{7C66FEAD-9F53-26D8-FEEA-3D350381C44A}"/>
-              </a:ext>
-            </a:extLst>
-          </p:cNvPr>
-          <p:cNvSpPr/>
-          <p:nvPr/>
-        </p:nvSpPr>
-        <p:spPr>
-          <a:xfrm>
-            <a:off x="324113" y="1254120"/>
-            <a:ext cx="669280" cy="669278"/>
-          </a:xfrm>
-          <a:prstGeom prst="arc">
-            <a:avLst>
-              <a:gd name="adj1" fmla="val 9980127"/>
-              <a:gd name="adj2" fmla="val 11586429"/>
-            </a:avLst>
-          </a:prstGeom>
-          <a:ln w="9525" cap="rnd">
-            <a:solidFill>
-              <a:schemeClr val="tx1"/>
-            </a:solidFill>
-            <a:round/>
-            <a:headEnd type="none" w="sm" len="sm"/>
-            <a:tailEnd w="sm" len="sm"/>
-          </a:ln>
-        </p:spPr>
-        <p:style>
-          <a:lnRef idx="2">
-            <a:schemeClr val="accent1"/>
-          </a:lnRef>
-          <a:fillRef idx="0">
-            <a:schemeClr val="accent1"/>
-          </a:fillRef>
-          <a:effectRef idx="1">
-            <a:schemeClr val="accent1"/>
-          </a:effectRef>
-          <a:fontRef idx="minor">
-            <a:schemeClr val="tx1"/>
-          </a:fontRef>
-        </p:style>
-        <p:txBody>
-          <a:bodyPr rtlCol="0" anchor="ctr"/>
-          <a:lstStyle/>
-          <a:p>
-            <a:pPr algn="ctr"/>
-            <a:endParaRPr lang="de-DE" sz="800" dirty="0"/>
-          </a:p>
-        </p:txBody>
-      </p:sp>
-      <p:sp>
-        <p:nvSpPr>
-          <p:cNvPr id="21" name="Textfeld 20">
-            <a:extLst>
-              <a:ext uri="{FF2B5EF4-FFF2-40B4-BE49-F238E27FC236}">
-                <a16:creationId xmlns:a16="http://schemas.microsoft.com/office/drawing/2014/main" id="{C7E5661A-1D70-EAFA-6474-AEB0D376F705}"/>
-              </a:ext>
-            </a:extLst>
-          </p:cNvPr>
-          <p:cNvSpPr txBox="1"/>
-          <p:nvPr/>
-        </p:nvSpPr>
-        <p:spPr>
-          <a:xfrm>
-            <a:off x="24404" y="1321553"/>
-            <a:ext cx="450936" cy="215444"/>
-          </a:xfrm>
-          <a:prstGeom prst="rect">
-            <a:avLst/>
-          </a:prstGeom>
-          <a:noFill/>
-        </p:spPr>
-        <p:txBody>
-          <a:bodyPr wrap="square" rtlCol="0" anchor="ctr">
-            <a:spAutoFit/>
-          </a:bodyPr>
-          <a:lstStyle/>
-          <a:p>
-            <a:pPr algn="ctr"/>
-            <a:r>
-              <a:rPr lang="de-DE" sz="800" i="1" dirty="0">
-                <a:latin typeface="Latin Modern Math" panose="02000503000000000000" pitchFamily="50" charset="0"/>
-                <a:ea typeface="Latin Modern Math" panose="02000503000000000000" pitchFamily="50" charset="0"/>
-                <a:cs typeface="CMU Serif" panose="02000603000000000000" pitchFamily="2" charset="0"/>
-              </a:rPr>
-              <a:t>α</a:t>
-            </a:r>
-          </a:p>
-        </p:txBody>
-      </p:sp>
-      <p:cxnSp>
-        <p:nvCxnSpPr>
-          <p:cNvPr id="23" name="Gerade Verbindung mit Pfeil 22">
-            <a:extLst>
-              <a:ext uri="{FF2B5EF4-FFF2-40B4-BE49-F238E27FC236}">
-                <a16:creationId xmlns:a16="http://schemas.microsoft.com/office/drawing/2014/main" id="{ECBF27D5-844B-1F43-E501-8A1D17226679}"/>
-              </a:ext>
-            </a:extLst>
-          </p:cNvPr>
-          <p:cNvCxnSpPr>
-            <a:cxnSpLocks/>
-          </p:cNvCxnSpPr>
-          <p:nvPr/>
-        </p:nvCxnSpPr>
-        <p:spPr>
-          <a:xfrm flipV="1">
-            <a:off x="863757" y="988982"/>
-            <a:ext cx="0" cy="632473"/>
-          </a:xfrm>
-          <a:prstGeom prst="straightConnector1">
-            <a:avLst/>
-          </a:prstGeom>
-          <a:ln w="15875" cap="rnd">
-            <a:solidFill>
-              <a:schemeClr val="accent3"/>
-            </a:solidFill>
-            <a:round/>
-            <a:headEnd type="none" w="sm" len="sm"/>
-            <a:tailEnd type="triangle" w="med" len="med"/>
-          </a:ln>
-        </p:spPr>
-        <p:style>
-          <a:lnRef idx="2">
-            <a:schemeClr val="accent1"/>
-          </a:lnRef>
-          <a:fillRef idx="0">
-            <a:schemeClr val="accent1"/>
-          </a:fillRef>
-          <a:effectRef idx="1">
-            <a:schemeClr val="accent1"/>
-          </a:effectRef>
-          <a:fontRef idx="minor">
-            <a:schemeClr val="tx1"/>
-          </a:fontRef>
-        </p:style>
-      </p:cxnSp>
-      <p:sp>
-        <p:nvSpPr>
-          <p:cNvPr id="26" name="Textfeld 25">
-            <a:extLst>
-              <a:ext uri="{FF2B5EF4-FFF2-40B4-BE49-F238E27FC236}">
-                <a16:creationId xmlns:a16="http://schemas.microsoft.com/office/drawing/2014/main" id="{1DD59D24-6641-A34B-4AB4-47CCAE8543DF}"/>
-              </a:ext>
-            </a:extLst>
-          </p:cNvPr>
-          <p:cNvSpPr txBox="1"/>
-          <p:nvPr/>
-        </p:nvSpPr>
-        <p:spPr>
-          <a:xfrm>
-            <a:off x="773702" y="908975"/>
-            <a:ext cx="450936" cy="215444"/>
-          </a:xfrm>
-          <a:prstGeom prst="rect">
-            <a:avLst/>
-          </a:prstGeom>
-          <a:noFill/>
-        </p:spPr>
-        <p:txBody>
-          <a:bodyPr wrap="square" rtlCol="0" anchor="ctr">
-            <a:spAutoFit/>
-          </a:bodyPr>
-          <a:lstStyle/>
-          <a:p>
-            <a:pPr algn="ctr"/>
-            <a:r>
-              <a:rPr lang="de-DE" sz="800" i="1" dirty="0">
-                <a:solidFill>
-                  <a:schemeClr val="accent3"/>
-                </a:solidFill>
-                <a:latin typeface="CMU Serif" panose="02000603000000000000" pitchFamily="2" charset="0"/>
-                <a:ea typeface="CMU Serif" panose="02000603000000000000" pitchFamily="2" charset="0"/>
-                <a:cs typeface="CMU Serif" panose="02000603000000000000" pitchFamily="2" charset="0"/>
-              </a:rPr>
-              <a:t>A</a:t>
-            </a:r>
-            <a:r>
-              <a:rPr lang="de-DE" sz="800" baseline="-25000" dirty="0">
-                <a:solidFill>
-                  <a:schemeClr val="accent3"/>
-                </a:solidFill>
-                <a:latin typeface="CMU Serif" panose="02000603000000000000" pitchFamily="2" charset="0"/>
-                <a:ea typeface="CMU Serif" panose="02000603000000000000" pitchFamily="2" charset="0"/>
-                <a:cs typeface="CMU Serif" panose="02000603000000000000" pitchFamily="2" charset="0"/>
-              </a:rPr>
-              <a:t>F</a:t>
-            </a:r>
-          </a:p>
-        </p:txBody>
-      </p:sp>
-      <p:grpSp>
-        <p:nvGrpSpPr>
-          <p:cNvPr id="27" name="Gruppieren 26">
-            <a:extLst>
-              <a:ext uri="{FF2B5EF4-FFF2-40B4-BE49-F238E27FC236}">
-                <a16:creationId xmlns:a16="http://schemas.microsoft.com/office/drawing/2014/main" id="{342B5DA0-B165-08EE-0B30-33BA952E86EB}"/>
-              </a:ext>
-            </a:extLst>
-          </p:cNvPr>
-          <p:cNvGrpSpPr/>
-          <p:nvPr/>
-        </p:nvGrpSpPr>
-        <p:grpSpPr>
-          <a:xfrm rot="20192606">
-            <a:off x="2821559" y="1562534"/>
-            <a:ext cx="527683" cy="117842"/>
-            <a:chOff x="401400" y="1422760"/>
-            <a:chExt cx="1101645" cy="246020"/>
-          </a:xfrm>
-        </p:grpSpPr>
-        <p:sp>
-          <p:nvSpPr>
-            <p:cNvPr id="28" name="Freihandform: Form 27">
-              <a:extLst>
-                <a:ext uri="{FF2B5EF4-FFF2-40B4-BE49-F238E27FC236}">
-                  <a16:creationId xmlns:a16="http://schemas.microsoft.com/office/drawing/2014/main" id="{490BA162-0A45-C25B-81F5-6C54DC1E4182}"/>
-                </a:ext>
-              </a:extLst>
-            </p:cNvPr>
-            <p:cNvSpPr/>
-            <p:nvPr/>
-          </p:nvSpPr>
-          <p:spPr>
-            <a:xfrm>
-              <a:off x="403860" y="1422760"/>
-              <a:ext cx="1099185" cy="246020"/>
-            </a:xfrm>
-            <a:custGeom>
-              <a:avLst/>
-              <a:gdLst>
-                <a:gd name="csX0" fmla="*/ 0 w 1099185"/>
-                <a:gd name="csY0" fmla="*/ 74523 h 259308"/>
-                <a:gd name="csX1" fmla="*/ 259080 w 1099185"/>
-                <a:gd name="csY1" fmla="*/ 9753 h 259308"/>
-                <a:gd name="csX2" fmla="*/ 1099185 w 1099185"/>
-                <a:gd name="csY2" fmla="*/ 259308 h 259308"/>
-                <a:gd name="csX0" fmla="*/ 0 w 1099185"/>
-                <a:gd name="csY0" fmla="*/ 76197 h 260982"/>
-                <a:gd name="csX1" fmla="*/ 226695 w 1099185"/>
-                <a:gd name="csY1" fmla="*/ 9522 h 260982"/>
-                <a:gd name="csX2" fmla="*/ 1099185 w 1099185"/>
-                <a:gd name="csY2" fmla="*/ 260982 h 260982"/>
-                <a:gd name="csX0" fmla="*/ 0 w 1099185"/>
-                <a:gd name="csY0" fmla="*/ 68602 h 253387"/>
-                <a:gd name="csX1" fmla="*/ 226695 w 1099185"/>
-                <a:gd name="csY1" fmla="*/ 1927 h 253387"/>
-                <a:gd name="csX2" fmla="*/ 1099185 w 1099185"/>
-                <a:gd name="csY2" fmla="*/ 253387 h 253387"/>
-                <a:gd name="csX0" fmla="*/ 0 w 1099185"/>
-                <a:gd name="csY0" fmla="*/ 56168 h 240953"/>
-                <a:gd name="csX1" fmla="*/ 320040 w 1099185"/>
-                <a:gd name="csY1" fmla="*/ 2828 h 240953"/>
-                <a:gd name="csX2" fmla="*/ 1099185 w 1099185"/>
-                <a:gd name="csY2" fmla="*/ 240953 h 240953"/>
-                <a:gd name="csX0" fmla="*/ 0 w 1099185"/>
-                <a:gd name="csY0" fmla="*/ 58433 h 243218"/>
-                <a:gd name="csX1" fmla="*/ 320040 w 1099185"/>
-                <a:gd name="csY1" fmla="*/ 5093 h 243218"/>
-                <a:gd name="csX2" fmla="*/ 1099185 w 1099185"/>
-                <a:gd name="csY2" fmla="*/ 243218 h 243218"/>
-                <a:gd name="csX0" fmla="*/ 0 w 1099185"/>
-                <a:gd name="csY0" fmla="*/ 56534 h 241319"/>
-                <a:gd name="csX1" fmla="*/ 320040 w 1099185"/>
-                <a:gd name="csY1" fmla="*/ 3194 h 241319"/>
-                <a:gd name="csX2" fmla="*/ 1099185 w 1099185"/>
-                <a:gd name="csY2" fmla="*/ 241319 h 241319"/>
-                <a:gd name="csX0" fmla="*/ 0 w 1099185"/>
-                <a:gd name="csY0" fmla="*/ 61235 h 246020"/>
-                <a:gd name="csX1" fmla="*/ 320040 w 1099185"/>
-                <a:gd name="csY1" fmla="*/ 7895 h 246020"/>
-                <a:gd name="csX2" fmla="*/ 1099185 w 1099185"/>
-                <a:gd name="csY2" fmla="*/ 246020 h 246020"/>
-                <a:gd name="csX0" fmla="*/ 0 w 1099185"/>
-                <a:gd name="csY0" fmla="*/ 61235 h 246020"/>
-                <a:gd name="csX1" fmla="*/ 320040 w 1099185"/>
-                <a:gd name="csY1" fmla="*/ 7895 h 246020"/>
-                <a:gd name="csX2" fmla="*/ 1099185 w 1099185"/>
-                <a:gd name="csY2" fmla="*/ 246020 h 246020"/>
-              </a:gdLst>
-              <a:ahLst/>
-              <a:cxnLst>
-                <a:cxn ang="0">
-                  <a:pos x="csX0" y="csY0"/>
-                </a:cxn>
-                <a:cxn ang="0">
-                  <a:pos x="csX1" y="csY1"/>
-                </a:cxn>
-                <a:cxn ang="0">
-                  <a:pos x="csX2" y="csY2"/>
-                </a:cxn>
-              </a:cxnLst>
-              <a:rect l="l" t="t" r="r" b="b"/>
-              <a:pathLst>
-                <a:path w="1099185" h="246020">
-                  <a:moveTo>
-                    <a:pt x="0" y="61235"/>
-                  </a:moveTo>
-                  <a:cubicBezTo>
-                    <a:pt x="11271" y="9641"/>
-                    <a:pt x="110172" y="-13378"/>
-                    <a:pt x="320040" y="7895"/>
-                  </a:cubicBezTo>
-                  <a:cubicBezTo>
-                    <a:pt x="529908" y="29168"/>
-                    <a:pt x="782161" y="111876"/>
-                    <a:pt x="1099185" y="246020"/>
-                  </a:cubicBezTo>
-                </a:path>
-              </a:pathLst>
-            </a:custGeom>
-            <a:noFill/>
-            <a:ln w="9525" cap="rnd">
-              <a:solidFill>
-                <a:schemeClr val="tx1"/>
-              </a:solidFill>
-              <a:round/>
-            </a:ln>
-          </p:spPr>
-          <p:style>
-            <a:lnRef idx="2">
-              <a:schemeClr val="accent1">
-                <a:shade val="15000"/>
-              </a:schemeClr>
-            </a:lnRef>
-            <a:fillRef idx="1">
-              <a:schemeClr val="accent1"/>
-            </a:fillRef>
-            <a:effectRef idx="0">
-              <a:schemeClr val="accent1"/>
-            </a:effectRef>
-            <a:fontRef idx="minor">
-              <a:schemeClr val="lt1"/>
-            </a:fontRef>
-          </p:style>
-          <p:txBody>
-            <a:bodyPr rtlCol="0" anchor="ctr"/>
-            <a:lstStyle/>
-            <a:p>
-              <a:pPr algn="ctr"/>
-              <a:endParaRPr lang="de-DE" sz="800" dirty="0"/>
-            </a:p>
-          </p:txBody>
-        </p:sp>
-        <p:sp>
-          <p:nvSpPr>
-            <p:cNvPr id="29" name="Freihandform: Form 28">
-              <a:extLst>
-                <a:ext uri="{FF2B5EF4-FFF2-40B4-BE49-F238E27FC236}">
-                  <a16:creationId xmlns:a16="http://schemas.microsoft.com/office/drawing/2014/main" id="{86FD859F-4BB5-7FFF-F929-7ED0C423CB9A}"/>
-                </a:ext>
-              </a:extLst>
-            </p:cNvPr>
-            <p:cNvSpPr/>
-            <p:nvPr/>
-          </p:nvSpPr>
-          <p:spPr>
-            <a:xfrm>
-              <a:off x="401400" y="1482090"/>
-              <a:ext cx="1097835" cy="186690"/>
-            </a:xfrm>
-            <a:custGeom>
-              <a:avLst/>
-              <a:gdLst>
-                <a:gd name="csX0" fmla="*/ 3248 w 1092908"/>
-                <a:gd name="csY0" fmla="*/ 0 h 186690"/>
-                <a:gd name="csX1" fmla="*/ 168983 w 1092908"/>
-                <a:gd name="csY1" fmla="*/ 140970 h 186690"/>
-                <a:gd name="csX2" fmla="*/ 1092908 w 1092908"/>
-                <a:gd name="csY2" fmla="*/ 186690 h 186690"/>
-                <a:gd name="csX0" fmla="*/ 1906 w 1091566"/>
-                <a:gd name="csY0" fmla="*/ 0 h 186690"/>
-                <a:gd name="csX1" fmla="*/ 184689 w 1091566"/>
-                <a:gd name="csY1" fmla="*/ 133350 h 186690"/>
-                <a:gd name="csX2" fmla="*/ 1091566 w 1091566"/>
-                <a:gd name="csY2" fmla="*/ 186690 h 186690"/>
-                <a:gd name="csX0" fmla="*/ 1906 w 1091566"/>
-                <a:gd name="csY0" fmla="*/ 0 h 186690"/>
-                <a:gd name="csX1" fmla="*/ 184689 w 1091566"/>
-                <a:gd name="csY1" fmla="*/ 133350 h 186690"/>
-                <a:gd name="csX2" fmla="*/ 1091566 w 1091566"/>
-                <a:gd name="csY2" fmla="*/ 186690 h 186690"/>
-              </a:gdLst>
-              <a:ahLst/>
-              <a:cxnLst>
-                <a:cxn ang="0">
-                  <a:pos x="csX0" y="csY0"/>
-                </a:cxn>
-                <a:cxn ang="0">
-                  <a:pos x="csX1" y="csY1"/>
-                </a:cxn>
-                <a:cxn ang="0">
-                  <a:pos x="csX2" y="csY2"/>
-                </a:cxn>
-              </a:cxnLst>
-              <a:rect l="l" t="t" r="r" b="b"/>
-              <a:pathLst>
-                <a:path w="1091566" h="186690">
-                  <a:moveTo>
-                    <a:pt x="1906" y="0"/>
-                  </a:moveTo>
-                  <a:cubicBezTo>
-                    <a:pt x="-6032" y="54927"/>
-                    <a:pt x="3079" y="102235"/>
-                    <a:pt x="184689" y="133350"/>
-                  </a:cubicBezTo>
-                  <a:cubicBezTo>
-                    <a:pt x="366299" y="164465"/>
-                    <a:pt x="665478" y="181292"/>
-                    <a:pt x="1091566" y="186690"/>
-                  </a:cubicBezTo>
-                </a:path>
-              </a:pathLst>
-            </a:custGeom>
-            <a:noFill/>
-            <a:ln w="9525" cap="rnd">
-              <a:solidFill>
-                <a:schemeClr val="tx1"/>
-              </a:solidFill>
-              <a:round/>
-            </a:ln>
-          </p:spPr>
-          <p:style>
-            <a:lnRef idx="2">
-              <a:schemeClr val="accent1">
-                <a:shade val="15000"/>
-              </a:schemeClr>
-            </a:lnRef>
-            <a:fillRef idx="1">
-              <a:schemeClr val="accent1"/>
-            </a:fillRef>
-            <a:effectRef idx="0">
-              <a:schemeClr val="accent1"/>
-            </a:effectRef>
-            <a:fontRef idx="minor">
-              <a:schemeClr val="lt1"/>
-            </a:fontRef>
-          </p:style>
-          <p:txBody>
-            <a:bodyPr rtlCol="0" anchor="ctr"/>
-            <a:lstStyle/>
-            <a:p>
-              <a:pPr algn="ctr"/>
-              <a:endParaRPr lang="de-DE" sz="800" dirty="0"/>
-            </a:p>
-          </p:txBody>
-        </p:sp>
-      </p:grpSp>
-      <p:cxnSp>
-        <p:nvCxnSpPr>
-          <p:cNvPr id="30" name="Gerader Verbinder 29">
-            <a:extLst>
-              <a:ext uri="{FF2B5EF4-FFF2-40B4-BE49-F238E27FC236}">
-                <a16:creationId xmlns:a16="http://schemas.microsoft.com/office/drawing/2014/main" id="{5C3EB844-CBFC-92C4-6CF1-0AB56FEF6C13}"/>
-              </a:ext>
-            </a:extLst>
-          </p:cNvPr>
-          <p:cNvCxnSpPr>
-            <a:cxnSpLocks/>
-          </p:cNvCxnSpPr>
-          <p:nvPr/>
-        </p:nvCxnSpPr>
-        <p:spPr>
-          <a:xfrm flipH="1">
-            <a:off x="2413887" y="1539053"/>
-            <a:ext cx="1055370" cy="271950"/>
-          </a:xfrm>
-          <a:prstGeom prst="line">
-            <a:avLst/>
-          </a:prstGeom>
-          <a:ln w="6350" cap="rnd">
-            <a:solidFill>
-              <a:schemeClr val="tx1"/>
-            </a:solidFill>
-            <a:prstDash val="sysDash"/>
-            <a:round/>
-          </a:ln>
-        </p:spPr>
-        <p:style>
-          <a:lnRef idx="2">
-            <a:schemeClr val="accent1"/>
-          </a:lnRef>
-          <a:fillRef idx="0">
-            <a:schemeClr val="accent1"/>
-          </a:fillRef>
-          <a:effectRef idx="1">
-            <a:schemeClr val="accent1"/>
-          </a:effectRef>
-          <a:fontRef idx="minor">
-            <a:schemeClr val="tx1"/>
-          </a:fontRef>
-        </p:style>
-      </p:cxnSp>
-      <p:cxnSp>
-        <p:nvCxnSpPr>
-          <p:cNvPr id="35" name="Gerader Verbinder 34">
-            <a:extLst>
-              <a:ext uri="{FF2B5EF4-FFF2-40B4-BE49-F238E27FC236}">
-                <a16:creationId xmlns:a16="http://schemas.microsoft.com/office/drawing/2014/main" id="{F35C4CC1-AF50-7238-C2CA-570D5CCADB61}"/>
-              </a:ext>
-            </a:extLst>
-          </p:cNvPr>
-          <p:cNvCxnSpPr>
-            <a:cxnSpLocks/>
-          </p:cNvCxnSpPr>
-          <p:nvPr/>
-        </p:nvCxnSpPr>
-        <p:spPr>
-          <a:xfrm flipH="1" flipV="1">
-            <a:off x="2421507" y="1565258"/>
-            <a:ext cx="550545" cy="99540"/>
-          </a:xfrm>
-          <a:prstGeom prst="line">
-            <a:avLst/>
-          </a:prstGeom>
-          <a:ln w="6350" cap="rnd">
-            <a:solidFill>
-              <a:schemeClr val="tx1"/>
-            </a:solidFill>
-            <a:prstDash val="sysDash"/>
-            <a:round/>
-          </a:ln>
-        </p:spPr>
-        <p:style>
-          <a:lnRef idx="2">
-            <a:schemeClr val="accent1"/>
-          </a:lnRef>
-          <a:fillRef idx="0">
-            <a:schemeClr val="accent1"/>
-          </a:fillRef>
-          <a:effectRef idx="1">
-            <a:schemeClr val="accent1"/>
-          </a:effectRef>
-          <a:fontRef idx="minor">
-            <a:schemeClr val="tx1"/>
-          </a:fontRef>
-        </p:style>
-      </p:cxnSp>
-      <p:cxnSp>
-        <p:nvCxnSpPr>
-          <p:cNvPr id="39" name="Gerade Verbindung mit Pfeil 38">
-            <a:extLst>
-              <a:ext uri="{FF2B5EF4-FFF2-40B4-BE49-F238E27FC236}">
-                <a16:creationId xmlns:a16="http://schemas.microsoft.com/office/drawing/2014/main" id="{C7B18244-F236-FB86-F64E-33115B88BC2D}"/>
-              </a:ext>
-            </a:extLst>
-          </p:cNvPr>
-          <p:cNvCxnSpPr>
-            <a:cxnSpLocks/>
-          </p:cNvCxnSpPr>
-          <p:nvPr/>
-        </p:nvCxnSpPr>
-        <p:spPr>
-          <a:xfrm flipV="1">
-            <a:off x="2972052" y="1126142"/>
-            <a:ext cx="0" cy="526762"/>
-          </a:xfrm>
-          <a:prstGeom prst="straightConnector1">
-            <a:avLst/>
-          </a:prstGeom>
-          <a:ln w="15875" cap="rnd">
-            <a:solidFill>
-              <a:schemeClr val="accent3"/>
-            </a:solidFill>
-            <a:round/>
-            <a:headEnd type="none" w="sm" len="sm"/>
-            <a:tailEnd type="triangle" w="med" len="med"/>
-          </a:ln>
-        </p:spPr>
-        <p:style>
-          <a:lnRef idx="2">
-            <a:schemeClr val="accent1"/>
-          </a:lnRef>
-          <a:fillRef idx="0">
-            <a:schemeClr val="accent1"/>
-          </a:fillRef>
-          <a:effectRef idx="1">
-            <a:schemeClr val="accent1"/>
-          </a:effectRef>
-          <a:fontRef idx="minor">
-            <a:schemeClr val="tx1"/>
-          </a:fontRef>
-        </p:style>
-      </p:cxnSp>
-      <p:sp>
-        <p:nvSpPr>
-          <p:cNvPr id="42" name="Textfeld 41">
-            <a:extLst>
-              <a:ext uri="{FF2B5EF4-FFF2-40B4-BE49-F238E27FC236}">
-                <a16:creationId xmlns:a16="http://schemas.microsoft.com/office/drawing/2014/main" id="{53441D75-F72E-FA97-FAF8-9CF451F1C582}"/>
-              </a:ext>
-            </a:extLst>
-          </p:cNvPr>
-          <p:cNvSpPr txBox="1"/>
-          <p:nvPr/>
-        </p:nvSpPr>
-        <p:spPr>
-          <a:xfrm>
-            <a:off x="2888757" y="1048476"/>
-            <a:ext cx="450936" cy="215444"/>
-          </a:xfrm>
-          <a:prstGeom prst="rect">
-            <a:avLst/>
-          </a:prstGeom>
-          <a:noFill/>
-        </p:spPr>
-        <p:txBody>
-          <a:bodyPr wrap="square" rtlCol="0" anchor="ctr">
-            <a:spAutoFit/>
-          </a:bodyPr>
-          <a:lstStyle/>
-          <a:p>
-            <a:pPr algn="ctr"/>
-            <a:r>
-              <a:rPr lang="de-DE" sz="800" i="1" dirty="0">
-                <a:solidFill>
-                  <a:schemeClr val="accent3"/>
-                </a:solidFill>
-                <a:latin typeface="CMU Serif" panose="02000603000000000000" pitchFamily="2" charset="0"/>
-                <a:ea typeface="CMU Serif" panose="02000603000000000000" pitchFamily="2" charset="0"/>
-                <a:cs typeface="CMU Serif" panose="02000603000000000000" pitchFamily="2" charset="0"/>
-              </a:rPr>
-              <a:t>A</a:t>
-            </a:r>
-            <a:r>
-              <a:rPr lang="de-DE" sz="800" baseline="-25000" dirty="0">
-                <a:solidFill>
-                  <a:schemeClr val="accent3"/>
-                </a:solidFill>
-                <a:latin typeface="CMU Serif" panose="02000603000000000000" pitchFamily="2" charset="0"/>
-                <a:ea typeface="CMU Serif" panose="02000603000000000000" pitchFamily="2" charset="0"/>
-                <a:cs typeface="CMU Serif" panose="02000603000000000000" pitchFamily="2" charset="0"/>
-              </a:rPr>
-              <a:t>H</a:t>
-            </a:r>
-          </a:p>
-        </p:txBody>
-      </p:sp>
-      <p:sp>
-        <p:nvSpPr>
-          <p:cNvPr id="44" name="Textfeld 43">
-            <a:extLst>
-              <a:ext uri="{FF2B5EF4-FFF2-40B4-BE49-F238E27FC236}">
-                <a16:creationId xmlns:a16="http://schemas.microsoft.com/office/drawing/2014/main" id="{53426C88-2461-FFA4-84B5-D4073970F249}"/>
-              </a:ext>
-            </a:extLst>
-          </p:cNvPr>
-          <p:cNvSpPr txBox="1"/>
-          <p:nvPr/>
-        </p:nvSpPr>
-        <p:spPr>
-          <a:xfrm>
-            <a:off x="1755094" y="1047916"/>
-            <a:ext cx="295428" cy="215444"/>
-          </a:xfrm>
-          <a:prstGeom prst="rect">
-            <a:avLst/>
-          </a:prstGeom>
-          <a:noFill/>
-        </p:spPr>
-        <p:txBody>
-          <a:bodyPr wrap="square" rtlCol="0" anchor="ctr">
-            <a:spAutoFit/>
-          </a:bodyPr>
-          <a:lstStyle/>
-          <a:p>
-            <a:pPr algn="ctr"/>
-            <a:r>
-              <a:rPr lang="de-DE" sz="800" i="1" dirty="0">
-                <a:latin typeface="CMU Serif" panose="02000603000000000000" pitchFamily="2" charset="0"/>
-                <a:ea typeface="CMU Serif" panose="02000603000000000000" pitchFamily="2" charset="0"/>
-                <a:cs typeface="CMU Serif" panose="02000603000000000000" pitchFamily="2" charset="0"/>
-              </a:rPr>
-              <a:t>r</a:t>
-            </a:r>
-            <a:r>
-              <a:rPr lang="de-DE" sz="800" baseline="-25000" dirty="0">
-                <a:latin typeface="CMU Serif" panose="02000603000000000000" pitchFamily="2" charset="0"/>
-                <a:ea typeface="CMU Serif" panose="02000603000000000000" pitchFamily="2" charset="0"/>
-                <a:cs typeface="CMU Serif" panose="02000603000000000000" pitchFamily="2" charset="0"/>
-              </a:rPr>
-              <a:t>0</a:t>
-            </a:r>
-          </a:p>
-        </p:txBody>
-      </p:sp>
-      <p:grpSp>
-        <p:nvGrpSpPr>
-          <p:cNvPr id="49" name="Gruppieren 48">
-            <a:extLst>
-              <a:ext uri="{FF2B5EF4-FFF2-40B4-BE49-F238E27FC236}">
-                <a16:creationId xmlns:a16="http://schemas.microsoft.com/office/drawing/2014/main" id="{A3300799-40B5-FB3E-4CD3-AA66A3B1FFB3}"/>
-              </a:ext>
-            </a:extLst>
-          </p:cNvPr>
-          <p:cNvGrpSpPr/>
-          <p:nvPr/>
-        </p:nvGrpSpPr>
-        <p:grpSpPr>
-          <a:xfrm>
-            <a:off x="2535935" y="1221625"/>
-            <a:ext cx="872234" cy="878938"/>
-            <a:chOff x="2376174" y="1276909"/>
-            <a:chExt cx="669281" cy="674424"/>
-          </a:xfrm>
-        </p:grpSpPr>
-        <p:sp>
-          <p:nvSpPr>
-            <p:cNvPr id="46" name="Bogen 45">
-              <a:extLst>
-                <a:ext uri="{FF2B5EF4-FFF2-40B4-BE49-F238E27FC236}">
-                  <a16:creationId xmlns:a16="http://schemas.microsoft.com/office/drawing/2014/main" id="{470D47DC-6862-0535-172F-6FB879DE7BCC}"/>
-                </a:ext>
-              </a:extLst>
-            </p:cNvPr>
-            <p:cNvSpPr/>
-            <p:nvPr/>
-          </p:nvSpPr>
-          <p:spPr>
-            <a:xfrm>
-              <a:off x="2376175" y="1276909"/>
-              <a:ext cx="669280" cy="669278"/>
-            </a:xfrm>
-            <a:prstGeom prst="arc">
-              <a:avLst>
-                <a:gd name="adj1" fmla="val 11348918"/>
-                <a:gd name="adj2" fmla="val 12298312"/>
-              </a:avLst>
-            </a:prstGeom>
-            <a:ln w="9525" cap="rnd">
-              <a:solidFill>
-                <a:schemeClr val="tx1"/>
-              </a:solidFill>
-              <a:round/>
-              <a:headEnd type="triangle" w="sm" len="sm"/>
-              <a:tailEnd w="sm" len="sm"/>
-            </a:ln>
-          </p:spPr>
-          <p:style>
-            <a:lnRef idx="2">
-              <a:schemeClr val="accent1"/>
-            </a:lnRef>
-            <a:fillRef idx="0">
-              <a:schemeClr val="accent1"/>
-            </a:fillRef>
-            <a:effectRef idx="1">
-              <a:schemeClr val="accent1"/>
-            </a:effectRef>
-            <a:fontRef idx="minor">
-              <a:schemeClr val="tx1"/>
-            </a:fontRef>
-          </p:style>
-          <p:txBody>
-            <a:bodyPr rtlCol="0" anchor="ctr"/>
-            <a:lstStyle/>
-            <a:p>
-              <a:pPr algn="ctr"/>
-              <a:endParaRPr lang="de-DE" sz="800" dirty="0"/>
-            </a:p>
-          </p:txBody>
-        </p:sp>
-        <p:sp>
-          <p:nvSpPr>
-            <p:cNvPr id="47" name="Bogen 46">
-              <a:extLst>
-                <a:ext uri="{FF2B5EF4-FFF2-40B4-BE49-F238E27FC236}">
-                  <a16:creationId xmlns:a16="http://schemas.microsoft.com/office/drawing/2014/main" id="{2F5A6F87-37BA-6DA2-C8C7-8370AE44E0B9}"/>
-                </a:ext>
-              </a:extLst>
-            </p:cNvPr>
-            <p:cNvSpPr/>
-            <p:nvPr/>
-          </p:nvSpPr>
-          <p:spPr>
-            <a:xfrm>
-              <a:off x="2376174" y="1282055"/>
-              <a:ext cx="669280" cy="669278"/>
-            </a:xfrm>
-            <a:prstGeom prst="arc">
-              <a:avLst>
-                <a:gd name="adj1" fmla="val 9071079"/>
-                <a:gd name="adj2" fmla="val 9934287"/>
-              </a:avLst>
-            </a:prstGeom>
-            <a:ln w="9525" cap="rnd">
-              <a:solidFill>
-                <a:schemeClr val="tx1"/>
-              </a:solidFill>
-              <a:round/>
-              <a:headEnd type="none" w="sm" len="sm"/>
-              <a:tailEnd type="triangle" w="sm" len="sm"/>
-            </a:ln>
-          </p:spPr>
-          <p:style>
-            <a:lnRef idx="2">
-              <a:schemeClr val="accent1"/>
-            </a:lnRef>
-            <a:fillRef idx="0">
-              <a:schemeClr val="accent1"/>
-            </a:fillRef>
-            <a:effectRef idx="1">
-              <a:schemeClr val="accent1"/>
-            </a:effectRef>
-            <a:fontRef idx="minor">
-              <a:schemeClr val="tx1"/>
-            </a:fontRef>
-          </p:style>
-          <p:txBody>
-            <a:bodyPr rtlCol="0" anchor="ctr"/>
-            <a:lstStyle/>
-            <a:p>
-              <a:pPr algn="ctr"/>
-              <a:endParaRPr lang="de-DE" sz="800" dirty="0"/>
-            </a:p>
-          </p:txBody>
-        </p:sp>
-        <p:sp>
-          <p:nvSpPr>
-            <p:cNvPr id="48" name="Bogen 47">
-              <a:extLst>
-                <a:ext uri="{FF2B5EF4-FFF2-40B4-BE49-F238E27FC236}">
-                  <a16:creationId xmlns:a16="http://schemas.microsoft.com/office/drawing/2014/main" id="{16D0B117-EE4A-2467-8C23-863FEF5F428A}"/>
-                </a:ext>
-              </a:extLst>
-            </p:cNvPr>
-            <p:cNvSpPr/>
-            <p:nvPr/>
-          </p:nvSpPr>
-          <p:spPr>
-            <a:xfrm>
-              <a:off x="2376174" y="1282055"/>
-              <a:ext cx="669280" cy="669278"/>
-            </a:xfrm>
-            <a:prstGeom prst="arc">
-              <a:avLst>
-                <a:gd name="adj1" fmla="val 9695124"/>
-                <a:gd name="adj2" fmla="val 11586429"/>
-              </a:avLst>
-            </a:prstGeom>
-            <a:ln w="9525" cap="rnd">
-              <a:solidFill>
-                <a:schemeClr val="tx1"/>
-              </a:solidFill>
-              <a:round/>
-              <a:headEnd type="none" w="sm" len="sm"/>
-              <a:tailEnd w="sm" len="sm"/>
-            </a:ln>
-          </p:spPr>
-          <p:style>
-            <a:lnRef idx="2">
-              <a:schemeClr val="accent1"/>
-            </a:lnRef>
-            <a:fillRef idx="0">
-              <a:schemeClr val="accent1"/>
-            </a:fillRef>
-            <a:effectRef idx="1">
-              <a:schemeClr val="accent1"/>
-            </a:effectRef>
-            <a:fontRef idx="minor">
-              <a:schemeClr val="tx1"/>
-            </a:fontRef>
-          </p:style>
-          <p:txBody>
-            <a:bodyPr rtlCol="0" anchor="ctr"/>
-            <a:lstStyle/>
-            <a:p>
-              <a:pPr algn="ctr"/>
-              <a:endParaRPr lang="de-DE" sz="800" dirty="0"/>
-            </a:p>
-          </p:txBody>
-        </p:sp>
-      </p:grpSp>
-      <p:sp>
-        <p:nvSpPr>
-          <p:cNvPr id="50" name="Textfeld 49">
-            <a:extLst>
-              <a:ext uri="{FF2B5EF4-FFF2-40B4-BE49-F238E27FC236}">
-                <a16:creationId xmlns:a16="http://schemas.microsoft.com/office/drawing/2014/main" id="{ECFD9FCB-AA54-FD91-EE0D-F1DF1E938D10}"/>
-              </a:ext>
-            </a:extLst>
-          </p:cNvPr>
-          <p:cNvSpPr txBox="1"/>
-          <p:nvPr/>
-        </p:nvSpPr>
-        <p:spPr>
-          <a:xfrm>
-            <a:off x="2069081" y="1590163"/>
-            <a:ext cx="498896" cy="215444"/>
-          </a:xfrm>
-          <a:prstGeom prst="rect">
-            <a:avLst/>
-          </a:prstGeom>
-          <a:noFill/>
-        </p:spPr>
-        <p:txBody>
-          <a:bodyPr wrap="square" rtlCol="0" anchor="ctr">
-            <a:spAutoFit/>
-          </a:bodyPr>
-          <a:lstStyle/>
-          <a:p>
-            <a:pPr algn="ctr"/>
-            <a:r>
-              <a:rPr lang="de-DE" sz="800" dirty="0">
-                <a:latin typeface="Latin Modern Math" panose="02000503000000000000" pitchFamily="50" charset="0"/>
-                <a:ea typeface="Latin Modern Math" panose="02000503000000000000" pitchFamily="50" charset="0"/>
-                <a:cs typeface="CMU Serif" panose="02000603000000000000" pitchFamily="2" charset="0"/>
-              </a:rPr>
-              <a:t>−</a:t>
-            </a:r>
-            <a:r>
-              <a:rPr lang="de-DE" sz="800" i="1" dirty="0">
-                <a:latin typeface="Latin Modern Math" panose="02000503000000000000" pitchFamily="50" charset="0"/>
-                <a:ea typeface="Latin Modern Math" panose="02000503000000000000" pitchFamily="50" charset="0"/>
-                <a:cs typeface="CMU Serif" panose="02000603000000000000" pitchFamily="2" charset="0"/>
-              </a:rPr>
-              <a:t>ε</a:t>
-            </a:r>
-            <a:r>
-              <a:rPr lang="de-DE" sz="800" baseline="-25000" dirty="0">
-                <a:latin typeface="CMU Serif" panose="02000603000000000000" pitchFamily="2" charset="0"/>
-                <a:ea typeface="CMU Serif" panose="02000603000000000000" pitchFamily="2" charset="0"/>
-                <a:cs typeface="CMU Serif" panose="02000603000000000000" pitchFamily="2" charset="0"/>
-              </a:rPr>
-              <a:t>H0</a:t>
-            </a:r>
-          </a:p>
-        </p:txBody>
-      </p:sp>
-      <p:cxnSp>
-        <p:nvCxnSpPr>
-          <p:cNvPr id="55" name="Gerade Verbindung mit Pfeil 54">
-            <a:extLst>
-              <a:ext uri="{FF2B5EF4-FFF2-40B4-BE49-F238E27FC236}">
-                <a16:creationId xmlns:a16="http://schemas.microsoft.com/office/drawing/2014/main" id="{CDB78DE7-D0BC-1C7F-111D-7D9AB11A8289}"/>
-              </a:ext>
-            </a:extLst>
-          </p:cNvPr>
-          <p:cNvCxnSpPr>
-            <a:cxnSpLocks/>
-          </p:cNvCxnSpPr>
-          <p:nvPr/>
-        </p:nvCxnSpPr>
-        <p:spPr>
-          <a:xfrm>
-            <a:off x="1231185" y="1711221"/>
-            <a:ext cx="0" cy="984641"/>
-          </a:xfrm>
-          <a:prstGeom prst="straightConnector1">
-            <a:avLst/>
-          </a:prstGeom>
-          <a:ln w="15875" cap="rnd">
-            <a:solidFill>
-              <a:srgbClr val="C00000"/>
-            </a:solidFill>
-            <a:round/>
-            <a:headEnd type="none" w="sm" len="sm"/>
-            <a:tailEnd type="triangle" w="med" len="med"/>
-          </a:ln>
-        </p:spPr>
-        <p:style>
-          <a:lnRef idx="2">
-            <a:schemeClr val="accent1"/>
-          </a:lnRef>
-          <a:fillRef idx="0">
-            <a:schemeClr val="accent1"/>
-          </a:fillRef>
-          <a:effectRef idx="1">
-            <a:schemeClr val="accent1"/>
-          </a:effectRef>
-          <a:fontRef idx="minor">
-            <a:schemeClr val="tx1"/>
-          </a:fontRef>
-        </p:style>
-      </p:cxnSp>
-      <p:grpSp>
-        <p:nvGrpSpPr>
-          <p:cNvPr id="54" name="Gruppieren 53">
-            <a:extLst>
-              <a:ext uri="{FF2B5EF4-FFF2-40B4-BE49-F238E27FC236}">
-                <a16:creationId xmlns:a16="http://schemas.microsoft.com/office/drawing/2014/main" id="{D61F6E76-3148-7CB0-FFB3-430E3E6AA2F6}"/>
-              </a:ext>
-            </a:extLst>
-          </p:cNvPr>
-          <p:cNvGrpSpPr/>
-          <p:nvPr/>
-        </p:nvGrpSpPr>
-        <p:grpSpPr>
-          <a:xfrm>
-            <a:off x="1195185" y="1662429"/>
-            <a:ext cx="72673" cy="72000"/>
-            <a:chOff x="1110231" y="657130"/>
-            <a:chExt cx="112469" cy="113199"/>
-          </a:xfrm>
-        </p:grpSpPr>
-        <p:sp>
-          <p:nvSpPr>
-            <p:cNvPr id="51" name="Ellipse 50">
-              <a:extLst>
-                <a:ext uri="{FF2B5EF4-FFF2-40B4-BE49-F238E27FC236}">
-                  <a16:creationId xmlns:a16="http://schemas.microsoft.com/office/drawing/2014/main" id="{8CAF7C18-8F45-2394-32A2-854C83090F22}"/>
-                </a:ext>
-              </a:extLst>
-            </p:cNvPr>
-            <p:cNvSpPr/>
-            <p:nvPr/>
-          </p:nvSpPr>
-          <p:spPr>
-            <a:xfrm>
-              <a:off x="1113103" y="659519"/>
-              <a:ext cx="106650" cy="106650"/>
-            </a:xfrm>
-            <a:prstGeom prst="ellipse">
-              <a:avLst/>
-            </a:prstGeom>
-            <a:solidFill>
-              <a:schemeClr val="bg1"/>
-            </a:solidFill>
-            <a:ln w="6350">
-              <a:solidFill>
-                <a:schemeClr val="tx1"/>
-              </a:solidFill>
-            </a:ln>
-          </p:spPr>
-          <p:style>
-            <a:lnRef idx="2">
-              <a:schemeClr val="accent1">
-                <a:shade val="15000"/>
-              </a:schemeClr>
-            </a:lnRef>
-            <a:fillRef idx="1">
-              <a:schemeClr val="accent1"/>
-            </a:fillRef>
-            <a:effectRef idx="0">
-              <a:schemeClr val="accent1"/>
-            </a:effectRef>
-            <a:fontRef idx="minor">
-              <a:schemeClr val="lt1"/>
-            </a:fontRef>
-          </p:style>
-          <p:txBody>
-            <a:bodyPr rtlCol="0" anchor="ctr"/>
-            <a:lstStyle/>
-            <a:p>
-              <a:pPr algn="ctr"/>
-              <a:endParaRPr lang="de-DE" sz="800" dirty="0"/>
-            </a:p>
-          </p:txBody>
-        </p:sp>
-        <p:sp>
-          <p:nvSpPr>
-            <p:cNvPr id="52" name="Bogen 51">
-              <a:extLst>
-                <a:ext uri="{FF2B5EF4-FFF2-40B4-BE49-F238E27FC236}">
-                  <a16:creationId xmlns:a16="http://schemas.microsoft.com/office/drawing/2014/main" id="{5A37D944-FD62-08E8-D9B6-9B74D8FD11E5}"/>
-                </a:ext>
-              </a:extLst>
-            </p:cNvPr>
-            <p:cNvSpPr/>
-            <p:nvPr/>
-          </p:nvSpPr>
-          <p:spPr>
-            <a:xfrm>
-              <a:off x="1110231" y="658901"/>
-              <a:ext cx="111428" cy="111428"/>
-            </a:xfrm>
-            <a:prstGeom prst="arc">
-              <a:avLst/>
-            </a:prstGeom>
-            <a:solidFill>
-              <a:schemeClr val="tx1"/>
-            </a:solidFill>
-            <a:ln>
-              <a:noFill/>
-            </a:ln>
-          </p:spPr>
-          <p:style>
-            <a:lnRef idx="2">
-              <a:schemeClr val="accent1"/>
-            </a:lnRef>
-            <a:fillRef idx="0">
-              <a:schemeClr val="accent1"/>
-            </a:fillRef>
-            <a:effectRef idx="1">
-              <a:schemeClr val="accent1"/>
-            </a:effectRef>
-            <a:fontRef idx="minor">
-              <a:schemeClr val="tx1"/>
-            </a:fontRef>
-          </p:style>
-          <p:txBody>
-            <a:bodyPr rtlCol="0" anchor="ctr"/>
-            <a:lstStyle/>
-            <a:p>
-              <a:pPr algn="ctr"/>
-              <a:endParaRPr lang="de-DE" sz="800" dirty="0"/>
-            </a:p>
-          </p:txBody>
-        </p:sp>
-        <p:sp>
-          <p:nvSpPr>
-            <p:cNvPr id="53" name="Bogen 52">
-              <a:extLst>
-                <a:ext uri="{FF2B5EF4-FFF2-40B4-BE49-F238E27FC236}">
-                  <a16:creationId xmlns:a16="http://schemas.microsoft.com/office/drawing/2014/main" id="{4D64363E-8B5D-0E5A-EC8E-E64EF0FD24A9}"/>
-                </a:ext>
-              </a:extLst>
-            </p:cNvPr>
-            <p:cNvSpPr/>
-            <p:nvPr/>
-          </p:nvSpPr>
-          <p:spPr>
-            <a:xfrm rot="10800000">
-              <a:off x="1115084" y="657130"/>
-              <a:ext cx="107616" cy="111427"/>
-            </a:xfrm>
-            <a:prstGeom prst="arc">
-              <a:avLst/>
-            </a:prstGeom>
-            <a:solidFill>
-              <a:schemeClr val="tx1"/>
-            </a:solidFill>
-            <a:ln>
-              <a:noFill/>
-            </a:ln>
-          </p:spPr>
-          <p:style>
-            <a:lnRef idx="2">
-              <a:schemeClr val="accent1"/>
-            </a:lnRef>
-            <a:fillRef idx="0">
-              <a:schemeClr val="accent1"/>
-            </a:fillRef>
-            <a:effectRef idx="1">
-              <a:schemeClr val="accent1"/>
-            </a:effectRef>
-            <a:fontRef idx="minor">
-              <a:schemeClr val="tx1"/>
-            </a:fontRef>
-          </p:style>
-          <p:txBody>
-            <a:bodyPr rtlCol="0" anchor="ctr"/>
-            <a:lstStyle/>
-            <a:p>
-              <a:pPr algn="ctr"/>
-              <a:endParaRPr lang="de-DE" sz="800" dirty="0"/>
-            </a:p>
-          </p:txBody>
-        </p:sp>
-      </p:grpSp>
-      <p:sp>
-        <p:nvSpPr>
-          <p:cNvPr id="57" name="Textfeld 56">
-            <a:extLst>
-              <a:ext uri="{FF2B5EF4-FFF2-40B4-BE49-F238E27FC236}">
-                <a16:creationId xmlns:a16="http://schemas.microsoft.com/office/drawing/2014/main" id="{0EF93118-1EDA-BC68-7D65-77A08A2C3A2D}"/>
-              </a:ext>
-            </a:extLst>
-          </p:cNvPr>
-          <p:cNvSpPr txBox="1"/>
-          <p:nvPr/>
-        </p:nvSpPr>
-        <p:spPr>
-          <a:xfrm>
-            <a:off x="1138077" y="2545188"/>
-            <a:ext cx="450936" cy="215444"/>
-          </a:xfrm>
-          <a:prstGeom prst="rect">
-            <a:avLst/>
-          </a:prstGeom>
-          <a:noFill/>
-        </p:spPr>
-        <p:txBody>
-          <a:bodyPr wrap="square" rtlCol="0" anchor="ctr">
-            <a:spAutoFit/>
-          </a:bodyPr>
-          <a:lstStyle/>
-          <a:p>
-            <a:pPr algn="ctr"/>
-            <a:r>
-              <a:rPr lang="de-DE" sz="800" i="1" dirty="0">
-                <a:solidFill>
-                  <a:srgbClr val="C00000"/>
-                </a:solidFill>
-                <a:latin typeface="CMU Serif" panose="02000603000000000000" pitchFamily="2" charset="0"/>
-                <a:ea typeface="CMU Serif" panose="02000603000000000000" pitchFamily="2" charset="0"/>
-                <a:cs typeface="CMU Serif" panose="02000603000000000000" pitchFamily="2" charset="0"/>
-              </a:rPr>
-              <a:t>G</a:t>
-            </a:r>
-            <a:endParaRPr lang="de-DE" sz="800" baseline="-25000" dirty="0">
-              <a:solidFill>
-                <a:srgbClr val="C00000"/>
-              </a:solidFill>
-              <a:latin typeface="CMU Serif" panose="02000603000000000000" pitchFamily="2" charset="0"/>
-              <a:ea typeface="CMU Serif" panose="02000603000000000000" pitchFamily="2" charset="0"/>
-              <a:cs typeface="CMU Serif" panose="02000603000000000000" pitchFamily="2" charset="0"/>
-            </a:endParaRPr>
-          </a:p>
-        </p:txBody>
-      </p:sp>
-      <p:cxnSp>
-        <p:nvCxnSpPr>
-          <p:cNvPr id="58" name="Gerader Verbinder 57">
-            <a:extLst>
-              <a:ext uri="{FF2B5EF4-FFF2-40B4-BE49-F238E27FC236}">
-                <a16:creationId xmlns:a16="http://schemas.microsoft.com/office/drawing/2014/main" id="{55F0F71C-CC31-7EC8-0186-AFBAD0981419}"/>
-              </a:ext>
-            </a:extLst>
-          </p:cNvPr>
-          <p:cNvCxnSpPr>
-            <a:cxnSpLocks/>
-          </p:cNvCxnSpPr>
-          <p:nvPr/>
-        </p:nvCxnSpPr>
-        <p:spPr>
-          <a:xfrm>
-            <a:off x="861539" y="1647189"/>
-            <a:ext cx="0" cy="524798"/>
-          </a:xfrm>
-          <a:prstGeom prst="line">
-            <a:avLst/>
-          </a:prstGeom>
-          <a:ln w="6350" cap="rnd">
-            <a:solidFill>
-              <a:schemeClr val="tx1"/>
-            </a:solidFill>
-            <a:round/>
-          </a:ln>
-        </p:spPr>
-        <p:style>
-          <a:lnRef idx="2">
-            <a:schemeClr val="accent1"/>
-          </a:lnRef>
-          <a:fillRef idx="0">
-            <a:schemeClr val="accent1"/>
-          </a:fillRef>
-          <a:effectRef idx="1">
-            <a:schemeClr val="accent1"/>
-          </a:effectRef>
-          <a:fontRef idx="minor">
-            <a:schemeClr val="tx1"/>
-          </a:fontRef>
-        </p:style>
-      </p:cxnSp>
-      <p:cxnSp>
-        <p:nvCxnSpPr>
-          <p:cNvPr id="63" name="Gerader Verbinder 62">
-            <a:extLst>
-              <a:ext uri="{FF2B5EF4-FFF2-40B4-BE49-F238E27FC236}">
-                <a16:creationId xmlns:a16="http://schemas.microsoft.com/office/drawing/2014/main" id="{DEC643A3-AFEB-F63F-D6DE-39A5470E76F7}"/>
-              </a:ext>
-            </a:extLst>
-          </p:cNvPr>
-          <p:cNvCxnSpPr>
-            <a:cxnSpLocks/>
-          </p:cNvCxnSpPr>
-          <p:nvPr/>
-        </p:nvCxnSpPr>
-        <p:spPr>
-          <a:xfrm flipH="1">
-            <a:off x="861539" y="2121411"/>
-            <a:ext cx="663687" cy="0"/>
-          </a:xfrm>
-          <a:prstGeom prst="line">
-            <a:avLst/>
-          </a:prstGeom>
-          <a:ln w="6350" cap="rnd">
-            <a:solidFill>
-              <a:schemeClr val="tx1"/>
-            </a:solidFill>
-            <a:round/>
-            <a:headEnd type="triangle" w="sm" len="sm"/>
-            <a:tailEnd type="triangle" w="sm" len="sm"/>
-          </a:ln>
-        </p:spPr>
-        <p:style>
-          <a:lnRef idx="2">
-            <a:schemeClr val="accent1"/>
-          </a:lnRef>
-          <a:fillRef idx="0">
-            <a:schemeClr val="accent1"/>
-          </a:fillRef>
-          <a:effectRef idx="1">
-            <a:schemeClr val="accent1"/>
-          </a:effectRef>
-          <a:fontRef idx="minor">
-            <a:schemeClr val="tx1"/>
-          </a:fontRef>
-        </p:style>
-      </p:cxnSp>
-      <p:cxnSp>
-        <p:nvCxnSpPr>
-          <p:cNvPr id="65" name="Gerader Verbinder 64">
-            <a:extLst>
-              <a:ext uri="{FF2B5EF4-FFF2-40B4-BE49-F238E27FC236}">
-                <a16:creationId xmlns:a16="http://schemas.microsoft.com/office/drawing/2014/main" id="{4547791A-1926-9590-0984-5248E1907F4A}"/>
-              </a:ext>
-            </a:extLst>
-          </p:cNvPr>
-          <p:cNvCxnSpPr>
-            <a:cxnSpLocks/>
-          </p:cNvCxnSpPr>
-          <p:nvPr/>
-        </p:nvCxnSpPr>
-        <p:spPr>
-          <a:xfrm>
-            <a:off x="1523792" y="1749442"/>
-            <a:ext cx="0" cy="601615"/>
-          </a:xfrm>
-          <a:prstGeom prst="line">
-            <a:avLst/>
-          </a:prstGeom>
-          <a:ln w="6350" cap="rnd">
-            <a:solidFill>
-              <a:schemeClr val="tx1"/>
-            </a:solidFill>
-            <a:round/>
-          </a:ln>
-        </p:spPr>
-        <p:style>
-          <a:lnRef idx="2">
-            <a:schemeClr val="accent1"/>
-          </a:lnRef>
-          <a:fillRef idx="0">
-            <a:schemeClr val="accent1"/>
-          </a:fillRef>
-          <a:effectRef idx="1">
-            <a:schemeClr val="accent1"/>
-          </a:effectRef>
-          <a:fontRef idx="minor">
-            <a:schemeClr val="tx1"/>
-          </a:fontRef>
-        </p:style>
-      </p:cxnSp>
-      <p:cxnSp>
-        <p:nvCxnSpPr>
-          <p:cNvPr id="71" name="Gerader Verbinder 70">
-            <a:extLst>
-              <a:ext uri="{FF2B5EF4-FFF2-40B4-BE49-F238E27FC236}">
-                <a16:creationId xmlns:a16="http://schemas.microsoft.com/office/drawing/2014/main" id="{50BB11E3-7C49-E08E-C889-E6AB2FD5BBE3}"/>
-              </a:ext>
-            </a:extLst>
-          </p:cNvPr>
-          <p:cNvCxnSpPr>
-            <a:cxnSpLocks/>
-          </p:cNvCxnSpPr>
-          <p:nvPr/>
-        </p:nvCxnSpPr>
-        <p:spPr>
-          <a:xfrm>
-            <a:off x="651843" y="1612899"/>
-            <a:ext cx="0" cy="919039"/>
-          </a:xfrm>
-          <a:prstGeom prst="line">
-            <a:avLst/>
-          </a:prstGeom>
-          <a:ln w="6350" cap="rnd">
-            <a:solidFill>
-              <a:schemeClr val="tx1"/>
-            </a:solidFill>
-            <a:round/>
-          </a:ln>
-        </p:spPr>
-        <p:style>
-          <a:lnRef idx="2">
-            <a:schemeClr val="accent1"/>
-          </a:lnRef>
-          <a:fillRef idx="0">
-            <a:schemeClr val="accent1"/>
-          </a:fillRef>
-          <a:effectRef idx="1">
-            <a:schemeClr val="accent1"/>
-          </a:effectRef>
-          <a:fontRef idx="minor">
-            <a:schemeClr val="tx1"/>
-          </a:fontRef>
-        </p:style>
-      </p:cxnSp>
-      <p:cxnSp>
-        <p:nvCxnSpPr>
-          <p:cNvPr id="75" name="Gerader Verbinder 74">
-            <a:extLst>
-              <a:ext uri="{FF2B5EF4-FFF2-40B4-BE49-F238E27FC236}">
-                <a16:creationId xmlns:a16="http://schemas.microsoft.com/office/drawing/2014/main" id="{1B0CCD80-2800-C6B4-D28B-DBE8180FE821}"/>
-              </a:ext>
-            </a:extLst>
-          </p:cNvPr>
-          <p:cNvCxnSpPr>
-            <a:cxnSpLocks/>
-          </p:cNvCxnSpPr>
-          <p:nvPr/>
-        </p:nvCxnSpPr>
-        <p:spPr>
-          <a:xfrm flipH="1">
-            <a:off x="651843" y="2298576"/>
-            <a:ext cx="871478" cy="0"/>
-          </a:xfrm>
-          <a:prstGeom prst="line">
-            <a:avLst/>
-          </a:prstGeom>
-          <a:ln w="6350" cap="rnd">
-            <a:solidFill>
-              <a:schemeClr val="tx1"/>
-            </a:solidFill>
-            <a:round/>
-            <a:headEnd type="triangle" w="sm" len="sm"/>
-            <a:tailEnd type="triangle" w="sm" len="sm"/>
-          </a:ln>
-        </p:spPr>
-        <p:style>
-          <a:lnRef idx="2">
-            <a:schemeClr val="accent1"/>
-          </a:lnRef>
-          <a:fillRef idx="0">
-            <a:schemeClr val="accent1"/>
-          </a:fillRef>
-          <a:effectRef idx="1">
-            <a:schemeClr val="accent1"/>
-          </a:effectRef>
-          <a:fontRef idx="minor">
-            <a:schemeClr val="tx1"/>
-          </a:fontRef>
-        </p:style>
-      </p:cxnSp>
-      <p:cxnSp>
-        <p:nvCxnSpPr>
-          <p:cNvPr id="77" name="Gerader Verbinder 76">
-            <a:extLst>
-              <a:ext uri="{FF2B5EF4-FFF2-40B4-BE49-F238E27FC236}">
-                <a16:creationId xmlns:a16="http://schemas.microsoft.com/office/drawing/2014/main" id="{A40AE3FE-3779-3DCA-FB40-008C4C4AE3A1}"/>
-              </a:ext>
-            </a:extLst>
-          </p:cNvPr>
-          <p:cNvCxnSpPr>
-            <a:cxnSpLocks/>
-          </p:cNvCxnSpPr>
-          <p:nvPr/>
-        </p:nvCxnSpPr>
-        <p:spPr>
-          <a:xfrm flipH="1">
-            <a:off x="651843" y="2121411"/>
-            <a:ext cx="209696" cy="0"/>
-          </a:xfrm>
-          <a:prstGeom prst="line">
-            <a:avLst/>
-          </a:prstGeom>
-          <a:ln w="6350" cap="rnd">
-            <a:solidFill>
-              <a:schemeClr val="tx1"/>
-            </a:solidFill>
-            <a:round/>
-            <a:headEnd type="triangle" w="sm" len="sm"/>
-            <a:tailEnd type="triangle" w="sm" len="sm"/>
-          </a:ln>
-        </p:spPr>
-        <p:style>
-          <a:lnRef idx="2">
-            <a:schemeClr val="accent1"/>
-          </a:lnRef>
-          <a:fillRef idx="0">
-            <a:schemeClr val="accent1"/>
-          </a:fillRef>
-          <a:effectRef idx="1">
-            <a:schemeClr val="accent1"/>
-          </a:effectRef>
-          <a:fontRef idx="minor">
-            <a:schemeClr val="tx1"/>
-          </a:fontRef>
-        </p:style>
-      </p:cxnSp>
-      <p:sp>
-        <p:nvSpPr>
-          <p:cNvPr id="79" name="Textfeld 78">
-            <a:extLst>
-              <a:ext uri="{FF2B5EF4-FFF2-40B4-BE49-F238E27FC236}">
-                <a16:creationId xmlns:a16="http://schemas.microsoft.com/office/drawing/2014/main" id="{41765BE6-5AEE-B7E3-C15A-259D8BF625F7}"/>
-              </a:ext>
-            </a:extLst>
-          </p:cNvPr>
-          <p:cNvSpPr txBox="1"/>
-          <p:nvPr/>
-        </p:nvSpPr>
-        <p:spPr>
-          <a:xfrm>
-            <a:off x="832669" y="1744498"/>
-            <a:ext cx="435125" cy="215444"/>
-          </a:xfrm>
-          <a:prstGeom prst="rect">
-            <a:avLst/>
-          </a:prstGeom>
-          <a:noFill/>
-        </p:spPr>
-        <p:txBody>
-          <a:bodyPr wrap="square" rtlCol="0" anchor="ctr">
-            <a:spAutoFit/>
-          </a:bodyPr>
-          <a:lstStyle/>
-          <a:p>
-            <a:pPr algn="ctr"/>
-            <a:r>
-              <a:rPr lang="de-DE" sz="800" dirty="0">
-                <a:latin typeface="CMU Serif" panose="02000603000000000000" pitchFamily="2" charset="0"/>
-                <a:ea typeface="CMU Serif" panose="02000603000000000000" pitchFamily="2" charset="0"/>
-                <a:cs typeface="CMU Serif" panose="02000603000000000000" pitchFamily="2" charset="0"/>
-              </a:rPr>
-              <a:t>Δ</a:t>
-            </a:r>
-            <a:r>
-              <a:rPr lang="de-DE" sz="800" i="1" dirty="0">
-                <a:latin typeface="CMU Serif" panose="02000603000000000000" pitchFamily="2" charset="0"/>
-                <a:ea typeface="CMU Serif" panose="02000603000000000000" pitchFamily="2" charset="0"/>
-                <a:cs typeface="CMU Serif" panose="02000603000000000000" pitchFamily="2" charset="0"/>
-              </a:rPr>
-              <a:t>x</a:t>
-            </a:r>
-            <a:r>
-              <a:rPr lang="de-DE" sz="200" i="1" dirty="0">
-                <a:latin typeface="CMU Serif" panose="02000603000000000000" pitchFamily="2" charset="0"/>
-                <a:ea typeface="CMU Serif" panose="02000603000000000000" pitchFamily="2" charset="0"/>
-                <a:cs typeface="CMU Serif" panose="02000603000000000000" pitchFamily="2" charset="0"/>
-              </a:rPr>
-              <a:t> </a:t>
-            </a:r>
-            <a:r>
-              <a:rPr lang="de-DE" sz="800" baseline="-25000" dirty="0">
-                <a:latin typeface="CMU Serif" panose="02000603000000000000" pitchFamily="2" charset="0"/>
-                <a:ea typeface="CMU Serif" panose="02000603000000000000" pitchFamily="2" charset="0"/>
-                <a:cs typeface="CMU Serif" panose="02000603000000000000" pitchFamily="2" charset="0"/>
-              </a:rPr>
-              <a:t>s</a:t>
-            </a:r>
-          </a:p>
-        </p:txBody>
-      </p:sp>
-      <p:sp>
-        <p:nvSpPr>
-          <p:cNvPr id="80" name="Textfeld 79">
-            <a:extLst>
-              <a:ext uri="{FF2B5EF4-FFF2-40B4-BE49-F238E27FC236}">
-                <a16:creationId xmlns:a16="http://schemas.microsoft.com/office/drawing/2014/main" id="{CFA6E799-30CE-4A70-8A3B-229115201928}"/>
-              </a:ext>
-            </a:extLst>
-          </p:cNvPr>
-          <p:cNvSpPr txBox="1"/>
-          <p:nvPr/>
-        </p:nvSpPr>
-        <p:spPr>
-          <a:xfrm>
-            <a:off x="1158736" y="1748453"/>
-            <a:ext cx="435125" cy="215444"/>
-          </a:xfrm>
-          <a:prstGeom prst="rect">
-            <a:avLst/>
-          </a:prstGeom>
-          <a:noFill/>
-        </p:spPr>
-        <p:txBody>
-          <a:bodyPr wrap="square" rtlCol="0" anchor="ctr">
-            <a:spAutoFit/>
-          </a:bodyPr>
-          <a:lstStyle/>
-          <a:p>
-            <a:pPr algn="ctr"/>
-            <a:r>
-              <a:rPr lang="de-DE" sz="800" dirty="0">
-                <a:latin typeface="CMU Serif" panose="02000603000000000000" pitchFamily="2" charset="0"/>
-                <a:ea typeface="CMU Serif" panose="02000603000000000000" pitchFamily="2" charset="0"/>
-                <a:cs typeface="CMU Serif" panose="02000603000000000000" pitchFamily="2" charset="0"/>
-              </a:rPr>
-              <a:t>Δ</a:t>
-            </a:r>
-            <a:r>
-              <a:rPr lang="de-DE" sz="800" i="1" dirty="0">
-                <a:latin typeface="CMU Serif" panose="02000603000000000000" pitchFamily="2" charset="0"/>
-                <a:ea typeface="CMU Serif" panose="02000603000000000000" pitchFamily="2" charset="0"/>
-                <a:cs typeface="CMU Serif" panose="02000603000000000000" pitchFamily="2" charset="0"/>
-              </a:rPr>
-              <a:t>x</a:t>
-            </a:r>
-            <a:r>
-              <a:rPr lang="de-DE" sz="200" i="1" dirty="0">
-                <a:latin typeface="CMU Serif" panose="02000603000000000000" pitchFamily="2" charset="0"/>
-                <a:ea typeface="CMU Serif" panose="02000603000000000000" pitchFamily="2" charset="0"/>
-                <a:cs typeface="CMU Serif" panose="02000603000000000000" pitchFamily="2" charset="0"/>
-              </a:rPr>
-              <a:t> </a:t>
-            </a:r>
-            <a:r>
-              <a:rPr lang="de-DE" sz="800" baseline="-25000" dirty="0">
-                <a:latin typeface="CMU Serif" panose="02000603000000000000" pitchFamily="2" charset="0"/>
-                <a:ea typeface="CMU Serif" panose="02000603000000000000" pitchFamily="2" charset="0"/>
-                <a:cs typeface="CMU Serif" panose="02000603000000000000" pitchFamily="2" charset="0"/>
-              </a:rPr>
-              <a:t>St</a:t>
-            </a:r>
-          </a:p>
-        </p:txBody>
-      </p:sp>
-      <p:sp>
-        <p:nvSpPr>
-          <p:cNvPr id="81" name="Textfeld 80">
-            <a:extLst>
-              <a:ext uri="{FF2B5EF4-FFF2-40B4-BE49-F238E27FC236}">
-                <a16:creationId xmlns:a16="http://schemas.microsoft.com/office/drawing/2014/main" id="{B02FB151-EC95-41EA-D1D2-73EB54AC2957}"/>
-              </a:ext>
-            </a:extLst>
-          </p:cNvPr>
-          <p:cNvSpPr txBox="1"/>
-          <p:nvPr/>
-        </p:nvSpPr>
-        <p:spPr>
-          <a:xfrm>
-            <a:off x="823156" y="1929555"/>
-            <a:ext cx="435125" cy="215444"/>
-          </a:xfrm>
-          <a:prstGeom prst="rect">
-            <a:avLst/>
-          </a:prstGeom>
-          <a:noFill/>
-        </p:spPr>
-        <p:txBody>
-          <a:bodyPr wrap="square" rtlCol="0" anchor="ctr">
-            <a:spAutoFit/>
-          </a:bodyPr>
-          <a:lstStyle/>
-          <a:p>
-            <a:pPr algn="ctr"/>
-            <a:r>
-              <a:rPr lang="de-DE" sz="800" dirty="0">
-                <a:latin typeface="CMU Serif" panose="02000603000000000000" pitchFamily="2" charset="0"/>
-                <a:ea typeface="CMU Serif" panose="02000603000000000000" pitchFamily="2" charset="0"/>
-                <a:cs typeface="CMU Serif" panose="02000603000000000000" pitchFamily="2" charset="0"/>
-              </a:rPr>
-              <a:t>Δ</a:t>
-            </a:r>
-            <a:r>
-              <a:rPr lang="de-DE" sz="800" i="1" dirty="0">
-                <a:latin typeface="CMU Serif" panose="02000603000000000000" pitchFamily="2" charset="0"/>
-                <a:ea typeface="CMU Serif" panose="02000603000000000000" pitchFamily="2" charset="0"/>
-                <a:cs typeface="CMU Serif" panose="02000603000000000000" pitchFamily="2" charset="0"/>
-              </a:rPr>
-              <a:t>x</a:t>
-            </a:r>
-            <a:r>
-              <a:rPr lang="de-DE" sz="200" i="1" dirty="0">
-                <a:latin typeface="CMU Serif" panose="02000603000000000000" pitchFamily="2" charset="0"/>
-                <a:ea typeface="CMU Serif" panose="02000603000000000000" pitchFamily="2" charset="0"/>
-                <a:cs typeface="CMU Serif" panose="02000603000000000000" pitchFamily="2" charset="0"/>
-              </a:rPr>
-              <a:t> </a:t>
-            </a:r>
-            <a:r>
-              <a:rPr lang="de-DE" sz="800" baseline="-25000" dirty="0">
-                <a:latin typeface="CMU Serif" panose="02000603000000000000" pitchFamily="2" charset="0"/>
-                <a:ea typeface="CMU Serif" panose="02000603000000000000" pitchFamily="2" charset="0"/>
-                <a:cs typeface="CMU Serif" panose="02000603000000000000" pitchFamily="2" charset="0"/>
-              </a:rPr>
-              <a:t>N</a:t>
-            </a:r>
-          </a:p>
-        </p:txBody>
-      </p:sp>
-      <p:cxnSp>
-        <p:nvCxnSpPr>
-          <p:cNvPr id="93" name="Gerader Verbinder 92">
-            <a:extLst>
-              <a:ext uri="{FF2B5EF4-FFF2-40B4-BE49-F238E27FC236}">
-                <a16:creationId xmlns:a16="http://schemas.microsoft.com/office/drawing/2014/main" id="{0D6AAA25-AE51-00BF-8930-442F5FCD1285}"/>
-              </a:ext>
-            </a:extLst>
-          </p:cNvPr>
-          <p:cNvCxnSpPr>
-            <a:cxnSpLocks/>
-          </p:cNvCxnSpPr>
-          <p:nvPr/>
-        </p:nvCxnSpPr>
-        <p:spPr>
-          <a:xfrm>
-            <a:off x="2972052" y="1664798"/>
-            <a:ext cx="0" cy="867140"/>
-          </a:xfrm>
-          <a:prstGeom prst="line">
-            <a:avLst/>
-          </a:prstGeom>
-          <a:ln w="6350" cap="rnd">
-            <a:solidFill>
-              <a:schemeClr val="tx1"/>
-            </a:solidFill>
-            <a:round/>
-          </a:ln>
-        </p:spPr>
-        <p:style>
-          <a:lnRef idx="2">
-            <a:schemeClr val="accent1"/>
-          </a:lnRef>
-          <a:fillRef idx="0">
-            <a:schemeClr val="accent1"/>
-          </a:fillRef>
-          <a:effectRef idx="1">
-            <a:schemeClr val="accent1"/>
-          </a:effectRef>
-          <a:fontRef idx="minor">
-            <a:schemeClr val="tx1"/>
-          </a:fontRef>
-        </p:style>
-      </p:cxnSp>
-      <p:sp>
-        <p:nvSpPr>
-          <p:cNvPr id="95" name="Textfeld 94">
-            <a:extLst>
-              <a:ext uri="{FF2B5EF4-FFF2-40B4-BE49-F238E27FC236}">
-                <a16:creationId xmlns:a16="http://schemas.microsoft.com/office/drawing/2014/main" id="{E538A534-9B42-0F94-C67F-A5ABBCF88EEE}"/>
-              </a:ext>
-            </a:extLst>
-          </p:cNvPr>
-          <p:cNvSpPr txBox="1"/>
-          <p:nvPr/>
-        </p:nvSpPr>
-        <p:spPr>
-          <a:xfrm>
-            <a:off x="544505" y="1921662"/>
-            <a:ext cx="435125" cy="215444"/>
-          </a:xfrm>
-          <a:prstGeom prst="rect">
-            <a:avLst/>
-          </a:prstGeom>
-          <a:noFill/>
-        </p:spPr>
-        <p:txBody>
-          <a:bodyPr wrap="square" rtlCol="0" anchor="ctr">
-            <a:spAutoFit/>
-          </a:bodyPr>
-          <a:lstStyle/>
-          <a:p>
-            <a:pPr algn="ctr"/>
-            <a:r>
-              <a:rPr lang="de-DE" sz="800" i="1" dirty="0">
-                <a:latin typeface="CMU Serif" panose="02000603000000000000" pitchFamily="2" charset="0"/>
-                <a:ea typeface="CMU Serif" panose="02000603000000000000" pitchFamily="2" charset="0"/>
-                <a:cs typeface="CMU Serif" panose="02000603000000000000" pitchFamily="2" charset="0"/>
-              </a:rPr>
-              <a:t>x</a:t>
-            </a:r>
-            <a:r>
-              <a:rPr lang="de-DE" sz="200" i="1" dirty="0">
-                <a:latin typeface="CMU Serif" panose="02000603000000000000" pitchFamily="2" charset="0"/>
-                <a:ea typeface="CMU Serif" panose="02000603000000000000" pitchFamily="2" charset="0"/>
-                <a:cs typeface="CMU Serif" panose="02000603000000000000" pitchFamily="2" charset="0"/>
-              </a:rPr>
-              <a:t> </a:t>
-            </a:r>
-            <a:r>
-              <a:rPr lang="de-DE" sz="800" baseline="-25000" dirty="0">
-                <a:latin typeface="CMU Serif" panose="02000603000000000000" pitchFamily="2" charset="0"/>
-                <a:ea typeface="CMU Serif" panose="02000603000000000000" pitchFamily="2" charset="0"/>
-                <a:cs typeface="CMU Serif" panose="02000603000000000000" pitchFamily="2" charset="0"/>
-              </a:rPr>
-              <a:t>NF</a:t>
-            </a:r>
-          </a:p>
-        </p:txBody>
-      </p:sp>
-      <p:sp>
-        <p:nvSpPr>
-          <p:cNvPr id="96" name="Textfeld 95">
-            <a:extLst>
-              <a:ext uri="{FF2B5EF4-FFF2-40B4-BE49-F238E27FC236}">
-                <a16:creationId xmlns:a16="http://schemas.microsoft.com/office/drawing/2014/main" id="{1C68E2FC-2FDF-6B58-1FF8-779CCB0DB2C2}"/>
-              </a:ext>
-            </a:extLst>
-          </p:cNvPr>
-          <p:cNvSpPr txBox="1"/>
-          <p:nvPr/>
-        </p:nvSpPr>
-        <p:spPr>
-          <a:xfrm>
-            <a:off x="870634" y="2111818"/>
-            <a:ext cx="435125" cy="215444"/>
-          </a:xfrm>
-          <a:prstGeom prst="rect">
-            <a:avLst/>
-          </a:prstGeom>
-          <a:noFill/>
-        </p:spPr>
-        <p:txBody>
-          <a:bodyPr wrap="square" rtlCol="0" anchor="ctr">
-            <a:spAutoFit/>
-          </a:bodyPr>
-          <a:lstStyle/>
-          <a:p>
-            <a:pPr algn="ctr"/>
-            <a:r>
-              <a:rPr lang="de-DE" sz="800" i="1" dirty="0">
-                <a:latin typeface="CMU Serif" panose="02000603000000000000" pitchFamily="2" charset="0"/>
-                <a:ea typeface="CMU Serif" panose="02000603000000000000" pitchFamily="2" charset="0"/>
-                <a:cs typeface="CMU Serif" panose="02000603000000000000" pitchFamily="2" charset="0"/>
-              </a:rPr>
-              <a:t>x</a:t>
-            </a:r>
-            <a:r>
-              <a:rPr lang="de-DE" sz="200" i="1" dirty="0">
-                <a:latin typeface="CMU Serif" panose="02000603000000000000" pitchFamily="2" charset="0"/>
-                <a:ea typeface="CMU Serif" panose="02000603000000000000" pitchFamily="2" charset="0"/>
-                <a:cs typeface="CMU Serif" panose="02000603000000000000" pitchFamily="2" charset="0"/>
-              </a:rPr>
-              <a:t> </a:t>
-            </a:r>
-            <a:r>
-              <a:rPr lang="de-DE" sz="800" baseline="-25000" dirty="0">
-                <a:latin typeface="CMU Serif" panose="02000603000000000000" pitchFamily="2" charset="0"/>
-                <a:ea typeface="CMU Serif" panose="02000603000000000000" pitchFamily="2" charset="0"/>
-                <a:cs typeface="CMU Serif" panose="02000603000000000000" pitchFamily="2" charset="0"/>
-              </a:rPr>
-              <a:t>N</a:t>
-            </a:r>
-          </a:p>
-        </p:txBody>
-      </p:sp>
-      <p:sp>
-        <p:nvSpPr>
-          <p:cNvPr id="97" name="Textfeld 96">
-            <a:extLst>
-              <a:ext uri="{FF2B5EF4-FFF2-40B4-BE49-F238E27FC236}">
-                <a16:creationId xmlns:a16="http://schemas.microsoft.com/office/drawing/2014/main" id="{FBA5A073-E8E2-669B-6FE7-68BA3D66033B}"/>
-              </a:ext>
-            </a:extLst>
-          </p:cNvPr>
-          <p:cNvSpPr txBox="1"/>
-          <p:nvPr/>
-        </p:nvSpPr>
-        <p:spPr>
-          <a:xfrm>
-            <a:off x="786623" y="2287283"/>
-            <a:ext cx="320152" cy="215444"/>
-          </a:xfrm>
-          <a:prstGeom prst="rect">
-            <a:avLst/>
-          </a:prstGeom>
-          <a:noFill/>
-        </p:spPr>
-        <p:txBody>
-          <a:bodyPr wrap="square" rtlCol="0" anchor="ctr">
-            <a:spAutoFit/>
-          </a:bodyPr>
-          <a:lstStyle/>
-          <a:p>
-            <a:pPr algn="ctr"/>
-            <a:r>
-              <a:rPr lang="de-DE" sz="800" i="1" dirty="0">
-                <a:latin typeface="CMU Serif" panose="02000603000000000000" pitchFamily="2" charset="0"/>
-                <a:ea typeface="CMU Serif" panose="02000603000000000000" pitchFamily="2" charset="0"/>
-                <a:cs typeface="CMU Serif" panose="02000603000000000000" pitchFamily="2" charset="0"/>
-              </a:rPr>
-              <a:t>x</a:t>
-            </a:r>
-            <a:r>
-              <a:rPr lang="de-DE" sz="200" i="1" dirty="0">
-                <a:latin typeface="CMU Serif" panose="02000603000000000000" pitchFamily="2" charset="0"/>
-                <a:ea typeface="CMU Serif" panose="02000603000000000000" pitchFamily="2" charset="0"/>
-                <a:cs typeface="CMU Serif" panose="02000603000000000000" pitchFamily="2" charset="0"/>
-              </a:rPr>
-              <a:t> </a:t>
-            </a:r>
-            <a:r>
-              <a:rPr lang="de-DE" sz="800" baseline="-25000" dirty="0">
-                <a:latin typeface="CMU Serif" panose="02000603000000000000" pitchFamily="2" charset="0"/>
-                <a:ea typeface="CMU Serif" panose="02000603000000000000" pitchFamily="2" charset="0"/>
-                <a:cs typeface="CMU Serif" panose="02000603000000000000" pitchFamily="2" charset="0"/>
-              </a:rPr>
-              <a:t>S</a:t>
-            </a:r>
-          </a:p>
-        </p:txBody>
-      </p:sp>
-      <p:sp>
-        <p:nvSpPr>
-          <p:cNvPr id="103" name="Textfeld 102">
-            <a:extLst>
-              <a:ext uri="{FF2B5EF4-FFF2-40B4-BE49-F238E27FC236}">
-                <a16:creationId xmlns:a16="http://schemas.microsoft.com/office/drawing/2014/main" id="{23FB7ABF-CB56-2B6B-E294-F9CD8D09282E}"/>
-              </a:ext>
-            </a:extLst>
-          </p:cNvPr>
-          <p:cNvSpPr txBox="1"/>
-          <p:nvPr/>
-        </p:nvSpPr>
-        <p:spPr>
-          <a:xfrm>
-            <a:off x="1936498" y="2286081"/>
-            <a:ext cx="320152" cy="215444"/>
-          </a:xfrm>
-          <a:prstGeom prst="rect">
-            <a:avLst/>
-          </a:prstGeom>
-          <a:noFill/>
-        </p:spPr>
-        <p:txBody>
-          <a:bodyPr wrap="square" rtlCol="0" anchor="ctr">
-            <a:spAutoFit/>
-          </a:bodyPr>
-          <a:lstStyle/>
-          <a:p>
-            <a:pPr algn="ctr"/>
-            <a:r>
-              <a:rPr lang="de-DE" sz="800" i="1" dirty="0">
-                <a:latin typeface="CMU Serif" panose="02000603000000000000" pitchFamily="2" charset="0"/>
-                <a:ea typeface="CMU Serif" panose="02000603000000000000" pitchFamily="2" charset="0"/>
-                <a:cs typeface="CMU Serif" panose="02000603000000000000" pitchFamily="2" charset="0"/>
-              </a:rPr>
-              <a:t>r</a:t>
-            </a:r>
-            <a:r>
-              <a:rPr lang="de-DE" sz="200" i="1" dirty="0">
-                <a:latin typeface="CMU Serif" panose="02000603000000000000" pitchFamily="2" charset="0"/>
-                <a:ea typeface="CMU Serif" panose="02000603000000000000" pitchFamily="2" charset="0"/>
-                <a:cs typeface="CMU Serif" panose="02000603000000000000" pitchFamily="2" charset="0"/>
-              </a:rPr>
-              <a:t> </a:t>
-            </a:r>
-            <a:r>
-              <a:rPr lang="de-DE" sz="800" baseline="-25000" dirty="0">
-                <a:latin typeface="CMU Serif" panose="02000603000000000000" pitchFamily="2" charset="0"/>
-                <a:ea typeface="CMU Serif" panose="02000603000000000000" pitchFamily="2" charset="0"/>
-                <a:cs typeface="CMU Serif" panose="02000603000000000000" pitchFamily="2" charset="0"/>
-              </a:rPr>
-              <a:t>H</a:t>
-            </a:r>
-          </a:p>
-        </p:txBody>
-      </p:sp>
-      <p:cxnSp>
-        <p:nvCxnSpPr>
-          <p:cNvPr id="104" name="Gerade Verbindung mit Pfeil 103">
-            <a:extLst>
-              <a:ext uri="{FF2B5EF4-FFF2-40B4-BE49-F238E27FC236}">
-                <a16:creationId xmlns:a16="http://schemas.microsoft.com/office/drawing/2014/main" id="{1F565099-27E5-7192-F8F7-CC1CC39CAD4B}"/>
-              </a:ext>
-            </a:extLst>
-          </p:cNvPr>
-          <p:cNvCxnSpPr>
-            <a:cxnSpLocks/>
-          </p:cNvCxnSpPr>
-          <p:nvPr/>
-        </p:nvCxnSpPr>
-        <p:spPr>
-          <a:xfrm>
-            <a:off x="876463" y="1634429"/>
-            <a:ext cx="241093" cy="0"/>
-          </a:xfrm>
-          <a:prstGeom prst="straightConnector1">
-            <a:avLst/>
-          </a:prstGeom>
-          <a:ln w="15875" cap="rnd">
-            <a:solidFill>
-              <a:schemeClr val="accent2">
-                <a:lumMod val="75000"/>
-              </a:schemeClr>
-            </a:solidFill>
-            <a:round/>
-            <a:headEnd type="none" w="sm" len="sm"/>
-            <a:tailEnd type="triangle" w="med" len="med"/>
-          </a:ln>
-        </p:spPr>
-        <p:style>
-          <a:lnRef idx="2">
-            <a:schemeClr val="accent1"/>
-          </a:lnRef>
-          <a:fillRef idx="0">
-            <a:schemeClr val="accent1"/>
-          </a:fillRef>
-          <a:effectRef idx="1">
-            <a:schemeClr val="accent1"/>
-          </a:effectRef>
-          <a:fontRef idx="minor">
-            <a:schemeClr val="tx1"/>
-          </a:fontRef>
-        </p:style>
-      </p:cxnSp>
-      <p:sp>
-        <p:nvSpPr>
-          <p:cNvPr id="22" name="Ellipse 21">
-            <a:extLst>
-              <a:ext uri="{FF2B5EF4-FFF2-40B4-BE49-F238E27FC236}">
-                <a16:creationId xmlns:a16="http://schemas.microsoft.com/office/drawing/2014/main" id="{C1071813-055E-C3A7-3684-9A4CECCC441E}"/>
-              </a:ext>
-            </a:extLst>
-          </p:cNvPr>
-          <p:cNvSpPr/>
-          <p:nvPr/>
-        </p:nvSpPr>
-        <p:spPr>
-          <a:xfrm>
-            <a:off x="840898" y="1611930"/>
-            <a:ext cx="45719" cy="45719"/>
-          </a:xfrm>
-          <a:prstGeom prst="ellipse">
-            <a:avLst/>
-          </a:prstGeom>
-          <a:solidFill>
-            <a:schemeClr val="tx1"/>
-          </a:solidFill>
-          <a:ln>
-            <a:noFill/>
-          </a:ln>
-        </p:spPr>
-        <p:style>
-          <a:lnRef idx="2">
-            <a:schemeClr val="accent1">
-              <a:shade val="15000"/>
-            </a:schemeClr>
-          </a:lnRef>
-          <a:fillRef idx="1">
-            <a:schemeClr val="accent1"/>
-          </a:fillRef>
-          <a:effectRef idx="0">
-            <a:schemeClr val="accent1"/>
-          </a:effectRef>
-          <a:fontRef idx="minor">
-            <a:schemeClr val="lt1"/>
-          </a:fontRef>
-        </p:style>
-        <p:txBody>
-          <a:bodyPr rtlCol="0" anchor="ctr"/>
-          <a:lstStyle/>
-          <a:p>
-            <a:pPr algn="ctr"/>
-            <a:endParaRPr lang="de-DE" sz="800" dirty="0"/>
-          </a:p>
-        </p:txBody>
-      </p:sp>
-      <p:sp>
-        <p:nvSpPr>
-          <p:cNvPr id="107" name="Textfeld 106">
-            <a:extLst>
-              <a:ext uri="{FF2B5EF4-FFF2-40B4-BE49-F238E27FC236}">
-                <a16:creationId xmlns:a16="http://schemas.microsoft.com/office/drawing/2014/main" id="{B7341C8D-A09B-03B9-29A0-EAC2A730BC75}"/>
-              </a:ext>
-            </a:extLst>
-          </p:cNvPr>
-          <p:cNvSpPr txBox="1"/>
-          <p:nvPr/>
-        </p:nvSpPr>
-        <p:spPr>
-          <a:xfrm>
-            <a:off x="963486" y="1445597"/>
-            <a:ext cx="450936" cy="215444"/>
-          </a:xfrm>
-          <a:prstGeom prst="rect">
-            <a:avLst/>
-          </a:prstGeom>
-          <a:noFill/>
-        </p:spPr>
-        <p:txBody>
-          <a:bodyPr wrap="square" rtlCol="0" anchor="ctr">
-            <a:spAutoFit/>
-          </a:bodyPr>
-          <a:lstStyle/>
-          <a:p>
-            <a:pPr algn="ctr"/>
-            <a:r>
-              <a:rPr lang="de-DE" sz="800" i="1" dirty="0">
-                <a:solidFill>
-                  <a:schemeClr val="accent2">
-                    <a:lumMod val="75000"/>
-                  </a:schemeClr>
-                </a:solidFill>
-                <a:latin typeface="CMU Serif" panose="02000603000000000000" pitchFamily="2" charset="0"/>
-                <a:ea typeface="CMU Serif" panose="02000603000000000000" pitchFamily="2" charset="0"/>
-                <a:cs typeface="CMU Serif" panose="02000603000000000000" pitchFamily="2" charset="0"/>
-              </a:rPr>
-              <a:t>W</a:t>
-            </a:r>
-            <a:endParaRPr lang="de-DE" sz="800" baseline="-25000" dirty="0">
-              <a:solidFill>
-                <a:schemeClr val="accent2">
-                  <a:lumMod val="75000"/>
-                </a:schemeClr>
-              </a:solidFill>
-              <a:latin typeface="CMU Serif" panose="02000603000000000000" pitchFamily="2" charset="0"/>
-              <a:ea typeface="CMU Serif" panose="02000603000000000000" pitchFamily="2" charset="0"/>
-              <a:cs typeface="CMU Serif" panose="02000603000000000000" pitchFamily="2" charset="0"/>
-            </a:endParaRPr>
-          </a:p>
-        </p:txBody>
-      </p:sp>
-      <p:cxnSp>
-        <p:nvCxnSpPr>
-          <p:cNvPr id="108" name="Gerade Verbindung mit Pfeil 107">
-            <a:extLst>
-              <a:ext uri="{FF2B5EF4-FFF2-40B4-BE49-F238E27FC236}">
-                <a16:creationId xmlns:a16="http://schemas.microsoft.com/office/drawing/2014/main" id="{5FC4A5B0-F661-2F48-C4EB-9D3C34CBD917}"/>
-              </a:ext>
-            </a:extLst>
-          </p:cNvPr>
-          <p:cNvCxnSpPr>
-            <a:cxnSpLocks/>
-          </p:cNvCxnSpPr>
-          <p:nvPr/>
-        </p:nvCxnSpPr>
-        <p:spPr>
-          <a:xfrm flipH="1" flipV="1">
-            <a:off x="1692474" y="1667162"/>
-            <a:ext cx="358214" cy="65274"/>
-          </a:xfrm>
-          <a:prstGeom prst="straightConnector1">
-            <a:avLst/>
-          </a:prstGeom>
-          <a:ln w="15875" cap="rnd">
-            <a:solidFill>
-              <a:schemeClr val="accent5">
-                <a:lumMod val="75000"/>
-              </a:schemeClr>
-            </a:solidFill>
-            <a:round/>
-            <a:headEnd type="none" w="sm" len="sm"/>
-            <a:tailEnd type="triangle" w="med" len="med"/>
-          </a:ln>
-        </p:spPr>
-        <p:style>
-          <a:lnRef idx="2">
-            <a:schemeClr val="accent1"/>
-          </a:lnRef>
-          <a:fillRef idx="0">
-            <a:schemeClr val="accent1"/>
-          </a:fillRef>
-          <a:effectRef idx="1">
-            <a:schemeClr val="accent1"/>
-          </a:effectRef>
-          <a:fontRef idx="minor">
-            <a:schemeClr val="tx1"/>
-          </a:fontRef>
-        </p:style>
-      </p:cxnSp>
-      <p:sp>
-        <p:nvSpPr>
-          <p:cNvPr id="110" name="Textfeld 109">
-            <a:extLst>
-              <a:ext uri="{FF2B5EF4-FFF2-40B4-BE49-F238E27FC236}">
-                <a16:creationId xmlns:a16="http://schemas.microsoft.com/office/drawing/2014/main" id="{8DB82D20-5AD9-D66A-0A77-C81563F15471}"/>
-              </a:ext>
-            </a:extLst>
-          </p:cNvPr>
-          <p:cNvSpPr txBox="1"/>
-          <p:nvPr/>
-        </p:nvSpPr>
-        <p:spPr>
-          <a:xfrm>
-            <a:off x="1684201" y="1520381"/>
-            <a:ext cx="450936" cy="215444"/>
-          </a:xfrm>
-          <a:prstGeom prst="rect">
-            <a:avLst/>
-          </a:prstGeom>
-          <a:noFill/>
-        </p:spPr>
-        <p:txBody>
-          <a:bodyPr wrap="square" rtlCol="0" anchor="ctr">
-            <a:spAutoFit/>
-          </a:bodyPr>
-          <a:lstStyle/>
-          <a:p>
-            <a:pPr algn="ctr"/>
-            <a:r>
-              <a:rPr lang="de-DE" sz="800" i="1" dirty="0">
-                <a:solidFill>
-                  <a:schemeClr val="accent5">
-                    <a:lumMod val="75000"/>
-                  </a:schemeClr>
-                </a:solidFill>
-                <a:latin typeface="CMU Serif" panose="02000603000000000000" pitchFamily="2" charset="0"/>
-                <a:ea typeface="CMU Serif" panose="02000603000000000000" pitchFamily="2" charset="0"/>
-                <a:cs typeface="CMU Serif" panose="02000603000000000000" pitchFamily="2" charset="0"/>
-              </a:rPr>
-              <a:t>F</a:t>
-            </a:r>
-            <a:endParaRPr lang="de-DE" sz="800" baseline="-25000" dirty="0">
-              <a:solidFill>
-                <a:schemeClr val="accent5">
-                  <a:lumMod val="75000"/>
-                </a:schemeClr>
-              </a:solidFill>
-              <a:latin typeface="CMU Serif" panose="02000603000000000000" pitchFamily="2" charset="0"/>
-              <a:ea typeface="CMU Serif" panose="02000603000000000000" pitchFamily="2" charset="0"/>
-              <a:cs typeface="CMU Serif" panose="02000603000000000000" pitchFamily="2" charset="0"/>
-            </a:endParaRPr>
-          </a:p>
-        </p:txBody>
-      </p:sp>
-      <p:sp>
-        <p:nvSpPr>
-          <p:cNvPr id="114" name="Ellipse 113">
-            <a:extLst>
-              <a:ext uri="{FF2B5EF4-FFF2-40B4-BE49-F238E27FC236}">
-                <a16:creationId xmlns:a16="http://schemas.microsoft.com/office/drawing/2014/main" id="{A01E66ED-1D64-50B9-4981-E46E619EF643}"/>
-              </a:ext>
-            </a:extLst>
-          </p:cNvPr>
-          <p:cNvSpPr/>
-          <p:nvPr/>
-        </p:nvSpPr>
-        <p:spPr>
-          <a:xfrm>
-            <a:off x="1503746" y="1734429"/>
-            <a:ext cx="36000" cy="36000"/>
-          </a:xfrm>
-          <a:prstGeom prst="ellipse">
-            <a:avLst/>
-          </a:prstGeom>
-          <a:solidFill>
-            <a:schemeClr val="bg1"/>
-          </a:solidFill>
-          <a:ln w="6350">
-            <a:solidFill>
-              <a:schemeClr val="tx1"/>
-            </a:solidFill>
-          </a:ln>
-        </p:spPr>
-        <p:style>
-          <a:lnRef idx="2">
-            <a:schemeClr val="accent1">
-              <a:shade val="15000"/>
-            </a:schemeClr>
-          </a:lnRef>
-          <a:fillRef idx="1">
-            <a:schemeClr val="accent1"/>
-          </a:fillRef>
-          <a:effectRef idx="0">
-            <a:schemeClr val="accent1"/>
-          </a:effectRef>
-          <a:fontRef idx="minor">
-            <a:schemeClr val="lt1"/>
-          </a:fontRef>
-        </p:style>
-        <p:txBody>
-          <a:bodyPr rtlCol="0" anchor="ctr"/>
-          <a:lstStyle/>
-          <a:p>
-            <a:pPr algn="ctr"/>
-            <a:endParaRPr lang="de-DE" sz="800" dirty="0"/>
-          </a:p>
-        </p:txBody>
-      </p:sp>
-      <p:cxnSp>
-        <p:nvCxnSpPr>
-          <p:cNvPr id="117" name="Gerader Verbinder 116">
-            <a:extLst>
-              <a:ext uri="{FF2B5EF4-FFF2-40B4-BE49-F238E27FC236}">
-                <a16:creationId xmlns:a16="http://schemas.microsoft.com/office/drawing/2014/main" id="{2199D088-B4C5-3AC6-731A-F2E992FACC13}"/>
-              </a:ext>
-            </a:extLst>
-          </p:cNvPr>
-          <p:cNvCxnSpPr>
-            <a:cxnSpLocks/>
-          </p:cNvCxnSpPr>
-          <p:nvPr/>
-        </p:nvCxnSpPr>
-        <p:spPr>
-          <a:xfrm>
-            <a:off x="1463204" y="1460320"/>
-            <a:ext cx="52441" cy="243028"/>
-          </a:xfrm>
-          <a:prstGeom prst="line">
-            <a:avLst/>
-          </a:prstGeom>
-          <a:ln w="6350" cap="rnd">
-            <a:solidFill>
-              <a:schemeClr val="tx1"/>
-            </a:solidFill>
-            <a:round/>
-          </a:ln>
-        </p:spPr>
-        <p:style>
-          <a:lnRef idx="2">
-            <a:schemeClr val="accent1"/>
-          </a:lnRef>
-          <a:fillRef idx="0">
-            <a:schemeClr val="accent1"/>
-          </a:fillRef>
-          <a:effectRef idx="1">
-            <a:schemeClr val="accent1"/>
-          </a:effectRef>
-          <a:fontRef idx="minor">
-            <a:schemeClr val="tx1"/>
-          </a:fontRef>
-        </p:style>
-      </p:cxnSp>
-      <p:sp>
-        <p:nvSpPr>
-          <p:cNvPr id="120" name="Textfeld 119">
-            <a:extLst>
-              <a:ext uri="{FF2B5EF4-FFF2-40B4-BE49-F238E27FC236}">
-                <a16:creationId xmlns:a16="http://schemas.microsoft.com/office/drawing/2014/main" id="{4C17432C-3174-67BB-F5B8-6AB4C8ABE838}"/>
-              </a:ext>
-            </a:extLst>
-          </p:cNvPr>
-          <p:cNvSpPr txBox="1"/>
-          <p:nvPr/>
-        </p:nvSpPr>
-        <p:spPr>
-          <a:xfrm>
-            <a:off x="1174574" y="1300233"/>
-            <a:ext cx="857220" cy="200055"/>
-          </a:xfrm>
-          <a:prstGeom prst="rect">
-            <a:avLst/>
-          </a:prstGeom>
-          <a:noFill/>
-        </p:spPr>
-        <p:txBody>
-          <a:bodyPr wrap="square" rtlCol="0" anchor="ctr">
-            <a:spAutoFit/>
-          </a:bodyPr>
-          <a:lstStyle/>
-          <a:p>
-            <a:pPr algn="ctr"/>
-            <a:r>
-              <a:rPr lang="de-DE" sz="700" dirty="0">
-                <a:latin typeface="CMU Serif" panose="02000603000000000000" pitchFamily="2" charset="0"/>
-                <a:ea typeface="CMU Serif" panose="02000603000000000000" pitchFamily="2" charset="0"/>
-                <a:cs typeface="CMU Serif" panose="02000603000000000000" pitchFamily="2" charset="0"/>
-              </a:rPr>
-              <a:t>Neutralpunkt</a:t>
-            </a:r>
-            <a:endParaRPr lang="de-DE" sz="700" baseline="-25000" dirty="0">
-              <a:latin typeface="CMU Serif" panose="02000603000000000000" pitchFamily="2" charset="0"/>
-              <a:ea typeface="CMU Serif" panose="02000603000000000000" pitchFamily="2" charset="0"/>
-              <a:cs typeface="CMU Serif" panose="02000603000000000000" pitchFamily="2" charset="0"/>
-            </a:endParaRPr>
-          </a:p>
-        </p:txBody>
-      </p:sp>
-      <p:cxnSp>
-        <p:nvCxnSpPr>
-          <p:cNvPr id="123" name="Gerader Verbinder 122">
-            <a:extLst>
-              <a:ext uri="{FF2B5EF4-FFF2-40B4-BE49-F238E27FC236}">
-                <a16:creationId xmlns:a16="http://schemas.microsoft.com/office/drawing/2014/main" id="{B060041A-DC74-A80F-436C-314675744BFB}"/>
-              </a:ext>
-            </a:extLst>
-          </p:cNvPr>
-          <p:cNvCxnSpPr>
-            <a:cxnSpLocks/>
-          </p:cNvCxnSpPr>
-          <p:nvPr/>
-        </p:nvCxnSpPr>
-        <p:spPr>
-          <a:xfrm>
-            <a:off x="521291" y="1295415"/>
-            <a:ext cx="80010" cy="261257"/>
-          </a:xfrm>
-          <a:prstGeom prst="line">
-            <a:avLst/>
-          </a:prstGeom>
-          <a:ln w="6350" cap="rnd">
-            <a:solidFill>
-              <a:schemeClr val="tx1"/>
-            </a:solidFill>
-            <a:round/>
-          </a:ln>
-        </p:spPr>
-        <p:style>
-          <a:lnRef idx="2">
-            <a:schemeClr val="accent1"/>
-          </a:lnRef>
-          <a:fillRef idx="0">
-            <a:schemeClr val="accent1"/>
-          </a:fillRef>
-          <a:effectRef idx="1">
-            <a:schemeClr val="accent1"/>
-          </a:effectRef>
-          <a:fontRef idx="minor">
-            <a:schemeClr val="tx1"/>
-          </a:fontRef>
-        </p:style>
-      </p:cxnSp>
-      <p:sp>
-        <p:nvSpPr>
-          <p:cNvPr id="124" name="Textfeld 123">
-            <a:extLst>
-              <a:ext uri="{FF2B5EF4-FFF2-40B4-BE49-F238E27FC236}">
-                <a16:creationId xmlns:a16="http://schemas.microsoft.com/office/drawing/2014/main" id="{A75D698C-F27A-2934-83A2-9074947097A0}"/>
-              </a:ext>
-            </a:extLst>
-          </p:cNvPr>
-          <p:cNvSpPr txBox="1"/>
-          <p:nvPr/>
-        </p:nvSpPr>
-        <p:spPr>
-          <a:xfrm>
-            <a:off x="68514" y="956681"/>
-            <a:ext cx="729802" cy="369332"/>
-          </a:xfrm>
-          <a:prstGeom prst="rect">
-            <a:avLst/>
-          </a:prstGeom>
-          <a:noFill/>
-        </p:spPr>
-        <p:txBody>
-          <a:bodyPr wrap="square" rtlCol="0" anchor="ctr">
-            <a:spAutoFit/>
-          </a:bodyPr>
-          <a:lstStyle/>
-          <a:p>
-            <a:pPr algn="ctr"/>
-            <a:r>
-              <a:rPr lang="de-DE" sz="600" dirty="0">
-                <a:latin typeface="CMU Serif" panose="02000603000000000000" pitchFamily="2" charset="0"/>
-                <a:ea typeface="CMU Serif" panose="02000603000000000000" pitchFamily="2" charset="0"/>
-                <a:cs typeface="CMU Serif" panose="02000603000000000000" pitchFamily="2" charset="0"/>
-              </a:rPr>
-              <a:t>Nullauftriebs-Richtung des Flügels</a:t>
-            </a:r>
-            <a:endParaRPr lang="de-DE" sz="600" baseline="-25000" dirty="0">
-              <a:latin typeface="CMU Serif" panose="02000603000000000000" pitchFamily="2" charset="0"/>
-              <a:ea typeface="CMU Serif" panose="02000603000000000000" pitchFamily="2" charset="0"/>
-              <a:cs typeface="CMU Serif" panose="02000603000000000000" pitchFamily="2" charset="0"/>
-            </a:endParaRPr>
-          </a:p>
-        </p:txBody>
-      </p:sp>
-      <p:sp>
-        <p:nvSpPr>
-          <p:cNvPr id="134" name="Bogen 133">
-            <a:extLst>
-              <a:ext uri="{FF2B5EF4-FFF2-40B4-BE49-F238E27FC236}">
-                <a16:creationId xmlns:a16="http://schemas.microsoft.com/office/drawing/2014/main" id="{BE9F03B0-0704-9B5E-9ABF-8923C8E965A3}"/>
-              </a:ext>
-            </a:extLst>
-          </p:cNvPr>
-          <p:cNvSpPr/>
-          <p:nvPr/>
-        </p:nvSpPr>
-        <p:spPr>
-          <a:xfrm>
-            <a:off x="758863" y="1522705"/>
-            <a:ext cx="212764" cy="212764"/>
-          </a:xfrm>
-          <a:prstGeom prst="arc">
-            <a:avLst>
-              <a:gd name="adj1" fmla="val 2589229"/>
-              <a:gd name="adj2" fmla="val 21020068"/>
-            </a:avLst>
-          </a:prstGeom>
-          <a:ln w="15875" cap="rnd">
-            <a:solidFill>
-              <a:schemeClr val="accent6"/>
-            </a:solidFill>
-            <a:round/>
-            <a:headEnd type="none"/>
-            <a:tailEnd type="triangle"/>
-          </a:ln>
-        </p:spPr>
-        <p:style>
-          <a:lnRef idx="2">
-            <a:schemeClr val="accent1"/>
-          </a:lnRef>
-          <a:fillRef idx="0">
-            <a:schemeClr val="accent1"/>
-          </a:fillRef>
-          <a:effectRef idx="1">
-            <a:schemeClr val="accent1"/>
-          </a:effectRef>
-          <a:fontRef idx="minor">
-            <a:schemeClr val="tx1"/>
-          </a:fontRef>
-        </p:style>
-        <p:txBody>
-          <a:bodyPr rtlCol="0" anchor="ctr"/>
-          <a:lstStyle/>
-          <a:p>
-            <a:pPr algn="ctr"/>
-            <a:endParaRPr lang="de-DE" sz="800"/>
-          </a:p>
-        </p:txBody>
-      </p:sp>
-      <p:sp>
-        <p:nvSpPr>
-          <p:cNvPr id="135" name="Textfeld 134">
-            <a:extLst>
-              <a:ext uri="{FF2B5EF4-FFF2-40B4-BE49-F238E27FC236}">
-                <a16:creationId xmlns:a16="http://schemas.microsoft.com/office/drawing/2014/main" id="{CF99DE8E-DF97-1670-097E-2146FE95E0C2}"/>
-              </a:ext>
-            </a:extLst>
-          </p:cNvPr>
-          <p:cNvSpPr txBox="1"/>
-          <p:nvPr/>
-        </p:nvSpPr>
-        <p:spPr>
-          <a:xfrm>
-            <a:off x="752032" y="1329418"/>
-            <a:ext cx="450936" cy="215444"/>
-          </a:xfrm>
-          <a:prstGeom prst="rect">
-            <a:avLst/>
-          </a:prstGeom>
-          <a:noFill/>
-        </p:spPr>
-        <p:txBody>
-          <a:bodyPr wrap="square" rtlCol="0" anchor="ctr">
-            <a:spAutoFit/>
-          </a:bodyPr>
-          <a:lstStyle/>
-          <a:p>
-            <a:pPr algn="ctr"/>
-            <a:r>
-              <a:rPr lang="de-DE" sz="800" i="1" dirty="0" err="1">
-                <a:solidFill>
-                  <a:schemeClr val="accent6"/>
-                </a:solidFill>
-                <a:latin typeface="CMU Serif" panose="02000603000000000000" pitchFamily="2" charset="0"/>
-                <a:ea typeface="CMU Serif" panose="02000603000000000000" pitchFamily="2" charset="0"/>
-                <a:cs typeface="CMU Serif" panose="02000603000000000000" pitchFamily="2" charset="0"/>
-              </a:rPr>
-              <a:t>M</a:t>
-            </a:r>
-            <a:r>
-              <a:rPr lang="de-DE" sz="800" baseline="-25000" dirty="0" err="1">
-                <a:solidFill>
-                  <a:schemeClr val="accent6"/>
-                </a:solidFill>
-                <a:latin typeface="CMU Serif" panose="02000603000000000000" pitchFamily="2" charset="0"/>
-                <a:ea typeface="CMU Serif" panose="02000603000000000000" pitchFamily="2" charset="0"/>
-                <a:cs typeface="CMU Serif" panose="02000603000000000000" pitchFamily="2" charset="0"/>
-              </a:rPr>
-              <a:t>oF</a:t>
-            </a:r>
-            <a:endParaRPr lang="de-DE" sz="800" baseline="-25000" dirty="0">
-              <a:solidFill>
-                <a:schemeClr val="accent6"/>
-              </a:solidFill>
-              <a:latin typeface="CMU Serif" panose="02000603000000000000" pitchFamily="2" charset="0"/>
-              <a:ea typeface="CMU Serif" panose="02000603000000000000" pitchFamily="2" charset="0"/>
-              <a:cs typeface="CMU Serif" panose="02000603000000000000" pitchFamily="2" charset="0"/>
-            </a:endParaRPr>
-          </a:p>
-        </p:txBody>
-      </p:sp>
-      <p:sp>
-        <p:nvSpPr>
-          <p:cNvPr id="138" name="Bogen 137">
-            <a:extLst>
-              <a:ext uri="{FF2B5EF4-FFF2-40B4-BE49-F238E27FC236}">
-                <a16:creationId xmlns:a16="http://schemas.microsoft.com/office/drawing/2014/main" id="{DCF576A8-9905-70C9-A622-45A180DEB3FC}"/>
-              </a:ext>
-            </a:extLst>
-          </p:cNvPr>
-          <p:cNvSpPr/>
-          <p:nvPr/>
-        </p:nvSpPr>
-        <p:spPr>
-          <a:xfrm>
-            <a:off x="1658012" y="1882967"/>
-            <a:ext cx="265230" cy="265230"/>
-          </a:xfrm>
-          <a:prstGeom prst="arc">
-            <a:avLst>
-              <a:gd name="adj1" fmla="val 7249083"/>
-              <a:gd name="adj2" fmla="val 4437620"/>
-            </a:avLst>
-          </a:prstGeom>
-          <a:ln w="15875" cap="rnd">
-            <a:solidFill>
-              <a:schemeClr val="accent6"/>
-            </a:solidFill>
-            <a:round/>
-            <a:headEnd type="none"/>
-            <a:tailEnd type="triangle"/>
-          </a:ln>
-        </p:spPr>
-        <p:style>
-          <a:lnRef idx="2">
-            <a:schemeClr val="accent1"/>
-          </a:lnRef>
-          <a:fillRef idx="0">
-            <a:schemeClr val="accent1"/>
-          </a:fillRef>
-          <a:effectRef idx="1">
-            <a:schemeClr val="accent1"/>
-          </a:effectRef>
-          <a:fontRef idx="minor">
-            <a:schemeClr val="tx1"/>
-          </a:fontRef>
-        </p:style>
-        <p:txBody>
-          <a:bodyPr rtlCol="0" anchor="ctr"/>
-          <a:lstStyle/>
-          <a:p>
-            <a:pPr algn="ctr"/>
-            <a:endParaRPr lang="de-DE" sz="800"/>
-          </a:p>
-        </p:txBody>
-      </p:sp>
-      <p:sp>
-        <p:nvSpPr>
-          <p:cNvPr id="139" name="Textfeld 138">
-            <a:extLst>
-              <a:ext uri="{FF2B5EF4-FFF2-40B4-BE49-F238E27FC236}">
-                <a16:creationId xmlns:a16="http://schemas.microsoft.com/office/drawing/2014/main" id="{8E9B8731-BF11-964C-13EF-28DD7DE1E228}"/>
-              </a:ext>
-            </a:extLst>
-          </p:cNvPr>
-          <p:cNvSpPr txBox="1"/>
-          <p:nvPr/>
-        </p:nvSpPr>
-        <p:spPr>
-          <a:xfrm>
-            <a:off x="1619274" y="1898339"/>
-            <a:ext cx="340562" cy="215444"/>
-          </a:xfrm>
-          <a:prstGeom prst="rect">
-            <a:avLst/>
-          </a:prstGeom>
-          <a:noFill/>
-        </p:spPr>
-        <p:txBody>
-          <a:bodyPr wrap="square" rtlCol="0" anchor="ctr">
-            <a:spAutoFit/>
-          </a:bodyPr>
-          <a:lstStyle/>
-          <a:p>
-            <a:pPr algn="ctr"/>
-            <a:r>
-              <a:rPr lang="de-DE" sz="800" i="1" dirty="0">
-                <a:solidFill>
-                  <a:schemeClr val="accent6"/>
-                </a:solidFill>
-                <a:latin typeface="CMU Serif" panose="02000603000000000000" pitchFamily="2" charset="0"/>
-                <a:ea typeface="CMU Serif" panose="02000603000000000000" pitchFamily="2" charset="0"/>
-                <a:cs typeface="CMU Serif" panose="02000603000000000000" pitchFamily="2" charset="0"/>
-              </a:rPr>
-              <a:t>M</a:t>
-            </a:r>
-            <a:r>
-              <a:rPr lang="de-DE" sz="800" baseline="-25000" dirty="0">
-                <a:solidFill>
-                  <a:schemeClr val="accent6"/>
-                </a:solidFill>
-                <a:latin typeface="CMU Serif" panose="02000603000000000000" pitchFamily="2" charset="0"/>
-                <a:ea typeface="CMU Serif" panose="02000603000000000000" pitchFamily="2" charset="0"/>
-                <a:cs typeface="CMU Serif" panose="02000603000000000000" pitchFamily="2" charset="0"/>
-              </a:rPr>
-              <a:t>R</a:t>
-            </a:r>
-          </a:p>
-        </p:txBody>
-      </p:sp>
-      <p:sp>
-        <p:nvSpPr>
-          <p:cNvPr id="140" name="Bogen 139">
-            <a:extLst>
-              <a:ext uri="{FF2B5EF4-FFF2-40B4-BE49-F238E27FC236}">
-                <a16:creationId xmlns:a16="http://schemas.microsoft.com/office/drawing/2014/main" id="{ABBC84AB-DFFC-B64F-DE3F-625D8DD1C149}"/>
-              </a:ext>
-            </a:extLst>
-          </p:cNvPr>
-          <p:cNvSpPr/>
-          <p:nvPr/>
-        </p:nvSpPr>
-        <p:spPr>
-          <a:xfrm>
-            <a:off x="2867203" y="1559191"/>
-            <a:ext cx="212764" cy="212764"/>
-          </a:xfrm>
-          <a:prstGeom prst="arc">
-            <a:avLst>
-              <a:gd name="adj1" fmla="val 2112536"/>
-              <a:gd name="adj2" fmla="val 20406014"/>
-            </a:avLst>
-          </a:prstGeom>
-          <a:ln w="15875" cap="rnd">
-            <a:solidFill>
-              <a:schemeClr val="accent6"/>
-            </a:solidFill>
-            <a:round/>
-            <a:headEnd type="none"/>
-            <a:tailEnd type="triangle"/>
-          </a:ln>
-        </p:spPr>
-        <p:style>
-          <a:lnRef idx="2">
-            <a:schemeClr val="accent1"/>
-          </a:lnRef>
-          <a:fillRef idx="0">
-            <a:schemeClr val="accent1"/>
-          </a:fillRef>
-          <a:effectRef idx="1">
-            <a:schemeClr val="accent1"/>
-          </a:effectRef>
-          <a:fontRef idx="minor">
-            <a:schemeClr val="tx1"/>
-          </a:fontRef>
-        </p:style>
-        <p:txBody>
-          <a:bodyPr rtlCol="0" anchor="ctr"/>
-          <a:lstStyle/>
-          <a:p>
-            <a:pPr algn="ctr"/>
-            <a:endParaRPr lang="de-DE" sz="800"/>
-          </a:p>
-        </p:txBody>
-      </p:sp>
-      <p:sp>
-        <p:nvSpPr>
-          <p:cNvPr id="141" name="Textfeld 140">
-            <a:extLst>
-              <a:ext uri="{FF2B5EF4-FFF2-40B4-BE49-F238E27FC236}">
-                <a16:creationId xmlns:a16="http://schemas.microsoft.com/office/drawing/2014/main" id="{AFA254EE-5F0E-7AC5-AD20-8E96D818CFA2}"/>
-              </a:ext>
-            </a:extLst>
-          </p:cNvPr>
-          <p:cNvSpPr txBox="1"/>
-          <p:nvPr/>
-        </p:nvSpPr>
-        <p:spPr>
-          <a:xfrm>
-            <a:off x="2898283" y="1381454"/>
-            <a:ext cx="450936" cy="215444"/>
-          </a:xfrm>
-          <a:prstGeom prst="rect">
-            <a:avLst/>
-          </a:prstGeom>
-          <a:noFill/>
-        </p:spPr>
-        <p:txBody>
-          <a:bodyPr wrap="square" rtlCol="0" anchor="ctr">
-            <a:spAutoFit/>
-          </a:bodyPr>
-          <a:lstStyle/>
-          <a:p>
-            <a:pPr algn="ctr"/>
-            <a:r>
-              <a:rPr lang="de-DE" sz="800" i="1" dirty="0" err="1">
-                <a:solidFill>
-                  <a:schemeClr val="accent6"/>
-                </a:solidFill>
-                <a:latin typeface="CMU Serif" panose="02000603000000000000" pitchFamily="2" charset="0"/>
-                <a:ea typeface="CMU Serif" panose="02000603000000000000" pitchFamily="2" charset="0"/>
-                <a:cs typeface="CMU Serif" panose="02000603000000000000" pitchFamily="2" charset="0"/>
-              </a:rPr>
-              <a:t>M</a:t>
-            </a:r>
-            <a:r>
-              <a:rPr lang="de-DE" sz="800" baseline="-25000" dirty="0" err="1">
-                <a:solidFill>
-                  <a:schemeClr val="accent6"/>
-                </a:solidFill>
-                <a:latin typeface="CMU Serif" panose="02000603000000000000" pitchFamily="2" charset="0"/>
-                <a:ea typeface="CMU Serif" panose="02000603000000000000" pitchFamily="2" charset="0"/>
-                <a:cs typeface="CMU Serif" panose="02000603000000000000" pitchFamily="2" charset="0"/>
-              </a:rPr>
-              <a:t>oH</a:t>
-            </a:r>
-            <a:endParaRPr lang="de-DE" sz="800" baseline="-25000" dirty="0">
-              <a:solidFill>
-                <a:schemeClr val="accent6"/>
-              </a:solidFill>
-              <a:latin typeface="CMU Serif" panose="02000603000000000000" pitchFamily="2" charset="0"/>
-              <a:ea typeface="CMU Serif" panose="02000603000000000000" pitchFamily="2" charset="0"/>
-              <a:cs typeface="CMU Serif" panose="02000603000000000000" pitchFamily="2" charset="0"/>
-            </a:endParaRPr>
-          </a:p>
-        </p:txBody>
-      </p:sp>
-      <p:cxnSp>
-        <p:nvCxnSpPr>
-          <p:cNvPr id="142" name="Gerade Verbindung mit Pfeil 141">
-            <a:extLst>
-              <a:ext uri="{FF2B5EF4-FFF2-40B4-BE49-F238E27FC236}">
-                <a16:creationId xmlns:a16="http://schemas.microsoft.com/office/drawing/2014/main" id="{13745FE0-FDA7-B7A1-D318-B66EE522ED08}"/>
-              </a:ext>
-            </a:extLst>
-          </p:cNvPr>
-          <p:cNvCxnSpPr>
-            <a:cxnSpLocks/>
-          </p:cNvCxnSpPr>
-          <p:nvPr/>
-        </p:nvCxnSpPr>
-        <p:spPr>
-          <a:xfrm>
-            <a:off x="2982975" y="1667492"/>
-            <a:ext cx="241093" cy="0"/>
-          </a:xfrm>
-          <a:prstGeom prst="straightConnector1">
-            <a:avLst/>
-          </a:prstGeom>
-          <a:ln w="15875" cap="rnd">
-            <a:solidFill>
-              <a:schemeClr val="accent2">
-                <a:lumMod val="75000"/>
-              </a:schemeClr>
-            </a:solidFill>
-            <a:round/>
-            <a:headEnd type="none" w="sm" len="sm"/>
-            <a:tailEnd type="triangle" w="med" len="med"/>
-          </a:ln>
-        </p:spPr>
-        <p:style>
-          <a:lnRef idx="2">
-            <a:schemeClr val="accent1"/>
-          </a:lnRef>
-          <a:fillRef idx="0">
-            <a:schemeClr val="accent1"/>
-          </a:fillRef>
-          <a:effectRef idx="1">
-            <a:schemeClr val="accent1"/>
-          </a:effectRef>
-          <a:fontRef idx="minor">
-            <a:schemeClr val="tx1"/>
-          </a:fontRef>
-        </p:style>
-      </p:cxnSp>
-      <p:sp>
-        <p:nvSpPr>
-          <p:cNvPr id="143" name="Textfeld 142">
-            <a:extLst>
-              <a:ext uri="{FF2B5EF4-FFF2-40B4-BE49-F238E27FC236}">
-                <a16:creationId xmlns:a16="http://schemas.microsoft.com/office/drawing/2014/main" id="{A7E9AF6F-E2E0-62F8-8E0D-76AB8E020745}"/>
-              </a:ext>
-            </a:extLst>
-          </p:cNvPr>
-          <p:cNvSpPr txBox="1"/>
-          <p:nvPr/>
-        </p:nvSpPr>
-        <p:spPr>
-          <a:xfrm>
-            <a:off x="3025941" y="1658278"/>
-            <a:ext cx="450936" cy="215444"/>
-          </a:xfrm>
-          <a:prstGeom prst="rect">
-            <a:avLst/>
-          </a:prstGeom>
-          <a:noFill/>
-        </p:spPr>
-        <p:txBody>
-          <a:bodyPr wrap="square" rtlCol="0" anchor="ctr">
-            <a:spAutoFit/>
-          </a:bodyPr>
-          <a:lstStyle/>
-          <a:p>
-            <a:pPr algn="ctr"/>
-            <a:r>
-              <a:rPr lang="de-DE" sz="800" i="1" dirty="0">
-                <a:solidFill>
-                  <a:schemeClr val="accent2">
-                    <a:lumMod val="75000"/>
-                  </a:schemeClr>
-                </a:solidFill>
-                <a:latin typeface="CMU Serif" panose="02000603000000000000" pitchFamily="2" charset="0"/>
-                <a:ea typeface="CMU Serif" panose="02000603000000000000" pitchFamily="2" charset="0"/>
-                <a:cs typeface="CMU Serif" panose="02000603000000000000" pitchFamily="2" charset="0"/>
-              </a:rPr>
-              <a:t>W</a:t>
-            </a:r>
-            <a:r>
-              <a:rPr lang="de-DE" sz="800" baseline="-25000" dirty="0">
-                <a:solidFill>
-                  <a:schemeClr val="accent2">
-                    <a:lumMod val="75000"/>
-                  </a:schemeClr>
-                </a:solidFill>
-                <a:latin typeface="CMU Serif" panose="02000603000000000000" pitchFamily="2" charset="0"/>
-                <a:ea typeface="CMU Serif" panose="02000603000000000000" pitchFamily="2" charset="0"/>
-                <a:cs typeface="CMU Serif" panose="02000603000000000000" pitchFamily="2" charset="0"/>
-              </a:rPr>
-              <a:t>H</a:t>
-            </a:r>
-          </a:p>
-        </p:txBody>
-      </p:sp>
-      <p:sp>
-        <p:nvSpPr>
-          <p:cNvPr id="38" name="Ellipse 37">
-            <a:extLst>
-              <a:ext uri="{FF2B5EF4-FFF2-40B4-BE49-F238E27FC236}">
-                <a16:creationId xmlns:a16="http://schemas.microsoft.com/office/drawing/2014/main" id="{613861E4-B950-47CC-E1BE-283841B586BB}"/>
-              </a:ext>
-            </a:extLst>
-          </p:cNvPr>
-          <p:cNvSpPr/>
-          <p:nvPr/>
-        </p:nvSpPr>
-        <p:spPr>
-          <a:xfrm>
-            <a:off x="2954907" y="1649094"/>
-            <a:ext cx="36000" cy="36000"/>
-          </a:xfrm>
-          <a:prstGeom prst="ellipse">
-            <a:avLst/>
-          </a:prstGeom>
-          <a:solidFill>
-            <a:schemeClr val="tx1"/>
-          </a:solidFill>
-          <a:ln>
-            <a:noFill/>
-          </a:ln>
-        </p:spPr>
-        <p:style>
-          <a:lnRef idx="2">
-            <a:schemeClr val="accent1">
-              <a:shade val="15000"/>
-            </a:schemeClr>
-          </a:lnRef>
-          <a:fillRef idx="1">
-            <a:schemeClr val="accent1"/>
-          </a:fillRef>
-          <a:effectRef idx="0">
-            <a:schemeClr val="accent1"/>
-          </a:effectRef>
-          <a:fontRef idx="minor">
-            <a:schemeClr val="lt1"/>
-          </a:fontRef>
-        </p:style>
-        <p:txBody>
-          <a:bodyPr rtlCol="0" anchor="ctr"/>
-          <a:lstStyle/>
-          <a:p>
-            <a:pPr algn="ctr"/>
-            <a:endParaRPr lang="de-DE" sz="800" dirty="0"/>
-          </a:p>
-        </p:txBody>
-      </p:sp>
-      <p:sp>
-        <p:nvSpPr>
-          <p:cNvPr id="145" name="Textfeld 144">
-            <a:extLst>
-              <a:ext uri="{FF2B5EF4-FFF2-40B4-BE49-F238E27FC236}">
-                <a16:creationId xmlns:a16="http://schemas.microsoft.com/office/drawing/2014/main" id="{E5D7AFCC-EB1F-EEB4-C5F3-A1F41F0F98E3}"/>
-              </a:ext>
-            </a:extLst>
-          </p:cNvPr>
-          <p:cNvSpPr txBox="1"/>
-          <p:nvPr/>
-        </p:nvSpPr>
-        <p:spPr>
-          <a:xfrm>
-            <a:off x="2059427" y="1955777"/>
-            <a:ext cx="771646" cy="369332"/>
-          </a:xfrm>
-          <a:prstGeom prst="rect">
-            <a:avLst/>
-          </a:prstGeom>
-          <a:noFill/>
-        </p:spPr>
-        <p:txBody>
-          <a:bodyPr wrap="square" rtlCol="0" anchor="ctr">
-            <a:spAutoFit/>
-          </a:bodyPr>
-          <a:lstStyle/>
-          <a:p>
-            <a:pPr algn="ctr"/>
-            <a:r>
-              <a:rPr lang="de-DE" sz="600" dirty="0">
-                <a:latin typeface="CMU Serif" panose="02000603000000000000" pitchFamily="2" charset="0"/>
-                <a:ea typeface="CMU Serif" panose="02000603000000000000" pitchFamily="2" charset="0"/>
-                <a:cs typeface="CMU Serif" panose="02000603000000000000" pitchFamily="2" charset="0"/>
-              </a:rPr>
-              <a:t>Nullauftriebs-Richtung des Flügels</a:t>
-            </a:r>
-            <a:endParaRPr lang="de-DE" sz="600" baseline="-25000" dirty="0">
-              <a:latin typeface="CMU Serif" panose="02000603000000000000" pitchFamily="2" charset="0"/>
-              <a:ea typeface="CMU Serif" panose="02000603000000000000" pitchFamily="2" charset="0"/>
-              <a:cs typeface="CMU Serif" panose="02000603000000000000" pitchFamily="2" charset="0"/>
-            </a:endParaRPr>
-          </a:p>
-        </p:txBody>
-      </p:sp>
-      <p:cxnSp>
-        <p:nvCxnSpPr>
-          <p:cNvPr id="148" name="Gerader Verbinder 147">
-            <a:extLst>
-              <a:ext uri="{FF2B5EF4-FFF2-40B4-BE49-F238E27FC236}">
-                <a16:creationId xmlns:a16="http://schemas.microsoft.com/office/drawing/2014/main" id="{710A2D93-ED39-7364-E9E6-2973F3B7668D}"/>
-              </a:ext>
-            </a:extLst>
-          </p:cNvPr>
-          <p:cNvCxnSpPr>
-            <a:cxnSpLocks/>
-          </p:cNvCxnSpPr>
-          <p:nvPr/>
-        </p:nvCxnSpPr>
-        <p:spPr>
-          <a:xfrm flipH="1">
-            <a:off x="2622538" y="1641568"/>
-            <a:ext cx="100576" cy="339606"/>
-          </a:xfrm>
-          <a:prstGeom prst="line">
-            <a:avLst/>
-          </a:prstGeom>
-          <a:ln w="6350" cap="rnd">
-            <a:solidFill>
-              <a:schemeClr val="tx1"/>
-            </a:solidFill>
-            <a:round/>
-          </a:ln>
-        </p:spPr>
-        <p:style>
-          <a:lnRef idx="2">
-            <a:schemeClr val="accent1"/>
-          </a:lnRef>
-          <a:fillRef idx="0">
-            <a:schemeClr val="accent1"/>
-          </a:fillRef>
-          <a:effectRef idx="1">
-            <a:schemeClr val="accent1"/>
-          </a:effectRef>
-          <a:fontRef idx="minor">
-            <a:schemeClr val="tx1"/>
-          </a:fontRef>
-        </p:style>
-      </p:cxnSp>
-      <p:cxnSp>
-        <p:nvCxnSpPr>
-          <p:cNvPr id="153" name="Gerader Verbinder 152">
-            <a:extLst>
-              <a:ext uri="{FF2B5EF4-FFF2-40B4-BE49-F238E27FC236}">
-                <a16:creationId xmlns:a16="http://schemas.microsoft.com/office/drawing/2014/main" id="{69953BBA-FCB5-46F4-B5F1-4CB7E8CE2312}"/>
-              </a:ext>
-            </a:extLst>
-          </p:cNvPr>
-          <p:cNvCxnSpPr>
-            <a:cxnSpLocks/>
-          </p:cNvCxnSpPr>
-          <p:nvPr/>
-        </p:nvCxnSpPr>
-        <p:spPr>
-          <a:xfrm>
-            <a:off x="2829315" y="1692690"/>
-            <a:ext cx="0" cy="658367"/>
-          </a:xfrm>
-          <a:prstGeom prst="line">
-            <a:avLst/>
-          </a:prstGeom>
-          <a:ln w="6350" cap="rnd">
-            <a:solidFill>
-              <a:schemeClr val="tx1"/>
-            </a:solidFill>
-            <a:round/>
-          </a:ln>
-        </p:spPr>
-        <p:style>
-          <a:lnRef idx="2">
-            <a:schemeClr val="accent1"/>
-          </a:lnRef>
-          <a:fillRef idx="0">
-            <a:schemeClr val="accent1"/>
-          </a:fillRef>
-          <a:effectRef idx="1">
-            <a:schemeClr val="accent1"/>
-          </a:effectRef>
-          <a:fontRef idx="minor">
-            <a:schemeClr val="tx1"/>
-          </a:fontRef>
-        </p:style>
-      </p:cxnSp>
-      <p:cxnSp>
-        <p:nvCxnSpPr>
-          <p:cNvPr id="155" name="Gerader Verbinder 154">
-            <a:extLst>
-              <a:ext uri="{FF2B5EF4-FFF2-40B4-BE49-F238E27FC236}">
-                <a16:creationId xmlns:a16="http://schemas.microsoft.com/office/drawing/2014/main" id="{67FCF6A5-923B-F28E-0260-D1B296CEE23C}"/>
-              </a:ext>
-            </a:extLst>
-          </p:cNvPr>
-          <p:cNvCxnSpPr>
-            <a:cxnSpLocks/>
-          </p:cNvCxnSpPr>
-          <p:nvPr/>
-        </p:nvCxnSpPr>
-        <p:spPr>
-          <a:xfrm flipH="1">
-            <a:off x="2973325" y="2298576"/>
-            <a:ext cx="274274" cy="0"/>
-          </a:xfrm>
-          <a:prstGeom prst="line">
-            <a:avLst/>
-          </a:prstGeom>
-          <a:ln w="6350" cap="rnd">
-            <a:solidFill>
-              <a:schemeClr val="tx1"/>
-            </a:solidFill>
-            <a:round/>
-            <a:headEnd type="none" w="sm" len="sm"/>
-            <a:tailEnd type="triangle" w="sm" len="sm"/>
-          </a:ln>
-        </p:spPr>
-        <p:style>
-          <a:lnRef idx="2">
-            <a:schemeClr val="accent1"/>
-          </a:lnRef>
-          <a:fillRef idx="0">
-            <a:schemeClr val="accent1"/>
-          </a:fillRef>
-          <a:effectRef idx="1">
-            <a:schemeClr val="accent1"/>
-          </a:effectRef>
-          <a:fontRef idx="minor">
-            <a:schemeClr val="tx1"/>
-          </a:fontRef>
-        </p:style>
-      </p:cxnSp>
-      <p:cxnSp>
-        <p:nvCxnSpPr>
-          <p:cNvPr id="158" name="Gerader Verbinder 157">
-            <a:extLst>
-              <a:ext uri="{FF2B5EF4-FFF2-40B4-BE49-F238E27FC236}">
-                <a16:creationId xmlns:a16="http://schemas.microsoft.com/office/drawing/2014/main" id="{14B59B77-2D7E-BB41-6961-5CC7A9D15F4B}"/>
-              </a:ext>
-            </a:extLst>
-          </p:cNvPr>
-          <p:cNvCxnSpPr>
-            <a:cxnSpLocks/>
-          </p:cNvCxnSpPr>
-          <p:nvPr/>
-        </p:nvCxnSpPr>
-        <p:spPr>
-          <a:xfrm>
-            <a:off x="2725721" y="2298576"/>
-            <a:ext cx="103594" cy="0"/>
-          </a:xfrm>
-          <a:prstGeom prst="line">
-            <a:avLst/>
-          </a:prstGeom>
-          <a:ln w="6350" cap="rnd">
-            <a:solidFill>
-              <a:schemeClr val="tx1"/>
-            </a:solidFill>
-            <a:round/>
-            <a:headEnd type="none" w="sm" len="sm"/>
-            <a:tailEnd type="triangle" w="sm" len="sm"/>
-          </a:ln>
-        </p:spPr>
-        <p:style>
-          <a:lnRef idx="2">
-            <a:schemeClr val="accent1"/>
-          </a:lnRef>
-          <a:fillRef idx="0">
-            <a:schemeClr val="accent1"/>
-          </a:fillRef>
-          <a:effectRef idx="1">
-            <a:schemeClr val="accent1"/>
-          </a:effectRef>
-          <a:fontRef idx="minor">
-            <a:schemeClr val="tx1"/>
-          </a:fontRef>
-        </p:style>
-      </p:cxnSp>
-      <p:cxnSp>
-        <p:nvCxnSpPr>
-          <p:cNvPr id="160" name="Gerader Verbinder 159">
-            <a:extLst>
-              <a:ext uri="{FF2B5EF4-FFF2-40B4-BE49-F238E27FC236}">
-                <a16:creationId xmlns:a16="http://schemas.microsoft.com/office/drawing/2014/main" id="{E8CBAB2C-F766-8D2B-DF44-CFA7A073126A}"/>
-              </a:ext>
-            </a:extLst>
-          </p:cNvPr>
-          <p:cNvCxnSpPr>
-            <a:cxnSpLocks/>
-          </p:cNvCxnSpPr>
-          <p:nvPr/>
-        </p:nvCxnSpPr>
-        <p:spPr>
-          <a:xfrm flipH="1">
-            <a:off x="2804160" y="2299722"/>
-            <a:ext cx="205740" cy="0"/>
-          </a:xfrm>
-          <a:prstGeom prst="line">
-            <a:avLst/>
-          </a:prstGeom>
-          <a:ln w="6350" cap="rnd">
-            <a:solidFill>
-              <a:schemeClr val="tx1"/>
-            </a:solidFill>
-            <a:round/>
-            <a:headEnd type="none" w="sm" len="sm"/>
-            <a:tailEnd type="none" w="sm" len="sm"/>
-          </a:ln>
-        </p:spPr>
-        <p:style>
-          <a:lnRef idx="2">
-            <a:schemeClr val="accent1"/>
-          </a:lnRef>
-          <a:fillRef idx="0">
-            <a:schemeClr val="accent1"/>
-          </a:fillRef>
-          <a:effectRef idx="1">
-            <a:schemeClr val="accent1"/>
-          </a:effectRef>
-          <a:fontRef idx="minor">
-            <a:schemeClr val="tx1"/>
-          </a:fontRef>
-        </p:style>
-      </p:cxnSp>
-      <p:sp>
-        <p:nvSpPr>
-          <p:cNvPr id="164" name="Textfeld 163">
-            <a:extLst>
-              <a:ext uri="{FF2B5EF4-FFF2-40B4-BE49-F238E27FC236}">
-                <a16:creationId xmlns:a16="http://schemas.microsoft.com/office/drawing/2014/main" id="{3D3947FF-4367-4B6D-F0A1-21B783CDAC4B}"/>
-              </a:ext>
-            </a:extLst>
-          </p:cNvPr>
-          <p:cNvSpPr txBox="1"/>
-          <p:nvPr/>
-        </p:nvSpPr>
-        <p:spPr>
-          <a:xfrm>
-            <a:off x="2925523" y="2107356"/>
-            <a:ext cx="435125" cy="215444"/>
-          </a:xfrm>
-          <a:prstGeom prst="rect">
-            <a:avLst/>
-          </a:prstGeom>
-          <a:noFill/>
-        </p:spPr>
-        <p:txBody>
-          <a:bodyPr wrap="square" rtlCol="0" anchor="ctr">
-            <a:spAutoFit/>
-          </a:bodyPr>
-          <a:lstStyle/>
-          <a:p>
-            <a:pPr algn="ctr"/>
-            <a:r>
-              <a:rPr lang="de-DE" sz="800" i="1" dirty="0">
-                <a:latin typeface="CMU Serif" panose="02000603000000000000" pitchFamily="2" charset="0"/>
-                <a:ea typeface="CMU Serif" panose="02000603000000000000" pitchFamily="2" charset="0"/>
-                <a:cs typeface="CMU Serif" panose="02000603000000000000" pitchFamily="2" charset="0"/>
-              </a:rPr>
-              <a:t>x</a:t>
-            </a:r>
-            <a:r>
-              <a:rPr lang="de-DE" sz="200" i="1" dirty="0">
-                <a:latin typeface="CMU Serif" panose="02000603000000000000" pitchFamily="2" charset="0"/>
-                <a:ea typeface="CMU Serif" panose="02000603000000000000" pitchFamily="2" charset="0"/>
-                <a:cs typeface="CMU Serif" panose="02000603000000000000" pitchFamily="2" charset="0"/>
-              </a:rPr>
-              <a:t> </a:t>
-            </a:r>
-            <a:r>
-              <a:rPr lang="de-DE" sz="800" baseline="-25000" dirty="0">
-                <a:latin typeface="CMU Serif" panose="02000603000000000000" pitchFamily="2" charset="0"/>
-                <a:ea typeface="CMU Serif" panose="02000603000000000000" pitchFamily="2" charset="0"/>
-                <a:cs typeface="CMU Serif" panose="02000603000000000000" pitchFamily="2" charset="0"/>
-              </a:rPr>
-              <a:t>NH</a:t>
-            </a:r>
-          </a:p>
-        </p:txBody>
-      </p:sp>
-    </p:spTree>
-    <p:extLst>
-      <p:ext uri="{BB962C8B-B14F-4D97-AF65-F5344CB8AC3E}">
-        <p14:creationId xmlns:p14="http://schemas.microsoft.com/office/powerpoint/2010/main" val="3299783584"/>
       </p:ext>
     </p:extLst>
   </p:cSld>
